--- a/software/images/Infographics.pptx
+++ b/software/images/Infographics.pptx
@@ -13,7 +13,8 @@
     <p:sldId id="262" r:id="rId7"/>
     <p:sldId id="263" r:id="rId8"/>
     <p:sldId id="264" r:id="rId9"/>
-    <p:sldId id="260" r:id="rId10"/>
+    <p:sldId id="266" r:id="rId10"/>
+    <p:sldId id="260" r:id="rId11"/>
   </p:sldIdLst>
   <p:sldSz cx="12192000" cy="6858000"/>
   <p:notesSz cx="6858000" cy="9144000"/>
@@ -123,6 +124,30 @@
 <file path=ppt/changesInfos/changesInfo1.xml><?xml version="1.0" encoding="utf-8"?>
 <pc:chgInfo xmlns:a="http://schemas.openxmlformats.org/drawingml/2006/main" xmlns:r="http://schemas.openxmlformats.org/officeDocument/2006/relationships" xmlns:ac="http://schemas.microsoft.com/office/drawing/2013/main/command" xmlns:pc="http://schemas.microsoft.com/office/powerpoint/2013/main/command">
   <pc:docChgLst>
+    <pc:chgData name="Rachel Bloemer" userId="77b46c2fcbe54245" providerId="LiveId" clId="{A84FB524-E67A-4211-8697-C15450D7CF1C}"/>
+    <pc:docChg chg="modSld">
+      <pc:chgData name="Rachel Bloemer" userId="77b46c2fcbe54245" providerId="LiveId" clId="{A84FB524-E67A-4211-8697-C15450D7CF1C}" dt="2024-07-27T00:14:07.011" v="8" actId="20577"/>
+      <pc:docMkLst>
+        <pc:docMk/>
+      </pc:docMkLst>
+      <pc:sldChg chg="modSp mod">
+        <pc:chgData name="Rachel Bloemer" userId="77b46c2fcbe54245" providerId="LiveId" clId="{A84FB524-E67A-4211-8697-C15450D7CF1C}" dt="2024-07-27T00:14:07.011" v="8" actId="20577"/>
+        <pc:sldMkLst>
+          <pc:docMk/>
+          <pc:sldMk cId="2892489643" sldId="261"/>
+        </pc:sldMkLst>
+        <pc:spChg chg="mod">
+          <ac:chgData name="Rachel Bloemer" userId="77b46c2fcbe54245" providerId="LiveId" clId="{A84FB524-E67A-4211-8697-C15450D7CF1C}" dt="2024-07-27T00:14:07.011" v="8" actId="20577"/>
+          <ac:spMkLst>
+            <pc:docMk/>
+            <pc:sldMk cId="2892489643" sldId="261"/>
+            <ac:spMk id="60" creationId="{00000000-0000-0000-0000-000000000000}"/>
+          </ac:spMkLst>
+        </pc:spChg>
+      </pc:sldChg>
+    </pc:docChg>
+  </pc:docChgLst>
+  <pc:docChgLst>
     <pc:chgData name="Rachel Bloemer" userId="77b46c2fcbe54245" providerId="LiveId" clId="{9A7BBEF4-6F3C-4C64-8E1D-1FD87EBDAF77}"/>
     <pc:docChg chg="modSld">
       <pc:chgData name="Rachel Bloemer" userId="77b46c2fcbe54245" providerId="LiveId" clId="{9A7BBEF4-6F3C-4C64-8E1D-1FD87EBDAF77}" dt="2024-08-08T16:21:40.175" v="7" actId="20577"/>
@@ -149,30 +174,6 @@
             <pc:docMk/>
             <pc:sldMk cId="1849713498" sldId="262"/>
             <ac:spMk id="50" creationId="{00000000-0000-0000-0000-000000000000}"/>
-          </ac:spMkLst>
-        </pc:spChg>
-      </pc:sldChg>
-    </pc:docChg>
-  </pc:docChgLst>
-  <pc:docChgLst>
-    <pc:chgData name="Rachel Bloemer" userId="77b46c2fcbe54245" providerId="LiveId" clId="{A84FB524-E67A-4211-8697-C15450D7CF1C}"/>
-    <pc:docChg chg="modSld">
-      <pc:chgData name="Rachel Bloemer" userId="77b46c2fcbe54245" providerId="LiveId" clId="{A84FB524-E67A-4211-8697-C15450D7CF1C}" dt="2024-07-27T00:14:07.011" v="8" actId="20577"/>
-      <pc:docMkLst>
-        <pc:docMk/>
-      </pc:docMkLst>
-      <pc:sldChg chg="modSp mod">
-        <pc:chgData name="Rachel Bloemer" userId="77b46c2fcbe54245" providerId="LiveId" clId="{A84FB524-E67A-4211-8697-C15450D7CF1C}" dt="2024-07-27T00:14:07.011" v="8" actId="20577"/>
-        <pc:sldMkLst>
-          <pc:docMk/>
-          <pc:sldMk cId="2892489643" sldId="261"/>
-        </pc:sldMkLst>
-        <pc:spChg chg="mod">
-          <ac:chgData name="Rachel Bloemer" userId="77b46c2fcbe54245" providerId="LiveId" clId="{A84FB524-E67A-4211-8697-C15450D7CF1C}" dt="2024-07-27T00:14:07.011" v="8" actId="20577"/>
-          <ac:spMkLst>
-            <pc:docMk/>
-            <pc:sldMk cId="2892489643" sldId="261"/>
-            <ac:spMk id="60" creationId="{00000000-0000-0000-0000-000000000000}"/>
           </ac:spMkLst>
         </pc:spChg>
       </pc:sldChg>
@@ -372,7 +373,7 @@
           <a:p>
             <a:fld id="{E65F16E8-9810-4F67-B618-098E0E399057}" type="datetimeFigureOut">
               <a:rPr lang="en-US" smtClean="0"/>
-              <a:t>1/9/2025</a:t>
+              <a:t>6/15/2026</a:t>
             </a:fld>
             <a:endParaRPr lang="en-US"/>
           </a:p>
@@ -540,7 +541,7 @@
           <a:p>
             <a:fld id="{E65F16E8-9810-4F67-B618-098E0E399057}" type="datetimeFigureOut">
               <a:rPr lang="en-US" smtClean="0"/>
-              <a:t>1/9/2025</a:t>
+              <a:t>6/15/2026</a:t>
             </a:fld>
             <a:endParaRPr lang="en-US"/>
           </a:p>
@@ -718,7 +719,7 @@
           <a:p>
             <a:fld id="{E65F16E8-9810-4F67-B618-098E0E399057}" type="datetimeFigureOut">
               <a:rPr lang="en-US" smtClean="0"/>
-              <a:t>1/9/2025</a:t>
+              <a:t>6/15/2026</a:t>
             </a:fld>
             <a:endParaRPr lang="en-US"/>
           </a:p>
@@ -886,7 +887,7 @@
           <a:p>
             <a:fld id="{E65F16E8-9810-4F67-B618-098E0E399057}" type="datetimeFigureOut">
               <a:rPr lang="en-US" smtClean="0"/>
-              <a:t>1/9/2025</a:t>
+              <a:t>6/15/2026</a:t>
             </a:fld>
             <a:endParaRPr lang="en-US"/>
           </a:p>
@@ -1131,7 +1132,7 @@
           <a:p>
             <a:fld id="{E65F16E8-9810-4F67-B618-098E0E399057}" type="datetimeFigureOut">
               <a:rPr lang="en-US" smtClean="0"/>
-              <a:t>1/9/2025</a:t>
+              <a:t>6/15/2026</a:t>
             </a:fld>
             <a:endParaRPr lang="en-US"/>
           </a:p>
@@ -1360,7 +1361,7 @@
           <a:p>
             <a:fld id="{E65F16E8-9810-4F67-B618-098E0E399057}" type="datetimeFigureOut">
               <a:rPr lang="en-US" smtClean="0"/>
-              <a:t>1/9/2025</a:t>
+              <a:t>6/15/2026</a:t>
             </a:fld>
             <a:endParaRPr lang="en-US"/>
           </a:p>
@@ -1724,7 +1725,7 @@
           <a:p>
             <a:fld id="{E65F16E8-9810-4F67-B618-098E0E399057}" type="datetimeFigureOut">
               <a:rPr lang="en-US" smtClean="0"/>
-              <a:t>1/9/2025</a:t>
+              <a:t>6/15/2026</a:t>
             </a:fld>
             <a:endParaRPr lang="en-US"/>
           </a:p>
@@ -1841,7 +1842,7 @@
           <a:p>
             <a:fld id="{E65F16E8-9810-4F67-B618-098E0E399057}" type="datetimeFigureOut">
               <a:rPr lang="en-US" smtClean="0"/>
-              <a:t>1/9/2025</a:t>
+              <a:t>6/15/2026</a:t>
             </a:fld>
             <a:endParaRPr lang="en-US"/>
           </a:p>
@@ -1936,7 +1937,7 @@
           <a:p>
             <a:fld id="{E65F16E8-9810-4F67-B618-098E0E399057}" type="datetimeFigureOut">
               <a:rPr lang="en-US" smtClean="0"/>
-              <a:t>1/9/2025</a:t>
+              <a:t>6/15/2026</a:t>
             </a:fld>
             <a:endParaRPr lang="en-US"/>
           </a:p>
@@ -2211,7 +2212,7 @@
           <a:p>
             <a:fld id="{E65F16E8-9810-4F67-B618-098E0E399057}" type="datetimeFigureOut">
               <a:rPr lang="en-US" smtClean="0"/>
-              <a:t>1/9/2025</a:t>
+              <a:t>6/15/2026</a:t>
             </a:fld>
             <a:endParaRPr lang="en-US"/>
           </a:p>
@@ -2463,7 +2464,7 @@
           <a:p>
             <a:fld id="{E65F16E8-9810-4F67-B618-098E0E399057}" type="datetimeFigureOut">
               <a:rPr lang="en-US" smtClean="0"/>
-              <a:t>1/9/2025</a:t>
+              <a:t>6/15/2026</a:t>
             </a:fld>
             <a:endParaRPr lang="en-US"/>
           </a:p>
@@ -2674,7 +2675,7 @@
           <a:p>
             <a:fld id="{E65F16E8-9810-4F67-B618-098E0E399057}" type="datetimeFigureOut">
               <a:rPr lang="en-US" smtClean="0"/>
-              <a:t>1/9/2025</a:t>
+              <a:t>6/15/2026</a:t>
             </a:fld>
             <a:endParaRPr lang="en-US"/>
           </a:p>
@@ -6106,6 +6107,2827 @@
 </p:sld>
 </file>
 
+<file path=ppt/slides/slide10.xml><?xml version="1.0" encoding="utf-8"?>
+<p:sld xmlns:a="http://schemas.openxmlformats.org/drawingml/2006/main" xmlns:r="http://schemas.openxmlformats.org/officeDocument/2006/relationships" xmlns:p="http://schemas.openxmlformats.org/presentationml/2006/main">
+  <p:cSld>
+    <p:spTree>
+      <p:nvGrpSpPr>
+        <p:cNvPr id="1" name=""/>
+        <p:cNvGrpSpPr/>
+        <p:nvPr/>
+      </p:nvGrpSpPr>
+      <p:grpSpPr>
+        <a:xfrm>
+          <a:off x="0" y="0"/>
+          <a:ext cx="0" cy="0"/>
+          <a:chOff x="0" y="0"/>
+          <a:chExt cx="0" cy="0"/>
+        </a:xfrm>
+      </p:grpSpPr>
+      <p:sp>
+        <p:nvSpPr>
+          <p:cNvPr id="2" name="Rounded Rectangle 1"/>
+          <p:cNvSpPr/>
+          <p:nvPr/>
+        </p:nvSpPr>
+        <p:spPr>
+          <a:xfrm>
+            <a:off x="4687514" y="1221568"/>
+            <a:ext cx="2502100" cy="4599225"/>
+          </a:xfrm>
+          <a:prstGeom prst="roundRect">
+            <a:avLst>
+              <a:gd name="adj" fmla="val 4232"/>
+            </a:avLst>
+          </a:prstGeom>
+          <a:solidFill>
+            <a:srgbClr val="EFEBE5"/>
+          </a:solidFill>
+          <a:ln w="57150"/>
+        </p:spPr>
+        <p:style>
+          <a:lnRef idx="2">
+            <a:schemeClr val="accent1">
+              <a:shade val="50000"/>
+            </a:schemeClr>
+          </a:lnRef>
+          <a:fillRef idx="1">
+            <a:schemeClr val="accent1"/>
+          </a:fillRef>
+          <a:effectRef idx="0">
+            <a:schemeClr val="accent1"/>
+          </a:effectRef>
+          <a:fontRef idx="minor">
+            <a:schemeClr val="lt1"/>
+          </a:fontRef>
+        </p:style>
+        <p:txBody>
+          <a:bodyPr rtlCol="0" anchor="ctr"/>
+          <a:lstStyle/>
+          <a:p>
+            <a:pPr algn="ctr"/>
+            <a:endParaRPr lang="en-US"/>
+          </a:p>
+        </p:txBody>
+      </p:sp>
+      <p:sp>
+        <p:nvSpPr>
+          <p:cNvPr id="3" name="Isosceles Triangle 2"/>
+          <p:cNvSpPr/>
+          <p:nvPr/>
+        </p:nvSpPr>
+        <p:spPr>
+          <a:xfrm>
+            <a:off x="5272231" y="1277448"/>
+            <a:ext cx="160020" cy="144780"/>
+          </a:xfrm>
+          <a:prstGeom prst="triangle">
+            <a:avLst/>
+          </a:prstGeom>
+          <a:solidFill>
+            <a:schemeClr val="tx1"/>
+          </a:solidFill>
+          <a:ln>
+            <a:solidFill>
+              <a:schemeClr val="tx1"/>
+            </a:solidFill>
+          </a:ln>
+        </p:spPr>
+        <p:style>
+          <a:lnRef idx="2">
+            <a:schemeClr val="accent1">
+              <a:shade val="50000"/>
+            </a:schemeClr>
+          </a:lnRef>
+          <a:fillRef idx="1">
+            <a:schemeClr val="accent1"/>
+          </a:fillRef>
+          <a:effectRef idx="0">
+            <a:schemeClr val="accent1"/>
+          </a:effectRef>
+          <a:fontRef idx="minor">
+            <a:schemeClr val="lt1"/>
+          </a:fontRef>
+        </p:style>
+        <p:txBody>
+          <a:bodyPr rtlCol="0" anchor="ctr"/>
+          <a:lstStyle/>
+          <a:p>
+            <a:pPr algn="ctr"/>
+            <a:endParaRPr lang="en-US" dirty="0"/>
+          </a:p>
+        </p:txBody>
+      </p:sp>
+      <p:sp>
+        <p:nvSpPr>
+          <p:cNvPr id="4" name="Isosceles Triangle 3"/>
+          <p:cNvSpPr/>
+          <p:nvPr/>
+        </p:nvSpPr>
+        <p:spPr>
+          <a:xfrm rot="10800000">
+            <a:off x="6477144" y="1277448"/>
+            <a:ext cx="160020" cy="144780"/>
+          </a:xfrm>
+          <a:prstGeom prst="triangle">
+            <a:avLst/>
+          </a:prstGeom>
+          <a:solidFill>
+            <a:schemeClr val="tx1"/>
+          </a:solidFill>
+          <a:ln>
+            <a:solidFill>
+              <a:schemeClr val="tx1"/>
+            </a:solidFill>
+          </a:ln>
+        </p:spPr>
+        <p:style>
+          <a:lnRef idx="2">
+            <a:schemeClr val="accent1">
+              <a:shade val="50000"/>
+            </a:schemeClr>
+          </a:lnRef>
+          <a:fillRef idx="1">
+            <a:schemeClr val="accent1"/>
+          </a:fillRef>
+          <a:effectRef idx="0">
+            <a:schemeClr val="accent1"/>
+          </a:effectRef>
+          <a:fontRef idx="minor">
+            <a:schemeClr val="lt1"/>
+          </a:fontRef>
+        </p:style>
+        <p:txBody>
+          <a:bodyPr rtlCol="0" anchor="ctr"/>
+          <a:lstStyle/>
+          <a:p>
+            <a:pPr algn="ctr"/>
+            <a:endParaRPr lang="en-US" dirty="0"/>
+          </a:p>
+        </p:txBody>
+      </p:sp>
+      <p:sp>
+        <p:nvSpPr>
+          <p:cNvPr id="5" name="Oval 4"/>
+          <p:cNvSpPr/>
+          <p:nvPr/>
+        </p:nvSpPr>
+        <p:spPr>
+          <a:xfrm>
+            <a:off x="4875991" y="1747348"/>
+            <a:ext cx="556260" cy="533400"/>
+          </a:xfrm>
+          <a:prstGeom prst="ellipse">
+            <a:avLst/>
+          </a:prstGeom>
+          <a:solidFill>
+            <a:schemeClr val="bg2">
+              <a:lumMod val="50000"/>
+            </a:schemeClr>
+          </a:solidFill>
+          <a:ln w="28575">
+            <a:solidFill>
+              <a:schemeClr val="tx1"/>
+            </a:solidFill>
+          </a:ln>
+        </p:spPr>
+        <p:style>
+          <a:lnRef idx="2">
+            <a:schemeClr val="accent1">
+              <a:shade val="50000"/>
+            </a:schemeClr>
+          </a:lnRef>
+          <a:fillRef idx="1">
+            <a:schemeClr val="accent1"/>
+          </a:fillRef>
+          <a:effectRef idx="0">
+            <a:schemeClr val="accent1"/>
+          </a:effectRef>
+          <a:fontRef idx="minor">
+            <a:schemeClr val="lt1"/>
+          </a:fontRef>
+        </p:style>
+        <p:txBody>
+          <a:bodyPr rtlCol="0" anchor="ctr"/>
+          <a:lstStyle/>
+          <a:p>
+            <a:pPr algn="ctr"/>
+            <a:endParaRPr lang="en-US"/>
+          </a:p>
+        </p:txBody>
+      </p:sp>
+      <p:sp>
+        <p:nvSpPr>
+          <p:cNvPr id="6" name="Oval 5"/>
+          <p:cNvSpPr/>
+          <p:nvPr/>
+        </p:nvSpPr>
+        <p:spPr>
+          <a:xfrm>
+            <a:off x="5660434" y="1747348"/>
+            <a:ext cx="556260" cy="533400"/>
+          </a:xfrm>
+          <a:prstGeom prst="ellipse">
+            <a:avLst/>
+          </a:prstGeom>
+          <a:solidFill>
+            <a:schemeClr val="bg2">
+              <a:lumMod val="50000"/>
+            </a:schemeClr>
+          </a:solidFill>
+          <a:ln w="28575">
+            <a:solidFill>
+              <a:schemeClr val="tx1"/>
+            </a:solidFill>
+          </a:ln>
+        </p:spPr>
+        <p:style>
+          <a:lnRef idx="2">
+            <a:schemeClr val="accent1">
+              <a:shade val="50000"/>
+            </a:schemeClr>
+          </a:lnRef>
+          <a:fillRef idx="1">
+            <a:schemeClr val="accent1"/>
+          </a:fillRef>
+          <a:effectRef idx="0">
+            <a:schemeClr val="accent1"/>
+          </a:effectRef>
+          <a:fontRef idx="minor">
+            <a:schemeClr val="lt1"/>
+          </a:fontRef>
+        </p:style>
+        <p:txBody>
+          <a:bodyPr rtlCol="0" anchor="ctr"/>
+          <a:lstStyle/>
+          <a:p>
+            <a:pPr algn="ctr"/>
+            <a:endParaRPr lang="en-US"/>
+          </a:p>
+        </p:txBody>
+      </p:sp>
+      <p:sp>
+        <p:nvSpPr>
+          <p:cNvPr id="7" name="Oval 6"/>
+          <p:cNvSpPr/>
+          <p:nvPr/>
+        </p:nvSpPr>
+        <p:spPr>
+          <a:xfrm>
+            <a:off x="6457944" y="1747348"/>
+            <a:ext cx="556260" cy="533400"/>
+          </a:xfrm>
+          <a:prstGeom prst="ellipse">
+            <a:avLst/>
+          </a:prstGeom>
+          <a:solidFill>
+            <a:schemeClr val="bg2">
+              <a:lumMod val="50000"/>
+            </a:schemeClr>
+          </a:solidFill>
+          <a:ln w="28575">
+            <a:solidFill>
+              <a:schemeClr val="tx1"/>
+            </a:solidFill>
+          </a:ln>
+        </p:spPr>
+        <p:style>
+          <a:lnRef idx="2">
+            <a:schemeClr val="accent1">
+              <a:shade val="50000"/>
+            </a:schemeClr>
+          </a:lnRef>
+          <a:fillRef idx="1">
+            <a:schemeClr val="accent1"/>
+          </a:fillRef>
+          <a:effectRef idx="0">
+            <a:schemeClr val="accent1"/>
+          </a:effectRef>
+          <a:fontRef idx="minor">
+            <a:schemeClr val="lt1"/>
+          </a:fontRef>
+        </p:style>
+        <p:txBody>
+          <a:bodyPr rtlCol="0" anchor="ctr"/>
+          <a:lstStyle/>
+          <a:p>
+            <a:pPr algn="ctr"/>
+            <a:endParaRPr lang="en-US"/>
+          </a:p>
+        </p:txBody>
+      </p:sp>
+      <p:sp>
+        <p:nvSpPr>
+          <p:cNvPr id="8" name="Oval 7"/>
+          <p:cNvSpPr/>
+          <p:nvPr/>
+        </p:nvSpPr>
+        <p:spPr>
+          <a:xfrm>
+            <a:off x="4875991" y="2745568"/>
+            <a:ext cx="556260" cy="533400"/>
+          </a:xfrm>
+          <a:prstGeom prst="ellipse">
+            <a:avLst/>
+          </a:prstGeom>
+          <a:solidFill>
+            <a:schemeClr val="bg2">
+              <a:lumMod val="50000"/>
+            </a:schemeClr>
+          </a:solidFill>
+          <a:ln w="28575">
+            <a:solidFill>
+              <a:schemeClr val="tx1"/>
+            </a:solidFill>
+          </a:ln>
+        </p:spPr>
+        <p:style>
+          <a:lnRef idx="2">
+            <a:schemeClr val="accent1">
+              <a:shade val="50000"/>
+            </a:schemeClr>
+          </a:lnRef>
+          <a:fillRef idx="1">
+            <a:schemeClr val="accent1"/>
+          </a:fillRef>
+          <a:effectRef idx="0">
+            <a:schemeClr val="accent1"/>
+          </a:effectRef>
+          <a:fontRef idx="minor">
+            <a:schemeClr val="lt1"/>
+          </a:fontRef>
+        </p:style>
+        <p:txBody>
+          <a:bodyPr rtlCol="0" anchor="ctr"/>
+          <a:lstStyle/>
+          <a:p>
+            <a:pPr algn="ctr"/>
+            <a:endParaRPr lang="en-US"/>
+          </a:p>
+        </p:txBody>
+      </p:sp>
+      <p:sp>
+        <p:nvSpPr>
+          <p:cNvPr id="9" name="Oval 8"/>
+          <p:cNvSpPr/>
+          <p:nvPr/>
+        </p:nvSpPr>
+        <p:spPr>
+          <a:xfrm>
+            <a:off x="5660434" y="2745568"/>
+            <a:ext cx="556260" cy="533400"/>
+          </a:xfrm>
+          <a:prstGeom prst="ellipse">
+            <a:avLst/>
+          </a:prstGeom>
+          <a:solidFill>
+            <a:schemeClr val="bg2">
+              <a:lumMod val="50000"/>
+            </a:schemeClr>
+          </a:solidFill>
+          <a:ln w="28575">
+            <a:solidFill>
+              <a:schemeClr val="tx1"/>
+            </a:solidFill>
+          </a:ln>
+        </p:spPr>
+        <p:style>
+          <a:lnRef idx="2">
+            <a:schemeClr val="accent1">
+              <a:shade val="50000"/>
+            </a:schemeClr>
+          </a:lnRef>
+          <a:fillRef idx="1">
+            <a:schemeClr val="accent1"/>
+          </a:fillRef>
+          <a:effectRef idx="0">
+            <a:schemeClr val="accent1"/>
+          </a:effectRef>
+          <a:fontRef idx="minor">
+            <a:schemeClr val="lt1"/>
+          </a:fontRef>
+        </p:style>
+        <p:txBody>
+          <a:bodyPr rtlCol="0" anchor="ctr"/>
+          <a:lstStyle/>
+          <a:p>
+            <a:pPr algn="ctr"/>
+            <a:endParaRPr lang="en-US"/>
+          </a:p>
+        </p:txBody>
+      </p:sp>
+      <p:sp>
+        <p:nvSpPr>
+          <p:cNvPr id="10" name="Oval 9"/>
+          <p:cNvSpPr/>
+          <p:nvPr/>
+        </p:nvSpPr>
+        <p:spPr>
+          <a:xfrm>
+            <a:off x="6457944" y="2745568"/>
+            <a:ext cx="556260" cy="533400"/>
+          </a:xfrm>
+          <a:prstGeom prst="ellipse">
+            <a:avLst/>
+          </a:prstGeom>
+          <a:solidFill>
+            <a:schemeClr val="bg2">
+              <a:lumMod val="50000"/>
+            </a:schemeClr>
+          </a:solidFill>
+          <a:ln w="28575">
+            <a:solidFill>
+              <a:schemeClr val="tx1"/>
+            </a:solidFill>
+          </a:ln>
+        </p:spPr>
+        <p:style>
+          <a:lnRef idx="2">
+            <a:schemeClr val="accent1">
+              <a:shade val="50000"/>
+            </a:schemeClr>
+          </a:lnRef>
+          <a:fillRef idx="1">
+            <a:schemeClr val="accent1"/>
+          </a:fillRef>
+          <a:effectRef idx="0">
+            <a:schemeClr val="accent1"/>
+          </a:effectRef>
+          <a:fontRef idx="minor">
+            <a:schemeClr val="lt1"/>
+          </a:fontRef>
+        </p:style>
+        <p:txBody>
+          <a:bodyPr rtlCol="0" anchor="ctr"/>
+          <a:lstStyle/>
+          <a:p>
+            <a:pPr algn="ctr"/>
+            <a:endParaRPr lang="en-US"/>
+          </a:p>
+        </p:txBody>
+      </p:sp>
+      <p:sp>
+        <p:nvSpPr>
+          <p:cNvPr id="11" name="Oval 10"/>
+          <p:cNvSpPr/>
+          <p:nvPr/>
+        </p:nvSpPr>
+        <p:spPr>
+          <a:xfrm rot="16200000">
+            <a:off x="5037119" y="3795700"/>
+            <a:ext cx="245746" cy="243840"/>
+          </a:xfrm>
+          <a:prstGeom prst="ellipse">
+            <a:avLst/>
+          </a:prstGeom>
+          <a:ln w="19050">
+            <a:solidFill>
+              <a:schemeClr val="tx1"/>
+            </a:solidFill>
+          </a:ln>
+        </p:spPr>
+        <p:style>
+          <a:lnRef idx="2">
+            <a:schemeClr val="accent1">
+              <a:shade val="50000"/>
+            </a:schemeClr>
+          </a:lnRef>
+          <a:fillRef idx="1">
+            <a:schemeClr val="accent1"/>
+          </a:fillRef>
+          <a:effectRef idx="0">
+            <a:schemeClr val="accent1"/>
+          </a:effectRef>
+          <a:fontRef idx="minor">
+            <a:schemeClr val="lt1"/>
+          </a:fontRef>
+        </p:style>
+        <p:txBody>
+          <a:bodyPr rtlCol="0" anchor="ctr"/>
+          <a:lstStyle/>
+          <a:p>
+            <a:pPr algn="ctr"/>
+            <a:endParaRPr lang="en-US"/>
+          </a:p>
+        </p:txBody>
+      </p:sp>
+      <p:sp>
+        <p:nvSpPr>
+          <p:cNvPr id="12" name="Flowchart: Terminator 11"/>
+          <p:cNvSpPr/>
+          <p:nvPr/>
+        </p:nvSpPr>
+        <p:spPr>
+          <a:xfrm rot="16200000">
+            <a:off x="5017245" y="3807751"/>
+            <a:ext cx="95488" cy="208168"/>
+          </a:xfrm>
+          <a:prstGeom prst="flowChartTerminator">
+            <a:avLst/>
+          </a:prstGeom>
+          <a:ln w="19050">
+            <a:solidFill>
+              <a:schemeClr val="tx1"/>
+            </a:solidFill>
+          </a:ln>
+        </p:spPr>
+        <p:style>
+          <a:lnRef idx="2">
+            <a:schemeClr val="accent1">
+              <a:shade val="50000"/>
+            </a:schemeClr>
+          </a:lnRef>
+          <a:fillRef idx="1">
+            <a:schemeClr val="accent1"/>
+          </a:fillRef>
+          <a:effectRef idx="0">
+            <a:schemeClr val="accent1"/>
+          </a:effectRef>
+          <a:fontRef idx="minor">
+            <a:schemeClr val="lt1"/>
+          </a:fontRef>
+        </p:style>
+        <p:txBody>
+          <a:bodyPr rtlCol="0" anchor="ctr"/>
+          <a:lstStyle/>
+          <a:p>
+            <a:pPr algn="ctr"/>
+            <a:endParaRPr lang="en-US"/>
+          </a:p>
+        </p:txBody>
+      </p:sp>
+      <p:sp>
+        <p:nvSpPr>
+          <p:cNvPr id="13" name="Oval 12"/>
+          <p:cNvSpPr/>
+          <p:nvPr/>
+        </p:nvSpPr>
+        <p:spPr>
+          <a:xfrm>
+            <a:off x="5074110" y="4501971"/>
+            <a:ext cx="160020" cy="150019"/>
+          </a:xfrm>
+          <a:prstGeom prst="ellipse">
+            <a:avLst/>
+          </a:prstGeom>
+        </p:spPr>
+        <p:style>
+          <a:lnRef idx="2">
+            <a:schemeClr val="accent1">
+              <a:shade val="50000"/>
+            </a:schemeClr>
+          </a:lnRef>
+          <a:fillRef idx="1">
+            <a:schemeClr val="accent1"/>
+          </a:fillRef>
+          <a:effectRef idx="0">
+            <a:schemeClr val="accent1"/>
+          </a:effectRef>
+          <a:fontRef idx="minor">
+            <a:schemeClr val="lt1"/>
+          </a:fontRef>
+        </p:style>
+        <p:txBody>
+          <a:bodyPr rtlCol="0" anchor="ctr"/>
+          <a:lstStyle/>
+          <a:p>
+            <a:pPr algn="ctr"/>
+            <a:endParaRPr lang="en-US"/>
+          </a:p>
+        </p:txBody>
+      </p:sp>
+      <p:sp>
+        <p:nvSpPr>
+          <p:cNvPr id="14" name="Oval 13"/>
+          <p:cNvSpPr/>
+          <p:nvPr/>
+        </p:nvSpPr>
+        <p:spPr>
+          <a:xfrm>
+            <a:off x="6625461" y="4501971"/>
+            <a:ext cx="160020" cy="150019"/>
+          </a:xfrm>
+          <a:prstGeom prst="ellipse">
+            <a:avLst/>
+          </a:prstGeom>
+        </p:spPr>
+        <p:style>
+          <a:lnRef idx="2">
+            <a:schemeClr val="accent1">
+              <a:shade val="50000"/>
+            </a:schemeClr>
+          </a:lnRef>
+          <a:fillRef idx="1">
+            <a:schemeClr val="accent1"/>
+          </a:fillRef>
+          <a:effectRef idx="0">
+            <a:schemeClr val="accent1"/>
+          </a:effectRef>
+          <a:fontRef idx="minor">
+            <a:schemeClr val="lt1"/>
+          </a:fontRef>
+        </p:style>
+        <p:txBody>
+          <a:bodyPr rtlCol="0" anchor="ctr"/>
+          <a:lstStyle/>
+          <a:p>
+            <a:pPr algn="ctr"/>
+            <a:endParaRPr lang="en-US"/>
+          </a:p>
+        </p:txBody>
+      </p:sp>
+      <p:sp>
+        <p:nvSpPr>
+          <p:cNvPr id="15" name="Oval 14"/>
+          <p:cNvSpPr/>
+          <p:nvPr/>
+        </p:nvSpPr>
+        <p:spPr>
+          <a:xfrm>
+            <a:off x="4863758" y="5009546"/>
+            <a:ext cx="580727" cy="560414"/>
+          </a:xfrm>
+          <a:prstGeom prst="ellipse">
+            <a:avLst/>
+          </a:prstGeom>
+          <a:ln w="28575">
+            <a:solidFill>
+              <a:schemeClr val="bg2"/>
+            </a:solidFill>
+          </a:ln>
+        </p:spPr>
+        <p:style>
+          <a:lnRef idx="2">
+            <a:schemeClr val="accent1">
+              <a:shade val="50000"/>
+            </a:schemeClr>
+          </a:lnRef>
+          <a:fillRef idx="1">
+            <a:schemeClr val="accent1"/>
+          </a:fillRef>
+          <a:effectRef idx="0">
+            <a:schemeClr val="accent1"/>
+          </a:effectRef>
+          <a:fontRef idx="minor">
+            <a:schemeClr val="lt1"/>
+          </a:fontRef>
+        </p:style>
+        <p:txBody>
+          <a:bodyPr rtlCol="0" anchor="ctr"/>
+          <a:lstStyle/>
+          <a:p>
+            <a:pPr algn="ctr"/>
+            <a:endParaRPr lang="en-US"/>
+          </a:p>
+        </p:txBody>
+      </p:sp>
+      <p:sp>
+        <p:nvSpPr>
+          <p:cNvPr id="16" name="Oval 15"/>
+          <p:cNvSpPr/>
+          <p:nvPr/>
+        </p:nvSpPr>
+        <p:spPr>
+          <a:xfrm>
+            <a:off x="4957086" y="5095929"/>
+            <a:ext cx="394069" cy="380371"/>
+          </a:xfrm>
+          <a:prstGeom prst="ellipse">
+            <a:avLst/>
+          </a:prstGeom>
+          <a:ln w="28575">
+            <a:solidFill>
+              <a:schemeClr val="bg2"/>
+            </a:solidFill>
+          </a:ln>
+        </p:spPr>
+        <p:style>
+          <a:lnRef idx="2">
+            <a:schemeClr val="accent1">
+              <a:shade val="50000"/>
+            </a:schemeClr>
+          </a:lnRef>
+          <a:fillRef idx="1">
+            <a:schemeClr val="accent1"/>
+          </a:fillRef>
+          <a:effectRef idx="0">
+            <a:schemeClr val="accent1"/>
+          </a:effectRef>
+          <a:fontRef idx="minor">
+            <a:schemeClr val="lt1"/>
+          </a:fontRef>
+        </p:style>
+        <p:txBody>
+          <a:bodyPr rtlCol="0" anchor="ctr"/>
+          <a:lstStyle/>
+          <a:p>
+            <a:pPr algn="ctr"/>
+            <a:endParaRPr lang="en-US"/>
+          </a:p>
+        </p:txBody>
+      </p:sp>
+      <p:sp>
+        <p:nvSpPr>
+          <p:cNvPr id="17" name="Oval 16"/>
+          <p:cNvSpPr/>
+          <p:nvPr/>
+        </p:nvSpPr>
+        <p:spPr>
+          <a:xfrm>
+            <a:off x="6422429" y="5000772"/>
+            <a:ext cx="580727" cy="560414"/>
+          </a:xfrm>
+          <a:prstGeom prst="ellipse">
+            <a:avLst/>
+          </a:prstGeom>
+          <a:ln w="28575">
+            <a:solidFill>
+              <a:schemeClr val="bg2"/>
+            </a:solidFill>
+          </a:ln>
+        </p:spPr>
+        <p:style>
+          <a:lnRef idx="2">
+            <a:schemeClr val="accent1">
+              <a:shade val="50000"/>
+            </a:schemeClr>
+          </a:lnRef>
+          <a:fillRef idx="1">
+            <a:schemeClr val="accent1"/>
+          </a:fillRef>
+          <a:effectRef idx="0">
+            <a:schemeClr val="accent1"/>
+          </a:effectRef>
+          <a:fontRef idx="minor">
+            <a:schemeClr val="lt1"/>
+          </a:fontRef>
+        </p:style>
+        <p:txBody>
+          <a:bodyPr rtlCol="0" anchor="ctr"/>
+          <a:lstStyle/>
+          <a:p>
+            <a:pPr algn="ctr"/>
+            <a:endParaRPr lang="en-US"/>
+          </a:p>
+        </p:txBody>
+      </p:sp>
+      <p:sp>
+        <p:nvSpPr>
+          <p:cNvPr id="18" name="Oval 17"/>
+          <p:cNvSpPr/>
+          <p:nvPr/>
+        </p:nvSpPr>
+        <p:spPr>
+          <a:xfrm>
+            <a:off x="6515757" y="5087155"/>
+            <a:ext cx="394069" cy="380371"/>
+          </a:xfrm>
+          <a:prstGeom prst="ellipse">
+            <a:avLst/>
+          </a:prstGeom>
+          <a:ln w="28575">
+            <a:solidFill>
+              <a:schemeClr val="bg2"/>
+            </a:solidFill>
+          </a:ln>
+        </p:spPr>
+        <p:style>
+          <a:lnRef idx="2">
+            <a:schemeClr val="accent1">
+              <a:shade val="50000"/>
+            </a:schemeClr>
+          </a:lnRef>
+          <a:fillRef idx="1">
+            <a:schemeClr val="accent1"/>
+          </a:fillRef>
+          <a:effectRef idx="0">
+            <a:schemeClr val="accent1"/>
+          </a:effectRef>
+          <a:fontRef idx="minor">
+            <a:schemeClr val="lt1"/>
+          </a:fontRef>
+        </p:style>
+        <p:txBody>
+          <a:bodyPr rtlCol="0" anchor="ctr"/>
+          <a:lstStyle/>
+          <a:p>
+            <a:pPr algn="ctr"/>
+            <a:endParaRPr lang="en-US"/>
+          </a:p>
+        </p:txBody>
+      </p:sp>
+      <p:cxnSp>
+        <p:nvCxnSpPr>
+          <p:cNvPr id="19" name="Straight Connector 18"/>
+          <p:cNvCxnSpPr>
+            <a:stCxn id="5" idx="0"/>
+          </p:cNvCxnSpPr>
+          <p:nvPr/>
+        </p:nvCxnSpPr>
+        <p:spPr>
+          <a:xfrm>
+            <a:off x="5154121" y="1747348"/>
+            <a:ext cx="1" cy="266700"/>
+          </a:xfrm>
+          <a:prstGeom prst="line">
+            <a:avLst/>
+          </a:prstGeom>
+          <a:ln w="38100"/>
+        </p:spPr>
+        <p:style>
+          <a:lnRef idx="3">
+            <a:schemeClr val="dk1"/>
+          </a:lnRef>
+          <a:fillRef idx="0">
+            <a:schemeClr val="dk1"/>
+          </a:fillRef>
+          <a:effectRef idx="2">
+            <a:schemeClr val="dk1"/>
+          </a:effectRef>
+          <a:fontRef idx="minor">
+            <a:schemeClr val="tx1"/>
+          </a:fontRef>
+        </p:style>
+      </p:cxnSp>
+      <p:cxnSp>
+        <p:nvCxnSpPr>
+          <p:cNvPr id="20" name="Straight Connector 19"/>
+          <p:cNvCxnSpPr/>
+          <p:nvPr/>
+        </p:nvCxnSpPr>
+        <p:spPr>
+          <a:xfrm>
+            <a:off x="5938564" y="1747348"/>
+            <a:ext cx="1" cy="266700"/>
+          </a:xfrm>
+          <a:prstGeom prst="line">
+            <a:avLst/>
+          </a:prstGeom>
+          <a:ln w="38100"/>
+        </p:spPr>
+        <p:style>
+          <a:lnRef idx="3">
+            <a:schemeClr val="dk1"/>
+          </a:lnRef>
+          <a:fillRef idx="0">
+            <a:schemeClr val="dk1"/>
+          </a:fillRef>
+          <a:effectRef idx="2">
+            <a:schemeClr val="dk1"/>
+          </a:effectRef>
+          <a:fontRef idx="minor">
+            <a:schemeClr val="tx1"/>
+          </a:fontRef>
+        </p:style>
+      </p:cxnSp>
+      <p:cxnSp>
+        <p:nvCxnSpPr>
+          <p:cNvPr id="21" name="Straight Connector 20"/>
+          <p:cNvCxnSpPr/>
+          <p:nvPr/>
+        </p:nvCxnSpPr>
+        <p:spPr>
+          <a:xfrm>
+            <a:off x="6734588" y="1753641"/>
+            <a:ext cx="1" cy="266700"/>
+          </a:xfrm>
+          <a:prstGeom prst="line">
+            <a:avLst/>
+          </a:prstGeom>
+          <a:ln w="38100"/>
+        </p:spPr>
+        <p:style>
+          <a:lnRef idx="3">
+            <a:schemeClr val="dk1"/>
+          </a:lnRef>
+          <a:fillRef idx="0">
+            <a:schemeClr val="dk1"/>
+          </a:fillRef>
+          <a:effectRef idx="2">
+            <a:schemeClr val="dk1"/>
+          </a:effectRef>
+          <a:fontRef idx="minor">
+            <a:schemeClr val="tx1"/>
+          </a:fontRef>
+        </p:style>
+      </p:cxnSp>
+      <p:cxnSp>
+        <p:nvCxnSpPr>
+          <p:cNvPr id="22" name="Straight Connector 21"/>
+          <p:cNvCxnSpPr/>
+          <p:nvPr/>
+        </p:nvCxnSpPr>
+        <p:spPr>
+          <a:xfrm>
+            <a:off x="5147733" y="2745568"/>
+            <a:ext cx="1" cy="266700"/>
+          </a:xfrm>
+          <a:prstGeom prst="line">
+            <a:avLst/>
+          </a:prstGeom>
+          <a:ln w="38100"/>
+        </p:spPr>
+        <p:style>
+          <a:lnRef idx="3">
+            <a:schemeClr val="dk1"/>
+          </a:lnRef>
+          <a:fillRef idx="0">
+            <a:schemeClr val="dk1"/>
+          </a:fillRef>
+          <a:effectRef idx="2">
+            <a:schemeClr val="dk1"/>
+          </a:effectRef>
+          <a:fontRef idx="minor">
+            <a:schemeClr val="tx1"/>
+          </a:fontRef>
+        </p:style>
+      </p:cxnSp>
+      <p:cxnSp>
+        <p:nvCxnSpPr>
+          <p:cNvPr id="23" name="Straight Connector 22"/>
+          <p:cNvCxnSpPr/>
+          <p:nvPr/>
+        </p:nvCxnSpPr>
+        <p:spPr>
+          <a:xfrm>
+            <a:off x="5938564" y="2745568"/>
+            <a:ext cx="1" cy="266700"/>
+          </a:xfrm>
+          <a:prstGeom prst="line">
+            <a:avLst/>
+          </a:prstGeom>
+          <a:ln w="38100"/>
+        </p:spPr>
+        <p:style>
+          <a:lnRef idx="3">
+            <a:schemeClr val="dk1"/>
+          </a:lnRef>
+          <a:fillRef idx="0">
+            <a:schemeClr val="dk1"/>
+          </a:fillRef>
+          <a:effectRef idx="2">
+            <a:schemeClr val="dk1"/>
+          </a:effectRef>
+          <a:fontRef idx="minor">
+            <a:schemeClr val="tx1"/>
+          </a:fontRef>
+        </p:style>
+      </p:cxnSp>
+      <p:cxnSp>
+        <p:nvCxnSpPr>
+          <p:cNvPr id="24" name="Straight Connector 23"/>
+          <p:cNvCxnSpPr/>
+          <p:nvPr/>
+        </p:nvCxnSpPr>
+        <p:spPr>
+          <a:xfrm>
+            <a:off x="6733635" y="2745568"/>
+            <a:ext cx="1" cy="266700"/>
+          </a:xfrm>
+          <a:prstGeom prst="line">
+            <a:avLst/>
+          </a:prstGeom>
+          <a:ln w="38100"/>
+        </p:spPr>
+        <p:style>
+          <a:lnRef idx="3">
+            <a:schemeClr val="dk1"/>
+          </a:lnRef>
+          <a:fillRef idx="0">
+            <a:schemeClr val="dk1"/>
+          </a:fillRef>
+          <a:effectRef idx="2">
+            <a:schemeClr val="dk1"/>
+          </a:effectRef>
+          <a:fontRef idx="minor">
+            <a:schemeClr val="tx1"/>
+          </a:fontRef>
+        </p:style>
+      </p:cxnSp>
+      <p:sp>
+        <p:nvSpPr>
+          <p:cNvPr id="25" name="TextBox 24"/>
+          <p:cNvSpPr txBox="1"/>
+          <p:nvPr/>
+        </p:nvSpPr>
+        <p:spPr>
+          <a:xfrm>
+            <a:off x="4839796" y="2261143"/>
+            <a:ext cx="615874" cy="246221"/>
+          </a:xfrm>
+          <a:prstGeom prst="rect">
+            <a:avLst/>
+          </a:prstGeom>
+          <a:noFill/>
+        </p:spPr>
+        <p:txBody>
+          <a:bodyPr wrap="none" rtlCol="0">
+            <a:spAutoFit/>
+          </a:bodyPr>
+          <a:lstStyle/>
+          <a:p>
+            <a:pPr algn="ctr"/>
+            <a:r>
+              <a:rPr lang="en-US" sz="1000" b="1" dirty="0">
+                <a:latin typeface="Century Gothic" panose="020B0502020202020204" pitchFamily="34" charset="0"/>
+                <a:cs typeface="Adobe Devanagari" panose="02040503050201020203" pitchFamily="18" charset="0"/>
+              </a:rPr>
+              <a:t>Knob 1</a:t>
+            </a:r>
+          </a:p>
+        </p:txBody>
+      </p:sp>
+      <p:sp>
+        <p:nvSpPr>
+          <p:cNvPr id="26" name="TextBox 25"/>
+          <p:cNvSpPr txBox="1"/>
+          <p:nvPr/>
+        </p:nvSpPr>
+        <p:spPr>
+          <a:xfrm>
+            <a:off x="5644770" y="2261142"/>
+            <a:ext cx="615874" cy="246221"/>
+          </a:xfrm>
+          <a:prstGeom prst="rect">
+            <a:avLst/>
+          </a:prstGeom>
+          <a:noFill/>
+        </p:spPr>
+        <p:txBody>
+          <a:bodyPr wrap="none" rtlCol="0">
+            <a:spAutoFit/>
+          </a:bodyPr>
+          <a:lstStyle/>
+          <a:p>
+            <a:pPr algn="ctr"/>
+            <a:r>
+              <a:rPr lang="en-US" sz="1000" b="1" dirty="0">
+                <a:latin typeface="Century Gothic" panose="020B0502020202020204" pitchFamily="34" charset="0"/>
+                <a:cs typeface="Adobe Devanagari" panose="02040503050201020203" pitchFamily="18" charset="0"/>
+              </a:rPr>
+              <a:t>Knob 2</a:t>
+            </a:r>
+          </a:p>
+        </p:txBody>
+      </p:sp>
+      <p:sp>
+        <p:nvSpPr>
+          <p:cNvPr id="27" name="TextBox 26"/>
+          <p:cNvSpPr txBox="1"/>
+          <p:nvPr/>
+        </p:nvSpPr>
+        <p:spPr>
+          <a:xfrm>
+            <a:off x="6425873" y="2267910"/>
+            <a:ext cx="615874" cy="246221"/>
+          </a:xfrm>
+          <a:prstGeom prst="rect">
+            <a:avLst/>
+          </a:prstGeom>
+          <a:noFill/>
+        </p:spPr>
+        <p:txBody>
+          <a:bodyPr wrap="none" rtlCol="0">
+            <a:spAutoFit/>
+          </a:bodyPr>
+          <a:lstStyle/>
+          <a:p>
+            <a:pPr algn="ctr"/>
+            <a:r>
+              <a:rPr lang="en-US" sz="1000" b="1" dirty="0">
+                <a:latin typeface="Century Gothic" panose="020B0502020202020204" pitchFamily="34" charset="0"/>
+                <a:cs typeface="Adobe Devanagari" panose="02040503050201020203" pitchFamily="18" charset="0"/>
+              </a:rPr>
+              <a:t>Knob 3</a:t>
+            </a:r>
+          </a:p>
+        </p:txBody>
+      </p:sp>
+      <p:sp>
+        <p:nvSpPr>
+          <p:cNvPr id="28" name="TextBox 27"/>
+          <p:cNvSpPr txBox="1"/>
+          <p:nvPr/>
+        </p:nvSpPr>
+        <p:spPr>
+          <a:xfrm>
+            <a:off x="5648947" y="3267265"/>
+            <a:ext cx="615874" cy="246221"/>
+          </a:xfrm>
+          <a:prstGeom prst="rect">
+            <a:avLst/>
+          </a:prstGeom>
+          <a:noFill/>
+        </p:spPr>
+        <p:txBody>
+          <a:bodyPr wrap="none" rtlCol="0">
+            <a:spAutoFit/>
+          </a:bodyPr>
+          <a:lstStyle/>
+          <a:p>
+            <a:pPr algn="ctr"/>
+            <a:r>
+              <a:rPr lang="en-US" sz="1000" b="1" dirty="0">
+                <a:latin typeface="Century Gothic" panose="020B0502020202020204" pitchFamily="34" charset="0"/>
+                <a:cs typeface="Adobe Devanagari" panose="02040503050201020203" pitchFamily="18" charset="0"/>
+              </a:rPr>
+              <a:t>Knob 5</a:t>
+            </a:r>
+          </a:p>
+        </p:txBody>
+      </p:sp>
+      <p:sp>
+        <p:nvSpPr>
+          <p:cNvPr id="29" name="TextBox 28"/>
+          <p:cNvSpPr txBox="1"/>
+          <p:nvPr/>
+        </p:nvSpPr>
+        <p:spPr>
+          <a:xfrm>
+            <a:off x="6432054" y="3267265"/>
+            <a:ext cx="615874" cy="246221"/>
+          </a:xfrm>
+          <a:prstGeom prst="rect">
+            <a:avLst/>
+          </a:prstGeom>
+          <a:noFill/>
+        </p:spPr>
+        <p:txBody>
+          <a:bodyPr wrap="none" rtlCol="0">
+            <a:spAutoFit/>
+          </a:bodyPr>
+          <a:lstStyle/>
+          <a:p>
+            <a:pPr algn="ctr"/>
+            <a:r>
+              <a:rPr lang="en-US" sz="1000" b="1" dirty="0">
+                <a:latin typeface="Century Gothic" panose="020B0502020202020204" pitchFamily="34" charset="0"/>
+                <a:cs typeface="Adobe Devanagari" panose="02040503050201020203" pitchFamily="18" charset="0"/>
+              </a:rPr>
+              <a:t>Knob 6</a:t>
+            </a:r>
+          </a:p>
+        </p:txBody>
+      </p:sp>
+      <p:sp>
+        <p:nvSpPr>
+          <p:cNvPr id="30" name="TextBox 29"/>
+          <p:cNvSpPr txBox="1"/>
+          <p:nvPr/>
+        </p:nvSpPr>
+        <p:spPr>
+          <a:xfrm>
+            <a:off x="4846186" y="3267265"/>
+            <a:ext cx="615874" cy="246221"/>
+          </a:xfrm>
+          <a:prstGeom prst="rect">
+            <a:avLst/>
+          </a:prstGeom>
+          <a:noFill/>
+        </p:spPr>
+        <p:txBody>
+          <a:bodyPr wrap="none" rtlCol="0">
+            <a:spAutoFit/>
+          </a:bodyPr>
+          <a:lstStyle/>
+          <a:p>
+            <a:pPr algn="ctr"/>
+            <a:r>
+              <a:rPr lang="en-US" sz="1000" b="1" dirty="0">
+                <a:latin typeface="Century Gothic" panose="020B0502020202020204" pitchFamily="34" charset="0"/>
+                <a:cs typeface="Adobe Devanagari" panose="02040503050201020203" pitchFamily="18" charset="0"/>
+              </a:rPr>
+              <a:t>Knob 4</a:t>
+            </a:r>
+          </a:p>
+        </p:txBody>
+      </p:sp>
+      <p:sp>
+        <p:nvSpPr>
+          <p:cNvPr id="31" name="TextBox 30"/>
+          <p:cNvSpPr txBox="1"/>
+          <p:nvPr/>
+        </p:nvSpPr>
+        <p:spPr>
+          <a:xfrm>
+            <a:off x="4803473" y="5548458"/>
+            <a:ext cx="724878" cy="246221"/>
+          </a:xfrm>
+          <a:prstGeom prst="rect">
+            <a:avLst/>
+          </a:prstGeom>
+          <a:noFill/>
+        </p:spPr>
+        <p:txBody>
+          <a:bodyPr wrap="none" rtlCol="0">
+            <a:spAutoFit/>
+          </a:bodyPr>
+          <a:lstStyle/>
+          <a:p>
+            <a:pPr algn="ctr"/>
+            <a:r>
+              <a:rPr lang="en-US" sz="1000" b="1" dirty="0" err="1">
+                <a:latin typeface="Century Gothic" panose="020B0502020202020204" pitchFamily="34" charset="0"/>
+                <a:cs typeface="Adobe Devanagari" panose="02040503050201020203" pitchFamily="18" charset="0"/>
+              </a:rPr>
+              <a:t>FootSw</a:t>
+            </a:r>
+            <a:r>
+              <a:rPr lang="en-US" sz="1000" b="1" dirty="0">
+                <a:latin typeface="Century Gothic" panose="020B0502020202020204" pitchFamily="34" charset="0"/>
+                <a:cs typeface="Adobe Devanagari" panose="02040503050201020203" pitchFamily="18" charset="0"/>
+              </a:rPr>
+              <a:t> 1</a:t>
+            </a:r>
+          </a:p>
+        </p:txBody>
+      </p:sp>
+      <p:sp>
+        <p:nvSpPr>
+          <p:cNvPr id="32" name="TextBox 31"/>
+          <p:cNvSpPr txBox="1"/>
+          <p:nvPr/>
+        </p:nvSpPr>
+        <p:spPr>
+          <a:xfrm rot="16200000">
+            <a:off x="4892535" y="4030683"/>
+            <a:ext cx="455573" cy="461665"/>
+          </a:xfrm>
+          <a:prstGeom prst="rect">
+            <a:avLst/>
+          </a:prstGeom>
+          <a:noFill/>
+        </p:spPr>
+        <p:txBody>
+          <a:bodyPr wrap="none" rtlCol="0">
+            <a:spAutoFit/>
+          </a:bodyPr>
+          <a:lstStyle/>
+          <a:p>
+            <a:pPr algn="ctr"/>
+            <a:r>
+              <a:rPr lang="en-US" sz="800" b="1" dirty="0">
+                <a:latin typeface="Century Gothic" panose="020B0502020202020204" pitchFamily="34" charset="0"/>
+                <a:cs typeface="Adobe Devanagari" panose="02040503050201020203" pitchFamily="18" charset="0"/>
+              </a:rPr>
+              <a:t>Opt 1</a:t>
+            </a:r>
+          </a:p>
+          <a:p>
+            <a:pPr algn="ctr"/>
+            <a:r>
+              <a:rPr lang="en-US" sz="800" b="1" dirty="0">
+                <a:latin typeface="Century Gothic" panose="020B0502020202020204" pitchFamily="34" charset="0"/>
+                <a:cs typeface="Adobe Devanagari" panose="02040503050201020203" pitchFamily="18" charset="0"/>
+              </a:rPr>
+              <a:t>Opt 2</a:t>
+            </a:r>
+          </a:p>
+          <a:p>
+            <a:pPr algn="ctr"/>
+            <a:r>
+              <a:rPr lang="en-US" sz="800" b="1" dirty="0">
+                <a:latin typeface="Century Gothic" panose="020B0502020202020204" pitchFamily="34" charset="0"/>
+                <a:cs typeface="Adobe Devanagari" panose="02040503050201020203" pitchFamily="18" charset="0"/>
+              </a:rPr>
+              <a:t>Opt 3</a:t>
+            </a:r>
+          </a:p>
+        </p:txBody>
+      </p:sp>
+      <p:sp>
+        <p:nvSpPr>
+          <p:cNvPr id="33" name="TextBox 32"/>
+          <p:cNvSpPr txBox="1"/>
+          <p:nvPr/>
+        </p:nvSpPr>
+        <p:spPr>
+          <a:xfrm>
+            <a:off x="5081621" y="4570836"/>
+            <a:ext cx="1742170" cy="461665"/>
+          </a:xfrm>
+          <a:prstGeom prst="rect">
+            <a:avLst/>
+          </a:prstGeom>
+          <a:noFill/>
+        </p:spPr>
+        <p:txBody>
+          <a:bodyPr wrap="square" rtlCol="0">
+            <a:spAutoFit/>
+          </a:bodyPr>
+          <a:lstStyle/>
+          <a:p>
+            <a:pPr algn="ctr"/>
+            <a:r>
+              <a:rPr lang="en-US" sz="2400" b="1" dirty="0" err="1">
+                <a:latin typeface="Broadway" panose="04040905080B02020502" pitchFamily="82" charset="0"/>
+                <a:cs typeface="Adobe Devanagari" panose="02040503050201020203" pitchFamily="18" charset="0"/>
+              </a:rPr>
+              <a:t>FunBox</a:t>
+            </a:r>
+            <a:endParaRPr lang="en-US" sz="2400" b="1" dirty="0">
+              <a:latin typeface="Broadway" panose="04040905080B02020502" pitchFamily="82" charset="0"/>
+              <a:cs typeface="Adobe Devanagari" panose="02040503050201020203" pitchFamily="18" charset="0"/>
+            </a:endParaRPr>
+          </a:p>
+        </p:txBody>
+      </p:sp>
+      <p:sp>
+        <p:nvSpPr>
+          <p:cNvPr id="35" name="Oval 34"/>
+          <p:cNvSpPr/>
+          <p:nvPr/>
+        </p:nvSpPr>
+        <p:spPr>
+          <a:xfrm rot="16200000">
+            <a:off x="5830387" y="3795700"/>
+            <a:ext cx="245746" cy="243840"/>
+          </a:xfrm>
+          <a:prstGeom prst="ellipse">
+            <a:avLst/>
+          </a:prstGeom>
+          <a:ln w="19050">
+            <a:solidFill>
+              <a:schemeClr val="tx1"/>
+            </a:solidFill>
+          </a:ln>
+        </p:spPr>
+        <p:style>
+          <a:lnRef idx="2">
+            <a:schemeClr val="accent1">
+              <a:shade val="50000"/>
+            </a:schemeClr>
+          </a:lnRef>
+          <a:fillRef idx="1">
+            <a:schemeClr val="accent1"/>
+          </a:fillRef>
+          <a:effectRef idx="0">
+            <a:schemeClr val="accent1"/>
+          </a:effectRef>
+          <a:fontRef idx="minor">
+            <a:schemeClr val="lt1"/>
+          </a:fontRef>
+        </p:style>
+        <p:txBody>
+          <a:bodyPr rtlCol="0" anchor="ctr"/>
+          <a:lstStyle/>
+          <a:p>
+            <a:pPr algn="ctr"/>
+            <a:endParaRPr lang="en-US"/>
+          </a:p>
+        </p:txBody>
+      </p:sp>
+      <p:sp>
+        <p:nvSpPr>
+          <p:cNvPr id="36" name="Flowchart: Terminator 35"/>
+          <p:cNvSpPr/>
+          <p:nvPr/>
+        </p:nvSpPr>
+        <p:spPr>
+          <a:xfrm rot="16200000">
+            <a:off x="5810513" y="3807751"/>
+            <a:ext cx="95488" cy="208168"/>
+          </a:xfrm>
+          <a:prstGeom prst="flowChartTerminator">
+            <a:avLst/>
+          </a:prstGeom>
+          <a:ln w="19050">
+            <a:solidFill>
+              <a:schemeClr val="tx1"/>
+            </a:solidFill>
+          </a:ln>
+        </p:spPr>
+        <p:style>
+          <a:lnRef idx="2">
+            <a:schemeClr val="accent1">
+              <a:shade val="50000"/>
+            </a:schemeClr>
+          </a:lnRef>
+          <a:fillRef idx="1">
+            <a:schemeClr val="accent1"/>
+          </a:fillRef>
+          <a:effectRef idx="0">
+            <a:schemeClr val="accent1"/>
+          </a:effectRef>
+          <a:fontRef idx="minor">
+            <a:schemeClr val="lt1"/>
+          </a:fontRef>
+        </p:style>
+        <p:txBody>
+          <a:bodyPr rtlCol="0" anchor="ctr"/>
+          <a:lstStyle/>
+          <a:p>
+            <a:pPr algn="ctr"/>
+            <a:endParaRPr lang="en-US"/>
+          </a:p>
+        </p:txBody>
+      </p:sp>
+      <p:sp>
+        <p:nvSpPr>
+          <p:cNvPr id="37" name="Oval 36"/>
+          <p:cNvSpPr/>
+          <p:nvPr/>
+        </p:nvSpPr>
+        <p:spPr>
+          <a:xfrm rot="16200000">
+            <a:off x="6651163" y="3795700"/>
+            <a:ext cx="245746" cy="243840"/>
+          </a:xfrm>
+          <a:prstGeom prst="ellipse">
+            <a:avLst/>
+          </a:prstGeom>
+          <a:ln w="19050">
+            <a:solidFill>
+              <a:schemeClr val="tx1"/>
+            </a:solidFill>
+          </a:ln>
+        </p:spPr>
+        <p:style>
+          <a:lnRef idx="2">
+            <a:schemeClr val="accent1">
+              <a:shade val="50000"/>
+            </a:schemeClr>
+          </a:lnRef>
+          <a:fillRef idx="1">
+            <a:schemeClr val="accent1"/>
+          </a:fillRef>
+          <a:effectRef idx="0">
+            <a:schemeClr val="accent1"/>
+          </a:effectRef>
+          <a:fontRef idx="minor">
+            <a:schemeClr val="lt1"/>
+          </a:fontRef>
+        </p:style>
+        <p:txBody>
+          <a:bodyPr rtlCol="0" anchor="ctr"/>
+          <a:lstStyle/>
+          <a:p>
+            <a:pPr algn="ctr"/>
+            <a:endParaRPr lang="en-US"/>
+          </a:p>
+        </p:txBody>
+      </p:sp>
+      <p:sp>
+        <p:nvSpPr>
+          <p:cNvPr id="38" name="Flowchart: Terminator 37"/>
+          <p:cNvSpPr/>
+          <p:nvPr/>
+        </p:nvSpPr>
+        <p:spPr>
+          <a:xfrm rot="16200000">
+            <a:off x="6631289" y="3807751"/>
+            <a:ext cx="95488" cy="208168"/>
+          </a:xfrm>
+          <a:prstGeom prst="flowChartTerminator">
+            <a:avLst/>
+          </a:prstGeom>
+          <a:ln w="19050">
+            <a:solidFill>
+              <a:schemeClr val="tx1"/>
+            </a:solidFill>
+          </a:ln>
+        </p:spPr>
+        <p:style>
+          <a:lnRef idx="2">
+            <a:schemeClr val="accent1">
+              <a:shade val="50000"/>
+            </a:schemeClr>
+          </a:lnRef>
+          <a:fillRef idx="1">
+            <a:schemeClr val="accent1"/>
+          </a:fillRef>
+          <a:effectRef idx="0">
+            <a:schemeClr val="accent1"/>
+          </a:effectRef>
+          <a:fontRef idx="minor">
+            <a:schemeClr val="lt1"/>
+          </a:fontRef>
+        </p:style>
+        <p:txBody>
+          <a:bodyPr rtlCol="0" anchor="ctr"/>
+          <a:lstStyle/>
+          <a:p>
+            <a:pPr algn="ctr"/>
+            <a:endParaRPr lang="en-US"/>
+          </a:p>
+        </p:txBody>
+      </p:sp>
+      <p:sp>
+        <p:nvSpPr>
+          <p:cNvPr id="39" name="TextBox 38"/>
+          <p:cNvSpPr txBox="1"/>
+          <p:nvPr/>
+        </p:nvSpPr>
+        <p:spPr>
+          <a:xfrm rot="16200000">
+            <a:off x="5705042" y="4049121"/>
+            <a:ext cx="455574" cy="461665"/>
+          </a:xfrm>
+          <a:prstGeom prst="rect">
+            <a:avLst/>
+          </a:prstGeom>
+          <a:noFill/>
+        </p:spPr>
+        <p:txBody>
+          <a:bodyPr wrap="none" rtlCol="0">
+            <a:spAutoFit/>
+          </a:bodyPr>
+          <a:lstStyle/>
+          <a:p>
+            <a:pPr algn="ctr"/>
+            <a:r>
+              <a:rPr lang="en-US" sz="800" b="1" dirty="0">
+                <a:latin typeface="Century Gothic" panose="020B0502020202020204" pitchFamily="34" charset="0"/>
+                <a:cs typeface="Adobe Devanagari" panose="02040503050201020203" pitchFamily="18" charset="0"/>
+              </a:rPr>
+              <a:t>Opt 1</a:t>
+            </a:r>
+          </a:p>
+          <a:p>
+            <a:pPr algn="ctr"/>
+            <a:r>
+              <a:rPr lang="en-US" sz="800" b="1" dirty="0">
+                <a:latin typeface="Century Gothic" panose="020B0502020202020204" pitchFamily="34" charset="0"/>
+                <a:cs typeface="Adobe Devanagari" panose="02040503050201020203" pitchFamily="18" charset="0"/>
+              </a:rPr>
+              <a:t>Opt 2</a:t>
+            </a:r>
+          </a:p>
+          <a:p>
+            <a:pPr algn="ctr"/>
+            <a:r>
+              <a:rPr lang="en-US" sz="800" b="1" dirty="0">
+                <a:latin typeface="Century Gothic" panose="020B0502020202020204" pitchFamily="34" charset="0"/>
+                <a:cs typeface="Adobe Devanagari" panose="02040503050201020203" pitchFamily="18" charset="0"/>
+              </a:rPr>
+              <a:t>Opt 3</a:t>
+            </a:r>
+          </a:p>
+        </p:txBody>
+      </p:sp>
+      <p:sp>
+        <p:nvSpPr>
+          <p:cNvPr id="40" name="TextBox 39"/>
+          <p:cNvSpPr txBox="1"/>
+          <p:nvPr/>
+        </p:nvSpPr>
+        <p:spPr>
+          <a:xfrm rot="16200000">
+            <a:off x="6540944" y="4039021"/>
+            <a:ext cx="455574" cy="461665"/>
+          </a:xfrm>
+          <a:prstGeom prst="rect">
+            <a:avLst/>
+          </a:prstGeom>
+          <a:noFill/>
+        </p:spPr>
+        <p:txBody>
+          <a:bodyPr wrap="none" rtlCol="0">
+            <a:spAutoFit/>
+          </a:bodyPr>
+          <a:lstStyle/>
+          <a:p>
+            <a:pPr algn="ctr"/>
+            <a:r>
+              <a:rPr lang="en-US" sz="800" b="1" dirty="0">
+                <a:latin typeface="Century Gothic" panose="020B0502020202020204" pitchFamily="34" charset="0"/>
+                <a:cs typeface="Adobe Devanagari" panose="02040503050201020203" pitchFamily="18" charset="0"/>
+              </a:rPr>
+              <a:t>Opt 1</a:t>
+            </a:r>
+          </a:p>
+          <a:p>
+            <a:pPr algn="ctr"/>
+            <a:r>
+              <a:rPr lang="en-US" sz="800" b="1" dirty="0">
+                <a:latin typeface="Century Gothic" panose="020B0502020202020204" pitchFamily="34" charset="0"/>
+                <a:cs typeface="Adobe Devanagari" panose="02040503050201020203" pitchFamily="18" charset="0"/>
+              </a:rPr>
+              <a:t>Opt 2</a:t>
+            </a:r>
+          </a:p>
+          <a:p>
+            <a:pPr algn="ctr"/>
+            <a:r>
+              <a:rPr lang="en-US" sz="800" b="1" dirty="0">
+                <a:latin typeface="Century Gothic" panose="020B0502020202020204" pitchFamily="34" charset="0"/>
+                <a:cs typeface="Adobe Devanagari" panose="02040503050201020203" pitchFamily="18" charset="0"/>
+              </a:rPr>
+              <a:t>Opt 3</a:t>
+            </a:r>
+          </a:p>
+        </p:txBody>
+      </p:sp>
+      <p:sp>
+        <p:nvSpPr>
+          <p:cNvPr id="41" name="TextBox 40"/>
+          <p:cNvSpPr txBox="1"/>
+          <p:nvPr/>
+        </p:nvSpPr>
+        <p:spPr>
+          <a:xfrm>
+            <a:off x="4837137" y="3551712"/>
+            <a:ext cx="657552" cy="230832"/>
+          </a:xfrm>
+          <a:prstGeom prst="rect">
+            <a:avLst/>
+          </a:prstGeom>
+          <a:noFill/>
+        </p:spPr>
+        <p:txBody>
+          <a:bodyPr wrap="none" rtlCol="0">
+            <a:spAutoFit/>
+          </a:bodyPr>
+          <a:lstStyle/>
+          <a:p>
+            <a:pPr algn="ctr"/>
+            <a:r>
+              <a:rPr lang="en-US" sz="900" b="1" dirty="0">
+                <a:latin typeface="Century Gothic" panose="020B0502020202020204" pitchFamily="34" charset="0"/>
+                <a:cs typeface="Adobe Devanagari" panose="02040503050201020203" pitchFamily="18" charset="0"/>
+              </a:rPr>
+              <a:t>Toggle 1</a:t>
+            </a:r>
+          </a:p>
+        </p:txBody>
+      </p:sp>
+      <p:sp>
+        <p:nvSpPr>
+          <p:cNvPr id="42" name="TextBox 41"/>
+          <p:cNvSpPr txBox="1"/>
+          <p:nvPr/>
+        </p:nvSpPr>
+        <p:spPr>
+          <a:xfrm>
+            <a:off x="5623930" y="3560229"/>
+            <a:ext cx="657552" cy="230832"/>
+          </a:xfrm>
+          <a:prstGeom prst="rect">
+            <a:avLst/>
+          </a:prstGeom>
+          <a:noFill/>
+        </p:spPr>
+        <p:txBody>
+          <a:bodyPr wrap="none" rtlCol="0">
+            <a:spAutoFit/>
+          </a:bodyPr>
+          <a:lstStyle/>
+          <a:p>
+            <a:pPr algn="ctr"/>
+            <a:r>
+              <a:rPr lang="en-US" sz="900" b="1" dirty="0">
+                <a:latin typeface="Century Gothic" panose="020B0502020202020204" pitchFamily="34" charset="0"/>
+                <a:cs typeface="Adobe Devanagari" panose="02040503050201020203" pitchFamily="18" charset="0"/>
+              </a:rPr>
+              <a:t>Toggle 2</a:t>
+            </a:r>
+          </a:p>
+        </p:txBody>
+      </p:sp>
+      <p:sp>
+        <p:nvSpPr>
+          <p:cNvPr id="43" name="TextBox 42"/>
+          <p:cNvSpPr txBox="1"/>
+          <p:nvPr/>
+        </p:nvSpPr>
+        <p:spPr>
+          <a:xfrm>
+            <a:off x="6454343" y="3562383"/>
+            <a:ext cx="657552" cy="230832"/>
+          </a:xfrm>
+          <a:prstGeom prst="rect">
+            <a:avLst/>
+          </a:prstGeom>
+          <a:noFill/>
+        </p:spPr>
+        <p:txBody>
+          <a:bodyPr wrap="none" rtlCol="0">
+            <a:spAutoFit/>
+          </a:bodyPr>
+          <a:lstStyle/>
+          <a:p>
+            <a:pPr algn="ctr"/>
+            <a:r>
+              <a:rPr lang="en-US" sz="900" b="1" dirty="0">
+                <a:latin typeface="Century Gothic" panose="020B0502020202020204" pitchFamily="34" charset="0"/>
+                <a:cs typeface="Adobe Devanagari" panose="02040503050201020203" pitchFamily="18" charset="0"/>
+              </a:rPr>
+              <a:t>Toggle 3</a:t>
+            </a:r>
+          </a:p>
+        </p:txBody>
+      </p:sp>
+      <p:sp>
+        <p:nvSpPr>
+          <p:cNvPr id="49" name="Rectangle 48"/>
+          <p:cNvSpPr/>
+          <p:nvPr/>
+        </p:nvSpPr>
+        <p:spPr>
+          <a:xfrm>
+            <a:off x="4552601" y="262549"/>
+            <a:ext cx="2675728" cy="727102"/>
+          </a:xfrm>
+          <a:prstGeom prst="rect">
+            <a:avLst/>
+          </a:prstGeom>
+        </p:spPr>
+        <p:style>
+          <a:lnRef idx="2">
+            <a:schemeClr val="dk1">
+              <a:shade val="50000"/>
+            </a:schemeClr>
+          </a:lnRef>
+          <a:fillRef idx="1003">
+            <a:schemeClr val="lt1"/>
+          </a:fillRef>
+          <a:effectRef idx="0">
+            <a:schemeClr val="dk1"/>
+          </a:effectRef>
+          <a:fontRef idx="minor">
+            <a:schemeClr val="lt1"/>
+          </a:fontRef>
+        </p:style>
+        <p:txBody>
+          <a:bodyPr rtlCol="0" anchor="ctr"/>
+          <a:lstStyle/>
+          <a:p>
+            <a:pPr marL="285750" indent="-285750">
+              <a:buFont typeface="Arial" panose="020B0604020202020204" pitchFamily="34" charset="0"/>
+              <a:buChar char="•"/>
+            </a:pPr>
+            <a:r>
+              <a:rPr lang="en-US" sz="1600" b="1" dirty="0">
+                <a:solidFill>
+                  <a:schemeClr val="tx1"/>
+                </a:solidFill>
+              </a:rPr>
+              <a:t>Stereo ¼” In/Out Jacks</a:t>
+            </a:r>
+          </a:p>
+          <a:p>
+            <a:pPr marL="285750" indent="-285750">
+              <a:buFont typeface="Arial" panose="020B0604020202020204" pitchFamily="34" charset="0"/>
+              <a:buChar char="•"/>
+            </a:pPr>
+            <a:r>
+              <a:rPr lang="en-US" sz="1600" b="1" dirty="0">
+                <a:solidFill>
+                  <a:schemeClr val="tx1"/>
+                </a:solidFill>
+              </a:rPr>
+              <a:t>9v Center Negative Power</a:t>
+            </a:r>
+          </a:p>
+        </p:txBody>
+      </p:sp>
+      <p:sp>
+        <p:nvSpPr>
+          <p:cNvPr id="52" name="Rectangle 51"/>
+          <p:cNvSpPr/>
+          <p:nvPr/>
+        </p:nvSpPr>
+        <p:spPr>
+          <a:xfrm>
+            <a:off x="7503067" y="1963518"/>
+            <a:ext cx="2433413" cy="428695"/>
+          </a:xfrm>
+          <a:prstGeom prst="rect">
+            <a:avLst/>
+          </a:prstGeom>
+        </p:spPr>
+        <p:style>
+          <a:lnRef idx="2">
+            <a:schemeClr val="dk1">
+              <a:shade val="50000"/>
+            </a:schemeClr>
+          </a:lnRef>
+          <a:fillRef idx="1003">
+            <a:schemeClr val="dk1"/>
+          </a:fillRef>
+          <a:effectRef idx="0">
+            <a:schemeClr val="dk1"/>
+          </a:effectRef>
+          <a:fontRef idx="minor">
+            <a:schemeClr val="lt1"/>
+          </a:fontRef>
+        </p:style>
+        <p:txBody>
+          <a:bodyPr rtlCol="0" anchor="ctr"/>
+          <a:lstStyle/>
+          <a:p>
+            <a:r>
+              <a:rPr lang="en-US" sz="1600" b="1" dirty="0">
+                <a:solidFill>
+                  <a:schemeClr val="bg1"/>
+                </a:solidFill>
+              </a:rPr>
+              <a:t>MIDI Input (1/8” TRS Jack)</a:t>
+            </a:r>
+          </a:p>
+        </p:txBody>
+      </p:sp>
+      <p:sp>
+        <p:nvSpPr>
+          <p:cNvPr id="55" name="Rectangle 54"/>
+          <p:cNvSpPr/>
+          <p:nvPr/>
+        </p:nvSpPr>
+        <p:spPr>
+          <a:xfrm>
+            <a:off x="7503067" y="2923436"/>
+            <a:ext cx="2016853" cy="448087"/>
+          </a:xfrm>
+          <a:prstGeom prst="rect">
+            <a:avLst/>
+          </a:prstGeom>
+        </p:spPr>
+        <p:style>
+          <a:lnRef idx="2">
+            <a:schemeClr val="dk1">
+              <a:shade val="50000"/>
+            </a:schemeClr>
+          </a:lnRef>
+          <a:fillRef idx="1003">
+            <a:schemeClr val="dk1"/>
+          </a:fillRef>
+          <a:effectRef idx="0">
+            <a:schemeClr val="dk1"/>
+          </a:effectRef>
+          <a:fontRef idx="minor">
+            <a:schemeClr val="lt1"/>
+          </a:fontRef>
+        </p:style>
+        <p:txBody>
+          <a:bodyPr rtlCol="0" anchor="ctr"/>
+          <a:lstStyle/>
+          <a:p>
+            <a:r>
+              <a:rPr lang="en-US" sz="1600" b="1" dirty="0">
+                <a:solidFill>
+                  <a:schemeClr val="bg1"/>
+                </a:solidFill>
+              </a:rPr>
+              <a:t>Daisy Seed USB port</a:t>
+            </a:r>
+          </a:p>
+        </p:txBody>
+      </p:sp>
+      <p:sp>
+        <p:nvSpPr>
+          <p:cNvPr id="56" name="Rectangle 55"/>
+          <p:cNvSpPr/>
+          <p:nvPr/>
+        </p:nvSpPr>
+        <p:spPr>
+          <a:xfrm>
+            <a:off x="7503067" y="4556498"/>
+            <a:ext cx="2016853" cy="328586"/>
+          </a:xfrm>
+          <a:prstGeom prst="rect">
+            <a:avLst/>
+          </a:prstGeom>
+        </p:spPr>
+        <p:style>
+          <a:lnRef idx="2">
+            <a:schemeClr val="dk1">
+              <a:shade val="50000"/>
+            </a:schemeClr>
+          </a:lnRef>
+          <a:fillRef idx="1001">
+            <a:schemeClr val="dk2"/>
+          </a:fillRef>
+          <a:effectRef idx="0">
+            <a:schemeClr val="dk1"/>
+          </a:effectRef>
+          <a:fontRef idx="minor">
+            <a:schemeClr val="lt1"/>
+          </a:fontRef>
+        </p:style>
+        <p:txBody>
+          <a:bodyPr rtlCol="0" anchor="ctr"/>
+          <a:lstStyle/>
+          <a:p>
+            <a:r>
+              <a:rPr lang="en-US" sz="1600" b="1" dirty="0">
+                <a:solidFill>
+                  <a:schemeClr val="bg1"/>
+                </a:solidFill>
+              </a:rPr>
+              <a:t>4 On/Off Dipswitches</a:t>
+            </a:r>
+          </a:p>
+        </p:txBody>
+      </p:sp>
+      <p:sp>
+        <p:nvSpPr>
+          <p:cNvPr id="57" name="Rectangle 56"/>
+          <p:cNvSpPr/>
+          <p:nvPr/>
+        </p:nvSpPr>
+        <p:spPr>
+          <a:xfrm>
+            <a:off x="4585160" y="5990039"/>
+            <a:ext cx="2778082" cy="480080"/>
+          </a:xfrm>
+          <a:prstGeom prst="rect">
+            <a:avLst/>
+          </a:prstGeom>
+        </p:spPr>
+        <p:style>
+          <a:lnRef idx="2">
+            <a:schemeClr val="dk1">
+              <a:shade val="50000"/>
+            </a:schemeClr>
+          </a:lnRef>
+          <a:fillRef idx="1001">
+            <a:schemeClr val="dk2"/>
+          </a:fillRef>
+          <a:effectRef idx="0">
+            <a:schemeClr val="dk1"/>
+          </a:effectRef>
+          <a:fontRef idx="minor">
+            <a:schemeClr val="lt1"/>
+          </a:fontRef>
+        </p:style>
+        <p:txBody>
+          <a:bodyPr rtlCol="0" anchor="ctr"/>
+          <a:lstStyle/>
+          <a:p>
+            <a:r>
+              <a:rPr lang="en-US" sz="1600" b="1" dirty="0">
+                <a:solidFill>
+                  <a:schemeClr val="bg1"/>
+                </a:solidFill>
+              </a:rPr>
+              <a:t>Two Momentary Footswitches</a:t>
+            </a:r>
+          </a:p>
+          <a:p>
+            <a:r>
+              <a:rPr lang="en-US" sz="1600" b="1" dirty="0">
+                <a:solidFill>
+                  <a:schemeClr val="bg1"/>
+                </a:solidFill>
+              </a:rPr>
+              <a:t>with indication LEDs.</a:t>
+            </a:r>
+          </a:p>
+        </p:txBody>
+      </p:sp>
+      <p:sp>
+        <p:nvSpPr>
+          <p:cNvPr id="59" name="Rectangle 58"/>
+          <p:cNvSpPr/>
+          <p:nvPr/>
+        </p:nvSpPr>
+        <p:spPr>
+          <a:xfrm>
+            <a:off x="259856" y="262029"/>
+            <a:ext cx="4226847" cy="1015417"/>
+          </a:xfrm>
+          <a:prstGeom prst="rect">
+            <a:avLst/>
+          </a:prstGeom>
+          <a:ln/>
+        </p:spPr>
+        <p:style>
+          <a:lnRef idx="1">
+            <a:schemeClr val="accent2"/>
+          </a:lnRef>
+          <a:fillRef idx="2">
+            <a:schemeClr val="accent2"/>
+          </a:fillRef>
+          <a:effectRef idx="1">
+            <a:schemeClr val="accent2"/>
+          </a:effectRef>
+          <a:fontRef idx="minor">
+            <a:schemeClr val="dk1"/>
+          </a:fontRef>
+        </p:style>
+        <p:txBody>
+          <a:bodyPr rtlCol="0" anchor="ctr"/>
+          <a:lstStyle/>
+          <a:p>
+            <a:r>
+              <a:rPr lang="en-US" sz="2800" b="1" dirty="0" err="1">
+                <a:solidFill>
+                  <a:schemeClr val="tx1"/>
+                </a:solidFill>
+              </a:rPr>
+              <a:t>FunBox</a:t>
+            </a:r>
+            <a:r>
+              <a:rPr lang="en-US" sz="2800" b="1" dirty="0">
+                <a:solidFill>
+                  <a:schemeClr val="tx1"/>
+                </a:solidFill>
+              </a:rPr>
+              <a:t> </a:t>
+            </a:r>
+            <a:r>
+              <a:rPr lang="en-US" b="1" dirty="0">
+                <a:solidFill>
+                  <a:schemeClr val="tx1"/>
+                </a:solidFill>
+              </a:rPr>
+              <a:t>is a pedal platform designed around the Daisy Seed. Fits in a 125B enclosure.</a:t>
+            </a:r>
+          </a:p>
+        </p:txBody>
+      </p:sp>
+      <p:sp>
+        <p:nvSpPr>
+          <p:cNvPr id="81" name="Rectangle 80"/>
+          <p:cNvSpPr/>
+          <p:nvPr/>
+        </p:nvSpPr>
+        <p:spPr>
+          <a:xfrm>
+            <a:off x="7205470" y="4326731"/>
+            <a:ext cx="45719" cy="404813"/>
+          </a:xfrm>
+          <a:prstGeom prst="rect">
+            <a:avLst/>
+          </a:prstGeom>
+        </p:spPr>
+        <p:style>
+          <a:lnRef idx="2">
+            <a:schemeClr val="accent1">
+              <a:shade val="50000"/>
+            </a:schemeClr>
+          </a:lnRef>
+          <a:fillRef idx="1">
+            <a:schemeClr val="accent1"/>
+          </a:fillRef>
+          <a:effectRef idx="0">
+            <a:schemeClr val="accent1"/>
+          </a:effectRef>
+          <a:fontRef idx="minor">
+            <a:schemeClr val="lt1"/>
+          </a:fontRef>
+        </p:style>
+        <p:txBody>
+          <a:bodyPr rtlCol="0" anchor="ctr"/>
+          <a:lstStyle/>
+          <a:p>
+            <a:pPr algn="ctr"/>
+            <a:endParaRPr lang="en-US"/>
+          </a:p>
+        </p:txBody>
+      </p:sp>
+      <p:sp>
+        <p:nvSpPr>
+          <p:cNvPr id="82" name="Rectangle 81"/>
+          <p:cNvSpPr/>
+          <p:nvPr/>
+        </p:nvSpPr>
+        <p:spPr>
+          <a:xfrm>
+            <a:off x="7240002" y="4361522"/>
+            <a:ext cx="54086" cy="51892"/>
+          </a:xfrm>
+          <a:prstGeom prst="rect">
+            <a:avLst/>
+          </a:prstGeom>
+        </p:spPr>
+        <p:style>
+          <a:lnRef idx="2">
+            <a:schemeClr val="dk1"/>
+          </a:lnRef>
+          <a:fillRef idx="1">
+            <a:schemeClr val="lt1"/>
+          </a:fillRef>
+          <a:effectRef idx="0">
+            <a:schemeClr val="dk1"/>
+          </a:effectRef>
+          <a:fontRef idx="minor">
+            <a:schemeClr val="dk1"/>
+          </a:fontRef>
+        </p:style>
+        <p:txBody>
+          <a:bodyPr rtlCol="0" anchor="ctr"/>
+          <a:lstStyle/>
+          <a:p>
+            <a:pPr algn="ctr"/>
+            <a:endParaRPr lang="en-US"/>
+          </a:p>
+        </p:txBody>
+      </p:sp>
+      <p:sp>
+        <p:nvSpPr>
+          <p:cNvPr id="83" name="Rectangle 82"/>
+          <p:cNvSpPr/>
+          <p:nvPr/>
+        </p:nvSpPr>
+        <p:spPr>
+          <a:xfrm>
+            <a:off x="7239482" y="4455654"/>
+            <a:ext cx="54086" cy="51892"/>
+          </a:xfrm>
+          <a:prstGeom prst="rect">
+            <a:avLst/>
+          </a:prstGeom>
+        </p:spPr>
+        <p:style>
+          <a:lnRef idx="2">
+            <a:schemeClr val="dk1"/>
+          </a:lnRef>
+          <a:fillRef idx="1">
+            <a:schemeClr val="lt1"/>
+          </a:fillRef>
+          <a:effectRef idx="0">
+            <a:schemeClr val="dk1"/>
+          </a:effectRef>
+          <a:fontRef idx="minor">
+            <a:schemeClr val="dk1"/>
+          </a:fontRef>
+        </p:style>
+        <p:txBody>
+          <a:bodyPr rtlCol="0" anchor="ctr"/>
+          <a:lstStyle/>
+          <a:p>
+            <a:pPr algn="ctr"/>
+            <a:endParaRPr lang="en-US"/>
+          </a:p>
+        </p:txBody>
+      </p:sp>
+      <p:sp>
+        <p:nvSpPr>
+          <p:cNvPr id="66" name="TextBox 65"/>
+          <p:cNvSpPr txBox="1"/>
+          <p:nvPr/>
+        </p:nvSpPr>
+        <p:spPr>
+          <a:xfrm>
+            <a:off x="6376896" y="5548457"/>
+            <a:ext cx="724878" cy="246221"/>
+          </a:xfrm>
+          <a:prstGeom prst="rect">
+            <a:avLst/>
+          </a:prstGeom>
+          <a:noFill/>
+        </p:spPr>
+        <p:txBody>
+          <a:bodyPr wrap="none" rtlCol="0">
+            <a:spAutoFit/>
+          </a:bodyPr>
+          <a:lstStyle/>
+          <a:p>
+            <a:pPr algn="ctr"/>
+            <a:r>
+              <a:rPr lang="en-US" sz="1000" b="1" dirty="0" err="1">
+                <a:latin typeface="Century Gothic" panose="020B0502020202020204" pitchFamily="34" charset="0"/>
+                <a:cs typeface="Adobe Devanagari" panose="02040503050201020203" pitchFamily="18" charset="0"/>
+              </a:rPr>
+              <a:t>FootSw</a:t>
+            </a:r>
+            <a:r>
+              <a:rPr lang="en-US" sz="1000" b="1" dirty="0">
+                <a:latin typeface="Century Gothic" panose="020B0502020202020204" pitchFamily="34" charset="0"/>
+                <a:cs typeface="Adobe Devanagari" panose="02040503050201020203" pitchFamily="18" charset="0"/>
+              </a:rPr>
+              <a:t> 2</a:t>
+            </a:r>
+          </a:p>
+        </p:txBody>
+      </p:sp>
+      <p:sp>
+        <p:nvSpPr>
+          <p:cNvPr id="67" name="Rectangle 66"/>
+          <p:cNvSpPr/>
+          <p:nvPr/>
+        </p:nvSpPr>
+        <p:spPr>
+          <a:xfrm>
+            <a:off x="7239482" y="4543676"/>
+            <a:ext cx="54086" cy="51892"/>
+          </a:xfrm>
+          <a:prstGeom prst="rect">
+            <a:avLst/>
+          </a:prstGeom>
+        </p:spPr>
+        <p:style>
+          <a:lnRef idx="2">
+            <a:schemeClr val="dk1"/>
+          </a:lnRef>
+          <a:fillRef idx="1">
+            <a:schemeClr val="lt1"/>
+          </a:fillRef>
+          <a:effectRef idx="0">
+            <a:schemeClr val="dk1"/>
+          </a:effectRef>
+          <a:fontRef idx="minor">
+            <a:schemeClr val="dk1"/>
+          </a:fontRef>
+        </p:style>
+        <p:txBody>
+          <a:bodyPr rtlCol="0" anchor="ctr"/>
+          <a:lstStyle/>
+          <a:p>
+            <a:pPr algn="ctr"/>
+            <a:endParaRPr lang="en-US"/>
+          </a:p>
+        </p:txBody>
+      </p:sp>
+      <p:sp>
+        <p:nvSpPr>
+          <p:cNvPr id="69" name="Rectangle 68"/>
+          <p:cNvSpPr/>
+          <p:nvPr/>
+        </p:nvSpPr>
+        <p:spPr>
+          <a:xfrm>
+            <a:off x="7239482" y="4633048"/>
+            <a:ext cx="54086" cy="51892"/>
+          </a:xfrm>
+          <a:prstGeom prst="rect">
+            <a:avLst/>
+          </a:prstGeom>
+        </p:spPr>
+        <p:style>
+          <a:lnRef idx="2">
+            <a:schemeClr val="dk1"/>
+          </a:lnRef>
+          <a:fillRef idx="1">
+            <a:schemeClr val="lt1"/>
+          </a:fillRef>
+          <a:effectRef idx="0">
+            <a:schemeClr val="dk1"/>
+          </a:effectRef>
+          <a:fontRef idx="minor">
+            <a:schemeClr val="dk1"/>
+          </a:fontRef>
+        </p:style>
+        <p:txBody>
+          <a:bodyPr rtlCol="0" anchor="ctr"/>
+          <a:lstStyle/>
+          <a:p>
+            <a:pPr algn="ctr"/>
+            <a:endParaRPr lang="en-US"/>
+          </a:p>
+        </p:txBody>
+      </p:sp>
+      <p:sp>
+        <p:nvSpPr>
+          <p:cNvPr id="70" name="TextBox 69"/>
+          <p:cNvSpPr txBox="1"/>
+          <p:nvPr/>
+        </p:nvSpPr>
+        <p:spPr>
+          <a:xfrm rot="5400000">
+            <a:off x="4369644" y="2091586"/>
+            <a:ext cx="833883" cy="246221"/>
+          </a:xfrm>
+          <a:prstGeom prst="rect">
+            <a:avLst/>
+          </a:prstGeom>
+          <a:noFill/>
+        </p:spPr>
+        <p:txBody>
+          <a:bodyPr wrap="none" rtlCol="0">
+            <a:spAutoFit/>
+          </a:bodyPr>
+          <a:lstStyle/>
+          <a:p>
+            <a:pPr algn="ctr"/>
+            <a:r>
+              <a:rPr lang="en-US" sz="1000" b="1" dirty="0">
+                <a:latin typeface="Century Gothic" panose="020B0502020202020204" pitchFamily="34" charset="0"/>
+                <a:cs typeface="Adobe Devanagari" panose="02040503050201020203" pitchFamily="18" charset="0"/>
+              </a:rPr>
+              <a:t>Expression</a:t>
+            </a:r>
+          </a:p>
+        </p:txBody>
+      </p:sp>
+      <p:sp>
+        <p:nvSpPr>
+          <p:cNvPr id="71" name="TextBox 70"/>
+          <p:cNvSpPr txBox="1"/>
+          <p:nvPr/>
+        </p:nvSpPr>
+        <p:spPr>
+          <a:xfrm rot="16200000">
+            <a:off x="6867601" y="2070599"/>
+            <a:ext cx="460382" cy="246221"/>
+          </a:xfrm>
+          <a:prstGeom prst="rect">
+            <a:avLst/>
+          </a:prstGeom>
+          <a:noFill/>
+        </p:spPr>
+        <p:txBody>
+          <a:bodyPr wrap="none" rtlCol="0">
+            <a:spAutoFit/>
+          </a:bodyPr>
+          <a:lstStyle/>
+          <a:p>
+            <a:pPr algn="ctr"/>
+            <a:r>
+              <a:rPr lang="en-US" sz="1000" b="1" dirty="0">
+                <a:latin typeface="Century Gothic" panose="020B0502020202020204" pitchFamily="34" charset="0"/>
+                <a:cs typeface="Adobe Devanagari" panose="02040503050201020203" pitchFamily="18" charset="0"/>
+              </a:rPr>
+              <a:t>MIDI</a:t>
+            </a:r>
+          </a:p>
+        </p:txBody>
+      </p:sp>
+      <p:sp>
+        <p:nvSpPr>
+          <p:cNvPr id="72" name="TextBox 71"/>
+          <p:cNvSpPr txBox="1"/>
+          <p:nvPr/>
+        </p:nvSpPr>
+        <p:spPr>
+          <a:xfrm rot="16200000">
+            <a:off x="6888870" y="3101168"/>
+            <a:ext cx="407484" cy="246221"/>
+          </a:xfrm>
+          <a:prstGeom prst="rect">
+            <a:avLst/>
+          </a:prstGeom>
+          <a:noFill/>
+        </p:spPr>
+        <p:txBody>
+          <a:bodyPr wrap="none" rtlCol="0">
+            <a:spAutoFit/>
+          </a:bodyPr>
+          <a:lstStyle/>
+          <a:p>
+            <a:pPr algn="ctr"/>
+            <a:r>
+              <a:rPr lang="en-US" sz="1000" b="1" dirty="0">
+                <a:latin typeface="Century Gothic" panose="020B0502020202020204" pitchFamily="34" charset="0"/>
+                <a:cs typeface="Adobe Devanagari" panose="02040503050201020203" pitchFamily="18" charset="0"/>
+              </a:rPr>
+              <a:t>USB</a:t>
+            </a:r>
+          </a:p>
+        </p:txBody>
+      </p:sp>
+      <p:sp>
+        <p:nvSpPr>
+          <p:cNvPr id="60" name="Rectangle 59"/>
+          <p:cNvSpPr/>
+          <p:nvPr/>
+        </p:nvSpPr>
+        <p:spPr>
+          <a:xfrm>
+            <a:off x="1130422" y="1955557"/>
+            <a:ext cx="3250889" cy="428695"/>
+          </a:xfrm>
+          <a:prstGeom prst="rect">
+            <a:avLst/>
+          </a:prstGeom>
+        </p:spPr>
+        <p:style>
+          <a:lnRef idx="2">
+            <a:schemeClr val="dk1">
+              <a:shade val="50000"/>
+            </a:schemeClr>
+          </a:lnRef>
+          <a:fillRef idx="1003">
+            <a:schemeClr val="dk1"/>
+          </a:fillRef>
+          <a:effectRef idx="0">
+            <a:schemeClr val="dk1"/>
+          </a:effectRef>
+          <a:fontRef idx="minor">
+            <a:schemeClr val="lt1"/>
+          </a:fontRef>
+        </p:style>
+        <p:txBody>
+          <a:bodyPr rtlCol="0" anchor="ctr"/>
+          <a:lstStyle/>
+          <a:p>
+            <a:r>
+              <a:rPr lang="en-US" sz="1600" b="1" dirty="0">
+                <a:solidFill>
+                  <a:schemeClr val="bg1"/>
+                </a:solidFill>
+              </a:rPr>
+              <a:t>Expression Input (1/8” TRS Jack)</a:t>
+            </a:r>
+          </a:p>
+        </p:txBody>
+      </p:sp>
+      <p:sp>
+        <p:nvSpPr>
+          <p:cNvPr id="61" name="Rectangle 60"/>
+          <p:cNvSpPr/>
+          <p:nvPr/>
+        </p:nvSpPr>
+        <p:spPr>
+          <a:xfrm>
+            <a:off x="1338617" y="3706618"/>
+            <a:ext cx="3023756" cy="410432"/>
+          </a:xfrm>
+          <a:prstGeom prst="rect">
+            <a:avLst/>
+          </a:prstGeom>
+        </p:spPr>
+        <p:style>
+          <a:lnRef idx="2">
+            <a:schemeClr val="dk1">
+              <a:shade val="50000"/>
+            </a:schemeClr>
+          </a:lnRef>
+          <a:fillRef idx="1001">
+            <a:schemeClr val="dk2"/>
+          </a:fillRef>
+          <a:effectRef idx="0">
+            <a:schemeClr val="dk1"/>
+          </a:effectRef>
+          <a:fontRef idx="minor">
+            <a:schemeClr val="lt1"/>
+          </a:fontRef>
+        </p:style>
+        <p:txBody>
+          <a:bodyPr rtlCol="0" anchor="ctr"/>
+          <a:lstStyle/>
+          <a:p>
+            <a:r>
+              <a:rPr lang="en-US" sz="1600" b="1" dirty="0">
+                <a:solidFill>
+                  <a:schemeClr val="bg1"/>
+                </a:solidFill>
+              </a:rPr>
+              <a:t>Three 3-way Toggles (On-Off-On)</a:t>
+            </a:r>
+          </a:p>
+        </p:txBody>
+      </p:sp>
+      <p:cxnSp>
+        <p:nvCxnSpPr>
+          <p:cNvPr id="62" name="Straight Arrow Connector 61"/>
+          <p:cNvCxnSpPr>
+            <a:stCxn id="61" idx="3"/>
+          </p:cNvCxnSpPr>
+          <p:nvPr/>
+        </p:nvCxnSpPr>
+        <p:spPr>
+          <a:xfrm>
+            <a:off x="4362373" y="3911834"/>
+            <a:ext cx="276302" cy="0"/>
+          </a:xfrm>
+          <a:prstGeom prst="straightConnector1">
+            <a:avLst/>
+          </a:prstGeom>
+          <a:ln>
+            <a:tailEnd type="triangle"/>
+          </a:ln>
+        </p:spPr>
+        <p:style>
+          <a:lnRef idx="3">
+            <a:schemeClr val="dk1"/>
+          </a:lnRef>
+          <a:fillRef idx="0">
+            <a:schemeClr val="dk1"/>
+          </a:fillRef>
+          <a:effectRef idx="2">
+            <a:schemeClr val="dk1"/>
+          </a:effectRef>
+          <a:fontRef idx="minor">
+            <a:schemeClr val="tx1"/>
+          </a:fontRef>
+        </p:style>
+      </p:cxnSp>
+      <p:cxnSp>
+        <p:nvCxnSpPr>
+          <p:cNvPr id="68" name="Straight Arrow Connector 67"/>
+          <p:cNvCxnSpPr/>
+          <p:nvPr/>
+        </p:nvCxnSpPr>
+        <p:spPr>
+          <a:xfrm>
+            <a:off x="4381311" y="2165058"/>
+            <a:ext cx="276302" cy="0"/>
+          </a:xfrm>
+          <a:prstGeom prst="straightConnector1">
+            <a:avLst/>
+          </a:prstGeom>
+          <a:ln>
+            <a:tailEnd type="triangle"/>
+          </a:ln>
+        </p:spPr>
+        <p:style>
+          <a:lnRef idx="3">
+            <a:schemeClr val="dk1"/>
+          </a:lnRef>
+          <a:fillRef idx="0">
+            <a:schemeClr val="dk1"/>
+          </a:fillRef>
+          <a:effectRef idx="2">
+            <a:schemeClr val="dk1"/>
+          </a:effectRef>
+          <a:fontRef idx="minor">
+            <a:schemeClr val="tx1"/>
+          </a:fontRef>
+        </p:style>
+      </p:cxnSp>
+      <p:cxnSp>
+        <p:nvCxnSpPr>
+          <p:cNvPr id="73" name="Straight Arrow Connector 72"/>
+          <p:cNvCxnSpPr/>
+          <p:nvPr/>
+        </p:nvCxnSpPr>
+        <p:spPr>
+          <a:xfrm flipH="1">
+            <a:off x="7266525" y="4623278"/>
+            <a:ext cx="236542" cy="0"/>
+          </a:xfrm>
+          <a:prstGeom prst="straightConnector1">
+            <a:avLst/>
+          </a:prstGeom>
+          <a:ln>
+            <a:tailEnd type="triangle"/>
+          </a:ln>
+        </p:spPr>
+        <p:style>
+          <a:lnRef idx="3">
+            <a:schemeClr val="dk1"/>
+          </a:lnRef>
+          <a:fillRef idx="0">
+            <a:schemeClr val="dk1"/>
+          </a:fillRef>
+          <a:effectRef idx="2">
+            <a:schemeClr val="dk1"/>
+          </a:effectRef>
+          <a:fontRef idx="minor">
+            <a:schemeClr val="tx1"/>
+          </a:fontRef>
+        </p:style>
+      </p:cxnSp>
+      <p:cxnSp>
+        <p:nvCxnSpPr>
+          <p:cNvPr id="74" name="Straight Arrow Connector 73"/>
+          <p:cNvCxnSpPr/>
+          <p:nvPr/>
+        </p:nvCxnSpPr>
+        <p:spPr>
+          <a:xfrm flipH="1">
+            <a:off x="7251189" y="3222216"/>
+            <a:ext cx="236542" cy="0"/>
+          </a:xfrm>
+          <a:prstGeom prst="straightConnector1">
+            <a:avLst/>
+          </a:prstGeom>
+          <a:ln>
+            <a:tailEnd type="triangle"/>
+          </a:ln>
+        </p:spPr>
+        <p:style>
+          <a:lnRef idx="3">
+            <a:schemeClr val="dk1"/>
+          </a:lnRef>
+          <a:fillRef idx="0">
+            <a:schemeClr val="dk1"/>
+          </a:fillRef>
+          <a:effectRef idx="2">
+            <a:schemeClr val="dk1"/>
+          </a:effectRef>
+          <a:fontRef idx="minor">
+            <a:schemeClr val="tx1"/>
+          </a:fontRef>
+        </p:style>
+      </p:cxnSp>
+      <p:cxnSp>
+        <p:nvCxnSpPr>
+          <p:cNvPr id="75" name="Straight Arrow Connector 74"/>
+          <p:cNvCxnSpPr/>
+          <p:nvPr/>
+        </p:nvCxnSpPr>
+        <p:spPr>
+          <a:xfrm flipH="1">
+            <a:off x="7244681" y="2193709"/>
+            <a:ext cx="236542" cy="0"/>
+          </a:xfrm>
+          <a:prstGeom prst="straightConnector1">
+            <a:avLst/>
+          </a:prstGeom>
+          <a:ln>
+            <a:tailEnd type="triangle"/>
+          </a:ln>
+        </p:spPr>
+        <p:style>
+          <a:lnRef idx="3">
+            <a:schemeClr val="dk1"/>
+          </a:lnRef>
+          <a:fillRef idx="0">
+            <a:schemeClr val="dk1"/>
+          </a:fillRef>
+          <a:effectRef idx="2">
+            <a:schemeClr val="dk1"/>
+          </a:effectRef>
+          <a:fontRef idx="minor">
+            <a:schemeClr val="tx1"/>
+          </a:fontRef>
+        </p:style>
+      </p:cxnSp>
+      <p:sp>
+        <p:nvSpPr>
+          <p:cNvPr id="65" name="Rectangle 64"/>
+          <p:cNvSpPr/>
+          <p:nvPr/>
+        </p:nvSpPr>
+        <p:spPr>
+          <a:xfrm>
+            <a:off x="2216110" y="2809545"/>
+            <a:ext cx="2146263" cy="410432"/>
+          </a:xfrm>
+          <a:prstGeom prst="rect">
+            <a:avLst/>
+          </a:prstGeom>
+        </p:spPr>
+        <p:style>
+          <a:lnRef idx="2">
+            <a:schemeClr val="dk1">
+              <a:shade val="50000"/>
+            </a:schemeClr>
+          </a:lnRef>
+          <a:fillRef idx="1001">
+            <a:schemeClr val="dk2"/>
+          </a:fillRef>
+          <a:effectRef idx="0">
+            <a:schemeClr val="dk1"/>
+          </a:effectRef>
+          <a:fontRef idx="minor">
+            <a:schemeClr val="lt1"/>
+          </a:fontRef>
+        </p:style>
+        <p:txBody>
+          <a:bodyPr rtlCol="0" anchor="ctr"/>
+          <a:lstStyle/>
+          <a:p>
+            <a:r>
+              <a:rPr lang="en-US" sz="1600" b="1" dirty="0">
+                <a:solidFill>
+                  <a:schemeClr val="bg1"/>
+                </a:solidFill>
+              </a:rPr>
+              <a:t>6 Potentiometer Knobs</a:t>
+            </a:r>
+          </a:p>
+        </p:txBody>
+      </p:sp>
+      <p:sp>
+        <p:nvSpPr>
+          <p:cNvPr id="76" name="Rectangle 75"/>
+          <p:cNvSpPr/>
+          <p:nvPr/>
+        </p:nvSpPr>
+        <p:spPr>
+          <a:xfrm>
+            <a:off x="166920" y="4373127"/>
+            <a:ext cx="4226847" cy="2096991"/>
+          </a:xfrm>
+          <a:prstGeom prst="rect">
+            <a:avLst/>
+          </a:prstGeom>
+          <a:ln/>
+        </p:spPr>
+        <p:style>
+          <a:lnRef idx="1">
+            <a:schemeClr val="accent2"/>
+          </a:lnRef>
+          <a:fillRef idx="2">
+            <a:schemeClr val="accent2"/>
+          </a:fillRef>
+          <a:effectRef idx="1">
+            <a:schemeClr val="accent2"/>
+          </a:effectRef>
+          <a:fontRef idx="minor">
+            <a:schemeClr val="dk1"/>
+          </a:fontRef>
+        </p:style>
+        <p:txBody>
+          <a:bodyPr rtlCol="0" anchor="ctr"/>
+          <a:lstStyle/>
+          <a:p>
+            <a:r>
+              <a:rPr lang="en-US" sz="2800" b="1" dirty="0">
+                <a:solidFill>
+                  <a:schemeClr val="tx1"/>
+                </a:solidFill>
+              </a:rPr>
+              <a:t>Specs:</a:t>
+            </a:r>
+          </a:p>
+          <a:p>
+            <a:pPr marL="285750" indent="-285750">
+              <a:buFont typeface="Arial" panose="020B0604020202020204" pitchFamily="34" charset="0"/>
+              <a:buChar char="•"/>
+            </a:pPr>
+            <a:r>
+              <a:rPr lang="en-US" sz="1400" b="1" dirty="0">
+                <a:solidFill>
+                  <a:schemeClr val="tx1"/>
+                </a:solidFill>
+              </a:rPr>
+              <a:t>Buffered Stereo In/Out Paths</a:t>
+            </a:r>
+          </a:p>
+          <a:p>
+            <a:pPr marL="285750" indent="-285750">
+              <a:buFont typeface="Arial" panose="020B0604020202020204" pitchFamily="34" charset="0"/>
+              <a:buChar char="•"/>
+            </a:pPr>
+            <a:r>
+              <a:rPr lang="en-US" sz="1400" b="1" dirty="0">
+                <a:solidFill>
+                  <a:schemeClr val="tx1"/>
+                </a:solidFill>
+              </a:rPr>
+              <a:t>Up to 96KHz, 24-bit Digital Processing</a:t>
+            </a:r>
+          </a:p>
+          <a:p>
+            <a:pPr marL="285750" indent="-285750">
+              <a:buFont typeface="Arial" panose="020B0604020202020204" pitchFamily="34" charset="0"/>
+              <a:buChar char="•"/>
+            </a:pPr>
+            <a:r>
+              <a:rPr lang="en-US" sz="1400" b="1" dirty="0">
+                <a:solidFill>
+                  <a:schemeClr val="tx1"/>
+                </a:solidFill>
+              </a:rPr>
+              <a:t>64MB SDRAM, 8MB Flash</a:t>
+            </a:r>
+          </a:p>
+          <a:p>
+            <a:pPr marL="285750" indent="-285750">
+              <a:buFont typeface="Arial" panose="020B0604020202020204" pitchFamily="34" charset="0"/>
+              <a:buChar char="•"/>
+            </a:pPr>
+            <a:r>
+              <a:rPr lang="en-US" sz="1400" b="1" dirty="0">
+                <a:solidFill>
+                  <a:schemeClr val="tx1"/>
+                </a:solidFill>
+              </a:rPr>
+              <a:t>ARM Cortex M7 480MHz</a:t>
+            </a:r>
+          </a:p>
+          <a:p>
+            <a:pPr marL="285750" indent="-285750">
+              <a:buFont typeface="Arial" panose="020B0604020202020204" pitchFamily="34" charset="0"/>
+              <a:buChar char="•"/>
+            </a:pPr>
+            <a:r>
+              <a:rPr lang="en-US" sz="1400" b="1" dirty="0">
+                <a:solidFill>
+                  <a:schemeClr val="tx1"/>
+                </a:solidFill>
+              </a:rPr>
+              <a:t>Expression and MIDI Inputs</a:t>
+            </a:r>
+          </a:p>
+          <a:p>
+            <a:pPr marL="285750" indent="-285750">
+              <a:buFont typeface="Arial" panose="020B0604020202020204" pitchFamily="34" charset="0"/>
+              <a:buChar char="•"/>
+            </a:pPr>
+            <a:r>
+              <a:rPr lang="en-US" sz="1400" b="1" dirty="0">
+                <a:solidFill>
+                  <a:schemeClr val="tx1"/>
+                </a:solidFill>
+              </a:rPr>
+              <a:t>Through Hole PCB</a:t>
+            </a:r>
+          </a:p>
+          <a:p>
+            <a:pPr marL="285750" indent="-285750">
+              <a:buFont typeface="Arial" panose="020B0604020202020204" pitchFamily="34" charset="0"/>
+              <a:buChar char="•"/>
+            </a:pPr>
+            <a:r>
+              <a:rPr lang="en-US" sz="1400" b="1" dirty="0">
+                <a:solidFill>
+                  <a:schemeClr val="tx1"/>
+                </a:solidFill>
+              </a:rPr>
+              <a:t>Digital Bypass only</a:t>
+            </a:r>
+          </a:p>
+        </p:txBody>
+      </p:sp>
+    </p:spTree>
+    <p:extLst>
+      <p:ext uri="{BB962C8B-B14F-4D97-AF65-F5344CB8AC3E}">
+        <p14:creationId xmlns:p14="http://schemas.microsoft.com/office/powerpoint/2010/main" val="2803695047"/>
+      </p:ext>
+    </p:extLst>
+  </p:cSld>
+  <p:clrMapOvr>
+    <a:masterClrMapping/>
+  </p:clrMapOvr>
+</p:sld>
+</file>
+
 <file path=ppt/slides/slide2.xml><?xml version="1.0" encoding="utf-8"?>
 <p:sld xmlns:a="http://schemas.openxmlformats.org/drawingml/2006/main" xmlns:r="http://schemas.openxmlformats.org/officeDocument/2006/relationships" xmlns:p="http://schemas.openxmlformats.org/presentationml/2006/main">
   <p:cSld>
@@ -20781,21 +23603,8 @@
                   <a:schemeClr val="bg1"/>
                 </a:solidFill>
               </a:rPr>
-              <a:t>Time Mode </a:t>
-            </a:r>
-            <a:r>
-              <a:rPr lang="en-US" sz="1600" b="1" dirty="0" smtClean="0">
-                <a:solidFill>
-                  <a:schemeClr val="bg1"/>
-                </a:solidFill>
-              </a:rPr>
-              <a:t>Toggle:</a:t>
-            </a:r>
-            <a:endParaRPr lang="en-US" sz="1600" b="1" dirty="0">
-              <a:solidFill>
-                <a:schemeClr val="bg1"/>
-              </a:solidFill>
-            </a:endParaRPr>
+              <a:t>Time Mode Toggle:</a:t>
+            </a:r>
           </a:p>
           <a:p>
             <a:r>
@@ -21022,15 +23831,17 @@
                   <a:schemeClr val="bg1"/>
                 </a:solidFill>
               </a:rPr>
-              <a:t>Dip Switches</a:t>
-            </a:r>
-            <a:r>
-              <a:rPr lang="en-US" sz="1600" b="1" dirty="0" smtClean="0">
+              <a:t>Dip Switches:</a:t>
+            </a:r>
+          </a:p>
+          <a:p>
+            <a:r>
+              <a:rPr lang="en-US" sz="1600" b="1" dirty="0">
                 <a:solidFill>
                   <a:schemeClr val="bg1"/>
                 </a:solidFill>
               </a:rPr>
-              <a:t>:</a:t>
+              <a:t>  1: Mono/Stereo (mono processes more freqs)</a:t>
             </a:r>
           </a:p>
           <a:p>
@@ -21040,85 +23851,27 @@
                   <a:schemeClr val="bg1"/>
                 </a:solidFill>
               </a:rPr>
-              <a:t> </a:t>
-            </a:r>
-            <a:r>
-              <a:rPr lang="en-US" sz="1600" b="1" dirty="0" smtClean="0">
+              <a:t>  2: MISO (mono in stereo out) / Stereo </a:t>
+            </a:r>
+          </a:p>
+          <a:p>
+            <a:r>
+              <a:rPr lang="en-US" sz="1600" b="1" dirty="0">
                 <a:solidFill>
                   <a:schemeClr val="bg1"/>
                 </a:solidFill>
               </a:rPr>
-              <a:t> 1: </a:t>
-            </a:r>
+              <a:t>  3: Stereo Spread Off/On</a:t>
+            </a:r>
+          </a:p>
+          <a:p>
             <a:r>
               <a:rPr lang="en-US" sz="1600" b="1" dirty="0">
                 <a:solidFill>
                   <a:schemeClr val="bg1"/>
                 </a:solidFill>
               </a:rPr>
-              <a:t>Mono/Stereo (mono processes more freqs)</a:t>
-            </a:r>
-          </a:p>
-          <a:p>
-            <a:r>
-              <a:rPr lang="en-US" sz="1600" b="1" dirty="0">
-                <a:solidFill>
-                  <a:schemeClr val="bg1"/>
-                </a:solidFill>
-              </a:rPr>
-              <a:t>  </a:t>
-            </a:r>
-            <a:r>
-              <a:rPr lang="en-US" sz="1600" b="1" dirty="0" smtClean="0">
-                <a:solidFill>
-                  <a:schemeClr val="bg1"/>
-                </a:solidFill>
-              </a:rPr>
-              <a:t>2: </a:t>
-            </a:r>
-            <a:r>
-              <a:rPr lang="en-US" sz="1600" b="1" dirty="0">
-                <a:solidFill>
-                  <a:schemeClr val="bg1"/>
-                </a:solidFill>
-              </a:rPr>
-              <a:t>MISO (mono in stereo out) / Stereo </a:t>
-            </a:r>
-          </a:p>
-          <a:p>
-            <a:r>
-              <a:rPr lang="en-US" sz="1600" b="1" dirty="0" smtClean="0">
-                <a:solidFill>
-                  <a:schemeClr val="bg1"/>
-                </a:solidFill>
-              </a:rPr>
-              <a:t>  3: </a:t>
-            </a:r>
-            <a:r>
-              <a:rPr lang="en-US" sz="1600" b="1" dirty="0">
-                <a:solidFill>
-                  <a:schemeClr val="bg1"/>
-                </a:solidFill>
-              </a:rPr>
-              <a:t>Stereo Spread Off/On</a:t>
-            </a:r>
-          </a:p>
-          <a:p>
-            <a:r>
-              <a:rPr lang="en-US" sz="1600" b="1" dirty="0" smtClean="0">
-                <a:solidFill>
-                  <a:schemeClr val="bg1"/>
-                </a:solidFill>
-              </a:rPr>
-              <a:t>  4</a:t>
-            </a:r>
-            <a:r>
-              <a:rPr lang="en-US" sz="1600" b="1" dirty="0">
-                <a:solidFill>
-                  <a:schemeClr val="bg1"/>
-                </a:solidFill>
-              </a:rPr>
-              <a:t>: Adds Feedback to Predelay </a:t>
+              <a:t>  4: Adds Feedback to Predelay </a:t>
             </a:r>
           </a:p>
         </p:txBody>
@@ -21210,23 +23963,7 @@
                   <a:schemeClr val="bg1"/>
                 </a:solidFill>
               </a:rPr>
-              <a:t>Right Footswitch: Hold to save </a:t>
-            </a:r>
-            <a:r>
-              <a:rPr lang="en-US" sz="1600" b="1" dirty="0" smtClean="0">
-                <a:solidFill>
-                  <a:schemeClr val="bg1"/>
-                </a:solidFill>
-              </a:rPr>
-              <a:t>preset of all knobs, toggles, and dipswitches. </a:t>
-            </a:r>
-            <a:r>
-              <a:rPr lang="en-US" sz="1600" b="1" dirty="0">
-                <a:solidFill>
-                  <a:schemeClr val="bg1"/>
-                </a:solidFill>
-              </a:rPr>
-              <a:t>Press to engage/disengage preset. Saves between power cycles.</a:t>
+              <a:t>Right Footswitch: Hold to save preset of all knobs, toggles, and dipswitches. Press to engage/disengage preset. Saves between power cycles.</a:t>
             </a:r>
           </a:p>
         </p:txBody>
@@ -23116,16 +25853,12 @@
           <a:p>
             <a:pPr algn="ctr"/>
             <a:r>
-              <a:rPr lang="en-US" sz="1000" b="1" dirty="0" smtClean="0">
+              <a:rPr lang="en-US" sz="1000" b="1" dirty="0">
                 <a:latin typeface="Century Gothic" panose="020B0502020202020204" pitchFamily="34" charset="0"/>
                 <a:cs typeface="Adobe Devanagari" panose="02040503050201020203" pitchFamily="18" charset="0"/>
               </a:rPr>
               <a:t>LEVEL</a:t>
             </a:r>
-            <a:endParaRPr lang="en-US" sz="1000" b="1" dirty="0">
-              <a:latin typeface="Century Gothic" panose="020B0502020202020204" pitchFamily="34" charset="0"/>
-              <a:cs typeface="Adobe Devanagari" panose="02040503050201020203" pitchFamily="18" charset="0"/>
-            </a:endParaRPr>
           </a:p>
         </p:txBody>
       </p:sp>
@@ -23153,16 +25886,12 @@
           <a:p>
             <a:pPr algn="ctr"/>
             <a:r>
-              <a:rPr lang="en-US" sz="1000" b="1" dirty="0" smtClean="0">
+              <a:rPr lang="en-US" sz="1000" b="1" dirty="0">
                 <a:latin typeface="Century Gothic" panose="020B0502020202020204" pitchFamily="34" charset="0"/>
                 <a:cs typeface="Adobe Devanagari" panose="02040503050201020203" pitchFamily="18" charset="0"/>
               </a:rPr>
               <a:t>PRESENCE</a:t>
             </a:r>
-            <a:endParaRPr lang="en-US" sz="1000" b="1" dirty="0">
-              <a:latin typeface="Century Gothic" panose="020B0502020202020204" pitchFamily="34" charset="0"/>
-              <a:cs typeface="Adobe Devanagari" panose="02040503050201020203" pitchFamily="18" charset="0"/>
-            </a:endParaRPr>
           </a:p>
         </p:txBody>
       </p:sp>
@@ -23190,16 +25919,12 @@
           <a:p>
             <a:pPr algn="ctr"/>
             <a:r>
-              <a:rPr lang="en-US" sz="1000" b="1" dirty="0" smtClean="0">
+              <a:rPr lang="en-US" sz="1000" b="1" dirty="0">
                 <a:latin typeface="Century Gothic" panose="020B0502020202020204" pitchFamily="34" charset="0"/>
                 <a:cs typeface="Adobe Devanagari" panose="02040503050201020203" pitchFamily="18" charset="0"/>
               </a:rPr>
               <a:t>MID</a:t>
             </a:r>
-            <a:endParaRPr lang="en-US" sz="1000" b="1" dirty="0">
-              <a:latin typeface="Century Gothic" panose="020B0502020202020204" pitchFamily="34" charset="0"/>
-              <a:cs typeface="Adobe Devanagari" panose="02040503050201020203" pitchFamily="18" charset="0"/>
-            </a:endParaRPr>
           </a:p>
         </p:txBody>
       </p:sp>
@@ -23227,16 +25952,12 @@
           <a:p>
             <a:pPr algn="ctr"/>
             <a:r>
-              <a:rPr lang="en-US" sz="1000" b="1" dirty="0" smtClean="0">
+              <a:rPr lang="en-US" sz="1000" b="1" dirty="0">
                 <a:latin typeface="Century Gothic" panose="020B0502020202020204" pitchFamily="34" charset="0"/>
                 <a:cs typeface="Adobe Devanagari" panose="02040503050201020203" pitchFamily="18" charset="0"/>
               </a:rPr>
               <a:t>TREBLE</a:t>
             </a:r>
-            <a:endParaRPr lang="en-US" sz="1000" b="1" dirty="0">
-              <a:latin typeface="Century Gothic" panose="020B0502020202020204" pitchFamily="34" charset="0"/>
-              <a:cs typeface="Adobe Devanagari" panose="02040503050201020203" pitchFamily="18" charset="0"/>
-            </a:endParaRPr>
           </a:p>
         </p:txBody>
       </p:sp>
@@ -23264,16 +25985,12 @@
           <a:p>
             <a:pPr algn="ctr"/>
             <a:r>
-              <a:rPr lang="en-US" sz="1000" b="1" dirty="0" smtClean="0">
+              <a:rPr lang="en-US" sz="1000" b="1" dirty="0">
                 <a:latin typeface="Century Gothic" panose="020B0502020202020204" pitchFamily="34" charset="0"/>
                 <a:cs typeface="Adobe Devanagari" panose="02040503050201020203" pitchFamily="18" charset="0"/>
               </a:rPr>
               <a:t>BASS</a:t>
             </a:r>
-            <a:endParaRPr lang="en-US" sz="1000" b="1" dirty="0">
-              <a:latin typeface="Century Gothic" panose="020B0502020202020204" pitchFamily="34" charset="0"/>
-              <a:cs typeface="Adobe Devanagari" panose="02040503050201020203" pitchFamily="18" charset="0"/>
-            </a:endParaRPr>
           </a:p>
         </p:txBody>
       </p:sp>
@@ -23334,44 +26051,32 @@
           <a:p>
             <a:pPr algn="ctr"/>
             <a:r>
-              <a:rPr lang="en-US" sz="800" b="1" dirty="0" smtClean="0">
+              <a:rPr lang="en-US" sz="800" b="1" dirty="0">
                 <a:latin typeface="Century Gothic" panose="020B0502020202020204" pitchFamily="34" charset="0"/>
                 <a:cs typeface="Adobe Devanagari" panose="02040503050201020203" pitchFamily="18" charset="0"/>
               </a:rPr>
               <a:t>Low</a:t>
             </a:r>
-            <a:endParaRPr lang="en-US" sz="800" b="1" dirty="0">
-              <a:latin typeface="Century Gothic" panose="020B0502020202020204" pitchFamily="34" charset="0"/>
-              <a:cs typeface="Adobe Devanagari" panose="02040503050201020203" pitchFamily="18" charset="0"/>
-            </a:endParaRPr>
-          </a:p>
-          <a:p>
-            <a:pPr algn="ctr"/>
-            <a:r>
-              <a:rPr lang="en-US" sz="800" b="1" dirty="0" smtClean="0">
+          </a:p>
+          <a:p>
+            <a:pPr algn="ctr"/>
+            <a:r>
+              <a:rPr lang="en-US" sz="800" b="1" dirty="0">
                 <a:latin typeface="Century Gothic" panose="020B0502020202020204" pitchFamily="34" charset="0"/>
                 <a:cs typeface="Adobe Devanagari" panose="02040503050201020203" pitchFamily="18" charset="0"/>
               </a:rPr>
               <a:t>Med</a:t>
             </a:r>
-            <a:endParaRPr lang="en-US" sz="800" b="1" dirty="0">
-              <a:latin typeface="Century Gothic" panose="020B0502020202020204" pitchFamily="34" charset="0"/>
-              <a:cs typeface="Adobe Devanagari" panose="02040503050201020203" pitchFamily="18" charset="0"/>
-            </a:endParaRPr>
-          </a:p>
-          <a:p>
-            <a:pPr algn="ctr"/>
-            <a:r>
-              <a:rPr lang="en-US" sz="800" b="1" dirty="0" smtClean="0">
+          </a:p>
+          <a:p>
+            <a:pPr algn="ctr"/>
+            <a:r>
+              <a:rPr lang="en-US" sz="800" b="1" dirty="0">
                 <a:latin typeface="Century Gothic" panose="020B0502020202020204" pitchFamily="34" charset="0"/>
                 <a:cs typeface="Adobe Devanagari" panose="02040503050201020203" pitchFamily="18" charset="0"/>
               </a:rPr>
               <a:t>High</a:t>
             </a:r>
-            <a:endParaRPr lang="en-US" sz="800" b="1" dirty="0">
-              <a:latin typeface="Century Gothic" panose="020B0502020202020204" pitchFamily="34" charset="0"/>
-              <a:cs typeface="Adobe Devanagari" panose="02040503050201020203" pitchFamily="18" charset="0"/>
-            </a:endParaRPr>
           </a:p>
         </p:txBody>
       </p:sp>
@@ -23399,16 +26104,12 @@
           <a:p>
             <a:pPr algn="ctr"/>
             <a:r>
-              <a:rPr lang="en-US" sz="2800" b="1" dirty="0" smtClean="0">
+              <a:rPr lang="en-US" sz="2800" b="1" dirty="0">
                 <a:latin typeface="Broadway" panose="04040905080B02020502" pitchFamily="82" charset="0"/>
                 <a:cs typeface="Adobe Devanagari" panose="02040503050201020203" pitchFamily="18" charset="0"/>
               </a:rPr>
               <a:t>Mercury</a:t>
             </a:r>
-            <a:endParaRPr lang="en-US" sz="2800" b="1" dirty="0">
-              <a:latin typeface="Broadway" panose="04040905080B02020502" pitchFamily="82" charset="0"/>
-              <a:cs typeface="Adobe Devanagari" panose="02040503050201020203" pitchFamily="18" charset="0"/>
-            </a:endParaRPr>
           </a:p>
         </p:txBody>
       </p:sp>
@@ -23443,7 +26144,7 @@
               <a:t>Amp </a:t>
             </a:r>
             <a:r>
-              <a:rPr lang="en-US" sz="1000" dirty="0" err="1" smtClean="0">
+              <a:rPr lang="en-US" sz="1000" dirty="0" err="1">
                 <a:latin typeface="Century Gothic" panose="020B0502020202020204" pitchFamily="34" charset="0"/>
                 <a:cs typeface="Adobe Devanagari" panose="02040503050201020203" pitchFamily="18" charset="0"/>
               </a:rPr>
@@ -23660,7 +26361,7 @@
           <a:p>
             <a:pPr algn="ctr"/>
             <a:r>
-              <a:rPr lang="en-US" sz="800" b="1" dirty="0" smtClean="0">
+              <a:rPr lang="en-US" sz="800" b="1" dirty="0">
                 <a:latin typeface="Century Gothic" panose="020B0502020202020204" pitchFamily="34" charset="0"/>
                 <a:cs typeface="Adobe Devanagari" panose="02040503050201020203" pitchFamily="18" charset="0"/>
               </a:rPr>
@@ -23670,7 +26371,7 @@
           <a:p>
             <a:pPr algn="ctr"/>
             <a:r>
-              <a:rPr lang="en-US" sz="800" b="1" dirty="0" smtClean="0">
+              <a:rPr lang="en-US" sz="800" b="1" dirty="0">
                 <a:latin typeface="Century Gothic" panose="020B0502020202020204" pitchFamily="34" charset="0"/>
                 <a:cs typeface="Adobe Devanagari" panose="02040503050201020203" pitchFamily="18" charset="0"/>
               </a:rPr>
@@ -23680,16 +26381,12 @@
           <a:p>
             <a:pPr algn="ctr"/>
             <a:r>
-              <a:rPr lang="en-US" sz="800" b="1" dirty="0" smtClean="0">
+              <a:rPr lang="en-US" sz="800" b="1" dirty="0">
                 <a:latin typeface="Century Gothic" panose="020B0502020202020204" pitchFamily="34" charset="0"/>
                 <a:cs typeface="Adobe Devanagari" panose="02040503050201020203" pitchFamily="18" charset="0"/>
               </a:rPr>
               <a:t>Amp 3</a:t>
             </a:r>
-            <a:endParaRPr lang="en-US" sz="800" b="1" dirty="0">
-              <a:latin typeface="Century Gothic" panose="020B0502020202020204" pitchFamily="34" charset="0"/>
-              <a:cs typeface="Adobe Devanagari" panose="02040503050201020203" pitchFamily="18" charset="0"/>
-            </a:endParaRPr>
           </a:p>
         </p:txBody>
       </p:sp>
@@ -23813,7 +26510,7 @@
           </a:p>
           <a:p>
             <a:r>
-              <a:rPr lang="en-US" sz="1600" b="1" dirty="0" smtClean="0">
+              <a:rPr lang="en-US" sz="1600" b="1" dirty="0">
                 <a:solidFill>
                   <a:schemeClr val="tx1"/>
                 </a:solidFill>
@@ -23821,7 +26518,7 @@
               <a:t>Level:</a:t>
             </a:r>
             <a:r>
-              <a:rPr lang="en-US" sz="1600" dirty="0" smtClean="0">
+              <a:rPr lang="en-US" sz="1600" dirty="0">
                 <a:solidFill>
                   <a:schemeClr val="tx1"/>
                 </a:solidFill>
@@ -23831,7 +26528,7 @@
           </a:p>
           <a:p>
             <a:r>
-              <a:rPr lang="en-US" sz="1600" b="1" dirty="0" smtClean="0">
+              <a:rPr lang="en-US" sz="1600" b="1" dirty="0">
                 <a:solidFill>
                   <a:schemeClr val="tx1"/>
                 </a:solidFill>
@@ -23839,7 +26536,7 @@
               <a:t>Presence: </a:t>
             </a:r>
             <a:r>
-              <a:rPr lang="en-US" sz="1600" dirty="0" smtClean="0">
+              <a:rPr lang="en-US" sz="1600" dirty="0">
                 <a:solidFill>
                   <a:schemeClr val="tx1"/>
                 </a:solidFill>
@@ -23890,7 +26587,7 @@
           <a:lstStyle/>
           <a:p>
             <a:r>
-              <a:rPr lang="en-US" sz="1600" b="1" dirty="0" smtClean="0">
+              <a:rPr lang="en-US" sz="1600" b="1" dirty="0">
                 <a:solidFill>
                   <a:schemeClr val="tx1"/>
                 </a:solidFill>
@@ -23898,22 +26595,17 @@
               <a:t>Bass</a:t>
             </a:r>
             <a:r>
-              <a:rPr lang="en-US" sz="1600" dirty="0" smtClean="0">
+              <a:rPr lang="en-US" sz="1600" dirty="0">
                 <a:solidFill>
                   <a:schemeClr val="tx1"/>
                 </a:solidFill>
               </a:rPr>
               <a:t>: +10/-10 dB</a:t>
             </a:r>
-            <a:endParaRPr lang="en-US" sz="1600" dirty="0">
-              <a:solidFill>
-                <a:schemeClr val="tx1"/>
-              </a:solidFill>
-            </a:endParaRPr>
-          </a:p>
-          <a:p>
-            <a:r>
-              <a:rPr lang="en-US" sz="1600" b="1" dirty="0" smtClean="0">
+          </a:p>
+          <a:p>
+            <a:r>
+              <a:rPr lang="en-US" sz="1600" b="1" dirty="0">
                 <a:solidFill>
                   <a:schemeClr val="tx1"/>
                 </a:solidFill>
@@ -23921,22 +26613,17 @@
               <a:t>Mid</a:t>
             </a:r>
             <a:r>
-              <a:rPr lang="en-US" sz="1600" dirty="0" smtClean="0">
+              <a:rPr lang="en-US" sz="1600" dirty="0">
                 <a:solidFill>
                   <a:schemeClr val="tx1"/>
                 </a:solidFill>
               </a:rPr>
               <a:t>: +10/-10 dB</a:t>
             </a:r>
-            <a:endParaRPr lang="en-US" sz="1600" dirty="0">
-              <a:solidFill>
-                <a:schemeClr val="tx1"/>
-              </a:solidFill>
-            </a:endParaRPr>
-          </a:p>
-          <a:p>
-            <a:r>
-              <a:rPr lang="en-US" sz="1600" b="1" dirty="0" smtClean="0">
+          </a:p>
+          <a:p>
+            <a:r>
+              <a:rPr lang="en-US" sz="1600" b="1" dirty="0">
                 <a:solidFill>
                   <a:schemeClr val="tx1"/>
                 </a:solidFill>
@@ -23944,7 +26631,7 @@
               <a:t>Treble</a:t>
             </a:r>
             <a:r>
-              <a:rPr lang="en-US" sz="1600" dirty="0" smtClean="0">
+              <a:rPr lang="en-US" sz="1600" dirty="0">
                 <a:solidFill>
                   <a:schemeClr val="tx1"/>
                 </a:solidFill>
@@ -24000,21 +26687,18 @@
                   <a:schemeClr val="bg1"/>
                 </a:solidFill>
               </a:rPr>
-              <a:t>Amp </a:t>
-            </a:r>
-            <a:r>
-              <a:rPr lang="en-US" sz="1600" b="1" dirty="0" smtClean="0">
+              <a:t>Amp Group</a:t>
+            </a:r>
+          </a:p>
+          <a:p>
+            <a:r>
+              <a:rPr lang="en-US" sz="1600" b="1" dirty="0">
                 <a:solidFill>
                   <a:schemeClr val="bg1"/>
                 </a:solidFill>
               </a:rPr>
-              <a:t>Group</a:t>
-            </a:r>
-            <a:endParaRPr lang="en-US" sz="1600" b="1" dirty="0">
-              <a:solidFill>
-                <a:schemeClr val="bg1"/>
-              </a:solidFill>
-            </a:endParaRPr>
+              <a:t>  Left:  Low Gain</a:t>
+            </a:r>
           </a:p>
           <a:p>
             <a:r>
@@ -24023,67 +26707,18 @@
                   <a:schemeClr val="bg1"/>
                 </a:solidFill>
               </a:rPr>
-              <a:t>  Left:  </a:t>
-            </a:r>
-            <a:r>
-              <a:rPr lang="en-US" sz="1600" b="1" dirty="0" smtClean="0">
+              <a:t>  Center: Med Gain</a:t>
+            </a:r>
+          </a:p>
+          <a:p>
+            <a:r>
+              <a:rPr lang="en-US" sz="1600" b="1" dirty="0">
                 <a:solidFill>
                   <a:schemeClr val="bg1"/>
                 </a:solidFill>
               </a:rPr>
-              <a:t>Low Gain</a:t>
-            </a:r>
-            <a:endParaRPr lang="en-US" sz="1600" b="1" dirty="0">
-              <a:solidFill>
-                <a:schemeClr val="bg1"/>
-              </a:solidFill>
-            </a:endParaRPr>
-          </a:p>
-          <a:p>
-            <a:r>
-              <a:rPr lang="en-US" sz="1600" b="1" dirty="0">
-                <a:solidFill>
-                  <a:schemeClr val="bg1"/>
-                </a:solidFill>
-              </a:rPr>
-              <a:t>  Center: </a:t>
-            </a:r>
-            <a:r>
-              <a:rPr lang="en-US" sz="1600" b="1" dirty="0" smtClean="0">
-                <a:solidFill>
-                  <a:schemeClr val="bg1"/>
-                </a:solidFill>
-              </a:rPr>
-              <a:t>Med Gain</a:t>
-            </a:r>
-            <a:endParaRPr lang="en-US" sz="1600" b="1" dirty="0">
-              <a:solidFill>
-                <a:schemeClr val="bg1"/>
-              </a:solidFill>
-            </a:endParaRPr>
-          </a:p>
-          <a:p>
-            <a:r>
-              <a:rPr lang="en-US" sz="1600" b="1" dirty="0">
-                <a:solidFill>
-                  <a:schemeClr val="bg1"/>
-                </a:solidFill>
-              </a:rPr>
-              <a:t>  Right:  </a:t>
-            </a:r>
-            <a:r>
-              <a:rPr lang="en-US" sz="1600" b="1" dirty="0" smtClean="0">
-                <a:solidFill>
-                  <a:schemeClr val="bg1"/>
-                </a:solidFill>
-              </a:rPr>
-              <a:t>High Gain</a:t>
-            </a:r>
-            <a:endParaRPr lang="en-US" sz="1600" b="1" dirty="0">
-              <a:solidFill>
-                <a:schemeClr val="bg1"/>
-              </a:solidFill>
-            </a:endParaRPr>
+              <a:t>  Right:  High Gain</a:t>
+            </a:r>
           </a:p>
         </p:txBody>
       </p:sp>
@@ -24123,18 +26758,13 @@
           <a:lstStyle/>
           <a:p>
             <a:r>
-              <a:rPr lang="en-US" sz="1600" b="1" dirty="0" smtClean="0">
+              <a:rPr lang="en-US" sz="1600" b="1" dirty="0">
                 <a:solidFill>
                   <a:schemeClr val="bg1"/>
                 </a:solidFill>
               </a:rPr>
               <a:t>Model Select (depends on Toggle 1 group selection)*</a:t>
             </a:r>
-            <a:endParaRPr lang="en-US" sz="1600" b="1" dirty="0">
-              <a:solidFill>
-                <a:schemeClr val="bg1"/>
-              </a:solidFill>
-            </a:endParaRPr>
           </a:p>
           <a:p>
             <a:r>
@@ -24143,21 +26773,18 @@
                   <a:schemeClr val="bg1"/>
                 </a:solidFill>
               </a:rPr>
-              <a:t>  Left:  </a:t>
-            </a:r>
-            <a:r>
-              <a:rPr lang="en-US" sz="1600" b="1" dirty="0" smtClean="0">
+              <a:t>  Left:  Amp 1</a:t>
+            </a:r>
+          </a:p>
+          <a:p>
+            <a:r>
+              <a:rPr lang="en-US" sz="1600" b="1" dirty="0">
                 <a:solidFill>
                   <a:schemeClr val="bg1"/>
                 </a:solidFill>
               </a:rPr>
-              <a:t>Amp 1</a:t>
-            </a:r>
-            <a:endParaRPr lang="en-US" sz="1600" b="1" dirty="0">
-              <a:solidFill>
-                <a:schemeClr val="bg1"/>
-              </a:solidFill>
-            </a:endParaRPr>
+              <a:t>  Center: Amp 2</a:t>
+            </a:r>
           </a:p>
           <a:p>
             <a:r>
@@ -24166,44 +26793,8 @@
                   <a:schemeClr val="bg1"/>
                 </a:solidFill>
               </a:rPr>
-              <a:t>  Center: </a:t>
-            </a:r>
-            <a:r>
-              <a:rPr lang="en-US" sz="1600" b="1" dirty="0" smtClean="0">
-                <a:solidFill>
-                  <a:schemeClr val="bg1"/>
-                </a:solidFill>
-              </a:rPr>
-              <a:t>Amp 2</a:t>
-            </a:r>
-            <a:endParaRPr lang="en-US" sz="1600" b="1" dirty="0">
-              <a:solidFill>
-                <a:schemeClr val="bg1"/>
-              </a:solidFill>
-            </a:endParaRPr>
-          </a:p>
-          <a:p>
-            <a:r>
-              <a:rPr lang="en-US" sz="1600" b="1" dirty="0">
-                <a:solidFill>
-                  <a:schemeClr val="bg1"/>
-                </a:solidFill>
-              </a:rPr>
-              <a:t>  Right:  </a:t>
-            </a:r>
-            <a:r>
-              <a:rPr lang="en-US" sz="1600" b="1" dirty="0" smtClean="0">
-                <a:solidFill>
-                  <a:schemeClr val="bg1"/>
-                </a:solidFill>
-              </a:rPr>
-              <a:t>Amp 3</a:t>
-            </a:r>
-            <a:endParaRPr lang="en-US" sz="1600" b="1" dirty="0">
-              <a:solidFill>
-                <a:schemeClr val="bg1"/>
-              </a:solidFill>
-            </a:endParaRPr>
+              <a:t>  Right:  Amp 3</a:t>
+            </a:r>
           </a:p>
         </p:txBody>
       </p:sp>
@@ -24288,7 +26879,7 @@
           <a:lstStyle/>
           <a:p>
             <a:r>
-              <a:rPr lang="en-US" sz="2800" b="1" dirty="0" smtClean="0">
+              <a:rPr lang="en-US" sz="2800" b="1" dirty="0">
                 <a:solidFill>
                   <a:schemeClr val="tx1"/>
                 </a:solidFill>
@@ -24296,36 +26887,20 @@
               <a:t>Mercury</a:t>
             </a:r>
             <a:r>
-              <a:rPr lang="en-US" sz="1600" b="1" dirty="0" smtClean="0">
+              <a:rPr lang="en-US" sz="1600" b="1" dirty="0">
                 <a:solidFill>
                   <a:schemeClr val="tx1"/>
                 </a:solidFill>
               </a:rPr>
-              <a:t> </a:t>
-            </a:r>
-            <a:r>
-              <a:rPr lang="en-US" sz="1600" b="1" dirty="0">
+              <a:t> is an </a:t>
+            </a:r>
+            <a:r>
+              <a:rPr lang="en-US" sz="2400" b="1" dirty="0">
                 <a:solidFill>
                   <a:schemeClr val="tx1"/>
                 </a:solidFill>
               </a:rPr>
-              <a:t>is an </a:t>
-            </a:r>
-            <a:r>
-              <a:rPr lang="en-US" sz="2400" b="1" dirty="0">
-                <a:solidFill>
-                  <a:schemeClr val="tx1"/>
-                </a:solidFill>
-              </a:rPr>
-              <a:t>Amp </a:t>
-            </a:r>
-            <a:r>
-              <a:rPr lang="en-US" sz="2400" b="1" dirty="0" smtClean="0">
-                <a:solidFill>
-                  <a:schemeClr val="tx1"/>
-                </a:solidFill>
-              </a:rPr>
-              <a:t>Emulator using Neural Amp Modeler (NAM). </a:t>
+              <a:t>Amp Emulator using Neural Amp Modeler (NAM). </a:t>
             </a:r>
             <a:endParaRPr lang="en-US" sz="1600" b="1" dirty="0">
               <a:solidFill>
@@ -24413,21 +26988,8 @@
                   <a:schemeClr val="tx1"/>
                 </a:solidFill>
               </a:rPr>
-              <a:t>MIDI: </a:t>
-            </a:r>
-            <a:r>
-              <a:rPr lang="en-US" sz="1600" b="1" dirty="0" smtClean="0">
-                <a:solidFill>
-                  <a:schemeClr val="tx1"/>
-                </a:solidFill>
-              </a:rPr>
-              <a:t>YES</a:t>
-            </a:r>
-            <a:endParaRPr lang="en-US" sz="1600" b="1" dirty="0">
-              <a:solidFill>
-                <a:schemeClr val="tx1"/>
-              </a:solidFill>
-            </a:endParaRPr>
+              <a:t>MIDI: YES</a:t>
+            </a:r>
           </a:p>
         </p:txBody>
       </p:sp>
@@ -24706,18 +27268,14 @@
           <a:lstStyle/>
           <a:p>
             <a:r>
-              <a:rPr lang="en-US" dirty="0" smtClean="0"/>
+              <a:rPr lang="en-US" dirty="0"/>
               <a:t>*NAM Models</a:t>
             </a:r>
           </a:p>
           <a:p>
             <a:r>
-              <a:rPr lang="en-US" sz="1200" dirty="0" smtClean="0"/>
-              <a:t>Low </a:t>
-            </a:r>
-            <a:r>
               <a:rPr lang="en-US" sz="1200" dirty="0"/>
-              <a:t>Gain:</a:t>
+              <a:t>Low Gain:</a:t>
             </a:r>
           </a:p>
           <a:p>
@@ -25860,7 +28418,7 @@
           <a:p>
             <a:pPr algn="ctr"/>
             <a:r>
-              <a:rPr lang="en-US" sz="1000" b="1" dirty="0" err="1" smtClean="0">
+              <a:rPr lang="en-US" sz="1000" b="1" dirty="0" err="1">
                 <a:latin typeface="Century Gothic" panose="020B0502020202020204" pitchFamily="34" charset="0"/>
                 <a:cs typeface="Adobe Devanagari" panose="02040503050201020203" pitchFamily="18" charset="0"/>
               </a:rPr>
@@ -25897,16 +28455,12 @@
           <a:p>
             <a:pPr algn="ctr"/>
             <a:r>
-              <a:rPr lang="en-US" sz="1000" b="1" dirty="0" smtClean="0">
+              <a:rPr lang="en-US" sz="1000" b="1" dirty="0">
                 <a:latin typeface="Century Gothic" panose="020B0502020202020204" pitchFamily="34" charset="0"/>
                 <a:cs typeface="Adobe Devanagari" panose="02040503050201020203" pitchFamily="18" charset="0"/>
               </a:rPr>
               <a:t>Mix</a:t>
             </a:r>
-            <a:endParaRPr lang="en-US" sz="1000" b="1" dirty="0">
-              <a:latin typeface="Century Gothic" panose="020B0502020202020204" pitchFamily="34" charset="0"/>
-              <a:cs typeface="Adobe Devanagari" panose="02040503050201020203" pitchFamily="18" charset="0"/>
-            </a:endParaRPr>
           </a:p>
         </p:txBody>
       </p:sp>
@@ -25934,16 +28488,12 @@
           <a:p>
             <a:pPr algn="ctr"/>
             <a:r>
-              <a:rPr lang="en-US" sz="1000" b="1" dirty="0" smtClean="0">
+              <a:rPr lang="en-US" sz="1000" b="1" dirty="0">
                 <a:latin typeface="Century Gothic" panose="020B0502020202020204" pitchFamily="34" charset="0"/>
                 <a:cs typeface="Adobe Devanagari" panose="02040503050201020203" pitchFamily="18" charset="0"/>
               </a:rPr>
               <a:t>Decay</a:t>
             </a:r>
-            <a:endParaRPr lang="en-US" sz="1000" b="1" dirty="0">
-              <a:latin typeface="Century Gothic" panose="020B0502020202020204" pitchFamily="34" charset="0"/>
-              <a:cs typeface="Adobe Devanagari" panose="02040503050201020203" pitchFamily="18" charset="0"/>
-            </a:endParaRPr>
           </a:p>
         </p:txBody>
       </p:sp>
@@ -25971,16 +28521,12 @@
           <a:p>
             <a:pPr algn="ctr"/>
             <a:r>
-              <a:rPr lang="en-US" sz="1000" b="1" dirty="0" smtClean="0">
+              <a:rPr lang="en-US" sz="1000" b="1" dirty="0">
                 <a:latin typeface="Century Gothic" panose="020B0502020202020204" pitchFamily="34" charset="0"/>
                 <a:cs typeface="Adobe Devanagari" panose="02040503050201020203" pitchFamily="18" charset="0"/>
               </a:rPr>
               <a:t>Mod Rate</a:t>
             </a:r>
-            <a:endParaRPr lang="en-US" sz="1000" b="1" dirty="0">
-              <a:latin typeface="Century Gothic" panose="020B0502020202020204" pitchFamily="34" charset="0"/>
-              <a:cs typeface="Adobe Devanagari" panose="02040503050201020203" pitchFamily="18" charset="0"/>
-            </a:endParaRPr>
           </a:p>
         </p:txBody>
       </p:sp>
@@ -26008,16 +28554,12 @@
           <a:p>
             <a:pPr algn="ctr"/>
             <a:r>
-              <a:rPr lang="en-US" sz="1000" b="1" dirty="0" smtClean="0">
+              <a:rPr lang="en-US" sz="1000" b="1" dirty="0">
                 <a:latin typeface="Century Gothic" panose="020B0502020202020204" pitchFamily="34" charset="0"/>
                 <a:cs typeface="Adobe Devanagari" panose="02040503050201020203" pitchFamily="18" charset="0"/>
               </a:rPr>
               <a:t>Filter</a:t>
             </a:r>
-            <a:endParaRPr lang="en-US" sz="1000" b="1" dirty="0">
-              <a:latin typeface="Century Gothic" panose="020B0502020202020204" pitchFamily="34" charset="0"/>
-              <a:cs typeface="Adobe Devanagari" panose="02040503050201020203" pitchFamily="18" charset="0"/>
-            </a:endParaRPr>
           </a:p>
         </p:txBody>
       </p:sp>
@@ -26045,16 +28587,12 @@
           <a:p>
             <a:pPr algn="ctr"/>
             <a:r>
-              <a:rPr lang="en-US" sz="1000" b="1" dirty="0" smtClean="0">
+              <a:rPr lang="en-US" sz="1000" b="1" dirty="0">
                 <a:latin typeface="Century Gothic" panose="020B0502020202020204" pitchFamily="34" charset="0"/>
                 <a:cs typeface="Adobe Devanagari" panose="02040503050201020203" pitchFamily="18" charset="0"/>
               </a:rPr>
               <a:t>Mod</a:t>
             </a:r>
-            <a:endParaRPr lang="en-US" sz="1000" b="1" dirty="0">
-              <a:latin typeface="Century Gothic" panose="020B0502020202020204" pitchFamily="34" charset="0"/>
-              <a:cs typeface="Adobe Devanagari" panose="02040503050201020203" pitchFamily="18" charset="0"/>
-            </a:endParaRPr>
           </a:p>
         </p:txBody>
       </p:sp>
@@ -26115,7 +28653,7 @@
           <a:p>
             <a:pPr algn="ctr"/>
             <a:r>
-              <a:rPr lang="en-US" sz="800" b="1" dirty="0" smtClean="0">
+              <a:rPr lang="en-US" sz="800" b="1" dirty="0">
                 <a:latin typeface="Century Gothic" panose="020B0502020202020204" pitchFamily="34" charset="0"/>
                 <a:cs typeface="Adobe Devanagari" panose="02040503050201020203" pitchFamily="18" charset="0"/>
               </a:rPr>
@@ -26125,7 +28663,7 @@
           <a:p>
             <a:pPr algn="ctr"/>
             <a:r>
-              <a:rPr lang="en-US" sz="800" b="1" dirty="0" smtClean="0">
+              <a:rPr lang="en-US" sz="800" b="1" dirty="0">
                 <a:latin typeface="Century Gothic" panose="020B0502020202020204" pitchFamily="34" charset="0"/>
                 <a:cs typeface="Adobe Devanagari" panose="02040503050201020203" pitchFamily="18" charset="0"/>
               </a:rPr>
@@ -26135,16 +28673,12 @@
           <a:p>
             <a:pPr algn="ctr"/>
             <a:r>
-              <a:rPr lang="en-US" sz="800" b="1" dirty="0" smtClean="0">
+              <a:rPr lang="en-US" sz="800" b="1" dirty="0">
                 <a:latin typeface="Century Gothic" panose="020B0502020202020204" pitchFamily="34" charset="0"/>
                 <a:cs typeface="Adobe Devanagari" panose="02040503050201020203" pitchFamily="18" charset="0"/>
               </a:rPr>
               <a:t>Big</a:t>
             </a:r>
-            <a:endParaRPr lang="en-US" sz="800" b="1" dirty="0">
-              <a:latin typeface="Century Gothic" panose="020B0502020202020204" pitchFamily="34" charset="0"/>
-              <a:cs typeface="Adobe Devanagari" panose="02040503050201020203" pitchFamily="18" charset="0"/>
-            </a:endParaRPr>
           </a:p>
         </p:txBody>
       </p:sp>
@@ -26172,16 +28706,12 @@
           <a:p>
             <a:pPr algn="ctr"/>
             <a:r>
-              <a:rPr lang="en-US" sz="2000" b="1" dirty="0" smtClean="0">
+              <a:rPr lang="en-US" sz="2000" b="1" dirty="0">
                 <a:latin typeface="Broadway" panose="04040905080B02020502" pitchFamily="82" charset="0"/>
                 <a:cs typeface="Adobe Devanagari" panose="02040503050201020203" pitchFamily="18" charset="0"/>
               </a:rPr>
               <a:t>Earth</a:t>
             </a:r>
-            <a:endParaRPr lang="en-US" sz="2000" b="1" dirty="0">
-              <a:latin typeface="Broadway" panose="04040905080B02020502" pitchFamily="82" charset="0"/>
-              <a:cs typeface="Adobe Devanagari" panose="02040503050201020203" pitchFamily="18" charset="0"/>
-            </a:endParaRPr>
           </a:p>
         </p:txBody>
       </p:sp>
@@ -26209,7 +28739,7 @@
           <a:p>
             <a:pPr algn="ctr"/>
             <a:r>
-              <a:rPr lang="en-US" sz="1000" dirty="0" smtClean="0">
+              <a:rPr lang="en-US" sz="1000" dirty="0">
                 <a:latin typeface="Century Gothic" panose="020B0502020202020204" pitchFamily="34" charset="0"/>
                 <a:cs typeface="Adobe Devanagari" panose="02040503050201020203" pitchFamily="18" charset="0"/>
               </a:rPr>
@@ -26219,16 +28749,12 @@
           <a:p>
             <a:pPr algn="ctr"/>
             <a:r>
-              <a:rPr lang="en-US" sz="1000" dirty="0" smtClean="0">
+              <a:rPr lang="en-US" sz="1000" dirty="0">
                 <a:latin typeface="Century Gothic" panose="020B0502020202020204" pitchFamily="34" charset="0"/>
                 <a:cs typeface="Adobe Devanagari" panose="02040503050201020203" pitchFamily="18" charset="0"/>
               </a:rPr>
               <a:t>Octave</a:t>
             </a:r>
-            <a:endParaRPr lang="en-US" sz="1000" dirty="0">
-              <a:latin typeface="Century Gothic" panose="020B0502020202020204" pitchFamily="34" charset="0"/>
-              <a:cs typeface="Adobe Devanagari" panose="02040503050201020203" pitchFamily="18" charset="0"/>
-            </a:endParaRPr>
           </a:p>
         </p:txBody>
       </p:sp>
@@ -26436,16 +28962,12 @@
           <a:p>
             <a:pPr algn="ctr"/>
             <a:r>
-              <a:rPr lang="en-US" sz="900" b="1" dirty="0" smtClean="0">
+              <a:rPr lang="en-US" sz="900" b="1" dirty="0">
                 <a:latin typeface="Century Gothic" panose="020B0502020202020204" pitchFamily="34" charset="0"/>
                 <a:cs typeface="Adobe Devanagari" panose="02040503050201020203" pitchFamily="18" charset="0"/>
               </a:rPr>
               <a:t>Size</a:t>
             </a:r>
-            <a:endParaRPr lang="en-US" sz="900" b="1" dirty="0">
-              <a:latin typeface="Century Gothic" panose="020B0502020202020204" pitchFamily="34" charset="0"/>
-              <a:cs typeface="Adobe Devanagari" panose="02040503050201020203" pitchFamily="18" charset="0"/>
-            </a:endParaRPr>
           </a:p>
         </p:txBody>
       </p:sp>
@@ -26473,16 +28995,12 @@
           <a:p>
             <a:pPr algn="ctr"/>
             <a:r>
-              <a:rPr lang="en-US" sz="900" b="1" dirty="0" smtClean="0">
+              <a:rPr lang="en-US" sz="900" b="1" dirty="0">
                 <a:latin typeface="Century Gothic" panose="020B0502020202020204" pitchFamily="34" charset="0"/>
                 <a:cs typeface="Adobe Devanagari" panose="02040503050201020203" pitchFamily="18" charset="0"/>
               </a:rPr>
               <a:t>Octave</a:t>
             </a:r>
-            <a:endParaRPr lang="en-US" sz="900" b="1" dirty="0">
-              <a:latin typeface="Century Gothic" panose="020B0502020202020204" pitchFamily="34" charset="0"/>
-              <a:cs typeface="Adobe Devanagari" panose="02040503050201020203" pitchFamily="18" charset="0"/>
-            </a:endParaRPr>
           </a:p>
         </p:txBody>
       </p:sp>
@@ -26510,16 +29028,12 @@
           <a:p>
             <a:pPr algn="ctr"/>
             <a:r>
-              <a:rPr lang="en-US" sz="900" b="1" dirty="0" smtClean="0">
+              <a:rPr lang="en-US" sz="900" b="1" dirty="0">
                 <a:latin typeface="Century Gothic" panose="020B0502020202020204" pitchFamily="34" charset="0"/>
                 <a:cs typeface="Adobe Devanagari" panose="02040503050201020203" pitchFamily="18" charset="0"/>
               </a:rPr>
               <a:t>Footswitch</a:t>
             </a:r>
-            <a:endParaRPr lang="en-US" sz="900" b="1" dirty="0">
-              <a:latin typeface="Century Gothic" panose="020B0502020202020204" pitchFamily="34" charset="0"/>
-              <a:cs typeface="Adobe Devanagari" panose="02040503050201020203" pitchFamily="18" charset="0"/>
-            </a:endParaRPr>
           </a:p>
         </p:txBody>
       </p:sp>
@@ -26547,16 +29061,12 @@
           <a:p>
             <a:pPr algn="ctr"/>
             <a:r>
-              <a:rPr lang="en-US" sz="1000" b="1" dirty="0" smtClean="0">
+              <a:rPr lang="en-US" sz="1000" b="1" dirty="0">
                 <a:latin typeface="Century Gothic" panose="020B0502020202020204" pitchFamily="34" charset="0"/>
                 <a:cs typeface="Adobe Devanagari" panose="02040503050201020203" pitchFamily="18" charset="0"/>
               </a:rPr>
               <a:t>Action</a:t>
             </a:r>
-            <a:endParaRPr lang="en-US" sz="1000" b="1" dirty="0">
-              <a:latin typeface="Century Gothic" panose="020B0502020202020204" pitchFamily="34" charset="0"/>
-              <a:cs typeface="Adobe Devanagari" panose="02040503050201020203" pitchFamily="18" charset="0"/>
-            </a:endParaRPr>
           </a:p>
         </p:txBody>
       </p:sp>
@@ -26596,7 +29106,7 @@
           <a:lstStyle/>
           <a:p>
             <a:r>
-              <a:rPr lang="en-US" sz="1600" b="1" dirty="0" err="1" smtClean="0">
+              <a:rPr lang="en-US" sz="1600" b="1" dirty="0" err="1">
                 <a:solidFill>
                   <a:schemeClr val="tx1"/>
                 </a:solidFill>
@@ -26604,7 +29114,7 @@
               <a:t>PreDelay</a:t>
             </a:r>
             <a:r>
-              <a:rPr lang="en-US" sz="1600" dirty="0" smtClean="0">
+              <a:rPr lang="en-US" sz="1600" dirty="0">
                 <a:solidFill>
                   <a:schemeClr val="tx1"/>
                 </a:solidFill>
@@ -26612,7 +29122,7 @@
               <a:t>: </a:t>
             </a:r>
             <a:r>
-              <a:rPr lang="en-US" sz="1600" dirty="0" err="1" smtClean="0">
+              <a:rPr lang="en-US" sz="1600" dirty="0" err="1">
                 <a:solidFill>
                   <a:schemeClr val="tx1"/>
                 </a:solidFill>
@@ -26620,22 +29130,17 @@
               <a:t>PreDelay</a:t>
             </a:r>
             <a:r>
-              <a:rPr lang="en-US" sz="1600" dirty="0" smtClean="0">
+              <a:rPr lang="en-US" sz="1600" dirty="0">
                 <a:solidFill>
                   <a:schemeClr val="tx1"/>
                 </a:solidFill>
               </a:rPr>
               <a:t> up to around 700ms</a:t>
             </a:r>
-            <a:endParaRPr lang="en-US" sz="1600" dirty="0">
-              <a:solidFill>
-                <a:schemeClr val="tx1"/>
-              </a:solidFill>
-            </a:endParaRPr>
-          </a:p>
-          <a:p>
-            <a:r>
-              <a:rPr lang="en-US" sz="1600" b="1" dirty="0" smtClean="0">
+          </a:p>
+          <a:p>
+            <a:r>
+              <a:rPr lang="en-US" sz="1600" b="1" dirty="0">
                 <a:solidFill>
                   <a:schemeClr val="tx1"/>
                 </a:solidFill>
@@ -26643,22 +29148,17 @@
               <a:t>Mix</a:t>
             </a:r>
             <a:r>
-              <a:rPr lang="en-US" sz="1600" dirty="0" smtClean="0">
+              <a:rPr lang="en-US" sz="1600" dirty="0">
                 <a:solidFill>
                   <a:schemeClr val="tx1"/>
                 </a:solidFill>
               </a:rPr>
               <a:t>: Dry/Wet mix</a:t>
             </a:r>
-            <a:endParaRPr lang="en-US" sz="1600" dirty="0">
-              <a:solidFill>
-                <a:schemeClr val="tx1"/>
-              </a:solidFill>
-            </a:endParaRPr>
-          </a:p>
-          <a:p>
-            <a:r>
-              <a:rPr lang="en-US" sz="1600" b="1" dirty="0" smtClean="0">
+          </a:p>
+          <a:p>
+            <a:r>
+              <a:rPr lang="en-US" sz="1600" b="1" dirty="0">
                 <a:solidFill>
                   <a:schemeClr val="tx1"/>
                 </a:solidFill>
@@ -26666,7 +29166,7 @@
               <a:t>Decay:</a:t>
             </a:r>
             <a:r>
-              <a:rPr lang="en-US" sz="1600" dirty="0" smtClean="0">
+              <a:rPr lang="en-US" sz="1600" dirty="0">
                 <a:solidFill>
                   <a:schemeClr val="tx1"/>
                 </a:solidFill>
@@ -26717,7 +29217,7 @@
           <a:lstStyle/>
           <a:p>
             <a:r>
-              <a:rPr lang="en-US" sz="1600" b="1" dirty="0" smtClean="0">
+              <a:rPr lang="en-US" sz="1600" b="1" dirty="0">
                 <a:solidFill>
                   <a:schemeClr val="tx1"/>
                 </a:solidFill>
@@ -26725,22 +29225,17 @@
               <a:t>Mod Depth: </a:t>
             </a:r>
             <a:r>
-              <a:rPr lang="en-US" sz="1600" dirty="0" smtClean="0">
+              <a:rPr lang="en-US" sz="1600" dirty="0">
                 <a:solidFill>
                   <a:schemeClr val="tx1"/>
                 </a:solidFill>
               </a:rPr>
               <a:t>Intensity of reverb mod</a:t>
             </a:r>
-            <a:endParaRPr lang="en-US" sz="1600" dirty="0">
-              <a:solidFill>
-                <a:schemeClr val="tx1"/>
-              </a:solidFill>
-            </a:endParaRPr>
-          </a:p>
-          <a:p>
-            <a:r>
-              <a:rPr lang="en-US" sz="1600" b="1" dirty="0" smtClean="0">
+          </a:p>
+          <a:p>
+            <a:r>
+              <a:rPr lang="en-US" sz="1600" b="1" dirty="0">
                 <a:solidFill>
                   <a:schemeClr val="tx1"/>
                 </a:solidFill>
@@ -26748,22 +29243,17 @@
               <a:t>Mod Rate</a:t>
             </a:r>
             <a:r>
-              <a:rPr lang="en-US" sz="1600" dirty="0" smtClean="0">
+              <a:rPr lang="en-US" sz="1600" dirty="0">
                 <a:solidFill>
                   <a:schemeClr val="tx1"/>
                 </a:solidFill>
               </a:rPr>
               <a:t>: Speed of reverb mod</a:t>
             </a:r>
-            <a:endParaRPr lang="en-US" sz="1600" dirty="0">
-              <a:solidFill>
-                <a:schemeClr val="tx1"/>
-              </a:solidFill>
-            </a:endParaRPr>
-          </a:p>
-          <a:p>
-            <a:r>
-              <a:rPr lang="en-US" sz="1600" b="1" dirty="0" smtClean="0">
+          </a:p>
+          <a:p>
+            <a:r>
+              <a:rPr lang="en-US" sz="1600" b="1" dirty="0">
                 <a:solidFill>
                   <a:schemeClr val="tx1"/>
                 </a:solidFill>
@@ -26771,28 +29261,12 @@
               <a:t>Filter</a:t>
             </a:r>
             <a:r>
-              <a:rPr lang="en-US" sz="1600" dirty="0" smtClean="0">
+              <a:rPr lang="en-US" sz="1600" dirty="0">
                 <a:solidFill>
                   <a:schemeClr val="tx1"/>
                 </a:solidFill>
               </a:rPr>
-              <a:t>: </a:t>
-            </a:r>
-            <a:r>
-              <a:rPr lang="en-US" sz="1600" dirty="0">
-                <a:solidFill>
-                  <a:schemeClr val="tx1"/>
-                </a:solidFill>
-              </a:rPr>
-              <a:t>High </a:t>
-            </a:r>
-            <a:r>
-              <a:rPr lang="en-US" sz="1600" dirty="0" smtClean="0">
-                <a:solidFill>
-                  <a:schemeClr val="tx1"/>
-                </a:solidFill>
-              </a:rPr>
-              <a:t>and low cut filter in reverb tank.</a:t>
+              <a:t>: High and low cut filter in reverb tank.</a:t>
             </a:r>
             <a:endParaRPr lang="en-US" sz="1600" dirty="0">
               <a:solidFill>
@@ -26838,18 +29312,13 @@
           <a:lstStyle/>
           <a:p>
             <a:r>
-              <a:rPr lang="en-US" sz="1600" b="1" dirty="0" smtClean="0">
+              <a:rPr lang="en-US" sz="1600" b="1" dirty="0">
                 <a:solidFill>
                   <a:schemeClr val="bg1"/>
                 </a:solidFill>
               </a:rPr>
               <a:t>Size Toggle</a:t>
             </a:r>
-            <a:endParaRPr lang="en-US" sz="1600" b="1" dirty="0">
-              <a:solidFill>
-                <a:schemeClr val="bg1"/>
-              </a:solidFill>
-            </a:endParaRPr>
           </a:p>
           <a:p>
             <a:r>
@@ -26858,15 +29327,17 @@
                   <a:schemeClr val="bg1"/>
                 </a:solidFill>
               </a:rPr>
-              <a:t>  Left:  </a:t>
-            </a:r>
-            <a:r>
-              <a:rPr lang="en-US" sz="1600" b="1" dirty="0" smtClean="0">
+              <a:t>  Left:  Small size </a:t>
+            </a:r>
+          </a:p>
+          <a:p>
+            <a:r>
+              <a:rPr lang="en-US" sz="1600" b="1" dirty="0">
                 <a:solidFill>
                   <a:schemeClr val="bg1"/>
                 </a:solidFill>
               </a:rPr>
-              <a:t>Small size </a:t>
+              <a:t>  Center: Medium size</a:t>
             </a:r>
           </a:p>
           <a:p>
@@ -26876,60 +29347,8 @@
                   <a:schemeClr val="bg1"/>
                 </a:solidFill>
               </a:rPr>
-              <a:t> </a:t>
-            </a:r>
-            <a:r>
-              <a:rPr lang="en-US" sz="1600" b="1" dirty="0" smtClean="0">
-                <a:solidFill>
-                  <a:schemeClr val="bg1"/>
-                </a:solidFill>
-              </a:rPr>
-              <a:t> Center</a:t>
-            </a:r>
-            <a:r>
-              <a:rPr lang="en-US" sz="1600" b="1" dirty="0">
-                <a:solidFill>
-                  <a:schemeClr val="bg1"/>
-                </a:solidFill>
-              </a:rPr>
-              <a:t>: </a:t>
-            </a:r>
-            <a:r>
-              <a:rPr lang="en-US" sz="1600" b="1" dirty="0" smtClean="0">
-                <a:solidFill>
-                  <a:schemeClr val="bg1"/>
-                </a:solidFill>
-              </a:rPr>
-              <a:t>Medium size</a:t>
-            </a:r>
-            <a:endParaRPr lang="en-US" sz="1600" b="1" dirty="0">
-              <a:solidFill>
-                <a:schemeClr val="bg1"/>
-              </a:solidFill>
-            </a:endParaRPr>
-          </a:p>
-          <a:p>
-            <a:r>
-              <a:rPr lang="en-US" sz="1600" b="1" dirty="0">
-                <a:solidFill>
-                  <a:schemeClr val="bg1"/>
-                </a:solidFill>
-              </a:rPr>
-              <a:t>  Right:  </a:t>
-            </a:r>
-            <a:r>
-              <a:rPr lang="en-US" sz="1600" b="1" dirty="0" smtClean="0">
-                <a:solidFill>
-                  <a:schemeClr val="bg1"/>
-                </a:solidFill>
-              </a:rPr>
-              <a:t>Big size</a:t>
-            </a:r>
-            <a:endParaRPr lang="en-US" sz="1600" b="1" dirty="0">
-              <a:solidFill>
-                <a:schemeClr val="bg1"/>
-              </a:solidFill>
-            </a:endParaRPr>
+              <a:t>  Right:  Big size</a:t>
+            </a:r>
           </a:p>
         </p:txBody>
       </p:sp>
@@ -26969,20 +29388,22 @@
           <a:lstStyle/>
           <a:p>
             <a:r>
-              <a:rPr lang="en-US" sz="1600" b="1" dirty="0" smtClean="0">
+              <a:rPr lang="en-US" sz="1600" b="1" dirty="0">
                 <a:solidFill>
                   <a:schemeClr val="bg1"/>
                 </a:solidFill>
               </a:rPr>
-              <a:t>Octave </a:t>
-            </a:r>
+              <a:t>Octave Switch</a:t>
+            </a:r>
+          </a:p>
+          <a:p>
             <a:r>
               <a:rPr lang="en-US" sz="1600" b="1" dirty="0">
                 <a:solidFill>
                   <a:schemeClr val="bg1"/>
                 </a:solidFill>
               </a:rPr>
-              <a:t>Switch</a:t>
+              <a:t>  Left:  None</a:t>
             </a:r>
           </a:p>
           <a:p>
@@ -26992,67 +29413,18 @@
                   <a:schemeClr val="bg1"/>
                 </a:solidFill>
               </a:rPr>
-              <a:t>  Left:  </a:t>
-            </a:r>
-            <a:r>
-              <a:rPr lang="en-US" sz="1600" b="1" dirty="0" smtClean="0">
+              <a:t>  Center: Octave Up</a:t>
+            </a:r>
+          </a:p>
+          <a:p>
+            <a:r>
+              <a:rPr lang="en-US" sz="1600" b="1" dirty="0">
                 <a:solidFill>
                   <a:schemeClr val="bg1"/>
                 </a:solidFill>
               </a:rPr>
-              <a:t>None</a:t>
-            </a:r>
-            <a:endParaRPr lang="en-US" sz="1600" b="1" dirty="0">
-              <a:solidFill>
-                <a:schemeClr val="bg1"/>
-              </a:solidFill>
-            </a:endParaRPr>
-          </a:p>
-          <a:p>
-            <a:r>
-              <a:rPr lang="en-US" sz="1600" b="1" dirty="0">
-                <a:solidFill>
-                  <a:schemeClr val="bg1"/>
-                </a:solidFill>
-              </a:rPr>
-              <a:t>  Center: </a:t>
-            </a:r>
-            <a:r>
-              <a:rPr lang="en-US" sz="1600" b="1" dirty="0" smtClean="0">
-                <a:solidFill>
-                  <a:schemeClr val="bg1"/>
-                </a:solidFill>
-              </a:rPr>
-              <a:t>Octave Up</a:t>
-            </a:r>
-            <a:endParaRPr lang="en-US" sz="1600" b="1" dirty="0">
-              <a:solidFill>
-                <a:schemeClr val="bg1"/>
-              </a:solidFill>
-            </a:endParaRPr>
-          </a:p>
-          <a:p>
-            <a:r>
-              <a:rPr lang="en-US" sz="1600" b="1" dirty="0">
-                <a:solidFill>
-                  <a:schemeClr val="bg1"/>
-                </a:solidFill>
-              </a:rPr>
-              <a:t>  Right:  </a:t>
-            </a:r>
-            <a:r>
-              <a:rPr lang="en-US" sz="1600" b="1" dirty="0" smtClean="0">
-                <a:solidFill>
-                  <a:schemeClr val="bg1"/>
-                </a:solidFill>
-              </a:rPr>
-              <a:t>Octave Up and Down</a:t>
-            </a:r>
-            <a:endParaRPr lang="en-US" sz="1600" b="1" dirty="0">
-              <a:solidFill>
-                <a:schemeClr val="bg1"/>
-              </a:solidFill>
-            </a:endParaRPr>
+              <a:t>  Right:  Octave Up and Down</a:t>
+            </a:r>
           </a:p>
         </p:txBody>
       </p:sp>
@@ -27092,18 +29464,13 @@
           <a:lstStyle/>
           <a:p>
             <a:r>
-              <a:rPr lang="en-US" sz="1600" b="1" dirty="0" smtClean="0">
+              <a:rPr lang="en-US" sz="1600" b="1" dirty="0">
                 <a:solidFill>
                   <a:schemeClr val="bg1"/>
                 </a:solidFill>
               </a:rPr>
               <a:t>Footswitch Action:</a:t>
             </a:r>
-            <a:endParaRPr lang="en-US" sz="1600" b="1" dirty="0">
-              <a:solidFill>
-                <a:schemeClr val="bg1"/>
-              </a:solidFill>
-            </a:endParaRPr>
           </a:p>
           <a:p>
             <a:r>
@@ -27112,21 +29479,18 @@
                   <a:schemeClr val="bg1"/>
                 </a:solidFill>
               </a:rPr>
-              <a:t>  Left:  </a:t>
-            </a:r>
-            <a:r>
-              <a:rPr lang="en-US" sz="1600" b="1" dirty="0" smtClean="0">
+              <a:t>  Left:  Freeze (Decay set to 1)</a:t>
+            </a:r>
+          </a:p>
+          <a:p>
+            <a:r>
+              <a:rPr lang="en-US" sz="1600" b="1" dirty="0">
                 <a:solidFill>
                   <a:schemeClr val="bg1"/>
                 </a:solidFill>
               </a:rPr>
-              <a:t>Freeze (Decay set to 1)</a:t>
-            </a:r>
-            <a:endParaRPr lang="en-US" sz="1600" b="1" dirty="0">
-              <a:solidFill>
-                <a:schemeClr val="bg1"/>
-              </a:solidFill>
-            </a:endParaRPr>
+              <a:t>  Center: Overdrive the Reverb </a:t>
+            </a:r>
           </a:p>
           <a:p>
             <a:r>
@@ -27135,47 +29499,8 @@
                   <a:schemeClr val="bg1"/>
                 </a:solidFill>
               </a:rPr>
-              <a:t>  </a:t>
-            </a:r>
-            <a:r>
-              <a:rPr lang="en-US" sz="1600" b="1" dirty="0" smtClean="0">
-                <a:solidFill>
-                  <a:schemeClr val="bg1"/>
-                </a:solidFill>
-              </a:rPr>
-              <a:t>Center: Overdrive the Reverb </a:t>
-            </a:r>
-          </a:p>
-          <a:p>
-            <a:r>
-              <a:rPr lang="en-US" sz="1600" b="1" dirty="0" smtClean="0">
-                <a:solidFill>
-                  <a:schemeClr val="bg1"/>
-                </a:solidFill>
-              </a:rPr>
-              <a:t>  Right</a:t>
-            </a:r>
-            <a:r>
-              <a:rPr lang="en-US" sz="1600" b="1" dirty="0">
-                <a:solidFill>
-                  <a:schemeClr val="bg1"/>
-                </a:solidFill>
-              </a:rPr>
-              <a:t>:  </a:t>
-            </a:r>
-            <a:r>
-              <a:rPr lang="en-US" sz="1600" b="1" dirty="0" smtClean="0">
-                <a:solidFill>
-                  <a:schemeClr val="bg1"/>
-                </a:solidFill>
-              </a:rPr>
-              <a:t>Momentary Octave (based on center toggle)</a:t>
-            </a:r>
-            <a:endParaRPr lang="en-US" sz="1600" b="1" dirty="0">
-              <a:solidFill>
-                <a:schemeClr val="bg1"/>
-              </a:solidFill>
-            </a:endParaRPr>
+              <a:t>  Right:  Momentary Octave (based on center toggle)</a:t>
+            </a:r>
           </a:p>
         </p:txBody>
       </p:sp>
@@ -27230,71 +29555,18 @@
                   <a:schemeClr val="bg1"/>
                 </a:solidFill>
               </a:rPr>
-              <a:t> </a:t>
-            </a:r>
-            <a:r>
-              <a:rPr lang="en-US" sz="1600" b="1" dirty="0" smtClean="0">
+              <a:t> 1: Diffusion Disabled (on to disable input diffusion)</a:t>
+            </a:r>
+          </a:p>
+          <a:p>
+            <a:r>
+              <a:rPr lang="en-US" sz="1600" b="1" dirty="0">
                 <a:solidFill>
                   <a:schemeClr val="bg1"/>
                 </a:solidFill>
               </a:rPr>
-              <a:t>1</a:t>
-            </a:r>
-            <a:r>
-              <a:rPr lang="en-US" sz="1600" b="1" dirty="0">
-                <a:solidFill>
-                  <a:schemeClr val="bg1"/>
-                </a:solidFill>
-              </a:rPr>
-              <a:t>: </a:t>
-            </a:r>
-            <a:r>
-              <a:rPr lang="en-US" sz="1600" b="1" dirty="0" smtClean="0">
-                <a:solidFill>
-                  <a:schemeClr val="bg1"/>
-                </a:solidFill>
-              </a:rPr>
-              <a:t>Diffusion Disabled (on to </a:t>
-            </a:r>
-            <a:r>
-              <a:rPr lang="en-US" sz="1600" b="1" dirty="0" smtClean="0">
-                <a:solidFill>
-                  <a:schemeClr val="bg1"/>
-                </a:solidFill>
-              </a:rPr>
-              <a:t>disable input </a:t>
-            </a:r>
-            <a:r>
-              <a:rPr lang="en-US" sz="1600" b="1" dirty="0" smtClean="0">
-                <a:solidFill>
-                  <a:schemeClr val="bg1"/>
-                </a:solidFill>
-              </a:rPr>
-              <a:t>diffusion</a:t>
-            </a:r>
-            <a:r>
-              <a:rPr lang="en-US" sz="1600" b="1" dirty="0" smtClean="0">
-                <a:solidFill>
-                  <a:schemeClr val="bg1"/>
-                </a:solidFill>
-              </a:rPr>
-              <a:t>)</a:t>
-            </a:r>
-          </a:p>
-          <a:p>
-            <a:r>
-              <a:rPr lang="en-US" sz="1600" b="1" dirty="0" smtClean="0">
-                <a:solidFill>
-                  <a:schemeClr val="bg1"/>
-                </a:solidFill>
-              </a:rPr>
               <a:t>2. Octave only mode (only sends octaves to reverb, no dry, when in octave mode)</a:t>
             </a:r>
-            <a:endParaRPr lang="en-US" sz="1600" b="1" dirty="0">
-              <a:solidFill>
-                <a:schemeClr val="bg1"/>
-              </a:solidFill>
-            </a:endParaRPr>
           </a:p>
         </p:txBody>
       </p:sp>
@@ -27339,21 +29611,8 @@
                   <a:schemeClr val="bg1"/>
                 </a:solidFill>
               </a:rPr>
-              <a:t>Left Footswitch: </a:t>
-            </a:r>
-            <a:r>
-              <a:rPr lang="en-US" sz="1600" b="1" dirty="0" smtClean="0">
-                <a:solidFill>
-                  <a:schemeClr val="bg1"/>
-                </a:solidFill>
-              </a:rPr>
-              <a:t>Bypass/Engage</a:t>
-            </a:r>
-            <a:endParaRPr lang="en-US" sz="1600" b="1" dirty="0">
-              <a:solidFill>
-                <a:schemeClr val="bg1"/>
-              </a:solidFill>
-            </a:endParaRPr>
+              <a:t>Left Footswitch: Bypass/Engage</a:t>
+            </a:r>
           </a:p>
         </p:txBody>
       </p:sp>
@@ -27392,7 +29651,7 @@
           <a:lstStyle/>
           <a:p>
             <a:r>
-              <a:rPr lang="en-US" sz="2800" b="1" dirty="0" smtClean="0">
+              <a:rPr lang="en-US" sz="2800" b="1" dirty="0">
                 <a:solidFill>
                   <a:schemeClr val="tx1"/>
                 </a:solidFill>
@@ -27405,53 +29664,32 @@
                   <a:schemeClr val="tx1"/>
                 </a:solidFill>
               </a:rPr>
-              <a:t>is a </a:t>
-            </a:r>
-            <a:r>
-              <a:rPr lang="en-US" sz="1600" b="1" dirty="0" smtClean="0">
+              <a:t>is a digital </a:t>
+            </a:r>
+            <a:r>
+              <a:rPr lang="en-US" sz="2400" b="1" dirty="0">
                 <a:solidFill>
                   <a:schemeClr val="tx1"/>
                 </a:solidFill>
               </a:rPr>
-              <a:t>digital </a:t>
-            </a:r>
-            <a:r>
-              <a:rPr lang="en-US" sz="2400" b="1" dirty="0" smtClean="0">
+              <a:t>Plate </a:t>
+            </a:r>
+            <a:r>
+              <a:rPr lang="en-US" sz="2800" b="1" dirty="0">
                 <a:solidFill>
                   <a:schemeClr val="tx1"/>
                 </a:solidFill>
               </a:rPr>
-              <a:t>Plate </a:t>
-            </a:r>
-            <a:r>
-              <a:rPr lang="en-US" sz="2800" b="1" dirty="0" smtClean="0">
+              <a:t>Reverb </a:t>
+            </a:r>
+            <a:r>
+              <a:rPr lang="en-US" sz="1600" b="1" dirty="0">
                 <a:solidFill>
                   <a:schemeClr val="tx1"/>
                 </a:solidFill>
               </a:rPr>
-              <a:t>Reverb </a:t>
-            </a:r>
-            <a:r>
-              <a:rPr lang="en-US" sz="1600" b="1" dirty="0">
-                <a:solidFill>
-                  <a:schemeClr val="tx1"/>
-                </a:solidFill>
-              </a:rPr>
-              <a:t>pedal </a:t>
-            </a:r>
-            <a:r>
-              <a:rPr lang="en-US" sz="1600" b="1" dirty="0" smtClean="0">
-                <a:solidFill>
-                  <a:schemeClr val="tx1"/>
-                </a:solidFill>
-              </a:rPr>
-              <a:t>with octave effects.</a:t>
-            </a:r>
-            <a:endParaRPr lang="en-US" sz="1600" b="1" dirty="0">
-              <a:solidFill>
-                <a:schemeClr val="tx1"/>
-              </a:solidFill>
-            </a:endParaRPr>
+              <a:t>pedal with octave effects.</a:t>
+            </a:r>
           </a:p>
         </p:txBody>
       </p:sp>
@@ -27490,18 +29728,13 @@
           <a:lstStyle/>
           <a:p>
             <a:r>
-              <a:rPr lang="en-US" sz="1600" b="1" dirty="0" smtClean="0">
+              <a:rPr lang="en-US" sz="1600" b="1" dirty="0">
                 <a:solidFill>
                   <a:schemeClr val="tx1"/>
                 </a:solidFill>
               </a:rPr>
               <a:t>Mono in Stereo Out Processing (MISO)</a:t>
             </a:r>
-            <a:endParaRPr lang="en-US" sz="1600" b="1" dirty="0">
-              <a:solidFill>
-                <a:schemeClr val="tx1"/>
-              </a:solidFill>
-            </a:endParaRPr>
           </a:p>
           <a:p>
             <a:pPr marL="285750" indent="-285750">
@@ -27875,7 +30108,7 @@
           <a:p>
             <a:pPr algn="ctr"/>
             <a:r>
-              <a:rPr lang="en-US" sz="800" b="1" dirty="0" smtClean="0">
+              <a:rPr lang="en-US" sz="800" b="1" dirty="0">
                 <a:latin typeface="Century Gothic" panose="020B0502020202020204" pitchFamily="34" charset="0"/>
                 <a:cs typeface="Adobe Devanagari" panose="02040503050201020203" pitchFamily="18" charset="0"/>
               </a:rPr>
@@ -27885,86 +30118,25 @@
           <a:p>
             <a:pPr algn="ctr"/>
             <a:r>
-              <a:rPr lang="en-US" sz="800" b="1" dirty="0" err="1" smtClean="0">
+              <a:rPr lang="en-US" sz="800" b="1" dirty="0" err="1">
                 <a:latin typeface="Century Gothic" panose="020B0502020202020204" pitchFamily="34" charset="0"/>
                 <a:cs typeface="Adobe Devanagari" panose="02040503050201020203" pitchFamily="18" charset="0"/>
               </a:rPr>
               <a:t>OctUp</a:t>
-            </a:r>
-            <a:endParaRPr lang="en-US" sz="800" b="1" dirty="0" smtClean="0">
-              <a:latin typeface="Century Gothic" panose="020B0502020202020204" pitchFamily="34" charset="0"/>
-              <a:cs typeface="Adobe Devanagari" panose="02040503050201020203" pitchFamily="18" charset="0"/>
-            </a:endParaRPr>
-          </a:p>
-          <a:p>
-            <a:pPr algn="ctr"/>
-            <a:r>
-              <a:rPr lang="en-US" sz="800" b="1" dirty="0" err="1" smtClean="0">
-                <a:latin typeface="Century Gothic" panose="020B0502020202020204" pitchFamily="34" charset="0"/>
-                <a:cs typeface="Adobe Devanagari" panose="02040503050201020203" pitchFamily="18" charset="0"/>
-              </a:rPr>
-              <a:t>OctUpDn</a:t>
             </a:r>
             <a:endParaRPr lang="en-US" sz="800" b="1" dirty="0">
               <a:latin typeface="Century Gothic" panose="020B0502020202020204" pitchFamily="34" charset="0"/>
               <a:cs typeface="Adobe Devanagari" panose="02040503050201020203" pitchFamily="18" charset="0"/>
             </a:endParaRPr>
           </a:p>
-        </p:txBody>
-      </p:sp>
-      <p:sp>
-        <p:nvSpPr>
-          <p:cNvPr id="76" name="TextBox 75"/>
-          <p:cNvSpPr txBox="1"/>
-          <p:nvPr/>
-        </p:nvSpPr>
-        <p:spPr>
-          <a:xfrm rot="16200000">
-            <a:off x="6526029" y="4064989"/>
-            <a:ext cx="526105" cy="461665"/>
-          </a:xfrm>
-          <a:prstGeom prst="rect">
-            <a:avLst/>
-          </a:prstGeom>
-          <a:noFill/>
-        </p:spPr>
-        <p:txBody>
-          <a:bodyPr wrap="none" rtlCol="0">
-            <a:spAutoFit/>
-          </a:bodyPr>
-          <a:lstStyle/>
-          <a:p>
-            <a:pPr algn="ctr"/>
-            <a:r>
-              <a:rPr lang="en-US" sz="800" b="1" dirty="0" smtClean="0">
+          <a:p>
+            <a:pPr algn="ctr"/>
+            <a:r>
+              <a:rPr lang="en-US" sz="800" b="1" dirty="0" err="1">
                 <a:latin typeface="Century Gothic" panose="020B0502020202020204" pitchFamily="34" charset="0"/>
                 <a:cs typeface="Adobe Devanagari" panose="02040503050201020203" pitchFamily="18" charset="0"/>
               </a:rPr>
-              <a:t>Freeze</a:t>
-            </a:r>
-          </a:p>
-          <a:p>
-            <a:pPr algn="ctr"/>
-            <a:r>
-              <a:rPr lang="en-US" sz="800" b="1" dirty="0" smtClean="0">
-                <a:latin typeface="Century Gothic" panose="020B0502020202020204" pitchFamily="34" charset="0"/>
-                <a:cs typeface="Adobe Devanagari" panose="02040503050201020203" pitchFamily="18" charset="0"/>
-              </a:rPr>
-              <a:t>OD</a:t>
-            </a:r>
-            <a:endParaRPr lang="en-US" sz="800" b="1" dirty="0" smtClean="0">
-              <a:latin typeface="Century Gothic" panose="020B0502020202020204" pitchFamily="34" charset="0"/>
-              <a:cs typeface="Adobe Devanagari" panose="02040503050201020203" pitchFamily="18" charset="0"/>
-            </a:endParaRPr>
-          </a:p>
-          <a:p>
-            <a:pPr algn="ctr"/>
-            <a:r>
-              <a:rPr lang="en-US" sz="800" b="1" dirty="0" smtClean="0">
-                <a:latin typeface="Century Gothic" panose="020B0502020202020204" pitchFamily="34" charset="0"/>
-                <a:cs typeface="Adobe Devanagari" panose="02040503050201020203" pitchFamily="18" charset="0"/>
-              </a:rPr>
-              <a:t>Oct</a:t>
+              <a:t>OctUpDn</a:t>
             </a:r>
             <a:endParaRPr lang="en-US" sz="800" b="1" dirty="0">
               <a:latin typeface="Century Gothic" panose="020B0502020202020204" pitchFamily="34" charset="0"/>
@@ -27975,6 +30147,59 @@
       </p:sp>
       <p:sp>
         <p:nvSpPr>
+          <p:cNvPr id="76" name="TextBox 75"/>
+          <p:cNvSpPr txBox="1"/>
+          <p:nvPr/>
+        </p:nvSpPr>
+        <p:spPr>
+          <a:xfrm rot="16200000">
+            <a:off x="6526029" y="4064989"/>
+            <a:ext cx="526105" cy="461665"/>
+          </a:xfrm>
+          <a:prstGeom prst="rect">
+            <a:avLst/>
+          </a:prstGeom>
+          <a:noFill/>
+        </p:spPr>
+        <p:txBody>
+          <a:bodyPr wrap="none" rtlCol="0">
+            <a:spAutoFit/>
+          </a:bodyPr>
+          <a:lstStyle/>
+          <a:p>
+            <a:pPr algn="ctr"/>
+            <a:r>
+              <a:rPr lang="en-US" sz="800" b="1" dirty="0">
+                <a:latin typeface="Century Gothic" panose="020B0502020202020204" pitchFamily="34" charset="0"/>
+                <a:cs typeface="Adobe Devanagari" panose="02040503050201020203" pitchFamily="18" charset="0"/>
+              </a:rPr>
+              <a:t>Freeze</a:t>
+            </a:r>
+          </a:p>
+          <a:p>
+            <a:pPr algn="ctr"/>
+            <a:r>
+              <a:rPr lang="en-US" sz="800" b="1" dirty="0">
+                <a:latin typeface="Century Gothic" panose="020B0502020202020204" pitchFamily="34" charset="0"/>
+                <a:cs typeface="Adobe Devanagari" panose="02040503050201020203" pitchFamily="18" charset="0"/>
+              </a:rPr>
+              <a:t>OD</a:t>
+            </a:r>
+          </a:p>
+          <a:p>
+            <a:pPr algn="ctr"/>
+            <a:r>
+              <a:rPr lang="en-US" sz="800" b="1" dirty="0">
+                <a:latin typeface="Century Gothic" panose="020B0502020202020204" pitchFamily="34" charset="0"/>
+                <a:cs typeface="Adobe Devanagari" panose="02040503050201020203" pitchFamily="18" charset="0"/>
+              </a:rPr>
+              <a:t>Oct</a:t>
+            </a:r>
+          </a:p>
+        </p:txBody>
+      </p:sp>
+      <p:sp>
+        <p:nvSpPr>
           <p:cNvPr id="77" name="Rectangle 76"/>
           <p:cNvSpPr/>
           <p:nvPr/>
@@ -28014,37 +30239,24 @@
                   <a:schemeClr val="bg1"/>
                 </a:solidFill>
               </a:rPr>
-              <a:t>Right Footswitch: </a:t>
-            </a:r>
-            <a:r>
-              <a:rPr lang="en-US" sz="1600" b="1" dirty="0" smtClean="0">
+              <a:t>Right Footswitch: Do action based on 3</a:t>
+            </a:r>
+            <a:r>
+              <a:rPr lang="en-US" sz="1600" b="1" baseline="30000" dirty="0">
                 <a:solidFill>
                   <a:schemeClr val="bg1"/>
                 </a:solidFill>
               </a:rPr>
-              <a:t>Do action based on 3</a:t>
-            </a:r>
-            <a:r>
-              <a:rPr lang="en-US" sz="1600" b="1" baseline="30000" dirty="0" smtClean="0">
+              <a:t>rd</a:t>
+            </a:r>
+            <a:r>
+              <a:rPr lang="en-US" sz="1600" b="1" dirty="0">
                 <a:solidFill>
                   <a:schemeClr val="bg1"/>
                 </a:solidFill>
               </a:rPr>
-              <a:t>rd</a:t>
-            </a:r>
-            <a:r>
-              <a:rPr lang="en-US" sz="1600" b="1" dirty="0" smtClean="0">
-                <a:solidFill>
-                  <a:schemeClr val="bg1"/>
-                </a:solidFill>
-              </a:rPr>
               <a:t> toggle.</a:t>
             </a:r>
-            <a:endParaRPr lang="en-US" sz="1600" b="1" dirty="0">
-              <a:solidFill>
-                <a:schemeClr val="bg1"/>
-              </a:solidFill>
-            </a:endParaRPr>
           </a:p>
         </p:txBody>
       </p:sp>
@@ -28066,7 +30278,13 @@
   <p:cSld>
     <p:spTree>
       <p:nvGrpSpPr>
-        <p:cNvPr id="1" name=""/>
+        <p:cNvPr id="1" name="">
+          <a:extLst>
+            <a:ext uri="{FF2B5EF4-FFF2-40B4-BE49-F238E27FC236}">
+              <a16:creationId xmlns:a16="http://schemas.microsoft.com/office/drawing/2014/main" id="{4B93FE05-2FD6-3D0F-7CD7-A4BB08482B3F}"/>
+            </a:ext>
+          </a:extLst>
+        </p:cNvPr>
         <p:cNvGrpSpPr/>
         <p:nvPr/>
       </p:nvGrpSpPr>
@@ -28080,13 +30298,19 @@
       </p:grpSpPr>
       <p:sp>
         <p:nvSpPr>
-          <p:cNvPr id="2" name="Rounded Rectangle 1"/>
-          <p:cNvSpPr/>
-          <p:nvPr/>
-        </p:nvSpPr>
-        <p:spPr>
-          <a:xfrm>
-            <a:off x="4687514" y="1221568"/>
+          <p:cNvPr id="4" name="Rounded Rectangle 3">
+            <a:extLst>
+              <a:ext uri="{FF2B5EF4-FFF2-40B4-BE49-F238E27FC236}">
+                <a16:creationId xmlns:a16="http://schemas.microsoft.com/office/drawing/2014/main" id="{AF203928-2F6C-77FA-C95E-14081AAE6D81}"/>
+              </a:ext>
+            </a:extLst>
+          </p:cNvPr>
+          <p:cNvSpPr/>
+          <p:nvPr/>
+        </p:nvSpPr>
+        <p:spPr>
+          <a:xfrm>
+            <a:off x="4711803" y="1260616"/>
             <a:ext cx="2502100" cy="4599225"/>
           </a:xfrm>
           <a:prstGeom prst="roundRect">
@@ -28095,7 +30319,10 @@
             </a:avLst>
           </a:prstGeom>
           <a:solidFill>
-            <a:srgbClr val="EFEBE5"/>
+            <a:schemeClr val="accent1">
+              <a:lumMod val="20000"/>
+              <a:lumOff val="80000"/>
+            </a:schemeClr>
           </a:solidFill>
           <a:ln w="57150"/>
         </p:spPr>
@@ -28126,13 +30353,19 @@
       </p:sp>
       <p:sp>
         <p:nvSpPr>
-          <p:cNvPr id="3" name="Isosceles Triangle 2"/>
-          <p:cNvSpPr/>
-          <p:nvPr/>
-        </p:nvSpPr>
-        <p:spPr>
-          <a:xfrm>
-            <a:off x="5272231" y="1277448"/>
+          <p:cNvPr id="5" name="Isosceles Triangle 4">
+            <a:extLst>
+              <a:ext uri="{FF2B5EF4-FFF2-40B4-BE49-F238E27FC236}">
+                <a16:creationId xmlns:a16="http://schemas.microsoft.com/office/drawing/2014/main" id="{53F96907-E055-D954-BBC3-AD0FDB4EF5D0}"/>
+              </a:ext>
+            </a:extLst>
+          </p:cNvPr>
+          <p:cNvSpPr/>
+          <p:nvPr/>
+        </p:nvSpPr>
+        <p:spPr>
+          <a:xfrm>
+            <a:off x="5296520" y="1316496"/>
             <a:ext cx="160020" cy="144780"/>
           </a:xfrm>
           <a:prstGeom prst="triangle">
@@ -28174,13 +30407,19 @@
       </p:sp>
       <p:sp>
         <p:nvSpPr>
-          <p:cNvPr id="4" name="Isosceles Triangle 3"/>
+          <p:cNvPr id="6" name="Isosceles Triangle 5">
+            <a:extLst>
+              <a:ext uri="{FF2B5EF4-FFF2-40B4-BE49-F238E27FC236}">
+                <a16:creationId xmlns:a16="http://schemas.microsoft.com/office/drawing/2014/main" id="{114F0F46-D088-40F2-19C2-440BF9EDC6F7}"/>
+              </a:ext>
+            </a:extLst>
+          </p:cNvPr>
           <p:cNvSpPr/>
           <p:nvPr/>
         </p:nvSpPr>
         <p:spPr>
           <a:xfrm rot="10800000">
-            <a:off x="6477144" y="1277448"/>
+            <a:off x="6501433" y="1316496"/>
             <a:ext cx="160020" cy="144780"/>
           </a:xfrm>
           <a:prstGeom prst="triangle">
@@ -28222,21 +30461,28 @@
       </p:sp>
       <p:sp>
         <p:nvSpPr>
-          <p:cNvPr id="5" name="Oval 4"/>
-          <p:cNvSpPr/>
-          <p:nvPr/>
-        </p:nvSpPr>
-        <p:spPr>
-          <a:xfrm>
-            <a:off x="4875991" y="1747348"/>
+          <p:cNvPr id="7" name="Oval 6">
+            <a:extLst>
+              <a:ext uri="{FF2B5EF4-FFF2-40B4-BE49-F238E27FC236}">
+                <a16:creationId xmlns:a16="http://schemas.microsoft.com/office/drawing/2014/main" id="{40967ECA-3A4E-1C13-7ECB-1662FF328EC8}"/>
+              </a:ext>
+            </a:extLst>
+          </p:cNvPr>
+          <p:cNvSpPr/>
+          <p:nvPr/>
+        </p:nvSpPr>
+        <p:spPr>
+          <a:xfrm>
+            <a:off x="4900280" y="1786396"/>
             <a:ext cx="556260" cy="533400"/>
           </a:xfrm>
           <a:prstGeom prst="ellipse">
             <a:avLst/>
           </a:prstGeom>
           <a:solidFill>
-            <a:schemeClr val="bg2">
-              <a:lumMod val="50000"/>
+            <a:schemeClr val="accent4">
+              <a:lumMod val="40000"/>
+              <a:lumOff val="60000"/>
             </a:schemeClr>
           </a:solidFill>
           <a:ln w="28575">
@@ -28272,21 +30518,28 @@
       </p:sp>
       <p:sp>
         <p:nvSpPr>
-          <p:cNvPr id="6" name="Oval 5"/>
-          <p:cNvSpPr/>
-          <p:nvPr/>
-        </p:nvSpPr>
-        <p:spPr>
-          <a:xfrm>
-            <a:off x="5660434" y="1747348"/>
+          <p:cNvPr id="8" name="Oval 7">
+            <a:extLst>
+              <a:ext uri="{FF2B5EF4-FFF2-40B4-BE49-F238E27FC236}">
+                <a16:creationId xmlns:a16="http://schemas.microsoft.com/office/drawing/2014/main" id="{04D86E76-CDFC-1C35-3607-58D2A11422F1}"/>
+              </a:ext>
+            </a:extLst>
+          </p:cNvPr>
+          <p:cNvSpPr/>
+          <p:nvPr/>
+        </p:nvSpPr>
+        <p:spPr>
+          <a:xfrm>
+            <a:off x="5684723" y="1786396"/>
             <a:ext cx="556260" cy="533400"/>
           </a:xfrm>
           <a:prstGeom prst="ellipse">
             <a:avLst/>
           </a:prstGeom>
           <a:solidFill>
-            <a:schemeClr val="bg2">
-              <a:lumMod val="50000"/>
+            <a:schemeClr val="accent4">
+              <a:lumMod val="40000"/>
+              <a:lumOff val="60000"/>
             </a:schemeClr>
           </a:solidFill>
           <a:ln w="28575">
@@ -28322,21 +30575,28 @@
       </p:sp>
       <p:sp>
         <p:nvSpPr>
-          <p:cNvPr id="7" name="Oval 6"/>
-          <p:cNvSpPr/>
-          <p:nvPr/>
-        </p:nvSpPr>
-        <p:spPr>
-          <a:xfrm>
-            <a:off x="6457944" y="1747348"/>
+          <p:cNvPr id="9" name="Oval 8">
+            <a:extLst>
+              <a:ext uri="{FF2B5EF4-FFF2-40B4-BE49-F238E27FC236}">
+                <a16:creationId xmlns:a16="http://schemas.microsoft.com/office/drawing/2014/main" id="{E0B73D7D-5F31-B34E-26A8-0F2221A51AEE}"/>
+              </a:ext>
+            </a:extLst>
+          </p:cNvPr>
+          <p:cNvSpPr/>
+          <p:nvPr/>
+        </p:nvSpPr>
+        <p:spPr>
+          <a:xfrm>
+            <a:off x="6482233" y="1786396"/>
             <a:ext cx="556260" cy="533400"/>
           </a:xfrm>
           <a:prstGeom prst="ellipse">
             <a:avLst/>
           </a:prstGeom>
           <a:solidFill>
-            <a:schemeClr val="bg2">
-              <a:lumMod val="50000"/>
+            <a:schemeClr val="accent4">
+              <a:lumMod val="40000"/>
+              <a:lumOff val="60000"/>
             </a:schemeClr>
           </a:solidFill>
           <a:ln w="28575">
@@ -28372,13 +30632,19 @@
       </p:sp>
       <p:sp>
         <p:nvSpPr>
-          <p:cNvPr id="8" name="Oval 7"/>
-          <p:cNvSpPr/>
-          <p:nvPr/>
-        </p:nvSpPr>
-        <p:spPr>
-          <a:xfrm>
-            <a:off x="4875991" y="2745568"/>
+          <p:cNvPr id="10" name="Oval 9">
+            <a:extLst>
+              <a:ext uri="{FF2B5EF4-FFF2-40B4-BE49-F238E27FC236}">
+                <a16:creationId xmlns:a16="http://schemas.microsoft.com/office/drawing/2014/main" id="{C7350EBC-2BE6-CB18-1AD5-81810D3AAF5C}"/>
+              </a:ext>
+            </a:extLst>
+          </p:cNvPr>
+          <p:cNvSpPr/>
+          <p:nvPr/>
+        </p:nvSpPr>
+        <p:spPr>
+          <a:xfrm>
+            <a:off x="4900280" y="2784616"/>
             <a:ext cx="556260" cy="533400"/>
           </a:xfrm>
           <a:prstGeom prst="ellipse">
@@ -28422,13 +30688,19 @@
       </p:sp>
       <p:sp>
         <p:nvSpPr>
-          <p:cNvPr id="9" name="Oval 8"/>
-          <p:cNvSpPr/>
-          <p:nvPr/>
-        </p:nvSpPr>
-        <p:spPr>
-          <a:xfrm>
-            <a:off x="5660434" y="2745568"/>
+          <p:cNvPr id="11" name="Oval 10">
+            <a:extLst>
+              <a:ext uri="{FF2B5EF4-FFF2-40B4-BE49-F238E27FC236}">
+                <a16:creationId xmlns:a16="http://schemas.microsoft.com/office/drawing/2014/main" id="{4D138438-F97B-43F9-4DCB-5F11459BF54F}"/>
+              </a:ext>
+            </a:extLst>
+          </p:cNvPr>
+          <p:cNvSpPr/>
+          <p:nvPr/>
+        </p:nvSpPr>
+        <p:spPr>
+          <a:xfrm>
+            <a:off x="5684723" y="2784616"/>
             <a:ext cx="556260" cy="533400"/>
           </a:xfrm>
           <a:prstGeom prst="ellipse">
@@ -28472,13 +30744,19 @@
       </p:sp>
       <p:sp>
         <p:nvSpPr>
-          <p:cNvPr id="10" name="Oval 9"/>
-          <p:cNvSpPr/>
-          <p:nvPr/>
-        </p:nvSpPr>
-        <p:spPr>
-          <a:xfrm>
-            <a:off x="6457944" y="2745568"/>
+          <p:cNvPr id="12" name="Oval 11">
+            <a:extLst>
+              <a:ext uri="{FF2B5EF4-FFF2-40B4-BE49-F238E27FC236}">
+                <a16:creationId xmlns:a16="http://schemas.microsoft.com/office/drawing/2014/main" id="{6B081589-7605-6347-4C62-E9BB75C9B11C}"/>
+              </a:ext>
+            </a:extLst>
+          </p:cNvPr>
+          <p:cNvSpPr/>
+          <p:nvPr/>
+        </p:nvSpPr>
+        <p:spPr>
+          <a:xfrm>
+            <a:off x="6482233" y="2784616"/>
             <a:ext cx="556260" cy="533400"/>
           </a:xfrm>
           <a:prstGeom prst="ellipse">
@@ -28522,13 +30800,19 @@
       </p:sp>
       <p:sp>
         <p:nvSpPr>
-          <p:cNvPr id="11" name="Oval 10"/>
+          <p:cNvPr id="13" name="Oval 12">
+            <a:extLst>
+              <a:ext uri="{FF2B5EF4-FFF2-40B4-BE49-F238E27FC236}">
+                <a16:creationId xmlns:a16="http://schemas.microsoft.com/office/drawing/2014/main" id="{1914CE33-689F-1125-2AD1-64CF76E3D665}"/>
+              </a:ext>
+            </a:extLst>
+          </p:cNvPr>
           <p:cNvSpPr/>
           <p:nvPr/>
         </p:nvSpPr>
         <p:spPr>
           <a:xfrm rot="16200000">
-            <a:off x="5037119" y="3795700"/>
+            <a:off x="5061408" y="3834748"/>
             <a:ext cx="245746" cy="243840"/>
           </a:xfrm>
           <a:prstGeom prst="ellipse">
@@ -28567,13 +30851,19 @@
       </p:sp>
       <p:sp>
         <p:nvSpPr>
-          <p:cNvPr id="12" name="Flowchart: Terminator 11"/>
+          <p:cNvPr id="14" name="Flowchart: Terminator 13">
+            <a:extLst>
+              <a:ext uri="{FF2B5EF4-FFF2-40B4-BE49-F238E27FC236}">
+                <a16:creationId xmlns:a16="http://schemas.microsoft.com/office/drawing/2014/main" id="{75C4727E-AEEF-AA7A-D683-21650C4E45F6}"/>
+              </a:ext>
+            </a:extLst>
+          </p:cNvPr>
           <p:cNvSpPr/>
           <p:nvPr/>
         </p:nvSpPr>
         <p:spPr>
           <a:xfrm rot="16200000">
-            <a:off x="5017245" y="3807751"/>
+            <a:off x="5041534" y="3846799"/>
             <a:ext cx="95488" cy="208168"/>
           </a:xfrm>
           <a:prstGeom prst="flowChartTerminator">
@@ -28612,13 +30902,19 @@
       </p:sp>
       <p:sp>
         <p:nvSpPr>
-          <p:cNvPr id="13" name="Oval 12"/>
-          <p:cNvSpPr/>
-          <p:nvPr/>
-        </p:nvSpPr>
-        <p:spPr>
-          <a:xfrm>
-            <a:off x="5074110" y="4501971"/>
+          <p:cNvPr id="15" name="Oval 14">
+            <a:extLst>
+              <a:ext uri="{FF2B5EF4-FFF2-40B4-BE49-F238E27FC236}">
+                <a16:creationId xmlns:a16="http://schemas.microsoft.com/office/drawing/2014/main" id="{C43ABE05-2F71-EE88-0764-60A92F15881D}"/>
+              </a:ext>
+            </a:extLst>
+          </p:cNvPr>
+          <p:cNvSpPr/>
+          <p:nvPr/>
+        </p:nvSpPr>
+        <p:spPr>
+          <a:xfrm>
+            <a:off x="5098399" y="4541019"/>
             <a:ext cx="160020" cy="150019"/>
           </a:xfrm>
           <a:prstGeom prst="ellipse">
@@ -28652,13 +30948,19 @@
       </p:sp>
       <p:sp>
         <p:nvSpPr>
-          <p:cNvPr id="14" name="Oval 13"/>
-          <p:cNvSpPr/>
-          <p:nvPr/>
-        </p:nvSpPr>
-        <p:spPr>
-          <a:xfrm>
-            <a:off x="6625461" y="4501971"/>
+          <p:cNvPr id="16" name="Oval 15">
+            <a:extLst>
+              <a:ext uri="{FF2B5EF4-FFF2-40B4-BE49-F238E27FC236}">
+                <a16:creationId xmlns:a16="http://schemas.microsoft.com/office/drawing/2014/main" id="{1737CF6A-EAE1-5DF1-A7E9-EE9FA911763B}"/>
+              </a:ext>
+            </a:extLst>
+          </p:cNvPr>
+          <p:cNvSpPr/>
+          <p:nvPr/>
+        </p:nvSpPr>
+        <p:spPr>
+          <a:xfrm>
+            <a:off x="6649750" y="4541019"/>
             <a:ext cx="160020" cy="150019"/>
           </a:xfrm>
           <a:prstGeom prst="ellipse">
@@ -28692,13 +30994,19 @@
       </p:sp>
       <p:sp>
         <p:nvSpPr>
-          <p:cNvPr id="15" name="Oval 14"/>
-          <p:cNvSpPr/>
-          <p:nvPr/>
-        </p:nvSpPr>
-        <p:spPr>
-          <a:xfrm>
-            <a:off x="4863758" y="5009546"/>
+          <p:cNvPr id="17" name="Oval 16">
+            <a:extLst>
+              <a:ext uri="{FF2B5EF4-FFF2-40B4-BE49-F238E27FC236}">
+                <a16:creationId xmlns:a16="http://schemas.microsoft.com/office/drawing/2014/main" id="{0735C1CF-2EA8-78B9-ED57-32C9A22E7668}"/>
+              </a:ext>
+            </a:extLst>
+          </p:cNvPr>
+          <p:cNvSpPr/>
+          <p:nvPr/>
+        </p:nvSpPr>
+        <p:spPr>
+          <a:xfrm>
+            <a:off x="4888047" y="5048594"/>
             <a:ext cx="580727" cy="560414"/>
           </a:xfrm>
           <a:prstGeom prst="ellipse">
@@ -28737,13 +31045,19 @@
       </p:sp>
       <p:sp>
         <p:nvSpPr>
-          <p:cNvPr id="16" name="Oval 15"/>
-          <p:cNvSpPr/>
-          <p:nvPr/>
-        </p:nvSpPr>
-        <p:spPr>
-          <a:xfrm>
-            <a:off x="4957086" y="5095929"/>
+          <p:cNvPr id="18" name="Oval 17">
+            <a:extLst>
+              <a:ext uri="{FF2B5EF4-FFF2-40B4-BE49-F238E27FC236}">
+                <a16:creationId xmlns:a16="http://schemas.microsoft.com/office/drawing/2014/main" id="{D657C004-8BD5-C912-88BE-1260BCEE836E}"/>
+              </a:ext>
+            </a:extLst>
+          </p:cNvPr>
+          <p:cNvSpPr/>
+          <p:nvPr/>
+        </p:nvSpPr>
+        <p:spPr>
+          <a:xfrm>
+            <a:off x="4981375" y="5134977"/>
             <a:ext cx="394069" cy="380371"/>
           </a:xfrm>
           <a:prstGeom prst="ellipse">
@@ -28782,13 +31096,19 @@
       </p:sp>
       <p:sp>
         <p:nvSpPr>
-          <p:cNvPr id="17" name="Oval 16"/>
-          <p:cNvSpPr/>
-          <p:nvPr/>
-        </p:nvSpPr>
-        <p:spPr>
-          <a:xfrm>
-            <a:off x="6422429" y="5000772"/>
+          <p:cNvPr id="19" name="Oval 18">
+            <a:extLst>
+              <a:ext uri="{FF2B5EF4-FFF2-40B4-BE49-F238E27FC236}">
+                <a16:creationId xmlns:a16="http://schemas.microsoft.com/office/drawing/2014/main" id="{BF7C9A93-920C-A0EB-81B7-001DD1386F49}"/>
+              </a:ext>
+            </a:extLst>
+          </p:cNvPr>
+          <p:cNvSpPr/>
+          <p:nvPr/>
+        </p:nvSpPr>
+        <p:spPr>
+          <a:xfrm>
+            <a:off x="6446718" y="5039820"/>
             <a:ext cx="580727" cy="560414"/>
           </a:xfrm>
           <a:prstGeom prst="ellipse">
@@ -28827,13 +31147,19 @@
       </p:sp>
       <p:sp>
         <p:nvSpPr>
-          <p:cNvPr id="18" name="Oval 17"/>
-          <p:cNvSpPr/>
-          <p:nvPr/>
-        </p:nvSpPr>
-        <p:spPr>
-          <a:xfrm>
-            <a:off x="6515757" y="5087155"/>
+          <p:cNvPr id="20" name="Oval 19">
+            <a:extLst>
+              <a:ext uri="{FF2B5EF4-FFF2-40B4-BE49-F238E27FC236}">
+                <a16:creationId xmlns:a16="http://schemas.microsoft.com/office/drawing/2014/main" id="{FEEC62D8-685C-C883-07E1-88F5FDC4B2A8}"/>
+              </a:ext>
+            </a:extLst>
+          </p:cNvPr>
+          <p:cNvSpPr/>
+          <p:nvPr/>
+        </p:nvSpPr>
+        <p:spPr>
+          <a:xfrm>
+            <a:off x="6540046" y="5126203"/>
             <a:ext cx="394069" cy="380371"/>
           </a:xfrm>
           <a:prstGeom prst="ellipse">
@@ -28872,15 +31198,21 @@
       </p:sp>
       <p:cxnSp>
         <p:nvCxnSpPr>
-          <p:cNvPr id="19" name="Straight Connector 18"/>
+          <p:cNvPr id="21" name="Straight Connector 20">
+            <a:extLst>
+              <a:ext uri="{FF2B5EF4-FFF2-40B4-BE49-F238E27FC236}">
+                <a16:creationId xmlns:a16="http://schemas.microsoft.com/office/drawing/2014/main" id="{8CC7EB89-223A-3E5C-9A32-C13FD6BD7FA5}"/>
+              </a:ext>
+            </a:extLst>
+          </p:cNvPr>
           <p:cNvCxnSpPr>
-            <a:stCxn id="5" idx="0"/>
+            <a:stCxn id="7" idx="0"/>
           </p:cNvCxnSpPr>
           <p:nvPr/>
         </p:nvCxnSpPr>
         <p:spPr>
           <a:xfrm>
-            <a:off x="5154121" y="1747348"/>
+            <a:off x="5178410" y="1786396"/>
             <a:ext cx="1" cy="266700"/>
           </a:xfrm>
           <a:prstGeom prst="line">
@@ -28905,13 +31237,19 @@
       </p:cxnSp>
       <p:cxnSp>
         <p:nvCxnSpPr>
-          <p:cNvPr id="20" name="Straight Connector 19"/>
+          <p:cNvPr id="22" name="Straight Connector 21">
+            <a:extLst>
+              <a:ext uri="{FF2B5EF4-FFF2-40B4-BE49-F238E27FC236}">
+                <a16:creationId xmlns:a16="http://schemas.microsoft.com/office/drawing/2014/main" id="{1992F0A8-35AC-B1EB-1D8C-7977778A629D}"/>
+              </a:ext>
+            </a:extLst>
+          </p:cNvPr>
           <p:cNvCxnSpPr/>
           <p:nvPr/>
         </p:nvCxnSpPr>
         <p:spPr>
           <a:xfrm>
-            <a:off x="5938564" y="1747348"/>
+            <a:off x="5962853" y="1786396"/>
             <a:ext cx="1" cy="266700"/>
           </a:xfrm>
           <a:prstGeom prst="line">
@@ -28936,13 +31274,19 @@
       </p:cxnSp>
       <p:cxnSp>
         <p:nvCxnSpPr>
-          <p:cNvPr id="21" name="Straight Connector 20"/>
+          <p:cNvPr id="23" name="Straight Connector 22">
+            <a:extLst>
+              <a:ext uri="{FF2B5EF4-FFF2-40B4-BE49-F238E27FC236}">
+                <a16:creationId xmlns:a16="http://schemas.microsoft.com/office/drawing/2014/main" id="{3DBC88F1-EAC6-8726-CF33-BD45A83D5D1D}"/>
+              </a:ext>
+            </a:extLst>
+          </p:cNvPr>
           <p:cNvCxnSpPr/>
           <p:nvPr/>
         </p:nvCxnSpPr>
         <p:spPr>
           <a:xfrm>
-            <a:off x="6734588" y="1753641"/>
+            <a:off x="6758877" y="1792689"/>
             <a:ext cx="1" cy="266700"/>
           </a:xfrm>
           <a:prstGeom prst="line">
@@ -28967,13 +31311,19 @@
       </p:cxnSp>
       <p:cxnSp>
         <p:nvCxnSpPr>
-          <p:cNvPr id="22" name="Straight Connector 21"/>
+          <p:cNvPr id="24" name="Straight Connector 23">
+            <a:extLst>
+              <a:ext uri="{FF2B5EF4-FFF2-40B4-BE49-F238E27FC236}">
+                <a16:creationId xmlns:a16="http://schemas.microsoft.com/office/drawing/2014/main" id="{C2B8C3C3-0689-6E44-D88B-7B870662598F}"/>
+              </a:ext>
+            </a:extLst>
+          </p:cNvPr>
           <p:cNvCxnSpPr/>
           <p:nvPr/>
         </p:nvCxnSpPr>
         <p:spPr>
           <a:xfrm>
-            <a:off x="5147733" y="2745568"/>
+            <a:off x="5172022" y="2784616"/>
             <a:ext cx="1" cy="266700"/>
           </a:xfrm>
           <a:prstGeom prst="line">
@@ -28998,13 +31348,19 @@
       </p:cxnSp>
       <p:cxnSp>
         <p:nvCxnSpPr>
-          <p:cNvPr id="23" name="Straight Connector 22"/>
+          <p:cNvPr id="25" name="Straight Connector 24">
+            <a:extLst>
+              <a:ext uri="{FF2B5EF4-FFF2-40B4-BE49-F238E27FC236}">
+                <a16:creationId xmlns:a16="http://schemas.microsoft.com/office/drawing/2014/main" id="{D103F1D0-77C7-9A34-385B-F1E1F229AA48}"/>
+              </a:ext>
+            </a:extLst>
+          </p:cNvPr>
           <p:cNvCxnSpPr/>
           <p:nvPr/>
         </p:nvCxnSpPr>
         <p:spPr>
           <a:xfrm>
-            <a:off x="5938564" y="2745568"/>
+            <a:off x="5962853" y="2784616"/>
             <a:ext cx="1" cy="266700"/>
           </a:xfrm>
           <a:prstGeom prst="line">
@@ -29029,13 +31385,19 @@
       </p:cxnSp>
       <p:cxnSp>
         <p:nvCxnSpPr>
-          <p:cNvPr id="24" name="Straight Connector 23"/>
+          <p:cNvPr id="26" name="Straight Connector 25">
+            <a:extLst>
+              <a:ext uri="{FF2B5EF4-FFF2-40B4-BE49-F238E27FC236}">
+                <a16:creationId xmlns:a16="http://schemas.microsoft.com/office/drawing/2014/main" id="{3C883144-8402-FB1F-020C-714021A270FD}"/>
+              </a:ext>
+            </a:extLst>
+          </p:cNvPr>
           <p:cNvCxnSpPr/>
           <p:nvPr/>
         </p:nvCxnSpPr>
         <p:spPr>
           <a:xfrm>
-            <a:off x="6733635" y="2745568"/>
+            <a:off x="6757924" y="2784616"/>
             <a:ext cx="1" cy="266700"/>
           </a:xfrm>
           <a:prstGeom prst="line">
@@ -29060,14 +31422,20 @@
       </p:cxnSp>
       <p:sp>
         <p:nvSpPr>
-          <p:cNvPr id="25" name="TextBox 24"/>
+          <p:cNvPr id="27" name="TextBox 26">
+            <a:extLst>
+              <a:ext uri="{FF2B5EF4-FFF2-40B4-BE49-F238E27FC236}">
+                <a16:creationId xmlns:a16="http://schemas.microsoft.com/office/drawing/2014/main" id="{1A000AE4-6680-5A07-3F36-A18FF31ED7FA}"/>
+              </a:ext>
+            </a:extLst>
+          </p:cNvPr>
           <p:cNvSpPr txBox="1"/>
           <p:nvPr/>
         </p:nvSpPr>
         <p:spPr>
           <a:xfrm>
-            <a:off x="4839796" y="2261143"/>
-            <a:ext cx="615874" cy="246221"/>
+            <a:off x="4977071" y="2313676"/>
+            <a:ext cx="402675" cy="246221"/>
           </a:xfrm>
           <a:prstGeom prst="rect">
             <a:avLst/>
@@ -29086,21 +31454,27 @@
                 <a:latin typeface="Century Gothic" panose="020B0502020202020204" pitchFamily="34" charset="0"/>
                 <a:cs typeface="Adobe Devanagari" panose="02040503050201020203" pitchFamily="18" charset="0"/>
               </a:rPr>
-              <a:t>Knob 1</a:t>
-            </a:r>
-          </a:p>
-        </p:txBody>
-      </p:sp>
-      <p:sp>
-        <p:nvSpPr>
-          <p:cNvPr id="26" name="TextBox 25"/>
+              <a:t>Mix</a:t>
+            </a:r>
+          </a:p>
+        </p:txBody>
+      </p:sp>
+      <p:sp>
+        <p:nvSpPr>
+          <p:cNvPr id="28" name="TextBox 27">
+            <a:extLst>
+              <a:ext uri="{FF2B5EF4-FFF2-40B4-BE49-F238E27FC236}">
+                <a16:creationId xmlns:a16="http://schemas.microsoft.com/office/drawing/2014/main" id="{07FEC6DF-04ED-CA3D-0582-A7C1C4E76C69}"/>
+              </a:ext>
+            </a:extLst>
+          </p:cNvPr>
           <p:cNvSpPr txBox="1"/>
           <p:nvPr/>
         </p:nvSpPr>
         <p:spPr>
           <a:xfrm>
-            <a:off x="5644770" y="2261142"/>
-            <a:ext cx="615874" cy="246221"/>
+            <a:off x="5790087" y="2300190"/>
+            <a:ext cx="373820" cy="246221"/>
           </a:xfrm>
           <a:prstGeom prst="rect">
             <a:avLst/>
@@ -29119,21 +31493,27 @@
                 <a:latin typeface="Century Gothic" panose="020B0502020202020204" pitchFamily="34" charset="0"/>
                 <a:cs typeface="Adobe Devanagari" panose="02040503050201020203" pitchFamily="18" charset="0"/>
               </a:rPr>
-              <a:t>Knob 2</a:t>
-            </a:r>
-          </a:p>
-        </p:txBody>
-      </p:sp>
-      <p:sp>
-        <p:nvSpPr>
-          <p:cNvPr id="27" name="TextBox 26"/>
+              <a:t>LPF</a:t>
+            </a:r>
+          </a:p>
+        </p:txBody>
+      </p:sp>
+      <p:sp>
+        <p:nvSpPr>
+          <p:cNvPr id="29" name="TextBox 28">
+            <a:extLst>
+              <a:ext uri="{FF2B5EF4-FFF2-40B4-BE49-F238E27FC236}">
+                <a16:creationId xmlns:a16="http://schemas.microsoft.com/office/drawing/2014/main" id="{015D475C-398D-1CA1-9BD8-7DBD44933398}"/>
+              </a:ext>
+            </a:extLst>
+          </p:cNvPr>
           <p:cNvSpPr txBox="1"/>
           <p:nvPr/>
         </p:nvSpPr>
         <p:spPr>
           <a:xfrm>
-            <a:off x="6425873" y="2267910"/>
-            <a:ext cx="615874" cy="246221"/>
+            <a:off x="6460584" y="2306958"/>
+            <a:ext cx="595035" cy="246221"/>
           </a:xfrm>
           <a:prstGeom prst="rect">
             <a:avLst/>
@@ -29152,21 +31532,27 @@
                 <a:latin typeface="Century Gothic" panose="020B0502020202020204" pitchFamily="34" charset="0"/>
                 <a:cs typeface="Adobe Devanagari" panose="02040503050201020203" pitchFamily="18" charset="0"/>
               </a:rPr>
-              <a:t>Knob 3</a:t>
-            </a:r>
-          </a:p>
-        </p:txBody>
-      </p:sp>
-      <p:sp>
-        <p:nvSpPr>
-          <p:cNvPr id="28" name="TextBox 27"/>
+              <a:t>REGEN</a:t>
+            </a:r>
+          </a:p>
+        </p:txBody>
+      </p:sp>
+      <p:sp>
+        <p:nvSpPr>
+          <p:cNvPr id="30" name="TextBox 29">
+            <a:extLst>
+              <a:ext uri="{FF2B5EF4-FFF2-40B4-BE49-F238E27FC236}">
+                <a16:creationId xmlns:a16="http://schemas.microsoft.com/office/drawing/2014/main" id="{D584AA0F-6AFB-F174-DF94-F86A9C51F179}"/>
+              </a:ext>
+            </a:extLst>
+          </p:cNvPr>
           <p:cNvSpPr txBox="1"/>
           <p:nvPr/>
         </p:nvSpPr>
         <p:spPr>
           <a:xfrm>
-            <a:off x="5648947" y="3267265"/>
-            <a:ext cx="615874" cy="246221"/>
+            <a:off x="5640378" y="3306313"/>
+            <a:ext cx="681598" cy="400110"/>
           </a:xfrm>
           <a:prstGeom prst="rect">
             <a:avLst/>
@@ -29185,21 +31571,37 @@
                 <a:latin typeface="Century Gothic" panose="020B0502020202020204" pitchFamily="34" charset="0"/>
                 <a:cs typeface="Adobe Devanagari" panose="02040503050201020203" pitchFamily="18" charset="0"/>
               </a:rPr>
-              <a:t>Knob 5</a:t>
-            </a:r>
-          </a:p>
-        </p:txBody>
-      </p:sp>
-      <p:sp>
-        <p:nvSpPr>
-          <p:cNvPr id="29" name="TextBox 28"/>
+              <a:t>INT 1</a:t>
+            </a:r>
+          </a:p>
+          <a:p>
+            <a:pPr algn="ctr"/>
+            <a:r>
+              <a:rPr lang="en-US" sz="1000" b="1" dirty="0">
+                <a:latin typeface="Century Gothic" panose="020B0502020202020204" pitchFamily="34" charset="0"/>
+                <a:cs typeface="Adobe Devanagari" panose="02040503050201020203" pitchFamily="18" charset="0"/>
+              </a:rPr>
+              <a:t>(Speed)</a:t>
+            </a:r>
+          </a:p>
+        </p:txBody>
+      </p:sp>
+      <p:sp>
+        <p:nvSpPr>
+          <p:cNvPr id="31" name="TextBox 30">
+            <a:extLst>
+              <a:ext uri="{FF2B5EF4-FFF2-40B4-BE49-F238E27FC236}">
+                <a16:creationId xmlns:a16="http://schemas.microsoft.com/office/drawing/2014/main" id="{F55268A8-DDF2-6775-551E-709A3EBE205F}"/>
+              </a:ext>
+            </a:extLst>
+          </p:cNvPr>
           <p:cNvSpPr txBox="1"/>
           <p:nvPr/>
         </p:nvSpPr>
         <p:spPr>
           <a:xfrm>
-            <a:off x="6432054" y="3267265"/>
-            <a:ext cx="615874" cy="246221"/>
+            <a:off x="6437909" y="3306313"/>
+            <a:ext cx="652744" cy="553998"/>
           </a:xfrm>
           <a:prstGeom prst="rect">
             <a:avLst/>
@@ -29218,21 +31620,44 @@
                 <a:latin typeface="Century Gothic" panose="020B0502020202020204" pitchFamily="34" charset="0"/>
                 <a:cs typeface="Adobe Devanagari" panose="02040503050201020203" pitchFamily="18" charset="0"/>
               </a:rPr>
-              <a:t>Knob 6</a:t>
-            </a:r>
-          </a:p>
-        </p:txBody>
-      </p:sp>
-      <p:sp>
-        <p:nvSpPr>
-          <p:cNvPr id="30" name="TextBox 29"/>
+              <a:t>INT 2</a:t>
+            </a:r>
+          </a:p>
+          <a:p>
+            <a:pPr algn="ctr"/>
+            <a:r>
+              <a:rPr lang="en-US" sz="1000" b="1" dirty="0">
+                <a:latin typeface="Century Gothic" panose="020B0502020202020204" pitchFamily="34" charset="0"/>
+                <a:cs typeface="Adobe Devanagari" panose="02040503050201020203" pitchFamily="18" charset="0"/>
+              </a:rPr>
+              <a:t>(Depth)</a:t>
+            </a:r>
+          </a:p>
+          <a:p>
+            <a:pPr algn="ctr"/>
+            <a:endParaRPr lang="en-US" sz="1000" b="1" dirty="0">
+              <a:latin typeface="Century Gothic" panose="020B0502020202020204" pitchFamily="34" charset="0"/>
+              <a:cs typeface="Adobe Devanagari" panose="02040503050201020203" pitchFamily="18" charset="0"/>
+            </a:endParaRPr>
+          </a:p>
+        </p:txBody>
+      </p:sp>
+      <p:sp>
+        <p:nvSpPr>
+          <p:cNvPr id="32" name="TextBox 31">
+            <a:extLst>
+              <a:ext uri="{FF2B5EF4-FFF2-40B4-BE49-F238E27FC236}">
+                <a16:creationId xmlns:a16="http://schemas.microsoft.com/office/drawing/2014/main" id="{DBDBD501-CA39-2EB5-4B51-301DEFAF40B2}"/>
+              </a:ext>
+            </a:extLst>
+          </p:cNvPr>
           <p:cNvSpPr txBox="1"/>
           <p:nvPr/>
         </p:nvSpPr>
         <p:spPr>
           <a:xfrm>
-            <a:off x="4846186" y="3267265"/>
-            <a:ext cx="615874" cy="246221"/>
+            <a:off x="4918568" y="3306313"/>
+            <a:ext cx="519694" cy="246221"/>
           </a:xfrm>
           <a:prstGeom prst="rect">
             <a:avLst/>
@@ -29251,21 +31676,27 @@
                 <a:latin typeface="Century Gothic" panose="020B0502020202020204" pitchFamily="34" charset="0"/>
                 <a:cs typeface="Adobe Devanagari" panose="02040503050201020203" pitchFamily="18" charset="0"/>
               </a:rPr>
-              <a:t>Knob 4</a:t>
-            </a:r>
-          </a:p>
-        </p:txBody>
-      </p:sp>
-      <p:sp>
-        <p:nvSpPr>
-          <p:cNvPr id="31" name="TextBox 30"/>
+              <a:t>Glide</a:t>
+            </a:r>
+          </a:p>
+        </p:txBody>
+      </p:sp>
+      <p:sp>
+        <p:nvSpPr>
+          <p:cNvPr id="33" name="TextBox 32">
+            <a:extLst>
+              <a:ext uri="{FF2B5EF4-FFF2-40B4-BE49-F238E27FC236}">
+                <a16:creationId xmlns:a16="http://schemas.microsoft.com/office/drawing/2014/main" id="{D8EA9AE7-9C35-359B-71CF-FE3ED075A0B6}"/>
+              </a:ext>
+            </a:extLst>
+          </p:cNvPr>
           <p:cNvSpPr txBox="1"/>
           <p:nvPr/>
         </p:nvSpPr>
         <p:spPr>
           <a:xfrm>
-            <a:off x="4803473" y="5548458"/>
-            <a:ext cx="724878" cy="246221"/>
+            <a:off x="4702728" y="5587506"/>
+            <a:ext cx="974947" cy="246221"/>
           </a:xfrm>
           <a:prstGeom prst="rect">
             <a:avLst/>
@@ -29280,32 +31711,31 @@
           <a:p>
             <a:pPr algn="ctr"/>
             <a:r>
-              <a:rPr lang="en-US" sz="1000" b="1" dirty="0" err="1">
-                <a:latin typeface="Century Gothic" panose="020B0502020202020204" pitchFamily="34" charset="0"/>
-                <a:cs typeface="Adobe Devanagari" panose="02040503050201020203" pitchFamily="18" charset="0"/>
-              </a:rPr>
-              <a:t>FootSw</a:t>
-            </a:r>
-            <a:r>
               <a:rPr lang="en-US" sz="1000" b="1" dirty="0">
                 <a:latin typeface="Century Gothic" panose="020B0502020202020204" pitchFamily="34" charset="0"/>
                 <a:cs typeface="Adobe Devanagari" panose="02040503050201020203" pitchFamily="18" charset="0"/>
               </a:rPr>
-              <a:t> 1</a:t>
-            </a:r>
-          </a:p>
-        </p:txBody>
-      </p:sp>
-      <p:sp>
-        <p:nvSpPr>
-          <p:cNvPr id="32" name="TextBox 31"/>
+              <a:t>BYPASS / ALT</a:t>
+            </a:r>
+          </a:p>
+        </p:txBody>
+      </p:sp>
+      <p:sp>
+        <p:nvSpPr>
+          <p:cNvPr id="34" name="TextBox 33">
+            <a:extLst>
+              <a:ext uri="{FF2B5EF4-FFF2-40B4-BE49-F238E27FC236}">
+                <a16:creationId xmlns:a16="http://schemas.microsoft.com/office/drawing/2014/main" id="{CD7E9FC9-D3E2-6B06-632C-14B2F00FCE41}"/>
+              </a:ext>
+            </a:extLst>
+          </p:cNvPr>
           <p:cNvSpPr txBox="1"/>
           <p:nvPr/>
         </p:nvSpPr>
         <p:spPr>
           <a:xfrm rot="16200000">
-            <a:off x="4892535" y="4030683"/>
-            <a:ext cx="455573" cy="461665"/>
+            <a:off x="4864727" y="4069731"/>
+            <a:ext cx="559769" cy="461665"/>
           </a:xfrm>
           <a:prstGeom prst="rect">
             <a:avLst/>
@@ -29324,7 +31754,7 @@
                 <a:latin typeface="Century Gothic" panose="020B0502020202020204" pitchFamily="34" charset="0"/>
                 <a:cs typeface="Adobe Devanagari" panose="02040503050201020203" pitchFamily="18" charset="0"/>
               </a:rPr>
-              <a:t>Opt 1</a:t>
+              <a:t>Quarter</a:t>
             </a:r>
           </a:p>
           <a:p>
@@ -29334,8 +31764,19 @@
                 <a:latin typeface="Century Gothic" panose="020B0502020202020204" pitchFamily="34" charset="0"/>
                 <a:cs typeface="Adobe Devanagari" panose="02040503050201020203" pitchFamily="18" charset="0"/>
               </a:rPr>
-              <a:t>Opt 2</a:t>
-            </a:r>
+              <a:t>Dot 8</a:t>
+            </a:r>
+            <a:r>
+              <a:rPr lang="en-US" sz="800" b="1" baseline="30000" dirty="0">
+                <a:latin typeface="Century Gothic" panose="020B0502020202020204" pitchFamily="34" charset="0"/>
+                <a:cs typeface="Adobe Devanagari" panose="02040503050201020203" pitchFamily="18" charset="0"/>
+              </a:rPr>
+              <a:t>th</a:t>
+            </a:r>
+            <a:endParaRPr lang="en-US" sz="800" b="1" dirty="0">
+              <a:latin typeface="Century Gothic" panose="020B0502020202020204" pitchFamily="34" charset="0"/>
+              <a:cs typeface="Adobe Devanagari" panose="02040503050201020203" pitchFamily="18" charset="0"/>
+            </a:endParaRPr>
           </a:p>
           <a:p>
             <a:pPr algn="ctr"/>
@@ -29344,21 +31785,27 @@
                 <a:latin typeface="Century Gothic" panose="020B0502020202020204" pitchFamily="34" charset="0"/>
                 <a:cs typeface="Adobe Devanagari" panose="02040503050201020203" pitchFamily="18" charset="0"/>
               </a:rPr>
-              <a:t>Opt 3</a:t>
-            </a:r>
-          </a:p>
-        </p:txBody>
-      </p:sp>
-      <p:sp>
-        <p:nvSpPr>
-          <p:cNvPr id="33" name="TextBox 32"/>
+              <a:t>8th</a:t>
+            </a:r>
+          </a:p>
+        </p:txBody>
+      </p:sp>
+      <p:sp>
+        <p:nvSpPr>
+          <p:cNvPr id="35" name="TextBox 34">
+            <a:extLst>
+              <a:ext uri="{FF2B5EF4-FFF2-40B4-BE49-F238E27FC236}">
+                <a16:creationId xmlns:a16="http://schemas.microsoft.com/office/drawing/2014/main" id="{ED039301-F7C7-483F-8DC0-8D66B03A05D7}"/>
+              </a:ext>
+            </a:extLst>
+          </p:cNvPr>
           <p:cNvSpPr txBox="1"/>
           <p:nvPr/>
         </p:nvSpPr>
         <p:spPr>
           <a:xfrm>
-            <a:off x="5081621" y="4570836"/>
-            <a:ext cx="1742170" cy="461665"/>
+            <a:off x="4952460" y="4616479"/>
+            <a:ext cx="2037473" cy="400110"/>
           </a:xfrm>
           <a:prstGeom prst="rect">
             <a:avLst/>
@@ -29373,13 +31820,13 @@
           <a:p>
             <a:pPr algn="ctr"/>
             <a:r>
-              <a:rPr lang="en-US" sz="2400" b="1" dirty="0" err="1">
+              <a:rPr lang="en-US" sz="2000" b="1" dirty="0" err="1">
                 <a:latin typeface="Broadway" panose="04040905080B02020502" pitchFamily="82" charset="0"/>
                 <a:cs typeface="Adobe Devanagari" panose="02040503050201020203" pitchFamily="18" charset="0"/>
               </a:rPr>
-              <a:t>FunBox</a:t>
-            </a:r>
-            <a:endParaRPr lang="en-US" sz="2400" b="1" dirty="0">
+              <a:t>Balnea</a:t>
+            </a:r>
+            <a:endParaRPr lang="en-US" sz="2000" b="1" dirty="0">
               <a:latin typeface="Broadway" panose="04040905080B02020502" pitchFamily="82" charset="0"/>
               <a:cs typeface="Adobe Devanagari" panose="02040503050201020203" pitchFamily="18" charset="0"/>
             </a:endParaRPr>
@@ -29388,13 +31835,68 @@
       </p:sp>
       <p:sp>
         <p:nvSpPr>
-          <p:cNvPr id="35" name="Oval 34"/>
+          <p:cNvPr id="36" name="TextBox 35">
+            <a:extLst>
+              <a:ext uri="{FF2B5EF4-FFF2-40B4-BE49-F238E27FC236}">
+                <a16:creationId xmlns:a16="http://schemas.microsoft.com/office/drawing/2014/main" id="{8A38927E-98AE-7000-55EC-95F812600D46}"/>
+              </a:ext>
+            </a:extLst>
+          </p:cNvPr>
+          <p:cNvSpPr txBox="1"/>
+          <p:nvPr/>
+        </p:nvSpPr>
+        <p:spPr>
+          <a:xfrm>
+            <a:off x="5431077" y="4916279"/>
+            <a:ext cx="1064714" cy="400110"/>
+          </a:xfrm>
+          <a:prstGeom prst="rect">
+            <a:avLst/>
+          </a:prstGeom>
+          <a:noFill/>
+        </p:spPr>
+        <p:txBody>
+          <a:bodyPr wrap="none" rtlCol="0">
+            <a:spAutoFit/>
+          </a:bodyPr>
+          <a:lstStyle/>
+          <a:p>
+            <a:pPr algn="ctr"/>
+            <a:r>
+              <a:rPr lang="en-US" sz="1000" dirty="0">
+                <a:latin typeface="Century Gothic" panose="020B0502020202020204" pitchFamily="34" charset="0"/>
+                <a:cs typeface="Adobe Devanagari" panose="02040503050201020203" pitchFamily="18" charset="0"/>
+              </a:rPr>
+              <a:t>Digital Delay /</a:t>
+            </a:r>
+          </a:p>
+          <a:p>
+            <a:pPr algn="ctr"/>
+            <a:r>
+              <a:rPr lang="en-US" sz="1000" dirty="0">
+                <a:latin typeface="Century Gothic" panose="020B0502020202020204" pitchFamily="34" charset="0"/>
+                <a:cs typeface="Adobe Devanagari" panose="02040503050201020203" pitchFamily="18" charset="0"/>
+              </a:rPr>
+              <a:t>Pitch Shifter</a:t>
+            </a:r>
+          </a:p>
+        </p:txBody>
+      </p:sp>
+      <p:sp>
+        <p:nvSpPr>
+          <p:cNvPr id="37" name="Oval 36">
+            <a:extLst>
+              <a:ext uri="{FF2B5EF4-FFF2-40B4-BE49-F238E27FC236}">
+                <a16:creationId xmlns:a16="http://schemas.microsoft.com/office/drawing/2014/main" id="{ED03B559-2533-701E-6F60-4E244CBBF45D}"/>
+              </a:ext>
+            </a:extLst>
+          </p:cNvPr>
           <p:cNvSpPr/>
           <p:nvPr/>
         </p:nvSpPr>
         <p:spPr>
           <a:xfrm rot="16200000">
-            <a:off x="5830387" y="3795700"/>
+            <a:off x="5854676" y="3834748"/>
             <a:ext cx="245746" cy="243840"/>
           </a:xfrm>
           <a:prstGeom prst="ellipse">
@@ -29433,13 +31935,19 @@
       </p:sp>
       <p:sp>
         <p:nvSpPr>
-          <p:cNvPr id="36" name="Flowchart: Terminator 35"/>
+          <p:cNvPr id="38" name="Flowchart: Terminator 37">
+            <a:extLst>
+              <a:ext uri="{FF2B5EF4-FFF2-40B4-BE49-F238E27FC236}">
+                <a16:creationId xmlns:a16="http://schemas.microsoft.com/office/drawing/2014/main" id="{0434C4ED-F75A-CFED-EBA9-C6CAEF1A5FA2}"/>
+              </a:ext>
+            </a:extLst>
+          </p:cNvPr>
           <p:cNvSpPr/>
           <p:nvPr/>
         </p:nvSpPr>
         <p:spPr>
           <a:xfrm rot="16200000">
-            <a:off x="5810513" y="3807751"/>
+            <a:off x="5834802" y="3846799"/>
             <a:ext cx="95488" cy="208168"/>
           </a:xfrm>
           <a:prstGeom prst="flowChartTerminator">
@@ -29478,13 +31986,19 @@
       </p:sp>
       <p:sp>
         <p:nvSpPr>
-          <p:cNvPr id="37" name="Oval 36"/>
+          <p:cNvPr id="39" name="Oval 38">
+            <a:extLst>
+              <a:ext uri="{FF2B5EF4-FFF2-40B4-BE49-F238E27FC236}">
+                <a16:creationId xmlns:a16="http://schemas.microsoft.com/office/drawing/2014/main" id="{D6995659-E8A4-A384-9EAD-4D75301B2DAB}"/>
+              </a:ext>
+            </a:extLst>
+          </p:cNvPr>
           <p:cNvSpPr/>
           <p:nvPr/>
         </p:nvSpPr>
         <p:spPr>
           <a:xfrm rot="16200000">
-            <a:off x="6651163" y="3795700"/>
+            <a:off x="6675452" y="3834748"/>
             <a:ext cx="245746" cy="243840"/>
           </a:xfrm>
           <a:prstGeom prst="ellipse">
@@ -29523,13 +32037,19 @@
       </p:sp>
       <p:sp>
         <p:nvSpPr>
-          <p:cNvPr id="38" name="Flowchart: Terminator 37"/>
+          <p:cNvPr id="40" name="Flowchart: Terminator 39">
+            <a:extLst>
+              <a:ext uri="{FF2B5EF4-FFF2-40B4-BE49-F238E27FC236}">
+                <a16:creationId xmlns:a16="http://schemas.microsoft.com/office/drawing/2014/main" id="{31CBECC7-5BAC-EFAC-1976-0BAAADFA9CFB}"/>
+              </a:ext>
+            </a:extLst>
+          </p:cNvPr>
           <p:cNvSpPr/>
           <p:nvPr/>
         </p:nvSpPr>
         <p:spPr>
           <a:xfrm rot="16200000">
-            <a:off x="6631289" y="3807751"/>
+            <a:off x="6655578" y="3846799"/>
             <a:ext cx="95488" cy="208168"/>
           </a:xfrm>
           <a:prstGeom prst="flowChartTerminator">
@@ -29568,14 +32088,20 @@
       </p:sp>
       <p:sp>
         <p:nvSpPr>
-          <p:cNvPr id="39" name="TextBox 38"/>
+          <p:cNvPr id="47" name="TextBox 46">
+            <a:extLst>
+              <a:ext uri="{FF2B5EF4-FFF2-40B4-BE49-F238E27FC236}">
+                <a16:creationId xmlns:a16="http://schemas.microsoft.com/office/drawing/2014/main" id="{A041F2EF-327D-EF1A-88BA-3944F4DF6F1A}"/>
+              </a:ext>
+            </a:extLst>
+          </p:cNvPr>
           <p:cNvSpPr txBox="1"/>
           <p:nvPr/>
         </p:nvSpPr>
         <p:spPr>
-          <a:xfrm rot="16200000">
-            <a:off x="5705042" y="4049121"/>
-            <a:ext cx="455574" cy="461665"/>
+          <a:xfrm>
+            <a:off x="6336766" y="5574572"/>
+            <a:ext cx="811441" cy="246221"/>
           </a:xfrm>
           <a:prstGeom prst="rect">
             <a:avLst/>
@@ -29590,11 +32116,1044 @@
           <a:p>
             <a:pPr algn="ctr"/>
             <a:r>
+              <a:rPr lang="en-US" sz="1000" b="1" dirty="0">
+                <a:latin typeface="Century Gothic" panose="020B0502020202020204" pitchFamily="34" charset="0"/>
+                <a:cs typeface="Adobe Devanagari" panose="02040503050201020203" pitchFamily="18" charset="0"/>
+              </a:rPr>
+              <a:t>Tap / Step</a:t>
+            </a:r>
+          </a:p>
+        </p:txBody>
+      </p:sp>
+      <p:sp>
+        <p:nvSpPr>
+          <p:cNvPr id="55" name="Rectangle 54">
+            <a:extLst>
+              <a:ext uri="{FF2B5EF4-FFF2-40B4-BE49-F238E27FC236}">
+                <a16:creationId xmlns:a16="http://schemas.microsoft.com/office/drawing/2014/main" id="{ED843F75-CC5A-8A2C-16A1-00AF43FA1F08}"/>
+              </a:ext>
+            </a:extLst>
+          </p:cNvPr>
+          <p:cNvSpPr/>
+          <p:nvPr/>
+        </p:nvSpPr>
+        <p:spPr>
+          <a:xfrm>
+            <a:off x="518160" y="1582168"/>
+            <a:ext cx="3739056" cy="1302922"/>
+          </a:xfrm>
+          <a:prstGeom prst="rect">
+            <a:avLst/>
+          </a:prstGeom>
+        </p:spPr>
+        <p:style>
+          <a:lnRef idx="2">
+            <a:schemeClr val="dk1">
+              <a:shade val="50000"/>
+            </a:schemeClr>
+          </a:lnRef>
+          <a:fillRef idx="1003">
+            <a:schemeClr val="lt1"/>
+          </a:fillRef>
+          <a:effectRef idx="0">
+            <a:schemeClr val="dk1"/>
+          </a:effectRef>
+          <a:fontRef idx="minor">
+            <a:schemeClr val="lt1"/>
+          </a:fontRef>
+        </p:style>
+        <p:txBody>
+          <a:bodyPr rtlCol="0" anchor="ctr"/>
+          <a:lstStyle/>
+          <a:p>
+            <a:r>
+              <a:rPr lang="en-US" sz="1600" b="1" dirty="0">
+                <a:solidFill>
+                  <a:schemeClr val="tx1"/>
+                </a:solidFill>
+              </a:rPr>
+              <a:t>Mix</a:t>
+            </a:r>
+            <a:r>
+              <a:rPr lang="en-US" sz="1600" dirty="0">
+                <a:solidFill>
+                  <a:schemeClr val="tx1"/>
+                </a:solidFill>
+              </a:rPr>
+              <a:t>: Dry/Wet Mix</a:t>
+            </a:r>
+          </a:p>
+          <a:p>
+            <a:r>
+              <a:rPr lang="en-US" sz="1600" b="1" dirty="0">
+                <a:solidFill>
+                  <a:schemeClr val="tx1"/>
+                </a:solidFill>
+              </a:rPr>
+              <a:t>LPF: </a:t>
+            </a:r>
+            <a:r>
+              <a:rPr lang="en-US" sz="1600" dirty="0">
+                <a:solidFill>
+                  <a:schemeClr val="tx1"/>
+                </a:solidFill>
+              </a:rPr>
+              <a:t>Resonant Low Pass Filter </a:t>
+            </a:r>
+            <a:r>
+              <a:rPr lang="en-US" sz="1600" dirty="0" err="1">
+                <a:solidFill>
+                  <a:schemeClr val="tx1"/>
+                </a:solidFill>
+              </a:rPr>
+              <a:t>Cuttoff</a:t>
+            </a:r>
+            <a:endParaRPr lang="en-US" sz="1600" dirty="0">
+              <a:solidFill>
+                <a:schemeClr val="tx1"/>
+              </a:solidFill>
+            </a:endParaRPr>
+          </a:p>
+          <a:p>
+            <a:r>
+              <a:rPr lang="en-US" sz="1600" b="1" dirty="0">
+                <a:solidFill>
+                  <a:schemeClr val="tx1"/>
+                </a:solidFill>
+              </a:rPr>
+              <a:t>REGEN:</a:t>
+            </a:r>
+            <a:r>
+              <a:rPr lang="en-US" sz="1600" dirty="0">
+                <a:solidFill>
+                  <a:schemeClr val="tx1"/>
+                </a:solidFill>
+              </a:rPr>
+              <a:t> Delay feedback / regen. Higher settings can oscillate out of control, very sensitive to LPF setting.</a:t>
+            </a:r>
+            <a:endParaRPr lang="en-US" sz="1600" b="1" dirty="0">
+              <a:solidFill>
+                <a:schemeClr val="tx1"/>
+              </a:solidFill>
+            </a:endParaRPr>
+          </a:p>
+        </p:txBody>
+      </p:sp>
+      <p:sp>
+        <p:nvSpPr>
+          <p:cNvPr id="56" name="Rectangle 55">
+            <a:extLst>
+              <a:ext uri="{FF2B5EF4-FFF2-40B4-BE49-F238E27FC236}">
+                <a16:creationId xmlns:a16="http://schemas.microsoft.com/office/drawing/2014/main" id="{F73FF264-5C63-09BB-B3D1-56D806651DE1}"/>
+              </a:ext>
+            </a:extLst>
+          </p:cNvPr>
+          <p:cNvSpPr/>
+          <p:nvPr/>
+        </p:nvSpPr>
+        <p:spPr>
+          <a:xfrm>
+            <a:off x="7609878" y="1268497"/>
+            <a:ext cx="4264299" cy="2235737"/>
+          </a:xfrm>
+          <a:prstGeom prst="rect">
+            <a:avLst/>
+          </a:prstGeom>
+        </p:spPr>
+        <p:style>
+          <a:lnRef idx="2">
+            <a:schemeClr val="dk1">
+              <a:shade val="50000"/>
+            </a:schemeClr>
+          </a:lnRef>
+          <a:fillRef idx="1003">
+            <a:schemeClr val="lt1"/>
+          </a:fillRef>
+          <a:effectRef idx="0">
+            <a:schemeClr val="dk1"/>
+          </a:effectRef>
+          <a:fontRef idx="minor">
+            <a:schemeClr val="lt1"/>
+          </a:fontRef>
+        </p:style>
+        <p:txBody>
+          <a:bodyPr rtlCol="0" anchor="ctr"/>
+          <a:lstStyle/>
+          <a:p>
+            <a:r>
+              <a:rPr lang="en-US" sz="1600" b="1" dirty="0">
+                <a:solidFill>
+                  <a:schemeClr val="tx1"/>
+                </a:solidFill>
+              </a:rPr>
+              <a:t>GLIDE: </a:t>
+            </a:r>
+            <a:r>
+              <a:rPr lang="en-US" sz="1600" dirty="0">
+                <a:solidFill>
+                  <a:schemeClr val="tx1"/>
+                </a:solidFill>
+              </a:rPr>
+              <a:t>Pitch transition time between sequencer steps.</a:t>
+            </a:r>
+          </a:p>
+          <a:p>
+            <a:r>
+              <a:rPr lang="en-US" sz="1600" b="1" dirty="0">
+                <a:solidFill>
+                  <a:schemeClr val="tx1"/>
+                </a:solidFill>
+              </a:rPr>
+              <a:t>INT 1</a:t>
+            </a:r>
+            <a:r>
+              <a:rPr lang="en-US" sz="1600" dirty="0">
+                <a:solidFill>
+                  <a:schemeClr val="tx1"/>
+                </a:solidFill>
+              </a:rPr>
+              <a:t>: Sets first interval in musical increments (by changing the delay time). Alt is Mod Speed)</a:t>
+            </a:r>
+          </a:p>
+          <a:p>
+            <a:r>
+              <a:rPr lang="en-US" sz="1600" b="1" dirty="0">
+                <a:solidFill>
+                  <a:schemeClr val="tx1"/>
+                </a:solidFill>
+              </a:rPr>
+              <a:t>INT 2</a:t>
+            </a:r>
+            <a:r>
+              <a:rPr lang="en-US" sz="1600" dirty="0">
+                <a:solidFill>
+                  <a:schemeClr val="tx1"/>
+                </a:solidFill>
+              </a:rPr>
+              <a:t>: Sets Second interval in musical increments (by changing the delay time). Alt is Mod Depth</a:t>
+            </a:r>
+          </a:p>
+          <a:p>
+            <a:r>
+              <a:rPr lang="en-US" sz="1600" dirty="0">
+                <a:solidFill>
+                  <a:schemeClr val="tx1"/>
+                </a:solidFill>
+              </a:rPr>
+              <a:t>Intervals: -2Oct, -Oct and 5</a:t>
+            </a:r>
+            <a:r>
+              <a:rPr lang="en-US" sz="1600" baseline="30000" dirty="0">
+                <a:solidFill>
+                  <a:schemeClr val="tx1"/>
+                </a:solidFill>
+              </a:rPr>
+              <a:t>th</a:t>
+            </a:r>
+            <a:r>
+              <a:rPr lang="en-US" sz="1600" dirty="0">
+                <a:solidFill>
+                  <a:schemeClr val="tx1"/>
+                </a:solidFill>
+              </a:rPr>
+              <a:t>, -Oct, -5</a:t>
+            </a:r>
+            <a:r>
+              <a:rPr lang="en-US" sz="1600" baseline="30000" dirty="0">
+                <a:solidFill>
+                  <a:schemeClr val="tx1"/>
+                </a:solidFill>
+              </a:rPr>
+              <a:t>th</a:t>
+            </a:r>
+            <a:r>
+              <a:rPr lang="en-US" sz="1600" dirty="0">
+                <a:solidFill>
+                  <a:schemeClr val="tx1"/>
+                </a:solidFill>
+              </a:rPr>
+              <a:t>, -4</a:t>
+            </a:r>
+            <a:r>
+              <a:rPr lang="en-US" sz="1600" baseline="30000" dirty="0">
+                <a:solidFill>
+                  <a:schemeClr val="tx1"/>
+                </a:solidFill>
+              </a:rPr>
+              <a:t>th</a:t>
+            </a:r>
+            <a:r>
+              <a:rPr lang="en-US" sz="1600" dirty="0">
+                <a:solidFill>
+                  <a:schemeClr val="tx1"/>
+                </a:solidFill>
+              </a:rPr>
+              <a:t>, Off, 4</a:t>
+            </a:r>
+            <a:r>
+              <a:rPr lang="en-US" sz="1600" baseline="30000" dirty="0">
+                <a:solidFill>
+                  <a:schemeClr val="tx1"/>
+                </a:solidFill>
+              </a:rPr>
+              <a:t>th</a:t>
+            </a:r>
+            <a:r>
+              <a:rPr lang="en-US" sz="1600" dirty="0">
+                <a:solidFill>
+                  <a:schemeClr val="tx1"/>
+                </a:solidFill>
+              </a:rPr>
+              <a:t>, 5</a:t>
+            </a:r>
+            <a:r>
+              <a:rPr lang="en-US" sz="1600" baseline="30000" dirty="0">
+                <a:solidFill>
+                  <a:schemeClr val="tx1"/>
+                </a:solidFill>
+              </a:rPr>
+              <a:t>th</a:t>
+            </a:r>
+            <a:r>
+              <a:rPr lang="en-US" sz="1600" dirty="0">
+                <a:solidFill>
+                  <a:schemeClr val="tx1"/>
+                </a:solidFill>
+              </a:rPr>
+              <a:t>, Oct, Oct and 5th, 2Oct</a:t>
+            </a:r>
+          </a:p>
+          <a:p>
+            <a:endParaRPr lang="en-US" sz="1600" dirty="0">
+              <a:solidFill>
+                <a:schemeClr val="bg1"/>
+              </a:solidFill>
+            </a:endParaRPr>
+          </a:p>
+        </p:txBody>
+      </p:sp>
+      <p:sp>
+        <p:nvSpPr>
+          <p:cNvPr id="57" name="Rectangle 56">
+            <a:extLst>
+              <a:ext uri="{FF2B5EF4-FFF2-40B4-BE49-F238E27FC236}">
+                <a16:creationId xmlns:a16="http://schemas.microsoft.com/office/drawing/2014/main" id="{A880F56E-CDCF-3FF3-BB97-254219359471}"/>
+              </a:ext>
+            </a:extLst>
+          </p:cNvPr>
+          <p:cNvSpPr/>
+          <p:nvPr/>
+        </p:nvSpPr>
+        <p:spPr>
+          <a:xfrm>
+            <a:off x="281990" y="3013236"/>
+            <a:ext cx="4014063" cy="1202448"/>
+          </a:xfrm>
+          <a:prstGeom prst="rect">
+            <a:avLst/>
+          </a:prstGeom>
+        </p:spPr>
+        <p:style>
+          <a:lnRef idx="2">
+            <a:schemeClr val="dk1">
+              <a:shade val="50000"/>
+            </a:schemeClr>
+          </a:lnRef>
+          <a:fillRef idx="1003">
+            <a:schemeClr val="dk1"/>
+          </a:fillRef>
+          <a:effectRef idx="0">
+            <a:schemeClr val="dk1"/>
+          </a:effectRef>
+          <a:fontRef idx="minor">
+            <a:schemeClr val="lt1"/>
+          </a:fontRef>
+        </p:style>
+        <p:txBody>
+          <a:bodyPr rtlCol="0" anchor="ctr"/>
+          <a:lstStyle/>
+          <a:p>
+            <a:r>
+              <a:rPr lang="en-US" sz="1600" b="1" dirty="0">
+                <a:solidFill>
+                  <a:schemeClr val="bg1"/>
+                </a:solidFill>
+              </a:rPr>
+              <a:t>Base Sequencer Step Length</a:t>
+            </a:r>
+          </a:p>
+          <a:p>
+            <a:r>
+              <a:rPr lang="en-US" sz="1600" b="1" dirty="0">
+                <a:solidFill>
+                  <a:schemeClr val="bg1"/>
+                </a:solidFill>
+              </a:rPr>
+              <a:t>  Left: Quarter Note (Same as Tap Tempo)</a:t>
+            </a:r>
+          </a:p>
+          <a:p>
+            <a:r>
+              <a:rPr lang="en-US" sz="1600" b="1" dirty="0">
+                <a:solidFill>
+                  <a:schemeClr val="bg1"/>
+                </a:solidFill>
+              </a:rPr>
+              <a:t>  Center: Dotted Eighth Note</a:t>
+            </a:r>
+          </a:p>
+          <a:p>
+            <a:r>
+              <a:rPr lang="en-US" sz="1600" b="1" dirty="0">
+                <a:solidFill>
+                  <a:schemeClr val="bg1"/>
+                </a:solidFill>
+              </a:rPr>
+              <a:t>  Right:  Eighth Note</a:t>
+            </a:r>
+          </a:p>
+        </p:txBody>
+      </p:sp>
+      <p:sp>
+        <p:nvSpPr>
+          <p:cNvPr id="60" name="Rectangle 59">
+            <a:extLst>
+              <a:ext uri="{FF2B5EF4-FFF2-40B4-BE49-F238E27FC236}">
+                <a16:creationId xmlns:a16="http://schemas.microsoft.com/office/drawing/2014/main" id="{12ED4E5F-BFF6-92EB-D3DB-85F61D54B583}"/>
+              </a:ext>
+            </a:extLst>
+          </p:cNvPr>
+          <p:cNvSpPr/>
+          <p:nvPr/>
+        </p:nvSpPr>
+        <p:spPr>
+          <a:xfrm>
+            <a:off x="7473735" y="4691038"/>
+            <a:ext cx="4579003" cy="1174775"/>
+          </a:xfrm>
+          <a:prstGeom prst="rect">
+            <a:avLst/>
+          </a:prstGeom>
+        </p:spPr>
+        <p:style>
+          <a:lnRef idx="2">
+            <a:schemeClr val="dk1">
+              <a:shade val="50000"/>
+            </a:schemeClr>
+          </a:lnRef>
+          <a:fillRef idx="1001">
+            <a:schemeClr val="dk2"/>
+          </a:fillRef>
+          <a:effectRef idx="0">
+            <a:schemeClr val="dk1"/>
+          </a:effectRef>
+          <a:fontRef idx="minor">
+            <a:schemeClr val="lt1"/>
+          </a:fontRef>
+        </p:style>
+        <p:txBody>
+          <a:bodyPr rtlCol="0" anchor="ctr"/>
+          <a:lstStyle/>
+          <a:p>
+            <a:r>
+              <a:rPr lang="en-US" sz="1600" b="1" dirty="0">
+                <a:solidFill>
+                  <a:schemeClr val="bg1"/>
+                </a:solidFill>
+              </a:rPr>
+              <a:t>Dip Switches:</a:t>
+            </a:r>
+          </a:p>
+          <a:p>
+            <a:r>
+              <a:rPr lang="en-US" sz="1600" b="1" dirty="0">
+                <a:solidFill>
+                  <a:schemeClr val="bg1"/>
+                </a:solidFill>
+              </a:rPr>
+              <a:t>  1: Stereo / Miso (off is MISO) </a:t>
+            </a:r>
+          </a:p>
+          <a:p>
+            <a:r>
+              <a:rPr lang="en-US" sz="1600" b="1" dirty="0">
+                <a:solidFill>
+                  <a:schemeClr val="bg1"/>
+                </a:solidFill>
+              </a:rPr>
+              <a:t>2: Reverse Mode                         </a:t>
+            </a:r>
+          </a:p>
+          <a:p>
+            <a:r>
+              <a:rPr lang="en-US" sz="1600" b="1" dirty="0">
+                <a:solidFill>
+                  <a:schemeClr val="bg1"/>
+                </a:solidFill>
+              </a:rPr>
+              <a:t>3. Dissonant Mode</a:t>
+            </a:r>
+          </a:p>
+          <a:p>
+            <a:r>
+              <a:rPr lang="en-US" sz="1600" b="1" dirty="0">
+                <a:solidFill>
+                  <a:schemeClr val="bg1"/>
+                </a:solidFill>
+              </a:rPr>
+              <a:t>4. Chromatic Mode (overrides Dissonant Mode)</a:t>
+            </a:r>
+          </a:p>
+        </p:txBody>
+      </p:sp>
+      <p:sp>
+        <p:nvSpPr>
+          <p:cNvPr id="61" name="Rectangle 60">
+            <a:extLst>
+              <a:ext uri="{FF2B5EF4-FFF2-40B4-BE49-F238E27FC236}">
+                <a16:creationId xmlns:a16="http://schemas.microsoft.com/office/drawing/2014/main" id="{8EADB182-BFAE-CFCA-2710-9C826B411491}"/>
+              </a:ext>
+            </a:extLst>
+          </p:cNvPr>
+          <p:cNvSpPr/>
+          <p:nvPr/>
+        </p:nvSpPr>
+        <p:spPr>
+          <a:xfrm>
+            <a:off x="2306320" y="5986047"/>
+            <a:ext cx="3549309" cy="774200"/>
+          </a:xfrm>
+          <a:prstGeom prst="rect">
+            <a:avLst/>
+          </a:prstGeom>
+        </p:spPr>
+        <p:style>
+          <a:lnRef idx="2">
+            <a:schemeClr val="dk1">
+              <a:shade val="50000"/>
+            </a:schemeClr>
+          </a:lnRef>
+          <a:fillRef idx="1001">
+            <a:schemeClr val="dk2"/>
+          </a:fillRef>
+          <a:effectRef idx="0">
+            <a:schemeClr val="dk1"/>
+          </a:effectRef>
+          <a:fontRef idx="minor">
+            <a:schemeClr val="lt1"/>
+          </a:fontRef>
+        </p:style>
+        <p:txBody>
+          <a:bodyPr rtlCol="0" anchor="ctr"/>
+          <a:lstStyle/>
+          <a:p>
+            <a:r>
+              <a:rPr lang="en-US" sz="1600" b="1" dirty="0">
+                <a:solidFill>
+                  <a:schemeClr val="bg1"/>
+                </a:solidFill>
+              </a:rPr>
+              <a:t>Left Footswitch: Bypass/Engage, hold to engage alternate mode (indicated by dimmed LED)</a:t>
+            </a:r>
+          </a:p>
+        </p:txBody>
+      </p:sp>
+      <p:sp>
+        <p:nvSpPr>
+          <p:cNvPr id="63" name="Rectangle 62">
+            <a:extLst>
+              <a:ext uri="{FF2B5EF4-FFF2-40B4-BE49-F238E27FC236}">
+                <a16:creationId xmlns:a16="http://schemas.microsoft.com/office/drawing/2014/main" id="{37DC3E28-4C19-F320-30C9-1381E58B757F}"/>
+              </a:ext>
+            </a:extLst>
+          </p:cNvPr>
+          <p:cNvSpPr/>
+          <p:nvPr/>
+        </p:nvSpPr>
+        <p:spPr>
+          <a:xfrm>
+            <a:off x="236579" y="87047"/>
+            <a:ext cx="7649546" cy="1083960"/>
+          </a:xfrm>
+          <a:prstGeom prst="rect">
+            <a:avLst/>
+          </a:prstGeom>
+          <a:ln/>
+        </p:spPr>
+        <p:style>
+          <a:lnRef idx="1">
+            <a:schemeClr val="accent1"/>
+          </a:lnRef>
+          <a:fillRef idx="2">
+            <a:schemeClr val="accent1"/>
+          </a:fillRef>
+          <a:effectRef idx="1">
+            <a:schemeClr val="accent1"/>
+          </a:effectRef>
+          <a:fontRef idx="minor">
+            <a:schemeClr val="dk1"/>
+          </a:fontRef>
+        </p:style>
+        <p:txBody>
+          <a:bodyPr rtlCol="0" anchor="ctr"/>
+          <a:lstStyle/>
+          <a:p>
+            <a:r>
+              <a:rPr lang="en-US" sz="2000" b="1" dirty="0" err="1">
+                <a:solidFill>
+                  <a:schemeClr val="tx1"/>
+                </a:solidFill>
+              </a:rPr>
+              <a:t>Balnea</a:t>
+            </a:r>
+            <a:r>
+              <a:rPr lang="en-US" sz="2000" b="1" dirty="0">
+                <a:solidFill>
+                  <a:schemeClr val="tx1"/>
+                </a:solidFill>
+              </a:rPr>
+              <a:t> </a:t>
+            </a:r>
+            <a:r>
+              <a:rPr lang="en-US" sz="1400" b="1" dirty="0">
+                <a:solidFill>
+                  <a:schemeClr val="tx1"/>
+                </a:solidFill>
+              </a:rPr>
+              <a:t>is a Digital Delay And Pitch Shifter inspired by the Chase Bliss Thermae pedal. </a:t>
+            </a:r>
+            <a:r>
+              <a:rPr lang="en-US" sz="1200" b="1" dirty="0">
+                <a:solidFill>
+                  <a:schemeClr val="tx1"/>
+                </a:solidFill>
+              </a:rPr>
+              <a:t>This design mostly follows the Thermae controls, minus the dipswitch modulation features and in depth customization. Because it’s digital however, it can do a few things Thermae can’t do, such as Stereo and Reverse Delay, and adds some unique interval modes. It leans into the crunchy side of digital audio time shifting and embraces aliasing and distortion, rather than trying to avoid it.</a:t>
+            </a:r>
+          </a:p>
+        </p:txBody>
+      </p:sp>
+      <p:sp>
+        <p:nvSpPr>
+          <p:cNvPr id="64" name="Rectangle 63">
+            <a:extLst>
+              <a:ext uri="{FF2B5EF4-FFF2-40B4-BE49-F238E27FC236}">
+                <a16:creationId xmlns:a16="http://schemas.microsoft.com/office/drawing/2014/main" id="{2B348D26-1379-AD0D-2394-8BC98E09CE1A}"/>
+              </a:ext>
+            </a:extLst>
+          </p:cNvPr>
+          <p:cNvSpPr/>
+          <p:nvPr/>
+        </p:nvSpPr>
+        <p:spPr>
+          <a:xfrm>
+            <a:off x="8130649" y="57795"/>
+            <a:ext cx="3624619" cy="1023238"/>
+          </a:xfrm>
+          <a:prstGeom prst="rect">
+            <a:avLst/>
+          </a:prstGeom>
+          <a:ln/>
+        </p:spPr>
+        <p:style>
+          <a:lnRef idx="1">
+            <a:schemeClr val="accent1"/>
+          </a:lnRef>
+          <a:fillRef idx="2">
+            <a:schemeClr val="accent1"/>
+          </a:fillRef>
+          <a:effectRef idx="1">
+            <a:schemeClr val="accent1"/>
+          </a:effectRef>
+          <a:fontRef idx="minor">
+            <a:schemeClr val="dk1"/>
+          </a:fontRef>
+        </p:style>
+        <p:txBody>
+          <a:bodyPr rtlCol="0" anchor="ctr"/>
+          <a:lstStyle/>
+          <a:p>
+            <a:r>
+              <a:rPr lang="en-US" sz="1600" b="1" dirty="0">
+                <a:solidFill>
+                  <a:schemeClr val="tx1"/>
+                </a:solidFill>
+              </a:rPr>
+              <a:t>Stereo In/Out Processing</a:t>
+            </a:r>
+          </a:p>
+          <a:p>
+            <a:pPr marL="285750" indent="-285750">
+              <a:buFontTx/>
+              <a:buChar char="-"/>
+            </a:pPr>
+            <a:r>
+              <a:rPr lang="en-US" sz="1600" b="1" dirty="0">
+                <a:solidFill>
+                  <a:schemeClr val="tx1"/>
+                </a:solidFill>
+              </a:rPr>
+              <a:t>Expression: YES (controls LPF)</a:t>
+            </a:r>
+          </a:p>
+          <a:p>
+            <a:pPr marL="285750" indent="-285750">
+              <a:buFontTx/>
+              <a:buChar char="-"/>
+            </a:pPr>
+            <a:r>
+              <a:rPr lang="en-US" sz="1600" b="1" dirty="0">
+                <a:solidFill>
+                  <a:schemeClr val="tx1"/>
+                </a:solidFill>
+              </a:rPr>
+              <a:t>MIDI: YES</a:t>
+            </a:r>
+          </a:p>
+          <a:p>
+            <a:pPr marL="285750" indent="-285750">
+              <a:buFontTx/>
+              <a:buChar char="-"/>
+            </a:pPr>
+            <a:r>
+              <a:rPr lang="en-US" sz="1600" b="1" dirty="0">
+                <a:solidFill>
+                  <a:schemeClr val="tx1"/>
+                </a:solidFill>
+              </a:rPr>
+              <a:t>Midi Synth mode</a:t>
+            </a:r>
+          </a:p>
+        </p:txBody>
+      </p:sp>
+      <p:cxnSp>
+        <p:nvCxnSpPr>
+          <p:cNvPr id="65" name="Straight Arrow Connector 64">
+            <a:extLst>
+              <a:ext uri="{FF2B5EF4-FFF2-40B4-BE49-F238E27FC236}">
+                <a16:creationId xmlns:a16="http://schemas.microsoft.com/office/drawing/2014/main" id="{C9A793F3-BC2B-EC45-4935-9A4247A4031C}"/>
+              </a:ext>
+            </a:extLst>
+          </p:cNvPr>
+          <p:cNvCxnSpPr>
+            <a:cxnSpLocks/>
+            <a:stCxn id="55" idx="3"/>
+          </p:cNvCxnSpPr>
+          <p:nvPr/>
+        </p:nvCxnSpPr>
+        <p:spPr>
+          <a:xfrm flipV="1">
+            <a:off x="4257216" y="2094330"/>
+            <a:ext cx="371937" cy="139299"/>
+          </a:xfrm>
+          <a:prstGeom prst="straightConnector1">
+            <a:avLst/>
+          </a:prstGeom>
+          <a:ln>
+            <a:tailEnd type="triangle"/>
+          </a:ln>
+        </p:spPr>
+        <p:style>
+          <a:lnRef idx="3">
+            <a:schemeClr val="dk1"/>
+          </a:lnRef>
+          <a:fillRef idx="0">
+            <a:schemeClr val="dk1"/>
+          </a:fillRef>
+          <a:effectRef idx="2">
+            <a:schemeClr val="dk1"/>
+          </a:effectRef>
+          <a:fontRef idx="minor">
+            <a:schemeClr val="tx1"/>
+          </a:fontRef>
+        </p:style>
+      </p:cxnSp>
+      <p:cxnSp>
+        <p:nvCxnSpPr>
+          <p:cNvPr id="66" name="Straight Arrow Connector 65">
+            <a:extLst>
+              <a:ext uri="{FF2B5EF4-FFF2-40B4-BE49-F238E27FC236}">
+                <a16:creationId xmlns:a16="http://schemas.microsoft.com/office/drawing/2014/main" id="{DD86FA6A-C5F7-67F9-7F4B-09D612ADBFB5}"/>
+              </a:ext>
+            </a:extLst>
+          </p:cNvPr>
+          <p:cNvCxnSpPr/>
+          <p:nvPr/>
+        </p:nvCxnSpPr>
+        <p:spPr>
+          <a:xfrm flipH="1">
+            <a:off x="7268295" y="3052004"/>
+            <a:ext cx="341583" cy="0"/>
+          </a:xfrm>
+          <a:prstGeom prst="straightConnector1">
+            <a:avLst/>
+          </a:prstGeom>
+          <a:ln>
+            <a:tailEnd type="triangle"/>
+          </a:ln>
+        </p:spPr>
+        <p:style>
+          <a:lnRef idx="3">
+            <a:schemeClr val="dk1"/>
+          </a:lnRef>
+          <a:fillRef idx="0">
+            <a:schemeClr val="dk1"/>
+          </a:fillRef>
+          <a:effectRef idx="2">
+            <a:schemeClr val="dk1"/>
+          </a:effectRef>
+          <a:fontRef idx="minor">
+            <a:schemeClr val="tx1"/>
+          </a:fontRef>
+        </p:style>
+      </p:cxnSp>
+      <p:cxnSp>
+        <p:nvCxnSpPr>
+          <p:cNvPr id="67" name="Straight Arrow Connector 66">
+            <a:extLst>
+              <a:ext uri="{FF2B5EF4-FFF2-40B4-BE49-F238E27FC236}">
+                <a16:creationId xmlns:a16="http://schemas.microsoft.com/office/drawing/2014/main" id="{8FF0BDFC-8AE7-924D-F2E2-A166BBA8BBDD}"/>
+              </a:ext>
+            </a:extLst>
+          </p:cNvPr>
+          <p:cNvCxnSpPr/>
+          <p:nvPr/>
+        </p:nvCxnSpPr>
+        <p:spPr>
+          <a:xfrm>
+            <a:off x="4296534" y="3941322"/>
+            <a:ext cx="570112" cy="12433"/>
+          </a:xfrm>
+          <a:prstGeom prst="straightConnector1">
+            <a:avLst/>
+          </a:prstGeom>
+          <a:ln>
+            <a:tailEnd type="triangle"/>
+          </a:ln>
+        </p:spPr>
+        <p:style>
+          <a:lnRef idx="3">
+            <a:schemeClr val="dk1"/>
+          </a:lnRef>
+          <a:fillRef idx="0">
+            <a:schemeClr val="dk1"/>
+          </a:fillRef>
+          <a:effectRef idx="2">
+            <a:schemeClr val="dk1"/>
+          </a:effectRef>
+          <a:fontRef idx="minor">
+            <a:schemeClr val="tx1"/>
+          </a:fontRef>
+        </p:style>
+      </p:cxnSp>
+      <p:cxnSp>
+        <p:nvCxnSpPr>
+          <p:cNvPr id="68" name="Straight Arrow Connector 67">
+            <a:extLst>
+              <a:ext uri="{FF2B5EF4-FFF2-40B4-BE49-F238E27FC236}">
+                <a16:creationId xmlns:a16="http://schemas.microsoft.com/office/drawing/2014/main" id="{8FF1D203-6FA9-71BF-39C8-379B1FC30E5B}"/>
+              </a:ext>
+            </a:extLst>
+          </p:cNvPr>
+          <p:cNvCxnSpPr/>
+          <p:nvPr/>
+        </p:nvCxnSpPr>
+        <p:spPr>
+          <a:xfrm flipH="1" flipV="1">
+            <a:off x="7009724" y="3995871"/>
+            <a:ext cx="618513" cy="7881"/>
+          </a:xfrm>
+          <a:prstGeom prst="straightConnector1">
+            <a:avLst/>
+          </a:prstGeom>
+          <a:ln>
+            <a:tailEnd type="triangle"/>
+          </a:ln>
+        </p:spPr>
+        <p:style>
+          <a:lnRef idx="3">
+            <a:schemeClr val="dk1"/>
+          </a:lnRef>
+          <a:fillRef idx="0">
+            <a:schemeClr val="dk1"/>
+          </a:fillRef>
+          <a:effectRef idx="2">
+            <a:schemeClr val="dk1"/>
+          </a:effectRef>
+          <a:fontRef idx="minor">
+            <a:schemeClr val="tx1"/>
+          </a:fontRef>
+        </p:style>
+      </p:cxnSp>
+      <p:cxnSp>
+        <p:nvCxnSpPr>
+          <p:cNvPr id="69" name="Elbow Connector 68">
+            <a:extLst>
+              <a:ext uri="{FF2B5EF4-FFF2-40B4-BE49-F238E27FC236}">
+                <a16:creationId xmlns:a16="http://schemas.microsoft.com/office/drawing/2014/main" id="{D1DB669F-32E3-C6AC-8924-58D920610058}"/>
+              </a:ext>
+            </a:extLst>
+          </p:cNvPr>
+          <p:cNvCxnSpPr/>
+          <p:nvPr/>
+        </p:nvCxnSpPr>
+        <p:spPr>
+          <a:xfrm flipV="1">
+            <a:off x="4296053" y="3963112"/>
+            <a:ext cx="1400247" cy="567633"/>
+          </a:xfrm>
+          <a:prstGeom prst="bentConnector3">
+            <a:avLst>
+              <a:gd name="adj1" fmla="val 83332"/>
+            </a:avLst>
+          </a:prstGeom>
+          <a:ln>
+            <a:tailEnd type="triangle"/>
+          </a:ln>
+        </p:spPr>
+        <p:style>
+          <a:lnRef idx="3">
+            <a:schemeClr val="dk1"/>
+          </a:lnRef>
+          <a:fillRef idx="0">
+            <a:schemeClr val="dk1"/>
+          </a:fillRef>
+          <a:effectRef idx="2">
+            <a:schemeClr val="dk1"/>
+          </a:effectRef>
+          <a:fontRef idx="minor">
+            <a:schemeClr val="tx1"/>
+          </a:fontRef>
+        </p:style>
+      </p:cxnSp>
+      <p:cxnSp>
+        <p:nvCxnSpPr>
+          <p:cNvPr id="73" name="Straight Arrow Connector 72">
+            <a:extLst>
+              <a:ext uri="{FF2B5EF4-FFF2-40B4-BE49-F238E27FC236}">
+                <a16:creationId xmlns:a16="http://schemas.microsoft.com/office/drawing/2014/main" id="{94F4A710-D45A-1E5E-8D7B-533C052D700D}"/>
+              </a:ext>
+            </a:extLst>
+          </p:cNvPr>
+          <p:cNvCxnSpPr>
+            <a:cxnSpLocks/>
+          </p:cNvCxnSpPr>
+          <p:nvPr/>
+        </p:nvCxnSpPr>
+        <p:spPr>
+          <a:xfrm flipH="1" flipV="1">
+            <a:off x="7325161" y="4614946"/>
+            <a:ext cx="148574" cy="280351"/>
+          </a:xfrm>
+          <a:prstGeom prst="straightConnector1">
+            <a:avLst/>
+          </a:prstGeom>
+          <a:ln>
+            <a:tailEnd type="triangle"/>
+          </a:ln>
+        </p:spPr>
+        <p:style>
+          <a:lnRef idx="3">
+            <a:schemeClr val="dk1"/>
+          </a:lnRef>
+          <a:fillRef idx="0">
+            <a:schemeClr val="dk1"/>
+          </a:fillRef>
+          <a:effectRef idx="2">
+            <a:schemeClr val="dk1"/>
+          </a:effectRef>
+          <a:fontRef idx="minor">
+            <a:schemeClr val="tx1"/>
+          </a:fontRef>
+        </p:style>
+      </p:cxnSp>
+      <p:sp>
+        <p:nvSpPr>
+          <p:cNvPr id="74" name="Rectangle 73">
+            <a:extLst>
+              <a:ext uri="{FF2B5EF4-FFF2-40B4-BE49-F238E27FC236}">
+                <a16:creationId xmlns:a16="http://schemas.microsoft.com/office/drawing/2014/main" id="{806D8746-ECC7-8597-7FB4-C2415674EF43}"/>
+              </a:ext>
+            </a:extLst>
+          </p:cNvPr>
+          <p:cNvSpPr/>
+          <p:nvPr/>
+        </p:nvSpPr>
+        <p:spPr>
+          <a:xfrm>
+            <a:off x="6552370" y="5938345"/>
+            <a:ext cx="4682530" cy="815859"/>
+          </a:xfrm>
+          <a:prstGeom prst="rect">
+            <a:avLst/>
+          </a:prstGeom>
+        </p:spPr>
+        <p:style>
+          <a:lnRef idx="2">
+            <a:schemeClr val="dk1">
+              <a:shade val="50000"/>
+            </a:schemeClr>
+          </a:lnRef>
+          <a:fillRef idx="1001">
+            <a:schemeClr val="dk2"/>
+          </a:fillRef>
+          <a:effectRef idx="0">
+            <a:schemeClr val="dk1"/>
+          </a:effectRef>
+          <a:fontRef idx="minor">
+            <a:schemeClr val="lt1"/>
+          </a:fontRef>
+        </p:style>
+        <p:txBody>
+          <a:bodyPr rtlCol="0" anchor="ctr"/>
+          <a:lstStyle/>
+          <a:p>
+            <a:r>
+              <a:rPr lang="en-US" sz="1600" b="1" dirty="0">
+                <a:solidFill>
+                  <a:schemeClr val="bg1"/>
+                </a:solidFill>
+              </a:rPr>
+              <a:t>Right Footswitch: Tap Tempo, or next sequencer step when in stepped mode. Hold to temporarily move Regen to max, “self oscillation runaway mode”.</a:t>
+            </a:r>
+          </a:p>
+        </p:txBody>
+      </p:sp>
+      <p:sp>
+        <p:nvSpPr>
+          <p:cNvPr id="2" name="TextBox 1">
+            <a:extLst>
+              <a:ext uri="{FF2B5EF4-FFF2-40B4-BE49-F238E27FC236}">
+                <a16:creationId xmlns:a16="http://schemas.microsoft.com/office/drawing/2014/main" id="{BD722E89-B277-999A-1CB4-B79680F1F0A0}"/>
+              </a:ext>
+            </a:extLst>
+          </p:cNvPr>
+          <p:cNvSpPr txBox="1"/>
+          <p:nvPr/>
+        </p:nvSpPr>
+        <p:spPr>
+          <a:xfrm rot="16200000">
+            <a:off x="5704861" y="4085846"/>
+            <a:ext cx="559769" cy="461665"/>
+          </a:xfrm>
+          <a:prstGeom prst="rect">
+            <a:avLst/>
+          </a:prstGeom>
+          <a:noFill/>
+        </p:spPr>
+        <p:txBody>
+          <a:bodyPr wrap="none" rtlCol="0">
+            <a:spAutoFit/>
+          </a:bodyPr>
+          <a:lstStyle/>
+          <a:p>
+            <a:pPr algn="ctr"/>
+            <a:r>
               <a:rPr lang="en-US" sz="800" b="1" dirty="0">
                 <a:latin typeface="Century Gothic" panose="020B0502020202020204" pitchFamily="34" charset="0"/>
                 <a:cs typeface="Adobe Devanagari" panose="02040503050201020203" pitchFamily="18" charset="0"/>
               </a:rPr>
-              <a:t>Opt 1</a:t>
+              <a:t>Quarter</a:t>
             </a:r>
           </a:p>
           <a:p>
@@ -29604,8 +33163,19 @@
                 <a:latin typeface="Century Gothic" panose="020B0502020202020204" pitchFamily="34" charset="0"/>
                 <a:cs typeface="Adobe Devanagari" panose="02040503050201020203" pitchFamily="18" charset="0"/>
               </a:rPr>
-              <a:t>Opt 2</a:t>
-            </a:r>
+              <a:t>Dot 8</a:t>
+            </a:r>
+            <a:r>
+              <a:rPr lang="en-US" sz="800" b="1" baseline="30000" dirty="0">
+                <a:latin typeface="Century Gothic" panose="020B0502020202020204" pitchFamily="34" charset="0"/>
+                <a:cs typeface="Adobe Devanagari" panose="02040503050201020203" pitchFamily="18" charset="0"/>
+              </a:rPr>
+              <a:t>th</a:t>
+            </a:r>
+            <a:endParaRPr lang="en-US" sz="800" b="1" dirty="0">
+              <a:latin typeface="Century Gothic" panose="020B0502020202020204" pitchFamily="34" charset="0"/>
+              <a:cs typeface="Adobe Devanagari" panose="02040503050201020203" pitchFamily="18" charset="0"/>
+            </a:endParaRPr>
           </a:p>
           <a:p>
             <a:pPr algn="ctr"/>
@@ -29614,21 +33184,27 @@
                 <a:latin typeface="Century Gothic" panose="020B0502020202020204" pitchFamily="34" charset="0"/>
                 <a:cs typeface="Adobe Devanagari" panose="02040503050201020203" pitchFamily="18" charset="0"/>
               </a:rPr>
-              <a:t>Opt 3</a:t>
-            </a:r>
-          </a:p>
-        </p:txBody>
-      </p:sp>
-      <p:sp>
-        <p:nvSpPr>
-          <p:cNvPr id="40" name="TextBox 39"/>
+              <a:t>8th</a:t>
+            </a:r>
+          </a:p>
+        </p:txBody>
+      </p:sp>
+      <p:sp>
+        <p:nvSpPr>
+          <p:cNvPr id="3" name="TextBox 2">
+            <a:extLst>
+              <a:ext uri="{FF2B5EF4-FFF2-40B4-BE49-F238E27FC236}">
+                <a16:creationId xmlns:a16="http://schemas.microsoft.com/office/drawing/2014/main" id="{37DED741-3D5E-FA61-B154-BE61C360D14B}"/>
+              </a:ext>
+            </a:extLst>
+          </p:cNvPr>
           <p:cNvSpPr txBox="1"/>
           <p:nvPr/>
         </p:nvSpPr>
         <p:spPr>
           <a:xfrm rot="16200000">
-            <a:off x="6540944" y="4039021"/>
-            <a:ext cx="455574" cy="461665"/>
+            <a:off x="6516028" y="4088947"/>
+            <a:ext cx="559769" cy="461665"/>
           </a:xfrm>
           <a:prstGeom prst="rect">
             <a:avLst/>
@@ -29647,7 +33223,7 @@
                 <a:latin typeface="Century Gothic" panose="020B0502020202020204" pitchFamily="34" charset="0"/>
                 <a:cs typeface="Adobe Devanagari" panose="02040503050201020203" pitchFamily="18" charset="0"/>
               </a:rPr>
-              <a:t>Opt 1</a:t>
+              <a:t>Quarter</a:t>
             </a:r>
           </a:p>
           <a:p>
@@ -29657,8 +33233,19 @@
                 <a:latin typeface="Century Gothic" panose="020B0502020202020204" pitchFamily="34" charset="0"/>
                 <a:cs typeface="Adobe Devanagari" panose="02040503050201020203" pitchFamily="18" charset="0"/>
               </a:rPr>
-              <a:t>Opt 2</a:t>
-            </a:r>
+              <a:t>Dot 8</a:t>
+            </a:r>
+            <a:r>
+              <a:rPr lang="en-US" sz="800" b="1" baseline="30000" dirty="0">
+                <a:latin typeface="Century Gothic" panose="020B0502020202020204" pitchFamily="34" charset="0"/>
+                <a:cs typeface="Adobe Devanagari" panose="02040503050201020203" pitchFamily="18" charset="0"/>
+              </a:rPr>
+              <a:t>th</a:t>
+            </a:r>
+            <a:endParaRPr lang="en-US" sz="800" b="1" dirty="0">
+              <a:latin typeface="Century Gothic" panose="020B0502020202020204" pitchFamily="34" charset="0"/>
+              <a:cs typeface="Adobe Devanagari" panose="02040503050201020203" pitchFamily="18" charset="0"/>
+            </a:endParaRPr>
           </a:p>
           <a:p>
             <a:pPr algn="ctr"/>
@@ -29667,120 +33254,27 @@
                 <a:latin typeface="Century Gothic" panose="020B0502020202020204" pitchFamily="34" charset="0"/>
                 <a:cs typeface="Adobe Devanagari" panose="02040503050201020203" pitchFamily="18" charset="0"/>
               </a:rPr>
-              <a:t>Opt 3</a:t>
-            </a:r>
-          </a:p>
-        </p:txBody>
-      </p:sp>
-      <p:sp>
-        <p:nvSpPr>
-          <p:cNvPr id="41" name="TextBox 40"/>
-          <p:cNvSpPr txBox="1"/>
-          <p:nvPr/>
-        </p:nvSpPr>
-        <p:spPr>
-          <a:xfrm>
-            <a:off x="4837137" y="3551712"/>
-            <a:ext cx="657552" cy="230832"/>
-          </a:xfrm>
-          <a:prstGeom prst="rect">
-            <a:avLst/>
-          </a:prstGeom>
-          <a:noFill/>
-        </p:spPr>
-        <p:txBody>
-          <a:bodyPr wrap="none" rtlCol="0">
-            <a:spAutoFit/>
-          </a:bodyPr>
-          <a:lstStyle/>
-          <a:p>
-            <a:pPr algn="ctr"/>
-            <a:r>
-              <a:rPr lang="en-US" sz="900" b="1" dirty="0">
-                <a:latin typeface="Century Gothic" panose="020B0502020202020204" pitchFamily="34" charset="0"/>
-                <a:cs typeface="Adobe Devanagari" panose="02040503050201020203" pitchFamily="18" charset="0"/>
-              </a:rPr>
-              <a:t>Toggle 1</a:t>
-            </a:r>
-          </a:p>
-        </p:txBody>
-      </p:sp>
-      <p:sp>
-        <p:nvSpPr>
-          <p:cNvPr id="42" name="TextBox 41"/>
-          <p:cNvSpPr txBox="1"/>
-          <p:nvPr/>
-        </p:nvSpPr>
-        <p:spPr>
-          <a:xfrm>
-            <a:off x="5623930" y="3560229"/>
-            <a:ext cx="657552" cy="230832"/>
-          </a:xfrm>
-          <a:prstGeom prst="rect">
-            <a:avLst/>
-          </a:prstGeom>
-          <a:noFill/>
-        </p:spPr>
-        <p:txBody>
-          <a:bodyPr wrap="none" rtlCol="0">
-            <a:spAutoFit/>
-          </a:bodyPr>
-          <a:lstStyle/>
-          <a:p>
-            <a:pPr algn="ctr"/>
-            <a:r>
-              <a:rPr lang="en-US" sz="900" b="1" dirty="0">
-                <a:latin typeface="Century Gothic" panose="020B0502020202020204" pitchFamily="34" charset="0"/>
-                <a:cs typeface="Adobe Devanagari" panose="02040503050201020203" pitchFamily="18" charset="0"/>
-              </a:rPr>
-              <a:t>Toggle 2</a:t>
-            </a:r>
-          </a:p>
-        </p:txBody>
-      </p:sp>
-      <p:sp>
-        <p:nvSpPr>
-          <p:cNvPr id="43" name="TextBox 42"/>
-          <p:cNvSpPr txBox="1"/>
-          <p:nvPr/>
-        </p:nvSpPr>
-        <p:spPr>
-          <a:xfrm>
-            <a:off x="6454343" y="3562383"/>
-            <a:ext cx="657552" cy="230832"/>
-          </a:xfrm>
-          <a:prstGeom prst="rect">
-            <a:avLst/>
-          </a:prstGeom>
-          <a:noFill/>
-        </p:spPr>
-        <p:txBody>
-          <a:bodyPr wrap="none" rtlCol="0">
-            <a:spAutoFit/>
-          </a:bodyPr>
-          <a:lstStyle/>
-          <a:p>
-            <a:pPr algn="ctr"/>
-            <a:r>
-              <a:rPr lang="en-US" sz="900" b="1" dirty="0">
-                <a:latin typeface="Century Gothic" panose="020B0502020202020204" pitchFamily="34" charset="0"/>
-                <a:cs typeface="Adobe Devanagari" panose="02040503050201020203" pitchFamily="18" charset="0"/>
-              </a:rPr>
-              <a:t>Toggle 3</a:t>
-            </a:r>
-          </a:p>
-        </p:txBody>
-      </p:sp>
-      <p:sp>
-        <p:nvSpPr>
-          <p:cNvPr id="49" name="Rectangle 48"/>
-          <p:cNvSpPr/>
-          <p:nvPr/>
-        </p:nvSpPr>
-        <p:spPr>
-          <a:xfrm>
-            <a:off x="4552601" y="262549"/>
-            <a:ext cx="2675728" cy="727102"/>
+              <a:t>8th</a:t>
+            </a:r>
+          </a:p>
+        </p:txBody>
+      </p:sp>
+      <p:sp>
+        <p:nvSpPr>
+          <p:cNvPr id="46" name="Rectangle 45">
+            <a:extLst>
+              <a:ext uri="{FF2B5EF4-FFF2-40B4-BE49-F238E27FC236}">
+                <a16:creationId xmlns:a16="http://schemas.microsoft.com/office/drawing/2014/main" id="{3D7D1069-B38E-8193-2973-07F9963C3EE4}"/>
+              </a:ext>
+            </a:extLst>
+          </p:cNvPr>
+          <p:cNvSpPr/>
+          <p:nvPr/>
+        </p:nvSpPr>
+        <p:spPr>
+          <a:xfrm>
+            <a:off x="429604" y="4432782"/>
+            <a:ext cx="3873298" cy="1164289"/>
           </a:xfrm>
           <a:prstGeom prst="rect">
             <a:avLst/>
@@ -29793,58 +33287,76 @@
             </a:schemeClr>
           </a:lnRef>
           <a:fillRef idx="1003">
-            <a:schemeClr val="lt1"/>
-          </a:fillRef>
-          <a:effectRef idx="0">
-            <a:schemeClr val="dk1"/>
-          </a:effectRef>
-          <a:fontRef idx="minor">
-            <a:schemeClr val="lt1"/>
-          </a:fontRef>
-        </p:style>
-        <p:txBody>
-          <a:bodyPr rtlCol="0" anchor="ctr"/>
-          <a:lstStyle/>
-          <a:p>
-            <a:pPr marL="285750" indent="-285750">
-              <a:buFont typeface="Arial" panose="020B0604020202020204" pitchFamily="34" charset="0"/>
-              <a:buChar char="•"/>
-            </a:pPr>
+            <a:schemeClr val="dk1"/>
+          </a:fillRef>
+          <a:effectRef idx="0">
+            <a:schemeClr val="dk1"/>
+          </a:effectRef>
+          <a:fontRef idx="minor">
+            <a:schemeClr val="lt1"/>
+          </a:fontRef>
+        </p:style>
+        <p:txBody>
+          <a:bodyPr rtlCol="0" anchor="ctr"/>
+          <a:lstStyle/>
+          <a:p>
             <a:r>
               <a:rPr lang="en-US" sz="1600" b="1" dirty="0">
                 <a:solidFill>
-                  <a:schemeClr val="tx1"/>
-                </a:solidFill>
-              </a:rPr>
-              <a:t>Stereo ¼” In/Out Jacks</a:t>
-            </a:r>
-          </a:p>
-          <a:p>
-            <a:pPr marL="285750" indent="-285750">
-              <a:buFont typeface="Arial" panose="020B0604020202020204" pitchFamily="34" charset="0"/>
-              <a:buChar char="•"/>
-            </a:pPr>
+                  <a:schemeClr val="bg1"/>
+                </a:solidFill>
+              </a:rPr>
+              <a:t>INT 1 Step Length</a:t>
+            </a:r>
+          </a:p>
+          <a:p>
             <a:r>
               <a:rPr lang="en-US" sz="1600" b="1" dirty="0">
                 <a:solidFill>
-                  <a:schemeClr val="tx1"/>
-                </a:solidFill>
-              </a:rPr>
-              <a:t>9v Center Negative Power</a:t>
-            </a:r>
-          </a:p>
-        </p:txBody>
-      </p:sp>
-      <p:sp>
-        <p:nvSpPr>
-          <p:cNvPr id="52" name="Rectangle 51"/>
-          <p:cNvSpPr/>
-          <p:nvPr/>
-        </p:nvSpPr>
-        <p:spPr>
-          <a:xfrm>
-            <a:off x="7503067" y="1963518"/>
-            <a:ext cx="2433413" cy="428695"/>
+                  <a:schemeClr val="bg1"/>
+                </a:solidFill>
+              </a:rPr>
+              <a:t>  Left: Quarter Note (Same as Tap Tempo)</a:t>
+            </a:r>
+          </a:p>
+          <a:p>
+            <a:r>
+              <a:rPr lang="en-US" sz="1600" b="1" dirty="0">
+                <a:solidFill>
+                  <a:schemeClr val="bg1"/>
+                </a:solidFill>
+              </a:rPr>
+              <a:t>  Center: Dotted Eighth Note</a:t>
+            </a:r>
+          </a:p>
+          <a:p>
+            <a:r>
+              <a:rPr lang="en-US" sz="1600" b="1" dirty="0">
+                <a:solidFill>
+                  <a:schemeClr val="bg1"/>
+                </a:solidFill>
+              </a:rPr>
+              <a:t>  Right:  Eighth Note</a:t>
+            </a:r>
+          </a:p>
+        </p:txBody>
+      </p:sp>
+      <p:sp>
+        <p:nvSpPr>
+          <p:cNvPr id="48" name="Rectangle 47">
+            <a:extLst>
+              <a:ext uri="{FF2B5EF4-FFF2-40B4-BE49-F238E27FC236}">
+                <a16:creationId xmlns:a16="http://schemas.microsoft.com/office/drawing/2014/main" id="{410438DA-BE33-8AD0-971E-DC4175FD8060}"/>
+              </a:ext>
+            </a:extLst>
+          </p:cNvPr>
+          <p:cNvSpPr/>
+          <p:nvPr/>
+        </p:nvSpPr>
+        <p:spPr>
+          <a:xfrm>
+            <a:off x="7622804" y="3574857"/>
+            <a:ext cx="3826990" cy="1075966"/>
           </a:xfrm>
           <a:prstGeom prst="rect">
             <a:avLst/>
@@ -29876,45 +33388,9 @@
                   <a:schemeClr val="bg1"/>
                 </a:solidFill>
               </a:rPr>
-              <a:t>MIDI Input (1/8” TRS Jack)</a:t>
-            </a:r>
-          </a:p>
-        </p:txBody>
-      </p:sp>
-      <p:sp>
-        <p:nvSpPr>
-          <p:cNvPr id="55" name="Rectangle 54"/>
-          <p:cNvSpPr/>
-          <p:nvPr/>
-        </p:nvSpPr>
-        <p:spPr>
-          <a:xfrm>
-            <a:off x="7503067" y="2923436"/>
-            <a:ext cx="2016853" cy="448087"/>
-          </a:xfrm>
-          <a:prstGeom prst="rect">
-            <a:avLst/>
-          </a:prstGeom>
-        </p:spPr>
-        <p:style>
-          <a:lnRef idx="2">
-            <a:schemeClr val="dk1">
-              <a:shade val="50000"/>
-            </a:schemeClr>
-          </a:lnRef>
-          <a:fillRef idx="1003">
-            <a:schemeClr val="dk1"/>
-          </a:fillRef>
-          <a:effectRef idx="0">
-            <a:schemeClr val="dk1"/>
-          </a:effectRef>
-          <a:fontRef idx="minor">
-            <a:schemeClr val="lt1"/>
-          </a:fontRef>
-        </p:style>
-        <p:txBody>
-          <a:bodyPr rtlCol="0" anchor="ctr"/>
-          <a:lstStyle/>
+              <a:t>INT 2 Step Length</a:t>
+            </a:r>
+          </a:p>
           <a:p>
             <a:r>
               <a:rPr lang="en-US" sz="1600" b="1" dirty="0">
@@ -29922,45 +33398,9 @@
                   <a:schemeClr val="bg1"/>
                 </a:solidFill>
               </a:rPr>
-              <a:t>Daisy Seed USB port</a:t>
-            </a:r>
-          </a:p>
-        </p:txBody>
-      </p:sp>
-      <p:sp>
-        <p:nvSpPr>
-          <p:cNvPr id="56" name="Rectangle 55"/>
-          <p:cNvSpPr/>
-          <p:nvPr/>
-        </p:nvSpPr>
-        <p:spPr>
-          <a:xfrm>
-            <a:off x="7503067" y="4556498"/>
-            <a:ext cx="2016853" cy="328586"/>
-          </a:xfrm>
-          <a:prstGeom prst="rect">
-            <a:avLst/>
-          </a:prstGeom>
-        </p:spPr>
-        <p:style>
-          <a:lnRef idx="2">
-            <a:schemeClr val="dk1">
-              <a:shade val="50000"/>
-            </a:schemeClr>
-          </a:lnRef>
-          <a:fillRef idx="1001">
-            <a:schemeClr val="dk2"/>
-          </a:fillRef>
-          <a:effectRef idx="0">
-            <a:schemeClr val="dk1"/>
-          </a:effectRef>
-          <a:fontRef idx="minor">
-            <a:schemeClr val="lt1"/>
-          </a:fontRef>
-        </p:style>
-        <p:txBody>
-          <a:bodyPr rtlCol="0" anchor="ctr"/>
-          <a:lstStyle/>
+              <a:t>  Left: Quarter Note (Same as Tap Tempo)</a:t>
+            </a:r>
+          </a:p>
           <a:p>
             <a:r>
               <a:rPr lang="en-US" sz="1600" b="1" dirty="0">
@@ -29968,45 +33408,9 @@
                   <a:schemeClr val="bg1"/>
                 </a:solidFill>
               </a:rPr>
-              <a:t>4 On/Off Dipswitches</a:t>
-            </a:r>
-          </a:p>
-        </p:txBody>
-      </p:sp>
-      <p:sp>
-        <p:nvSpPr>
-          <p:cNvPr id="57" name="Rectangle 56"/>
-          <p:cNvSpPr/>
-          <p:nvPr/>
-        </p:nvSpPr>
-        <p:spPr>
-          <a:xfrm>
-            <a:off x="4585160" y="5990039"/>
-            <a:ext cx="2778082" cy="480080"/>
-          </a:xfrm>
-          <a:prstGeom prst="rect">
-            <a:avLst/>
-          </a:prstGeom>
-        </p:spPr>
-        <p:style>
-          <a:lnRef idx="2">
-            <a:schemeClr val="dk1">
-              <a:shade val="50000"/>
-            </a:schemeClr>
-          </a:lnRef>
-          <a:fillRef idx="1001">
-            <a:schemeClr val="dk2"/>
-          </a:fillRef>
-          <a:effectRef idx="0">
-            <a:schemeClr val="dk1"/>
-          </a:effectRef>
-          <a:fontRef idx="minor">
-            <a:schemeClr val="lt1"/>
-          </a:fontRef>
-        </p:style>
-        <p:txBody>
-          <a:bodyPr rtlCol="0" anchor="ctr"/>
-          <a:lstStyle/>
+              <a:t>  Center: Dotted Eighth Note</a:t>
+            </a:r>
+          </a:p>
           <a:p>
             <a:r>
               <a:rPr lang="en-US" sz="1600" b="1" dirty="0">
@@ -30014,92 +33418,27 @@
                   <a:schemeClr val="bg1"/>
                 </a:solidFill>
               </a:rPr>
-              <a:t>Two Momentary Footswitches</a:t>
-            </a:r>
-          </a:p>
-          <a:p>
-            <a:r>
-              <a:rPr lang="en-US" sz="1600" b="1" dirty="0">
-                <a:solidFill>
-                  <a:schemeClr val="bg1"/>
-                </a:solidFill>
-              </a:rPr>
-              <a:t>with indication LEDs.</a:t>
-            </a:r>
-          </a:p>
-        </p:txBody>
-      </p:sp>
-      <p:sp>
-        <p:nvSpPr>
-          <p:cNvPr id="59" name="Rectangle 58"/>
-          <p:cNvSpPr/>
-          <p:nvPr/>
-        </p:nvSpPr>
-        <p:spPr>
-          <a:xfrm>
-            <a:off x="259856" y="262029"/>
-            <a:ext cx="4226847" cy="1015417"/>
-          </a:xfrm>
-          <a:prstGeom prst="rect">
-            <a:avLst/>
-          </a:prstGeom>
-          <a:ln/>
-        </p:spPr>
-        <p:style>
-          <a:lnRef idx="1">
-            <a:schemeClr val="accent2"/>
-          </a:lnRef>
-          <a:fillRef idx="2">
-            <a:schemeClr val="accent2"/>
-          </a:fillRef>
-          <a:effectRef idx="1">
-            <a:schemeClr val="accent2"/>
-          </a:effectRef>
-          <a:fontRef idx="minor">
-            <a:schemeClr val="dk1"/>
-          </a:fontRef>
-        </p:style>
-        <p:txBody>
-          <a:bodyPr rtlCol="0" anchor="ctr"/>
-          <a:lstStyle/>
-          <a:p>
-            <a:r>
-              <a:rPr lang="en-US" sz="2800" b="1" dirty="0" err="1">
-                <a:solidFill>
-                  <a:schemeClr val="tx1"/>
-                </a:solidFill>
-              </a:rPr>
-              <a:t>FunBox</a:t>
-            </a:r>
-            <a:r>
-              <a:rPr lang="en-US" sz="2800" b="1" dirty="0">
-                <a:solidFill>
-                  <a:schemeClr val="tx1"/>
-                </a:solidFill>
-              </a:rPr>
-              <a:t> </a:t>
-            </a:r>
-            <a:r>
-              <a:rPr lang="en-US" b="1" dirty="0">
-                <a:solidFill>
-                  <a:schemeClr val="tx1"/>
-                </a:solidFill>
-              </a:rPr>
-              <a:t>is a pedal platform designed around the Daisy Seed. Fits in a 125B enclosure.</a:t>
-            </a:r>
-          </a:p>
-        </p:txBody>
-      </p:sp>
-      <p:sp>
-        <p:nvSpPr>
-          <p:cNvPr id="81" name="Rectangle 80"/>
-          <p:cNvSpPr/>
-          <p:nvPr/>
-        </p:nvSpPr>
-        <p:spPr>
-          <a:xfrm>
-            <a:off x="7205470" y="4326731"/>
-            <a:ext cx="45719" cy="404813"/>
+              <a:t>  Right:  Eighth Note</a:t>
+            </a:r>
+          </a:p>
+        </p:txBody>
+      </p:sp>
+      <p:sp>
+        <p:nvSpPr>
+          <p:cNvPr id="52" name="Rectangle 51">
+            <a:extLst>
+              <a:ext uri="{FF2B5EF4-FFF2-40B4-BE49-F238E27FC236}">
+                <a16:creationId xmlns:a16="http://schemas.microsoft.com/office/drawing/2014/main" id="{C6B5AD47-6CC9-C3F7-F394-51ABB75A24BD}"/>
+              </a:ext>
+            </a:extLst>
+          </p:cNvPr>
+          <p:cNvSpPr/>
+          <p:nvPr/>
+        </p:nvSpPr>
+        <p:spPr>
+          <a:xfrm>
+            <a:off x="7218671" y="4347300"/>
+            <a:ext cx="45719" cy="303523"/>
           </a:xfrm>
           <a:prstGeom prst="rect">
             <a:avLst/>
@@ -30132,14 +33471,20 @@
       </p:sp>
       <p:sp>
         <p:nvSpPr>
-          <p:cNvPr id="82" name="Rectangle 81"/>
-          <p:cNvSpPr/>
-          <p:nvPr/>
-        </p:nvSpPr>
-        <p:spPr>
-          <a:xfrm>
-            <a:off x="7240002" y="4361522"/>
-            <a:ext cx="54086" cy="51892"/>
+          <p:cNvPr id="53" name="Rectangle 52">
+            <a:extLst>
+              <a:ext uri="{FF2B5EF4-FFF2-40B4-BE49-F238E27FC236}">
+                <a16:creationId xmlns:a16="http://schemas.microsoft.com/office/drawing/2014/main" id="{5240BB4E-E046-DE8E-A7F1-337BDDE9C385}"/>
+              </a:ext>
+            </a:extLst>
+          </p:cNvPr>
+          <p:cNvSpPr/>
+          <p:nvPr/>
+        </p:nvSpPr>
+        <p:spPr>
+          <a:xfrm>
+            <a:off x="7251396" y="4431786"/>
+            <a:ext cx="45719" cy="45719"/>
           </a:xfrm>
           <a:prstGeom prst="rect">
             <a:avLst/>
@@ -30170,14 +33515,20 @@
       </p:sp>
       <p:sp>
         <p:nvSpPr>
-          <p:cNvPr id="83" name="Rectangle 82"/>
-          <p:cNvSpPr/>
-          <p:nvPr/>
-        </p:nvSpPr>
-        <p:spPr>
-          <a:xfrm>
-            <a:off x="7239482" y="4455654"/>
-            <a:ext cx="54086" cy="51892"/>
+          <p:cNvPr id="54" name="Rectangle 53">
+            <a:extLst>
+              <a:ext uri="{FF2B5EF4-FFF2-40B4-BE49-F238E27FC236}">
+                <a16:creationId xmlns:a16="http://schemas.microsoft.com/office/drawing/2014/main" id="{7F8781D8-88F4-1B7F-F2B7-CC4644C2517E}"/>
+              </a:ext>
+            </a:extLst>
+          </p:cNvPr>
+          <p:cNvSpPr/>
+          <p:nvPr/>
+        </p:nvSpPr>
+        <p:spPr>
+          <a:xfrm>
+            <a:off x="7252683" y="4504799"/>
+            <a:ext cx="45719" cy="45719"/>
           </a:xfrm>
           <a:prstGeom prst="rect">
             <a:avLst/>
@@ -30208,54 +33559,64 @@
       </p:sp>
       <p:sp>
         <p:nvSpPr>
-          <p:cNvPr id="66" name="TextBox 65"/>
-          <p:cNvSpPr txBox="1"/>
-          <p:nvPr/>
-        </p:nvSpPr>
-        <p:spPr>
-          <a:xfrm>
-            <a:off x="6376896" y="5548457"/>
-            <a:ext cx="724878" cy="246221"/>
+          <p:cNvPr id="62" name="Rectangle 61">
+            <a:extLst>
+              <a:ext uri="{FF2B5EF4-FFF2-40B4-BE49-F238E27FC236}">
+                <a16:creationId xmlns:a16="http://schemas.microsoft.com/office/drawing/2014/main" id="{43BBE5BD-E540-18E9-9C32-2E7B337C1D34}"/>
+              </a:ext>
+            </a:extLst>
+          </p:cNvPr>
+          <p:cNvSpPr/>
+          <p:nvPr/>
+        </p:nvSpPr>
+        <p:spPr>
+          <a:xfrm>
+            <a:off x="7251396" y="4585442"/>
+            <a:ext cx="45719" cy="45719"/>
           </a:xfrm>
           <a:prstGeom prst="rect">
             <a:avLst/>
           </a:prstGeom>
-          <a:noFill/>
-        </p:spPr>
-        <p:txBody>
-          <a:bodyPr wrap="none" rtlCol="0">
-            <a:spAutoFit/>
-          </a:bodyPr>
-          <a:lstStyle/>
-          <a:p>
-            <a:pPr algn="ctr"/>
-            <a:r>
-              <a:rPr lang="en-US" sz="1000" b="1" dirty="0" err="1">
-                <a:latin typeface="Century Gothic" panose="020B0502020202020204" pitchFamily="34" charset="0"/>
-                <a:cs typeface="Adobe Devanagari" panose="02040503050201020203" pitchFamily="18" charset="0"/>
-              </a:rPr>
-              <a:t>FootSw</a:t>
-            </a:r>
-            <a:r>
-              <a:rPr lang="en-US" sz="1000" b="1" dirty="0">
-                <a:latin typeface="Century Gothic" panose="020B0502020202020204" pitchFamily="34" charset="0"/>
-                <a:cs typeface="Adobe Devanagari" panose="02040503050201020203" pitchFamily="18" charset="0"/>
-              </a:rPr>
-              <a:t> 2</a:t>
-            </a:r>
-          </a:p>
-        </p:txBody>
-      </p:sp>
-      <p:sp>
-        <p:nvSpPr>
-          <p:cNvPr id="67" name="Rectangle 66"/>
-          <p:cNvSpPr/>
-          <p:nvPr/>
-        </p:nvSpPr>
-        <p:spPr>
-          <a:xfrm>
-            <a:off x="7239482" y="4543676"/>
-            <a:ext cx="54086" cy="51892"/>
+        </p:spPr>
+        <p:style>
+          <a:lnRef idx="2">
+            <a:schemeClr val="dk1"/>
+          </a:lnRef>
+          <a:fillRef idx="1">
+            <a:schemeClr val="lt1"/>
+          </a:fillRef>
+          <a:effectRef idx="0">
+            <a:schemeClr val="dk1"/>
+          </a:effectRef>
+          <a:fontRef idx="minor">
+            <a:schemeClr val="dk1"/>
+          </a:fontRef>
+        </p:style>
+        <p:txBody>
+          <a:bodyPr rtlCol="0" anchor="ctr"/>
+          <a:lstStyle/>
+          <a:p>
+            <a:pPr algn="ctr"/>
+            <a:endParaRPr lang="en-US"/>
+          </a:p>
+        </p:txBody>
+      </p:sp>
+      <p:sp>
+        <p:nvSpPr>
+          <p:cNvPr id="75" name="Rectangle 74">
+            <a:extLst>
+              <a:ext uri="{FF2B5EF4-FFF2-40B4-BE49-F238E27FC236}">
+                <a16:creationId xmlns:a16="http://schemas.microsoft.com/office/drawing/2014/main" id="{F26567BC-EF18-5686-6D41-8F005E976D91}"/>
+              </a:ext>
+            </a:extLst>
+          </p:cNvPr>
+          <p:cNvSpPr/>
+          <p:nvPr/>
+        </p:nvSpPr>
+        <p:spPr>
+          <a:xfrm>
+            <a:off x="7251396" y="4358774"/>
+            <a:ext cx="45719" cy="45719"/>
           </a:xfrm>
           <a:prstGeom prst="rect">
             <a:avLst/>
@@ -30281,598 +33642,13 @@
           <a:p>
             <a:pPr algn="ctr"/>
             <a:endParaRPr lang="en-US"/>
-          </a:p>
-        </p:txBody>
-      </p:sp>
-      <p:sp>
-        <p:nvSpPr>
-          <p:cNvPr id="69" name="Rectangle 68"/>
-          <p:cNvSpPr/>
-          <p:nvPr/>
-        </p:nvSpPr>
-        <p:spPr>
-          <a:xfrm>
-            <a:off x="7239482" y="4633048"/>
-            <a:ext cx="54086" cy="51892"/>
-          </a:xfrm>
-          <a:prstGeom prst="rect">
-            <a:avLst/>
-          </a:prstGeom>
-        </p:spPr>
-        <p:style>
-          <a:lnRef idx="2">
-            <a:schemeClr val="dk1"/>
-          </a:lnRef>
-          <a:fillRef idx="1">
-            <a:schemeClr val="lt1"/>
-          </a:fillRef>
-          <a:effectRef idx="0">
-            <a:schemeClr val="dk1"/>
-          </a:effectRef>
-          <a:fontRef idx="minor">
-            <a:schemeClr val="dk1"/>
-          </a:fontRef>
-        </p:style>
-        <p:txBody>
-          <a:bodyPr rtlCol="0" anchor="ctr"/>
-          <a:lstStyle/>
-          <a:p>
-            <a:pPr algn="ctr"/>
-            <a:endParaRPr lang="en-US"/>
-          </a:p>
-        </p:txBody>
-      </p:sp>
-      <p:sp>
-        <p:nvSpPr>
-          <p:cNvPr id="70" name="TextBox 69"/>
-          <p:cNvSpPr txBox="1"/>
-          <p:nvPr/>
-        </p:nvSpPr>
-        <p:spPr>
-          <a:xfrm rot="5400000">
-            <a:off x="4369644" y="2091586"/>
-            <a:ext cx="833883" cy="246221"/>
-          </a:xfrm>
-          <a:prstGeom prst="rect">
-            <a:avLst/>
-          </a:prstGeom>
-          <a:noFill/>
-        </p:spPr>
-        <p:txBody>
-          <a:bodyPr wrap="none" rtlCol="0">
-            <a:spAutoFit/>
-          </a:bodyPr>
-          <a:lstStyle/>
-          <a:p>
-            <a:pPr algn="ctr"/>
-            <a:r>
-              <a:rPr lang="en-US" sz="1000" b="1" dirty="0">
-                <a:latin typeface="Century Gothic" panose="020B0502020202020204" pitchFamily="34" charset="0"/>
-                <a:cs typeface="Adobe Devanagari" panose="02040503050201020203" pitchFamily="18" charset="0"/>
-              </a:rPr>
-              <a:t>Expression</a:t>
-            </a:r>
-          </a:p>
-        </p:txBody>
-      </p:sp>
-      <p:sp>
-        <p:nvSpPr>
-          <p:cNvPr id="71" name="TextBox 70"/>
-          <p:cNvSpPr txBox="1"/>
-          <p:nvPr/>
-        </p:nvSpPr>
-        <p:spPr>
-          <a:xfrm rot="16200000">
-            <a:off x="6867601" y="2070599"/>
-            <a:ext cx="460382" cy="246221"/>
-          </a:xfrm>
-          <a:prstGeom prst="rect">
-            <a:avLst/>
-          </a:prstGeom>
-          <a:noFill/>
-        </p:spPr>
-        <p:txBody>
-          <a:bodyPr wrap="none" rtlCol="0">
-            <a:spAutoFit/>
-          </a:bodyPr>
-          <a:lstStyle/>
-          <a:p>
-            <a:pPr algn="ctr"/>
-            <a:r>
-              <a:rPr lang="en-US" sz="1000" b="1" dirty="0">
-                <a:latin typeface="Century Gothic" panose="020B0502020202020204" pitchFamily="34" charset="0"/>
-                <a:cs typeface="Adobe Devanagari" panose="02040503050201020203" pitchFamily="18" charset="0"/>
-              </a:rPr>
-              <a:t>MIDI</a:t>
-            </a:r>
-          </a:p>
-        </p:txBody>
-      </p:sp>
-      <p:sp>
-        <p:nvSpPr>
-          <p:cNvPr id="72" name="TextBox 71"/>
-          <p:cNvSpPr txBox="1"/>
-          <p:nvPr/>
-        </p:nvSpPr>
-        <p:spPr>
-          <a:xfrm rot="16200000">
-            <a:off x="6888870" y="3101168"/>
-            <a:ext cx="407484" cy="246221"/>
-          </a:xfrm>
-          <a:prstGeom prst="rect">
-            <a:avLst/>
-          </a:prstGeom>
-          <a:noFill/>
-        </p:spPr>
-        <p:txBody>
-          <a:bodyPr wrap="none" rtlCol="0">
-            <a:spAutoFit/>
-          </a:bodyPr>
-          <a:lstStyle/>
-          <a:p>
-            <a:pPr algn="ctr"/>
-            <a:r>
-              <a:rPr lang="en-US" sz="1000" b="1" dirty="0">
-                <a:latin typeface="Century Gothic" panose="020B0502020202020204" pitchFamily="34" charset="0"/>
-                <a:cs typeface="Adobe Devanagari" panose="02040503050201020203" pitchFamily="18" charset="0"/>
-              </a:rPr>
-              <a:t>USB</a:t>
-            </a:r>
-          </a:p>
-        </p:txBody>
-      </p:sp>
-      <p:sp>
-        <p:nvSpPr>
-          <p:cNvPr id="60" name="Rectangle 59"/>
-          <p:cNvSpPr/>
-          <p:nvPr/>
-        </p:nvSpPr>
-        <p:spPr>
-          <a:xfrm>
-            <a:off x="1130422" y="1955557"/>
-            <a:ext cx="3250889" cy="428695"/>
-          </a:xfrm>
-          <a:prstGeom prst="rect">
-            <a:avLst/>
-          </a:prstGeom>
-        </p:spPr>
-        <p:style>
-          <a:lnRef idx="2">
-            <a:schemeClr val="dk1">
-              <a:shade val="50000"/>
-            </a:schemeClr>
-          </a:lnRef>
-          <a:fillRef idx="1003">
-            <a:schemeClr val="dk1"/>
-          </a:fillRef>
-          <a:effectRef idx="0">
-            <a:schemeClr val="dk1"/>
-          </a:effectRef>
-          <a:fontRef idx="minor">
-            <a:schemeClr val="lt1"/>
-          </a:fontRef>
-        </p:style>
-        <p:txBody>
-          <a:bodyPr rtlCol="0" anchor="ctr"/>
-          <a:lstStyle/>
-          <a:p>
-            <a:r>
-              <a:rPr lang="en-US" sz="1600" b="1" dirty="0">
-                <a:solidFill>
-                  <a:schemeClr val="bg1"/>
-                </a:solidFill>
-              </a:rPr>
-              <a:t>Expression Input (1/8” TRS Jack)</a:t>
-            </a:r>
-          </a:p>
-        </p:txBody>
-      </p:sp>
-      <p:sp>
-        <p:nvSpPr>
-          <p:cNvPr id="61" name="Rectangle 60"/>
-          <p:cNvSpPr/>
-          <p:nvPr/>
-        </p:nvSpPr>
-        <p:spPr>
-          <a:xfrm>
-            <a:off x="1338617" y="3706618"/>
-            <a:ext cx="3023756" cy="410432"/>
-          </a:xfrm>
-          <a:prstGeom prst="rect">
-            <a:avLst/>
-          </a:prstGeom>
-        </p:spPr>
-        <p:style>
-          <a:lnRef idx="2">
-            <a:schemeClr val="dk1">
-              <a:shade val="50000"/>
-            </a:schemeClr>
-          </a:lnRef>
-          <a:fillRef idx="1001">
-            <a:schemeClr val="dk2"/>
-          </a:fillRef>
-          <a:effectRef idx="0">
-            <a:schemeClr val="dk1"/>
-          </a:effectRef>
-          <a:fontRef idx="minor">
-            <a:schemeClr val="lt1"/>
-          </a:fontRef>
-        </p:style>
-        <p:txBody>
-          <a:bodyPr rtlCol="0" anchor="ctr"/>
-          <a:lstStyle/>
-          <a:p>
-            <a:r>
-              <a:rPr lang="en-US" sz="1600" b="1" dirty="0">
-                <a:solidFill>
-                  <a:schemeClr val="bg1"/>
-                </a:solidFill>
-              </a:rPr>
-              <a:t>Three 3-way Toggles (On-Off-On)</a:t>
-            </a:r>
-          </a:p>
-        </p:txBody>
-      </p:sp>
-      <p:cxnSp>
-        <p:nvCxnSpPr>
-          <p:cNvPr id="62" name="Straight Arrow Connector 61"/>
-          <p:cNvCxnSpPr>
-            <a:stCxn id="61" idx="3"/>
-          </p:cNvCxnSpPr>
-          <p:nvPr/>
-        </p:nvCxnSpPr>
-        <p:spPr>
-          <a:xfrm>
-            <a:off x="4362373" y="3911834"/>
-            <a:ext cx="276302" cy="0"/>
-          </a:xfrm>
-          <a:prstGeom prst="straightConnector1">
-            <a:avLst/>
-          </a:prstGeom>
-          <a:ln>
-            <a:tailEnd type="triangle"/>
-          </a:ln>
-        </p:spPr>
-        <p:style>
-          <a:lnRef idx="3">
-            <a:schemeClr val="dk1"/>
-          </a:lnRef>
-          <a:fillRef idx="0">
-            <a:schemeClr val="dk1"/>
-          </a:fillRef>
-          <a:effectRef idx="2">
-            <a:schemeClr val="dk1"/>
-          </a:effectRef>
-          <a:fontRef idx="minor">
-            <a:schemeClr val="tx1"/>
-          </a:fontRef>
-        </p:style>
-      </p:cxnSp>
-      <p:cxnSp>
-        <p:nvCxnSpPr>
-          <p:cNvPr id="68" name="Straight Arrow Connector 67"/>
-          <p:cNvCxnSpPr/>
-          <p:nvPr/>
-        </p:nvCxnSpPr>
-        <p:spPr>
-          <a:xfrm>
-            <a:off x="4381311" y="2165058"/>
-            <a:ext cx="276302" cy="0"/>
-          </a:xfrm>
-          <a:prstGeom prst="straightConnector1">
-            <a:avLst/>
-          </a:prstGeom>
-          <a:ln>
-            <a:tailEnd type="triangle"/>
-          </a:ln>
-        </p:spPr>
-        <p:style>
-          <a:lnRef idx="3">
-            <a:schemeClr val="dk1"/>
-          </a:lnRef>
-          <a:fillRef idx="0">
-            <a:schemeClr val="dk1"/>
-          </a:fillRef>
-          <a:effectRef idx="2">
-            <a:schemeClr val="dk1"/>
-          </a:effectRef>
-          <a:fontRef idx="minor">
-            <a:schemeClr val="tx1"/>
-          </a:fontRef>
-        </p:style>
-      </p:cxnSp>
-      <p:cxnSp>
-        <p:nvCxnSpPr>
-          <p:cNvPr id="73" name="Straight Arrow Connector 72"/>
-          <p:cNvCxnSpPr/>
-          <p:nvPr/>
-        </p:nvCxnSpPr>
-        <p:spPr>
-          <a:xfrm flipH="1">
-            <a:off x="7266525" y="4623278"/>
-            <a:ext cx="236542" cy="0"/>
-          </a:xfrm>
-          <a:prstGeom prst="straightConnector1">
-            <a:avLst/>
-          </a:prstGeom>
-          <a:ln>
-            <a:tailEnd type="triangle"/>
-          </a:ln>
-        </p:spPr>
-        <p:style>
-          <a:lnRef idx="3">
-            <a:schemeClr val="dk1"/>
-          </a:lnRef>
-          <a:fillRef idx="0">
-            <a:schemeClr val="dk1"/>
-          </a:fillRef>
-          <a:effectRef idx="2">
-            <a:schemeClr val="dk1"/>
-          </a:effectRef>
-          <a:fontRef idx="minor">
-            <a:schemeClr val="tx1"/>
-          </a:fontRef>
-        </p:style>
-      </p:cxnSp>
-      <p:cxnSp>
-        <p:nvCxnSpPr>
-          <p:cNvPr id="74" name="Straight Arrow Connector 73"/>
-          <p:cNvCxnSpPr/>
-          <p:nvPr/>
-        </p:nvCxnSpPr>
-        <p:spPr>
-          <a:xfrm flipH="1">
-            <a:off x="7251189" y="3222216"/>
-            <a:ext cx="236542" cy="0"/>
-          </a:xfrm>
-          <a:prstGeom prst="straightConnector1">
-            <a:avLst/>
-          </a:prstGeom>
-          <a:ln>
-            <a:tailEnd type="triangle"/>
-          </a:ln>
-        </p:spPr>
-        <p:style>
-          <a:lnRef idx="3">
-            <a:schemeClr val="dk1"/>
-          </a:lnRef>
-          <a:fillRef idx="0">
-            <a:schemeClr val="dk1"/>
-          </a:fillRef>
-          <a:effectRef idx="2">
-            <a:schemeClr val="dk1"/>
-          </a:effectRef>
-          <a:fontRef idx="minor">
-            <a:schemeClr val="tx1"/>
-          </a:fontRef>
-        </p:style>
-      </p:cxnSp>
-      <p:cxnSp>
-        <p:nvCxnSpPr>
-          <p:cNvPr id="75" name="Straight Arrow Connector 74"/>
-          <p:cNvCxnSpPr/>
-          <p:nvPr/>
-        </p:nvCxnSpPr>
-        <p:spPr>
-          <a:xfrm flipH="1">
-            <a:off x="7244681" y="2193709"/>
-            <a:ext cx="236542" cy="0"/>
-          </a:xfrm>
-          <a:prstGeom prst="straightConnector1">
-            <a:avLst/>
-          </a:prstGeom>
-          <a:ln>
-            <a:tailEnd type="triangle"/>
-          </a:ln>
-        </p:spPr>
-        <p:style>
-          <a:lnRef idx="3">
-            <a:schemeClr val="dk1"/>
-          </a:lnRef>
-          <a:fillRef idx="0">
-            <a:schemeClr val="dk1"/>
-          </a:fillRef>
-          <a:effectRef idx="2">
-            <a:schemeClr val="dk1"/>
-          </a:effectRef>
-          <a:fontRef idx="minor">
-            <a:schemeClr val="tx1"/>
-          </a:fontRef>
-        </p:style>
-      </p:cxnSp>
-      <p:sp>
-        <p:nvSpPr>
-          <p:cNvPr id="65" name="Rectangle 64"/>
-          <p:cNvSpPr/>
-          <p:nvPr/>
-        </p:nvSpPr>
-        <p:spPr>
-          <a:xfrm>
-            <a:off x="2216110" y="2809545"/>
-            <a:ext cx="2146263" cy="410432"/>
-          </a:xfrm>
-          <a:prstGeom prst="rect">
-            <a:avLst/>
-          </a:prstGeom>
-        </p:spPr>
-        <p:style>
-          <a:lnRef idx="2">
-            <a:schemeClr val="dk1">
-              <a:shade val="50000"/>
-            </a:schemeClr>
-          </a:lnRef>
-          <a:fillRef idx="1001">
-            <a:schemeClr val="dk2"/>
-          </a:fillRef>
-          <a:effectRef idx="0">
-            <a:schemeClr val="dk1"/>
-          </a:effectRef>
-          <a:fontRef idx="minor">
-            <a:schemeClr val="lt1"/>
-          </a:fontRef>
-        </p:style>
-        <p:txBody>
-          <a:bodyPr rtlCol="0" anchor="ctr"/>
-          <a:lstStyle/>
-          <a:p>
-            <a:r>
-              <a:rPr lang="en-US" sz="1600" b="1" dirty="0">
-                <a:solidFill>
-                  <a:schemeClr val="bg1"/>
-                </a:solidFill>
-              </a:rPr>
-              <a:t>6 Potentiometer Knobs</a:t>
-            </a:r>
-          </a:p>
-        </p:txBody>
-      </p:sp>
-      <p:sp>
-        <p:nvSpPr>
-          <p:cNvPr id="76" name="Rectangle 75"/>
-          <p:cNvSpPr/>
-          <p:nvPr/>
-        </p:nvSpPr>
-        <p:spPr>
-          <a:xfrm>
-            <a:off x="166920" y="4373127"/>
-            <a:ext cx="4226847" cy="2096991"/>
-          </a:xfrm>
-          <a:prstGeom prst="rect">
-            <a:avLst/>
-          </a:prstGeom>
-          <a:ln/>
-        </p:spPr>
-        <p:style>
-          <a:lnRef idx="1">
-            <a:schemeClr val="accent2"/>
-          </a:lnRef>
-          <a:fillRef idx="2">
-            <a:schemeClr val="accent2"/>
-          </a:fillRef>
-          <a:effectRef idx="1">
-            <a:schemeClr val="accent2"/>
-          </a:effectRef>
-          <a:fontRef idx="minor">
-            <a:schemeClr val="dk1"/>
-          </a:fontRef>
-        </p:style>
-        <p:txBody>
-          <a:bodyPr rtlCol="0" anchor="ctr"/>
-          <a:lstStyle/>
-          <a:p>
-            <a:r>
-              <a:rPr lang="en-US" sz="2800" b="1" dirty="0">
-                <a:solidFill>
-                  <a:schemeClr val="tx1"/>
-                </a:solidFill>
-              </a:rPr>
-              <a:t>Specs:</a:t>
-            </a:r>
-          </a:p>
-          <a:p>
-            <a:pPr marL="285750" indent="-285750">
-              <a:buFont typeface="Arial" panose="020B0604020202020204" pitchFamily="34" charset="0"/>
-              <a:buChar char="•"/>
-            </a:pPr>
-            <a:r>
-              <a:rPr lang="en-US" sz="1400" b="1" dirty="0">
-                <a:solidFill>
-                  <a:schemeClr val="tx1"/>
-                </a:solidFill>
-              </a:rPr>
-              <a:t>Buffered Stereo In/Out Paths</a:t>
-            </a:r>
-          </a:p>
-          <a:p>
-            <a:pPr marL="285750" indent="-285750">
-              <a:buFont typeface="Arial" panose="020B0604020202020204" pitchFamily="34" charset="0"/>
-              <a:buChar char="•"/>
-            </a:pPr>
-            <a:r>
-              <a:rPr lang="en-US" sz="1400" b="1" dirty="0">
-                <a:solidFill>
-                  <a:schemeClr val="tx1"/>
-                </a:solidFill>
-              </a:rPr>
-              <a:t>Up to 96KHz, 24-bit Digital Processing</a:t>
-            </a:r>
-          </a:p>
-          <a:p>
-            <a:pPr marL="285750" indent="-285750">
-              <a:buFont typeface="Arial" panose="020B0604020202020204" pitchFamily="34" charset="0"/>
-              <a:buChar char="•"/>
-            </a:pPr>
-            <a:r>
-              <a:rPr lang="en-US" sz="1400" b="1" dirty="0">
-                <a:solidFill>
-                  <a:schemeClr val="tx1"/>
-                </a:solidFill>
-              </a:rPr>
-              <a:t>64MB SDRAM, 8MB Flash</a:t>
-            </a:r>
-          </a:p>
-          <a:p>
-            <a:pPr marL="285750" indent="-285750">
-              <a:buFont typeface="Arial" panose="020B0604020202020204" pitchFamily="34" charset="0"/>
-              <a:buChar char="•"/>
-            </a:pPr>
-            <a:r>
-              <a:rPr lang="en-US" sz="1400" b="1" dirty="0">
-                <a:solidFill>
-                  <a:schemeClr val="tx1"/>
-                </a:solidFill>
-              </a:rPr>
-              <a:t>ARM Cortex M7 480MHz</a:t>
-            </a:r>
-          </a:p>
-          <a:p>
-            <a:pPr marL="285750" indent="-285750">
-              <a:buFont typeface="Arial" panose="020B0604020202020204" pitchFamily="34" charset="0"/>
-              <a:buChar char="•"/>
-            </a:pPr>
-            <a:r>
-              <a:rPr lang="en-US" sz="1400" b="1" dirty="0">
-                <a:solidFill>
-                  <a:schemeClr val="tx1"/>
-                </a:solidFill>
-              </a:rPr>
-              <a:t>Expression and MIDI Inputs</a:t>
-            </a:r>
-          </a:p>
-          <a:p>
-            <a:pPr marL="285750" indent="-285750">
-              <a:buFont typeface="Arial" panose="020B0604020202020204" pitchFamily="34" charset="0"/>
-              <a:buChar char="•"/>
-            </a:pPr>
-            <a:r>
-              <a:rPr lang="en-US" sz="1400" b="1" dirty="0">
-                <a:solidFill>
-                  <a:schemeClr val="tx1"/>
-                </a:solidFill>
-              </a:rPr>
-              <a:t>Through Hole PCB</a:t>
-            </a:r>
-          </a:p>
-          <a:p>
-            <a:pPr marL="285750" indent="-285750">
-              <a:buFont typeface="Arial" panose="020B0604020202020204" pitchFamily="34" charset="0"/>
-              <a:buChar char="•"/>
-            </a:pPr>
-            <a:r>
-              <a:rPr lang="en-US" sz="1400" b="1" dirty="0">
-                <a:solidFill>
-                  <a:schemeClr val="tx1"/>
-                </a:solidFill>
-              </a:rPr>
-              <a:t>Digital Bypass only</a:t>
-            </a:r>
           </a:p>
         </p:txBody>
       </p:sp>
     </p:spTree>
     <p:extLst>
       <p:ext uri="{BB962C8B-B14F-4D97-AF65-F5344CB8AC3E}">
-        <p14:creationId xmlns:p14="http://schemas.microsoft.com/office/powerpoint/2010/main" val="2803695047"/>
+        <p14:creationId xmlns:p14="http://schemas.microsoft.com/office/powerpoint/2010/main" val="4288871490"/>
       </p:ext>
     </p:extLst>
   </p:cSld>

--- a/software/images/Infographics.pptx
+++ b/software/images/Infographics.pptx
@@ -13,7 +13,7 @@
     <p:sldId id="262" r:id="rId7"/>
     <p:sldId id="263" r:id="rId8"/>
     <p:sldId id="264" r:id="rId9"/>
-    <p:sldId id="266" r:id="rId10"/>
+    <p:sldId id="265" r:id="rId10"/>
     <p:sldId id="260" r:id="rId11"/>
   </p:sldIdLst>
   <p:sldSz cx="12192000" cy="6858000"/>
@@ -373,7 +373,7 @@
           <a:p>
             <a:fld id="{E65F16E8-9810-4F67-B618-098E0E399057}" type="datetimeFigureOut">
               <a:rPr lang="en-US" smtClean="0"/>
-              <a:t>6/15/2026</a:t>
+              <a:t>2/12/2025</a:t>
             </a:fld>
             <a:endParaRPr lang="en-US"/>
           </a:p>
@@ -541,7 +541,7 @@
           <a:p>
             <a:fld id="{E65F16E8-9810-4F67-B618-098E0E399057}" type="datetimeFigureOut">
               <a:rPr lang="en-US" smtClean="0"/>
-              <a:t>6/15/2026</a:t>
+              <a:t>2/12/2025</a:t>
             </a:fld>
             <a:endParaRPr lang="en-US"/>
           </a:p>
@@ -719,7 +719,7 @@
           <a:p>
             <a:fld id="{E65F16E8-9810-4F67-B618-098E0E399057}" type="datetimeFigureOut">
               <a:rPr lang="en-US" smtClean="0"/>
-              <a:t>6/15/2026</a:t>
+              <a:t>2/12/2025</a:t>
             </a:fld>
             <a:endParaRPr lang="en-US"/>
           </a:p>
@@ -887,7 +887,7 @@
           <a:p>
             <a:fld id="{E65F16E8-9810-4F67-B618-098E0E399057}" type="datetimeFigureOut">
               <a:rPr lang="en-US" smtClean="0"/>
-              <a:t>6/15/2026</a:t>
+              <a:t>2/12/2025</a:t>
             </a:fld>
             <a:endParaRPr lang="en-US"/>
           </a:p>
@@ -1132,7 +1132,7 @@
           <a:p>
             <a:fld id="{E65F16E8-9810-4F67-B618-098E0E399057}" type="datetimeFigureOut">
               <a:rPr lang="en-US" smtClean="0"/>
-              <a:t>6/15/2026</a:t>
+              <a:t>2/12/2025</a:t>
             </a:fld>
             <a:endParaRPr lang="en-US"/>
           </a:p>
@@ -1361,7 +1361,7 @@
           <a:p>
             <a:fld id="{E65F16E8-9810-4F67-B618-098E0E399057}" type="datetimeFigureOut">
               <a:rPr lang="en-US" smtClean="0"/>
-              <a:t>6/15/2026</a:t>
+              <a:t>2/12/2025</a:t>
             </a:fld>
             <a:endParaRPr lang="en-US"/>
           </a:p>
@@ -1725,7 +1725,7 @@
           <a:p>
             <a:fld id="{E65F16E8-9810-4F67-B618-098E0E399057}" type="datetimeFigureOut">
               <a:rPr lang="en-US" smtClean="0"/>
-              <a:t>6/15/2026</a:t>
+              <a:t>2/12/2025</a:t>
             </a:fld>
             <a:endParaRPr lang="en-US"/>
           </a:p>
@@ -1842,7 +1842,7 @@
           <a:p>
             <a:fld id="{E65F16E8-9810-4F67-B618-098E0E399057}" type="datetimeFigureOut">
               <a:rPr lang="en-US" smtClean="0"/>
-              <a:t>6/15/2026</a:t>
+              <a:t>2/12/2025</a:t>
             </a:fld>
             <a:endParaRPr lang="en-US"/>
           </a:p>
@@ -1937,7 +1937,7 @@
           <a:p>
             <a:fld id="{E65F16E8-9810-4F67-B618-098E0E399057}" type="datetimeFigureOut">
               <a:rPr lang="en-US" smtClean="0"/>
-              <a:t>6/15/2026</a:t>
+              <a:t>2/12/2025</a:t>
             </a:fld>
             <a:endParaRPr lang="en-US"/>
           </a:p>
@@ -2212,7 +2212,7 @@
           <a:p>
             <a:fld id="{E65F16E8-9810-4F67-B618-098E0E399057}" type="datetimeFigureOut">
               <a:rPr lang="en-US" smtClean="0"/>
-              <a:t>6/15/2026</a:t>
+              <a:t>2/12/2025</a:t>
             </a:fld>
             <a:endParaRPr lang="en-US"/>
           </a:p>
@@ -2464,7 +2464,7 @@
           <a:p>
             <a:fld id="{E65F16E8-9810-4F67-B618-098E0E399057}" type="datetimeFigureOut">
               <a:rPr lang="en-US" smtClean="0"/>
-              <a:t>6/15/2026</a:t>
+              <a:t>2/12/2025</a:t>
             </a:fld>
             <a:endParaRPr lang="en-US"/>
           </a:p>
@@ -2675,7 +2675,7 @@
           <a:p>
             <a:fld id="{E65F16E8-9810-4F67-B618-098E0E399057}" type="datetimeFigureOut">
               <a:rPr lang="en-US" smtClean="0"/>
-              <a:t>6/15/2026</a:t>
+              <a:t>2/12/2025</a:t>
             </a:fld>
             <a:endParaRPr lang="en-US"/>
           </a:p>
@@ -30278,13 +30278,7 @@
   <p:cSld>
     <p:spTree>
       <p:nvGrpSpPr>
-        <p:cNvPr id="1" name="">
-          <a:extLst>
-            <a:ext uri="{FF2B5EF4-FFF2-40B4-BE49-F238E27FC236}">
-              <a16:creationId xmlns:a16="http://schemas.microsoft.com/office/drawing/2014/main" id="{4B93FE05-2FD6-3D0F-7CD7-A4BB08482B3F}"/>
-            </a:ext>
-          </a:extLst>
-        </p:cNvPr>
+        <p:cNvPr id="1" name=""/>
         <p:cNvGrpSpPr/>
         <p:nvPr/>
       </p:nvGrpSpPr>
@@ -30298,13 +30292,7 @@
       </p:grpSpPr>
       <p:sp>
         <p:nvSpPr>
-          <p:cNvPr id="4" name="Rounded Rectangle 3">
-            <a:extLst>
-              <a:ext uri="{FF2B5EF4-FFF2-40B4-BE49-F238E27FC236}">
-                <a16:creationId xmlns:a16="http://schemas.microsoft.com/office/drawing/2014/main" id="{AF203928-2F6C-77FA-C95E-14081AAE6D81}"/>
-              </a:ext>
-            </a:extLst>
-          </p:cNvPr>
+          <p:cNvPr id="4" name="Rounded Rectangle 3"/>
           <p:cNvSpPr/>
           <p:nvPr/>
         </p:nvSpPr>
@@ -30353,13 +30341,7 @@
       </p:sp>
       <p:sp>
         <p:nvSpPr>
-          <p:cNvPr id="5" name="Isosceles Triangle 4">
-            <a:extLst>
-              <a:ext uri="{FF2B5EF4-FFF2-40B4-BE49-F238E27FC236}">
-                <a16:creationId xmlns:a16="http://schemas.microsoft.com/office/drawing/2014/main" id="{53F96907-E055-D954-BBC3-AD0FDB4EF5D0}"/>
-              </a:ext>
-            </a:extLst>
-          </p:cNvPr>
+          <p:cNvPr id="5" name="Isosceles Triangle 4"/>
           <p:cNvSpPr/>
           <p:nvPr/>
         </p:nvSpPr>
@@ -30407,13 +30389,7 @@
       </p:sp>
       <p:sp>
         <p:nvSpPr>
-          <p:cNvPr id="6" name="Isosceles Triangle 5">
-            <a:extLst>
-              <a:ext uri="{FF2B5EF4-FFF2-40B4-BE49-F238E27FC236}">
-                <a16:creationId xmlns:a16="http://schemas.microsoft.com/office/drawing/2014/main" id="{114F0F46-D088-40F2-19C2-440BF9EDC6F7}"/>
-              </a:ext>
-            </a:extLst>
-          </p:cNvPr>
+          <p:cNvPr id="6" name="Isosceles Triangle 5"/>
           <p:cNvSpPr/>
           <p:nvPr/>
         </p:nvSpPr>
@@ -30461,13 +30437,7 @@
       </p:sp>
       <p:sp>
         <p:nvSpPr>
-          <p:cNvPr id="7" name="Oval 6">
-            <a:extLst>
-              <a:ext uri="{FF2B5EF4-FFF2-40B4-BE49-F238E27FC236}">
-                <a16:creationId xmlns:a16="http://schemas.microsoft.com/office/drawing/2014/main" id="{40967ECA-3A4E-1C13-7ECB-1662FF328EC8}"/>
-              </a:ext>
-            </a:extLst>
-          </p:cNvPr>
+          <p:cNvPr id="7" name="Oval 6"/>
           <p:cNvSpPr/>
           <p:nvPr/>
         </p:nvSpPr>
@@ -30518,13 +30488,7 @@
       </p:sp>
       <p:sp>
         <p:nvSpPr>
-          <p:cNvPr id="8" name="Oval 7">
-            <a:extLst>
-              <a:ext uri="{FF2B5EF4-FFF2-40B4-BE49-F238E27FC236}">
-                <a16:creationId xmlns:a16="http://schemas.microsoft.com/office/drawing/2014/main" id="{04D86E76-CDFC-1C35-3607-58D2A11422F1}"/>
-              </a:ext>
-            </a:extLst>
-          </p:cNvPr>
+          <p:cNvPr id="8" name="Oval 7"/>
           <p:cNvSpPr/>
           <p:nvPr/>
         </p:nvSpPr>
@@ -30575,13 +30539,7 @@
       </p:sp>
       <p:sp>
         <p:nvSpPr>
-          <p:cNvPr id="9" name="Oval 8">
-            <a:extLst>
-              <a:ext uri="{FF2B5EF4-FFF2-40B4-BE49-F238E27FC236}">
-                <a16:creationId xmlns:a16="http://schemas.microsoft.com/office/drawing/2014/main" id="{E0B73D7D-5F31-B34E-26A8-0F2221A51AEE}"/>
-              </a:ext>
-            </a:extLst>
-          </p:cNvPr>
+          <p:cNvPr id="9" name="Oval 8"/>
           <p:cNvSpPr/>
           <p:nvPr/>
         </p:nvSpPr>
@@ -30632,13 +30590,7 @@
       </p:sp>
       <p:sp>
         <p:nvSpPr>
-          <p:cNvPr id="10" name="Oval 9">
-            <a:extLst>
-              <a:ext uri="{FF2B5EF4-FFF2-40B4-BE49-F238E27FC236}">
-                <a16:creationId xmlns:a16="http://schemas.microsoft.com/office/drawing/2014/main" id="{C7350EBC-2BE6-CB18-1AD5-81810D3AAF5C}"/>
-              </a:ext>
-            </a:extLst>
-          </p:cNvPr>
+          <p:cNvPr id="10" name="Oval 9"/>
           <p:cNvSpPr/>
           <p:nvPr/>
         </p:nvSpPr>
@@ -30688,13 +30640,7 @@
       </p:sp>
       <p:sp>
         <p:nvSpPr>
-          <p:cNvPr id="11" name="Oval 10">
-            <a:extLst>
-              <a:ext uri="{FF2B5EF4-FFF2-40B4-BE49-F238E27FC236}">
-                <a16:creationId xmlns:a16="http://schemas.microsoft.com/office/drawing/2014/main" id="{4D138438-F97B-43F9-4DCB-5F11459BF54F}"/>
-              </a:ext>
-            </a:extLst>
-          </p:cNvPr>
+          <p:cNvPr id="11" name="Oval 10"/>
           <p:cNvSpPr/>
           <p:nvPr/>
         </p:nvSpPr>
@@ -30744,13 +30690,7 @@
       </p:sp>
       <p:sp>
         <p:nvSpPr>
-          <p:cNvPr id="12" name="Oval 11">
-            <a:extLst>
-              <a:ext uri="{FF2B5EF4-FFF2-40B4-BE49-F238E27FC236}">
-                <a16:creationId xmlns:a16="http://schemas.microsoft.com/office/drawing/2014/main" id="{6B081589-7605-6347-4C62-E9BB75C9B11C}"/>
-              </a:ext>
-            </a:extLst>
-          </p:cNvPr>
+          <p:cNvPr id="12" name="Oval 11"/>
           <p:cNvSpPr/>
           <p:nvPr/>
         </p:nvSpPr>
@@ -30800,13 +30740,7 @@
       </p:sp>
       <p:sp>
         <p:nvSpPr>
-          <p:cNvPr id="13" name="Oval 12">
-            <a:extLst>
-              <a:ext uri="{FF2B5EF4-FFF2-40B4-BE49-F238E27FC236}">
-                <a16:creationId xmlns:a16="http://schemas.microsoft.com/office/drawing/2014/main" id="{1914CE33-689F-1125-2AD1-64CF76E3D665}"/>
-              </a:ext>
-            </a:extLst>
-          </p:cNvPr>
+          <p:cNvPr id="13" name="Oval 12"/>
           <p:cNvSpPr/>
           <p:nvPr/>
         </p:nvSpPr>
@@ -30851,13 +30785,7 @@
       </p:sp>
       <p:sp>
         <p:nvSpPr>
-          <p:cNvPr id="14" name="Flowchart: Terminator 13">
-            <a:extLst>
-              <a:ext uri="{FF2B5EF4-FFF2-40B4-BE49-F238E27FC236}">
-                <a16:creationId xmlns:a16="http://schemas.microsoft.com/office/drawing/2014/main" id="{75C4727E-AEEF-AA7A-D683-21650C4E45F6}"/>
-              </a:ext>
-            </a:extLst>
-          </p:cNvPr>
+          <p:cNvPr id="14" name="Flowchart: Terminator 13"/>
           <p:cNvSpPr/>
           <p:nvPr/>
         </p:nvSpPr>
@@ -30902,13 +30830,7 @@
       </p:sp>
       <p:sp>
         <p:nvSpPr>
-          <p:cNvPr id="15" name="Oval 14">
-            <a:extLst>
-              <a:ext uri="{FF2B5EF4-FFF2-40B4-BE49-F238E27FC236}">
-                <a16:creationId xmlns:a16="http://schemas.microsoft.com/office/drawing/2014/main" id="{C43ABE05-2F71-EE88-0764-60A92F15881D}"/>
-              </a:ext>
-            </a:extLst>
-          </p:cNvPr>
+          <p:cNvPr id="15" name="Oval 14"/>
           <p:cNvSpPr/>
           <p:nvPr/>
         </p:nvSpPr>
@@ -30948,13 +30870,7 @@
       </p:sp>
       <p:sp>
         <p:nvSpPr>
-          <p:cNvPr id="16" name="Oval 15">
-            <a:extLst>
-              <a:ext uri="{FF2B5EF4-FFF2-40B4-BE49-F238E27FC236}">
-                <a16:creationId xmlns:a16="http://schemas.microsoft.com/office/drawing/2014/main" id="{1737CF6A-EAE1-5DF1-A7E9-EE9FA911763B}"/>
-              </a:ext>
-            </a:extLst>
-          </p:cNvPr>
+          <p:cNvPr id="16" name="Oval 15"/>
           <p:cNvSpPr/>
           <p:nvPr/>
         </p:nvSpPr>
@@ -30994,13 +30910,7 @@
       </p:sp>
       <p:sp>
         <p:nvSpPr>
-          <p:cNvPr id="17" name="Oval 16">
-            <a:extLst>
-              <a:ext uri="{FF2B5EF4-FFF2-40B4-BE49-F238E27FC236}">
-                <a16:creationId xmlns:a16="http://schemas.microsoft.com/office/drawing/2014/main" id="{0735C1CF-2EA8-78B9-ED57-32C9A22E7668}"/>
-              </a:ext>
-            </a:extLst>
-          </p:cNvPr>
+          <p:cNvPr id="17" name="Oval 16"/>
           <p:cNvSpPr/>
           <p:nvPr/>
         </p:nvSpPr>
@@ -31045,13 +30955,7 @@
       </p:sp>
       <p:sp>
         <p:nvSpPr>
-          <p:cNvPr id="18" name="Oval 17">
-            <a:extLst>
-              <a:ext uri="{FF2B5EF4-FFF2-40B4-BE49-F238E27FC236}">
-                <a16:creationId xmlns:a16="http://schemas.microsoft.com/office/drawing/2014/main" id="{D657C004-8BD5-C912-88BE-1260BCEE836E}"/>
-              </a:ext>
-            </a:extLst>
-          </p:cNvPr>
+          <p:cNvPr id="18" name="Oval 17"/>
           <p:cNvSpPr/>
           <p:nvPr/>
         </p:nvSpPr>
@@ -31096,13 +31000,7 @@
       </p:sp>
       <p:sp>
         <p:nvSpPr>
-          <p:cNvPr id="19" name="Oval 18">
-            <a:extLst>
-              <a:ext uri="{FF2B5EF4-FFF2-40B4-BE49-F238E27FC236}">
-                <a16:creationId xmlns:a16="http://schemas.microsoft.com/office/drawing/2014/main" id="{BF7C9A93-920C-A0EB-81B7-001DD1386F49}"/>
-              </a:ext>
-            </a:extLst>
-          </p:cNvPr>
+          <p:cNvPr id="19" name="Oval 18"/>
           <p:cNvSpPr/>
           <p:nvPr/>
         </p:nvSpPr>
@@ -31147,13 +31045,7 @@
       </p:sp>
       <p:sp>
         <p:nvSpPr>
-          <p:cNvPr id="20" name="Oval 19">
-            <a:extLst>
-              <a:ext uri="{FF2B5EF4-FFF2-40B4-BE49-F238E27FC236}">
-                <a16:creationId xmlns:a16="http://schemas.microsoft.com/office/drawing/2014/main" id="{FEEC62D8-685C-C883-07E1-88F5FDC4B2A8}"/>
-              </a:ext>
-            </a:extLst>
-          </p:cNvPr>
+          <p:cNvPr id="20" name="Oval 19"/>
           <p:cNvSpPr/>
           <p:nvPr/>
         </p:nvSpPr>
@@ -31198,13 +31090,7 @@
       </p:sp>
       <p:cxnSp>
         <p:nvCxnSpPr>
-          <p:cNvPr id="21" name="Straight Connector 20">
-            <a:extLst>
-              <a:ext uri="{FF2B5EF4-FFF2-40B4-BE49-F238E27FC236}">
-                <a16:creationId xmlns:a16="http://schemas.microsoft.com/office/drawing/2014/main" id="{8CC7EB89-223A-3E5C-9A32-C13FD6BD7FA5}"/>
-              </a:ext>
-            </a:extLst>
-          </p:cNvPr>
+          <p:cNvPr id="21" name="Straight Connector 20"/>
           <p:cNvCxnSpPr>
             <a:stCxn id="7" idx="0"/>
           </p:cNvCxnSpPr>
@@ -31237,13 +31123,7 @@
       </p:cxnSp>
       <p:cxnSp>
         <p:nvCxnSpPr>
-          <p:cNvPr id="22" name="Straight Connector 21">
-            <a:extLst>
-              <a:ext uri="{FF2B5EF4-FFF2-40B4-BE49-F238E27FC236}">
-                <a16:creationId xmlns:a16="http://schemas.microsoft.com/office/drawing/2014/main" id="{1992F0A8-35AC-B1EB-1D8C-7977778A629D}"/>
-              </a:ext>
-            </a:extLst>
-          </p:cNvPr>
+          <p:cNvPr id="22" name="Straight Connector 21"/>
           <p:cNvCxnSpPr/>
           <p:nvPr/>
         </p:nvCxnSpPr>
@@ -31274,13 +31154,7 @@
       </p:cxnSp>
       <p:cxnSp>
         <p:nvCxnSpPr>
-          <p:cNvPr id="23" name="Straight Connector 22">
-            <a:extLst>
-              <a:ext uri="{FF2B5EF4-FFF2-40B4-BE49-F238E27FC236}">
-                <a16:creationId xmlns:a16="http://schemas.microsoft.com/office/drawing/2014/main" id="{3DBC88F1-EAC6-8726-CF33-BD45A83D5D1D}"/>
-              </a:ext>
-            </a:extLst>
-          </p:cNvPr>
+          <p:cNvPr id="23" name="Straight Connector 22"/>
           <p:cNvCxnSpPr/>
           <p:nvPr/>
         </p:nvCxnSpPr>
@@ -31311,13 +31185,7 @@
       </p:cxnSp>
       <p:cxnSp>
         <p:nvCxnSpPr>
-          <p:cNvPr id="24" name="Straight Connector 23">
-            <a:extLst>
-              <a:ext uri="{FF2B5EF4-FFF2-40B4-BE49-F238E27FC236}">
-                <a16:creationId xmlns:a16="http://schemas.microsoft.com/office/drawing/2014/main" id="{C2B8C3C3-0689-6E44-D88B-7B870662598F}"/>
-              </a:ext>
-            </a:extLst>
-          </p:cNvPr>
+          <p:cNvPr id="24" name="Straight Connector 23"/>
           <p:cNvCxnSpPr/>
           <p:nvPr/>
         </p:nvCxnSpPr>
@@ -31348,13 +31216,7 @@
       </p:cxnSp>
       <p:cxnSp>
         <p:nvCxnSpPr>
-          <p:cNvPr id="25" name="Straight Connector 24">
-            <a:extLst>
-              <a:ext uri="{FF2B5EF4-FFF2-40B4-BE49-F238E27FC236}">
-                <a16:creationId xmlns:a16="http://schemas.microsoft.com/office/drawing/2014/main" id="{D103F1D0-77C7-9A34-385B-F1E1F229AA48}"/>
-              </a:ext>
-            </a:extLst>
-          </p:cNvPr>
+          <p:cNvPr id="25" name="Straight Connector 24"/>
           <p:cNvCxnSpPr/>
           <p:nvPr/>
         </p:nvCxnSpPr>
@@ -31385,13 +31247,7 @@
       </p:cxnSp>
       <p:cxnSp>
         <p:nvCxnSpPr>
-          <p:cNvPr id="26" name="Straight Connector 25">
-            <a:extLst>
-              <a:ext uri="{FF2B5EF4-FFF2-40B4-BE49-F238E27FC236}">
-                <a16:creationId xmlns:a16="http://schemas.microsoft.com/office/drawing/2014/main" id="{3C883144-8402-FB1F-020C-714021A270FD}"/>
-              </a:ext>
-            </a:extLst>
-          </p:cNvPr>
+          <p:cNvPr id="26" name="Straight Connector 25"/>
           <p:cNvCxnSpPr/>
           <p:nvPr/>
         </p:nvCxnSpPr>
@@ -31422,20 +31278,14 @@
       </p:cxnSp>
       <p:sp>
         <p:nvSpPr>
-          <p:cNvPr id="27" name="TextBox 26">
-            <a:extLst>
-              <a:ext uri="{FF2B5EF4-FFF2-40B4-BE49-F238E27FC236}">
-                <a16:creationId xmlns:a16="http://schemas.microsoft.com/office/drawing/2014/main" id="{1A000AE4-6680-5A07-3F36-A18FF31ED7FA}"/>
-              </a:ext>
-            </a:extLst>
-          </p:cNvPr>
+          <p:cNvPr id="27" name="TextBox 26"/>
           <p:cNvSpPr txBox="1"/>
           <p:nvPr/>
         </p:nvSpPr>
         <p:spPr>
           <a:xfrm>
-            <a:off x="4977071" y="2313676"/>
-            <a:ext cx="402675" cy="246221"/>
+            <a:off x="4966651" y="2313676"/>
+            <a:ext cx="423514" cy="246221"/>
           </a:xfrm>
           <a:prstGeom prst="rect">
             <a:avLst/>
@@ -31454,27 +31304,21 @@
                 <a:latin typeface="Century Gothic" panose="020B0502020202020204" pitchFamily="34" charset="0"/>
                 <a:cs typeface="Adobe Devanagari" panose="02040503050201020203" pitchFamily="18" charset="0"/>
               </a:rPr>
-              <a:t>Mix</a:t>
-            </a:r>
-          </a:p>
-        </p:txBody>
-      </p:sp>
-      <p:sp>
-        <p:nvSpPr>
-          <p:cNvPr id="28" name="TextBox 27">
-            <a:extLst>
-              <a:ext uri="{FF2B5EF4-FFF2-40B4-BE49-F238E27FC236}">
-                <a16:creationId xmlns:a16="http://schemas.microsoft.com/office/drawing/2014/main" id="{07FEC6DF-04ED-CA3D-0582-A7C1C4E76C69}"/>
-              </a:ext>
-            </a:extLst>
-          </p:cNvPr>
+              <a:t>Size</a:t>
+            </a:r>
+          </a:p>
+        </p:txBody>
+      </p:sp>
+      <p:sp>
+        <p:nvSpPr>
+          <p:cNvPr id="28" name="TextBox 27"/>
           <p:cNvSpPr txBox="1"/>
           <p:nvPr/>
         </p:nvSpPr>
         <p:spPr>
           <a:xfrm>
-            <a:off x="5790087" y="2300190"/>
-            <a:ext cx="373820" cy="246221"/>
+            <a:off x="5613756" y="2300190"/>
+            <a:ext cx="726482" cy="400110"/>
           </a:xfrm>
           <a:prstGeom prst="rect">
             <a:avLst/>
@@ -31493,27 +31337,31 @@
                 <a:latin typeface="Century Gothic" panose="020B0502020202020204" pitchFamily="34" charset="0"/>
                 <a:cs typeface="Adobe Devanagari" panose="02040503050201020203" pitchFamily="18" charset="0"/>
               </a:rPr>
-              <a:t>LPF</a:t>
-            </a:r>
-          </a:p>
-        </p:txBody>
-      </p:sp>
-      <p:sp>
-        <p:nvSpPr>
-          <p:cNvPr id="29" name="TextBox 28">
-            <a:extLst>
-              <a:ext uri="{FF2B5EF4-FFF2-40B4-BE49-F238E27FC236}">
-                <a16:creationId xmlns:a16="http://schemas.microsoft.com/office/drawing/2014/main" id="{015D475C-398D-1CA1-9BD8-7DBD44933398}"/>
-              </a:ext>
-            </a:extLst>
-          </p:cNvPr>
+              <a:t>Mix</a:t>
+            </a:r>
+          </a:p>
+          <a:p>
+            <a:pPr algn="ctr"/>
+            <a:r>
+              <a:rPr lang="en-US" sz="1000" b="1" dirty="0">
+                <a:latin typeface="Century Gothic" panose="020B0502020202020204" pitchFamily="34" charset="0"/>
+                <a:cs typeface="Adobe Devanagari" panose="02040503050201020203" pitchFamily="18" charset="0"/>
+              </a:rPr>
+              <a:t>(Spread)</a:t>
+            </a:r>
+          </a:p>
+        </p:txBody>
+      </p:sp>
+      <p:sp>
+        <p:nvSpPr>
+          <p:cNvPr id="29" name="TextBox 28"/>
           <p:cNvSpPr txBox="1"/>
           <p:nvPr/>
         </p:nvSpPr>
         <p:spPr>
           <a:xfrm>
-            <a:off x="6460584" y="2306958"/>
-            <a:ext cx="595035" cy="246221"/>
+            <a:off x="6301887" y="2306958"/>
+            <a:ext cx="912429" cy="400110"/>
           </a:xfrm>
           <a:prstGeom prst="rect">
             <a:avLst/>
@@ -31532,27 +31380,31 @@
                 <a:latin typeface="Century Gothic" panose="020B0502020202020204" pitchFamily="34" charset="0"/>
                 <a:cs typeface="Adobe Devanagari" panose="02040503050201020203" pitchFamily="18" charset="0"/>
               </a:rPr>
-              <a:t>REGEN</a:t>
-            </a:r>
-          </a:p>
-        </p:txBody>
-      </p:sp>
-      <p:sp>
-        <p:nvSpPr>
-          <p:cNvPr id="30" name="TextBox 29">
-            <a:extLst>
-              <a:ext uri="{FF2B5EF4-FFF2-40B4-BE49-F238E27FC236}">
-                <a16:creationId xmlns:a16="http://schemas.microsoft.com/office/drawing/2014/main" id="{D584AA0F-6AFB-F174-DF94-F86A9C51F179}"/>
-              </a:ext>
-            </a:extLst>
-          </p:cNvPr>
+              <a:t>Pitch</a:t>
+            </a:r>
+          </a:p>
+          <a:p>
+            <a:pPr algn="ctr"/>
+            <a:r>
+              <a:rPr lang="en-US" sz="1000" b="1" dirty="0">
+                <a:latin typeface="Century Gothic" panose="020B0502020202020204" pitchFamily="34" charset="0"/>
+                <a:cs typeface="Adobe Devanagari" panose="02040503050201020203" pitchFamily="18" charset="0"/>
+              </a:rPr>
+              <a:t>(LFO Depth)</a:t>
+            </a:r>
+          </a:p>
+        </p:txBody>
+      </p:sp>
+      <p:sp>
+        <p:nvSpPr>
+          <p:cNvPr id="30" name="TextBox 29"/>
           <p:cNvSpPr txBox="1"/>
           <p:nvPr/>
         </p:nvSpPr>
         <p:spPr>
           <a:xfrm>
-            <a:off x="5640378" y="3306313"/>
-            <a:ext cx="681598" cy="400110"/>
+            <a:off x="5715718" y="3306313"/>
+            <a:ext cx="530916" cy="246221"/>
           </a:xfrm>
           <a:prstGeom prst="rect">
             <a:avLst/>
@@ -31571,9 +31423,32 @@
                 <a:latin typeface="Century Gothic" panose="020B0502020202020204" pitchFamily="34" charset="0"/>
                 <a:cs typeface="Adobe Devanagari" panose="02040503050201020203" pitchFamily="18" charset="0"/>
               </a:rPr>
-              <a:t>INT 1</a:t>
-            </a:r>
-          </a:p>
+              <a:t>Width</a:t>
+            </a:r>
+          </a:p>
+        </p:txBody>
+      </p:sp>
+      <p:sp>
+        <p:nvSpPr>
+          <p:cNvPr id="31" name="TextBox 30"/>
+          <p:cNvSpPr txBox="1"/>
+          <p:nvPr/>
+        </p:nvSpPr>
+        <p:spPr>
+          <a:xfrm>
+            <a:off x="6354552" y="3306313"/>
+            <a:ext cx="819456" cy="553998"/>
+          </a:xfrm>
+          <a:prstGeom prst="rect">
+            <a:avLst/>
+          </a:prstGeom>
+          <a:noFill/>
+        </p:spPr>
+        <p:txBody>
+          <a:bodyPr wrap="none" rtlCol="0">
+            <a:spAutoFit/>
+          </a:bodyPr>
+          <a:lstStyle/>
           <a:p>
             <a:pPr algn="ctr"/>
             <a:r>
@@ -31581,38 +31456,9 @@
                 <a:latin typeface="Century Gothic" panose="020B0502020202020204" pitchFamily="34" charset="0"/>
                 <a:cs typeface="Adobe Devanagari" panose="02040503050201020203" pitchFamily="18" charset="0"/>
               </a:rPr>
-              <a:t>(Speed)</a:t>
-            </a:r>
-          </a:p>
-        </p:txBody>
-      </p:sp>
-      <p:sp>
-        <p:nvSpPr>
-          <p:cNvPr id="31" name="TextBox 30">
-            <a:extLst>
-              <a:ext uri="{FF2B5EF4-FFF2-40B4-BE49-F238E27FC236}">
-                <a16:creationId xmlns:a16="http://schemas.microsoft.com/office/drawing/2014/main" id="{F55268A8-DDF2-6775-551E-709A3EBE205F}"/>
-              </a:ext>
-            </a:extLst>
-          </p:cNvPr>
-          <p:cNvSpPr txBox="1"/>
-          <p:nvPr/>
-        </p:nvSpPr>
-        <p:spPr>
-          <a:xfrm>
-            <a:off x="6437909" y="3306313"/>
-            <a:ext cx="652744" cy="553998"/>
-          </a:xfrm>
-          <a:prstGeom prst="rect">
-            <a:avLst/>
-          </a:prstGeom>
-          <a:noFill/>
-        </p:spPr>
-        <p:txBody>
-          <a:bodyPr wrap="none" rtlCol="0">
-            <a:spAutoFit/>
-          </a:bodyPr>
-          <a:lstStyle/>
+              <a:t>Speed</a:t>
+            </a:r>
+          </a:p>
           <a:p>
             <a:pPr algn="ctr"/>
             <a:r>
@@ -31620,17 +31466,7 @@
                 <a:latin typeface="Century Gothic" panose="020B0502020202020204" pitchFamily="34" charset="0"/>
                 <a:cs typeface="Adobe Devanagari" panose="02040503050201020203" pitchFamily="18" charset="0"/>
               </a:rPr>
-              <a:t>INT 2</a:t>
-            </a:r>
-          </a:p>
-          <a:p>
-            <a:pPr algn="ctr"/>
-            <a:r>
-              <a:rPr lang="en-US" sz="1000" b="1" dirty="0">
-                <a:latin typeface="Century Gothic" panose="020B0502020202020204" pitchFamily="34" charset="0"/>
-                <a:cs typeface="Adobe Devanagari" panose="02040503050201020203" pitchFamily="18" charset="0"/>
-              </a:rPr>
-              <a:t>(Depth)</a:t>
+              <a:t>(LFO Rate)</a:t>
             </a:r>
           </a:p>
           <a:p>
@@ -31644,20 +31480,14 @@
       </p:sp>
       <p:sp>
         <p:nvSpPr>
-          <p:cNvPr id="32" name="TextBox 31">
-            <a:extLst>
-              <a:ext uri="{FF2B5EF4-FFF2-40B4-BE49-F238E27FC236}">
-                <a16:creationId xmlns:a16="http://schemas.microsoft.com/office/drawing/2014/main" id="{DBDBD501-CA39-2EB5-4B51-301DEFAF40B2}"/>
-              </a:ext>
-            </a:extLst>
-          </p:cNvPr>
+          <p:cNvPr id="32" name="TextBox 31"/>
           <p:cNvSpPr txBox="1"/>
           <p:nvPr/>
         </p:nvSpPr>
         <p:spPr>
           <a:xfrm>
-            <a:off x="4918568" y="3306313"/>
-            <a:ext cx="519694" cy="246221"/>
+            <a:off x="4815173" y="3306313"/>
+            <a:ext cx="726482" cy="400110"/>
           </a:xfrm>
           <a:prstGeom prst="rect">
             <a:avLst/>
@@ -31676,20 +31506,24 @@
                 <a:latin typeface="Century Gothic" panose="020B0502020202020204" pitchFamily="34" charset="0"/>
                 <a:cs typeface="Adobe Devanagari" panose="02040503050201020203" pitchFamily="18" charset="0"/>
               </a:rPr>
-              <a:t>Glide</a:t>
-            </a:r>
-          </a:p>
-        </p:txBody>
-      </p:sp>
-      <p:sp>
-        <p:nvSpPr>
-          <p:cNvPr id="33" name="TextBox 32">
-            <a:extLst>
-              <a:ext uri="{FF2B5EF4-FFF2-40B4-BE49-F238E27FC236}">
-                <a16:creationId xmlns:a16="http://schemas.microsoft.com/office/drawing/2014/main" id="{D8EA9AE7-9C35-359B-71CF-FE3ED075A0B6}"/>
-              </a:ext>
-            </a:extLst>
-          </p:cNvPr>
+              <a:t>FDBK</a:t>
+            </a:r>
+          </a:p>
+          <a:p>
+            <a:pPr algn="ctr"/>
+            <a:r>
+              <a:rPr lang="en-US" sz="1000" b="1" dirty="0">
+                <a:latin typeface="Century Gothic" panose="020B0502020202020204" pitchFamily="34" charset="0"/>
+                <a:cs typeface="Adobe Devanagari" panose="02040503050201020203" pitchFamily="18" charset="0"/>
+              </a:rPr>
+              <a:t>(Spread)</a:t>
+            </a:r>
+          </a:p>
+        </p:txBody>
+      </p:sp>
+      <p:sp>
+        <p:nvSpPr>
+          <p:cNvPr id="33" name="TextBox 32"/>
           <p:cNvSpPr txBox="1"/>
           <p:nvPr/>
         </p:nvSpPr>
@@ -31722,20 +31556,14 @@
       </p:sp>
       <p:sp>
         <p:nvSpPr>
-          <p:cNvPr id="34" name="TextBox 33">
-            <a:extLst>
-              <a:ext uri="{FF2B5EF4-FFF2-40B4-BE49-F238E27FC236}">
-                <a16:creationId xmlns:a16="http://schemas.microsoft.com/office/drawing/2014/main" id="{CD7E9FC9-D3E2-6B06-632C-14B2F00FCE41}"/>
-              </a:ext>
-            </a:extLst>
-          </p:cNvPr>
+          <p:cNvPr id="34" name="TextBox 33"/>
           <p:cNvSpPr txBox="1"/>
           <p:nvPr/>
         </p:nvSpPr>
         <p:spPr>
           <a:xfrm rot="16200000">
-            <a:off x="4864727" y="4069731"/>
-            <a:ext cx="559769" cy="461665"/>
+            <a:off x="4879954" y="4069731"/>
+            <a:ext cx="529312" cy="461665"/>
           </a:xfrm>
           <a:prstGeom prst="rect">
             <a:avLst/>
@@ -31750,55 +31578,60 @@
           <a:p>
             <a:pPr algn="ctr"/>
             <a:r>
-              <a:rPr lang="en-US" sz="800" b="1" dirty="0">
+              <a:rPr lang="en-US" sz="800" b="1" dirty="0" smtClean="0">
                 <a:latin typeface="Century Gothic" panose="020B0502020202020204" pitchFamily="34" charset="0"/>
                 <a:cs typeface="Adobe Devanagari" panose="02040503050201020203" pitchFamily="18" charset="0"/>
               </a:rPr>
-              <a:t>Quarter</a:t>
-            </a:r>
-          </a:p>
-          <a:p>
-            <a:pPr algn="ctr"/>
-            <a:r>
-              <a:rPr lang="en-US" sz="800" b="1" dirty="0">
+              <a:t>Oct Up</a:t>
+            </a:r>
+          </a:p>
+          <a:p>
+            <a:pPr algn="ctr"/>
+            <a:r>
+              <a:rPr lang="en-US" sz="800" b="1" dirty="0" smtClean="0">
                 <a:latin typeface="Century Gothic" panose="020B0502020202020204" pitchFamily="34" charset="0"/>
                 <a:cs typeface="Adobe Devanagari" panose="02040503050201020203" pitchFamily="18" charset="0"/>
               </a:rPr>
-              <a:t>Dot 8</a:t>
-            </a:r>
-            <a:r>
-              <a:rPr lang="en-US" sz="800" b="1" baseline="30000" dirty="0">
+              <a:t>Oct </a:t>
+            </a:r>
+            <a:r>
+              <a:rPr lang="en-US" sz="800" b="1" dirty="0" err="1" smtClean="0">
                 <a:latin typeface="Century Gothic" panose="020B0502020202020204" pitchFamily="34" charset="0"/>
                 <a:cs typeface="Adobe Devanagari" panose="02040503050201020203" pitchFamily="18" charset="0"/>
               </a:rPr>
-              <a:t>th</a:t>
+              <a:t>Dn</a:t>
+            </a:r>
+            <a:endParaRPr lang="en-US" sz="800" b="1" dirty="0" smtClean="0">
+              <a:latin typeface="Century Gothic" panose="020B0502020202020204" pitchFamily="34" charset="0"/>
+              <a:cs typeface="Adobe Devanagari" panose="02040503050201020203" pitchFamily="18" charset="0"/>
+            </a:endParaRPr>
+          </a:p>
+          <a:p>
+            <a:pPr algn="ctr"/>
+            <a:r>
+              <a:rPr lang="en-US" sz="800" b="1" dirty="0" smtClean="0">
+                <a:latin typeface="Century Gothic" panose="020B0502020202020204" pitchFamily="34" charset="0"/>
+                <a:cs typeface="Adobe Devanagari" panose="02040503050201020203" pitchFamily="18" charset="0"/>
+              </a:rPr>
+              <a:t>Up/</a:t>
+            </a:r>
+            <a:r>
+              <a:rPr lang="en-US" sz="800" b="1" dirty="0" err="1" smtClean="0">
+                <a:latin typeface="Century Gothic" panose="020B0502020202020204" pitchFamily="34" charset="0"/>
+                <a:cs typeface="Adobe Devanagari" panose="02040503050201020203" pitchFamily="18" charset="0"/>
+              </a:rPr>
+              <a:t>Dn</a:t>
             </a:r>
             <a:endParaRPr lang="en-US" sz="800" b="1" dirty="0">
               <a:latin typeface="Century Gothic" panose="020B0502020202020204" pitchFamily="34" charset="0"/>
               <a:cs typeface="Adobe Devanagari" panose="02040503050201020203" pitchFamily="18" charset="0"/>
             </a:endParaRPr>
           </a:p>
-          <a:p>
-            <a:pPr algn="ctr"/>
-            <a:r>
-              <a:rPr lang="en-US" sz="800" b="1" dirty="0">
-                <a:latin typeface="Century Gothic" panose="020B0502020202020204" pitchFamily="34" charset="0"/>
-                <a:cs typeface="Adobe Devanagari" panose="02040503050201020203" pitchFamily="18" charset="0"/>
-              </a:rPr>
-              <a:t>8th</a:t>
-            </a:r>
-          </a:p>
-        </p:txBody>
-      </p:sp>
-      <p:sp>
-        <p:nvSpPr>
-          <p:cNvPr id="35" name="TextBox 34">
-            <a:extLst>
-              <a:ext uri="{FF2B5EF4-FFF2-40B4-BE49-F238E27FC236}">
-                <a16:creationId xmlns:a16="http://schemas.microsoft.com/office/drawing/2014/main" id="{ED039301-F7C7-483F-8DC0-8D66B03A05D7}"/>
-              </a:ext>
-            </a:extLst>
-          </p:cNvPr>
+        </p:txBody>
+      </p:sp>
+      <p:sp>
+        <p:nvSpPr>
+          <p:cNvPr id="35" name="TextBox 34"/>
           <p:cNvSpPr txBox="1"/>
           <p:nvPr/>
         </p:nvSpPr>
@@ -31820,35 +31653,25 @@
           <a:p>
             <a:pPr algn="ctr"/>
             <a:r>
-              <a:rPr lang="en-US" sz="2000" b="1" dirty="0" err="1">
+              <a:rPr lang="en-US" sz="2000" b="1" dirty="0">
                 <a:latin typeface="Broadway" panose="04040905080B02020502" pitchFamily="82" charset="0"/>
                 <a:cs typeface="Adobe Devanagari" panose="02040503050201020203" pitchFamily="18" charset="0"/>
               </a:rPr>
-              <a:t>Balnea</a:t>
-            </a:r>
-            <a:endParaRPr lang="en-US" sz="2000" b="1" dirty="0">
-              <a:latin typeface="Broadway" panose="04040905080B02020502" pitchFamily="82" charset="0"/>
-              <a:cs typeface="Adobe Devanagari" panose="02040503050201020203" pitchFamily="18" charset="0"/>
-            </a:endParaRPr>
-          </a:p>
-        </p:txBody>
-      </p:sp>
-      <p:sp>
-        <p:nvSpPr>
-          <p:cNvPr id="36" name="TextBox 35">
-            <a:extLst>
-              <a:ext uri="{FF2B5EF4-FFF2-40B4-BE49-F238E27FC236}">
-                <a16:creationId xmlns:a16="http://schemas.microsoft.com/office/drawing/2014/main" id="{8A38927E-98AE-7000-55EC-95F812600D46}"/>
-              </a:ext>
-            </a:extLst>
-          </p:cNvPr>
+              <a:t>Uranus</a:t>
+            </a:r>
+          </a:p>
+        </p:txBody>
+      </p:sp>
+      <p:sp>
+        <p:nvSpPr>
+          <p:cNvPr id="36" name="TextBox 35"/>
           <p:cNvSpPr txBox="1"/>
           <p:nvPr/>
         </p:nvSpPr>
         <p:spPr>
           <a:xfrm>
-            <a:off x="5431077" y="4916279"/>
-            <a:ext cx="1064714" cy="400110"/>
+            <a:off x="5495193" y="4916279"/>
+            <a:ext cx="936475" cy="400110"/>
           </a:xfrm>
           <a:prstGeom prst="rect">
             <a:avLst/>
@@ -31867,7 +31690,7 @@
                 <a:latin typeface="Century Gothic" panose="020B0502020202020204" pitchFamily="34" charset="0"/>
                 <a:cs typeface="Adobe Devanagari" panose="02040503050201020203" pitchFamily="18" charset="0"/>
               </a:rPr>
-              <a:t>Digital Delay /</a:t>
+              <a:t>Granular </a:t>
             </a:r>
           </a:p>
           <a:p>
@@ -31877,20 +31700,14 @@
                 <a:latin typeface="Century Gothic" panose="020B0502020202020204" pitchFamily="34" charset="0"/>
                 <a:cs typeface="Adobe Devanagari" panose="02040503050201020203" pitchFamily="18" charset="0"/>
               </a:rPr>
-              <a:t>Pitch Shifter</a:t>
-            </a:r>
-          </a:p>
-        </p:txBody>
-      </p:sp>
-      <p:sp>
-        <p:nvSpPr>
-          <p:cNvPr id="37" name="Oval 36">
-            <a:extLst>
-              <a:ext uri="{FF2B5EF4-FFF2-40B4-BE49-F238E27FC236}">
-                <a16:creationId xmlns:a16="http://schemas.microsoft.com/office/drawing/2014/main" id="{ED03B559-2533-701E-6F60-4E244CBBF45D}"/>
-              </a:ext>
-            </a:extLst>
-          </p:cNvPr>
+              <a:t>Delay/Synth</a:t>
+            </a:r>
+          </a:p>
+        </p:txBody>
+      </p:sp>
+      <p:sp>
+        <p:nvSpPr>
+          <p:cNvPr id="37" name="Oval 36"/>
           <p:cNvSpPr/>
           <p:nvPr/>
         </p:nvSpPr>
@@ -31935,13 +31752,7 @@
       </p:sp>
       <p:sp>
         <p:nvSpPr>
-          <p:cNvPr id="38" name="Flowchart: Terminator 37">
-            <a:extLst>
-              <a:ext uri="{FF2B5EF4-FFF2-40B4-BE49-F238E27FC236}">
-                <a16:creationId xmlns:a16="http://schemas.microsoft.com/office/drawing/2014/main" id="{0434C4ED-F75A-CFED-EBA9-C6CAEF1A5FA2}"/>
-              </a:ext>
-            </a:extLst>
-          </p:cNvPr>
+          <p:cNvPr id="38" name="Flowchart: Terminator 37"/>
           <p:cNvSpPr/>
           <p:nvPr/>
         </p:nvSpPr>
@@ -31986,13 +31797,7 @@
       </p:sp>
       <p:sp>
         <p:nvSpPr>
-          <p:cNvPr id="39" name="Oval 38">
-            <a:extLst>
-              <a:ext uri="{FF2B5EF4-FFF2-40B4-BE49-F238E27FC236}">
-                <a16:creationId xmlns:a16="http://schemas.microsoft.com/office/drawing/2014/main" id="{D6995659-E8A4-A384-9EAD-4D75301B2DAB}"/>
-              </a:ext>
-            </a:extLst>
-          </p:cNvPr>
+          <p:cNvPr id="39" name="Oval 38"/>
           <p:cNvSpPr/>
           <p:nvPr/>
         </p:nvSpPr>
@@ -32037,13 +31842,7 @@
       </p:sp>
       <p:sp>
         <p:nvSpPr>
-          <p:cNvPr id="40" name="Flowchart: Terminator 39">
-            <a:extLst>
-              <a:ext uri="{FF2B5EF4-FFF2-40B4-BE49-F238E27FC236}">
-                <a16:creationId xmlns:a16="http://schemas.microsoft.com/office/drawing/2014/main" id="{31CBECC7-5BAC-EFAC-1976-0BAAADFA9CFB}"/>
-              </a:ext>
-            </a:extLst>
-          </p:cNvPr>
+          <p:cNvPr id="40" name="Flowchart: Terminator 39"/>
           <p:cNvSpPr/>
           <p:nvPr/>
         </p:nvSpPr>
@@ -32088,20 +31887,14 @@
       </p:sp>
       <p:sp>
         <p:nvSpPr>
-          <p:cNvPr id="47" name="TextBox 46">
-            <a:extLst>
-              <a:ext uri="{FF2B5EF4-FFF2-40B4-BE49-F238E27FC236}">
-                <a16:creationId xmlns:a16="http://schemas.microsoft.com/office/drawing/2014/main" id="{A041F2EF-327D-EF1A-88BA-3944F4DF6F1A}"/>
-              </a:ext>
-            </a:extLst>
-          </p:cNvPr>
+          <p:cNvPr id="41" name="TextBox 40"/>
           <p:cNvSpPr txBox="1"/>
           <p:nvPr/>
         </p:nvSpPr>
         <p:spPr>
-          <a:xfrm>
-            <a:off x="6336766" y="5574572"/>
-            <a:ext cx="811441" cy="246221"/>
+          <a:xfrm rot="16200000">
+            <a:off x="5678838" y="4088169"/>
+            <a:ext cx="556563" cy="461665"/>
           </a:xfrm>
           <a:prstGeom prst="rect">
             <a:avLst/>
@@ -32116,31 +31909,256 @@
           <a:p>
             <a:pPr algn="ctr"/>
             <a:r>
+              <a:rPr lang="en-US" sz="800" b="1" dirty="0">
+                <a:latin typeface="Century Gothic" panose="020B0502020202020204" pitchFamily="34" charset="0"/>
+                <a:cs typeface="Adobe Devanagari" panose="02040503050201020203" pitchFamily="18" charset="0"/>
+              </a:rPr>
+              <a:t>Smooth</a:t>
+            </a:r>
+          </a:p>
+          <a:p>
+            <a:pPr algn="ctr"/>
+            <a:r>
+              <a:rPr lang="en-US" sz="800" b="1" dirty="0" smtClean="0">
+                <a:latin typeface="Century Gothic" panose="020B0502020202020204" pitchFamily="34" charset="0"/>
+                <a:cs typeface="Adobe Devanagari" panose="02040503050201020203" pitchFamily="18" charset="0"/>
+              </a:rPr>
+              <a:t>Slow At</a:t>
+            </a:r>
+            <a:endParaRPr lang="en-US" sz="800" b="1" dirty="0">
+              <a:latin typeface="Century Gothic" panose="020B0502020202020204" pitchFamily="34" charset="0"/>
+              <a:cs typeface="Adobe Devanagari" panose="02040503050201020203" pitchFamily="18" charset="0"/>
+            </a:endParaRPr>
+          </a:p>
+          <a:p>
+            <a:pPr algn="ctr"/>
+            <a:r>
+              <a:rPr lang="en-US" sz="800" b="1" dirty="0" smtClean="0">
+                <a:latin typeface="Century Gothic" panose="020B0502020202020204" pitchFamily="34" charset="0"/>
+                <a:cs typeface="Adobe Devanagari" panose="02040503050201020203" pitchFamily="18" charset="0"/>
+              </a:rPr>
+              <a:t>Fast At</a:t>
+            </a:r>
+            <a:endParaRPr lang="en-US" sz="800" b="1" dirty="0">
+              <a:latin typeface="Century Gothic" panose="020B0502020202020204" pitchFamily="34" charset="0"/>
+              <a:cs typeface="Adobe Devanagari" panose="02040503050201020203" pitchFamily="18" charset="0"/>
+            </a:endParaRPr>
+          </a:p>
+        </p:txBody>
+      </p:sp>
+      <p:sp>
+        <p:nvSpPr>
+          <p:cNvPr id="42" name="TextBox 41"/>
+          <p:cNvSpPr txBox="1"/>
+          <p:nvPr/>
+        </p:nvSpPr>
+        <p:spPr>
+          <a:xfrm rot="16200000">
+            <a:off x="6566837" y="4078069"/>
+            <a:ext cx="452368" cy="461665"/>
+          </a:xfrm>
+          <a:prstGeom prst="rect">
+            <a:avLst/>
+          </a:prstGeom>
+          <a:noFill/>
+        </p:spPr>
+        <p:txBody>
+          <a:bodyPr wrap="none" rtlCol="0">
+            <a:spAutoFit/>
+          </a:bodyPr>
+          <a:lstStyle/>
+          <a:p>
+            <a:pPr algn="ctr"/>
+            <a:r>
+              <a:rPr lang="en-US" sz="800" b="1" dirty="0">
+                <a:latin typeface="Century Gothic" panose="020B0502020202020204" pitchFamily="34" charset="0"/>
+                <a:cs typeface="Adobe Devanagari" panose="02040503050201020203" pitchFamily="18" charset="0"/>
+              </a:rPr>
+              <a:t>None</a:t>
+            </a:r>
+          </a:p>
+          <a:p>
+            <a:pPr algn="ctr"/>
+            <a:r>
+              <a:rPr lang="en-US" sz="800" b="1" dirty="0">
+                <a:latin typeface="Century Gothic" panose="020B0502020202020204" pitchFamily="34" charset="0"/>
+                <a:cs typeface="Adobe Devanagari" panose="02040503050201020203" pitchFamily="18" charset="0"/>
+              </a:rPr>
+              <a:t>Gran</a:t>
+            </a:r>
+          </a:p>
+          <a:p>
+            <a:pPr algn="ctr"/>
+            <a:r>
+              <a:rPr lang="en-US" sz="800" b="1" dirty="0">
+                <a:latin typeface="Century Gothic" panose="020B0502020202020204" pitchFamily="34" charset="0"/>
+                <a:cs typeface="Adobe Devanagari" panose="02040503050201020203" pitchFamily="18" charset="0"/>
+              </a:rPr>
+              <a:t>FM</a:t>
+            </a:r>
+          </a:p>
+        </p:txBody>
+      </p:sp>
+      <p:sp>
+        <p:nvSpPr>
+          <p:cNvPr id="43" name="TextBox 42"/>
+          <p:cNvSpPr txBox="1"/>
+          <p:nvPr/>
+        </p:nvSpPr>
+        <p:spPr>
+          <a:xfrm>
+            <a:off x="4814940" y="3590760"/>
+            <a:ext cx="750526" cy="230832"/>
+          </a:xfrm>
+          <a:prstGeom prst="rect">
+            <a:avLst/>
+          </a:prstGeom>
+          <a:noFill/>
+        </p:spPr>
+        <p:txBody>
+          <a:bodyPr wrap="none" rtlCol="0">
+            <a:spAutoFit/>
+          </a:bodyPr>
+          <a:lstStyle/>
+          <a:p>
+            <a:pPr algn="ctr"/>
+            <a:r>
+              <a:rPr lang="en-US" sz="900" b="1" dirty="0" smtClean="0">
+                <a:latin typeface="Century Gothic" panose="020B0502020202020204" pitchFamily="34" charset="0"/>
+                <a:cs typeface="Adobe Devanagari" panose="02040503050201020203" pitchFamily="18" charset="0"/>
+              </a:rPr>
+              <a:t>Oct </a:t>
+            </a:r>
+            <a:r>
+              <a:rPr lang="en-US" sz="900" b="1" dirty="0">
+                <a:latin typeface="Century Gothic" panose="020B0502020202020204" pitchFamily="34" charset="0"/>
+                <a:cs typeface="Adobe Devanagari" panose="02040503050201020203" pitchFamily="18" charset="0"/>
+              </a:rPr>
+              <a:t>Mode</a:t>
+            </a:r>
+          </a:p>
+        </p:txBody>
+      </p:sp>
+      <p:sp>
+        <p:nvSpPr>
+          <p:cNvPr id="44" name="TextBox 43"/>
+          <p:cNvSpPr txBox="1"/>
+          <p:nvPr/>
+        </p:nvSpPr>
+        <p:spPr>
+          <a:xfrm>
+            <a:off x="5619366" y="3599277"/>
+            <a:ext cx="715260" cy="230832"/>
+          </a:xfrm>
+          <a:prstGeom prst="rect">
+            <a:avLst/>
+          </a:prstGeom>
+          <a:noFill/>
+        </p:spPr>
+        <p:txBody>
+          <a:bodyPr wrap="none" rtlCol="0">
+            <a:spAutoFit/>
+          </a:bodyPr>
+          <a:lstStyle/>
+          <a:p>
+            <a:pPr algn="ctr"/>
+            <a:r>
+              <a:rPr lang="en-US" sz="900" b="1" dirty="0">
+                <a:latin typeface="Century Gothic" panose="020B0502020202020204" pitchFamily="34" charset="0"/>
+                <a:cs typeface="Adobe Devanagari" panose="02040503050201020203" pitchFamily="18" charset="0"/>
+              </a:rPr>
+              <a:t>Grain </a:t>
+            </a:r>
+            <a:r>
+              <a:rPr lang="en-US" sz="900" b="1" dirty="0" err="1">
+                <a:latin typeface="Century Gothic" panose="020B0502020202020204" pitchFamily="34" charset="0"/>
+                <a:cs typeface="Adobe Devanagari" panose="02040503050201020203" pitchFamily="18" charset="0"/>
+              </a:rPr>
+              <a:t>Env</a:t>
+            </a:r>
+            <a:endParaRPr lang="en-US" sz="900" b="1" dirty="0">
+              <a:latin typeface="Century Gothic" panose="020B0502020202020204" pitchFamily="34" charset="0"/>
+              <a:cs typeface="Adobe Devanagari" panose="02040503050201020203" pitchFamily="18" charset="0"/>
+            </a:endParaRPr>
+          </a:p>
+        </p:txBody>
+      </p:sp>
+      <p:sp>
+        <p:nvSpPr>
+          <p:cNvPr id="45" name="TextBox 44"/>
+          <p:cNvSpPr txBox="1"/>
+          <p:nvPr/>
+        </p:nvSpPr>
+        <p:spPr>
+          <a:xfrm>
+            <a:off x="6384857" y="3601431"/>
+            <a:ext cx="845104" cy="230832"/>
+          </a:xfrm>
+          <a:prstGeom prst="rect">
+            <a:avLst/>
+          </a:prstGeom>
+          <a:noFill/>
+        </p:spPr>
+        <p:txBody>
+          <a:bodyPr wrap="none" rtlCol="0">
+            <a:spAutoFit/>
+          </a:bodyPr>
+          <a:lstStyle/>
+          <a:p>
+            <a:pPr algn="ctr"/>
+            <a:r>
+              <a:rPr lang="en-US" sz="900" b="1" dirty="0">
+                <a:latin typeface="Century Gothic" panose="020B0502020202020204" pitchFamily="34" charset="0"/>
+                <a:cs typeface="Adobe Devanagari" panose="02040503050201020203" pitchFamily="18" charset="0"/>
+              </a:rPr>
+              <a:t>Synth Mode</a:t>
+            </a:r>
+          </a:p>
+        </p:txBody>
+      </p:sp>
+      <p:sp>
+        <p:nvSpPr>
+          <p:cNvPr id="47" name="TextBox 46"/>
+          <p:cNvSpPr txBox="1"/>
+          <p:nvPr/>
+        </p:nvSpPr>
+        <p:spPr>
+          <a:xfrm>
+            <a:off x="6508286" y="5574572"/>
+            <a:ext cx="468398" cy="246221"/>
+          </a:xfrm>
+          <a:prstGeom prst="rect">
+            <a:avLst/>
+          </a:prstGeom>
+          <a:noFill/>
+        </p:spPr>
+        <p:txBody>
+          <a:bodyPr wrap="none" rtlCol="0">
+            <a:spAutoFit/>
+          </a:bodyPr>
+          <a:lstStyle/>
+          <a:p>
+            <a:pPr algn="ctr"/>
+            <a:r>
               <a:rPr lang="en-US" sz="1000" b="1" dirty="0">
                 <a:latin typeface="Century Gothic" panose="020B0502020202020204" pitchFamily="34" charset="0"/>
                 <a:cs typeface="Adobe Devanagari" panose="02040503050201020203" pitchFamily="18" charset="0"/>
               </a:rPr>
-              <a:t>Tap / Step</a:t>
-            </a:r>
-          </a:p>
-        </p:txBody>
-      </p:sp>
-      <p:sp>
-        <p:nvSpPr>
-          <p:cNvPr id="55" name="Rectangle 54">
-            <a:extLst>
-              <a:ext uri="{FF2B5EF4-FFF2-40B4-BE49-F238E27FC236}">
-                <a16:creationId xmlns:a16="http://schemas.microsoft.com/office/drawing/2014/main" id="{ED843F75-CC5A-8A2C-16A1-00AF43FA1F08}"/>
-              </a:ext>
-            </a:extLst>
-          </p:cNvPr>
+              <a:t>Hold</a:t>
+            </a:r>
+          </a:p>
+        </p:txBody>
+      </p:sp>
+      <p:sp>
+        <p:nvSpPr>
+          <p:cNvPr id="55" name="Rectangle 54"/>
           <p:cNvSpPr/>
           <p:nvPr/>
         </p:nvSpPr>
         <p:spPr>
           <a:xfrm>
             <a:off x="518160" y="1582168"/>
-            <a:ext cx="3739056" cy="1302922"/>
+            <a:ext cx="3739056" cy="1202448"/>
           </a:xfrm>
           <a:prstGeom prst="rect">
             <a:avLst/>
@@ -32172,7 +32190,7 @@
                   <a:schemeClr val="tx1"/>
                 </a:solidFill>
               </a:rPr>
-              <a:t>Mix</a:t>
+              <a:t>Size</a:t>
             </a:r>
             <a:r>
               <a:rPr lang="en-US" sz="1600" dirty="0">
@@ -32180,7 +32198,7 @@
                   <a:schemeClr val="tx1"/>
                 </a:solidFill>
               </a:rPr>
-              <a:t>: Dry/Wet Mix</a:t>
+              <a:t>: Grain size 1 to 300ms</a:t>
             </a:r>
           </a:p>
           <a:p>
@@ -32190,7 +32208,7 @@
                   <a:schemeClr val="tx1"/>
                 </a:solidFill>
               </a:rPr>
-              <a:t>LPF: </a:t>
+              <a:t>Mix: </a:t>
             </a:r>
             <a:r>
               <a:rPr lang="en-US" sz="1600" dirty="0">
@@ -32198,38 +32216,25 @@
                   <a:schemeClr val="tx1"/>
                 </a:solidFill>
               </a:rPr>
-              <a:t>Resonant Low Pass Filter </a:t>
-            </a:r>
-            <a:r>
-              <a:rPr lang="en-US" sz="1600" dirty="0" err="1">
+              <a:t>Dry/Wet Mix (Alt is stereo spread of each grain.)</a:t>
+            </a:r>
+          </a:p>
+          <a:p>
+            <a:r>
+              <a:rPr lang="en-US" sz="1600" b="1" dirty="0">
                 <a:solidFill>
                   <a:schemeClr val="tx1"/>
                 </a:solidFill>
               </a:rPr>
-              <a:t>Cuttoff</a:t>
-            </a:r>
-            <a:endParaRPr lang="en-US" sz="1600" dirty="0">
-              <a:solidFill>
-                <a:schemeClr val="tx1"/>
-              </a:solidFill>
-            </a:endParaRPr>
-          </a:p>
-          <a:p>
-            <a:r>
-              <a:rPr lang="en-US" sz="1600" b="1" dirty="0">
+              <a:t>Pitch:</a:t>
+            </a:r>
+            <a:r>
+              <a:rPr lang="en-US" sz="1600" dirty="0">
                 <a:solidFill>
                   <a:schemeClr val="tx1"/>
                 </a:solidFill>
               </a:rPr>
-              <a:t>REGEN:</a:t>
-            </a:r>
-            <a:r>
-              <a:rPr lang="en-US" sz="1600" dirty="0">
-                <a:solidFill>
-                  <a:schemeClr val="tx1"/>
-                </a:solidFill>
-              </a:rPr>
-              <a:t> Delay feedback / regen. Higher settings can oscillate out of control, very sensitive to LPF setting.</a:t>
+              <a:t> Transposition in semitones, +/- one octave, center is neutral</a:t>
             </a:r>
             <a:endParaRPr lang="en-US" sz="1600" b="1" dirty="0">
               <a:solidFill>
@@ -32241,20 +32246,14 @@
       </p:sp>
       <p:sp>
         <p:nvSpPr>
-          <p:cNvPr id="56" name="Rectangle 55">
-            <a:extLst>
-              <a:ext uri="{FF2B5EF4-FFF2-40B4-BE49-F238E27FC236}">
-                <a16:creationId xmlns:a16="http://schemas.microsoft.com/office/drawing/2014/main" id="{F73FF264-5C63-09BB-B3D1-56D806651DE1}"/>
-              </a:ext>
-            </a:extLst>
-          </p:cNvPr>
-          <p:cNvSpPr/>
-          <p:nvPr/>
-        </p:nvSpPr>
-        <p:spPr>
-          <a:xfrm>
-            <a:off x="7609878" y="1268497"/>
-            <a:ext cx="4264299" cy="2235737"/>
+          <p:cNvPr id="56" name="Rectangle 55"/>
+          <p:cNvSpPr/>
+          <p:nvPr/>
+        </p:nvSpPr>
+        <p:spPr>
+          <a:xfrm>
+            <a:off x="7609878" y="1882353"/>
+            <a:ext cx="4014544" cy="1267751"/>
           </a:xfrm>
           <a:prstGeom prst="rect">
             <a:avLst/>
@@ -32286,7 +32285,7 @@
                   <a:schemeClr val="tx1"/>
                 </a:solidFill>
               </a:rPr>
-              <a:t>GLIDE: </a:t>
+              <a:t>Feedback: </a:t>
             </a:r>
             <a:r>
               <a:rPr lang="en-US" sz="1600" dirty="0">
@@ -32294,7 +32293,7 @@
                   <a:schemeClr val="tx1"/>
                 </a:solidFill>
               </a:rPr>
-              <a:t>Pitch transition time between sequencer steps.</a:t>
+              <a:t>Feedback of the delay buffer.</a:t>
             </a:r>
           </a:p>
           <a:p>
@@ -32304,7 +32303,7 @@
                   <a:schemeClr val="tx1"/>
                 </a:solidFill>
               </a:rPr>
-              <a:t>INT 1</a:t>
+              <a:t>Width</a:t>
             </a:r>
             <a:r>
               <a:rPr lang="en-US" sz="1600" dirty="0">
@@ -32312,7 +32311,7 @@
                   <a:schemeClr val="tx1"/>
                 </a:solidFill>
               </a:rPr>
-              <a:t>: Sets first interval in musical increments (by changing the delay time). Alt is Mod Speed)</a:t>
+              <a:t>: Width of time in which a grain can randomly play from, 1 to 50ms </a:t>
             </a:r>
           </a:p>
           <a:p>
@@ -32322,7 +32321,7 @@
                   <a:schemeClr val="tx1"/>
                 </a:solidFill>
               </a:rPr>
-              <a:t>INT 2</a:t>
+              <a:t>Speed</a:t>
             </a:r>
             <a:r>
               <a:rPr lang="en-US" sz="1600" dirty="0">
@@ -32330,97 +32329,7 @@
                   <a:schemeClr val="tx1"/>
                 </a:solidFill>
               </a:rPr>
-              <a:t>: Sets Second interval in musical increments (by changing the delay time). Alt is Mod Depth</a:t>
-            </a:r>
-          </a:p>
-          <a:p>
-            <a:r>
-              <a:rPr lang="en-US" sz="1600" dirty="0">
-                <a:solidFill>
-                  <a:schemeClr val="tx1"/>
-                </a:solidFill>
-              </a:rPr>
-              <a:t>Intervals: -2Oct, -Oct and 5</a:t>
-            </a:r>
-            <a:r>
-              <a:rPr lang="en-US" sz="1600" baseline="30000" dirty="0">
-                <a:solidFill>
-                  <a:schemeClr val="tx1"/>
-                </a:solidFill>
-              </a:rPr>
-              <a:t>th</a:t>
-            </a:r>
-            <a:r>
-              <a:rPr lang="en-US" sz="1600" dirty="0">
-                <a:solidFill>
-                  <a:schemeClr val="tx1"/>
-                </a:solidFill>
-              </a:rPr>
-              <a:t>, -Oct, -5</a:t>
-            </a:r>
-            <a:r>
-              <a:rPr lang="en-US" sz="1600" baseline="30000" dirty="0">
-                <a:solidFill>
-                  <a:schemeClr val="tx1"/>
-                </a:solidFill>
-              </a:rPr>
-              <a:t>th</a:t>
-            </a:r>
-            <a:r>
-              <a:rPr lang="en-US" sz="1600" dirty="0">
-                <a:solidFill>
-                  <a:schemeClr val="tx1"/>
-                </a:solidFill>
-              </a:rPr>
-              <a:t>, -4</a:t>
-            </a:r>
-            <a:r>
-              <a:rPr lang="en-US" sz="1600" baseline="30000" dirty="0">
-                <a:solidFill>
-                  <a:schemeClr val="tx1"/>
-                </a:solidFill>
-              </a:rPr>
-              <a:t>th</a:t>
-            </a:r>
-            <a:r>
-              <a:rPr lang="en-US" sz="1600" dirty="0">
-                <a:solidFill>
-                  <a:schemeClr val="tx1"/>
-                </a:solidFill>
-              </a:rPr>
-              <a:t>, Off, 4</a:t>
-            </a:r>
-            <a:r>
-              <a:rPr lang="en-US" sz="1600" baseline="30000" dirty="0">
-                <a:solidFill>
-                  <a:schemeClr val="tx1"/>
-                </a:solidFill>
-              </a:rPr>
-              <a:t>th</a:t>
-            </a:r>
-            <a:r>
-              <a:rPr lang="en-US" sz="1600" dirty="0">
-                <a:solidFill>
-                  <a:schemeClr val="tx1"/>
-                </a:solidFill>
-              </a:rPr>
-              <a:t>, 5</a:t>
-            </a:r>
-            <a:r>
-              <a:rPr lang="en-US" sz="1600" baseline="30000" dirty="0">
-                <a:solidFill>
-                  <a:schemeClr val="tx1"/>
-                </a:solidFill>
-              </a:rPr>
-              <a:t>th</a:t>
-            </a:r>
-            <a:r>
-              <a:rPr lang="en-US" sz="1600" dirty="0">
-                <a:solidFill>
-                  <a:schemeClr val="tx1"/>
-                </a:solidFill>
-              </a:rPr>
-              <a:t>, Oct, Oct and 5th, 2Oct</a:t>
+              <a:t>: Grain speed -2x to 2x, center is 0</a:t>
             </a:r>
           </a:p>
           <a:p>
@@ -32434,20 +32343,14 @@
       </p:sp>
       <p:sp>
         <p:nvSpPr>
-          <p:cNvPr id="57" name="Rectangle 56">
-            <a:extLst>
-              <a:ext uri="{FF2B5EF4-FFF2-40B4-BE49-F238E27FC236}">
-                <a16:creationId xmlns:a16="http://schemas.microsoft.com/office/drawing/2014/main" id="{A880F56E-CDCF-3FF3-BB97-254219359471}"/>
-              </a:ext>
-            </a:extLst>
-          </p:cNvPr>
-          <p:cNvSpPr/>
-          <p:nvPr/>
-        </p:nvSpPr>
-        <p:spPr>
-          <a:xfrm>
-            <a:off x="281990" y="3013236"/>
-            <a:ext cx="4014063" cy="1202448"/>
+          <p:cNvPr id="57" name="Rectangle 56"/>
+          <p:cNvSpPr/>
+          <p:nvPr/>
+        </p:nvSpPr>
+        <p:spPr>
+          <a:xfrm>
+            <a:off x="281990" y="2840715"/>
+            <a:ext cx="4311425" cy="1374969"/>
           </a:xfrm>
           <a:prstGeom prst="rect">
             <a:avLst/>
@@ -32479,7 +32382,7 @@
                   <a:schemeClr val="bg1"/>
                 </a:solidFill>
               </a:rPr>
-              <a:t>Base Sequencer Step Length</a:t>
+              <a:t>Grain Octave Mode</a:t>
             </a:r>
           </a:p>
           <a:p>
@@ -32489,7 +32392,7 @@
                   <a:schemeClr val="bg1"/>
                 </a:solidFill>
               </a:rPr>
-              <a:t>  Left: Quarter Note (Same as Tap Tempo)</a:t>
+              <a:t>  Left: Normal with Oct up</a:t>
             </a:r>
           </a:p>
           <a:p>
@@ -32499,7 +32402,7 @@
                   <a:schemeClr val="bg1"/>
                 </a:solidFill>
               </a:rPr>
-              <a:t>  Center: Dotted Eighth Note</a:t>
+              <a:t>  Center: Normal with Oct down</a:t>
             </a:r>
           </a:p>
           <a:p>
@@ -32509,27 +32412,21 @@
                   <a:schemeClr val="bg1"/>
                 </a:solidFill>
               </a:rPr>
-              <a:t>  Right:  Eighth Note</a:t>
-            </a:r>
-          </a:p>
-        </p:txBody>
-      </p:sp>
-      <p:sp>
-        <p:nvSpPr>
-          <p:cNvPr id="60" name="Rectangle 59">
-            <a:extLst>
-              <a:ext uri="{FF2B5EF4-FFF2-40B4-BE49-F238E27FC236}">
-                <a16:creationId xmlns:a16="http://schemas.microsoft.com/office/drawing/2014/main" id="{12ED4E5F-BFF6-92EB-D3DB-85F61D54B583}"/>
-              </a:ext>
-            </a:extLst>
-          </p:cNvPr>
-          <p:cNvSpPr/>
-          <p:nvPr/>
-        </p:nvSpPr>
-        <p:spPr>
-          <a:xfrm>
-            <a:off x="7473735" y="4691038"/>
-            <a:ext cx="4579003" cy="1174775"/>
+              <a:t>  Right:  Oct Up and Oct down</a:t>
+            </a:r>
+          </a:p>
+        </p:txBody>
+      </p:sp>
+      <p:sp>
+        <p:nvSpPr>
+          <p:cNvPr id="58" name="Rectangle 57"/>
+          <p:cNvSpPr/>
+          <p:nvPr/>
+        </p:nvSpPr>
+        <p:spPr>
+          <a:xfrm>
+            <a:off x="683491" y="4472176"/>
+            <a:ext cx="3602397" cy="1141089"/>
           </a:xfrm>
           <a:prstGeom prst="rect">
             <a:avLst/>
@@ -32541,6 +32438,158 @@
               <a:shade val="50000"/>
             </a:schemeClr>
           </a:lnRef>
+          <a:fillRef idx="1003">
+            <a:schemeClr val="dk1"/>
+          </a:fillRef>
+          <a:effectRef idx="0">
+            <a:schemeClr val="dk1"/>
+          </a:effectRef>
+          <a:fontRef idx="minor">
+            <a:schemeClr val="lt1"/>
+          </a:fontRef>
+        </p:style>
+        <p:txBody>
+          <a:bodyPr rtlCol="0" anchor="ctr"/>
+          <a:lstStyle/>
+          <a:p>
+            <a:r>
+              <a:rPr lang="en-US" sz="1600" b="1" dirty="0">
+                <a:solidFill>
+                  <a:schemeClr val="bg1"/>
+                </a:solidFill>
+              </a:rPr>
+              <a:t>Grain Envelope</a:t>
+            </a:r>
+          </a:p>
+          <a:p>
+            <a:r>
+              <a:rPr lang="en-US" sz="1600" b="1" dirty="0">
+                <a:solidFill>
+                  <a:schemeClr val="bg1"/>
+                </a:solidFill>
+              </a:rPr>
+              <a:t>  Left:  Cosine</a:t>
+            </a:r>
+          </a:p>
+          <a:p>
+            <a:r>
+              <a:rPr lang="en-US" sz="1600" b="1" dirty="0">
+                <a:solidFill>
+                  <a:schemeClr val="bg1"/>
+                </a:solidFill>
+              </a:rPr>
+              <a:t>  Center: Slow attack-release linear</a:t>
+            </a:r>
+          </a:p>
+          <a:p>
+            <a:r>
+              <a:rPr lang="en-US" sz="1600" b="1" dirty="0">
+                <a:solidFill>
+                  <a:schemeClr val="bg1"/>
+                </a:solidFill>
+              </a:rPr>
+              <a:t>  Right: Fast attack-release linear</a:t>
+            </a:r>
+          </a:p>
+        </p:txBody>
+      </p:sp>
+      <p:sp>
+        <p:nvSpPr>
+          <p:cNvPr id="59" name="Rectangle 58"/>
+          <p:cNvSpPr/>
+          <p:nvPr/>
+        </p:nvSpPr>
+        <p:spPr>
+          <a:xfrm>
+            <a:off x="7628237" y="3306313"/>
+            <a:ext cx="3880272" cy="1224432"/>
+          </a:xfrm>
+          <a:prstGeom prst="rect">
+            <a:avLst/>
+          </a:prstGeom>
+        </p:spPr>
+        <p:style>
+          <a:lnRef idx="2">
+            <a:schemeClr val="dk1">
+              <a:shade val="50000"/>
+            </a:schemeClr>
+          </a:lnRef>
+          <a:fillRef idx="1003">
+            <a:schemeClr val="dk1"/>
+          </a:fillRef>
+          <a:effectRef idx="0">
+            <a:schemeClr val="dk1"/>
+          </a:effectRef>
+          <a:fontRef idx="minor">
+            <a:schemeClr val="lt1"/>
+          </a:fontRef>
+        </p:style>
+        <p:txBody>
+          <a:bodyPr rtlCol="0" anchor="ctr"/>
+          <a:lstStyle/>
+          <a:p>
+            <a:r>
+              <a:rPr lang="en-US" sz="1600" b="1" dirty="0">
+                <a:solidFill>
+                  <a:schemeClr val="bg1"/>
+                </a:solidFill>
+              </a:rPr>
+              <a:t>Synth Mode</a:t>
+            </a:r>
+          </a:p>
+          <a:p>
+            <a:r>
+              <a:rPr lang="en-US" sz="1600" b="1" dirty="0">
+                <a:solidFill>
+                  <a:schemeClr val="bg1"/>
+                </a:solidFill>
+              </a:rPr>
+              <a:t>  Left:  Audio input</a:t>
+            </a:r>
+          </a:p>
+          <a:p>
+            <a:r>
+              <a:rPr lang="en-US" sz="1600" b="1" dirty="0">
+                <a:solidFill>
+                  <a:schemeClr val="bg1"/>
+                </a:solidFill>
+              </a:rPr>
+              <a:t>  Center: Granular Monophonic Synth</a:t>
+            </a:r>
+          </a:p>
+          <a:p>
+            <a:r>
+              <a:rPr lang="en-US" sz="1600" b="1" dirty="0">
+                <a:solidFill>
+                  <a:schemeClr val="bg1"/>
+                </a:solidFill>
+              </a:rPr>
+              <a:t>  Right:  Polyphonic FM Synth (12 note polyphony)</a:t>
+            </a:r>
+          </a:p>
+        </p:txBody>
+      </p:sp>
+      <p:sp>
+        <p:nvSpPr>
+          <p:cNvPr id="60" name="Rectangle 59"/>
+          <p:cNvSpPr/>
+          <p:nvPr/>
+        </p:nvSpPr>
+        <p:spPr>
+          <a:xfrm>
+            <a:off x="7628236" y="4711922"/>
+            <a:ext cx="3720483" cy="810200"/>
+          </a:xfrm>
+          <a:prstGeom prst="rect">
+            <a:avLst/>
+          </a:prstGeom>
+        </p:spPr>
+        <p:style>
+          <a:lnRef idx="2">
+            <a:schemeClr val="dk1">
+              <a:shade val="50000"/>
+            </a:schemeClr>
+          </a:lnRef>
           <a:fillRef idx="1001">
             <a:schemeClr val="dk2"/>
           </a:fillRef>
@@ -32571,7 +32620,7 @@
                   <a:schemeClr val="bg1"/>
                 </a:solidFill>
               </a:rPr>
-              <a:t>  1: Stereo / Miso (off is MISO) </a:t>
+              <a:t>  1: N/A     3. N/A</a:t>
             </a:r>
           </a:p>
           <a:p>
@@ -32581,40 +32630,14 @@
                   <a:schemeClr val="bg1"/>
                 </a:solidFill>
               </a:rPr>
-              <a:t>2: Reverse Mode                         </a:t>
-            </a:r>
-          </a:p>
-          <a:p>
-            <a:r>
-              <a:rPr lang="en-US" sz="1600" b="1" dirty="0">
-                <a:solidFill>
-                  <a:schemeClr val="bg1"/>
-                </a:solidFill>
-              </a:rPr>
-              <a:t>3. Dissonant Mode</a:t>
-            </a:r>
-          </a:p>
-          <a:p>
-            <a:r>
-              <a:rPr lang="en-US" sz="1600" b="1" dirty="0">
-                <a:solidFill>
-                  <a:schemeClr val="bg1"/>
-                </a:solidFill>
-              </a:rPr>
-              <a:t>4. Chromatic Mode (overrides Dissonant Mode)</a:t>
-            </a:r>
-          </a:p>
-        </p:txBody>
-      </p:sp>
-      <p:sp>
-        <p:nvSpPr>
-          <p:cNvPr id="61" name="Rectangle 60">
-            <a:extLst>
-              <a:ext uri="{FF2B5EF4-FFF2-40B4-BE49-F238E27FC236}">
-                <a16:creationId xmlns:a16="http://schemas.microsoft.com/office/drawing/2014/main" id="{8EADB182-BFAE-CFCA-2710-9C826B411491}"/>
-              </a:ext>
-            </a:extLst>
-          </p:cNvPr>
+              <a:t>  2: N/A     4. N/A</a:t>
+            </a:r>
+          </a:p>
+        </p:txBody>
+      </p:sp>
+      <p:sp>
+        <p:nvSpPr>
+          <p:cNvPr id="61" name="Rectangle 60"/>
           <p:cNvSpPr/>
           <p:nvPr/>
         </p:nvSpPr>
@@ -32660,20 +32683,14 @@
       </p:sp>
       <p:sp>
         <p:nvSpPr>
-          <p:cNvPr id="63" name="Rectangle 62">
-            <a:extLst>
-              <a:ext uri="{FF2B5EF4-FFF2-40B4-BE49-F238E27FC236}">
-                <a16:creationId xmlns:a16="http://schemas.microsoft.com/office/drawing/2014/main" id="{37DC3E28-4C19-F320-30C9-1381E58B757F}"/>
-              </a:ext>
-            </a:extLst>
-          </p:cNvPr>
-          <p:cNvSpPr/>
-          <p:nvPr/>
-        </p:nvSpPr>
-        <p:spPr>
-          <a:xfrm>
-            <a:off x="236579" y="87047"/>
-            <a:ext cx="7649546" cy="1083960"/>
+          <p:cNvPr id="63" name="Rectangle 62"/>
+          <p:cNvSpPr/>
+          <p:nvPr/>
+        </p:nvSpPr>
+        <p:spPr>
+          <a:xfrm>
+            <a:off x="531745" y="176575"/>
+            <a:ext cx="3624619" cy="1149101"/>
           </a:xfrm>
           <a:prstGeom prst="rect">
             <a:avLst/>
@@ -32699,56 +32716,50 @@
           <a:lstStyle/>
           <a:p>
             <a:r>
-              <a:rPr lang="en-US" sz="2000" b="1" dirty="0" err="1">
+              <a:rPr lang="en-US" sz="2800" b="1" dirty="0">
                 <a:solidFill>
                   <a:schemeClr val="tx1"/>
                 </a:solidFill>
               </a:rPr>
-              <a:t>Balnea</a:t>
-            </a:r>
-            <a:r>
-              <a:rPr lang="en-US" sz="2000" b="1" dirty="0">
+              <a:t>Uranus </a:t>
+            </a:r>
+            <a:r>
+              <a:rPr lang="en-US" sz="1600" b="1" dirty="0">
                 <a:solidFill>
                   <a:schemeClr val="tx1"/>
                 </a:solidFill>
               </a:rPr>
-              <a:t> </a:t>
-            </a:r>
-            <a:r>
-              <a:rPr lang="en-US" sz="1400" b="1" dirty="0">
+              <a:t>is a </a:t>
+            </a:r>
+            <a:r>
+              <a:rPr lang="en-US" sz="2800" b="1" dirty="0">
                 <a:solidFill>
                   <a:schemeClr val="tx1"/>
                 </a:solidFill>
               </a:rPr>
-              <a:t>is a Digital Delay And Pitch Shifter inspired by the Chase Bliss Thermae pedal. </a:t>
-            </a:r>
-            <a:r>
-              <a:rPr lang="en-US" sz="1200" b="1" dirty="0">
+              <a:t>Granular </a:t>
+            </a:r>
+            <a:r>
+              <a:rPr lang="en-US" sz="1600" b="1" dirty="0">
                 <a:solidFill>
                   <a:schemeClr val="tx1"/>
                 </a:solidFill>
               </a:rPr>
-              <a:t>This design mostly follows the Thermae controls, minus the dipswitch modulation features and in depth customization. Because it’s digital however, it can do a few things Thermae can’t do, such as Stereo and Reverse Delay, and adds some unique interval modes. It leans into the crunchy side of digital audio time shifting and embraces aliasing and distortion, rather than trying to avoid it.</a:t>
-            </a:r>
-          </a:p>
-        </p:txBody>
-      </p:sp>
-      <p:sp>
-        <p:nvSpPr>
-          <p:cNvPr id="64" name="Rectangle 63">
-            <a:extLst>
-              <a:ext uri="{FF2B5EF4-FFF2-40B4-BE49-F238E27FC236}">
-                <a16:creationId xmlns:a16="http://schemas.microsoft.com/office/drawing/2014/main" id="{2B348D26-1379-AD0D-2394-8BC98E09CE1A}"/>
-              </a:ext>
-            </a:extLst>
-          </p:cNvPr>
-          <p:cNvSpPr/>
-          <p:nvPr/>
-        </p:nvSpPr>
-        <p:spPr>
-          <a:xfrm>
-            <a:off x="8130649" y="57795"/>
-            <a:ext cx="3624619" cy="1023238"/>
+              <a:t>delay and synth. Think of this pedal as a sound laboratory.</a:t>
+            </a:r>
+          </a:p>
+        </p:txBody>
+      </p:sp>
+      <p:sp>
+        <p:nvSpPr>
+          <p:cNvPr id="64" name="Rectangle 63"/>
+          <p:cNvSpPr/>
+          <p:nvPr/>
+        </p:nvSpPr>
+        <p:spPr>
+          <a:xfrm>
+            <a:off x="7596222" y="382276"/>
+            <a:ext cx="3496894" cy="1227678"/>
           </a:xfrm>
           <a:prstGeom prst="rect">
             <a:avLst/>
@@ -32780,6 +32791,16 @@
                 </a:solidFill>
               </a:rPr>
               <a:t>Stereo In/Out Processing</a:t>
+            </a:r>
+          </a:p>
+          <a:p>
+            <a:r>
+              <a:rPr lang="en-US" sz="1600" b="1" dirty="0">
+                <a:solidFill>
+                  <a:schemeClr val="tx1"/>
+                </a:solidFill>
+              </a:rPr>
+              <a:t>(MISO) Mono in Stereo Out</a:t>
             </a:r>
           </a:p>
           <a:p>
@@ -32793,7 +32814,7 @@
                   <a:schemeClr val="tx1"/>
                 </a:solidFill>
               </a:rPr>
-              <a:t>Expression: YES (controls LPF)</a:t>
+              <a:t>Expression: YES</a:t>
             </a:r>
           </a:p>
           <a:p>
@@ -32821,22 +32842,15 @@
                   <a:schemeClr val="tx1"/>
                 </a:solidFill>
               </a:rPr>
-              <a:t>Midi Synth mode</a:t>
+              <a:t>Two Keyboard Midi Synth modes</a:t>
             </a:r>
           </a:p>
         </p:txBody>
       </p:sp>
       <p:cxnSp>
         <p:nvCxnSpPr>
-          <p:cNvPr id="65" name="Straight Arrow Connector 64">
-            <a:extLst>
-              <a:ext uri="{FF2B5EF4-FFF2-40B4-BE49-F238E27FC236}">
-                <a16:creationId xmlns:a16="http://schemas.microsoft.com/office/drawing/2014/main" id="{C9A793F3-BC2B-EC45-4935-9A4247A4031C}"/>
-              </a:ext>
-            </a:extLst>
-          </p:cNvPr>
+          <p:cNvPr id="65" name="Straight Arrow Connector 64"/>
           <p:cNvCxnSpPr>
-            <a:cxnSpLocks/>
             <a:stCxn id="55" idx="3"/>
           </p:cNvCxnSpPr>
           <p:nvPr/>
@@ -32844,7 +32858,7 @@
         <p:spPr>
           <a:xfrm flipV="1">
             <a:off x="4257216" y="2094330"/>
-            <a:ext cx="371937" cy="139299"/>
+            <a:ext cx="371937" cy="89062"/>
           </a:xfrm>
           <a:prstGeom prst="straightConnector1">
             <a:avLst/>
@@ -32870,13 +32884,7 @@
       </p:cxnSp>
       <p:cxnSp>
         <p:nvCxnSpPr>
-          <p:cNvPr id="66" name="Straight Arrow Connector 65">
-            <a:extLst>
-              <a:ext uri="{FF2B5EF4-FFF2-40B4-BE49-F238E27FC236}">
-                <a16:creationId xmlns:a16="http://schemas.microsoft.com/office/drawing/2014/main" id="{DD86FA6A-C5F7-67F9-7F4B-09D612ADBFB5}"/>
-              </a:ext>
-            </a:extLst>
-          </p:cNvPr>
+          <p:cNvPr id="66" name="Straight Arrow Connector 65"/>
           <p:cNvCxnSpPr/>
           <p:nvPr/>
         </p:nvCxnSpPr>
@@ -32909,13 +32917,7 @@
       </p:cxnSp>
       <p:cxnSp>
         <p:nvCxnSpPr>
-          <p:cNvPr id="67" name="Straight Arrow Connector 66">
-            <a:extLst>
-              <a:ext uri="{FF2B5EF4-FFF2-40B4-BE49-F238E27FC236}">
-                <a16:creationId xmlns:a16="http://schemas.microsoft.com/office/drawing/2014/main" id="{8FF0BDFC-8AE7-924D-F2E2-A166BBA8BBDD}"/>
-              </a:ext>
-            </a:extLst>
-          </p:cNvPr>
+          <p:cNvPr id="67" name="Straight Arrow Connector 66"/>
           <p:cNvCxnSpPr/>
           <p:nvPr/>
         </p:nvCxnSpPr>
@@ -32948,13 +32950,7 @@
       </p:cxnSp>
       <p:cxnSp>
         <p:nvCxnSpPr>
-          <p:cNvPr id="68" name="Straight Arrow Connector 67">
-            <a:extLst>
-              <a:ext uri="{FF2B5EF4-FFF2-40B4-BE49-F238E27FC236}">
-                <a16:creationId xmlns:a16="http://schemas.microsoft.com/office/drawing/2014/main" id="{8FF1D203-6FA9-71BF-39C8-379B1FC30E5B}"/>
-              </a:ext>
-            </a:extLst>
-          </p:cNvPr>
+          <p:cNvPr id="68" name="Straight Arrow Connector 67"/>
           <p:cNvCxnSpPr/>
           <p:nvPr/>
         </p:nvCxnSpPr>
@@ -32987,13 +32983,7 @@
       </p:cxnSp>
       <p:cxnSp>
         <p:nvCxnSpPr>
-          <p:cNvPr id="69" name="Elbow Connector 68">
-            <a:extLst>
-              <a:ext uri="{FF2B5EF4-FFF2-40B4-BE49-F238E27FC236}">
-                <a16:creationId xmlns:a16="http://schemas.microsoft.com/office/drawing/2014/main" id="{D1DB669F-32E3-C6AC-8924-58D920610058}"/>
-              </a:ext>
-            </a:extLst>
-          </p:cNvPr>
+          <p:cNvPr id="69" name="Elbow Connector 68"/>
           <p:cNvCxnSpPr/>
           <p:nvPr/>
         </p:nvCxnSpPr>
@@ -33026,24 +33016,132 @@
           </a:fontRef>
         </p:style>
       </p:cxnSp>
+      <p:sp>
+        <p:nvSpPr>
+          <p:cNvPr id="70" name="Rectangle 69"/>
+          <p:cNvSpPr/>
+          <p:nvPr/>
+        </p:nvSpPr>
+        <p:spPr>
+          <a:xfrm>
+            <a:off x="7215630" y="4337891"/>
+            <a:ext cx="45719" cy="303523"/>
+          </a:xfrm>
+          <a:prstGeom prst="rect">
+            <a:avLst/>
+          </a:prstGeom>
+        </p:spPr>
+        <p:style>
+          <a:lnRef idx="2">
+            <a:schemeClr val="accent1">
+              <a:shade val="50000"/>
+            </a:schemeClr>
+          </a:lnRef>
+          <a:fillRef idx="1">
+            <a:schemeClr val="accent1"/>
+          </a:fillRef>
+          <a:effectRef idx="0">
+            <a:schemeClr val="accent1"/>
+          </a:effectRef>
+          <a:fontRef idx="minor">
+            <a:schemeClr val="lt1"/>
+          </a:fontRef>
+        </p:style>
+        <p:txBody>
+          <a:bodyPr rtlCol="0" anchor="ctr"/>
+          <a:lstStyle/>
+          <a:p>
+            <a:pPr algn="ctr"/>
+            <a:endParaRPr lang="en-US"/>
+          </a:p>
+        </p:txBody>
+      </p:sp>
+      <p:sp>
+        <p:nvSpPr>
+          <p:cNvPr id="71" name="Rectangle 70"/>
+          <p:cNvSpPr/>
+          <p:nvPr/>
+        </p:nvSpPr>
+        <p:spPr>
+          <a:xfrm>
+            <a:off x="7250162" y="4401258"/>
+            <a:ext cx="54086" cy="51892"/>
+          </a:xfrm>
+          <a:prstGeom prst="rect">
+            <a:avLst/>
+          </a:prstGeom>
+        </p:spPr>
+        <p:style>
+          <a:lnRef idx="2">
+            <a:schemeClr val="dk1"/>
+          </a:lnRef>
+          <a:fillRef idx="1">
+            <a:schemeClr val="lt1"/>
+          </a:fillRef>
+          <a:effectRef idx="0">
+            <a:schemeClr val="dk1"/>
+          </a:effectRef>
+          <a:fontRef idx="minor">
+            <a:schemeClr val="dk1"/>
+          </a:fontRef>
+        </p:style>
+        <p:txBody>
+          <a:bodyPr rtlCol="0" anchor="ctr"/>
+          <a:lstStyle/>
+          <a:p>
+            <a:pPr algn="ctr"/>
+            <a:endParaRPr lang="en-US"/>
+          </a:p>
+        </p:txBody>
+      </p:sp>
+      <p:sp>
+        <p:nvSpPr>
+          <p:cNvPr id="72" name="Rectangle 71"/>
+          <p:cNvSpPr/>
+          <p:nvPr/>
+        </p:nvSpPr>
+        <p:spPr>
+          <a:xfrm>
+            <a:off x="7249642" y="4495390"/>
+            <a:ext cx="54086" cy="51892"/>
+          </a:xfrm>
+          <a:prstGeom prst="rect">
+            <a:avLst/>
+          </a:prstGeom>
+        </p:spPr>
+        <p:style>
+          <a:lnRef idx="2">
+            <a:schemeClr val="dk1"/>
+          </a:lnRef>
+          <a:fillRef idx="1">
+            <a:schemeClr val="lt1"/>
+          </a:fillRef>
+          <a:effectRef idx="0">
+            <a:schemeClr val="dk1"/>
+          </a:effectRef>
+          <a:fontRef idx="minor">
+            <a:schemeClr val="dk1"/>
+          </a:fontRef>
+        </p:style>
+        <p:txBody>
+          <a:bodyPr rtlCol="0" anchor="ctr"/>
+          <a:lstStyle/>
+          <a:p>
+            <a:pPr algn="ctr"/>
+            <a:endParaRPr lang="en-US"/>
+          </a:p>
+        </p:txBody>
+      </p:sp>
       <p:cxnSp>
         <p:nvCxnSpPr>
-          <p:cNvPr id="73" name="Straight Arrow Connector 72">
-            <a:extLst>
-              <a:ext uri="{FF2B5EF4-FFF2-40B4-BE49-F238E27FC236}">
-                <a16:creationId xmlns:a16="http://schemas.microsoft.com/office/drawing/2014/main" id="{94F4A710-D45A-1E5E-8D7B-533C052D700D}"/>
-              </a:ext>
-            </a:extLst>
-          </p:cNvPr>
-          <p:cNvCxnSpPr>
-            <a:cxnSpLocks/>
-          </p:cNvCxnSpPr>
+          <p:cNvPr id="73" name="Straight Arrow Connector 72"/>
+          <p:cNvCxnSpPr/>
           <p:nvPr/>
         </p:nvCxnSpPr>
         <p:spPr>
           <a:xfrm flipH="1" flipV="1">
             <a:off x="7325161" y="4614946"/>
-            <a:ext cx="148574" cy="280351"/>
+            <a:ext cx="303076" cy="234573"/>
           </a:xfrm>
           <a:prstGeom prst="straightConnector1">
             <a:avLst/>
@@ -33069,20 +33167,14 @@
       </p:cxnSp>
       <p:sp>
         <p:nvSpPr>
-          <p:cNvPr id="74" name="Rectangle 73">
-            <a:extLst>
-              <a:ext uri="{FF2B5EF4-FFF2-40B4-BE49-F238E27FC236}">
-                <a16:creationId xmlns:a16="http://schemas.microsoft.com/office/drawing/2014/main" id="{806D8746-ECC7-8597-7FB4-C2415674EF43}"/>
-              </a:ext>
-            </a:extLst>
-          </p:cNvPr>
-          <p:cNvSpPr/>
-          <p:nvPr/>
-        </p:nvSpPr>
-        <p:spPr>
-          <a:xfrm>
-            <a:off x="6552370" y="5938345"/>
-            <a:ext cx="4682530" cy="815859"/>
+          <p:cNvPr id="74" name="Rectangle 73"/>
+          <p:cNvSpPr/>
+          <p:nvPr/>
+        </p:nvSpPr>
+        <p:spPr>
+          <a:xfrm>
+            <a:off x="6552370" y="6012306"/>
+            <a:ext cx="4682530" cy="741898"/>
           </a:xfrm>
           <a:prstGeom prst="rect">
             <a:avLst/>
@@ -33114,541 +33206,28 @@
                   <a:schemeClr val="bg1"/>
                 </a:solidFill>
               </a:rPr>
-              <a:t>Right Footswitch: Tap Tempo, or next sequencer step when in stepped mode. Hold to temporarily move Regen to max, “self oscillation runaway mode”.</a:t>
-            </a:r>
-          </a:p>
-        </p:txBody>
-      </p:sp>
-      <p:sp>
-        <p:nvSpPr>
-          <p:cNvPr id="2" name="TextBox 1">
-            <a:extLst>
-              <a:ext uri="{FF2B5EF4-FFF2-40B4-BE49-F238E27FC236}">
-                <a16:creationId xmlns:a16="http://schemas.microsoft.com/office/drawing/2014/main" id="{BD722E89-B277-999A-1CB4-B79680F1F0A0}"/>
-              </a:ext>
-            </a:extLst>
-          </p:cNvPr>
-          <p:cNvSpPr txBox="1"/>
-          <p:nvPr/>
-        </p:nvSpPr>
-        <p:spPr>
-          <a:xfrm rot="16200000">
-            <a:off x="5704861" y="4085846"/>
-            <a:ext cx="559769" cy="461665"/>
-          </a:xfrm>
-          <a:prstGeom prst="rect">
-            <a:avLst/>
-          </a:prstGeom>
-          <a:noFill/>
-        </p:spPr>
-        <p:txBody>
-          <a:bodyPr wrap="none" rtlCol="0">
-            <a:spAutoFit/>
-          </a:bodyPr>
-          <a:lstStyle/>
-          <a:p>
-            <a:pPr algn="ctr"/>
-            <a:r>
-              <a:rPr lang="en-US" sz="800" b="1" dirty="0">
-                <a:latin typeface="Century Gothic" panose="020B0502020202020204" pitchFamily="34" charset="0"/>
-                <a:cs typeface="Adobe Devanagari" panose="02040503050201020203" pitchFamily="18" charset="0"/>
-              </a:rPr>
-              <a:t>Quarter</a:t>
-            </a:r>
-          </a:p>
-          <a:p>
-            <a:pPr algn="ctr"/>
-            <a:r>
-              <a:rPr lang="en-US" sz="800" b="1" dirty="0">
-                <a:latin typeface="Century Gothic" panose="020B0502020202020204" pitchFamily="34" charset="0"/>
-                <a:cs typeface="Adobe Devanagari" panose="02040503050201020203" pitchFamily="18" charset="0"/>
-              </a:rPr>
-              <a:t>Dot 8</a:t>
-            </a:r>
-            <a:r>
-              <a:rPr lang="en-US" sz="800" b="1" baseline="30000" dirty="0">
-                <a:latin typeface="Century Gothic" panose="020B0502020202020204" pitchFamily="34" charset="0"/>
-                <a:cs typeface="Adobe Devanagari" panose="02040503050201020203" pitchFamily="18" charset="0"/>
-              </a:rPr>
-              <a:t>th</a:t>
-            </a:r>
-            <a:endParaRPr lang="en-US" sz="800" b="1" dirty="0">
-              <a:latin typeface="Century Gothic" panose="020B0502020202020204" pitchFamily="34" charset="0"/>
-              <a:cs typeface="Adobe Devanagari" panose="02040503050201020203" pitchFamily="18" charset="0"/>
+              <a:t>Right Footswitch: Press to keep the current delay buffer in place. Press again to release </a:t>
+            </a:r>
+            <a:r>
+              <a:rPr lang="en-US" sz="1600" b="1">
+                <a:solidFill>
+                  <a:schemeClr val="bg1"/>
+                </a:solidFill>
+              </a:rPr>
+              <a:t>(latching).</a:t>
+            </a:r>
+            <a:endParaRPr lang="en-US" sz="1600" b="1" dirty="0">
+              <a:solidFill>
+                <a:schemeClr val="bg1"/>
+              </a:solidFill>
             </a:endParaRPr>
-          </a:p>
-          <a:p>
-            <a:pPr algn="ctr"/>
-            <a:r>
-              <a:rPr lang="en-US" sz="800" b="1" dirty="0">
-                <a:latin typeface="Century Gothic" panose="020B0502020202020204" pitchFamily="34" charset="0"/>
-                <a:cs typeface="Adobe Devanagari" panose="02040503050201020203" pitchFamily="18" charset="0"/>
-              </a:rPr>
-              <a:t>8th</a:t>
-            </a:r>
-          </a:p>
-        </p:txBody>
-      </p:sp>
-      <p:sp>
-        <p:nvSpPr>
-          <p:cNvPr id="3" name="TextBox 2">
-            <a:extLst>
-              <a:ext uri="{FF2B5EF4-FFF2-40B4-BE49-F238E27FC236}">
-                <a16:creationId xmlns:a16="http://schemas.microsoft.com/office/drawing/2014/main" id="{37DED741-3D5E-FA61-B154-BE61C360D14B}"/>
-              </a:ext>
-            </a:extLst>
-          </p:cNvPr>
-          <p:cNvSpPr txBox="1"/>
-          <p:nvPr/>
-        </p:nvSpPr>
-        <p:spPr>
-          <a:xfrm rot="16200000">
-            <a:off x="6516028" y="4088947"/>
-            <a:ext cx="559769" cy="461665"/>
-          </a:xfrm>
-          <a:prstGeom prst="rect">
-            <a:avLst/>
-          </a:prstGeom>
-          <a:noFill/>
-        </p:spPr>
-        <p:txBody>
-          <a:bodyPr wrap="none" rtlCol="0">
-            <a:spAutoFit/>
-          </a:bodyPr>
-          <a:lstStyle/>
-          <a:p>
-            <a:pPr algn="ctr"/>
-            <a:r>
-              <a:rPr lang="en-US" sz="800" b="1" dirty="0">
-                <a:latin typeface="Century Gothic" panose="020B0502020202020204" pitchFamily="34" charset="0"/>
-                <a:cs typeface="Adobe Devanagari" panose="02040503050201020203" pitchFamily="18" charset="0"/>
-              </a:rPr>
-              <a:t>Quarter</a:t>
-            </a:r>
-          </a:p>
-          <a:p>
-            <a:pPr algn="ctr"/>
-            <a:r>
-              <a:rPr lang="en-US" sz="800" b="1" dirty="0">
-                <a:latin typeface="Century Gothic" panose="020B0502020202020204" pitchFamily="34" charset="0"/>
-                <a:cs typeface="Adobe Devanagari" panose="02040503050201020203" pitchFamily="18" charset="0"/>
-              </a:rPr>
-              <a:t>Dot 8</a:t>
-            </a:r>
-            <a:r>
-              <a:rPr lang="en-US" sz="800" b="1" baseline="30000" dirty="0">
-                <a:latin typeface="Century Gothic" panose="020B0502020202020204" pitchFamily="34" charset="0"/>
-                <a:cs typeface="Adobe Devanagari" panose="02040503050201020203" pitchFamily="18" charset="0"/>
-              </a:rPr>
-              <a:t>th</a:t>
-            </a:r>
-            <a:endParaRPr lang="en-US" sz="800" b="1" dirty="0">
-              <a:latin typeface="Century Gothic" panose="020B0502020202020204" pitchFamily="34" charset="0"/>
-              <a:cs typeface="Adobe Devanagari" panose="02040503050201020203" pitchFamily="18" charset="0"/>
-            </a:endParaRPr>
-          </a:p>
-          <a:p>
-            <a:pPr algn="ctr"/>
-            <a:r>
-              <a:rPr lang="en-US" sz="800" b="1" dirty="0">
-                <a:latin typeface="Century Gothic" panose="020B0502020202020204" pitchFamily="34" charset="0"/>
-                <a:cs typeface="Adobe Devanagari" panose="02040503050201020203" pitchFamily="18" charset="0"/>
-              </a:rPr>
-              <a:t>8th</a:t>
-            </a:r>
-          </a:p>
-        </p:txBody>
-      </p:sp>
-      <p:sp>
-        <p:nvSpPr>
-          <p:cNvPr id="46" name="Rectangle 45">
-            <a:extLst>
-              <a:ext uri="{FF2B5EF4-FFF2-40B4-BE49-F238E27FC236}">
-                <a16:creationId xmlns:a16="http://schemas.microsoft.com/office/drawing/2014/main" id="{3D7D1069-B38E-8193-2973-07F9963C3EE4}"/>
-              </a:ext>
-            </a:extLst>
-          </p:cNvPr>
-          <p:cNvSpPr/>
-          <p:nvPr/>
-        </p:nvSpPr>
-        <p:spPr>
-          <a:xfrm>
-            <a:off x="429604" y="4432782"/>
-            <a:ext cx="3873298" cy="1164289"/>
-          </a:xfrm>
-          <a:prstGeom prst="rect">
-            <a:avLst/>
-          </a:prstGeom>
-        </p:spPr>
-        <p:style>
-          <a:lnRef idx="2">
-            <a:schemeClr val="dk1">
-              <a:shade val="50000"/>
-            </a:schemeClr>
-          </a:lnRef>
-          <a:fillRef idx="1003">
-            <a:schemeClr val="dk1"/>
-          </a:fillRef>
-          <a:effectRef idx="0">
-            <a:schemeClr val="dk1"/>
-          </a:effectRef>
-          <a:fontRef idx="minor">
-            <a:schemeClr val="lt1"/>
-          </a:fontRef>
-        </p:style>
-        <p:txBody>
-          <a:bodyPr rtlCol="0" anchor="ctr"/>
-          <a:lstStyle/>
-          <a:p>
-            <a:r>
-              <a:rPr lang="en-US" sz="1600" b="1" dirty="0">
-                <a:solidFill>
-                  <a:schemeClr val="bg1"/>
-                </a:solidFill>
-              </a:rPr>
-              <a:t>INT 1 Step Length</a:t>
-            </a:r>
-          </a:p>
-          <a:p>
-            <a:r>
-              <a:rPr lang="en-US" sz="1600" b="1" dirty="0">
-                <a:solidFill>
-                  <a:schemeClr val="bg1"/>
-                </a:solidFill>
-              </a:rPr>
-              <a:t>  Left: Quarter Note (Same as Tap Tempo)</a:t>
-            </a:r>
-          </a:p>
-          <a:p>
-            <a:r>
-              <a:rPr lang="en-US" sz="1600" b="1" dirty="0">
-                <a:solidFill>
-                  <a:schemeClr val="bg1"/>
-                </a:solidFill>
-              </a:rPr>
-              <a:t>  Center: Dotted Eighth Note</a:t>
-            </a:r>
-          </a:p>
-          <a:p>
-            <a:r>
-              <a:rPr lang="en-US" sz="1600" b="1" dirty="0">
-                <a:solidFill>
-                  <a:schemeClr val="bg1"/>
-                </a:solidFill>
-              </a:rPr>
-              <a:t>  Right:  Eighth Note</a:t>
-            </a:r>
-          </a:p>
-        </p:txBody>
-      </p:sp>
-      <p:sp>
-        <p:nvSpPr>
-          <p:cNvPr id="48" name="Rectangle 47">
-            <a:extLst>
-              <a:ext uri="{FF2B5EF4-FFF2-40B4-BE49-F238E27FC236}">
-                <a16:creationId xmlns:a16="http://schemas.microsoft.com/office/drawing/2014/main" id="{410438DA-BE33-8AD0-971E-DC4175FD8060}"/>
-              </a:ext>
-            </a:extLst>
-          </p:cNvPr>
-          <p:cNvSpPr/>
-          <p:nvPr/>
-        </p:nvSpPr>
-        <p:spPr>
-          <a:xfrm>
-            <a:off x="7622804" y="3574857"/>
-            <a:ext cx="3826990" cy="1075966"/>
-          </a:xfrm>
-          <a:prstGeom prst="rect">
-            <a:avLst/>
-          </a:prstGeom>
-        </p:spPr>
-        <p:style>
-          <a:lnRef idx="2">
-            <a:schemeClr val="dk1">
-              <a:shade val="50000"/>
-            </a:schemeClr>
-          </a:lnRef>
-          <a:fillRef idx="1003">
-            <a:schemeClr val="dk1"/>
-          </a:fillRef>
-          <a:effectRef idx="0">
-            <a:schemeClr val="dk1"/>
-          </a:effectRef>
-          <a:fontRef idx="minor">
-            <a:schemeClr val="lt1"/>
-          </a:fontRef>
-        </p:style>
-        <p:txBody>
-          <a:bodyPr rtlCol="0" anchor="ctr"/>
-          <a:lstStyle/>
-          <a:p>
-            <a:r>
-              <a:rPr lang="en-US" sz="1600" b="1" dirty="0">
-                <a:solidFill>
-                  <a:schemeClr val="bg1"/>
-                </a:solidFill>
-              </a:rPr>
-              <a:t>INT 2 Step Length</a:t>
-            </a:r>
-          </a:p>
-          <a:p>
-            <a:r>
-              <a:rPr lang="en-US" sz="1600" b="1" dirty="0">
-                <a:solidFill>
-                  <a:schemeClr val="bg1"/>
-                </a:solidFill>
-              </a:rPr>
-              <a:t>  Left: Quarter Note (Same as Tap Tempo)</a:t>
-            </a:r>
-          </a:p>
-          <a:p>
-            <a:r>
-              <a:rPr lang="en-US" sz="1600" b="1" dirty="0">
-                <a:solidFill>
-                  <a:schemeClr val="bg1"/>
-                </a:solidFill>
-              </a:rPr>
-              <a:t>  Center: Dotted Eighth Note</a:t>
-            </a:r>
-          </a:p>
-          <a:p>
-            <a:r>
-              <a:rPr lang="en-US" sz="1600" b="1" dirty="0">
-                <a:solidFill>
-                  <a:schemeClr val="bg1"/>
-                </a:solidFill>
-              </a:rPr>
-              <a:t>  Right:  Eighth Note</a:t>
-            </a:r>
-          </a:p>
-        </p:txBody>
-      </p:sp>
-      <p:sp>
-        <p:nvSpPr>
-          <p:cNvPr id="52" name="Rectangle 51">
-            <a:extLst>
-              <a:ext uri="{FF2B5EF4-FFF2-40B4-BE49-F238E27FC236}">
-                <a16:creationId xmlns:a16="http://schemas.microsoft.com/office/drawing/2014/main" id="{C6B5AD47-6CC9-C3F7-F394-51ABB75A24BD}"/>
-              </a:ext>
-            </a:extLst>
-          </p:cNvPr>
-          <p:cNvSpPr/>
-          <p:nvPr/>
-        </p:nvSpPr>
-        <p:spPr>
-          <a:xfrm>
-            <a:off x="7218671" y="4347300"/>
-            <a:ext cx="45719" cy="303523"/>
-          </a:xfrm>
-          <a:prstGeom prst="rect">
-            <a:avLst/>
-          </a:prstGeom>
-        </p:spPr>
-        <p:style>
-          <a:lnRef idx="2">
-            <a:schemeClr val="accent1">
-              <a:shade val="50000"/>
-            </a:schemeClr>
-          </a:lnRef>
-          <a:fillRef idx="1">
-            <a:schemeClr val="accent1"/>
-          </a:fillRef>
-          <a:effectRef idx="0">
-            <a:schemeClr val="accent1"/>
-          </a:effectRef>
-          <a:fontRef idx="minor">
-            <a:schemeClr val="lt1"/>
-          </a:fontRef>
-        </p:style>
-        <p:txBody>
-          <a:bodyPr rtlCol="0" anchor="ctr"/>
-          <a:lstStyle/>
-          <a:p>
-            <a:pPr algn="ctr"/>
-            <a:endParaRPr lang="en-US"/>
-          </a:p>
-        </p:txBody>
-      </p:sp>
-      <p:sp>
-        <p:nvSpPr>
-          <p:cNvPr id="53" name="Rectangle 52">
-            <a:extLst>
-              <a:ext uri="{FF2B5EF4-FFF2-40B4-BE49-F238E27FC236}">
-                <a16:creationId xmlns:a16="http://schemas.microsoft.com/office/drawing/2014/main" id="{5240BB4E-E046-DE8E-A7F1-337BDDE9C385}"/>
-              </a:ext>
-            </a:extLst>
-          </p:cNvPr>
-          <p:cNvSpPr/>
-          <p:nvPr/>
-        </p:nvSpPr>
-        <p:spPr>
-          <a:xfrm>
-            <a:off x="7251396" y="4431786"/>
-            <a:ext cx="45719" cy="45719"/>
-          </a:xfrm>
-          <a:prstGeom prst="rect">
-            <a:avLst/>
-          </a:prstGeom>
-        </p:spPr>
-        <p:style>
-          <a:lnRef idx="2">
-            <a:schemeClr val="dk1"/>
-          </a:lnRef>
-          <a:fillRef idx="1">
-            <a:schemeClr val="lt1"/>
-          </a:fillRef>
-          <a:effectRef idx="0">
-            <a:schemeClr val="dk1"/>
-          </a:effectRef>
-          <a:fontRef idx="minor">
-            <a:schemeClr val="dk1"/>
-          </a:fontRef>
-        </p:style>
-        <p:txBody>
-          <a:bodyPr rtlCol="0" anchor="ctr"/>
-          <a:lstStyle/>
-          <a:p>
-            <a:pPr algn="ctr"/>
-            <a:endParaRPr lang="en-US"/>
-          </a:p>
-        </p:txBody>
-      </p:sp>
-      <p:sp>
-        <p:nvSpPr>
-          <p:cNvPr id="54" name="Rectangle 53">
-            <a:extLst>
-              <a:ext uri="{FF2B5EF4-FFF2-40B4-BE49-F238E27FC236}">
-                <a16:creationId xmlns:a16="http://schemas.microsoft.com/office/drawing/2014/main" id="{7F8781D8-88F4-1B7F-F2B7-CC4644C2517E}"/>
-              </a:ext>
-            </a:extLst>
-          </p:cNvPr>
-          <p:cNvSpPr/>
-          <p:nvPr/>
-        </p:nvSpPr>
-        <p:spPr>
-          <a:xfrm>
-            <a:off x="7252683" y="4504799"/>
-            <a:ext cx="45719" cy="45719"/>
-          </a:xfrm>
-          <a:prstGeom prst="rect">
-            <a:avLst/>
-          </a:prstGeom>
-        </p:spPr>
-        <p:style>
-          <a:lnRef idx="2">
-            <a:schemeClr val="dk1"/>
-          </a:lnRef>
-          <a:fillRef idx="1">
-            <a:schemeClr val="lt1"/>
-          </a:fillRef>
-          <a:effectRef idx="0">
-            <a:schemeClr val="dk1"/>
-          </a:effectRef>
-          <a:fontRef idx="minor">
-            <a:schemeClr val="dk1"/>
-          </a:fontRef>
-        </p:style>
-        <p:txBody>
-          <a:bodyPr rtlCol="0" anchor="ctr"/>
-          <a:lstStyle/>
-          <a:p>
-            <a:pPr algn="ctr"/>
-            <a:endParaRPr lang="en-US"/>
-          </a:p>
-        </p:txBody>
-      </p:sp>
-      <p:sp>
-        <p:nvSpPr>
-          <p:cNvPr id="62" name="Rectangle 61">
-            <a:extLst>
-              <a:ext uri="{FF2B5EF4-FFF2-40B4-BE49-F238E27FC236}">
-                <a16:creationId xmlns:a16="http://schemas.microsoft.com/office/drawing/2014/main" id="{43BBE5BD-E540-18E9-9C32-2E7B337C1D34}"/>
-              </a:ext>
-            </a:extLst>
-          </p:cNvPr>
-          <p:cNvSpPr/>
-          <p:nvPr/>
-        </p:nvSpPr>
-        <p:spPr>
-          <a:xfrm>
-            <a:off x="7251396" y="4585442"/>
-            <a:ext cx="45719" cy="45719"/>
-          </a:xfrm>
-          <a:prstGeom prst="rect">
-            <a:avLst/>
-          </a:prstGeom>
-        </p:spPr>
-        <p:style>
-          <a:lnRef idx="2">
-            <a:schemeClr val="dk1"/>
-          </a:lnRef>
-          <a:fillRef idx="1">
-            <a:schemeClr val="lt1"/>
-          </a:fillRef>
-          <a:effectRef idx="0">
-            <a:schemeClr val="dk1"/>
-          </a:effectRef>
-          <a:fontRef idx="minor">
-            <a:schemeClr val="dk1"/>
-          </a:fontRef>
-        </p:style>
-        <p:txBody>
-          <a:bodyPr rtlCol="0" anchor="ctr"/>
-          <a:lstStyle/>
-          <a:p>
-            <a:pPr algn="ctr"/>
-            <a:endParaRPr lang="en-US"/>
-          </a:p>
-        </p:txBody>
-      </p:sp>
-      <p:sp>
-        <p:nvSpPr>
-          <p:cNvPr id="75" name="Rectangle 74">
-            <a:extLst>
-              <a:ext uri="{FF2B5EF4-FFF2-40B4-BE49-F238E27FC236}">
-                <a16:creationId xmlns:a16="http://schemas.microsoft.com/office/drawing/2014/main" id="{F26567BC-EF18-5686-6D41-8F005E976D91}"/>
-              </a:ext>
-            </a:extLst>
-          </p:cNvPr>
-          <p:cNvSpPr/>
-          <p:nvPr/>
-        </p:nvSpPr>
-        <p:spPr>
-          <a:xfrm>
-            <a:off x="7251396" y="4358774"/>
-            <a:ext cx="45719" cy="45719"/>
-          </a:xfrm>
-          <a:prstGeom prst="rect">
-            <a:avLst/>
-          </a:prstGeom>
-        </p:spPr>
-        <p:style>
-          <a:lnRef idx="2">
-            <a:schemeClr val="dk1"/>
-          </a:lnRef>
-          <a:fillRef idx="1">
-            <a:schemeClr val="lt1"/>
-          </a:fillRef>
-          <a:effectRef idx="0">
-            <a:schemeClr val="dk1"/>
-          </a:effectRef>
-          <a:fontRef idx="minor">
-            <a:schemeClr val="dk1"/>
-          </a:fontRef>
-        </p:style>
-        <p:txBody>
-          <a:bodyPr rtlCol="0" anchor="ctr"/>
-          <a:lstStyle/>
-          <a:p>
-            <a:pPr algn="ctr"/>
-            <a:endParaRPr lang="en-US"/>
           </a:p>
         </p:txBody>
       </p:sp>
     </p:spTree>
     <p:extLst>
       <p:ext uri="{BB962C8B-B14F-4D97-AF65-F5344CB8AC3E}">
-        <p14:creationId xmlns:p14="http://schemas.microsoft.com/office/powerpoint/2010/main" val="4288871490"/>
+        <p14:creationId xmlns:p14="http://schemas.microsoft.com/office/powerpoint/2010/main" val="1835336124"/>
       </p:ext>
     </p:extLst>
   </p:cSld>

--- a/software/images/Infographics.pptx
+++ b/software/images/Infographics.pptx
@@ -13,8 +13,7 @@
     <p:sldId id="262" r:id="rId7"/>
     <p:sldId id="263" r:id="rId8"/>
     <p:sldId id="264" r:id="rId9"/>
-    <p:sldId id="266" r:id="rId10"/>
-    <p:sldId id="260" r:id="rId11"/>
+    <p:sldId id="260" r:id="rId10"/>
   </p:sldIdLst>
   <p:sldSz cx="12192000" cy="6858000"/>
   <p:notesSz cx="6858000" cy="9144000"/>
@@ -124,30 +123,6 @@
 <file path=ppt/changesInfos/changesInfo1.xml><?xml version="1.0" encoding="utf-8"?>
 <pc:chgInfo xmlns:a="http://schemas.openxmlformats.org/drawingml/2006/main" xmlns:r="http://schemas.openxmlformats.org/officeDocument/2006/relationships" xmlns:ac="http://schemas.microsoft.com/office/drawing/2013/main/command" xmlns:pc="http://schemas.microsoft.com/office/powerpoint/2013/main/command">
   <pc:docChgLst>
-    <pc:chgData name="Rachel Bloemer" userId="77b46c2fcbe54245" providerId="LiveId" clId="{A84FB524-E67A-4211-8697-C15450D7CF1C}"/>
-    <pc:docChg chg="modSld">
-      <pc:chgData name="Rachel Bloemer" userId="77b46c2fcbe54245" providerId="LiveId" clId="{A84FB524-E67A-4211-8697-C15450D7CF1C}" dt="2024-07-27T00:14:07.011" v="8" actId="20577"/>
-      <pc:docMkLst>
-        <pc:docMk/>
-      </pc:docMkLst>
-      <pc:sldChg chg="modSp mod">
-        <pc:chgData name="Rachel Bloemer" userId="77b46c2fcbe54245" providerId="LiveId" clId="{A84FB524-E67A-4211-8697-C15450D7CF1C}" dt="2024-07-27T00:14:07.011" v="8" actId="20577"/>
-        <pc:sldMkLst>
-          <pc:docMk/>
-          <pc:sldMk cId="2892489643" sldId="261"/>
-        </pc:sldMkLst>
-        <pc:spChg chg="mod">
-          <ac:chgData name="Rachel Bloemer" userId="77b46c2fcbe54245" providerId="LiveId" clId="{A84FB524-E67A-4211-8697-C15450D7CF1C}" dt="2024-07-27T00:14:07.011" v="8" actId="20577"/>
-          <ac:spMkLst>
-            <pc:docMk/>
-            <pc:sldMk cId="2892489643" sldId="261"/>
-            <ac:spMk id="60" creationId="{00000000-0000-0000-0000-000000000000}"/>
-          </ac:spMkLst>
-        </pc:spChg>
-      </pc:sldChg>
-    </pc:docChg>
-  </pc:docChgLst>
-  <pc:docChgLst>
     <pc:chgData name="Rachel Bloemer" userId="77b46c2fcbe54245" providerId="LiveId" clId="{9A7BBEF4-6F3C-4C64-8E1D-1FD87EBDAF77}"/>
     <pc:docChg chg="modSld">
       <pc:chgData name="Rachel Bloemer" userId="77b46c2fcbe54245" providerId="LiveId" clId="{9A7BBEF4-6F3C-4C64-8E1D-1FD87EBDAF77}" dt="2024-08-08T16:21:40.175" v="7" actId="20577"/>
@@ -174,6 +149,30 @@
             <pc:docMk/>
             <pc:sldMk cId="1849713498" sldId="262"/>
             <ac:spMk id="50" creationId="{00000000-0000-0000-0000-000000000000}"/>
+          </ac:spMkLst>
+        </pc:spChg>
+      </pc:sldChg>
+    </pc:docChg>
+  </pc:docChgLst>
+  <pc:docChgLst>
+    <pc:chgData name="Rachel Bloemer" userId="77b46c2fcbe54245" providerId="LiveId" clId="{A84FB524-E67A-4211-8697-C15450D7CF1C}"/>
+    <pc:docChg chg="modSld">
+      <pc:chgData name="Rachel Bloemer" userId="77b46c2fcbe54245" providerId="LiveId" clId="{A84FB524-E67A-4211-8697-C15450D7CF1C}" dt="2024-07-27T00:14:07.011" v="8" actId="20577"/>
+      <pc:docMkLst>
+        <pc:docMk/>
+      </pc:docMkLst>
+      <pc:sldChg chg="modSp mod">
+        <pc:chgData name="Rachel Bloemer" userId="77b46c2fcbe54245" providerId="LiveId" clId="{A84FB524-E67A-4211-8697-C15450D7CF1C}" dt="2024-07-27T00:14:07.011" v="8" actId="20577"/>
+        <pc:sldMkLst>
+          <pc:docMk/>
+          <pc:sldMk cId="2892489643" sldId="261"/>
+        </pc:sldMkLst>
+        <pc:spChg chg="mod">
+          <ac:chgData name="Rachel Bloemer" userId="77b46c2fcbe54245" providerId="LiveId" clId="{A84FB524-E67A-4211-8697-C15450D7CF1C}" dt="2024-07-27T00:14:07.011" v="8" actId="20577"/>
+          <ac:spMkLst>
+            <pc:docMk/>
+            <pc:sldMk cId="2892489643" sldId="261"/>
+            <ac:spMk id="60" creationId="{00000000-0000-0000-0000-000000000000}"/>
           </ac:spMkLst>
         </pc:spChg>
       </pc:sldChg>
@@ -373,7 +372,7 @@
           <a:p>
             <a:fld id="{E65F16E8-9810-4F67-B618-098E0E399057}" type="datetimeFigureOut">
               <a:rPr lang="en-US" smtClean="0"/>
-              <a:t>6/15/2026</a:t>
+              <a:t>1/9/2025</a:t>
             </a:fld>
             <a:endParaRPr lang="en-US"/>
           </a:p>
@@ -541,7 +540,7 @@
           <a:p>
             <a:fld id="{E65F16E8-9810-4F67-B618-098E0E399057}" type="datetimeFigureOut">
               <a:rPr lang="en-US" smtClean="0"/>
-              <a:t>6/15/2026</a:t>
+              <a:t>1/9/2025</a:t>
             </a:fld>
             <a:endParaRPr lang="en-US"/>
           </a:p>
@@ -719,7 +718,7 @@
           <a:p>
             <a:fld id="{E65F16E8-9810-4F67-B618-098E0E399057}" type="datetimeFigureOut">
               <a:rPr lang="en-US" smtClean="0"/>
-              <a:t>6/15/2026</a:t>
+              <a:t>1/9/2025</a:t>
             </a:fld>
             <a:endParaRPr lang="en-US"/>
           </a:p>
@@ -887,7 +886,7 @@
           <a:p>
             <a:fld id="{E65F16E8-9810-4F67-B618-098E0E399057}" type="datetimeFigureOut">
               <a:rPr lang="en-US" smtClean="0"/>
-              <a:t>6/15/2026</a:t>
+              <a:t>1/9/2025</a:t>
             </a:fld>
             <a:endParaRPr lang="en-US"/>
           </a:p>
@@ -1132,7 +1131,7 @@
           <a:p>
             <a:fld id="{E65F16E8-9810-4F67-B618-098E0E399057}" type="datetimeFigureOut">
               <a:rPr lang="en-US" smtClean="0"/>
-              <a:t>6/15/2026</a:t>
+              <a:t>1/9/2025</a:t>
             </a:fld>
             <a:endParaRPr lang="en-US"/>
           </a:p>
@@ -1361,7 +1360,7 @@
           <a:p>
             <a:fld id="{E65F16E8-9810-4F67-B618-098E0E399057}" type="datetimeFigureOut">
               <a:rPr lang="en-US" smtClean="0"/>
-              <a:t>6/15/2026</a:t>
+              <a:t>1/9/2025</a:t>
             </a:fld>
             <a:endParaRPr lang="en-US"/>
           </a:p>
@@ -1725,7 +1724,7 @@
           <a:p>
             <a:fld id="{E65F16E8-9810-4F67-B618-098E0E399057}" type="datetimeFigureOut">
               <a:rPr lang="en-US" smtClean="0"/>
-              <a:t>6/15/2026</a:t>
+              <a:t>1/9/2025</a:t>
             </a:fld>
             <a:endParaRPr lang="en-US"/>
           </a:p>
@@ -1842,7 +1841,7 @@
           <a:p>
             <a:fld id="{E65F16E8-9810-4F67-B618-098E0E399057}" type="datetimeFigureOut">
               <a:rPr lang="en-US" smtClean="0"/>
-              <a:t>6/15/2026</a:t>
+              <a:t>1/9/2025</a:t>
             </a:fld>
             <a:endParaRPr lang="en-US"/>
           </a:p>
@@ -1937,7 +1936,7 @@
           <a:p>
             <a:fld id="{E65F16E8-9810-4F67-B618-098E0E399057}" type="datetimeFigureOut">
               <a:rPr lang="en-US" smtClean="0"/>
-              <a:t>6/15/2026</a:t>
+              <a:t>1/9/2025</a:t>
             </a:fld>
             <a:endParaRPr lang="en-US"/>
           </a:p>
@@ -2212,7 +2211,7 @@
           <a:p>
             <a:fld id="{E65F16E8-9810-4F67-B618-098E0E399057}" type="datetimeFigureOut">
               <a:rPr lang="en-US" smtClean="0"/>
-              <a:t>6/15/2026</a:t>
+              <a:t>1/9/2025</a:t>
             </a:fld>
             <a:endParaRPr lang="en-US"/>
           </a:p>
@@ -2464,7 +2463,7 @@
           <a:p>
             <a:fld id="{E65F16E8-9810-4F67-B618-098E0E399057}" type="datetimeFigureOut">
               <a:rPr lang="en-US" smtClean="0"/>
-              <a:t>6/15/2026</a:t>
+              <a:t>1/9/2025</a:t>
             </a:fld>
             <a:endParaRPr lang="en-US"/>
           </a:p>
@@ -2675,7 +2674,7 @@
           <a:p>
             <a:fld id="{E65F16E8-9810-4F67-B618-098E0E399057}" type="datetimeFigureOut">
               <a:rPr lang="en-US" smtClean="0"/>
-              <a:t>6/15/2026</a:t>
+              <a:t>1/9/2025</a:t>
             </a:fld>
             <a:endParaRPr lang="en-US"/>
           </a:p>
@@ -6107,2827 +6106,6 @@
 </p:sld>
 </file>
 
-<file path=ppt/slides/slide10.xml><?xml version="1.0" encoding="utf-8"?>
-<p:sld xmlns:a="http://schemas.openxmlformats.org/drawingml/2006/main" xmlns:r="http://schemas.openxmlformats.org/officeDocument/2006/relationships" xmlns:p="http://schemas.openxmlformats.org/presentationml/2006/main">
-  <p:cSld>
-    <p:spTree>
-      <p:nvGrpSpPr>
-        <p:cNvPr id="1" name=""/>
-        <p:cNvGrpSpPr/>
-        <p:nvPr/>
-      </p:nvGrpSpPr>
-      <p:grpSpPr>
-        <a:xfrm>
-          <a:off x="0" y="0"/>
-          <a:ext cx="0" cy="0"/>
-          <a:chOff x="0" y="0"/>
-          <a:chExt cx="0" cy="0"/>
-        </a:xfrm>
-      </p:grpSpPr>
-      <p:sp>
-        <p:nvSpPr>
-          <p:cNvPr id="2" name="Rounded Rectangle 1"/>
-          <p:cNvSpPr/>
-          <p:nvPr/>
-        </p:nvSpPr>
-        <p:spPr>
-          <a:xfrm>
-            <a:off x="4687514" y="1221568"/>
-            <a:ext cx="2502100" cy="4599225"/>
-          </a:xfrm>
-          <a:prstGeom prst="roundRect">
-            <a:avLst>
-              <a:gd name="adj" fmla="val 4232"/>
-            </a:avLst>
-          </a:prstGeom>
-          <a:solidFill>
-            <a:srgbClr val="EFEBE5"/>
-          </a:solidFill>
-          <a:ln w="57150"/>
-        </p:spPr>
-        <p:style>
-          <a:lnRef idx="2">
-            <a:schemeClr val="accent1">
-              <a:shade val="50000"/>
-            </a:schemeClr>
-          </a:lnRef>
-          <a:fillRef idx="1">
-            <a:schemeClr val="accent1"/>
-          </a:fillRef>
-          <a:effectRef idx="0">
-            <a:schemeClr val="accent1"/>
-          </a:effectRef>
-          <a:fontRef idx="minor">
-            <a:schemeClr val="lt1"/>
-          </a:fontRef>
-        </p:style>
-        <p:txBody>
-          <a:bodyPr rtlCol="0" anchor="ctr"/>
-          <a:lstStyle/>
-          <a:p>
-            <a:pPr algn="ctr"/>
-            <a:endParaRPr lang="en-US"/>
-          </a:p>
-        </p:txBody>
-      </p:sp>
-      <p:sp>
-        <p:nvSpPr>
-          <p:cNvPr id="3" name="Isosceles Triangle 2"/>
-          <p:cNvSpPr/>
-          <p:nvPr/>
-        </p:nvSpPr>
-        <p:spPr>
-          <a:xfrm>
-            <a:off x="5272231" y="1277448"/>
-            <a:ext cx="160020" cy="144780"/>
-          </a:xfrm>
-          <a:prstGeom prst="triangle">
-            <a:avLst/>
-          </a:prstGeom>
-          <a:solidFill>
-            <a:schemeClr val="tx1"/>
-          </a:solidFill>
-          <a:ln>
-            <a:solidFill>
-              <a:schemeClr val="tx1"/>
-            </a:solidFill>
-          </a:ln>
-        </p:spPr>
-        <p:style>
-          <a:lnRef idx="2">
-            <a:schemeClr val="accent1">
-              <a:shade val="50000"/>
-            </a:schemeClr>
-          </a:lnRef>
-          <a:fillRef idx="1">
-            <a:schemeClr val="accent1"/>
-          </a:fillRef>
-          <a:effectRef idx="0">
-            <a:schemeClr val="accent1"/>
-          </a:effectRef>
-          <a:fontRef idx="minor">
-            <a:schemeClr val="lt1"/>
-          </a:fontRef>
-        </p:style>
-        <p:txBody>
-          <a:bodyPr rtlCol="0" anchor="ctr"/>
-          <a:lstStyle/>
-          <a:p>
-            <a:pPr algn="ctr"/>
-            <a:endParaRPr lang="en-US" dirty="0"/>
-          </a:p>
-        </p:txBody>
-      </p:sp>
-      <p:sp>
-        <p:nvSpPr>
-          <p:cNvPr id="4" name="Isosceles Triangle 3"/>
-          <p:cNvSpPr/>
-          <p:nvPr/>
-        </p:nvSpPr>
-        <p:spPr>
-          <a:xfrm rot="10800000">
-            <a:off x="6477144" y="1277448"/>
-            <a:ext cx="160020" cy="144780"/>
-          </a:xfrm>
-          <a:prstGeom prst="triangle">
-            <a:avLst/>
-          </a:prstGeom>
-          <a:solidFill>
-            <a:schemeClr val="tx1"/>
-          </a:solidFill>
-          <a:ln>
-            <a:solidFill>
-              <a:schemeClr val="tx1"/>
-            </a:solidFill>
-          </a:ln>
-        </p:spPr>
-        <p:style>
-          <a:lnRef idx="2">
-            <a:schemeClr val="accent1">
-              <a:shade val="50000"/>
-            </a:schemeClr>
-          </a:lnRef>
-          <a:fillRef idx="1">
-            <a:schemeClr val="accent1"/>
-          </a:fillRef>
-          <a:effectRef idx="0">
-            <a:schemeClr val="accent1"/>
-          </a:effectRef>
-          <a:fontRef idx="minor">
-            <a:schemeClr val="lt1"/>
-          </a:fontRef>
-        </p:style>
-        <p:txBody>
-          <a:bodyPr rtlCol="0" anchor="ctr"/>
-          <a:lstStyle/>
-          <a:p>
-            <a:pPr algn="ctr"/>
-            <a:endParaRPr lang="en-US" dirty="0"/>
-          </a:p>
-        </p:txBody>
-      </p:sp>
-      <p:sp>
-        <p:nvSpPr>
-          <p:cNvPr id="5" name="Oval 4"/>
-          <p:cNvSpPr/>
-          <p:nvPr/>
-        </p:nvSpPr>
-        <p:spPr>
-          <a:xfrm>
-            <a:off x="4875991" y="1747348"/>
-            <a:ext cx="556260" cy="533400"/>
-          </a:xfrm>
-          <a:prstGeom prst="ellipse">
-            <a:avLst/>
-          </a:prstGeom>
-          <a:solidFill>
-            <a:schemeClr val="bg2">
-              <a:lumMod val="50000"/>
-            </a:schemeClr>
-          </a:solidFill>
-          <a:ln w="28575">
-            <a:solidFill>
-              <a:schemeClr val="tx1"/>
-            </a:solidFill>
-          </a:ln>
-        </p:spPr>
-        <p:style>
-          <a:lnRef idx="2">
-            <a:schemeClr val="accent1">
-              <a:shade val="50000"/>
-            </a:schemeClr>
-          </a:lnRef>
-          <a:fillRef idx="1">
-            <a:schemeClr val="accent1"/>
-          </a:fillRef>
-          <a:effectRef idx="0">
-            <a:schemeClr val="accent1"/>
-          </a:effectRef>
-          <a:fontRef idx="minor">
-            <a:schemeClr val="lt1"/>
-          </a:fontRef>
-        </p:style>
-        <p:txBody>
-          <a:bodyPr rtlCol="0" anchor="ctr"/>
-          <a:lstStyle/>
-          <a:p>
-            <a:pPr algn="ctr"/>
-            <a:endParaRPr lang="en-US"/>
-          </a:p>
-        </p:txBody>
-      </p:sp>
-      <p:sp>
-        <p:nvSpPr>
-          <p:cNvPr id="6" name="Oval 5"/>
-          <p:cNvSpPr/>
-          <p:nvPr/>
-        </p:nvSpPr>
-        <p:spPr>
-          <a:xfrm>
-            <a:off x="5660434" y="1747348"/>
-            <a:ext cx="556260" cy="533400"/>
-          </a:xfrm>
-          <a:prstGeom prst="ellipse">
-            <a:avLst/>
-          </a:prstGeom>
-          <a:solidFill>
-            <a:schemeClr val="bg2">
-              <a:lumMod val="50000"/>
-            </a:schemeClr>
-          </a:solidFill>
-          <a:ln w="28575">
-            <a:solidFill>
-              <a:schemeClr val="tx1"/>
-            </a:solidFill>
-          </a:ln>
-        </p:spPr>
-        <p:style>
-          <a:lnRef idx="2">
-            <a:schemeClr val="accent1">
-              <a:shade val="50000"/>
-            </a:schemeClr>
-          </a:lnRef>
-          <a:fillRef idx="1">
-            <a:schemeClr val="accent1"/>
-          </a:fillRef>
-          <a:effectRef idx="0">
-            <a:schemeClr val="accent1"/>
-          </a:effectRef>
-          <a:fontRef idx="minor">
-            <a:schemeClr val="lt1"/>
-          </a:fontRef>
-        </p:style>
-        <p:txBody>
-          <a:bodyPr rtlCol="0" anchor="ctr"/>
-          <a:lstStyle/>
-          <a:p>
-            <a:pPr algn="ctr"/>
-            <a:endParaRPr lang="en-US"/>
-          </a:p>
-        </p:txBody>
-      </p:sp>
-      <p:sp>
-        <p:nvSpPr>
-          <p:cNvPr id="7" name="Oval 6"/>
-          <p:cNvSpPr/>
-          <p:nvPr/>
-        </p:nvSpPr>
-        <p:spPr>
-          <a:xfrm>
-            <a:off x="6457944" y="1747348"/>
-            <a:ext cx="556260" cy="533400"/>
-          </a:xfrm>
-          <a:prstGeom prst="ellipse">
-            <a:avLst/>
-          </a:prstGeom>
-          <a:solidFill>
-            <a:schemeClr val="bg2">
-              <a:lumMod val="50000"/>
-            </a:schemeClr>
-          </a:solidFill>
-          <a:ln w="28575">
-            <a:solidFill>
-              <a:schemeClr val="tx1"/>
-            </a:solidFill>
-          </a:ln>
-        </p:spPr>
-        <p:style>
-          <a:lnRef idx="2">
-            <a:schemeClr val="accent1">
-              <a:shade val="50000"/>
-            </a:schemeClr>
-          </a:lnRef>
-          <a:fillRef idx="1">
-            <a:schemeClr val="accent1"/>
-          </a:fillRef>
-          <a:effectRef idx="0">
-            <a:schemeClr val="accent1"/>
-          </a:effectRef>
-          <a:fontRef idx="minor">
-            <a:schemeClr val="lt1"/>
-          </a:fontRef>
-        </p:style>
-        <p:txBody>
-          <a:bodyPr rtlCol="0" anchor="ctr"/>
-          <a:lstStyle/>
-          <a:p>
-            <a:pPr algn="ctr"/>
-            <a:endParaRPr lang="en-US"/>
-          </a:p>
-        </p:txBody>
-      </p:sp>
-      <p:sp>
-        <p:nvSpPr>
-          <p:cNvPr id="8" name="Oval 7"/>
-          <p:cNvSpPr/>
-          <p:nvPr/>
-        </p:nvSpPr>
-        <p:spPr>
-          <a:xfrm>
-            <a:off x="4875991" y="2745568"/>
-            <a:ext cx="556260" cy="533400"/>
-          </a:xfrm>
-          <a:prstGeom prst="ellipse">
-            <a:avLst/>
-          </a:prstGeom>
-          <a:solidFill>
-            <a:schemeClr val="bg2">
-              <a:lumMod val="50000"/>
-            </a:schemeClr>
-          </a:solidFill>
-          <a:ln w="28575">
-            <a:solidFill>
-              <a:schemeClr val="tx1"/>
-            </a:solidFill>
-          </a:ln>
-        </p:spPr>
-        <p:style>
-          <a:lnRef idx="2">
-            <a:schemeClr val="accent1">
-              <a:shade val="50000"/>
-            </a:schemeClr>
-          </a:lnRef>
-          <a:fillRef idx="1">
-            <a:schemeClr val="accent1"/>
-          </a:fillRef>
-          <a:effectRef idx="0">
-            <a:schemeClr val="accent1"/>
-          </a:effectRef>
-          <a:fontRef idx="minor">
-            <a:schemeClr val="lt1"/>
-          </a:fontRef>
-        </p:style>
-        <p:txBody>
-          <a:bodyPr rtlCol="0" anchor="ctr"/>
-          <a:lstStyle/>
-          <a:p>
-            <a:pPr algn="ctr"/>
-            <a:endParaRPr lang="en-US"/>
-          </a:p>
-        </p:txBody>
-      </p:sp>
-      <p:sp>
-        <p:nvSpPr>
-          <p:cNvPr id="9" name="Oval 8"/>
-          <p:cNvSpPr/>
-          <p:nvPr/>
-        </p:nvSpPr>
-        <p:spPr>
-          <a:xfrm>
-            <a:off x="5660434" y="2745568"/>
-            <a:ext cx="556260" cy="533400"/>
-          </a:xfrm>
-          <a:prstGeom prst="ellipse">
-            <a:avLst/>
-          </a:prstGeom>
-          <a:solidFill>
-            <a:schemeClr val="bg2">
-              <a:lumMod val="50000"/>
-            </a:schemeClr>
-          </a:solidFill>
-          <a:ln w="28575">
-            <a:solidFill>
-              <a:schemeClr val="tx1"/>
-            </a:solidFill>
-          </a:ln>
-        </p:spPr>
-        <p:style>
-          <a:lnRef idx="2">
-            <a:schemeClr val="accent1">
-              <a:shade val="50000"/>
-            </a:schemeClr>
-          </a:lnRef>
-          <a:fillRef idx="1">
-            <a:schemeClr val="accent1"/>
-          </a:fillRef>
-          <a:effectRef idx="0">
-            <a:schemeClr val="accent1"/>
-          </a:effectRef>
-          <a:fontRef idx="minor">
-            <a:schemeClr val="lt1"/>
-          </a:fontRef>
-        </p:style>
-        <p:txBody>
-          <a:bodyPr rtlCol="0" anchor="ctr"/>
-          <a:lstStyle/>
-          <a:p>
-            <a:pPr algn="ctr"/>
-            <a:endParaRPr lang="en-US"/>
-          </a:p>
-        </p:txBody>
-      </p:sp>
-      <p:sp>
-        <p:nvSpPr>
-          <p:cNvPr id="10" name="Oval 9"/>
-          <p:cNvSpPr/>
-          <p:nvPr/>
-        </p:nvSpPr>
-        <p:spPr>
-          <a:xfrm>
-            <a:off x="6457944" y="2745568"/>
-            <a:ext cx="556260" cy="533400"/>
-          </a:xfrm>
-          <a:prstGeom prst="ellipse">
-            <a:avLst/>
-          </a:prstGeom>
-          <a:solidFill>
-            <a:schemeClr val="bg2">
-              <a:lumMod val="50000"/>
-            </a:schemeClr>
-          </a:solidFill>
-          <a:ln w="28575">
-            <a:solidFill>
-              <a:schemeClr val="tx1"/>
-            </a:solidFill>
-          </a:ln>
-        </p:spPr>
-        <p:style>
-          <a:lnRef idx="2">
-            <a:schemeClr val="accent1">
-              <a:shade val="50000"/>
-            </a:schemeClr>
-          </a:lnRef>
-          <a:fillRef idx="1">
-            <a:schemeClr val="accent1"/>
-          </a:fillRef>
-          <a:effectRef idx="0">
-            <a:schemeClr val="accent1"/>
-          </a:effectRef>
-          <a:fontRef idx="minor">
-            <a:schemeClr val="lt1"/>
-          </a:fontRef>
-        </p:style>
-        <p:txBody>
-          <a:bodyPr rtlCol="0" anchor="ctr"/>
-          <a:lstStyle/>
-          <a:p>
-            <a:pPr algn="ctr"/>
-            <a:endParaRPr lang="en-US"/>
-          </a:p>
-        </p:txBody>
-      </p:sp>
-      <p:sp>
-        <p:nvSpPr>
-          <p:cNvPr id="11" name="Oval 10"/>
-          <p:cNvSpPr/>
-          <p:nvPr/>
-        </p:nvSpPr>
-        <p:spPr>
-          <a:xfrm rot="16200000">
-            <a:off x="5037119" y="3795700"/>
-            <a:ext cx="245746" cy="243840"/>
-          </a:xfrm>
-          <a:prstGeom prst="ellipse">
-            <a:avLst/>
-          </a:prstGeom>
-          <a:ln w="19050">
-            <a:solidFill>
-              <a:schemeClr val="tx1"/>
-            </a:solidFill>
-          </a:ln>
-        </p:spPr>
-        <p:style>
-          <a:lnRef idx="2">
-            <a:schemeClr val="accent1">
-              <a:shade val="50000"/>
-            </a:schemeClr>
-          </a:lnRef>
-          <a:fillRef idx="1">
-            <a:schemeClr val="accent1"/>
-          </a:fillRef>
-          <a:effectRef idx="0">
-            <a:schemeClr val="accent1"/>
-          </a:effectRef>
-          <a:fontRef idx="minor">
-            <a:schemeClr val="lt1"/>
-          </a:fontRef>
-        </p:style>
-        <p:txBody>
-          <a:bodyPr rtlCol="0" anchor="ctr"/>
-          <a:lstStyle/>
-          <a:p>
-            <a:pPr algn="ctr"/>
-            <a:endParaRPr lang="en-US"/>
-          </a:p>
-        </p:txBody>
-      </p:sp>
-      <p:sp>
-        <p:nvSpPr>
-          <p:cNvPr id="12" name="Flowchart: Terminator 11"/>
-          <p:cNvSpPr/>
-          <p:nvPr/>
-        </p:nvSpPr>
-        <p:spPr>
-          <a:xfrm rot="16200000">
-            <a:off x="5017245" y="3807751"/>
-            <a:ext cx="95488" cy="208168"/>
-          </a:xfrm>
-          <a:prstGeom prst="flowChartTerminator">
-            <a:avLst/>
-          </a:prstGeom>
-          <a:ln w="19050">
-            <a:solidFill>
-              <a:schemeClr val="tx1"/>
-            </a:solidFill>
-          </a:ln>
-        </p:spPr>
-        <p:style>
-          <a:lnRef idx="2">
-            <a:schemeClr val="accent1">
-              <a:shade val="50000"/>
-            </a:schemeClr>
-          </a:lnRef>
-          <a:fillRef idx="1">
-            <a:schemeClr val="accent1"/>
-          </a:fillRef>
-          <a:effectRef idx="0">
-            <a:schemeClr val="accent1"/>
-          </a:effectRef>
-          <a:fontRef idx="minor">
-            <a:schemeClr val="lt1"/>
-          </a:fontRef>
-        </p:style>
-        <p:txBody>
-          <a:bodyPr rtlCol="0" anchor="ctr"/>
-          <a:lstStyle/>
-          <a:p>
-            <a:pPr algn="ctr"/>
-            <a:endParaRPr lang="en-US"/>
-          </a:p>
-        </p:txBody>
-      </p:sp>
-      <p:sp>
-        <p:nvSpPr>
-          <p:cNvPr id="13" name="Oval 12"/>
-          <p:cNvSpPr/>
-          <p:nvPr/>
-        </p:nvSpPr>
-        <p:spPr>
-          <a:xfrm>
-            <a:off x="5074110" y="4501971"/>
-            <a:ext cx="160020" cy="150019"/>
-          </a:xfrm>
-          <a:prstGeom prst="ellipse">
-            <a:avLst/>
-          </a:prstGeom>
-        </p:spPr>
-        <p:style>
-          <a:lnRef idx="2">
-            <a:schemeClr val="accent1">
-              <a:shade val="50000"/>
-            </a:schemeClr>
-          </a:lnRef>
-          <a:fillRef idx="1">
-            <a:schemeClr val="accent1"/>
-          </a:fillRef>
-          <a:effectRef idx="0">
-            <a:schemeClr val="accent1"/>
-          </a:effectRef>
-          <a:fontRef idx="minor">
-            <a:schemeClr val="lt1"/>
-          </a:fontRef>
-        </p:style>
-        <p:txBody>
-          <a:bodyPr rtlCol="0" anchor="ctr"/>
-          <a:lstStyle/>
-          <a:p>
-            <a:pPr algn="ctr"/>
-            <a:endParaRPr lang="en-US"/>
-          </a:p>
-        </p:txBody>
-      </p:sp>
-      <p:sp>
-        <p:nvSpPr>
-          <p:cNvPr id="14" name="Oval 13"/>
-          <p:cNvSpPr/>
-          <p:nvPr/>
-        </p:nvSpPr>
-        <p:spPr>
-          <a:xfrm>
-            <a:off x="6625461" y="4501971"/>
-            <a:ext cx="160020" cy="150019"/>
-          </a:xfrm>
-          <a:prstGeom prst="ellipse">
-            <a:avLst/>
-          </a:prstGeom>
-        </p:spPr>
-        <p:style>
-          <a:lnRef idx="2">
-            <a:schemeClr val="accent1">
-              <a:shade val="50000"/>
-            </a:schemeClr>
-          </a:lnRef>
-          <a:fillRef idx="1">
-            <a:schemeClr val="accent1"/>
-          </a:fillRef>
-          <a:effectRef idx="0">
-            <a:schemeClr val="accent1"/>
-          </a:effectRef>
-          <a:fontRef idx="minor">
-            <a:schemeClr val="lt1"/>
-          </a:fontRef>
-        </p:style>
-        <p:txBody>
-          <a:bodyPr rtlCol="0" anchor="ctr"/>
-          <a:lstStyle/>
-          <a:p>
-            <a:pPr algn="ctr"/>
-            <a:endParaRPr lang="en-US"/>
-          </a:p>
-        </p:txBody>
-      </p:sp>
-      <p:sp>
-        <p:nvSpPr>
-          <p:cNvPr id="15" name="Oval 14"/>
-          <p:cNvSpPr/>
-          <p:nvPr/>
-        </p:nvSpPr>
-        <p:spPr>
-          <a:xfrm>
-            <a:off x="4863758" y="5009546"/>
-            <a:ext cx="580727" cy="560414"/>
-          </a:xfrm>
-          <a:prstGeom prst="ellipse">
-            <a:avLst/>
-          </a:prstGeom>
-          <a:ln w="28575">
-            <a:solidFill>
-              <a:schemeClr val="bg2"/>
-            </a:solidFill>
-          </a:ln>
-        </p:spPr>
-        <p:style>
-          <a:lnRef idx="2">
-            <a:schemeClr val="accent1">
-              <a:shade val="50000"/>
-            </a:schemeClr>
-          </a:lnRef>
-          <a:fillRef idx="1">
-            <a:schemeClr val="accent1"/>
-          </a:fillRef>
-          <a:effectRef idx="0">
-            <a:schemeClr val="accent1"/>
-          </a:effectRef>
-          <a:fontRef idx="minor">
-            <a:schemeClr val="lt1"/>
-          </a:fontRef>
-        </p:style>
-        <p:txBody>
-          <a:bodyPr rtlCol="0" anchor="ctr"/>
-          <a:lstStyle/>
-          <a:p>
-            <a:pPr algn="ctr"/>
-            <a:endParaRPr lang="en-US"/>
-          </a:p>
-        </p:txBody>
-      </p:sp>
-      <p:sp>
-        <p:nvSpPr>
-          <p:cNvPr id="16" name="Oval 15"/>
-          <p:cNvSpPr/>
-          <p:nvPr/>
-        </p:nvSpPr>
-        <p:spPr>
-          <a:xfrm>
-            <a:off x="4957086" y="5095929"/>
-            <a:ext cx="394069" cy="380371"/>
-          </a:xfrm>
-          <a:prstGeom prst="ellipse">
-            <a:avLst/>
-          </a:prstGeom>
-          <a:ln w="28575">
-            <a:solidFill>
-              <a:schemeClr val="bg2"/>
-            </a:solidFill>
-          </a:ln>
-        </p:spPr>
-        <p:style>
-          <a:lnRef idx="2">
-            <a:schemeClr val="accent1">
-              <a:shade val="50000"/>
-            </a:schemeClr>
-          </a:lnRef>
-          <a:fillRef idx="1">
-            <a:schemeClr val="accent1"/>
-          </a:fillRef>
-          <a:effectRef idx="0">
-            <a:schemeClr val="accent1"/>
-          </a:effectRef>
-          <a:fontRef idx="minor">
-            <a:schemeClr val="lt1"/>
-          </a:fontRef>
-        </p:style>
-        <p:txBody>
-          <a:bodyPr rtlCol="0" anchor="ctr"/>
-          <a:lstStyle/>
-          <a:p>
-            <a:pPr algn="ctr"/>
-            <a:endParaRPr lang="en-US"/>
-          </a:p>
-        </p:txBody>
-      </p:sp>
-      <p:sp>
-        <p:nvSpPr>
-          <p:cNvPr id="17" name="Oval 16"/>
-          <p:cNvSpPr/>
-          <p:nvPr/>
-        </p:nvSpPr>
-        <p:spPr>
-          <a:xfrm>
-            <a:off x="6422429" y="5000772"/>
-            <a:ext cx="580727" cy="560414"/>
-          </a:xfrm>
-          <a:prstGeom prst="ellipse">
-            <a:avLst/>
-          </a:prstGeom>
-          <a:ln w="28575">
-            <a:solidFill>
-              <a:schemeClr val="bg2"/>
-            </a:solidFill>
-          </a:ln>
-        </p:spPr>
-        <p:style>
-          <a:lnRef idx="2">
-            <a:schemeClr val="accent1">
-              <a:shade val="50000"/>
-            </a:schemeClr>
-          </a:lnRef>
-          <a:fillRef idx="1">
-            <a:schemeClr val="accent1"/>
-          </a:fillRef>
-          <a:effectRef idx="0">
-            <a:schemeClr val="accent1"/>
-          </a:effectRef>
-          <a:fontRef idx="minor">
-            <a:schemeClr val="lt1"/>
-          </a:fontRef>
-        </p:style>
-        <p:txBody>
-          <a:bodyPr rtlCol="0" anchor="ctr"/>
-          <a:lstStyle/>
-          <a:p>
-            <a:pPr algn="ctr"/>
-            <a:endParaRPr lang="en-US"/>
-          </a:p>
-        </p:txBody>
-      </p:sp>
-      <p:sp>
-        <p:nvSpPr>
-          <p:cNvPr id="18" name="Oval 17"/>
-          <p:cNvSpPr/>
-          <p:nvPr/>
-        </p:nvSpPr>
-        <p:spPr>
-          <a:xfrm>
-            <a:off x="6515757" y="5087155"/>
-            <a:ext cx="394069" cy="380371"/>
-          </a:xfrm>
-          <a:prstGeom prst="ellipse">
-            <a:avLst/>
-          </a:prstGeom>
-          <a:ln w="28575">
-            <a:solidFill>
-              <a:schemeClr val="bg2"/>
-            </a:solidFill>
-          </a:ln>
-        </p:spPr>
-        <p:style>
-          <a:lnRef idx="2">
-            <a:schemeClr val="accent1">
-              <a:shade val="50000"/>
-            </a:schemeClr>
-          </a:lnRef>
-          <a:fillRef idx="1">
-            <a:schemeClr val="accent1"/>
-          </a:fillRef>
-          <a:effectRef idx="0">
-            <a:schemeClr val="accent1"/>
-          </a:effectRef>
-          <a:fontRef idx="minor">
-            <a:schemeClr val="lt1"/>
-          </a:fontRef>
-        </p:style>
-        <p:txBody>
-          <a:bodyPr rtlCol="0" anchor="ctr"/>
-          <a:lstStyle/>
-          <a:p>
-            <a:pPr algn="ctr"/>
-            <a:endParaRPr lang="en-US"/>
-          </a:p>
-        </p:txBody>
-      </p:sp>
-      <p:cxnSp>
-        <p:nvCxnSpPr>
-          <p:cNvPr id="19" name="Straight Connector 18"/>
-          <p:cNvCxnSpPr>
-            <a:stCxn id="5" idx="0"/>
-          </p:cNvCxnSpPr>
-          <p:nvPr/>
-        </p:nvCxnSpPr>
-        <p:spPr>
-          <a:xfrm>
-            <a:off x="5154121" y="1747348"/>
-            <a:ext cx="1" cy="266700"/>
-          </a:xfrm>
-          <a:prstGeom prst="line">
-            <a:avLst/>
-          </a:prstGeom>
-          <a:ln w="38100"/>
-        </p:spPr>
-        <p:style>
-          <a:lnRef idx="3">
-            <a:schemeClr val="dk1"/>
-          </a:lnRef>
-          <a:fillRef idx="0">
-            <a:schemeClr val="dk1"/>
-          </a:fillRef>
-          <a:effectRef idx="2">
-            <a:schemeClr val="dk1"/>
-          </a:effectRef>
-          <a:fontRef idx="minor">
-            <a:schemeClr val="tx1"/>
-          </a:fontRef>
-        </p:style>
-      </p:cxnSp>
-      <p:cxnSp>
-        <p:nvCxnSpPr>
-          <p:cNvPr id="20" name="Straight Connector 19"/>
-          <p:cNvCxnSpPr/>
-          <p:nvPr/>
-        </p:nvCxnSpPr>
-        <p:spPr>
-          <a:xfrm>
-            <a:off x="5938564" y="1747348"/>
-            <a:ext cx="1" cy="266700"/>
-          </a:xfrm>
-          <a:prstGeom prst="line">
-            <a:avLst/>
-          </a:prstGeom>
-          <a:ln w="38100"/>
-        </p:spPr>
-        <p:style>
-          <a:lnRef idx="3">
-            <a:schemeClr val="dk1"/>
-          </a:lnRef>
-          <a:fillRef idx="0">
-            <a:schemeClr val="dk1"/>
-          </a:fillRef>
-          <a:effectRef idx="2">
-            <a:schemeClr val="dk1"/>
-          </a:effectRef>
-          <a:fontRef idx="minor">
-            <a:schemeClr val="tx1"/>
-          </a:fontRef>
-        </p:style>
-      </p:cxnSp>
-      <p:cxnSp>
-        <p:nvCxnSpPr>
-          <p:cNvPr id="21" name="Straight Connector 20"/>
-          <p:cNvCxnSpPr/>
-          <p:nvPr/>
-        </p:nvCxnSpPr>
-        <p:spPr>
-          <a:xfrm>
-            <a:off x="6734588" y="1753641"/>
-            <a:ext cx="1" cy="266700"/>
-          </a:xfrm>
-          <a:prstGeom prst="line">
-            <a:avLst/>
-          </a:prstGeom>
-          <a:ln w="38100"/>
-        </p:spPr>
-        <p:style>
-          <a:lnRef idx="3">
-            <a:schemeClr val="dk1"/>
-          </a:lnRef>
-          <a:fillRef idx="0">
-            <a:schemeClr val="dk1"/>
-          </a:fillRef>
-          <a:effectRef idx="2">
-            <a:schemeClr val="dk1"/>
-          </a:effectRef>
-          <a:fontRef idx="minor">
-            <a:schemeClr val="tx1"/>
-          </a:fontRef>
-        </p:style>
-      </p:cxnSp>
-      <p:cxnSp>
-        <p:nvCxnSpPr>
-          <p:cNvPr id="22" name="Straight Connector 21"/>
-          <p:cNvCxnSpPr/>
-          <p:nvPr/>
-        </p:nvCxnSpPr>
-        <p:spPr>
-          <a:xfrm>
-            <a:off x="5147733" y="2745568"/>
-            <a:ext cx="1" cy="266700"/>
-          </a:xfrm>
-          <a:prstGeom prst="line">
-            <a:avLst/>
-          </a:prstGeom>
-          <a:ln w="38100"/>
-        </p:spPr>
-        <p:style>
-          <a:lnRef idx="3">
-            <a:schemeClr val="dk1"/>
-          </a:lnRef>
-          <a:fillRef idx="0">
-            <a:schemeClr val="dk1"/>
-          </a:fillRef>
-          <a:effectRef idx="2">
-            <a:schemeClr val="dk1"/>
-          </a:effectRef>
-          <a:fontRef idx="minor">
-            <a:schemeClr val="tx1"/>
-          </a:fontRef>
-        </p:style>
-      </p:cxnSp>
-      <p:cxnSp>
-        <p:nvCxnSpPr>
-          <p:cNvPr id="23" name="Straight Connector 22"/>
-          <p:cNvCxnSpPr/>
-          <p:nvPr/>
-        </p:nvCxnSpPr>
-        <p:spPr>
-          <a:xfrm>
-            <a:off x="5938564" y="2745568"/>
-            <a:ext cx="1" cy="266700"/>
-          </a:xfrm>
-          <a:prstGeom prst="line">
-            <a:avLst/>
-          </a:prstGeom>
-          <a:ln w="38100"/>
-        </p:spPr>
-        <p:style>
-          <a:lnRef idx="3">
-            <a:schemeClr val="dk1"/>
-          </a:lnRef>
-          <a:fillRef idx="0">
-            <a:schemeClr val="dk1"/>
-          </a:fillRef>
-          <a:effectRef idx="2">
-            <a:schemeClr val="dk1"/>
-          </a:effectRef>
-          <a:fontRef idx="minor">
-            <a:schemeClr val="tx1"/>
-          </a:fontRef>
-        </p:style>
-      </p:cxnSp>
-      <p:cxnSp>
-        <p:nvCxnSpPr>
-          <p:cNvPr id="24" name="Straight Connector 23"/>
-          <p:cNvCxnSpPr/>
-          <p:nvPr/>
-        </p:nvCxnSpPr>
-        <p:spPr>
-          <a:xfrm>
-            <a:off x="6733635" y="2745568"/>
-            <a:ext cx="1" cy="266700"/>
-          </a:xfrm>
-          <a:prstGeom prst="line">
-            <a:avLst/>
-          </a:prstGeom>
-          <a:ln w="38100"/>
-        </p:spPr>
-        <p:style>
-          <a:lnRef idx="3">
-            <a:schemeClr val="dk1"/>
-          </a:lnRef>
-          <a:fillRef idx="0">
-            <a:schemeClr val="dk1"/>
-          </a:fillRef>
-          <a:effectRef idx="2">
-            <a:schemeClr val="dk1"/>
-          </a:effectRef>
-          <a:fontRef idx="minor">
-            <a:schemeClr val="tx1"/>
-          </a:fontRef>
-        </p:style>
-      </p:cxnSp>
-      <p:sp>
-        <p:nvSpPr>
-          <p:cNvPr id="25" name="TextBox 24"/>
-          <p:cNvSpPr txBox="1"/>
-          <p:nvPr/>
-        </p:nvSpPr>
-        <p:spPr>
-          <a:xfrm>
-            <a:off x="4839796" y="2261143"/>
-            <a:ext cx="615874" cy="246221"/>
-          </a:xfrm>
-          <a:prstGeom prst="rect">
-            <a:avLst/>
-          </a:prstGeom>
-          <a:noFill/>
-        </p:spPr>
-        <p:txBody>
-          <a:bodyPr wrap="none" rtlCol="0">
-            <a:spAutoFit/>
-          </a:bodyPr>
-          <a:lstStyle/>
-          <a:p>
-            <a:pPr algn="ctr"/>
-            <a:r>
-              <a:rPr lang="en-US" sz="1000" b="1" dirty="0">
-                <a:latin typeface="Century Gothic" panose="020B0502020202020204" pitchFamily="34" charset="0"/>
-                <a:cs typeface="Adobe Devanagari" panose="02040503050201020203" pitchFamily="18" charset="0"/>
-              </a:rPr>
-              <a:t>Knob 1</a:t>
-            </a:r>
-          </a:p>
-        </p:txBody>
-      </p:sp>
-      <p:sp>
-        <p:nvSpPr>
-          <p:cNvPr id="26" name="TextBox 25"/>
-          <p:cNvSpPr txBox="1"/>
-          <p:nvPr/>
-        </p:nvSpPr>
-        <p:spPr>
-          <a:xfrm>
-            <a:off x="5644770" y="2261142"/>
-            <a:ext cx="615874" cy="246221"/>
-          </a:xfrm>
-          <a:prstGeom prst="rect">
-            <a:avLst/>
-          </a:prstGeom>
-          <a:noFill/>
-        </p:spPr>
-        <p:txBody>
-          <a:bodyPr wrap="none" rtlCol="0">
-            <a:spAutoFit/>
-          </a:bodyPr>
-          <a:lstStyle/>
-          <a:p>
-            <a:pPr algn="ctr"/>
-            <a:r>
-              <a:rPr lang="en-US" sz="1000" b="1" dirty="0">
-                <a:latin typeface="Century Gothic" panose="020B0502020202020204" pitchFamily="34" charset="0"/>
-                <a:cs typeface="Adobe Devanagari" panose="02040503050201020203" pitchFamily="18" charset="0"/>
-              </a:rPr>
-              <a:t>Knob 2</a:t>
-            </a:r>
-          </a:p>
-        </p:txBody>
-      </p:sp>
-      <p:sp>
-        <p:nvSpPr>
-          <p:cNvPr id="27" name="TextBox 26"/>
-          <p:cNvSpPr txBox="1"/>
-          <p:nvPr/>
-        </p:nvSpPr>
-        <p:spPr>
-          <a:xfrm>
-            <a:off x="6425873" y="2267910"/>
-            <a:ext cx="615874" cy="246221"/>
-          </a:xfrm>
-          <a:prstGeom prst="rect">
-            <a:avLst/>
-          </a:prstGeom>
-          <a:noFill/>
-        </p:spPr>
-        <p:txBody>
-          <a:bodyPr wrap="none" rtlCol="0">
-            <a:spAutoFit/>
-          </a:bodyPr>
-          <a:lstStyle/>
-          <a:p>
-            <a:pPr algn="ctr"/>
-            <a:r>
-              <a:rPr lang="en-US" sz="1000" b="1" dirty="0">
-                <a:latin typeface="Century Gothic" panose="020B0502020202020204" pitchFamily="34" charset="0"/>
-                <a:cs typeface="Adobe Devanagari" panose="02040503050201020203" pitchFamily="18" charset="0"/>
-              </a:rPr>
-              <a:t>Knob 3</a:t>
-            </a:r>
-          </a:p>
-        </p:txBody>
-      </p:sp>
-      <p:sp>
-        <p:nvSpPr>
-          <p:cNvPr id="28" name="TextBox 27"/>
-          <p:cNvSpPr txBox="1"/>
-          <p:nvPr/>
-        </p:nvSpPr>
-        <p:spPr>
-          <a:xfrm>
-            <a:off x="5648947" y="3267265"/>
-            <a:ext cx="615874" cy="246221"/>
-          </a:xfrm>
-          <a:prstGeom prst="rect">
-            <a:avLst/>
-          </a:prstGeom>
-          <a:noFill/>
-        </p:spPr>
-        <p:txBody>
-          <a:bodyPr wrap="none" rtlCol="0">
-            <a:spAutoFit/>
-          </a:bodyPr>
-          <a:lstStyle/>
-          <a:p>
-            <a:pPr algn="ctr"/>
-            <a:r>
-              <a:rPr lang="en-US" sz="1000" b="1" dirty="0">
-                <a:latin typeface="Century Gothic" panose="020B0502020202020204" pitchFamily="34" charset="0"/>
-                <a:cs typeface="Adobe Devanagari" panose="02040503050201020203" pitchFamily="18" charset="0"/>
-              </a:rPr>
-              <a:t>Knob 5</a:t>
-            </a:r>
-          </a:p>
-        </p:txBody>
-      </p:sp>
-      <p:sp>
-        <p:nvSpPr>
-          <p:cNvPr id="29" name="TextBox 28"/>
-          <p:cNvSpPr txBox="1"/>
-          <p:nvPr/>
-        </p:nvSpPr>
-        <p:spPr>
-          <a:xfrm>
-            <a:off x="6432054" y="3267265"/>
-            <a:ext cx="615874" cy="246221"/>
-          </a:xfrm>
-          <a:prstGeom prst="rect">
-            <a:avLst/>
-          </a:prstGeom>
-          <a:noFill/>
-        </p:spPr>
-        <p:txBody>
-          <a:bodyPr wrap="none" rtlCol="0">
-            <a:spAutoFit/>
-          </a:bodyPr>
-          <a:lstStyle/>
-          <a:p>
-            <a:pPr algn="ctr"/>
-            <a:r>
-              <a:rPr lang="en-US" sz="1000" b="1" dirty="0">
-                <a:latin typeface="Century Gothic" panose="020B0502020202020204" pitchFamily="34" charset="0"/>
-                <a:cs typeface="Adobe Devanagari" panose="02040503050201020203" pitchFamily="18" charset="0"/>
-              </a:rPr>
-              <a:t>Knob 6</a:t>
-            </a:r>
-          </a:p>
-        </p:txBody>
-      </p:sp>
-      <p:sp>
-        <p:nvSpPr>
-          <p:cNvPr id="30" name="TextBox 29"/>
-          <p:cNvSpPr txBox="1"/>
-          <p:nvPr/>
-        </p:nvSpPr>
-        <p:spPr>
-          <a:xfrm>
-            <a:off x="4846186" y="3267265"/>
-            <a:ext cx="615874" cy="246221"/>
-          </a:xfrm>
-          <a:prstGeom prst="rect">
-            <a:avLst/>
-          </a:prstGeom>
-          <a:noFill/>
-        </p:spPr>
-        <p:txBody>
-          <a:bodyPr wrap="none" rtlCol="0">
-            <a:spAutoFit/>
-          </a:bodyPr>
-          <a:lstStyle/>
-          <a:p>
-            <a:pPr algn="ctr"/>
-            <a:r>
-              <a:rPr lang="en-US" sz="1000" b="1" dirty="0">
-                <a:latin typeface="Century Gothic" panose="020B0502020202020204" pitchFamily="34" charset="0"/>
-                <a:cs typeface="Adobe Devanagari" panose="02040503050201020203" pitchFamily="18" charset="0"/>
-              </a:rPr>
-              <a:t>Knob 4</a:t>
-            </a:r>
-          </a:p>
-        </p:txBody>
-      </p:sp>
-      <p:sp>
-        <p:nvSpPr>
-          <p:cNvPr id="31" name="TextBox 30"/>
-          <p:cNvSpPr txBox="1"/>
-          <p:nvPr/>
-        </p:nvSpPr>
-        <p:spPr>
-          <a:xfrm>
-            <a:off x="4803473" y="5548458"/>
-            <a:ext cx="724878" cy="246221"/>
-          </a:xfrm>
-          <a:prstGeom prst="rect">
-            <a:avLst/>
-          </a:prstGeom>
-          <a:noFill/>
-        </p:spPr>
-        <p:txBody>
-          <a:bodyPr wrap="none" rtlCol="0">
-            <a:spAutoFit/>
-          </a:bodyPr>
-          <a:lstStyle/>
-          <a:p>
-            <a:pPr algn="ctr"/>
-            <a:r>
-              <a:rPr lang="en-US" sz="1000" b="1" dirty="0" err="1">
-                <a:latin typeface="Century Gothic" panose="020B0502020202020204" pitchFamily="34" charset="0"/>
-                <a:cs typeface="Adobe Devanagari" panose="02040503050201020203" pitchFamily="18" charset="0"/>
-              </a:rPr>
-              <a:t>FootSw</a:t>
-            </a:r>
-            <a:r>
-              <a:rPr lang="en-US" sz="1000" b="1" dirty="0">
-                <a:latin typeface="Century Gothic" panose="020B0502020202020204" pitchFamily="34" charset="0"/>
-                <a:cs typeface="Adobe Devanagari" panose="02040503050201020203" pitchFamily="18" charset="0"/>
-              </a:rPr>
-              <a:t> 1</a:t>
-            </a:r>
-          </a:p>
-        </p:txBody>
-      </p:sp>
-      <p:sp>
-        <p:nvSpPr>
-          <p:cNvPr id="32" name="TextBox 31"/>
-          <p:cNvSpPr txBox="1"/>
-          <p:nvPr/>
-        </p:nvSpPr>
-        <p:spPr>
-          <a:xfrm rot="16200000">
-            <a:off x="4892535" y="4030683"/>
-            <a:ext cx="455573" cy="461665"/>
-          </a:xfrm>
-          <a:prstGeom prst="rect">
-            <a:avLst/>
-          </a:prstGeom>
-          <a:noFill/>
-        </p:spPr>
-        <p:txBody>
-          <a:bodyPr wrap="none" rtlCol="0">
-            <a:spAutoFit/>
-          </a:bodyPr>
-          <a:lstStyle/>
-          <a:p>
-            <a:pPr algn="ctr"/>
-            <a:r>
-              <a:rPr lang="en-US" sz="800" b="1" dirty="0">
-                <a:latin typeface="Century Gothic" panose="020B0502020202020204" pitchFamily="34" charset="0"/>
-                <a:cs typeface="Adobe Devanagari" panose="02040503050201020203" pitchFamily="18" charset="0"/>
-              </a:rPr>
-              <a:t>Opt 1</a:t>
-            </a:r>
-          </a:p>
-          <a:p>
-            <a:pPr algn="ctr"/>
-            <a:r>
-              <a:rPr lang="en-US" sz="800" b="1" dirty="0">
-                <a:latin typeface="Century Gothic" panose="020B0502020202020204" pitchFamily="34" charset="0"/>
-                <a:cs typeface="Adobe Devanagari" panose="02040503050201020203" pitchFamily="18" charset="0"/>
-              </a:rPr>
-              <a:t>Opt 2</a:t>
-            </a:r>
-          </a:p>
-          <a:p>
-            <a:pPr algn="ctr"/>
-            <a:r>
-              <a:rPr lang="en-US" sz="800" b="1" dirty="0">
-                <a:latin typeface="Century Gothic" panose="020B0502020202020204" pitchFamily="34" charset="0"/>
-                <a:cs typeface="Adobe Devanagari" panose="02040503050201020203" pitchFamily="18" charset="0"/>
-              </a:rPr>
-              <a:t>Opt 3</a:t>
-            </a:r>
-          </a:p>
-        </p:txBody>
-      </p:sp>
-      <p:sp>
-        <p:nvSpPr>
-          <p:cNvPr id="33" name="TextBox 32"/>
-          <p:cNvSpPr txBox="1"/>
-          <p:nvPr/>
-        </p:nvSpPr>
-        <p:spPr>
-          <a:xfrm>
-            <a:off x="5081621" y="4570836"/>
-            <a:ext cx="1742170" cy="461665"/>
-          </a:xfrm>
-          <a:prstGeom prst="rect">
-            <a:avLst/>
-          </a:prstGeom>
-          <a:noFill/>
-        </p:spPr>
-        <p:txBody>
-          <a:bodyPr wrap="square" rtlCol="0">
-            <a:spAutoFit/>
-          </a:bodyPr>
-          <a:lstStyle/>
-          <a:p>
-            <a:pPr algn="ctr"/>
-            <a:r>
-              <a:rPr lang="en-US" sz="2400" b="1" dirty="0" err="1">
-                <a:latin typeface="Broadway" panose="04040905080B02020502" pitchFamily="82" charset="0"/>
-                <a:cs typeface="Adobe Devanagari" panose="02040503050201020203" pitchFamily="18" charset="0"/>
-              </a:rPr>
-              <a:t>FunBox</a:t>
-            </a:r>
-            <a:endParaRPr lang="en-US" sz="2400" b="1" dirty="0">
-              <a:latin typeface="Broadway" panose="04040905080B02020502" pitchFamily="82" charset="0"/>
-              <a:cs typeface="Adobe Devanagari" panose="02040503050201020203" pitchFamily="18" charset="0"/>
-            </a:endParaRPr>
-          </a:p>
-        </p:txBody>
-      </p:sp>
-      <p:sp>
-        <p:nvSpPr>
-          <p:cNvPr id="35" name="Oval 34"/>
-          <p:cNvSpPr/>
-          <p:nvPr/>
-        </p:nvSpPr>
-        <p:spPr>
-          <a:xfrm rot="16200000">
-            <a:off x="5830387" y="3795700"/>
-            <a:ext cx="245746" cy="243840"/>
-          </a:xfrm>
-          <a:prstGeom prst="ellipse">
-            <a:avLst/>
-          </a:prstGeom>
-          <a:ln w="19050">
-            <a:solidFill>
-              <a:schemeClr val="tx1"/>
-            </a:solidFill>
-          </a:ln>
-        </p:spPr>
-        <p:style>
-          <a:lnRef idx="2">
-            <a:schemeClr val="accent1">
-              <a:shade val="50000"/>
-            </a:schemeClr>
-          </a:lnRef>
-          <a:fillRef idx="1">
-            <a:schemeClr val="accent1"/>
-          </a:fillRef>
-          <a:effectRef idx="0">
-            <a:schemeClr val="accent1"/>
-          </a:effectRef>
-          <a:fontRef idx="minor">
-            <a:schemeClr val="lt1"/>
-          </a:fontRef>
-        </p:style>
-        <p:txBody>
-          <a:bodyPr rtlCol="0" anchor="ctr"/>
-          <a:lstStyle/>
-          <a:p>
-            <a:pPr algn="ctr"/>
-            <a:endParaRPr lang="en-US"/>
-          </a:p>
-        </p:txBody>
-      </p:sp>
-      <p:sp>
-        <p:nvSpPr>
-          <p:cNvPr id="36" name="Flowchart: Terminator 35"/>
-          <p:cNvSpPr/>
-          <p:nvPr/>
-        </p:nvSpPr>
-        <p:spPr>
-          <a:xfrm rot="16200000">
-            <a:off x="5810513" y="3807751"/>
-            <a:ext cx="95488" cy="208168"/>
-          </a:xfrm>
-          <a:prstGeom prst="flowChartTerminator">
-            <a:avLst/>
-          </a:prstGeom>
-          <a:ln w="19050">
-            <a:solidFill>
-              <a:schemeClr val="tx1"/>
-            </a:solidFill>
-          </a:ln>
-        </p:spPr>
-        <p:style>
-          <a:lnRef idx="2">
-            <a:schemeClr val="accent1">
-              <a:shade val="50000"/>
-            </a:schemeClr>
-          </a:lnRef>
-          <a:fillRef idx="1">
-            <a:schemeClr val="accent1"/>
-          </a:fillRef>
-          <a:effectRef idx="0">
-            <a:schemeClr val="accent1"/>
-          </a:effectRef>
-          <a:fontRef idx="minor">
-            <a:schemeClr val="lt1"/>
-          </a:fontRef>
-        </p:style>
-        <p:txBody>
-          <a:bodyPr rtlCol="0" anchor="ctr"/>
-          <a:lstStyle/>
-          <a:p>
-            <a:pPr algn="ctr"/>
-            <a:endParaRPr lang="en-US"/>
-          </a:p>
-        </p:txBody>
-      </p:sp>
-      <p:sp>
-        <p:nvSpPr>
-          <p:cNvPr id="37" name="Oval 36"/>
-          <p:cNvSpPr/>
-          <p:nvPr/>
-        </p:nvSpPr>
-        <p:spPr>
-          <a:xfrm rot="16200000">
-            <a:off x="6651163" y="3795700"/>
-            <a:ext cx="245746" cy="243840"/>
-          </a:xfrm>
-          <a:prstGeom prst="ellipse">
-            <a:avLst/>
-          </a:prstGeom>
-          <a:ln w="19050">
-            <a:solidFill>
-              <a:schemeClr val="tx1"/>
-            </a:solidFill>
-          </a:ln>
-        </p:spPr>
-        <p:style>
-          <a:lnRef idx="2">
-            <a:schemeClr val="accent1">
-              <a:shade val="50000"/>
-            </a:schemeClr>
-          </a:lnRef>
-          <a:fillRef idx="1">
-            <a:schemeClr val="accent1"/>
-          </a:fillRef>
-          <a:effectRef idx="0">
-            <a:schemeClr val="accent1"/>
-          </a:effectRef>
-          <a:fontRef idx="minor">
-            <a:schemeClr val="lt1"/>
-          </a:fontRef>
-        </p:style>
-        <p:txBody>
-          <a:bodyPr rtlCol="0" anchor="ctr"/>
-          <a:lstStyle/>
-          <a:p>
-            <a:pPr algn="ctr"/>
-            <a:endParaRPr lang="en-US"/>
-          </a:p>
-        </p:txBody>
-      </p:sp>
-      <p:sp>
-        <p:nvSpPr>
-          <p:cNvPr id="38" name="Flowchart: Terminator 37"/>
-          <p:cNvSpPr/>
-          <p:nvPr/>
-        </p:nvSpPr>
-        <p:spPr>
-          <a:xfrm rot="16200000">
-            <a:off x="6631289" y="3807751"/>
-            <a:ext cx="95488" cy="208168"/>
-          </a:xfrm>
-          <a:prstGeom prst="flowChartTerminator">
-            <a:avLst/>
-          </a:prstGeom>
-          <a:ln w="19050">
-            <a:solidFill>
-              <a:schemeClr val="tx1"/>
-            </a:solidFill>
-          </a:ln>
-        </p:spPr>
-        <p:style>
-          <a:lnRef idx="2">
-            <a:schemeClr val="accent1">
-              <a:shade val="50000"/>
-            </a:schemeClr>
-          </a:lnRef>
-          <a:fillRef idx="1">
-            <a:schemeClr val="accent1"/>
-          </a:fillRef>
-          <a:effectRef idx="0">
-            <a:schemeClr val="accent1"/>
-          </a:effectRef>
-          <a:fontRef idx="minor">
-            <a:schemeClr val="lt1"/>
-          </a:fontRef>
-        </p:style>
-        <p:txBody>
-          <a:bodyPr rtlCol="0" anchor="ctr"/>
-          <a:lstStyle/>
-          <a:p>
-            <a:pPr algn="ctr"/>
-            <a:endParaRPr lang="en-US"/>
-          </a:p>
-        </p:txBody>
-      </p:sp>
-      <p:sp>
-        <p:nvSpPr>
-          <p:cNvPr id="39" name="TextBox 38"/>
-          <p:cNvSpPr txBox="1"/>
-          <p:nvPr/>
-        </p:nvSpPr>
-        <p:spPr>
-          <a:xfrm rot="16200000">
-            <a:off x="5705042" y="4049121"/>
-            <a:ext cx="455574" cy="461665"/>
-          </a:xfrm>
-          <a:prstGeom prst="rect">
-            <a:avLst/>
-          </a:prstGeom>
-          <a:noFill/>
-        </p:spPr>
-        <p:txBody>
-          <a:bodyPr wrap="none" rtlCol="0">
-            <a:spAutoFit/>
-          </a:bodyPr>
-          <a:lstStyle/>
-          <a:p>
-            <a:pPr algn="ctr"/>
-            <a:r>
-              <a:rPr lang="en-US" sz="800" b="1" dirty="0">
-                <a:latin typeface="Century Gothic" panose="020B0502020202020204" pitchFamily="34" charset="0"/>
-                <a:cs typeface="Adobe Devanagari" panose="02040503050201020203" pitchFamily="18" charset="0"/>
-              </a:rPr>
-              <a:t>Opt 1</a:t>
-            </a:r>
-          </a:p>
-          <a:p>
-            <a:pPr algn="ctr"/>
-            <a:r>
-              <a:rPr lang="en-US" sz="800" b="1" dirty="0">
-                <a:latin typeface="Century Gothic" panose="020B0502020202020204" pitchFamily="34" charset="0"/>
-                <a:cs typeface="Adobe Devanagari" panose="02040503050201020203" pitchFamily="18" charset="0"/>
-              </a:rPr>
-              <a:t>Opt 2</a:t>
-            </a:r>
-          </a:p>
-          <a:p>
-            <a:pPr algn="ctr"/>
-            <a:r>
-              <a:rPr lang="en-US" sz="800" b="1" dirty="0">
-                <a:latin typeface="Century Gothic" panose="020B0502020202020204" pitchFamily="34" charset="0"/>
-                <a:cs typeface="Adobe Devanagari" panose="02040503050201020203" pitchFamily="18" charset="0"/>
-              </a:rPr>
-              <a:t>Opt 3</a:t>
-            </a:r>
-          </a:p>
-        </p:txBody>
-      </p:sp>
-      <p:sp>
-        <p:nvSpPr>
-          <p:cNvPr id="40" name="TextBox 39"/>
-          <p:cNvSpPr txBox="1"/>
-          <p:nvPr/>
-        </p:nvSpPr>
-        <p:spPr>
-          <a:xfrm rot="16200000">
-            <a:off x="6540944" y="4039021"/>
-            <a:ext cx="455574" cy="461665"/>
-          </a:xfrm>
-          <a:prstGeom prst="rect">
-            <a:avLst/>
-          </a:prstGeom>
-          <a:noFill/>
-        </p:spPr>
-        <p:txBody>
-          <a:bodyPr wrap="none" rtlCol="0">
-            <a:spAutoFit/>
-          </a:bodyPr>
-          <a:lstStyle/>
-          <a:p>
-            <a:pPr algn="ctr"/>
-            <a:r>
-              <a:rPr lang="en-US" sz="800" b="1" dirty="0">
-                <a:latin typeface="Century Gothic" panose="020B0502020202020204" pitchFamily="34" charset="0"/>
-                <a:cs typeface="Adobe Devanagari" panose="02040503050201020203" pitchFamily="18" charset="0"/>
-              </a:rPr>
-              <a:t>Opt 1</a:t>
-            </a:r>
-          </a:p>
-          <a:p>
-            <a:pPr algn="ctr"/>
-            <a:r>
-              <a:rPr lang="en-US" sz="800" b="1" dirty="0">
-                <a:latin typeface="Century Gothic" panose="020B0502020202020204" pitchFamily="34" charset="0"/>
-                <a:cs typeface="Adobe Devanagari" panose="02040503050201020203" pitchFamily="18" charset="0"/>
-              </a:rPr>
-              <a:t>Opt 2</a:t>
-            </a:r>
-          </a:p>
-          <a:p>
-            <a:pPr algn="ctr"/>
-            <a:r>
-              <a:rPr lang="en-US" sz="800" b="1" dirty="0">
-                <a:latin typeface="Century Gothic" panose="020B0502020202020204" pitchFamily="34" charset="0"/>
-                <a:cs typeface="Adobe Devanagari" panose="02040503050201020203" pitchFamily="18" charset="0"/>
-              </a:rPr>
-              <a:t>Opt 3</a:t>
-            </a:r>
-          </a:p>
-        </p:txBody>
-      </p:sp>
-      <p:sp>
-        <p:nvSpPr>
-          <p:cNvPr id="41" name="TextBox 40"/>
-          <p:cNvSpPr txBox="1"/>
-          <p:nvPr/>
-        </p:nvSpPr>
-        <p:spPr>
-          <a:xfrm>
-            <a:off x="4837137" y="3551712"/>
-            <a:ext cx="657552" cy="230832"/>
-          </a:xfrm>
-          <a:prstGeom prst="rect">
-            <a:avLst/>
-          </a:prstGeom>
-          <a:noFill/>
-        </p:spPr>
-        <p:txBody>
-          <a:bodyPr wrap="none" rtlCol="0">
-            <a:spAutoFit/>
-          </a:bodyPr>
-          <a:lstStyle/>
-          <a:p>
-            <a:pPr algn="ctr"/>
-            <a:r>
-              <a:rPr lang="en-US" sz="900" b="1" dirty="0">
-                <a:latin typeface="Century Gothic" panose="020B0502020202020204" pitchFamily="34" charset="0"/>
-                <a:cs typeface="Adobe Devanagari" panose="02040503050201020203" pitchFamily="18" charset="0"/>
-              </a:rPr>
-              <a:t>Toggle 1</a:t>
-            </a:r>
-          </a:p>
-        </p:txBody>
-      </p:sp>
-      <p:sp>
-        <p:nvSpPr>
-          <p:cNvPr id="42" name="TextBox 41"/>
-          <p:cNvSpPr txBox="1"/>
-          <p:nvPr/>
-        </p:nvSpPr>
-        <p:spPr>
-          <a:xfrm>
-            <a:off x="5623930" y="3560229"/>
-            <a:ext cx="657552" cy="230832"/>
-          </a:xfrm>
-          <a:prstGeom prst="rect">
-            <a:avLst/>
-          </a:prstGeom>
-          <a:noFill/>
-        </p:spPr>
-        <p:txBody>
-          <a:bodyPr wrap="none" rtlCol="0">
-            <a:spAutoFit/>
-          </a:bodyPr>
-          <a:lstStyle/>
-          <a:p>
-            <a:pPr algn="ctr"/>
-            <a:r>
-              <a:rPr lang="en-US" sz="900" b="1" dirty="0">
-                <a:latin typeface="Century Gothic" panose="020B0502020202020204" pitchFamily="34" charset="0"/>
-                <a:cs typeface="Adobe Devanagari" panose="02040503050201020203" pitchFamily="18" charset="0"/>
-              </a:rPr>
-              <a:t>Toggle 2</a:t>
-            </a:r>
-          </a:p>
-        </p:txBody>
-      </p:sp>
-      <p:sp>
-        <p:nvSpPr>
-          <p:cNvPr id="43" name="TextBox 42"/>
-          <p:cNvSpPr txBox="1"/>
-          <p:nvPr/>
-        </p:nvSpPr>
-        <p:spPr>
-          <a:xfrm>
-            <a:off x="6454343" y="3562383"/>
-            <a:ext cx="657552" cy="230832"/>
-          </a:xfrm>
-          <a:prstGeom prst="rect">
-            <a:avLst/>
-          </a:prstGeom>
-          <a:noFill/>
-        </p:spPr>
-        <p:txBody>
-          <a:bodyPr wrap="none" rtlCol="0">
-            <a:spAutoFit/>
-          </a:bodyPr>
-          <a:lstStyle/>
-          <a:p>
-            <a:pPr algn="ctr"/>
-            <a:r>
-              <a:rPr lang="en-US" sz="900" b="1" dirty="0">
-                <a:latin typeface="Century Gothic" panose="020B0502020202020204" pitchFamily="34" charset="0"/>
-                <a:cs typeface="Adobe Devanagari" panose="02040503050201020203" pitchFamily="18" charset="0"/>
-              </a:rPr>
-              <a:t>Toggle 3</a:t>
-            </a:r>
-          </a:p>
-        </p:txBody>
-      </p:sp>
-      <p:sp>
-        <p:nvSpPr>
-          <p:cNvPr id="49" name="Rectangle 48"/>
-          <p:cNvSpPr/>
-          <p:nvPr/>
-        </p:nvSpPr>
-        <p:spPr>
-          <a:xfrm>
-            <a:off x="4552601" y="262549"/>
-            <a:ext cx="2675728" cy="727102"/>
-          </a:xfrm>
-          <a:prstGeom prst="rect">
-            <a:avLst/>
-          </a:prstGeom>
-        </p:spPr>
-        <p:style>
-          <a:lnRef idx="2">
-            <a:schemeClr val="dk1">
-              <a:shade val="50000"/>
-            </a:schemeClr>
-          </a:lnRef>
-          <a:fillRef idx="1003">
-            <a:schemeClr val="lt1"/>
-          </a:fillRef>
-          <a:effectRef idx="0">
-            <a:schemeClr val="dk1"/>
-          </a:effectRef>
-          <a:fontRef idx="minor">
-            <a:schemeClr val="lt1"/>
-          </a:fontRef>
-        </p:style>
-        <p:txBody>
-          <a:bodyPr rtlCol="0" anchor="ctr"/>
-          <a:lstStyle/>
-          <a:p>
-            <a:pPr marL="285750" indent="-285750">
-              <a:buFont typeface="Arial" panose="020B0604020202020204" pitchFamily="34" charset="0"/>
-              <a:buChar char="•"/>
-            </a:pPr>
-            <a:r>
-              <a:rPr lang="en-US" sz="1600" b="1" dirty="0">
-                <a:solidFill>
-                  <a:schemeClr val="tx1"/>
-                </a:solidFill>
-              </a:rPr>
-              <a:t>Stereo ¼” In/Out Jacks</a:t>
-            </a:r>
-          </a:p>
-          <a:p>
-            <a:pPr marL="285750" indent="-285750">
-              <a:buFont typeface="Arial" panose="020B0604020202020204" pitchFamily="34" charset="0"/>
-              <a:buChar char="•"/>
-            </a:pPr>
-            <a:r>
-              <a:rPr lang="en-US" sz="1600" b="1" dirty="0">
-                <a:solidFill>
-                  <a:schemeClr val="tx1"/>
-                </a:solidFill>
-              </a:rPr>
-              <a:t>9v Center Negative Power</a:t>
-            </a:r>
-          </a:p>
-        </p:txBody>
-      </p:sp>
-      <p:sp>
-        <p:nvSpPr>
-          <p:cNvPr id="52" name="Rectangle 51"/>
-          <p:cNvSpPr/>
-          <p:nvPr/>
-        </p:nvSpPr>
-        <p:spPr>
-          <a:xfrm>
-            <a:off x="7503067" y="1963518"/>
-            <a:ext cx="2433413" cy="428695"/>
-          </a:xfrm>
-          <a:prstGeom prst="rect">
-            <a:avLst/>
-          </a:prstGeom>
-        </p:spPr>
-        <p:style>
-          <a:lnRef idx="2">
-            <a:schemeClr val="dk1">
-              <a:shade val="50000"/>
-            </a:schemeClr>
-          </a:lnRef>
-          <a:fillRef idx="1003">
-            <a:schemeClr val="dk1"/>
-          </a:fillRef>
-          <a:effectRef idx="0">
-            <a:schemeClr val="dk1"/>
-          </a:effectRef>
-          <a:fontRef idx="minor">
-            <a:schemeClr val="lt1"/>
-          </a:fontRef>
-        </p:style>
-        <p:txBody>
-          <a:bodyPr rtlCol="0" anchor="ctr"/>
-          <a:lstStyle/>
-          <a:p>
-            <a:r>
-              <a:rPr lang="en-US" sz="1600" b="1" dirty="0">
-                <a:solidFill>
-                  <a:schemeClr val="bg1"/>
-                </a:solidFill>
-              </a:rPr>
-              <a:t>MIDI Input (1/8” TRS Jack)</a:t>
-            </a:r>
-          </a:p>
-        </p:txBody>
-      </p:sp>
-      <p:sp>
-        <p:nvSpPr>
-          <p:cNvPr id="55" name="Rectangle 54"/>
-          <p:cNvSpPr/>
-          <p:nvPr/>
-        </p:nvSpPr>
-        <p:spPr>
-          <a:xfrm>
-            <a:off x="7503067" y="2923436"/>
-            <a:ext cx="2016853" cy="448087"/>
-          </a:xfrm>
-          <a:prstGeom prst="rect">
-            <a:avLst/>
-          </a:prstGeom>
-        </p:spPr>
-        <p:style>
-          <a:lnRef idx="2">
-            <a:schemeClr val="dk1">
-              <a:shade val="50000"/>
-            </a:schemeClr>
-          </a:lnRef>
-          <a:fillRef idx="1003">
-            <a:schemeClr val="dk1"/>
-          </a:fillRef>
-          <a:effectRef idx="0">
-            <a:schemeClr val="dk1"/>
-          </a:effectRef>
-          <a:fontRef idx="minor">
-            <a:schemeClr val="lt1"/>
-          </a:fontRef>
-        </p:style>
-        <p:txBody>
-          <a:bodyPr rtlCol="0" anchor="ctr"/>
-          <a:lstStyle/>
-          <a:p>
-            <a:r>
-              <a:rPr lang="en-US" sz="1600" b="1" dirty="0">
-                <a:solidFill>
-                  <a:schemeClr val="bg1"/>
-                </a:solidFill>
-              </a:rPr>
-              <a:t>Daisy Seed USB port</a:t>
-            </a:r>
-          </a:p>
-        </p:txBody>
-      </p:sp>
-      <p:sp>
-        <p:nvSpPr>
-          <p:cNvPr id="56" name="Rectangle 55"/>
-          <p:cNvSpPr/>
-          <p:nvPr/>
-        </p:nvSpPr>
-        <p:spPr>
-          <a:xfrm>
-            <a:off x="7503067" y="4556498"/>
-            <a:ext cx="2016853" cy="328586"/>
-          </a:xfrm>
-          <a:prstGeom prst="rect">
-            <a:avLst/>
-          </a:prstGeom>
-        </p:spPr>
-        <p:style>
-          <a:lnRef idx="2">
-            <a:schemeClr val="dk1">
-              <a:shade val="50000"/>
-            </a:schemeClr>
-          </a:lnRef>
-          <a:fillRef idx="1001">
-            <a:schemeClr val="dk2"/>
-          </a:fillRef>
-          <a:effectRef idx="0">
-            <a:schemeClr val="dk1"/>
-          </a:effectRef>
-          <a:fontRef idx="minor">
-            <a:schemeClr val="lt1"/>
-          </a:fontRef>
-        </p:style>
-        <p:txBody>
-          <a:bodyPr rtlCol="0" anchor="ctr"/>
-          <a:lstStyle/>
-          <a:p>
-            <a:r>
-              <a:rPr lang="en-US" sz="1600" b="1" dirty="0">
-                <a:solidFill>
-                  <a:schemeClr val="bg1"/>
-                </a:solidFill>
-              </a:rPr>
-              <a:t>4 On/Off Dipswitches</a:t>
-            </a:r>
-          </a:p>
-        </p:txBody>
-      </p:sp>
-      <p:sp>
-        <p:nvSpPr>
-          <p:cNvPr id="57" name="Rectangle 56"/>
-          <p:cNvSpPr/>
-          <p:nvPr/>
-        </p:nvSpPr>
-        <p:spPr>
-          <a:xfrm>
-            <a:off x="4585160" y="5990039"/>
-            <a:ext cx="2778082" cy="480080"/>
-          </a:xfrm>
-          <a:prstGeom prst="rect">
-            <a:avLst/>
-          </a:prstGeom>
-        </p:spPr>
-        <p:style>
-          <a:lnRef idx="2">
-            <a:schemeClr val="dk1">
-              <a:shade val="50000"/>
-            </a:schemeClr>
-          </a:lnRef>
-          <a:fillRef idx="1001">
-            <a:schemeClr val="dk2"/>
-          </a:fillRef>
-          <a:effectRef idx="0">
-            <a:schemeClr val="dk1"/>
-          </a:effectRef>
-          <a:fontRef idx="minor">
-            <a:schemeClr val="lt1"/>
-          </a:fontRef>
-        </p:style>
-        <p:txBody>
-          <a:bodyPr rtlCol="0" anchor="ctr"/>
-          <a:lstStyle/>
-          <a:p>
-            <a:r>
-              <a:rPr lang="en-US" sz="1600" b="1" dirty="0">
-                <a:solidFill>
-                  <a:schemeClr val="bg1"/>
-                </a:solidFill>
-              </a:rPr>
-              <a:t>Two Momentary Footswitches</a:t>
-            </a:r>
-          </a:p>
-          <a:p>
-            <a:r>
-              <a:rPr lang="en-US" sz="1600" b="1" dirty="0">
-                <a:solidFill>
-                  <a:schemeClr val="bg1"/>
-                </a:solidFill>
-              </a:rPr>
-              <a:t>with indication LEDs.</a:t>
-            </a:r>
-          </a:p>
-        </p:txBody>
-      </p:sp>
-      <p:sp>
-        <p:nvSpPr>
-          <p:cNvPr id="59" name="Rectangle 58"/>
-          <p:cNvSpPr/>
-          <p:nvPr/>
-        </p:nvSpPr>
-        <p:spPr>
-          <a:xfrm>
-            <a:off x="259856" y="262029"/>
-            <a:ext cx="4226847" cy="1015417"/>
-          </a:xfrm>
-          <a:prstGeom prst="rect">
-            <a:avLst/>
-          </a:prstGeom>
-          <a:ln/>
-        </p:spPr>
-        <p:style>
-          <a:lnRef idx="1">
-            <a:schemeClr val="accent2"/>
-          </a:lnRef>
-          <a:fillRef idx="2">
-            <a:schemeClr val="accent2"/>
-          </a:fillRef>
-          <a:effectRef idx="1">
-            <a:schemeClr val="accent2"/>
-          </a:effectRef>
-          <a:fontRef idx="minor">
-            <a:schemeClr val="dk1"/>
-          </a:fontRef>
-        </p:style>
-        <p:txBody>
-          <a:bodyPr rtlCol="0" anchor="ctr"/>
-          <a:lstStyle/>
-          <a:p>
-            <a:r>
-              <a:rPr lang="en-US" sz="2800" b="1" dirty="0" err="1">
-                <a:solidFill>
-                  <a:schemeClr val="tx1"/>
-                </a:solidFill>
-              </a:rPr>
-              <a:t>FunBox</a:t>
-            </a:r>
-            <a:r>
-              <a:rPr lang="en-US" sz="2800" b="1" dirty="0">
-                <a:solidFill>
-                  <a:schemeClr val="tx1"/>
-                </a:solidFill>
-              </a:rPr>
-              <a:t> </a:t>
-            </a:r>
-            <a:r>
-              <a:rPr lang="en-US" b="1" dirty="0">
-                <a:solidFill>
-                  <a:schemeClr val="tx1"/>
-                </a:solidFill>
-              </a:rPr>
-              <a:t>is a pedal platform designed around the Daisy Seed. Fits in a 125B enclosure.</a:t>
-            </a:r>
-          </a:p>
-        </p:txBody>
-      </p:sp>
-      <p:sp>
-        <p:nvSpPr>
-          <p:cNvPr id="81" name="Rectangle 80"/>
-          <p:cNvSpPr/>
-          <p:nvPr/>
-        </p:nvSpPr>
-        <p:spPr>
-          <a:xfrm>
-            <a:off x="7205470" y="4326731"/>
-            <a:ext cx="45719" cy="404813"/>
-          </a:xfrm>
-          <a:prstGeom prst="rect">
-            <a:avLst/>
-          </a:prstGeom>
-        </p:spPr>
-        <p:style>
-          <a:lnRef idx="2">
-            <a:schemeClr val="accent1">
-              <a:shade val="50000"/>
-            </a:schemeClr>
-          </a:lnRef>
-          <a:fillRef idx="1">
-            <a:schemeClr val="accent1"/>
-          </a:fillRef>
-          <a:effectRef idx="0">
-            <a:schemeClr val="accent1"/>
-          </a:effectRef>
-          <a:fontRef idx="minor">
-            <a:schemeClr val="lt1"/>
-          </a:fontRef>
-        </p:style>
-        <p:txBody>
-          <a:bodyPr rtlCol="0" anchor="ctr"/>
-          <a:lstStyle/>
-          <a:p>
-            <a:pPr algn="ctr"/>
-            <a:endParaRPr lang="en-US"/>
-          </a:p>
-        </p:txBody>
-      </p:sp>
-      <p:sp>
-        <p:nvSpPr>
-          <p:cNvPr id="82" name="Rectangle 81"/>
-          <p:cNvSpPr/>
-          <p:nvPr/>
-        </p:nvSpPr>
-        <p:spPr>
-          <a:xfrm>
-            <a:off x="7240002" y="4361522"/>
-            <a:ext cx="54086" cy="51892"/>
-          </a:xfrm>
-          <a:prstGeom prst="rect">
-            <a:avLst/>
-          </a:prstGeom>
-        </p:spPr>
-        <p:style>
-          <a:lnRef idx="2">
-            <a:schemeClr val="dk1"/>
-          </a:lnRef>
-          <a:fillRef idx="1">
-            <a:schemeClr val="lt1"/>
-          </a:fillRef>
-          <a:effectRef idx="0">
-            <a:schemeClr val="dk1"/>
-          </a:effectRef>
-          <a:fontRef idx="minor">
-            <a:schemeClr val="dk1"/>
-          </a:fontRef>
-        </p:style>
-        <p:txBody>
-          <a:bodyPr rtlCol="0" anchor="ctr"/>
-          <a:lstStyle/>
-          <a:p>
-            <a:pPr algn="ctr"/>
-            <a:endParaRPr lang="en-US"/>
-          </a:p>
-        </p:txBody>
-      </p:sp>
-      <p:sp>
-        <p:nvSpPr>
-          <p:cNvPr id="83" name="Rectangle 82"/>
-          <p:cNvSpPr/>
-          <p:nvPr/>
-        </p:nvSpPr>
-        <p:spPr>
-          <a:xfrm>
-            <a:off x="7239482" y="4455654"/>
-            <a:ext cx="54086" cy="51892"/>
-          </a:xfrm>
-          <a:prstGeom prst="rect">
-            <a:avLst/>
-          </a:prstGeom>
-        </p:spPr>
-        <p:style>
-          <a:lnRef idx="2">
-            <a:schemeClr val="dk1"/>
-          </a:lnRef>
-          <a:fillRef idx="1">
-            <a:schemeClr val="lt1"/>
-          </a:fillRef>
-          <a:effectRef idx="0">
-            <a:schemeClr val="dk1"/>
-          </a:effectRef>
-          <a:fontRef idx="minor">
-            <a:schemeClr val="dk1"/>
-          </a:fontRef>
-        </p:style>
-        <p:txBody>
-          <a:bodyPr rtlCol="0" anchor="ctr"/>
-          <a:lstStyle/>
-          <a:p>
-            <a:pPr algn="ctr"/>
-            <a:endParaRPr lang="en-US"/>
-          </a:p>
-        </p:txBody>
-      </p:sp>
-      <p:sp>
-        <p:nvSpPr>
-          <p:cNvPr id="66" name="TextBox 65"/>
-          <p:cNvSpPr txBox="1"/>
-          <p:nvPr/>
-        </p:nvSpPr>
-        <p:spPr>
-          <a:xfrm>
-            <a:off x="6376896" y="5548457"/>
-            <a:ext cx="724878" cy="246221"/>
-          </a:xfrm>
-          <a:prstGeom prst="rect">
-            <a:avLst/>
-          </a:prstGeom>
-          <a:noFill/>
-        </p:spPr>
-        <p:txBody>
-          <a:bodyPr wrap="none" rtlCol="0">
-            <a:spAutoFit/>
-          </a:bodyPr>
-          <a:lstStyle/>
-          <a:p>
-            <a:pPr algn="ctr"/>
-            <a:r>
-              <a:rPr lang="en-US" sz="1000" b="1" dirty="0" err="1">
-                <a:latin typeface="Century Gothic" panose="020B0502020202020204" pitchFamily="34" charset="0"/>
-                <a:cs typeface="Adobe Devanagari" panose="02040503050201020203" pitchFamily="18" charset="0"/>
-              </a:rPr>
-              <a:t>FootSw</a:t>
-            </a:r>
-            <a:r>
-              <a:rPr lang="en-US" sz="1000" b="1" dirty="0">
-                <a:latin typeface="Century Gothic" panose="020B0502020202020204" pitchFamily="34" charset="0"/>
-                <a:cs typeface="Adobe Devanagari" panose="02040503050201020203" pitchFamily="18" charset="0"/>
-              </a:rPr>
-              <a:t> 2</a:t>
-            </a:r>
-          </a:p>
-        </p:txBody>
-      </p:sp>
-      <p:sp>
-        <p:nvSpPr>
-          <p:cNvPr id="67" name="Rectangle 66"/>
-          <p:cNvSpPr/>
-          <p:nvPr/>
-        </p:nvSpPr>
-        <p:spPr>
-          <a:xfrm>
-            <a:off x="7239482" y="4543676"/>
-            <a:ext cx="54086" cy="51892"/>
-          </a:xfrm>
-          <a:prstGeom prst="rect">
-            <a:avLst/>
-          </a:prstGeom>
-        </p:spPr>
-        <p:style>
-          <a:lnRef idx="2">
-            <a:schemeClr val="dk1"/>
-          </a:lnRef>
-          <a:fillRef idx="1">
-            <a:schemeClr val="lt1"/>
-          </a:fillRef>
-          <a:effectRef idx="0">
-            <a:schemeClr val="dk1"/>
-          </a:effectRef>
-          <a:fontRef idx="minor">
-            <a:schemeClr val="dk1"/>
-          </a:fontRef>
-        </p:style>
-        <p:txBody>
-          <a:bodyPr rtlCol="0" anchor="ctr"/>
-          <a:lstStyle/>
-          <a:p>
-            <a:pPr algn="ctr"/>
-            <a:endParaRPr lang="en-US"/>
-          </a:p>
-        </p:txBody>
-      </p:sp>
-      <p:sp>
-        <p:nvSpPr>
-          <p:cNvPr id="69" name="Rectangle 68"/>
-          <p:cNvSpPr/>
-          <p:nvPr/>
-        </p:nvSpPr>
-        <p:spPr>
-          <a:xfrm>
-            <a:off x="7239482" y="4633048"/>
-            <a:ext cx="54086" cy="51892"/>
-          </a:xfrm>
-          <a:prstGeom prst="rect">
-            <a:avLst/>
-          </a:prstGeom>
-        </p:spPr>
-        <p:style>
-          <a:lnRef idx="2">
-            <a:schemeClr val="dk1"/>
-          </a:lnRef>
-          <a:fillRef idx="1">
-            <a:schemeClr val="lt1"/>
-          </a:fillRef>
-          <a:effectRef idx="0">
-            <a:schemeClr val="dk1"/>
-          </a:effectRef>
-          <a:fontRef idx="minor">
-            <a:schemeClr val="dk1"/>
-          </a:fontRef>
-        </p:style>
-        <p:txBody>
-          <a:bodyPr rtlCol="0" anchor="ctr"/>
-          <a:lstStyle/>
-          <a:p>
-            <a:pPr algn="ctr"/>
-            <a:endParaRPr lang="en-US"/>
-          </a:p>
-        </p:txBody>
-      </p:sp>
-      <p:sp>
-        <p:nvSpPr>
-          <p:cNvPr id="70" name="TextBox 69"/>
-          <p:cNvSpPr txBox="1"/>
-          <p:nvPr/>
-        </p:nvSpPr>
-        <p:spPr>
-          <a:xfrm rot="5400000">
-            <a:off x="4369644" y="2091586"/>
-            <a:ext cx="833883" cy="246221"/>
-          </a:xfrm>
-          <a:prstGeom prst="rect">
-            <a:avLst/>
-          </a:prstGeom>
-          <a:noFill/>
-        </p:spPr>
-        <p:txBody>
-          <a:bodyPr wrap="none" rtlCol="0">
-            <a:spAutoFit/>
-          </a:bodyPr>
-          <a:lstStyle/>
-          <a:p>
-            <a:pPr algn="ctr"/>
-            <a:r>
-              <a:rPr lang="en-US" sz="1000" b="1" dirty="0">
-                <a:latin typeface="Century Gothic" panose="020B0502020202020204" pitchFamily="34" charset="0"/>
-                <a:cs typeface="Adobe Devanagari" panose="02040503050201020203" pitchFamily="18" charset="0"/>
-              </a:rPr>
-              <a:t>Expression</a:t>
-            </a:r>
-          </a:p>
-        </p:txBody>
-      </p:sp>
-      <p:sp>
-        <p:nvSpPr>
-          <p:cNvPr id="71" name="TextBox 70"/>
-          <p:cNvSpPr txBox="1"/>
-          <p:nvPr/>
-        </p:nvSpPr>
-        <p:spPr>
-          <a:xfrm rot="16200000">
-            <a:off x="6867601" y="2070599"/>
-            <a:ext cx="460382" cy="246221"/>
-          </a:xfrm>
-          <a:prstGeom prst="rect">
-            <a:avLst/>
-          </a:prstGeom>
-          <a:noFill/>
-        </p:spPr>
-        <p:txBody>
-          <a:bodyPr wrap="none" rtlCol="0">
-            <a:spAutoFit/>
-          </a:bodyPr>
-          <a:lstStyle/>
-          <a:p>
-            <a:pPr algn="ctr"/>
-            <a:r>
-              <a:rPr lang="en-US" sz="1000" b="1" dirty="0">
-                <a:latin typeface="Century Gothic" panose="020B0502020202020204" pitchFamily="34" charset="0"/>
-                <a:cs typeface="Adobe Devanagari" panose="02040503050201020203" pitchFamily="18" charset="0"/>
-              </a:rPr>
-              <a:t>MIDI</a:t>
-            </a:r>
-          </a:p>
-        </p:txBody>
-      </p:sp>
-      <p:sp>
-        <p:nvSpPr>
-          <p:cNvPr id="72" name="TextBox 71"/>
-          <p:cNvSpPr txBox="1"/>
-          <p:nvPr/>
-        </p:nvSpPr>
-        <p:spPr>
-          <a:xfrm rot="16200000">
-            <a:off x="6888870" y="3101168"/>
-            <a:ext cx="407484" cy="246221"/>
-          </a:xfrm>
-          <a:prstGeom prst="rect">
-            <a:avLst/>
-          </a:prstGeom>
-          <a:noFill/>
-        </p:spPr>
-        <p:txBody>
-          <a:bodyPr wrap="none" rtlCol="0">
-            <a:spAutoFit/>
-          </a:bodyPr>
-          <a:lstStyle/>
-          <a:p>
-            <a:pPr algn="ctr"/>
-            <a:r>
-              <a:rPr lang="en-US" sz="1000" b="1" dirty="0">
-                <a:latin typeface="Century Gothic" panose="020B0502020202020204" pitchFamily="34" charset="0"/>
-                <a:cs typeface="Adobe Devanagari" panose="02040503050201020203" pitchFamily="18" charset="0"/>
-              </a:rPr>
-              <a:t>USB</a:t>
-            </a:r>
-          </a:p>
-        </p:txBody>
-      </p:sp>
-      <p:sp>
-        <p:nvSpPr>
-          <p:cNvPr id="60" name="Rectangle 59"/>
-          <p:cNvSpPr/>
-          <p:nvPr/>
-        </p:nvSpPr>
-        <p:spPr>
-          <a:xfrm>
-            <a:off x="1130422" y="1955557"/>
-            <a:ext cx="3250889" cy="428695"/>
-          </a:xfrm>
-          <a:prstGeom prst="rect">
-            <a:avLst/>
-          </a:prstGeom>
-        </p:spPr>
-        <p:style>
-          <a:lnRef idx="2">
-            <a:schemeClr val="dk1">
-              <a:shade val="50000"/>
-            </a:schemeClr>
-          </a:lnRef>
-          <a:fillRef idx="1003">
-            <a:schemeClr val="dk1"/>
-          </a:fillRef>
-          <a:effectRef idx="0">
-            <a:schemeClr val="dk1"/>
-          </a:effectRef>
-          <a:fontRef idx="minor">
-            <a:schemeClr val="lt1"/>
-          </a:fontRef>
-        </p:style>
-        <p:txBody>
-          <a:bodyPr rtlCol="0" anchor="ctr"/>
-          <a:lstStyle/>
-          <a:p>
-            <a:r>
-              <a:rPr lang="en-US" sz="1600" b="1" dirty="0">
-                <a:solidFill>
-                  <a:schemeClr val="bg1"/>
-                </a:solidFill>
-              </a:rPr>
-              <a:t>Expression Input (1/8” TRS Jack)</a:t>
-            </a:r>
-          </a:p>
-        </p:txBody>
-      </p:sp>
-      <p:sp>
-        <p:nvSpPr>
-          <p:cNvPr id="61" name="Rectangle 60"/>
-          <p:cNvSpPr/>
-          <p:nvPr/>
-        </p:nvSpPr>
-        <p:spPr>
-          <a:xfrm>
-            <a:off x="1338617" y="3706618"/>
-            <a:ext cx="3023756" cy="410432"/>
-          </a:xfrm>
-          <a:prstGeom prst="rect">
-            <a:avLst/>
-          </a:prstGeom>
-        </p:spPr>
-        <p:style>
-          <a:lnRef idx="2">
-            <a:schemeClr val="dk1">
-              <a:shade val="50000"/>
-            </a:schemeClr>
-          </a:lnRef>
-          <a:fillRef idx="1001">
-            <a:schemeClr val="dk2"/>
-          </a:fillRef>
-          <a:effectRef idx="0">
-            <a:schemeClr val="dk1"/>
-          </a:effectRef>
-          <a:fontRef idx="minor">
-            <a:schemeClr val="lt1"/>
-          </a:fontRef>
-        </p:style>
-        <p:txBody>
-          <a:bodyPr rtlCol="0" anchor="ctr"/>
-          <a:lstStyle/>
-          <a:p>
-            <a:r>
-              <a:rPr lang="en-US" sz="1600" b="1" dirty="0">
-                <a:solidFill>
-                  <a:schemeClr val="bg1"/>
-                </a:solidFill>
-              </a:rPr>
-              <a:t>Three 3-way Toggles (On-Off-On)</a:t>
-            </a:r>
-          </a:p>
-        </p:txBody>
-      </p:sp>
-      <p:cxnSp>
-        <p:nvCxnSpPr>
-          <p:cNvPr id="62" name="Straight Arrow Connector 61"/>
-          <p:cNvCxnSpPr>
-            <a:stCxn id="61" idx="3"/>
-          </p:cNvCxnSpPr>
-          <p:nvPr/>
-        </p:nvCxnSpPr>
-        <p:spPr>
-          <a:xfrm>
-            <a:off x="4362373" y="3911834"/>
-            <a:ext cx="276302" cy="0"/>
-          </a:xfrm>
-          <a:prstGeom prst="straightConnector1">
-            <a:avLst/>
-          </a:prstGeom>
-          <a:ln>
-            <a:tailEnd type="triangle"/>
-          </a:ln>
-        </p:spPr>
-        <p:style>
-          <a:lnRef idx="3">
-            <a:schemeClr val="dk1"/>
-          </a:lnRef>
-          <a:fillRef idx="0">
-            <a:schemeClr val="dk1"/>
-          </a:fillRef>
-          <a:effectRef idx="2">
-            <a:schemeClr val="dk1"/>
-          </a:effectRef>
-          <a:fontRef idx="minor">
-            <a:schemeClr val="tx1"/>
-          </a:fontRef>
-        </p:style>
-      </p:cxnSp>
-      <p:cxnSp>
-        <p:nvCxnSpPr>
-          <p:cNvPr id="68" name="Straight Arrow Connector 67"/>
-          <p:cNvCxnSpPr/>
-          <p:nvPr/>
-        </p:nvCxnSpPr>
-        <p:spPr>
-          <a:xfrm>
-            <a:off x="4381311" y="2165058"/>
-            <a:ext cx="276302" cy="0"/>
-          </a:xfrm>
-          <a:prstGeom prst="straightConnector1">
-            <a:avLst/>
-          </a:prstGeom>
-          <a:ln>
-            <a:tailEnd type="triangle"/>
-          </a:ln>
-        </p:spPr>
-        <p:style>
-          <a:lnRef idx="3">
-            <a:schemeClr val="dk1"/>
-          </a:lnRef>
-          <a:fillRef idx="0">
-            <a:schemeClr val="dk1"/>
-          </a:fillRef>
-          <a:effectRef idx="2">
-            <a:schemeClr val="dk1"/>
-          </a:effectRef>
-          <a:fontRef idx="minor">
-            <a:schemeClr val="tx1"/>
-          </a:fontRef>
-        </p:style>
-      </p:cxnSp>
-      <p:cxnSp>
-        <p:nvCxnSpPr>
-          <p:cNvPr id="73" name="Straight Arrow Connector 72"/>
-          <p:cNvCxnSpPr/>
-          <p:nvPr/>
-        </p:nvCxnSpPr>
-        <p:spPr>
-          <a:xfrm flipH="1">
-            <a:off x="7266525" y="4623278"/>
-            <a:ext cx="236542" cy="0"/>
-          </a:xfrm>
-          <a:prstGeom prst="straightConnector1">
-            <a:avLst/>
-          </a:prstGeom>
-          <a:ln>
-            <a:tailEnd type="triangle"/>
-          </a:ln>
-        </p:spPr>
-        <p:style>
-          <a:lnRef idx="3">
-            <a:schemeClr val="dk1"/>
-          </a:lnRef>
-          <a:fillRef idx="0">
-            <a:schemeClr val="dk1"/>
-          </a:fillRef>
-          <a:effectRef idx="2">
-            <a:schemeClr val="dk1"/>
-          </a:effectRef>
-          <a:fontRef idx="minor">
-            <a:schemeClr val="tx1"/>
-          </a:fontRef>
-        </p:style>
-      </p:cxnSp>
-      <p:cxnSp>
-        <p:nvCxnSpPr>
-          <p:cNvPr id="74" name="Straight Arrow Connector 73"/>
-          <p:cNvCxnSpPr/>
-          <p:nvPr/>
-        </p:nvCxnSpPr>
-        <p:spPr>
-          <a:xfrm flipH="1">
-            <a:off x="7251189" y="3222216"/>
-            <a:ext cx="236542" cy="0"/>
-          </a:xfrm>
-          <a:prstGeom prst="straightConnector1">
-            <a:avLst/>
-          </a:prstGeom>
-          <a:ln>
-            <a:tailEnd type="triangle"/>
-          </a:ln>
-        </p:spPr>
-        <p:style>
-          <a:lnRef idx="3">
-            <a:schemeClr val="dk1"/>
-          </a:lnRef>
-          <a:fillRef idx="0">
-            <a:schemeClr val="dk1"/>
-          </a:fillRef>
-          <a:effectRef idx="2">
-            <a:schemeClr val="dk1"/>
-          </a:effectRef>
-          <a:fontRef idx="minor">
-            <a:schemeClr val="tx1"/>
-          </a:fontRef>
-        </p:style>
-      </p:cxnSp>
-      <p:cxnSp>
-        <p:nvCxnSpPr>
-          <p:cNvPr id="75" name="Straight Arrow Connector 74"/>
-          <p:cNvCxnSpPr/>
-          <p:nvPr/>
-        </p:nvCxnSpPr>
-        <p:spPr>
-          <a:xfrm flipH="1">
-            <a:off x="7244681" y="2193709"/>
-            <a:ext cx="236542" cy="0"/>
-          </a:xfrm>
-          <a:prstGeom prst="straightConnector1">
-            <a:avLst/>
-          </a:prstGeom>
-          <a:ln>
-            <a:tailEnd type="triangle"/>
-          </a:ln>
-        </p:spPr>
-        <p:style>
-          <a:lnRef idx="3">
-            <a:schemeClr val="dk1"/>
-          </a:lnRef>
-          <a:fillRef idx="0">
-            <a:schemeClr val="dk1"/>
-          </a:fillRef>
-          <a:effectRef idx="2">
-            <a:schemeClr val="dk1"/>
-          </a:effectRef>
-          <a:fontRef idx="minor">
-            <a:schemeClr val="tx1"/>
-          </a:fontRef>
-        </p:style>
-      </p:cxnSp>
-      <p:sp>
-        <p:nvSpPr>
-          <p:cNvPr id="65" name="Rectangle 64"/>
-          <p:cNvSpPr/>
-          <p:nvPr/>
-        </p:nvSpPr>
-        <p:spPr>
-          <a:xfrm>
-            <a:off x="2216110" y="2809545"/>
-            <a:ext cx="2146263" cy="410432"/>
-          </a:xfrm>
-          <a:prstGeom prst="rect">
-            <a:avLst/>
-          </a:prstGeom>
-        </p:spPr>
-        <p:style>
-          <a:lnRef idx="2">
-            <a:schemeClr val="dk1">
-              <a:shade val="50000"/>
-            </a:schemeClr>
-          </a:lnRef>
-          <a:fillRef idx="1001">
-            <a:schemeClr val="dk2"/>
-          </a:fillRef>
-          <a:effectRef idx="0">
-            <a:schemeClr val="dk1"/>
-          </a:effectRef>
-          <a:fontRef idx="minor">
-            <a:schemeClr val="lt1"/>
-          </a:fontRef>
-        </p:style>
-        <p:txBody>
-          <a:bodyPr rtlCol="0" anchor="ctr"/>
-          <a:lstStyle/>
-          <a:p>
-            <a:r>
-              <a:rPr lang="en-US" sz="1600" b="1" dirty="0">
-                <a:solidFill>
-                  <a:schemeClr val="bg1"/>
-                </a:solidFill>
-              </a:rPr>
-              <a:t>6 Potentiometer Knobs</a:t>
-            </a:r>
-          </a:p>
-        </p:txBody>
-      </p:sp>
-      <p:sp>
-        <p:nvSpPr>
-          <p:cNvPr id="76" name="Rectangle 75"/>
-          <p:cNvSpPr/>
-          <p:nvPr/>
-        </p:nvSpPr>
-        <p:spPr>
-          <a:xfrm>
-            <a:off x="166920" y="4373127"/>
-            <a:ext cx="4226847" cy="2096991"/>
-          </a:xfrm>
-          <a:prstGeom prst="rect">
-            <a:avLst/>
-          </a:prstGeom>
-          <a:ln/>
-        </p:spPr>
-        <p:style>
-          <a:lnRef idx="1">
-            <a:schemeClr val="accent2"/>
-          </a:lnRef>
-          <a:fillRef idx="2">
-            <a:schemeClr val="accent2"/>
-          </a:fillRef>
-          <a:effectRef idx="1">
-            <a:schemeClr val="accent2"/>
-          </a:effectRef>
-          <a:fontRef idx="minor">
-            <a:schemeClr val="dk1"/>
-          </a:fontRef>
-        </p:style>
-        <p:txBody>
-          <a:bodyPr rtlCol="0" anchor="ctr"/>
-          <a:lstStyle/>
-          <a:p>
-            <a:r>
-              <a:rPr lang="en-US" sz="2800" b="1" dirty="0">
-                <a:solidFill>
-                  <a:schemeClr val="tx1"/>
-                </a:solidFill>
-              </a:rPr>
-              <a:t>Specs:</a:t>
-            </a:r>
-          </a:p>
-          <a:p>
-            <a:pPr marL="285750" indent="-285750">
-              <a:buFont typeface="Arial" panose="020B0604020202020204" pitchFamily="34" charset="0"/>
-              <a:buChar char="•"/>
-            </a:pPr>
-            <a:r>
-              <a:rPr lang="en-US" sz="1400" b="1" dirty="0">
-                <a:solidFill>
-                  <a:schemeClr val="tx1"/>
-                </a:solidFill>
-              </a:rPr>
-              <a:t>Buffered Stereo In/Out Paths</a:t>
-            </a:r>
-          </a:p>
-          <a:p>
-            <a:pPr marL="285750" indent="-285750">
-              <a:buFont typeface="Arial" panose="020B0604020202020204" pitchFamily="34" charset="0"/>
-              <a:buChar char="•"/>
-            </a:pPr>
-            <a:r>
-              <a:rPr lang="en-US" sz="1400" b="1" dirty="0">
-                <a:solidFill>
-                  <a:schemeClr val="tx1"/>
-                </a:solidFill>
-              </a:rPr>
-              <a:t>Up to 96KHz, 24-bit Digital Processing</a:t>
-            </a:r>
-          </a:p>
-          <a:p>
-            <a:pPr marL="285750" indent="-285750">
-              <a:buFont typeface="Arial" panose="020B0604020202020204" pitchFamily="34" charset="0"/>
-              <a:buChar char="•"/>
-            </a:pPr>
-            <a:r>
-              <a:rPr lang="en-US" sz="1400" b="1" dirty="0">
-                <a:solidFill>
-                  <a:schemeClr val="tx1"/>
-                </a:solidFill>
-              </a:rPr>
-              <a:t>64MB SDRAM, 8MB Flash</a:t>
-            </a:r>
-          </a:p>
-          <a:p>
-            <a:pPr marL="285750" indent="-285750">
-              <a:buFont typeface="Arial" panose="020B0604020202020204" pitchFamily="34" charset="0"/>
-              <a:buChar char="•"/>
-            </a:pPr>
-            <a:r>
-              <a:rPr lang="en-US" sz="1400" b="1" dirty="0">
-                <a:solidFill>
-                  <a:schemeClr val="tx1"/>
-                </a:solidFill>
-              </a:rPr>
-              <a:t>ARM Cortex M7 480MHz</a:t>
-            </a:r>
-          </a:p>
-          <a:p>
-            <a:pPr marL="285750" indent="-285750">
-              <a:buFont typeface="Arial" panose="020B0604020202020204" pitchFamily="34" charset="0"/>
-              <a:buChar char="•"/>
-            </a:pPr>
-            <a:r>
-              <a:rPr lang="en-US" sz="1400" b="1" dirty="0">
-                <a:solidFill>
-                  <a:schemeClr val="tx1"/>
-                </a:solidFill>
-              </a:rPr>
-              <a:t>Expression and MIDI Inputs</a:t>
-            </a:r>
-          </a:p>
-          <a:p>
-            <a:pPr marL="285750" indent="-285750">
-              <a:buFont typeface="Arial" panose="020B0604020202020204" pitchFamily="34" charset="0"/>
-              <a:buChar char="•"/>
-            </a:pPr>
-            <a:r>
-              <a:rPr lang="en-US" sz="1400" b="1" dirty="0">
-                <a:solidFill>
-                  <a:schemeClr val="tx1"/>
-                </a:solidFill>
-              </a:rPr>
-              <a:t>Through Hole PCB</a:t>
-            </a:r>
-          </a:p>
-          <a:p>
-            <a:pPr marL="285750" indent="-285750">
-              <a:buFont typeface="Arial" panose="020B0604020202020204" pitchFamily="34" charset="0"/>
-              <a:buChar char="•"/>
-            </a:pPr>
-            <a:r>
-              <a:rPr lang="en-US" sz="1400" b="1" dirty="0">
-                <a:solidFill>
-                  <a:schemeClr val="tx1"/>
-                </a:solidFill>
-              </a:rPr>
-              <a:t>Digital Bypass only</a:t>
-            </a:r>
-          </a:p>
-        </p:txBody>
-      </p:sp>
-    </p:spTree>
-    <p:extLst>
-      <p:ext uri="{BB962C8B-B14F-4D97-AF65-F5344CB8AC3E}">
-        <p14:creationId xmlns:p14="http://schemas.microsoft.com/office/powerpoint/2010/main" val="2803695047"/>
-      </p:ext>
-    </p:extLst>
-  </p:cSld>
-  <p:clrMapOvr>
-    <a:masterClrMapping/>
-  </p:clrMapOvr>
-</p:sld>
-</file>
-
 <file path=ppt/slides/slide2.xml><?xml version="1.0" encoding="utf-8"?>
 <p:sld xmlns:a="http://schemas.openxmlformats.org/drawingml/2006/main" xmlns:r="http://schemas.openxmlformats.org/officeDocument/2006/relationships" xmlns:p="http://schemas.openxmlformats.org/presentationml/2006/main">
   <p:cSld>
@@ -23603,8 +20781,21 @@
                   <a:schemeClr val="bg1"/>
                 </a:solidFill>
               </a:rPr>
-              <a:t>Time Mode Toggle:</a:t>
-            </a:r>
+              <a:t>Time Mode </a:t>
+            </a:r>
+            <a:r>
+              <a:rPr lang="en-US" sz="1600" b="1" dirty="0" smtClean="0">
+                <a:solidFill>
+                  <a:schemeClr val="bg1"/>
+                </a:solidFill>
+              </a:rPr>
+              <a:t>Toggle:</a:t>
+            </a:r>
+            <a:endParaRPr lang="en-US" sz="1600" b="1" dirty="0">
+              <a:solidFill>
+                <a:schemeClr val="bg1"/>
+              </a:solidFill>
+            </a:endParaRPr>
           </a:p>
           <a:p>
             <a:r>
@@ -23831,7 +21022,15 @@
                   <a:schemeClr val="bg1"/>
                 </a:solidFill>
               </a:rPr>
-              <a:t>Dip Switches:</a:t>
+              <a:t>Dip Switches</a:t>
+            </a:r>
+            <a:r>
+              <a:rPr lang="en-US" sz="1600" b="1" dirty="0" smtClean="0">
+                <a:solidFill>
+                  <a:schemeClr val="bg1"/>
+                </a:solidFill>
+              </a:rPr>
+              <a:t>:</a:t>
             </a:r>
           </a:p>
           <a:p>
@@ -23841,17 +21040,23 @@
                   <a:schemeClr val="bg1"/>
                 </a:solidFill>
               </a:rPr>
-              <a:t>  1: Mono/Stereo (mono processes more freqs)</a:t>
-            </a:r>
-          </a:p>
-          <a:p>
+              <a:t> </a:t>
+            </a:r>
+            <a:r>
+              <a:rPr lang="en-US" sz="1600" b="1" dirty="0" smtClean="0">
+                <a:solidFill>
+                  <a:schemeClr val="bg1"/>
+                </a:solidFill>
+              </a:rPr>
+              <a:t> 1: </a:t>
+            </a:r>
             <a:r>
               <a:rPr lang="en-US" sz="1600" b="1" dirty="0">
                 <a:solidFill>
                   <a:schemeClr val="bg1"/>
                 </a:solidFill>
               </a:rPr>
-              <a:t>  2: MISO (mono in stereo out) / Stereo </a:t>
+              <a:t>Mono/Stereo (mono processes more freqs)</a:t>
             </a:r>
           </a:p>
           <a:p>
@@ -23861,17 +21066,59 @@
                   <a:schemeClr val="bg1"/>
                 </a:solidFill>
               </a:rPr>
-              <a:t>  3: Stereo Spread Off/On</a:t>
-            </a:r>
-          </a:p>
-          <a:p>
+              <a:t>  </a:t>
+            </a:r>
+            <a:r>
+              <a:rPr lang="en-US" sz="1600" b="1" dirty="0" smtClean="0">
+                <a:solidFill>
+                  <a:schemeClr val="bg1"/>
+                </a:solidFill>
+              </a:rPr>
+              <a:t>2: </a:t>
+            </a:r>
             <a:r>
               <a:rPr lang="en-US" sz="1600" b="1" dirty="0">
                 <a:solidFill>
                   <a:schemeClr val="bg1"/>
                 </a:solidFill>
               </a:rPr>
-              <a:t>  4: Adds Feedback to Predelay </a:t>
+              <a:t>MISO (mono in stereo out) / Stereo </a:t>
+            </a:r>
+          </a:p>
+          <a:p>
+            <a:r>
+              <a:rPr lang="en-US" sz="1600" b="1" dirty="0" smtClean="0">
+                <a:solidFill>
+                  <a:schemeClr val="bg1"/>
+                </a:solidFill>
+              </a:rPr>
+              <a:t>  3: </a:t>
+            </a:r>
+            <a:r>
+              <a:rPr lang="en-US" sz="1600" b="1" dirty="0">
+                <a:solidFill>
+                  <a:schemeClr val="bg1"/>
+                </a:solidFill>
+              </a:rPr>
+              <a:t>Stereo Spread Off/On</a:t>
+            </a:r>
+          </a:p>
+          <a:p>
+            <a:r>
+              <a:rPr lang="en-US" sz="1600" b="1" dirty="0" smtClean="0">
+                <a:solidFill>
+                  <a:schemeClr val="bg1"/>
+                </a:solidFill>
+              </a:rPr>
+              <a:t>  4</a:t>
+            </a:r>
+            <a:r>
+              <a:rPr lang="en-US" sz="1600" b="1" dirty="0">
+                <a:solidFill>
+                  <a:schemeClr val="bg1"/>
+                </a:solidFill>
+              </a:rPr>
+              <a:t>: Adds Feedback to Predelay </a:t>
             </a:r>
           </a:p>
         </p:txBody>
@@ -23963,7 +21210,23 @@
                   <a:schemeClr val="bg1"/>
                 </a:solidFill>
               </a:rPr>
-              <a:t>Right Footswitch: Hold to save preset of all knobs, toggles, and dipswitches. Press to engage/disengage preset. Saves between power cycles.</a:t>
+              <a:t>Right Footswitch: Hold to save </a:t>
+            </a:r>
+            <a:r>
+              <a:rPr lang="en-US" sz="1600" b="1" dirty="0" smtClean="0">
+                <a:solidFill>
+                  <a:schemeClr val="bg1"/>
+                </a:solidFill>
+              </a:rPr>
+              <a:t>preset of all knobs, toggles, and dipswitches. </a:t>
+            </a:r>
+            <a:r>
+              <a:rPr lang="en-US" sz="1600" b="1" dirty="0">
+                <a:solidFill>
+                  <a:schemeClr val="bg1"/>
+                </a:solidFill>
+              </a:rPr>
+              <a:t>Press to engage/disengage preset. Saves between power cycles.</a:t>
             </a:r>
           </a:p>
         </p:txBody>
@@ -25853,25 +23116,210 @@
           <a:p>
             <a:pPr algn="ctr"/>
             <a:r>
+              <a:rPr lang="en-US" sz="1000" b="1" dirty="0" smtClean="0">
+                <a:latin typeface="Century Gothic" panose="020B0502020202020204" pitchFamily="34" charset="0"/>
+                <a:cs typeface="Adobe Devanagari" panose="02040503050201020203" pitchFamily="18" charset="0"/>
+              </a:rPr>
+              <a:t>LEVEL</a:t>
+            </a:r>
+            <a:endParaRPr lang="en-US" sz="1000" b="1" dirty="0">
+              <a:latin typeface="Century Gothic" panose="020B0502020202020204" pitchFamily="34" charset="0"/>
+              <a:cs typeface="Adobe Devanagari" panose="02040503050201020203" pitchFamily="18" charset="0"/>
+            </a:endParaRPr>
+          </a:p>
+        </p:txBody>
+      </p:sp>
+      <p:sp>
+        <p:nvSpPr>
+          <p:cNvPr id="27" name="TextBox 26"/>
+          <p:cNvSpPr txBox="1"/>
+          <p:nvPr/>
+        </p:nvSpPr>
+        <p:spPr>
+          <a:xfrm>
+            <a:off x="6336906" y="2267910"/>
+            <a:ext cx="793808" cy="246221"/>
+          </a:xfrm>
+          <a:prstGeom prst="rect">
+            <a:avLst/>
+          </a:prstGeom>
+          <a:noFill/>
+        </p:spPr>
+        <p:txBody>
+          <a:bodyPr wrap="none" rtlCol="0">
+            <a:spAutoFit/>
+          </a:bodyPr>
+          <a:lstStyle/>
+          <a:p>
+            <a:pPr algn="ctr"/>
+            <a:r>
+              <a:rPr lang="en-US" sz="1000" b="1" dirty="0" smtClean="0">
+                <a:latin typeface="Century Gothic" panose="020B0502020202020204" pitchFamily="34" charset="0"/>
+                <a:cs typeface="Adobe Devanagari" panose="02040503050201020203" pitchFamily="18" charset="0"/>
+              </a:rPr>
+              <a:t>PRESENCE</a:t>
+            </a:r>
+            <a:endParaRPr lang="en-US" sz="1000" b="1" dirty="0">
+              <a:latin typeface="Century Gothic" panose="020B0502020202020204" pitchFamily="34" charset="0"/>
+              <a:cs typeface="Adobe Devanagari" panose="02040503050201020203" pitchFamily="18" charset="0"/>
+            </a:endParaRPr>
+          </a:p>
+        </p:txBody>
+      </p:sp>
+      <p:sp>
+        <p:nvSpPr>
+          <p:cNvPr id="28" name="TextBox 27"/>
+          <p:cNvSpPr txBox="1"/>
+          <p:nvPr/>
+        </p:nvSpPr>
+        <p:spPr>
+          <a:xfrm>
+            <a:off x="5744325" y="3267265"/>
+            <a:ext cx="425117" cy="246221"/>
+          </a:xfrm>
+          <a:prstGeom prst="rect">
+            <a:avLst/>
+          </a:prstGeom>
+          <a:noFill/>
+        </p:spPr>
+        <p:txBody>
+          <a:bodyPr wrap="none" rtlCol="0">
+            <a:spAutoFit/>
+          </a:bodyPr>
+          <a:lstStyle/>
+          <a:p>
+            <a:pPr algn="ctr"/>
+            <a:r>
+              <a:rPr lang="en-US" sz="1000" b="1" dirty="0" smtClean="0">
+                <a:latin typeface="Century Gothic" panose="020B0502020202020204" pitchFamily="34" charset="0"/>
+                <a:cs typeface="Adobe Devanagari" panose="02040503050201020203" pitchFamily="18" charset="0"/>
+              </a:rPr>
+              <a:t>MID</a:t>
+            </a:r>
+            <a:endParaRPr lang="en-US" sz="1000" b="1" dirty="0">
+              <a:latin typeface="Century Gothic" panose="020B0502020202020204" pitchFamily="34" charset="0"/>
+              <a:cs typeface="Adobe Devanagari" panose="02040503050201020203" pitchFamily="18" charset="0"/>
+            </a:endParaRPr>
+          </a:p>
+        </p:txBody>
+      </p:sp>
+      <p:sp>
+        <p:nvSpPr>
+          <p:cNvPr id="29" name="TextBox 28"/>
+          <p:cNvSpPr txBox="1"/>
+          <p:nvPr/>
+        </p:nvSpPr>
+        <p:spPr>
+          <a:xfrm>
+            <a:off x="6451289" y="3267265"/>
+            <a:ext cx="577402" cy="246221"/>
+          </a:xfrm>
+          <a:prstGeom prst="rect">
+            <a:avLst/>
+          </a:prstGeom>
+          <a:noFill/>
+        </p:spPr>
+        <p:txBody>
+          <a:bodyPr wrap="none" rtlCol="0">
+            <a:spAutoFit/>
+          </a:bodyPr>
+          <a:lstStyle/>
+          <a:p>
+            <a:pPr algn="ctr"/>
+            <a:r>
+              <a:rPr lang="en-US" sz="1000" b="1" dirty="0" smtClean="0">
+                <a:latin typeface="Century Gothic" panose="020B0502020202020204" pitchFamily="34" charset="0"/>
+                <a:cs typeface="Adobe Devanagari" panose="02040503050201020203" pitchFamily="18" charset="0"/>
+              </a:rPr>
+              <a:t>TREBLE</a:t>
+            </a:r>
+            <a:endParaRPr lang="en-US" sz="1000" b="1" dirty="0">
+              <a:latin typeface="Century Gothic" panose="020B0502020202020204" pitchFamily="34" charset="0"/>
+              <a:cs typeface="Adobe Devanagari" panose="02040503050201020203" pitchFamily="18" charset="0"/>
+            </a:endParaRPr>
+          </a:p>
+        </p:txBody>
+      </p:sp>
+      <p:sp>
+        <p:nvSpPr>
+          <p:cNvPr id="30" name="TextBox 29"/>
+          <p:cNvSpPr txBox="1"/>
+          <p:nvPr/>
+        </p:nvSpPr>
+        <p:spPr>
+          <a:xfrm>
+            <a:off x="4910305" y="3267265"/>
+            <a:ext cx="487634" cy="246221"/>
+          </a:xfrm>
+          <a:prstGeom prst="rect">
+            <a:avLst/>
+          </a:prstGeom>
+          <a:noFill/>
+        </p:spPr>
+        <p:txBody>
+          <a:bodyPr wrap="none" rtlCol="0">
+            <a:spAutoFit/>
+          </a:bodyPr>
+          <a:lstStyle/>
+          <a:p>
+            <a:pPr algn="ctr"/>
+            <a:r>
+              <a:rPr lang="en-US" sz="1000" b="1" dirty="0" smtClean="0">
+                <a:latin typeface="Century Gothic" panose="020B0502020202020204" pitchFamily="34" charset="0"/>
+                <a:cs typeface="Adobe Devanagari" panose="02040503050201020203" pitchFamily="18" charset="0"/>
+              </a:rPr>
+              <a:t>BASS</a:t>
+            </a:r>
+            <a:endParaRPr lang="en-US" sz="1000" b="1" dirty="0">
+              <a:latin typeface="Century Gothic" panose="020B0502020202020204" pitchFamily="34" charset="0"/>
+              <a:cs typeface="Adobe Devanagari" panose="02040503050201020203" pitchFamily="18" charset="0"/>
+            </a:endParaRPr>
+          </a:p>
+        </p:txBody>
+      </p:sp>
+      <p:sp>
+        <p:nvSpPr>
+          <p:cNvPr id="31" name="TextBox 30"/>
+          <p:cNvSpPr txBox="1"/>
+          <p:nvPr/>
+        </p:nvSpPr>
+        <p:spPr>
+          <a:xfrm>
+            <a:off x="4845951" y="5548458"/>
+            <a:ext cx="639920" cy="246221"/>
+          </a:xfrm>
+          <a:prstGeom prst="rect">
+            <a:avLst/>
+          </a:prstGeom>
+          <a:noFill/>
+        </p:spPr>
+        <p:txBody>
+          <a:bodyPr wrap="none" rtlCol="0">
+            <a:spAutoFit/>
+          </a:bodyPr>
+          <a:lstStyle/>
+          <a:p>
+            <a:pPr algn="ctr"/>
+            <a:r>
               <a:rPr lang="en-US" sz="1000" b="1" dirty="0">
                 <a:latin typeface="Century Gothic" panose="020B0502020202020204" pitchFamily="34" charset="0"/>
                 <a:cs typeface="Adobe Devanagari" panose="02040503050201020203" pitchFamily="18" charset="0"/>
               </a:rPr>
-              <a:t>LEVEL</a:t>
-            </a:r>
-          </a:p>
-        </p:txBody>
-      </p:sp>
-      <p:sp>
-        <p:nvSpPr>
-          <p:cNvPr id="27" name="TextBox 26"/>
+              <a:t>BYPASS</a:t>
+            </a:r>
+          </a:p>
+        </p:txBody>
+      </p:sp>
+      <p:sp>
+        <p:nvSpPr>
+          <p:cNvPr id="32" name="TextBox 31"/>
           <p:cNvSpPr txBox="1"/>
           <p:nvPr/>
         </p:nvSpPr>
         <p:spPr>
-          <a:xfrm>
-            <a:off x="6336906" y="2267910"/>
-            <a:ext cx="793808" cy="246221"/>
+          <a:xfrm rot="16200000">
+            <a:off x="4914977" y="4030683"/>
+            <a:ext cx="410690" cy="461665"/>
           </a:xfrm>
           <a:prstGeom prst="rect">
             <a:avLst/>
@@ -25886,25 +23334,94 @@
           <a:p>
             <a:pPr algn="ctr"/>
             <a:r>
-              <a:rPr lang="en-US" sz="1000" b="1" dirty="0">
+              <a:rPr lang="en-US" sz="800" b="1" dirty="0" smtClean="0">
                 <a:latin typeface="Century Gothic" panose="020B0502020202020204" pitchFamily="34" charset="0"/>
                 <a:cs typeface="Adobe Devanagari" panose="02040503050201020203" pitchFamily="18" charset="0"/>
               </a:rPr>
-              <a:t>PRESENCE</a:t>
-            </a:r>
-          </a:p>
-        </p:txBody>
-      </p:sp>
-      <p:sp>
-        <p:nvSpPr>
-          <p:cNvPr id="28" name="TextBox 27"/>
+              <a:t>Low</a:t>
+            </a:r>
+            <a:endParaRPr lang="en-US" sz="800" b="1" dirty="0">
+              <a:latin typeface="Century Gothic" panose="020B0502020202020204" pitchFamily="34" charset="0"/>
+              <a:cs typeface="Adobe Devanagari" panose="02040503050201020203" pitchFamily="18" charset="0"/>
+            </a:endParaRPr>
+          </a:p>
+          <a:p>
+            <a:pPr algn="ctr"/>
+            <a:r>
+              <a:rPr lang="en-US" sz="800" b="1" dirty="0" smtClean="0">
+                <a:latin typeface="Century Gothic" panose="020B0502020202020204" pitchFamily="34" charset="0"/>
+                <a:cs typeface="Adobe Devanagari" panose="02040503050201020203" pitchFamily="18" charset="0"/>
+              </a:rPr>
+              <a:t>Med</a:t>
+            </a:r>
+            <a:endParaRPr lang="en-US" sz="800" b="1" dirty="0">
+              <a:latin typeface="Century Gothic" panose="020B0502020202020204" pitchFamily="34" charset="0"/>
+              <a:cs typeface="Adobe Devanagari" panose="02040503050201020203" pitchFamily="18" charset="0"/>
+            </a:endParaRPr>
+          </a:p>
+          <a:p>
+            <a:pPr algn="ctr"/>
+            <a:r>
+              <a:rPr lang="en-US" sz="800" b="1" dirty="0" smtClean="0">
+                <a:latin typeface="Century Gothic" panose="020B0502020202020204" pitchFamily="34" charset="0"/>
+                <a:cs typeface="Adobe Devanagari" panose="02040503050201020203" pitchFamily="18" charset="0"/>
+              </a:rPr>
+              <a:t>High</a:t>
+            </a:r>
+            <a:endParaRPr lang="en-US" sz="800" b="1" dirty="0">
+              <a:latin typeface="Century Gothic" panose="020B0502020202020204" pitchFamily="34" charset="0"/>
+              <a:cs typeface="Adobe Devanagari" panose="02040503050201020203" pitchFamily="18" charset="0"/>
+            </a:endParaRPr>
+          </a:p>
+        </p:txBody>
+      </p:sp>
+      <p:sp>
+        <p:nvSpPr>
+          <p:cNvPr id="33" name="TextBox 32"/>
           <p:cNvSpPr txBox="1"/>
           <p:nvPr/>
         </p:nvSpPr>
         <p:spPr>
           <a:xfrm>
-            <a:off x="5744325" y="3267265"/>
-            <a:ext cx="425117" cy="246221"/>
+            <a:off x="5038072" y="4500003"/>
+            <a:ext cx="1871753" cy="523220"/>
+          </a:xfrm>
+          <a:prstGeom prst="rect">
+            <a:avLst/>
+          </a:prstGeom>
+          <a:noFill/>
+        </p:spPr>
+        <p:txBody>
+          <a:bodyPr wrap="square" rtlCol="0">
+            <a:spAutoFit/>
+          </a:bodyPr>
+          <a:lstStyle/>
+          <a:p>
+            <a:pPr algn="ctr"/>
+            <a:r>
+              <a:rPr lang="en-US" sz="2800" b="1" dirty="0" smtClean="0">
+                <a:latin typeface="Broadway" panose="04040905080B02020502" pitchFamily="82" charset="0"/>
+                <a:cs typeface="Adobe Devanagari" panose="02040503050201020203" pitchFamily="18" charset="0"/>
+              </a:rPr>
+              <a:t>Mercury</a:t>
+            </a:r>
+            <a:endParaRPr lang="en-US" sz="2800" b="1" dirty="0">
+              <a:latin typeface="Broadway" panose="04040905080B02020502" pitchFamily="82" charset="0"/>
+              <a:cs typeface="Adobe Devanagari" panose="02040503050201020203" pitchFamily="18" charset="0"/>
+            </a:endParaRPr>
+          </a:p>
+        </p:txBody>
+      </p:sp>
+      <p:sp>
+        <p:nvSpPr>
+          <p:cNvPr id="34" name="TextBox 33"/>
+          <p:cNvSpPr txBox="1"/>
+          <p:nvPr/>
+        </p:nvSpPr>
+        <p:spPr>
+          <a:xfrm>
+            <a:off x="5404373" y="4877231"/>
+            <a:ext cx="1069524" cy="246221"/>
           </a:xfrm>
           <a:prstGeom prst="rect">
             <a:avLst/>
@@ -25919,224 +23436,6 @@
           <a:p>
             <a:pPr algn="ctr"/>
             <a:r>
-              <a:rPr lang="en-US" sz="1000" b="1" dirty="0">
-                <a:latin typeface="Century Gothic" panose="020B0502020202020204" pitchFamily="34" charset="0"/>
-                <a:cs typeface="Adobe Devanagari" panose="02040503050201020203" pitchFamily="18" charset="0"/>
-              </a:rPr>
-              <a:t>MID</a:t>
-            </a:r>
-          </a:p>
-        </p:txBody>
-      </p:sp>
-      <p:sp>
-        <p:nvSpPr>
-          <p:cNvPr id="29" name="TextBox 28"/>
-          <p:cNvSpPr txBox="1"/>
-          <p:nvPr/>
-        </p:nvSpPr>
-        <p:spPr>
-          <a:xfrm>
-            <a:off x="6451289" y="3267265"/>
-            <a:ext cx="577402" cy="246221"/>
-          </a:xfrm>
-          <a:prstGeom prst="rect">
-            <a:avLst/>
-          </a:prstGeom>
-          <a:noFill/>
-        </p:spPr>
-        <p:txBody>
-          <a:bodyPr wrap="none" rtlCol="0">
-            <a:spAutoFit/>
-          </a:bodyPr>
-          <a:lstStyle/>
-          <a:p>
-            <a:pPr algn="ctr"/>
-            <a:r>
-              <a:rPr lang="en-US" sz="1000" b="1" dirty="0">
-                <a:latin typeface="Century Gothic" panose="020B0502020202020204" pitchFamily="34" charset="0"/>
-                <a:cs typeface="Adobe Devanagari" panose="02040503050201020203" pitchFamily="18" charset="0"/>
-              </a:rPr>
-              <a:t>TREBLE</a:t>
-            </a:r>
-          </a:p>
-        </p:txBody>
-      </p:sp>
-      <p:sp>
-        <p:nvSpPr>
-          <p:cNvPr id="30" name="TextBox 29"/>
-          <p:cNvSpPr txBox="1"/>
-          <p:nvPr/>
-        </p:nvSpPr>
-        <p:spPr>
-          <a:xfrm>
-            <a:off x="4910305" y="3267265"/>
-            <a:ext cx="487634" cy="246221"/>
-          </a:xfrm>
-          <a:prstGeom prst="rect">
-            <a:avLst/>
-          </a:prstGeom>
-          <a:noFill/>
-        </p:spPr>
-        <p:txBody>
-          <a:bodyPr wrap="none" rtlCol="0">
-            <a:spAutoFit/>
-          </a:bodyPr>
-          <a:lstStyle/>
-          <a:p>
-            <a:pPr algn="ctr"/>
-            <a:r>
-              <a:rPr lang="en-US" sz="1000" b="1" dirty="0">
-                <a:latin typeface="Century Gothic" panose="020B0502020202020204" pitchFamily="34" charset="0"/>
-                <a:cs typeface="Adobe Devanagari" panose="02040503050201020203" pitchFamily="18" charset="0"/>
-              </a:rPr>
-              <a:t>BASS</a:t>
-            </a:r>
-          </a:p>
-        </p:txBody>
-      </p:sp>
-      <p:sp>
-        <p:nvSpPr>
-          <p:cNvPr id="31" name="TextBox 30"/>
-          <p:cNvSpPr txBox="1"/>
-          <p:nvPr/>
-        </p:nvSpPr>
-        <p:spPr>
-          <a:xfrm>
-            <a:off x="4845951" y="5548458"/>
-            <a:ext cx="639920" cy="246221"/>
-          </a:xfrm>
-          <a:prstGeom prst="rect">
-            <a:avLst/>
-          </a:prstGeom>
-          <a:noFill/>
-        </p:spPr>
-        <p:txBody>
-          <a:bodyPr wrap="none" rtlCol="0">
-            <a:spAutoFit/>
-          </a:bodyPr>
-          <a:lstStyle/>
-          <a:p>
-            <a:pPr algn="ctr"/>
-            <a:r>
-              <a:rPr lang="en-US" sz="1000" b="1" dirty="0">
-                <a:latin typeface="Century Gothic" panose="020B0502020202020204" pitchFamily="34" charset="0"/>
-                <a:cs typeface="Adobe Devanagari" panose="02040503050201020203" pitchFamily="18" charset="0"/>
-              </a:rPr>
-              <a:t>BYPASS</a:t>
-            </a:r>
-          </a:p>
-        </p:txBody>
-      </p:sp>
-      <p:sp>
-        <p:nvSpPr>
-          <p:cNvPr id="32" name="TextBox 31"/>
-          <p:cNvSpPr txBox="1"/>
-          <p:nvPr/>
-        </p:nvSpPr>
-        <p:spPr>
-          <a:xfrm rot="16200000">
-            <a:off x="4914977" y="4030683"/>
-            <a:ext cx="410690" cy="461665"/>
-          </a:xfrm>
-          <a:prstGeom prst="rect">
-            <a:avLst/>
-          </a:prstGeom>
-          <a:noFill/>
-        </p:spPr>
-        <p:txBody>
-          <a:bodyPr wrap="none" rtlCol="0">
-            <a:spAutoFit/>
-          </a:bodyPr>
-          <a:lstStyle/>
-          <a:p>
-            <a:pPr algn="ctr"/>
-            <a:r>
-              <a:rPr lang="en-US" sz="800" b="1" dirty="0">
-                <a:latin typeface="Century Gothic" panose="020B0502020202020204" pitchFamily="34" charset="0"/>
-                <a:cs typeface="Adobe Devanagari" panose="02040503050201020203" pitchFamily="18" charset="0"/>
-              </a:rPr>
-              <a:t>Low</a:t>
-            </a:r>
-          </a:p>
-          <a:p>
-            <a:pPr algn="ctr"/>
-            <a:r>
-              <a:rPr lang="en-US" sz="800" b="1" dirty="0">
-                <a:latin typeface="Century Gothic" panose="020B0502020202020204" pitchFamily="34" charset="0"/>
-                <a:cs typeface="Adobe Devanagari" panose="02040503050201020203" pitchFamily="18" charset="0"/>
-              </a:rPr>
-              <a:t>Med</a:t>
-            </a:r>
-          </a:p>
-          <a:p>
-            <a:pPr algn="ctr"/>
-            <a:r>
-              <a:rPr lang="en-US" sz="800" b="1" dirty="0">
-                <a:latin typeface="Century Gothic" panose="020B0502020202020204" pitchFamily="34" charset="0"/>
-                <a:cs typeface="Adobe Devanagari" panose="02040503050201020203" pitchFamily="18" charset="0"/>
-              </a:rPr>
-              <a:t>High</a:t>
-            </a:r>
-          </a:p>
-        </p:txBody>
-      </p:sp>
-      <p:sp>
-        <p:nvSpPr>
-          <p:cNvPr id="33" name="TextBox 32"/>
-          <p:cNvSpPr txBox="1"/>
-          <p:nvPr/>
-        </p:nvSpPr>
-        <p:spPr>
-          <a:xfrm>
-            <a:off x="5038072" y="4500003"/>
-            <a:ext cx="1871753" cy="523220"/>
-          </a:xfrm>
-          <a:prstGeom prst="rect">
-            <a:avLst/>
-          </a:prstGeom>
-          <a:noFill/>
-        </p:spPr>
-        <p:txBody>
-          <a:bodyPr wrap="square" rtlCol="0">
-            <a:spAutoFit/>
-          </a:bodyPr>
-          <a:lstStyle/>
-          <a:p>
-            <a:pPr algn="ctr"/>
-            <a:r>
-              <a:rPr lang="en-US" sz="2800" b="1" dirty="0">
-                <a:latin typeface="Broadway" panose="04040905080B02020502" pitchFamily="82" charset="0"/>
-                <a:cs typeface="Adobe Devanagari" panose="02040503050201020203" pitchFamily="18" charset="0"/>
-              </a:rPr>
-              <a:t>Mercury</a:t>
-            </a:r>
-          </a:p>
-        </p:txBody>
-      </p:sp>
-      <p:sp>
-        <p:nvSpPr>
-          <p:cNvPr id="34" name="TextBox 33"/>
-          <p:cNvSpPr txBox="1"/>
-          <p:nvPr/>
-        </p:nvSpPr>
-        <p:spPr>
-          <a:xfrm>
-            <a:off x="5404373" y="4877231"/>
-            <a:ext cx="1069524" cy="246221"/>
-          </a:xfrm>
-          <a:prstGeom prst="rect">
-            <a:avLst/>
-          </a:prstGeom>
-          <a:noFill/>
-        </p:spPr>
-        <p:txBody>
-          <a:bodyPr wrap="none" rtlCol="0">
-            <a:spAutoFit/>
-          </a:bodyPr>
-          <a:lstStyle/>
-          <a:p>
-            <a:pPr algn="ctr"/>
-            <a:r>
               <a:rPr lang="en-US" sz="1000" dirty="0">
                 <a:latin typeface="Century Gothic" panose="020B0502020202020204" pitchFamily="34" charset="0"/>
                 <a:cs typeface="Adobe Devanagari" panose="02040503050201020203" pitchFamily="18" charset="0"/>
@@ -26144,7 +23443,7 @@
               <a:t>Amp </a:t>
             </a:r>
             <a:r>
-              <a:rPr lang="en-US" sz="1000" dirty="0" err="1">
+              <a:rPr lang="en-US" sz="1000" dirty="0" err="1" smtClean="0">
                 <a:latin typeface="Century Gothic" panose="020B0502020202020204" pitchFamily="34" charset="0"/>
                 <a:cs typeface="Adobe Devanagari" panose="02040503050201020203" pitchFamily="18" charset="0"/>
               </a:rPr>
@@ -26361,7 +23660,7 @@
           <a:p>
             <a:pPr algn="ctr"/>
             <a:r>
-              <a:rPr lang="en-US" sz="800" b="1" dirty="0">
+              <a:rPr lang="en-US" sz="800" b="1" dirty="0" smtClean="0">
                 <a:latin typeface="Century Gothic" panose="020B0502020202020204" pitchFamily="34" charset="0"/>
                 <a:cs typeface="Adobe Devanagari" panose="02040503050201020203" pitchFamily="18" charset="0"/>
               </a:rPr>
@@ -26371,7 +23670,7 @@
           <a:p>
             <a:pPr algn="ctr"/>
             <a:r>
-              <a:rPr lang="en-US" sz="800" b="1" dirty="0">
+              <a:rPr lang="en-US" sz="800" b="1" dirty="0" smtClean="0">
                 <a:latin typeface="Century Gothic" panose="020B0502020202020204" pitchFamily="34" charset="0"/>
                 <a:cs typeface="Adobe Devanagari" panose="02040503050201020203" pitchFamily="18" charset="0"/>
               </a:rPr>
@@ -26381,12 +23680,16 @@
           <a:p>
             <a:pPr algn="ctr"/>
             <a:r>
-              <a:rPr lang="en-US" sz="800" b="1" dirty="0">
+              <a:rPr lang="en-US" sz="800" b="1" dirty="0" smtClean="0">
                 <a:latin typeface="Century Gothic" panose="020B0502020202020204" pitchFamily="34" charset="0"/>
                 <a:cs typeface="Adobe Devanagari" panose="02040503050201020203" pitchFamily="18" charset="0"/>
               </a:rPr>
               <a:t>Amp 3</a:t>
             </a:r>
+            <a:endParaRPr lang="en-US" sz="800" b="1" dirty="0">
+              <a:latin typeface="Century Gothic" panose="020B0502020202020204" pitchFamily="34" charset="0"/>
+              <a:cs typeface="Adobe Devanagari" panose="02040503050201020203" pitchFamily="18" charset="0"/>
+            </a:endParaRPr>
           </a:p>
         </p:txBody>
       </p:sp>
@@ -26510,7 +23813,7 @@
           </a:p>
           <a:p>
             <a:r>
-              <a:rPr lang="en-US" sz="1600" b="1" dirty="0">
+              <a:rPr lang="en-US" sz="1600" b="1" dirty="0" smtClean="0">
                 <a:solidFill>
                   <a:schemeClr val="tx1"/>
                 </a:solidFill>
@@ -26518,7 +23821,7 @@
               <a:t>Level:</a:t>
             </a:r>
             <a:r>
-              <a:rPr lang="en-US" sz="1600" dirty="0">
+              <a:rPr lang="en-US" sz="1600" dirty="0" smtClean="0">
                 <a:solidFill>
                   <a:schemeClr val="tx1"/>
                 </a:solidFill>
@@ -26528,7 +23831,7 @@
           </a:p>
           <a:p>
             <a:r>
-              <a:rPr lang="en-US" sz="1600" b="1" dirty="0">
+              <a:rPr lang="en-US" sz="1600" b="1" dirty="0" smtClean="0">
                 <a:solidFill>
                   <a:schemeClr val="tx1"/>
                 </a:solidFill>
@@ -26536,7 +23839,7 @@
               <a:t>Presence: </a:t>
             </a:r>
             <a:r>
-              <a:rPr lang="en-US" sz="1600" dirty="0">
+              <a:rPr lang="en-US" sz="1600" dirty="0" smtClean="0">
                 <a:solidFill>
                   <a:schemeClr val="tx1"/>
                 </a:solidFill>
@@ -26587,7 +23890,7 @@
           <a:lstStyle/>
           <a:p>
             <a:r>
-              <a:rPr lang="en-US" sz="1600" b="1" dirty="0">
+              <a:rPr lang="en-US" sz="1600" b="1" dirty="0" smtClean="0">
                 <a:solidFill>
                   <a:schemeClr val="tx1"/>
                 </a:solidFill>
@@ -26595,17 +23898,22 @@
               <a:t>Bass</a:t>
             </a:r>
             <a:r>
-              <a:rPr lang="en-US" sz="1600" dirty="0">
+              <a:rPr lang="en-US" sz="1600" dirty="0" smtClean="0">
                 <a:solidFill>
                   <a:schemeClr val="tx1"/>
                 </a:solidFill>
               </a:rPr>
               <a:t>: +10/-10 dB</a:t>
             </a:r>
-          </a:p>
-          <a:p>
-            <a:r>
-              <a:rPr lang="en-US" sz="1600" b="1" dirty="0">
+            <a:endParaRPr lang="en-US" sz="1600" dirty="0">
+              <a:solidFill>
+                <a:schemeClr val="tx1"/>
+              </a:solidFill>
+            </a:endParaRPr>
+          </a:p>
+          <a:p>
+            <a:r>
+              <a:rPr lang="en-US" sz="1600" b="1" dirty="0" smtClean="0">
                 <a:solidFill>
                   <a:schemeClr val="tx1"/>
                 </a:solidFill>
@@ -26613,17 +23921,22 @@
               <a:t>Mid</a:t>
             </a:r>
             <a:r>
-              <a:rPr lang="en-US" sz="1600" dirty="0">
+              <a:rPr lang="en-US" sz="1600" dirty="0" smtClean="0">
                 <a:solidFill>
                   <a:schemeClr val="tx1"/>
                 </a:solidFill>
               </a:rPr>
               <a:t>: +10/-10 dB</a:t>
             </a:r>
-          </a:p>
-          <a:p>
-            <a:r>
-              <a:rPr lang="en-US" sz="1600" b="1" dirty="0">
+            <a:endParaRPr lang="en-US" sz="1600" dirty="0">
+              <a:solidFill>
+                <a:schemeClr val="tx1"/>
+              </a:solidFill>
+            </a:endParaRPr>
+          </a:p>
+          <a:p>
+            <a:r>
+              <a:rPr lang="en-US" sz="1600" b="1" dirty="0" smtClean="0">
                 <a:solidFill>
                   <a:schemeClr val="tx1"/>
                 </a:solidFill>
@@ -26631,7 +23944,7 @@
               <a:t>Treble</a:t>
             </a:r>
             <a:r>
-              <a:rPr lang="en-US" sz="1600" dirty="0">
+              <a:rPr lang="en-US" sz="1600" dirty="0" smtClean="0">
                 <a:solidFill>
                   <a:schemeClr val="tx1"/>
                 </a:solidFill>
@@ -26687,8 +24000,21 @@
                   <a:schemeClr val="bg1"/>
                 </a:solidFill>
               </a:rPr>
-              <a:t>Amp Group</a:t>
-            </a:r>
+              <a:t>Amp </a:t>
+            </a:r>
+            <a:r>
+              <a:rPr lang="en-US" sz="1600" b="1" dirty="0" smtClean="0">
+                <a:solidFill>
+                  <a:schemeClr val="bg1"/>
+                </a:solidFill>
+              </a:rPr>
+              <a:t>Group</a:t>
+            </a:r>
+            <a:endParaRPr lang="en-US" sz="1600" b="1" dirty="0">
+              <a:solidFill>
+                <a:schemeClr val="bg1"/>
+              </a:solidFill>
+            </a:endParaRPr>
           </a:p>
           <a:p>
             <a:r>
@@ -26697,8 +24023,21 @@
                   <a:schemeClr val="bg1"/>
                 </a:solidFill>
               </a:rPr>
-              <a:t>  Left:  Low Gain</a:t>
-            </a:r>
+              <a:t>  Left:  </a:t>
+            </a:r>
+            <a:r>
+              <a:rPr lang="en-US" sz="1600" b="1" dirty="0" smtClean="0">
+                <a:solidFill>
+                  <a:schemeClr val="bg1"/>
+                </a:solidFill>
+              </a:rPr>
+              <a:t>Low Gain</a:t>
+            </a:r>
+            <a:endParaRPr lang="en-US" sz="1600" b="1" dirty="0">
+              <a:solidFill>
+                <a:schemeClr val="bg1"/>
+              </a:solidFill>
+            </a:endParaRPr>
           </a:p>
           <a:p>
             <a:r>
@@ -26707,8 +24046,21 @@
                   <a:schemeClr val="bg1"/>
                 </a:solidFill>
               </a:rPr>
-              <a:t>  Center: Med Gain</a:t>
-            </a:r>
+              <a:t>  Center: </a:t>
+            </a:r>
+            <a:r>
+              <a:rPr lang="en-US" sz="1600" b="1" dirty="0" smtClean="0">
+                <a:solidFill>
+                  <a:schemeClr val="bg1"/>
+                </a:solidFill>
+              </a:rPr>
+              <a:t>Med Gain</a:t>
+            </a:r>
+            <a:endParaRPr lang="en-US" sz="1600" b="1" dirty="0">
+              <a:solidFill>
+                <a:schemeClr val="bg1"/>
+              </a:solidFill>
+            </a:endParaRPr>
           </a:p>
           <a:p>
             <a:r>
@@ -26717,8 +24069,21 @@
                   <a:schemeClr val="bg1"/>
                 </a:solidFill>
               </a:rPr>
-              <a:t>  Right:  High Gain</a:t>
-            </a:r>
+              <a:t>  Right:  </a:t>
+            </a:r>
+            <a:r>
+              <a:rPr lang="en-US" sz="1600" b="1" dirty="0" smtClean="0">
+                <a:solidFill>
+                  <a:schemeClr val="bg1"/>
+                </a:solidFill>
+              </a:rPr>
+              <a:t>High Gain</a:t>
+            </a:r>
+            <a:endParaRPr lang="en-US" sz="1600" b="1" dirty="0">
+              <a:solidFill>
+                <a:schemeClr val="bg1"/>
+              </a:solidFill>
+            </a:endParaRPr>
           </a:p>
         </p:txBody>
       </p:sp>
@@ -26758,13 +24123,41 @@
           <a:lstStyle/>
           <a:p>
             <a:r>
+              <a:rPr lang="en-US" sz="1600" b="1" dirty="0" smtClean="0">
+                <a:solidFill>
+                  <a:schemeClr val="bg1"/>
+                </a:solidFill>
+              </a:rPr>
+              <a:t>Model Select (depends on Toggle 1 group selection)*</a:t>
+            </a:r>
+            <a:endParaRPr lang="en-US" sz="1600" b="1" dirty="0">
+              <a:solidFill>
+                <a:schemeClr val="bg1"/>
+              </a:solidFill>
+            </a:endParaRPr>
+          </a:p>
+          <a:p>
+            <a:r>
               <a:rPr lang="en-US" sz="1600" b="1" dirty="0">
                 <a:solidFill>
                   <a:schemeClr val="bg1"/>
                 </a:solidFill>
               </a:rPr>
-              <a:t>Model Select (depends on Toggle 1 group selection)*</a:t>
-            </a:r>
+              <a:t>  Left:  </a:t>
+            </a:r>
+            <a:r>
+              <a:rPr lang="en-US" sz="1600" b="1" dirty="0" smtClean="0">
+                <a:solidFill>
+                  <a:schemeClr val="bg1"/>
+                </a:solidFill>
+              </a:rPr>
+              <a:t>Amp 1</a:t>
+            </a:r>
+            <a:endParaRPr lang="en-US" sz="1600" b="1" dirty="0">
+              <a:solidFill>
+                <a:schemeClr val="bg1"/>
+              </a:solidFill>
+            </a:endParaRPr>
           </a:p>
           <a:p>
             <a:r>
@@ -26773,8 +24166,21 @@
                   <a:schemeClr val="bg1"/>
                 </a:solidFill>
               </a:rPr>
-              <a:t>  Left:  Amp 1</a:t>
-            </a:r>
+              <a:t>  Center: </a:t>
+            </a:r>
+            <a:r>
+              <a:rPr lang="en-US" sz="1600" b="1" dirty="0" smtClean="0">
+                <a:solidFill>
+                  <a:schemeClr val="bg1"/>
+                </a:solidFill>
+              </a:rPr>
+              <a:t>Amp 2</a:t>
+            </a:r>
+            <a:endParaRPr lang="en-US" sz="1600" b="1" dirty="0">
+              <a:solidFill>
+                <a:schemeClr val="bg1"/>
+              </a:solidFill>
+            </a:endParaRPr>
           </a:p>
           <a:p>
             <a:r>
@@ -26783,18 +24189,21 @@
                   <a:schemeClr val="bg1"/>
                 </a:solidFill>
               </a:rPr>
-              <a:t>  Center: Amp 2</a:t>
-            </a:r>
-          </a:p>
-          <a:p>
-            <a:r>
-              <a:rPr lang="en-US" sz="1600" b="1" dirty="0">
+              <a:t>  Right:  </a:t>
+            </a:r>
+            <a:r>
+              <a:rPr lang="en-US" sz="1600" b="1" dirty="0" smtClean="0">
                 <a:solidFill>
                   <a:schemeClr val="bg1"/>
                 </a:solidFill>
               </a:rPr>
-              <a:t>  Right:  Amp 3</a:t>
-            </a:r>
+              <a:t>Amp 3</a:t>
+            </a:r>
+            <a:endParaRPr lang="en-US" sz="1600" b="1" dirty="0">
+              <a:solidFill>
+                <a:schemeClr val="bg1"/>
+              </a:solidFill>
+            </a:endParaRPr>
           </a:p>
         </p:txBody>
       </p:sp>
@@ -26879,7 +24288,7 @@
           <a:lstStyle/>
           <a:p>
             <a:r>
-              <a:rPr lang="en-US" sz="2800" b="1" dirty="0">
+              <a:rPr lang="en-US" sz="2800" b="1" dirty="0" smtClean="0">
                 <a:solidFill>
                   <a:schemeClr val="tx1"/>
                 </a:solidFill>
@@ -26887,12 +24296,20 @@
               <a:t>Mercury</a:t>
             </a:r>
             <a:r>
+              <a:rPr lang="en-US" sz="1600" b="1" dirty="0" smtClean="0">
+                <a:solidFill>
+                  <a:schemeClr val="tx1"/>
+                </a:solidFill>
+              </a:rPr>
+              <a:t> </a:t>
+            </a:r>
+            <a:r>
               <a:rPr lang="en-US" sz="1600" b="1" dirty="0">
                 <a:solidFill>
                   <a:schemeClr val="tx1"/>
                 </a:solidFill>
               </a:rPr>
-              <a:t> is an </a:t>
+              <a:t>is an </a:t>
             </a:r>
             <a:r>
               <a:rPr lang="en-US" sz="2400" b="1" dirty="0">
@@ -26900,7 +24317,15 @@
                   <a:schemeClr val="tx1"/>
                 </a:solidFill>
               </a:rPr>
-              <a:t>Amp Emulator using Neural Amp Modeler (NAM). </a:t>
+              <a:t>Amp </a:t>
+            </a:r>
+            <a:r>
+              <a:rPr lang="en-US" sz="2400" b="1" dirty="0" smtClean="0">
+                <a:solidFill>
+                  <a:schemeClr val="tx1"/>
+                </a:solidFill>
+              </a:rPr>
+              <a:t>Emulator using Neural Amp Modeler (NAM). </a:t>
             </a:r>
             <a:endParaRPr lang="en-US" sz="1600" b="1" dirty="0">
               <a:solidFill>
@@ -26988,8 +24413,21 @@
                   <a:schemeClr val="tx1"/>
                 </a:solidFill>
               </a:rPr>
-              <a:t>MIDI: YES</a:t>
-            </a:r>
+              <a:t>MIDI: </a:t>
+            </a:r>
+            <a:r>
+              <a:rPr lang="en-US" sz="1600" b="1" dirty="0" smtClean="0">
+                <a:solidFill>
+                  <a:schemeClr val="tx1"/>
+                </a:solidFill>
+              </a:rPr>
+              <a:t>YES</a:t>
+            </a:r>
+            <a:endParaRPr lang="en-US" sz="1600" b="1" dirty="0">
+              <a:solidFill>
+                <a:schemeClr val="tx1"/>
+              </a:solidFill>
+            </a:endParaRPr>
           </a:p>
         </p:txBody>
       </p:sp>
@@ -27268,14 +24706,18 @@
           <a:lstStyle/>
           <a:p>
             <a:r>
-              <a:rPr lang="en-US" dirty="0"/>
+              <a:rPr lang="en-US" dirty="0" smtClean="0"/>
               <a:t>*NAM Models</a:t>
             </a:r>
           </a:p>
           <a:p>
             <a:r>
+              <a:rPr lang="en-US" sz="1200" dirty="0" smtClean="0"/>
+              <a:t>Low </a:t>
+            </a:r>
+            <a:r>
               <a:rPr lang="en-US" sz="1200" dirty="0"/>
-              <a:t>Low Gain:</a:t>
+              <a:t>Gain:</a:t>
             </a:r>
           </a:p>
           <a:p>
@@ -28418,7 +25860,7 @@
           <a:p>
             <a:pPr algn="ctr"/>
             <a:r>
-              <a:rPr lang="en-US" sz="1000" b="1" dirty="0" err="1">
+              <a:rPr lang="en-US" sz="1000" b="1" dirty="0" err="1" smtClean="0">
                 <a:latin typeface="Century Gothic" panose="020B0502020202020204" pitchFamily="34" charset="0"/>
                 <a:cs typeface="Adobe Devanagari" panose="02040503050201020203" pitchFamily="18" charset="0"/>
               </a:rPr>
@@ -28455,25 +25897,210 @@
           <a:p>
             <a:pPr algn="ctr"/>
             <a:r>
+              <a:rPr lang="en-US" sz="1000" b="1" dirty="0" smtClean="0">
+                <a:latin typeface="Century Gothic" panose="020B0502020202020204" pitchFamily="34" charset="0"/>
+                <a:cs typeface="Adobe Devanagari" panose="02040503050201020203" pitchFamily="18" charset="0"/>
+              </a:rPr>
+              <a:t>Mix</a:t>
+            </a:r>
+            <a:endParaRPr lang="en-US" sz="1000" b="1" dirty="0">
+              <a:latin typeface="Century Gothic" panose="020B0502020202020204" pitchFamily="34" charset="0"/>
+              <a:cs typeface="Adobe Devanagari" panose="02040503050201020203" pitchFamily="18" charset="0"/>
+            </a:endParaRPr>
+          </a:p>
+        </p:txBody>
+      </p:sp>
+      <p:sp>
+        <p:nvSpPr>
+          <p:cNvPr id="29" name="TextBox 28"/>
+          <p:cNvSpPr txBox="1"/>
+          <p:nvPr/>
+        </p:nvSpPr>
+        <p:spPr>
+          <a:xfrm>
+            <a:off x="6459781" y="2306958"/>
+            <a:ext cx="596638" cy="246221"/>
+          </a:xfrm>
+          <a:prstGeom prst="rect">
+            <a:avLst/>
+          </a:prstGeom>
+          <a:noFill/>
+        </p:spPr>
+        <p:txBody>
+          <a:bodyPr wrap="none" rtlCol="0">
+            <a:spAutoFit/>
+          </a:bodyPr>
+          <a:lstStyle/>
+          <a:p>
+            <a:pPr algn="ctr"/>
+            <a:r>
+              <a:rPr lang="en-US" sz="1000" b="1" dirty="0" smtClean="0">
+                <a:latin typeface="Century Gothic" panose="020B0502020202020204" pitchFamily="34" charset="0"/>
+                <a:cs typeface="Adobe Devanagari" panose="02040503050201020203" pitchFamily="18" charset="0"/>
+              </a:rPr>
+              <a:t>Decay</a:t>
+            </a:r>
+            <a:endParaRPr lang="en-US" sz="1000" b="1" dirty="0">
+              <a:latin typeface="Century Gothic" panose="020B0502020202020204" pitchFamily="34" charset="0"/>
+              <a:cs typeface="Adobe Devanagari" panose="02040503050201020203" pitchFamily="18" charset="0"/>
+            </a:endParaRPr>
+          </a:p>
+        </p:txBody>
+      </p:sp>
+      <p:sp>
+        <p:nvSpPr>
+          <p:cNvPr id="30" name="TextBox 29"/>
+          <p:cNvSpPr txBox="1"/>
+          <p:nvPr/>
+        </p:nvSpPr>
+        <p:spPr>
+          <a:xfrm>
+            <a:off x="5590686" y="3306313"/>
+            <a:ext cx="780984" cy="246221"/>
+          </a:xfrm>
+          <a:prstGeom prst="rect">
+            <a:avLst/>
+          </a:prstGeom>
+          <a:noFill/>
+        </p:spPr>
+        <p:txBody>
+          <a:bodyPr wrap="none" rtlCol="0">
+            <a:spAutoFit/>
+          </a:bodyPr>
+          <a:lstStyle/>
+          <a:p>
+            <a:pPr algn="ctr"/>
+            <a:r>
+              <a:rPr lang="en-US" sz="1000" b="1" dirty="0" smtClean="0">
+                <a:latin typeface="Century Gothic" panose="020B0502020202020204" pitchFamily="34" charset="0"/>
+                <a:cs typeface="Adobe Devanagari" panose="02040503050201020203" pitchFamily="18" charset="0"/>
+              </a:rPr>
+              <a:t>Mod Rate</a:t>
+            </a:r>
+            <a:endParaRPr lang="en-US" sz="1000" b="1" dirty="0">
+              <a:latin typeface="Century Gothic" panose="020B0502020202020204" pitchFamily="34" charset="0"/>
+              <a:cs typeface="Adobe Devanagari" panose="02040503050201020203" pitchFamily="18" charset="0"/>
+            </a:endParaRPr>
+          </a:p>
+        </p:txBody>
+      </p:sp>
+      <p:sp>
+        <p:nvSpPr>
+          <p:cNvPr id="31" name="TextBox 30"/>
+          <p:cNvSpPr txBox="1"/>
+          <p:nvPr/>
+        </p:nvSpPr>
+        <p:spPr>
+          <a:xfrm>
+            <a:off x="6530082" y="3306313"/>
+            <a:ext cx="468398" cy="246221"/>
+          </a:xfrm>
+          <a:prstGeom prst="rect">
+            <a:avLst/>
+          </a:prstGeom>
+          <a:noFill/>
+        </p:spPr>
+        <p:txBody>
+          <a:bodyPr wrap="none" rtlCol="0">
+            <a:spAutoFit/>
+          </a:bodyPr>
+          <a:lstStyle/>
+          <a:p>
+            <a:pPr algn="ctr"/>
+            <a:r>
+              <a:rPr lang="en-US" sz="1000" b="1" dirty="0" smtClean="0">
+                <a:latin typeface="Century Gothic" panose="020B0502020202020204" pitchFamily="34" charset="0"/>
+                <a:cs typeface="Adobe Devanagari" panose="02040503050201020203" pitchFamily="18" charset="0"/>
+              </a:rPr>
+              <a:t>Filter</a:t>
+            </a:r>
+            <a:endParaRPr lang="en-US" sz="1000" b="1" dirty="0">
+              <a:latin typeface="Century Gothic" panose="020B0502020202020204" pitchFamily="34" charset="0"/>
+              <a:cs typeface="Adobe Devanagari" panose="02040503050201020203" pitchFamily="18" charset="0"/>
+            </a:endParaRPr>
+          </a:p>
+        </p:txBody>
+      </p:sp>
+      <p:sp>
+        <p:nvSpPr>
+          <p:cNvPr id="32" name="TextBox 31"/>
+          <p:cNvSpPr txBox="1"/>
+          <p:nvPr/>
+        </p:nvSpPr>
+        <p:spPr>
+          <a:xfrm>
+            <a:off x="4945016" y="3306313"/>
+            <a:ext cx="466795" cy="246221"/>
+          </a:xfrm>
+          <a:prstGeom prst="rect">
+            <a:avLst/>
+          </a:prstGeom>
+          <a:noFill/>
+        </p:spPr>
+        <p:txBody>
+          <a:bodyPr wrap="none" rtlCol="0">
+            <a:spAutoFit/>
+          </a:bodyPr>
+          <a:lstStyle/>
+          <a:p>
+            <a:pPr algn="ctr"/>
+            <a:r>
+              <a:rPr lang="en-US" sz="1000" b="1" dirty="0" smtClean="0">
+                <a:latin typeface="Century Gothic" panose="020B0502020202020204" pitchFamily="34" charset="0"/>
+                <a:cs typeface="Adobe Devanagari" panose="02040503050201020203" pitchFamily="18" charset="0"/>
+              </a:rPr>
+              <a:t>Mod</a:t>
+            </a:r>
+            <a:endParaRPr lang="en-US" sz="1000" b="1" dirty="0">
+              <a:latin typeface="Century Gothic" panose="020B0502020202020204" pitchFamily="34" charset="0"/>
+              <a:cs typeface="Adobe Devanagari" panose="02040503050201020203" pitchFamily="18" charset="0"/>
+            </a:endParaRPr>
+          </a:p>
+        </p:txBody>
+      </p:sp>
+      <p:sp>
+        <p:nvSpPr>
+          <p:cNvPr id="33" name="TextBox 32"/>
+          <p:cNvSpPr txBox="1"/>
+          <p:nvPr/>
+        </p:nvSpPr>
+        <p:spPr>
+          <a:xfrm>
+            <a:off x="4870242" y="5587506"/>
+            <a:ext cx="639919" cy="246221"/>
+          </a:xfrm>
+          <a:prstGeom prst="rect">
+            <a:avLst/>
+          </a:prstGeom>
+          <a:noFill/>
+        </p:spPr>
+        <p:txBody>
+          <a:bodyPr wrap="none" rtlCol="0">
+            <a:spAutoFit/>
+          </a:bodyPr>
+          <a:lstStyle/>
+          <a:p>
+            <a:pPr algn="ctr"/>
+            <a:r>
               <a:rPr lang="en-US" sz="1000" b="1" dirty="0">
                 <a:latin typeface="Century Gothic" panose="020B0502020202020204" pitchFamily="34" charset="0"/>
                 <a:cs typeface="Adobe Devanagari" panose="02040503050201020203" pitchFamily="18" charset="0"/>
               </a:rPr>
-              <a:t>Mix</a:t>
-            </a:r>
-          </a:p>
-        </p:txBody>
-      </p:sp>
-      <p:sp>
-        <p:nvSpPr>
-          <p:cNvPr id="29" name="TextBox 28"/>
+              <a:t>BYPASS</a:t>
+            </a:r>
+          </a:p>
+        </p:txBody>
+      </p:sp>
+      <p:sp>
+        <p:nvSpPr>
+          <p:cNvPr id="34" name="TextBox 33"/>
           <p:cNvSpPr txBox="1"/>
           <p:nvPr/>
         </p:nvSpPr>
         <p:spPr>
-          <a:xfrm>
-            <a:off x="6459781" y="2306958"/>
-            <a:ext cx="596638" cy="246221"/>
+          <a:xfrm rot="16200000">
+            <a:off x="4920030" y="4069731"/>
+            <a:ext cx="449161" cy="461665"/>
           </a:xfrm>
           <a:prstGeom prst="rect">
             <a:avLst/>
@@ -28488,25 +26115,86 @@
           <a:p>
             <a:pPr algn="ctr"/>
             <a:r>
-              <a:rPr lang="en-US" sz="1000" b="1" dirty="0">
+              <a:rPr lang="en-US" sz="800" b="1" dirty="0" smtClean="0">
                 <a:latin typeface="Century Gothic" panose="020B0502020202020204" pitchFamily="34" charset="0"/>
                 <a:cs typeface="Adobe Devanagari" panose="02040503050201020203" pitchFamily="18" charset="0"/>
               </a:rPr>
-              <a:t>Decay</a:t>
-            </a:r>
-          </a:p>
-        </p:txBody>
-      </p:sp>
-      <p:sp>
-        <p:nvSpPr>
-          <p:cNvPr id="30" name="TextBox 29"/>
+              <a:t>Small</a:t>
+            </a:r>
+          </a:p>
+          <a:p>
+            <a:pPr algn="ctr"/>
+            <a:r>
+              <a:rPr lang="en-US" sz="800" b="1" dirty="0" smtClean="0">
+                <a:latin typeface="Century Gothic" panose="020B0502020202020204" pitchFamily="34" charset="0"/>
+                <a:cs typeface="Adobe Devanagari" panose="02040503050201020203" pitchFamily="18" charset="0"/>
+              </a:rPr>
+              <a:t>Med</a:t>
+            </a:r>
+          </a:p>
+          <a:p>
+            <a:pPr algn="ctr"/>
+            <a:r>
+              <a:rPr lang="en-US" sz="800" b="1" dirty="0" smtClean="0">
+                <a:latin typeface="Century Gothic" panose="020B0502020202020204" pitchFamily="34" charset="0"/>
+                <a:cs typeface="Adobe Devanagari" panose="02040503050201020203" pitchFamily="18" charset="0"/>
+              </a:rPr>
+              <a:t>Big</a:t>
+            </a:r>
+            <a:endParaRPr lang="en-US" sz="800" b="1" dirty="0">
+              <a:latin typeface="Century Gothic" panose="020B0502020202020204" pitchFamily="34" charset="0"/>
+              <a:cs typeface="Adobe Devanagari" panose="02040503050201020203" pitchFamily="18" charset="0"/>
+            </a:endParaRPr>
+          </a:p>
+        </p:txBody>
+      </p:sp>
+      <p:sp>
+        <p:nvSpPr>
+          <p:cNvPr id="35" name="TextBox 34"/>
           <p:cNvSpPr txBox="1"/>
           <p:nvPr/>
         </p:nvSpPr>
         <p:spPr>
           <a:xfrm>
-            <a:off x="5590686" y="3306313"/>
-            <a:ext cx="780984" cy="246221"/>
+            <a:off x="4952460" y="4616479"/>
+            <a:ext cx="2037473" cy="400110"/>
+          </a:xfrm>
+          <a:prstGeom prst="rect">
+            <a:avLst/>
+          </a:prstGeom>
+          <a:noFill/>
+        </p:spPr>
+        <p:txBody>
+          <a:bodyPr wrap="square" rtlCol="0">
+            <a:spAutoFit/>
+          </a:bodyPr>
+          <a:lstStyle/>
+          <a:p>
+            <a:pPr algn="ctr"/>
+            <a:r>
+              <a:rPr lang="en-US" sz="2000" b="1" dirty="0" smtClean="0">
+                <a:latin typeface="Broadway" panose="04040905080B02020502" pitchFamily="82" charset="0"/>
+                <a:cs typeface="Adobe Devanagari" panose="02040503050201020203" pitchFamily="18" charset="0"/>
+              </a:rPr>
+              <a:t>Earth</a:t>
+            </a:r>
+            <a:endParaRPr lang="en-US" sz="2000" b="1" dirty="0">
+              <a:latin typeface="Broadway" panose="04040905080B02020502" pitchFamily="82" charset="0"/>
+              <a:cs typeface="Adobe Devanagari" panose="02040503050201020203" pitchFamily="18" charset="0"/>
+            </a:endParaRPr>
+          </a:p>
+        </p:txBody>
+      </p:sp>
+      <p:sp>
+        <p:nvSpPr>
+          <p:cNvPr id="36" name="TextBox 35"/>
+          <p:cNvSpPr txBox="1"/>
+          <p:nvPr/>
+        </p:nvSpPr>
+        <p:spPr>
+          <a:xfrm>
+            <a:off x="5446302" y="4916279"/>
+            <a:ext cx="1034257" cy="400110"/>
           </a:xfrm>
           <a:prstGeom prst="rect">
             <a:avLst/>
@@ -28521,240 +26209,26 @@
           <a:p>
             <a:pPr algn="ctr"/>
             <a:r>
-              <a:rPr lang="en-US" sz="1000" b="1" dirty="0">
+              <a:rPr lang="en-US" sz="1000" dirty="0" smtClean="0">
                 <a:latin typeface="Century Gothic" panose="020B0502020202020204" pitchFamily="34" charset="0"/>
                 <a:cs typeface="Adobe Devanagari" panose="02040503050201020203" pitchFamily="18" charset="0"/>
               </a:rPr>
-              <a:t>Mod Rate</a:t>
-            </a:r>
-          </a:p>
-        </p:txBody>
-      </p:sp>
-      <p:sp>
-        <p:nvSpPr>
-          <p:cNvPr id="31" name="TextBox 30"/>
-          <p:cNvSpPr txBox="1"/>
-          <p:nvPr/>
-        </p:nvSpPr>
-        <p:spPr>
-          <a:xfrm>
-            <a:off x="6530082" y="3306313"/>
-            <a:ext cx="468398" cy="246221"/>
-          </a:xfrm>
-          <a:prstGeom prst="rect">
-            <a:avLst/>
-          </a:prstGeom>
-          <a:noFill/>
-        </p:spPr>
-        <p:txBody>
-          <a:bodyPr wrap="none" rtlCol="0">
-            <a:spAutoFit/>
-          </a:bodyPr>
-          <a:lstStyle/>
-          <a:p>
-            <a:pPr algn="ctr"/>
-            <a:r>
-              <a:rPr lang="en-US" sz="1000" b="1" dirty="0">
+              <a:t>Plate Reverb/</a:t>
+            </a:r>
+          </a:p>
+          <a:p>
+            <a:pPr algn="ctr"/>
+            <a:r>
+              <a:rPr lang="en-US" sz="1000" dirty="0" smtClean="0">
                 <a:latin typeface="Century Gothic" panose="020B0502020202020204" pitchFamily="34" charset="0"/>
                 <a:cs typeface="Adobe Devanagari" panose="02040503050201020203" pitchFamily="18" charset="0"/>
               </a:rPr>
-              <a:t>Filter</a:t>
-            </a:r>
-          </a:p>
-        </p:txBody>
-      </p:sp>
-      <p:sp>
-        <p:nvSpPr>
-          <p:cNvPr id="32" name="TextBox 31"/>
-          <p:cNvSpPr txBox="1"/>
-          <p:nvPr/>
-        </p:nvSpPr>
-        <p:spPr>
-          <a:xfrm>
-            <a:off x="4945016" y="3306313"/>
-            <a:ext cx="466795" cy="246221"/>
-          </a:xfrm>
-          <a:prstGeom prst="rect">
-            <a:avLst/>
-          </a:prstGeom>
-          <a:noFill/>
-        </p:spPr>
-        <p:txBody>
-          <a:bodyPr wrap="none" rtlCol="0">
-            <a:spAutoFit/>
-          </a:bodyPr>
-          <a:lstStyle/>
-          <a:p>
-            <a:pPr algn="ctr"/>
-            <a:r>
-              <a:rPr lang="en-US" sz="1000" b="1" dirty="0">
-                <a:latin typeface="Century Gothic" panose="020B0502020202020204" pitchFamily="34" charset="0"/>
-                <a:cs typeface="Adobe Devanagari" panose="02040503050201020203" pitchFamily="18" charset="0"/>
-              </a:rPr>
-              <a:t>Mod</a:t>
-            </a:r>
-          </a:p>
-        </p:txBody>
-      </p:sp>
-      <p:sp>
-        <p:nvSpPr>
-          <p:cNvPr id="33" name="TextBox 32"/>
-          <p:cNvSpPr txBox="1"/>
-          <p:nvPr/>
-        </p:nvSpPr>
-        <p:spPr>
-          <a:xfrm>
-            <a:off x="4870242" y="5587506"/>
-            <a:ext cx="639919" cy="246221"/>
-          </a:xfrm>
-          <a:prstGeom prst="rect">
-            <a:avLst/>
-          </a:prstGeom>
-          <a:noFill/>
-        </p:spPr>
-        <p:txBody>
-          <a:bodyPr wrap="none" rtlCol="0">
-            <a:spAutoFit/>
-          </a:bodyPr>
-          <a:lstStyle/>
-          <a:p>
-            <a:pPr algn="ctr"/>
-            <a:r>
-              <a:rPr lang="en-US" sz="1000" b="1" dirty="0">
-                <a:latin typeface="Century Gothic" panose="020B0502020202020204" pitchFamily="34" charset="0"/>
-                <a:cs typeface="Adobe Devanagari" panose="02040503050201020203" pitchFamily="18" charset="0"/>
-              </a:rPr>
-              <a:t>BYPASS</a:t>
-            </a:r>
-          </a:p>
-        </p:txBody>
-      </p:sp>
-      <p:sp>
-        <p:nvSpPr>
-          <p:cNvPr id="34" name="TextBox 33"/>
-          <p:cNvSpPr txBox="1"/>
-          <p:nvPr/>
-        </p:nvSpPr>
-        <p:spPr>
-          <a:xfrm rot="16200000">
-            <a:off x="4920030" y="4069731"/>
-            <a:ext cx="449161" cy="461665"/>
-          </a:xfrm>
-          <a:prstGeom prst="rect">
-            <a:avLst/>
-          </a:prstGeom>
-          <a:noFill/>
-        </p:spPr>
-        <p:txBody>
-          <a:bodyPr wrap="none" rtlCol="0">
-            <a:spAutoFit/>
-          </a:bodyPr>
-          <a:lstStyle/>
-          <a:p>
-            <a:pPr algn="ctr"/>
-            <a:r>
-              <a:rPr lang="en-US" sz="800" b="1" dirty="0">
-                <a:latin typeface="Century Gothic" panose="020B0502020202020204" pitchFamily="34" charset="0"/>
-                <a:cs typeface="Adobe Devanagari" panose="02040503050201020203" pitchFamily="18" charset="0"/>
-              </a:rPr>
-              <a:t>Small</a:t>
-            </a:r>
-          </a:p>
-          <a:p>
-            <a:pPr algn="ctr"/>
-            <a:r>
-              <a:rPr lang="en-US" sz="800" b="1" dirty="0">
-                <a:latin typeface="Century Gothic" panose="020B0502020202020204" pitchFamily="34" charset="0"/>
-                <a:cs typeface="Adobe Devanagari" panose="02040503050201020203" pitchFamily="18" charset="0"/>
-              </a:rPr>
-              <a:t>Med</a:t>
-            </a:r>
-          </a:p>
-          <a:p>
-            <a:pPr algn="ctr"/>
-            <a:r>
-              <a:rPr lang="en-US" sz="800" b="1" dirty="0">
-                <a:latin typeface="Century Gothic" panose="020B0502020202020204" pitchFamily="34" charset="0"/>
-                <a:cs typeface="Adobe Devanagari" panose="02040503050201020203" pitchFamily="18" charset="0"/>
-              </a:rPr>
-              <a:t>Big</a:t>
-            </a:r>
-          </a:p>
-        </p:txBody>
-      </p:sp>
-      <p:sp>
-        <p:nvSpPr>
-          <p:cNvPr id="35" name="TextBox 34"/>
-          <p:cNvSpPr txBox="1"/>
-          <p:nvPr/>
-        </p:nvSpPr>
-        <p:spPr>
-          <a:xfrm>
-            <a:off x="4952460" y="4616479"/>
-            <a:ext cx="2037473" cy="400110"/>
-          </a:xfrm>
-          <a:prstGeom prst="rect">
-            <a:avLst/>
-          </a:prstGeom>
-          <a:noFill/>
-        </p:spPr>
-        <p:txBody>
-          <a:bodyPr wrap="square" rtlCol="0">
-            <a:spAutoFit/>
-          </a:bodyPr>
-          <a:lstStyle/>
-          <a:p>
-            <a:pPr algn="ctr"/>
-            <a:r>
-              <a:rPr lang="en-US" sz="2000" b="1" dirty="0">
-                <a:latin typeface="Broadway" panose="04040905080B02020502" pitchFamily="82" charset="0"/>
-                <a:cs typeface="Adobe Devanagari" panose="02040503050201020203" pitchFamily="18" charset="0"/>
-              </a:rPr>
-              <a:t>Earth</a:t>
-            </a:r>
-          </a:p>
-        </p:txBody>
-      </p:sp>
-      <p:sp>
-        <p:nvSpPr>
-          <p:cNvPr id="36" name="TextBox 35"/>
-          <p:cNvSpPr txBox="1"/>
-          <p:nvPr/>
-        </p:nvSpPr>
-        <p:spPr>
-          <a:xfrm>
-            <a:off x="5446302" y="4916279"/>
-            <a:ext cx="1034257" cy="400110"/>
-          </a:xfrm>
-          <a:prstGeom prst="rect">
-            <a:avLst/>
-          </a:prstGeom>
-          <a:noFill/>
-        </p:spPr>
-        <p:txBody>
-          <a:bodyPr wrap="none" rtlCol="0">
-            <a:spAutoFit/>
-          </a:bodyPr>
-          <a:lstStyle/>
-          <a:p>
-            <a:pPr algn="ctr"/>
-            <a:r>
-              <a:rPr lang="en-US" sz="1000" dirty="0">
-                <a:latin typeface="Century Gothic" panose="020B0502020202020204" pitchFamily="34" charset="0"/>
-                <a:cs typeface="Adobe Devanagari" panose="02040503050201020203" pitchFamily="18" charset="0"/>
-              </a:rPr>
-              <a:t>Plate Reverb/</a:t>
-            </a:r>
-          </a:p>
-          <a:p>
-            <a:pPr algn="ctr"/>
-            <a:r>
-              <a:rPr lang="en-US" sz="1000" dirty="0">
-                <a:latin typeface="Century Gothic" panose="020B0502020202020204" pitchFamily="34" charset="0"/>
-                <a:cs typeface="Adobe Devanagari" panose="02040503050201020203" pitchFamily="18" charset="0"/>
-              </a:rPr>
               <a:t>Octave</a:t>
             </a:r>
+            <a:endParaRPr lang="en-US" sz="1000" dirty="0">
+              <a:latin typeface="Century Gothic" panose="020B0502020202020204" pitchFamily="34" charset="0"/>
+              <a:cs typeface="Adobe Devanagari" panose="02040503050201020203" pitchFamily="18" charset="0"/>
+            </a:endParaRPr>
           </a:p>
         </p:txBody>
       </p:sp>
@@ -28962,12 +26436,16 @@
           <a:p>
             <a:pPr algn="ctr"/>
             <a:r>
-              <a:rPr lang="en-US" sz="900" b="1" dirty="0">
+              <a:rPr lang="en-US" sz="900" b="1" dirty="0" smtClean="0">
                 <a:latin typeface="Century Gothic" panose="020B0502020202020204" pitchFamily="34" charset="0"/>
                 <a:cs typeface="Adobe Devanagari" panose="02040503050201020203" pitchFamily="18" charset="0"/>
               </a:rPr>
               <a:t>Size</a:t>
             </a:r>
+            <a:endParaRPr lang="en-US" sz="900" b="1" dirty="0">
+              <a:latin typeface="Century Gothic" panose="020B0502020202020204" pitchFamily="34" charset="0"/>
+              <a:cs typeface="Adobe Devanagari" panose="02040503050201020203" pitchFamily="18" charset="0"/>
+            </a:endParaRPr>
           </a:p>
         </p:txBody>
       </p:sp>
@@ -28995,12 +26473,16 @@
           <a:p>
             <a:pPr algn="ctr"/>
             <a:r>
-              <a:rPr lang="en-US" sz="900" b="1" dirty="0">
+              <a:rPr lang="en-US" sz="900" b="1" dirty="0" smtClean="0">
                 <a:latin typeface="Century Gothic" panose="020B0502020202020204" pitchFamily="34" charset="0"/>
                 <a:cs typeface="Adobe Devanagari" panose="02040503050201020203" pitchFamily="18" charset="0"/>
               </a:rPr>
               <a:t>Octave</a:t>
             </a:r>
+            <a:endParaRPr lang="en-US" sz="900" b="1" dirty="0">
+              <a:latin typeface="Century Gothic" panose="020B0502020202020204" pitchFamily="34" charset="0"/>
+              <a:cs typeface="Adobe Devanagari" panose="02040503050201020203" pitchFamily="18" charset="0"/>
+            </a:endParaRPr>
           </a:p>
         </p:txBody>
       </p:sp>
@@ -29028,12 +26510,16 @@
           <a:p>
             <a:pPr algn="ctr"/>
             <a:r>
-              <a:rPr lang="en-US" sz="900" b="1" dirty="0">
+              <a:rPr lang="en-US" sz="900" b="1" dirty="0" smtClean="0">
                 <a:latin typeface="Century Gothic" panose="020B0502020202020204" pitchFamily="34" charset="0"/>
                 <a:cs typeface="Adobe Devanagari" panose="02040503050201020203" pitchFamily="18" charset="0"/>
               </a:rPr>
               <a:t>Footswitch</a:t>
             </a:r>
+            <a:endParaRPr lang="en-US" sz="900" b="1" dirty="0">
+              <a:latin typeface="Century Gothic" panose="020B0502020202020204" pitchFamily="34" charset="0"/>
+              <a:cs typeface="Adobe Devanagari" panose="02040503050201020203" pitchFamily="18" charset="0"/>
+            </a:endParaRPr>
           </a:p>
         </p:txBody>
       </p:sp>
@@ -29061,12 +26547,16 @@
           <a:p>
             <a:pPr algn="ctr"/>
             <a:r>
-              <a:rPr lang="en-US" sz="1000" b="1" dirty="0">
+              <a:rPr lang="en-US" sz="1000" b="1" dirty="0" smtClean="0">
                 <a:latin typeface="Century Gothic" panose="020B0502020202020204" pitchFamily="34" charset="0"/>
                 <a:cs typeface="Adobe Devanagari" panose="02040503050201020203" pitchFamily="18" charset="0"/>
               </a:rPr>
               <a:t>Action</a:t>
             </a:r>
+            <a:endParaRPr lang="en-US" sz="1000" b="1" dirty="0">
+              <a:latin typeface="Century Gothic" panose="020B0502020202020204" pitchFamily="34" charset="0"/>
+              <a:cs typeface="Adobe Devanagari" panose="02040503050201020203" pitchFamily="18" charset="0"/>
+            </a:endParaRPr>
           </a:p>
         </p:txBody>
       </p:sp>
@@ -29106,7 +26596,7 @@
           <a:lstStyle/>
           <a:p>
             <a:r>
-              <a:rPr lang="en-US" sz="1600" b="1" dirty="0" err="1">
+              <a:rPr lang="en-US" sz="1600" b="1" dirty="0" err="1" smtClean="0">
                 <a:solidFill>
                   <a:schemeClr val="tx1"/>
                 </a:solidFill>
@@ -29114,7 +26604,7 @@
               <a:t>PreDelay</a:t>
             </a:r>
             <a:r>
-              <a:rPr lang="en-US" sz="1600" dirty="0">
+              <a:rPr lang="en-US" sz="1600" dirty="0" smtClean="0">
                 <a:solidFill>
                   <a:schemeClr val="tx1"/>
                 </a:solidFill>
@@ -29122,7 +26612,7 @@
               <a:t>: </a:t>
             </a:r>
             <a:r>
-              <a:rPr lang="en-US" sz="1600" dirty="0" err="1">
+              <a:rPr lang="en-US" sz="1600" dirty="0" err="1" smtClean="0">
                 <a:solidFill>
                   <a:schemeClr val="tx1"/>
                 </a:solidFill>
@@ -29130,17 +26620,22 @@
               <a:t>PreDelay</a:t>
             </a:r>
             <a:r>
-              <a:rPr lang="en-US" sz="1600" dirty="0">
+              <a:rPr lang="en-US" sz="1600" dirty="0" smtClean="0">
                 <a:solidFill>
                   <a:schemeClr val="tx1"/>
                 </a:solidFill>
               </a:rPr>
               <a:t> up to around 700ms</a:t>
             </a:r>
-          </a:p>
-          <a:p>
-            <a:r>
-              <a:rPr lang="en-US" sz="1600" b="1" dirty="0">
+            <a:endParaRPr lang="en-US" sz="1600" dirty="0">
+              <a:solidFill>
+                <a:schemeClr val="tx1"/>
+              </a:solidFill>
+            </a:endParaRPr>
+          </a:p>
+          <a:p>
+            <a:r>
+              <a:rPr lang="en-US" sz="1600" b="1" dirty="0" smtClean="0">
                 <a:solidFill>
                   <a:schemeClr val="tx1"/>
                 </a:solidFill>
@@ -29148,17 +26643,22 @@
               <a:t>Mix</a:t>
             </a:r>
             <a:r>
-              <a:rPr lang="en-US" sz="1600" dirty="0">
+              <a:rPr lang="en-US" sz="1600" dirty="0" smtClean="0">
                 <a:solidFill>
                   <a:schemeClr val="tx1"/>
                 </a:solidFill>
               </a:rPr>
               <a:t>: Dry/Wet mix</a:t>
             </a:r>
-          </a:p>
-          <a:p>
-            <a:r>
-              <a:rPr lang="en-US" sz="1600" b="1" dirty="0">
+            <a:endParaRPr lang="en-US" sz="1600" dirty="0">
+              <a:solidFill>
+                <a:schemeClr val="tx1"/>
+              </a:solidFill>
+            </a:endParaRPr>
+          </a:p>
+          <a:p>
+            <a:r>
+              <a:rPr lang="en-US" sz="1600" b="1" dirty="0" smtClean="0">
                 <a:solidFill>
                   <a:schemeClr val="tx1"/>
                 </a:solidFill>
@@ -29166,7 +26666,7 @@
               <a:t>Decay:</a:t>
             </a:r>
             <a:r>
-              <a:rPr lang="en-US" sz="1600" dirty="0">
+              <a:rPr lang="en-US" sz="1600" dirty="0" smtClean="0">
                 <a:solidFill>
                   <a:schemeClr val="tx1"/>
                 </a:solidFill>
@@ -29217,7 +26717,7 @@
           <a:lstStyle/>
           <a:p>
             <a:r>
-              <a:rPr lang="en-US" sz="1600" b="1" dirty="0">
+              <a:rPr lang="en-US" sz="1600" b="1" dirty="0" smtClean="0">
                 <a:solidFill>
                   <a:schemeClr val="tx1"/>
                 </a:solidFill>
@@ -29225,48 +26725,74 @@
               <a:t>Mod Depth: </a:t>
             </a:r>
             <a:r>
+              <a:rPr lang="en-US" sz="1600" dirty="0" smtClean="0">
+                <a:solidFill>
+                  <a:schemeClr val="tx1"/>
+                </a:solidFill>
+              </a:rPr>
+              <a:t>Intensity of reverb mod</a:t>
+            </a:r>
+            <a:endParaRPr lang="en-US" sz="1600" dirty="0">
+              <a:solidFill>
+                <a:schemeClr val="tx1"/>
+              </a:solidFill>
+            </a:endParaRPr>
+          </a:p>
+          <a:p>
+            <a:r>
+              <a:rPr lang="en-US" sz="1600" b="1" dirty="0" smtClean="0">
+                <a:solidFill>
+                  <a:schemeClr val="tx1"/>
+                </a:solidFill>
+              </a:rPr>
+              <a:t>Mod Rate</a:t>
+            </a:r>
+            <a:r>
+              <a:rPr lang="en-US" sz="1600" dirty="0" smtClean="0">
+                <a:solidFill>
+                  <a:schemeClr val="tx1"/>
+                </a:solidFill>
+              </a:rPr>
+              <a:t>: Speed of reverb mod</a:t>
+            </a:r>
+            <a:endParaRPr lang="en-US" sz="1600" dirty="0">
+              <a:solidFill>
+                <a:schemeClr val="tx1"/>
+              </a:solidFill>
+            </a:endParaRPr>
+          </a:p>
+          <a:p>
+            <a:r>
+              <a:rPr lang="en-US" sz="1600" b="1" dirty="0" smtClean="0">
+                <a:solidFill>
+                  <a:schemeClr val="tx1"/>
+                </a:solidFill>
+              </a:rPr>
+              <a:t>Filter</a:t>
+            </a:r>
+            <a:r>
+              <a:rPr lang="en-US" sz="1600" dirty="0" smtClean="0">
+                <a:solidFill>
+                  <a:schemeClr val="tx1"/>
+                </a:solidFill>
+              </a:rPr>
+              <a:t>: </a:t>
+            </a:r>
+            <a:r>
               <a:rPr lang="en-US" sz="1600" dirty="0">
                 <a:solidFill>
                   <a:schemeClr val="tx1"/>
                 </a:solidFill>
               </a:rPr>
-              <a:t>Intensity of reverb mod</a:t>
-            </a:r>
-          </a:p>
-          <a:p>
-            <a:r>
-              <a:rPr lang="en-US" sz="1600" b="1" dirty="0">
+              <a:t>High </a:t>
+            </a:r>
+            <a:r>
+              <a:rPr lang="en-US" sz="1600" dirty="0" smtClean="0">
                 <a:solidFill>
                   <a:schemeClr val="tx1"/>
                 </a:solidFill>
               </a:rPr>
-              <a:t>Mod Rate</a:t>
-            </a:r>
-            <a:r>
-              <a:rPr lang="en-US" sz="1600" dirty="0">
-                <a:solidFill>
-                  <a:schemeClr val="tx1"/>
-                </a:solidFill>
-              </a:rPr>
-              <a:t>: Speed of reverb mod</a:t>
-            </a:r>
-          </a:p>
-          <a:p>
-            <a:r>
-              <a:rPr lang="en-US" sz="1600" b="1" dirty="0">
-                <a:solidFill>
-                  <a:schemeClr val="tx1"/>
-                </a:solidFill>
-              </a:rPr>
-              <a:t>Filter</a:t>
-            </a:r>
-            <a:r>
-              <a:rPr lang="en-US" sz="1600" dirty="0">
-                <a:solidFill>
-                  <a:schemeClr val="tx1"/>
-                </a:solidFill>
-              </a:rPr>
-              <a:t>: High and low cut filter in reverb tank.</a:t>
+              <a:t>and low cut filter in reverb tank.</a:t>
             </a:r>
             <a:endParaRPr lang="en-US" sz="1600" dirty="0">
               <a:solidFill>
@@ -29312,12 +26838,35 @@
           <a:lstStyle/>
           <a:p>
             <a:r>
+              <a:rPr lang="en-US" sz="1600" b="1" dirty="0" smtClean="0">
+                <a:solidFill>
+                  <a:schemeClr val="bg1"/>
+                </a:solidFill>
+              </a:rPr>
+              <a:t>Size Toggle</a:t>
+            </a:r>
+            <a:endParaRPr lang="en-US" sz="1600" b="1" dirty="0">
+              <a:solidFill>
+                <a:schemeClr val="bg1"/>
+              </a:solidFill>
+            </a:endParaRPr>
+          </a:p>
+          <a:p>
+            <a:r>
               <a:rPr lang="en-US" sz="1600" b="1" dirty="0">
                 <a:solidFill>
                   <a:schemeClr val="bg1"/>
                 </a:solidFill>
               </a:rPr>
-              <a:t>Size Toggle</a:t>
+              <a:t>  Left:  </a:t>
+            </a:r>
+            <a:r>
+              <a:rPr lang="en-US" sz="1600" b="1" dirty="0" smtClean="0">
+                <a:solidFill>
+                  <a:schemeClr val="bg1"/>
+                </a:solidFill>
+              </a:rPr>
+              <a:t>Small size </a:t>
             </a:r>
           </a:p>
           <a:p>
@@ -29327,18 +26876,37 @@
                   <a:schemeClr val="bg1"/>
                 </a:solidFill>
               </a:rPr>
-              <a:t>  Left:  Small size </a:t>
-            </a:r>
-          </a:p>
-          <a:p>
+              <a:t> </a:t>
+            </a:r>
+            <a:r>
+              <a:rPr lang="en-US" sz="1600" b="1" dirty="0" smtClean="0">
+                <a:solidFill>
+                  <a:schemeClr val="bg1"/>
+                </a:solidFill>
+              </a:rPr>
+              <a:t> Center</a:t>
+            </a:r>
             <a:r>
               <a:rPr lang="en-US" sz="1600" b="1" dirty="0">
                 <a:solidFill>
                   <a:schemeClr val="bg1"/>
                 </a:solidFill>
               </a:rPr>
-              <a:t>  Center: Medium size</a:t>
-            </a:r>
+              <a:t>: </a:t>
+            </a:r>
+            <a:r>
+              <a:rPr lang="en-US" sz="1600" b="1" dirty="0" smtClean="0">
+                <a:solidFill>
+                  <a:schemeClr val="bg1"/>
+                </a:solidFill>
+              </a:rPr>
+              <a:t>Medium size</a:t>
+            </a:r>
+            <a:endParaRPr lang="en-US" sz="1600" b="1" dirty="0">
+              <a:solidFill>
+                <a:schemeClr val="bg1"/>
+              </a:solidFill>
+            </a:endParaRPr>
           </a:p>
           <a:p>
             <a:r>
@@ -29347,8 +26915,21 @@
                   <a:schemeClr val="bg1"/>
                 </a:solidFill>
               </a:rPr>
-              <a:t>  Right:  Big size</a:t>
-            </a:r>
+              <a:t>  Right:  </a:t>
+            </a:r>
+            <a:r>
+              <a:rPr lang="en-US" sz="1600" b="1" dirty="0" smtClean="0">
+                <a:solidFill>
+                  <a:schemeClr val="bg1"/>
+                </a:solidFill>
+              </a:rPr>
+              <a:t>Big size</a:t>
+            </a:r>
+            <a:endParaRPr lang="en-US" sz="1600" b="1" dirty="0">
+              <a:solidFill>
+                <a:schemeClr val="bg1"/>
+              </a:solidFill>
+            </a:endParaRPr>
           </a:p>
         </p:txBody>
       </p:sp>
@@ -29388,12 +26969,20 @@
           <a:lstStyle/>
           <a:p>
             <a:r>
+              <a:rPr lang="en-US" sz="1600" b="1" dirty="0" smtClean="0">
+                <a:solidFill>
+                  <a:schemeClr val="bg1"/>
+                </a:solidFill>
+              </a:rPr>
+              <a:t>Octave </a:t>
+            </a:r>
+            <a:r>
               <a:rPr lang="en-US" sz="1600" b="1" dirty="0">
                 <a:solidFill>
                   <a:schemeClr val="bg1"/>
                 </a:solidFill>
               </a:rPr>
-              <a:t>Octave Switch</a:t>
+              <a:t>Switch</a:t>
             </a:r>
           </a:p>
           <a:p>
@@ -29403,8 +26992,21 @@
                   <a:schemeClr val="bg1"/>
                 </a:solidFill>
               </a:rPr>
-              <a:t>  Left:  None</a:t>
-            </a:r>
+              <a:t>  Left:  </a:t>
+            </a:r>
+            <a:r>
+              <a:rPr lang="en-US" sz="1600" b="1" dirty="0" smtClean="0">
+                <a:solidFill>
+                  <a:schemeClr val="bg1"/>
+                </a:solidFill>
+              </a:rPr>
+              <a:t>None</a:t>
+            </a:r>
+            <a:endParaRPr lang="en-US" sz="1600" b="1" dirty="0">
+              <a:solidFill>
+                <a:schemeClr val="bg1"/>
+              </a:solidFill>
+            </a:endParaRPr>
           </a:p>
           <a:p>
             <a:r>
@@ -29413,8 +27015,21 @@
                   <a:schemeClr val="bg1"/>
                 </a:solidFill>
               </a:rPr>
-              <a:t>  Center: Octave Up</a:t>
-            </a:r>
+              <a:t>  Center: </a:t>
+            </a:r>
+            <a:r>
+              <a:rPr lang="en-US" sz="1600" b="1" dirty="0" smtClean="0">
+                <a:solidFill>
+                  <a:schemeClr val="bg1"/>
+                </a:solidFill>
+              </a:rPr>
+              <a:t>Octave Up</a:t>
+            </a:r>
+            <a:endParaRPr lang="en-US" sz="1600" b="1" dirty="0">
+              <a:solidFill>
+                <a:schemeClr val="bg1"/>
+              </a:solidFill>
+            </a:endParaRPr>
           </a:p>
           <a:p>
             <a:r>
@@ -29423,8 +27038,21 @@
                   <a:schemeClr val="bg1"/>
                 </a:solidFill>
               </a:rPr>
-              <a:t>  Right:  Octave Up and Down</a:t>
-            </a:r>
+              <a:t>  Right:  </a:t>
+            </a:r>
+            <a:r>
+              <a:rPr lang="en-US" sz="1600" b="1" dirty="0" smtClean="0">
+                <a:solidFill>
+                  <a:schemeClr val="bg1"/>
+                </a:solidFill>
+              </a:rPr>
+              <a:t>Octave Up and Down</a:t>
+            </a:r>
+            <a:endParaRPr lang="en-US" sz="1600" b="1" dirty="0">
+              <a:solidFill>
+                <a:schemeClr val="bg1"/>
+              </a:solidFill>
+            </a:endParaRPr>
           </a:p>
         </p:txBody>
       </p:sp>
@@ -29464,13 +27092,41 @@
           <a:lstStyle/>
           <a:p>
             <a:r>
+              <a:rPr lang="en-US" sz="1600" b="1" dirty="0" smtClean="0">
+                <a:solidFill>
+                  <a:schemeClr val="bg1"/>
+                </a:solidFill>
+              </a:rPr>
+              <a:t>Footswitch Action:</a:t>
+            </a:r>
+            <a:endParaRPr lang="en-US" sz="1600" b="1" dirty="0">
+              <a:solidFill>
+                <a:schemeClr val="bg1"/>
+              </a:solidFill>
+            </a:endParaRPr>
+          </a:p>
+          <a:p>
+            <a:r>
               <a:rPr lang="en-US" sz="1600" b="1" dirty="0">
                 <a:solidFill>
                   <a:schemeClr val="bg1"/>
                 </a:solidFill>
               </a:rPr>
-              <a:t>Footswitch Action:</a:t>
-            </a:r>
+              <a:t>  Left:  </a:t>
+            </a:r>
+            <a:r>
+              <a:rPr lang="en-US" sz="1600" b="1" dirty="0" smtClean="0">
+                <a:solidFill>
+                  <a:schemeClr val="bg1"/>
+                </a:solidFill>
+              </a:rPr>
+              <a:t>Freeze (Decay set to 1)</a:t>
+            </a:r>
+            <a:endParaRPr lang="en-US" sz="1600" b="1" dirty="0">
+              <a:solidFill>
+                <a:schemeClr val="bg1"/>
+              </a:solidFill>
+            </a:endParaRPr>
           </a:p>
           <a:p>
             <a:r>
@@ -29479,28 +27135,47 @@
                   <a:schemeClr val="bg1"/>
                 </a:solidFill>
               </a:rPr>
-              <a:t>  Left:  Freeze (Decay set to 1)</a:t>
-            </a:r>
-          </a:p>
-          <a:p>
+              <a:t>  </a:t>
+            </a:r>
+            <a:r>
+              <a:rPr lang="en-US" sz="1600" b="1" dirty="0" smtClean="0">
+                <a:solidFill>
+                  <a:schemeClr val="bg1"/>
+                </a:solidFill>
+              </a:rPr>
+              <a:t>Center: Overdrive the Reverb </a:t>
+            </a:r>
+          </a:p>
+          <a:p>
+            <a:r>
+              <a:rPr lang="en-US" sz="1600" b="1" dirty="0" smtClean="0">
+                <a:solidFill>
+                  <a:schemeClr val="bg1"/>
+                </a:solidFill>
+              </a:rPr>
+              <a:t>  Right</a:t>
+            </a:r>
             <a:r>
               <a:rPr lang="en-US" sz="1600" b="1" dirty="0">
                 <a:solidFill>
                   <a:schemeClr val="bg1"/>
                 </a:solidFill>
               </a:rPr>
-              <a:t>  Center: Overdrive the Reverb </a:t>
-            </a:r>
-          </a:p>
-          <a:p>
-            <a:r>
-              <a:rPr lang="en-US" sz="1600" b="1" dirty="0">
+              <a:t>:  </a:t>
+            </a:r>
+            <a:r>
+              <a:rPr lang="en-US" sz="1600" b="1" dirty="0" smtClean="0">
                 <a:solidFill>
                   <a:schemeClr val="bg1"/>
                 </a:solidFill>
               </a:rPr>
-              <a:t>  Right:  Momentary Octave (based on center toggle)</a:t>
-            </a:r>
+              <a:t>Momentary Octave (based on center toggle)</a:t>
+            </a:r>
+            <a:endParaRPr lang="en-US" sz="1600" b="1" dirty="0">
+              <a:solidFill>
+                <a:schemeClr val="bg1"/>
+              </a:solidFill>
+            </a:endParaRPr>
           </a:p>
         </p:txBody>
       </p:sp>
@@ -29555,18 +27230,71 @@
                   <a:schemeClr val="bg1"/>
                 </a:solidFill>
               </a:rPr>
-              <a:t> 1: Diffusion Disabled (on to disable input diffusion)</a:t>
-            </a:r>
-          </a:p>
-          <a:p>
+              <a:t> </a:t>
+            </a:r>
+            <a:r>
+              <a:rPr lang="en-US" sz="1600" b="1" dirty="0" smtClean="0">
+                <a:solidFill>
+                  <a:schemeClr val="bg1"/>
+                </a:solidFill>
+              </a:rPr>
+              <a:t>1</a:t>
+            </a:r>
             <a:r>
               <a:rPr lang="en-US" sz="1600" b="1" dirty="0">
                 <a:solidFill>
                   <a:schemeClr val="bg1"/>
                 </a:solidFill>
               </a:rPr>
+              <a:t>: </a:t>
+            </a:r>
+            <a:r>
+              <a:rPr lang="en-US" sz="1600" b="1" dirty="0" smtClean="0">
+                <a:solidFill>
+                  <a:schemeClr val="bg1"/>
+                </a:solidFill>
+              </a:rPr>
+              <a:t>Diffusion Disabled (on to </a:t>
+            </a:r>
+            <a:r>
+              <a:rPr lang="en-US" sz="1600" b="1" dirty="0" smtClean="0">
+                <a:solidFill>
+                  <a:schemeClr val="bg1"/>
+                </a:solidFill>
+              </a:rPr>
+              <a:t>disable input </a:t>
+            </a:r>
+            <a:r>
+              <a:rPr lang="en-US" sz="1600" b="1" dirty="0" smtClean="0">
+                <a:solidFill>
+                  <a:schemeClr val="bg1"/>
+                </a:solidFill>
+              </a:rPr>
+              <a:t>diffusion</a:t>
+            </a:r>
+            <a:r>
+              <a:rPr lang="en-US" sz="1600" b="1" dirty="0" smtClean="0">
+                <a:solidFill>
+                  <a:schemeClr val="bg1"/>
+                </a:solidFill>
+              </a:rPr>
+              <a:t>)</a:t>
+            </a:r>
+          </a:p>
+          <a:p>
+            <a:r>
+              <a:rPr lang="en-US" sz="1600" b="1" dirty="0" smtClean="0">
+                <a:solidFill>
+                  <a:schemeClr val="bg1"/>
+                </a:solidFill>
+              </a:rPr>
               <a:t>2. Octave only mode (only sends octaves to reverb, no dry, when in octave mode)</a:t>
             </a:r>
+            <a:endParaRPr lang="en-US" sz="1600" b="1" dirty="0">
+              <a:solidFill>
+                <a:schemeClr val="bg1"/>
+              </a:solidFill>
+            </a:endParaRPr>
           </a:p>
         </p:txBody>
       </p:sp>
@@ -29611,8 +27339,21 @@
                   <a:schemeClr val="bg1"/>
                 </a:solidFill>
               </a:rPr>
-              <a:t>Left Footswitch: Bypass/Engage</a:t>
-            </a:r>
+              <a:t>Left Footswitch: </a:t>
+            </a:r>
+            <a:r>
+              <a:rPr lang="en-US" sz="1600" b="1" dirty="0" smtClean="0">
+                <a:solidFill>
+                  <a:schemeClr val="bg1"/>
+                </a:solidFill>
+              </a:rPr>
+              <a:t>Bypass/Engage</a:t>
+            </a:r>
+            <a:endParaRPr lang="en-US" sz="1600" b="1" dirty="0">
+              <a:solidFill>
+                <a:schemeClr val="bg1"/>
+              </a:solidFill>
+            </a:endParaRPr>
           </a:p>
         </p:txBody>
       </p:sp>
@@ -29651,7 +27392,7 @@
           <a:lstStyle/>
           <a:p>
             <a:r>
-              <a:rPr lang="en-US" sz="2800" b="1" dirty="0">
+              <a:rPr lang="en-US" sz="2800" b="1" dirty="0" smtClean="0">
                 <a:solidFill>
                   <a:schemeClr val="tx1"/>
                 </a:solidFill>
@@ -29664,18 +27405,26 @@
                   <a:schemeClr val="tx1"/>
                 </a:solidFill>
               </a:rPr>
-              <a:t>is a digital </a:t>
-            </a:r>
-            <a:r>
-              <a:rPr lang="en-US" sz="2400" b="1" dirty="0">
+              <a:t>is a </a:t>
+            </a:r>
+            <a:r>
+              <a:rPr lang="en-US" sz="1600" b="1" dirty="0" smtClean="0">
                 <a:solidFill>
                   <a:schemeClr val="tx1"/>
                 </a:solidFill>
               </a:rPr>
+              <a:t>digital </a:t>
+            </a:r>
+            <a:r>
+              <a:rPr lang="en-US" sz="2400" b="1" dirty="0" smtClean="0">
+                <a:solidFill>
+                  <a:schemeClr val="tx1"/>
+                </a:solidFill>
+              </a:rPr>
               <a:t>Plate </a:t>
             </a:r>
             <a:r>
-              <a:rPr lang="en-US" sz="2800" b="1" dirty="0">
+              <a:rPr lang="en-US" sz="2800" b="1" dirty="0" smtClean="0">
                 <a:solidFill>
                   <a:schemeClr val="tx1"/>
                 </a:solidFill>
@@ -29688,8 +27437,21 @@
                   <a:schemeClr val="tx1"/>
                 </a:solidFill>
               </a:rPr>
-              <a:t>pedal with octave effects.</a:t>
-            </a:r>
+              <a:t>pedal </a:t>
+            </a:r>
+            <a:r>
+              <a:rPr lang="en-US" sz="1600" b="1" dirty="0" smtClean="0">
+                <a:solidFill>
+                  <a:schemeClr val="tx1"/>
+                </a:solidFill>
+              </a:rPr>
+              <a:t>with octave effects.</a:t>
+            </a:r>
+            <a:endParaRPr lang="en-US" sz="1600" b="1" dirty="0">
+              <a:solidFill>
+                <a:schemeClr val="tx1"/>
+              </a:solidFill>
+            </a:endParaRPr>
           </a:p>
         </p:txBody>
       </p:sp>
@@ -29728,13 +27490,18 @@
           <a:lstStyle/>
           <a:p>
             <a:r>
-              <a:rPr lang="en-US" sz="1600" b="1" dirty="0">
+              <a:rPr lang="en-US" sz="1600" b="1" dirty="0" smtClean="0">
                 <a:solidFill>
                   <a:schemeClr val="tx1"/>
                 </a:solidFill>
               </a:rPr>
               <a:t>Mono in Stereo Out Processing (MISO)</a:t>
             </a:r>
+            <a:endParaRPr lang="en-US" sz="1600" b="1" dirty="0">
+              <a:solidFill>
+                <a:schemeClr val="tx1"/>
+              </a:solidFill>
+            </a:endParaRPr>
           </a:p>
           <a:p>
             <a:pPr marL="285750" indent="-285750">
@@ -30108,7 +27875,7 @@
           <a:p>
             <a:pPr algn="ctr"/>
             <a:r>
-              <a:rPr lang="en-US" sz="800" b="1" dirty="0">
+              <a:rPr lang="en-US" sz="800" b="1" dirty="0" smtClean="0">
                 <a:latin typeface="Century Gothic" panose="020B0502020202020204" pitchFamily="34" charset="0"/>
                 <a:cs typeface="Adobe Devanagari" panose="02040503050201020203" pitchFamily="18" charset="0"/>
               </a:rPr>
@@ -30118,25 +27885,86 @@
           <a:p>
             <a:pPr algn="ctr"/>
             <a:r>
-              <a:rPr lang="en-US" sz="800" b="1" dirty="0" err="1">
+              <a:rPr lang="en-US" sz="800" b="1" dirty="0" err="1" smtClean="0">
                 <a:latin typeface="Century Gothic" panose="020B0502020202020204" pitchFamily="34" charset="0"/>
                 <a:cs typeface="Adobe Devanagari" panose="02040503050201020203" pitchFamily="18" charset="0"/>
               </a:rPr>
               <a:t>OctUp</a:t>
+            </a:r>
+            <a:endParaRPr lang="en-US" sz="800" b="1" dirty="0" smtClean="0">
+              <a:latin typeface="Century Gothic" panose="020B0502020202020204" pitchFamily="34" charset="0"/>
+              <a:cs typeface="Adobe Devanagari" panose="02040503050201020203" pitchFamily="18" charset="0"/>
+            </a:endParaRPr>
+          </a:p>
+          <a:p>
+            <a:pPr algn="ctr"/>
+            <a:r>
+              <a:rPr lang="en-US" sz="800" b="1" dirty="0" err="1" smtClean="0">
+                <a:latin typeface="Century Gothic" panose="020B0502020202020204" pitchFamily="34" charset="0"/>
+                <a:cs typeface="Adobe Devanagari" panose="02040503050201020203" pitchFamily="18" charset="0"/>
+              </a:rPr>
+              <a:t>OctUpDn</a:t>
             </a:r>
             <a:endParaRPr lang="en-US" sz="800" b="1" dirty="0">
               <a:latin typeface="Century Gothic" panose="020B0502020202020204" pitchFamily="34" charset="0"/>
               <a:cs typeface="Adobe Devanagari" panose="02040503050201020203" pitchFamily="18" charset="0"/>
             </a:endParaRPr>
           </a:p>
-          <a:p>
-            <a:pPr algn="ctr"/>
-            <a:r>
-              <a:rPr lang="en-US" sz="800" b="1" dirty="0" err="1">
+        </p:txBody>
+      </p:sp>
+      <p:sp>
+        <p:nvSpPr>
+          <p:cNvPr id="76" name="TextBox 75"/>
+          <p:cNvSpPr txBox="1"/>
+          <p:nvPr/>
+        </p:nvSpPr>
+        <p:spPr>
+          <a:xfrm rot="16200000">
+            <a:off x="6526029" y="4064989"/>
+            <a:ext cx="526105" cy="461665"/>
+          </a:xfrm>
+          <a:prstGeom prst="rect">
+            <a:avLst/>
+          </a:prstGeom>
+          <a:noFill/>
+        </p:spPr>
+        <p:txBody>
+          <a:bodyPr wrap="none" rtlCol="0">
+            <a:spAutoFit/>
+          </a:bodyPr>
+          <a:lstStyle/>
+          <a:p>
+            <a:pPr algn="ctr"/>
+            <a:r>
+              <a:rPr lang="en-US" sz="800" b="1" dirty="0" smtClean="0">
                 <a:latin typeface="Century Gothic" panose="020B0502020202020204" pitchFamily="34" charset="0"/>
                 <a:cs typeface="Adobe Devanagari" panose="02040503050201020203" pitchFamily="18" charset="0"/>
               </a:rPr>
-              <a:t>OctUpDn</a:t>
+              <a:t>Freeze</a:t>
+            </a:r>
+          </a:p>
+          <a:p>
+            <a:pPr algn="ctr"/>
+            <a:r>
+              <a:rPr lang="en-US" sz="800" b="1" dirty="0" smtClean="0">
+                <a:latin typeface="Century Gothic" panose="020B0502020202020204" pitchFamily="34" charset="0"/>
+                <a:cs typeface="Adobe Devanagari" panose="02040503050201020203" pitchFamily="18" charset="0"/>
+              </a:rPr>
+              <a:t>OD</a:t>
+            </a:r>
+            <a:endParaRPr lang="en-US" sz="800" b="1" dirty="0" smtClean="0">
+              <a:latin typeface="Century Gothic" panose="020B0502020202020204" pitchFamily="34" charset="0"/>
+              <a:cs typeface="Adobe Devanagari" panose="02040503050201020203" pitchFamily="18" charset="0"/>
+            </a:endParaRPr>
+          </a:p>
+          <a:p>
+            <a:pPr algn="ctr"/>
+            <a:r>
+              <a:rPr lang="en-US" sz="800" b="1" dirty="0" smtClean="0">
+                <a:latin typeface="Century Gothic" panose="020B0502020202020204" pitchFamily="34" charset="0"/>
+                <a:cs typeface="Adobe Devanagari" panose="02040503050201020203" pitchFamily="18" charset="0"/>
+              </a:rPr>
+              <a:t>Oct</a:t>
             </a:r>
             <a:endParaRPr lang="en-US" sz="800" b="1" dirty="0">
               <a:latin typeface="Century Gothic" panose="020B0502020202020204" pitchFamily="34" charset="0"/>
@@ -30147,59 +27975,6 @@
       </p:sp>
       <p:sp>
         <p:nvSpPr>
-          <p:cNvPr id="76" name="TextBox 75"/>
-          <p:cNvSpPr txBox="1"/>
-          <p:nvPr/>
-        </p:nvSpPr>
-        <p:spPr>
-          <a:xfrm rot="16200000">
-            <a:off x="6526029" y="4064989"/>
-            <a:ext cx="526105" cy="461665"/>
-          </a:xfrm>
-          <a:prstGeom prst="rect">
-            <a:avLst/>
-          </a:prstGeom>
-          <a:noFill/>
-        </p:spPr>
-        <p:txBody>
-          <a:bodyPr wrap="none" rtlCol="0">
-            <a:spAutoFit/>
-          </a:bodyPr>
-          <a:lstStyle/>
-          <a:p>
-            <a:pPr algn="ctr"/>
-            <a:r>
-              <a:rPr lang="en-US" sz="800" b="1" dirty="0">
-                <a:latin typeface="Century Gothic" panose="020B0502020202020204" pitchFamily="34" charset="0"/>
-                <a:cs typeface="Adobe Devanagari" panose="02040503050201020203" pitchFamily="18" charset="0"/>
-              </a:rPr>
-              <a:t>Freeze</a:t>
-            </a:r>
-          </a:p>
-          <a:p>
-            <a:pPr algn="ctr"/>
-            <a:r>
-              <a:rPr lang="en-US" sz="800" b="1" dirty="0">
-                <a:latin typeface="Century Gothic" panose="020B0502020202020204" pitchFamily="34" charset="0"/>
-                <a:cs typeface="Adobe Devanagari" panose="02040503050201020203" pitchFamily="18" charset="0"/>
-              </a:rPr>
-              <a:t>OD</a:t>
-            </a:r>
-          </a:p>
-          <a:p>
-            <a:pPr algn="ctr"/>
-            <a:r>
-              <a:rPr lang="en-US" sz="800" b="1" dirty="0">
-                <a:latin typeface="Century Gothic" panose="020B0502020202020204" pitchFamily="34" charset="0"/>
-                <a:cs typeface="Adobe Devanagari" panose="02040503050201020203" pitchFamily="18" charset="0"/>
-              </a:rPr>
-              <a:t>Oct</a:t>
-            </a:r>
-          </a:p>
-        </p:txBody>
-      </p:sp>
-      <p:sp>
-        <p:nvSpPr>
           <p:cNvPr id="77" name="Rectangle 76"/>
           <p:cNvSpPr/>
           <p:nvPr/>
@@ -30239,24 +28014,37 @@
                   <a:schemeClr val="bg1"/>
                 </a:solidFill>
               </a:rPr>
-              <a:t>Right Footswitch: Do action based on 3</a:t>
-            </a:r>
-            <a:r>
-              <a:rPr lang="en-US" sz="1600" b="1" baseline="30000" dirty="0">
+              <a:t>Right Footswitch: </a:t>
+            </a:r>
+            <a:r>
+              <a:rPr lang="en-US" sz="1600" b="1" dirty="0" smtClean="0">
                 <a:solidFill>
                   <a:schemeClr val="bg1"/>
                 </a:solidFill>
               </a:rPr>
+              <a:t>Do action based on 3</a:t>
+            </a:r>
+            <a:r>
+              <a:rPr lang="en-US" sz="1600" b="1" baseline="30000" dirty="0" smtClean="0">
+                <a:solidFill>
+                  <a:schemeClr val="bg1"/>
+                </a:solidFill>
+              </a:rPr>
               <a:t>rd</a:t>
             </a:r>
             <a:r>
-              <a:rPr lang="en-US" sz="1600" b="1" dirty="0">
+              <a:rPr lang="en-US" sz="1600" b="1" dirty="0" smtClean="0">
                 <a:solidFill>
                   <a:schemeClr val="bg1"/>
                 </a:solidFill>
               </a:rPr>
               <a:t> toggle.</a:t>
             </a:r>
+            <a:endParaRPr lang="en-US" sz="1600" b="1" dirty="0">
+              <a:solidFill>
+                <a:schemeClr val="bg1"/>
+              </a:solidFill>
+            </a:endParaRPr>
           </a:p>
         </p:txBody>
       </p:sp>
@@ -30278,13 +28066,7 @@
   <p:cSld>
     <p:spTree>
       <p:nvGrpSpPr>
-        <p:cNvPr id="1" name="">
-          <a:extLst>
-            <a:ext uri="{FF2B5EF4-FFF2-40B4-BE49-F238E27FC236}">
-              <a16:creationId xmlns:a16="http://schemas.microsoft.com/office/drawing/2014/main" id="{4B93FE05-2FD6-3D0F-7CD7-A4BB08482B3F}"/>
-            </a:ext>
-          </a:extLst>
-        </p:cNvPr>
+        <p:cNvPr id="1" name=""/>
         <p:cNvGrpSpPr/>
         <p:nvPr/>
       </p:nvGrpSpPr>
@@ -30298,19 +28080,13 @@
       </p:grpSpPr>
       <p:sp>
         <p:nvSpPr>
-          <p:cNvPr id="4" name="Rounded Rectangle 3">
-            <a:extLst>
-              <a:ext uri="{FF2B5EF4-FFF2-40B4-BE49-F238E27FC236}">
-                <a16:creationId xmlns:a16="http://schemas.microsoft.com/office/drawing/2014/main" id="{AF203928-2F6C-77FA-C95E-14081AAE6D81}"/>
-              </a:ext>
-            </a:extLst>
-          </p:cNvPr>
-          <p:cNvSpPr/>
-          <p:nvPr/>
-        </p:nvSpPr>
-        <p:spPr>
-          <a:xfrm>
-            <a:off x="4711803" y="1260616"/>
+          <p:cNvPr id="2" name="Rounded Rectangle 1"/>
+          <p:cNvSpPr/>
+          <p:nvPr/>
+        </p:nvSpPr>
+        <p:spPr>
+          <a:xfrm>
+            <a:off x="4687514" y="1221568"/>
             <a:ext cx="2502100" cy="4599225"/>
           </a:xfrm>
           <a:prstGeom prst="roundRect">
@@ -30319,10 +28095,7 @@
             </a:avLst>
           </a:prstGeom>
           <a:solidFill>
-            <a:schemeClr val="accent1">
-              <a:lumMod val="20000"/>
-              <a:lumOff val="80000"/>
-            </a:schemeClr>
+            <a:srgbClr val="EFEBE5"/>
           </a:solidFill>
           <a:ln w="57150"/>
         </p:spPr>
@@ -30353,19 +28126,13 @@
       </p:sp>
       <p:sp>
         <p:nvSpPr>
-          <p:cNvPr id="5" name="Isosceles Triangle 4">
-            <a:extLst>
-              <a:ext uri="{FF2B5EF4-FFF2-40B4-BE49-F238E27FC236}">
-                <a16:creationId xmlns:a16="http://schemas.microsoft.com/office/drawing/2014/main" id="{53F96907-E055-D954-BBC3-AD0FDB4EF5D0}"/>
-              </a:ext>
-            </a:extLst>
-          </p:cNvPr>
-          <p:cNvSpPr/>
-          <p:nvPr/>
-        </p:nvSpPr>
-        <p:spPr>
-          <a:xfrm>
-            <a:off x="5296520" y="1316496"/>
+          <p:cNvPr id="3" name="Isosceles Triangle 2"/>
+          <p:cNvSpPr/>
+          <p:nvPr/>
+        </p:nvSpPr>
+        <p:spPr>
+          <a:xfrm>
+            <a:off x="5272231" y="1277448"/>
             <a:ext cx="160020" cy="144780"/>
           </a:xfrm>
           <a:prstGeom prst="triangle">
@@ -30407,19 +28174,13 @@
       </p:sp>
       <p:sp>
         <p:nvSpPr>
-          <p:cNvPr id="6" name="Isosceles Triangle 5">
-            <a:extLst>
-              <a:ext uri="{FF2B5EF4-FFF2-40B4-BE49-F238E27FC236}">
-                <a16:creationId xmlns:a16="http://schemas.microsoft.com/office/drawing/2014/main" id="{114F0F46-D088-40F2-19C2-440BF9EDC6F7}"/>
-              </a:ext>
-            </a:extLst>
-          </p:cNvPr>
+          <p:cNvPr id="4" name="Isosceles Triangle 3"/>
           <p:cNvSpPr/>
           <p:nvPr/>
         </p:nvSpPr>
         <p:spPr>
           <a:xfrm rot="10800000">
-            <a:off x="6501433" y="1316496"/>
+            <a:off x="6477144" y="1277448"/>
             <a:ext cx="160020" cy="144780"/>
           </a:xfrm>
           <a:prstGeom prst="triangle">
@@ -30461,28 +28222,21 @@
       </p:sp>
       <p:sp>
         <p:nvSpPr>
-          <p:cNvPr id="7" name="Oval 6">
-            <a:extLst>
-              <a:ext uri="{FF2B5EF4-FFF2-40B4-BE49-F238E27FC236}">
-                <a16:creationId xmlns:a16="http://schemas.microsoft.com/office/drawing/2014/main" id="{40967ECA-3A4E-1C13-7ECB-1662FF328EC8}"/>
-              </a:ext>
-            </a:extLst>
-          </p:cNvPr>
-          <p:cNvSpPr/>
-          <p:nvPr/>
-        </p:nvSpPr>
-        <p:spPr>
-          <a:xfrm>
-            <a:off x="4900280" y="1786396"/>
+          <p:cNvPr id="5" name="Oval 4"/>
+          <p:cNvSpPr/>
+          <p:nvPr/>
+        </p:nvSpPr>
+        <p:spPr>
+          <a:xfrm>
+            <a:off x="4875991" y="1747348"/>
             <a:ext cx="556260" cy="533400"/>
           </a:xfrm>
           <a:prstGeom prst="ellipse">
             <a:avLst/>
           </a:prstGeom>
           <a:solidFill>
-            <a:schemeClr val="accent4">
-              <a:lumMod val="40000"/>
-              <a:lumOff val="60000"/>
+            <a:schemeClr val="bg2">
+              <a:lumMod val="50000"/>
             </a:schemeClr>
           </a:solidFill>
           <a:ln w="28575">
@@ -30518,28 +28272,21 @@
       </p:sp>
       <p:sp>
         <p:nvSpPr>
-          <p:cNvPr id="8" name="Oval 7">
-            <a:extLst>
-              <a:ext uri="{FF2B5EF4-FFF2-40B4-BE49-F238E27FC236}">
-                <a16:creationId xmlns:a16="http://schemas.microsoft.com/office/drawing/2014/main" id="{04D86E76-CDFC-1C35-3607-58D2A11422F1}"/>
-              </a:ext>
-            </a:extLst>
-          </p:cNvPr>
-          <p:cNvSpPr/>
-          <p:nvPr/>
-        </p:nvSpPr>
-        <p:spPr>
-          <a:xfrm>
-            <a:off x="5684723" y="1786396"/>
+          <p:cNvPr id="6" name="Oval 5"/>
+          <p:cNvSpPr/>
+          <p:nvPr/>
+        </p:nvSpPr>
+        <p:spPr>
+          <a:xfrm>
+            <a:off x="5660434" y="1747348"/>
             <a:ext cx="556260" cy="533400"/>
           </a:xfrm>
           <a:prstGeom prst="ellipse">
             <a:avLst/>
           </a:prstGeom>
           <a:solidFill>
-            <a:schemeClr val="accent4">
-              <a:lumMod val="40000"/>
-              <a:lumOff val="60000"/>
+            <a:schemeClr val="bg2">
+              <a:lumMod val="50000"/>
             </a:schemeClr>
           </a:solidFill>
           <a:ln w="28575">
@@ -30575,28 +28322,21 @@
       </p:sp>
       <p:sp>
         <p:nvSpPr>
-          <p:cNvPr id="9" name="Oval 8">
-            <a:extLst>
-              <a:ext uri="{FF2B5EF4-FFF2-40B4-BE49-F238E27FC236}">
-                <a16:creationId xmlns:a16="http://schemas.microsoft.com/office/drawing/2014/main" id="{E0B73D7D-5F31-B34E-26A8-0F2221A51AEE}"/>
-              </a:ext>
-            </a:extLst>
-          </p:cNvPr>
-          <p:cNvSpPr/>
-          <p:nvPr/>
-        </p:nvSpPr>
-        <p:spPr>
-          <a:xfrm>
-            <a:off x="6482233" y="1786396"/>
+          <p:cNvPr id="7" name="Oval 6"/>
+          <p:cNvSpPr/>
+          <p:nvPr/>
+        </p:nvSpPr>
+        <p:spPr>
+          <a:xfrm>
+            <a:off x="6457944" y="1747348"/>
             <a:ext cx="556260" cy="533400"/>
           </a:xfrm>
           <a:prstGeom prst="ellipse">
             <a:avLst/>
           </a:prstGeom>
           <a:solidFill>
-            <a:schemeClr val="accent4">
-              <a:lumMod val="40000"/>
-              <a:lumOff val="60000"/>
+            <a:schemeClr val="bg2">
+              <a:lumMod val="50000"/>
             </a:schemeClr>
           </a:solidFill>
           <a:ln w="28575">
@@ -30632,19 +28372,13 @@
       </p:sp>
       <p:sp>
         <p:nvSpPr>
-          <p:cNvPr id="10" name="Oval 9">
-            <a:extLst>
-              <a:ext uri="{FF2B5EF4-FFF2-40B4-BE49-F238E27FC236}">
-                <a16:creationId xmlns:a16="http://schemas.microsoft.com/office/drawing/2014/main" id="{C7350EBC-2BE6-CB18-1AD5-81810D3AAF5C}"/>
-              </a:ext>
-            </a:extLst>
-          </p:cNvPr>
-          <p:cNvSpPr/>
-          <p:nvPr/>
-        </p:nvSpPr>
-        <p:spPr>
-          <a:xfrm>
-            <a:off x="4900280" y="2784616"/>
+          <p:cNvPr id="8" name="Oval 7"/>
+          <p:cNvSpPr/>
+          <p:nvPr/>
+        </p:nvSpPr>
+        <p:spPr>
+          <a:xfrm>
+            <a:off x="4875991" y="2745568"/>
             <a:ext cx="556260" cy="533400"/>
           </a:xfrm>
           <a:prstGeom prst="ellipse">
@@ -30688,19 +28422,13 @@
       </p:sp>
       <p:sp>
         <p:nvSpPr>
-          <p:cNvPr id="11" name="Oval 10">
-            <a:extLst>
-              <a:ext uri="{FF2B5EF4-FFF2-40B4-BE49-F238E27FC236}">
-                <a16:creationId xmlns:a16="http://schemas.microsoft.com/office/drawing/2014/main" id="{4D138438-F97B-43F9-4DCB-5F11459BF54F}"/>
-              </a:ext>
-            </a:extLst>
-          </p:cNvPr>
-          <p:cNvSpPr/>
-          <p:nvPr/>
-        </p:nvSpPr>
-        <p:spPr>
-          <a:xfrm>
-            <a:off x="5684723" y="2784616"/>
+          <p:cNvPr id="9" name="Oval 8"/>
+          <p:cNvSpPr/>
+          <p:nvPr/>
+        </p:nvSpPr>
+        <p:spPr>
+          <a:xfrm>
+            <a:off x="5660434" y="2745568"/>
             <a:ext cx="556260" cy="533400"/>
           </a:xfrm>
           <a:prstGeom prst="ellipse">
@@ -30744,19 +28472,13 @@
       </p:sp>
       <p:sp>
         <p:nvSpPr>
-          <p:cNvPr id="12" name="Oval 11">
-            <a:extLst>
-              <a:ext uri="{FF2B5EF4-FFF2-40B4-BE49-F238E27FC236}">
-                <a16:creationId xmlns:a16="http://schemas.microsoft.com/office/drawing/2014/main" id="{6B081589-7605-6347-4C62-E9BB75C9B11C}"/>
-              </a:ext>
-            </a:extLst>
-          </p:cNvPr>
-          <p:cNvSpPr/>
-          <p:nvPr/>
-        </p:nvSpPr>
-        <p:spPr>
-          <a:xfrm>
-            <a:off x="6482233" y="2784616"/>
+          <p:cNvPr id="10" name="Oval 9"/>
+          <p:cNvSpPr/>
+          <p:nvPr/>
+        </p:nvSpPr>
+        <p:spPr>
+          <a:xfrm>
+            <a:off x="6457944" y="2745568"/>
             <a:ext cx="556260" cy="533400"/>
           </a:xfrm>
           <a:prstGeom prst="ellipse">
@@ -30800,19 +28522,13 @@
       </p:sp>
       <p:sp>
         <p:nvSpPr>
-          <p:cNvPr id="13" name="Oval 12">
-            <a:extLst>
-              <a:ext uri="{FF2B5EF4-FFF2-40B4-BE49-F238E27FC236}">
-                <a16:creationId xmlns:a16="http://schemas.microsoft.com/office/drawing/2014/main" id="{1914CE33-689F-1125-2AD1-64CF76E3D665}"/>
-              </a:ext>
-            </a:extLst>
-          </p:cNvPr>
+          <p:cNvPr id="11" name="Oval 10"/>
           <p:cNvSpPr/>
           <p:nvPr/>
         </p:nvSpPr>
         <p:spPr>
           <a:xfrm rot="16200000">
-            <a:off x="5061408" y="3834748"/>
+            <a:off x="5037119" y="3795700"/>
             <a:ext cx="245746" cy="243840"/>
           </a:xfrm>
           <a:prstGeom prst="ellipse">
@@ -30851,19 +28567,13 @@
       </p:sp>
       <p:sp>
         <p:nvSpPr>
-          <p:cNvPr id="14" name="Flowchart: Terminator 13">
-            <a:extLst>
-              <a:ext uri="{FF2B5EF4-FFF2-40B4-BE49-F238E27FC236}">
-                <a16:creationId xmlns:a16="http://schemas.microsoft.com/office/drawing/2014/main" id="{75C4727E-AEEF-AA7A-D683-21650C4E45F6}"/>
-              </a:ext>
-            </a:extLst>
-          </p:cNvPr>
+          <p:cNvPr id="12" name="Flowchart: Terminator 11"/>
           <p:cNvSpPr/>
           <p:nvPr/>
         </p:nvSpPr>
         <p:spPr>
           <a:xfrm rot="16200000">
-            <a:off x="5041534" y="3846799"/>
+            <a:off x="5017245" y="3807751"/>
             <a:ext cx="95488" cy="208168"/>
           </a:xfrm>
           <a:prstGeom prst="flowChartTerminator">
@@ -30902,19 +28612,13 @@
       </p:sp>
       <p:sp>
         <p:nvSpPr>
-          <p:cNvPr id="15" name="Oval 14">
-            <a:extLst>
-              <a:ext uri="{FF2B5EF4-FFF2-40B4-BE49-F238E27FC236}">
-                <a16:creationId xmlns:a16="http://schemas.microsoft.com/office/drawing/2014/main" id="{C43ABE05-2F71-EE88-0764-60A92F15881D}"/>
-              </a:ext>
-            </a:extLst>
-          </p:cNvPr>
-          <p:cNvSpPr/>
-          <p:nvPr/>
-        </p:nvSpPr>
-        <p:spPr>
-          <a:xfrm>
-            <a:off x="5098399" y="4541019"/>
+          <p:cNvPr id="13" name="Oval 12"/>
+          <p:cNvSpPr/>
+          <p:nvPr/>
+        </p:nvSpPr>
+        <p:spPr>
+          <a:xfrm>
+            <a:off x="5074110" y="4501971"/>
             <a:ext cx="160020" cy="150019"/>
           </a:xfrm>
           <a:prstGeom prst="ellipse">
@@ -30948,19 +28652,13 @@
       </p:sp>
       <p:sp>
         <p:nvSpPr>
-          <p:cNvPr id="16" name="Oval 15">
-            <a:extLst>
-              <a:ext uri="{FF2B5EF4-FFF2-40B4-BE49-F238E27FC236}">
-                <a16:creationId xmlns:a16="http://schemas.microsoft.com/office/drawing/2014/main" id="{1737CF6A-EAE1-5DF1-A7E9-EE9FA911763B}"/>
-              </a:ext>
-            </a:extLst>
-          </p:cNvPr>
-          <p:cNvSpPr/>
-          <p:nvPr/>
-        </p:nvSpPr>
-        <p:spPr>
-          <a:xfrm>
-            <a:off x="6649750" y="4541019"/>
+          <p:cNvPr id="14" name="Oval 13"/>
+          <p:cNvSpPr/>
+          <p:nvPr/>
+        </p:nvSpPr>
+        <p:spPr>
+          <a:xfrm>
+            <a:off x="6625461" y="4501971"/>
             <a:ext cx="160020" cy="150019"/>
           </a:xfrm>
           <a:prstGeom prst="ellipse">
@@ -30994,19 +28692,13 @@
       </p:sp>
       <p:sp>
         <p:nvSpPr>
-          <p:cNvPr id="17" name="Oval 16">
-            <a:extLst>
-              <a:ext uri="{FF2B5EF4-FFF2-40B4-BE49-F238E27FC236}">
-                <a16:creationId xmlns:a16="http://schemas.microsoft.com/office/drawing/2014/main" id="{0735C1CF-2EA8-78B9-ED57-32C9A22E7668}"/>
-              </a:ext>
-            </a:extLst>
-          </p:cNvPr>
-          <p:cNvSpPr/>
-          <p:nvPr/>
-        </p:nvSpPr>
-        <p:spPr>
-          <a:xfrm>
-            <a:off x="4888047" y="5048594"/>
+          <p:cNvPr id="15" name="Oval 14"/>
+          <p:cNvSpPr/>
+          <p:nvPr/>
+        </p:nvSpPr>
+        <p:spPr>
+          <a:xfrm>
+            <a:off x="4863758" y="5009546"/>
             <a:ext cx="580727" cy="560414"/>
           </a:xfrm>
           <a:prstGeom prst="ellipse">
@@ -31045,19 +28737,13 @@
       </p:sp>
       <p:sp>
         <p:nvSpPr>
-          <p:cNvPr id="18" name="Oval 17">
-            <a:extLst>
-              <a:ext uri="{FF2B5EF4-FFF2-40B4-BE49-F238E27FC236}">
-                <a16:creationId xmlns:a16="http://schemas.microsoft.com/office/drawing/2014/main" id="{D657C004-8BD5-C912-88BE-1260BCEE836E}"/>
-              </a:ext>
-            </a:extLst>
-          </p:cNvPr>
-          <p:cNvSpPr/>
-          <p:nvPr/>
-        </p:nvSpPr>
-        <p:spPr>
-          <a:xfrm>
-            <a:off x="4981375" y="5134977"/>
+          <p:cNvPr id="16" name="Oval 15"/>
+          <p:cNvSpPr/>
+          <p:nvPr/>
+        </p:nvSpPr>
+        <p:spPr>
+          <a:xfrm>
+            <a:off x="4957086" y="5095929"/>
             <a:ext cx="394069" cy="380371"/>
           </a:xfrm>
           <a:prstGeom prst="ellipse">
@@ -31096,19 +28782,13 @@
       </p:sp>
       <p:sp>
         <p:nvSpPr>
-          <p:cNvPr id="19" name="Oval 18">
-            <a:extLst>
-              <a:ext uri="{FF2B5EF4-FFF2-40B4-BE49-F238E27FC236}">
-                <a16:creationId xmlns:a16="http://schemas.microsoft.com/office/drawing/2014/main" id="{BF7C9A93-920C-A0EB-81B7-001DD1386F49}"/>
-              </a:ext>
-            </a:extLst>
-          </p:cNvPr>
-          <p:cNvSpPr/>
-          <p:nvPr/>
-        </p:nvSpPr>
-        <p:spPr>
-          <a:xfrm>
-            <a:off x="6446718" y="5039820"/>
+          <p:cNvPr id="17" name="Oval 16"/>
+          <p:cNvSpPr/>
+          <p:nvPr/>
+        </p:nvSpPr>
+        <p:spPr>
+          <a:xfrm>
+            <a:off x="6422429" y="5000772"/>
             <a:ext cx="580727" cy="560414"/>
           </a:xfrm>
           <a:prstGeom prst="ellipse">
@@ -31147,19 +28827,13 @@
       </p:sp>
       <p:sp>
         <p:nvSpPr>
-          <p:cNvPr id="20" name="Oval 19">
-            <a:extLst>
-              <a:ext uri="{FF2B5EF4-FFF2-40B4-BE49-F238E27FC236}">
-                <a16:creationId xmlns:a16="http://schemas.microsoft.com/office/drawing/2014/main" id="{FEEC62D8-685C-C883-07E1-88F5FDC4B2A8}"/>
-              </a:ext>
-            </a:extLst>
-          </p:cNvPr>
-          <p:cNvSpPr/>
-          <p:nvPr/>
-        </p:nvSpPr>
-        <p:spPr>
-          <a:xfrm>
-            <a:off x="6540046" y="5126203"/>
+          <p:cNvPr id="18" name="Oval 17"/>
+          <p:cNvSpPr/>
+          <p:nvPr/>
+        </p:nvSpPr>
+        <p:spPr>
+          <a:xfrm>
+            <a:off x="6515757" y="5087155"/>
             <a:ext cx="394069" cy="380371"/>
           </a:xfrm>
           <a:prstGeom prst="ellipse">
@@ -31198,21 +28872,15 @@
       </p:sp>
       <p:cxnSp>
         <p:nvCxnSpPr>
-          <p:cNvPr id="21" name="Straight Connector 20">
-            <a:extLst>
-              <a:ext uri="{FF2B5EF4-FFF2-40B4-BE49-F238E27FC236}">
-                <a16:creationId xmlns:a16="http://schemas.microsoft.com/office/drawing/2014/main" id="{8CC7EB89-223A-3E5C-9A32-C13FD6BD7FA5}"/>
-              </a:ext>
-            </a:extLst>
-          </p:cNvPr>
+          <p:cNvPr id="19" name="Straight Connector 18"/>
           <p:cNvCxnSpPr>
-            <a:stCxn id="7" idx="0"/>
+            <a:stCxn id="5" idx="0"/>
           </p:cNvCxnSpPr>
           <p:nvPr/>
         </p:nvCxnSpPr>
         <p:spPr>
           <a:xfrm>
-            <a:off x="5178410" y="1786396"/>
+            <a:off x="5154121" y="1747348"/>
             <a:ext cx="1" cy="266700"/>
           </a:xfrm>
           <a:prstGeom prst="line">
@@ -31237,19 +28905,13 @@
       </p:cxnSp>
       <p:cxnSp>
         <p:nvCxnSpPr>
-          <p:cNvPr id="22" name="Straight Connector 21">
-            <a:extLst>
-              <a:ext uri="{FF2B5EF4-FFF2-40B4-BE49-F238E27FC236}">
-                <a16:creationId xmlns:a16="http://schemas.microsoft.com/office/drawing/2014/main" id="{1992F0A8-35AC-B1EB-1D8C-7977778A629D}"/>
-              </a:ext>
-            </a:extLst>
-          </p:cNvPr>
+          <p:cNvPr id="20" name="Straight Connector 19"/>
           <p:cNvCxnSpPr/>
           <p:nvPr/>
         </p:nvCxnSpPr>
         <p:spPr>
           <a:xfrm>
-            <a:off x="5962853" y="1786396"/>
+            <a:off x="5938564" y="1747348"/>
             <a:ext cx="1" cy="266700"/>
           </a:xfrm>
           <a:prstGeom prst="line">
@@ -31274,19 +28936,13 @@
       </p:cxnSp>
       <p:cxnSp>
         <p:nvCxnSpPr>
-          <p:cNvPr id="23" name="Straight Connector 22">
-            <a:extLst>
-              <a:ext uri="{FF2B5EF4-FFF2-40B4-BE49-F238E27FC236}">
-                <a16:creationId xmlns:a16="http://schemas.microsoft.com/office/drawing/2014/main" id="{3DBC88F1-EAC6-8726-CF33-BD45A83D5D1D}"/>
-              </a:ext>
-            </a:extLst>
-          </p:cNvPr>
+          <p:cNvPr id="21" name="Straight Connector 20"/>
           <p:cNvCxnSpPr/>
           <p:nvPr/>
         </p:nvCxnSpPr>
         <p:spPr>
           <a:xfrm>
-            <a:off x="6758877" y="1792689"/>
+            <a:off x="6734588" y="1753641"/>
             <a:ext cx="1" cy="266700"/>
           </a:xfrm>
           <a:prstGeom prst="line">
@@ -31311,19 +28967,13 @@
       </p:cxnSp>
       <p:cxnSp>
         <p:nvCxnSpPr>
-          <p:cNvPr id="24" name="Straight Connector 23">
-            <a:extLst>
-              <a:ext uri="{FF2B5EF4-FFF2-40B4-BE49-F238E27FC236}">
-                <a16:creationId xmlns:a16="http://schemas.microsoft.com/office/drawing/2014/main" id="{C2B8C3C3-0689-6E44-D88B-7B870662598F}"/>
-              </a:ext>
-            </a:extLst>
-          </p:cNvPr>
+          <p:cNvPr id="22" name="Straight Connector 21"/>
           <p:cNvCxnSpPr/>
           <p:nvPr/>
         </p:nvCxnSpPr>
         <p:spPr>
           <a:xfrm>
-            <a:off x="5172022" y="2784616"/>
+            <a:off x="5147733" y="2745568"/>
             <a:ext cx="1" cy="266700"/>
           </a:xfrm>
           <a:prstGeom prst="line">
@@ -31348,19 +28998,13 @@
       </p:cxnSp>
       <p:cxnSp>
         <p:nvCxnSpPr>
-          <p:cNvPr id="25" name="Straight Connector 24">
-            <a:extLst>
-              <a:ext uri="{FF2B5EF4-FFF2-40B4-BE49-F238E27FC236}">
-                <a16:creationId xmlns:a16="http://schemas.microsoft.com/office/drawing/2014/main" id="{D103F1D0-77C7-9A34-385B-F1E1F229AA48}"/>
-              </a:ext>
-            </a:extLst>
-          </p:cNvPr>
+          <p:cNvPr id="23" name="Straight Connector 22"/>
           <p:cNvCxnSpPr/>
           <p:nvPr/>
         </p:nvCxnSpPr>
         <p:spPr>
           <a:xfrm>
-            <a:off x="5962853" y="2784616"/>
+            <a:off x="5938564" y="2745568"/>
             <a:ext cx="1" cy="266700"/>
           </a:xfrm>
           <a:prstGeom prst="line">
@@ -31385,19 +29029,13 @@
       </p:cxnSp>
       <p:cxnSp>
         <p:nvCxnSpPr>
-          <p:cNvPr id="26" name="Straight Connector 25">
-            <a:extLst>
-              <a:ext uri="{FF2B5EF4-FFF2-40B4-BE49-F238E27FC236}">
-                <a16:creationId xmlns:a16="http://schemas.microsoft.com/office/drawing/2014/main" id="{3C883144-8402-FB1F-020C-714021A270FD}"/>
-              </a:ext>
-            </a:extLst>
-          </p:cNvPr>
+          <p:cNvPr id="24" name="Straight Connector 23"/>
           <p:cNvCxnSpPr/>
           <p:nvPr/>
         </p:nvCxnSpPr>
         <p:spPr>
           <a:xfrm>
-            <a:off x="6757924" y="2784616"/>
+            <a:off x="6733635" y="2745568"/>
             <a:ext cx="1" cy="266700"/>
           </a:xfrm>
           <a:prstGeom prst="line">
@@ -31422,20 +29060,14 @@
       </p:cxnSp>
       <p:sp>
         <p:nvSpPr>
-          <p:cNvPr id="27" name="TextBox 26">
-            <a:extLst>
-              <a:ext uri="{FF2B5EF4-FFF2-40B4-BE49-F238E27FC236}">
-                <a16:creationId xmlns:a16="http://schemas.microsoft.com/office/drawing/2014/main" id="{1A000AE4-6680-5A07-3F36-A18FF31ED7FA}"/>
-              </a:ext>
-            </a:extLst>
-          </p:cNvPr>
+          <p:cNvPr id="25" name="TextBox 24"/>
           <p:cNvSpPr txBox="1"/>
           <p:nvPr/>
         </p:nvSpPr>
         <p:spPr>
           <a:xfrm>
-            <a:off x="4977071" y="2313676"/>
-            <a:ext cx="402675" cy="246221"/>
+            <a:off x="4839796" y="2261143"/>
+            <a:ext cx="615874" cy="246221"/>
           </a:xfrm>
           <a:prstGeom prst="rect">
             <a:avLst/>
@@ -31454,27 +29086,21 @@
                 <a:latin typeface="Century Gothic" panose="020B0502020202020204" pitchFamily="34" charset="0"/>
                 <a:cs typeface="Adobe Devanagari" panose="02040503050201020203" pitchFamily="18" charset="0"/>
               </a:rPr>
-              <a:t>Mix</a:t>
-            </a:r>
-          </a:p>
-        </p:txBody>
-      </p:sp>
-      <p:sp>
-        <p:nvSpPr>
-          <p:cNvPr id="28" name="TextBox 27">
-            <a:extLst>
-              <a:ext uri="{FF2B5EF4-FFF2-40B4-BE49-F238E27FC236}">
-                <a16:creationId xmlns:a16="http://schemas.microsoft.com/office/drawing/2014/main" id="{07FEC6DF-04ED-CA3D-0582-A7C1C4E76C69}"/>
-              </a:ext>
-            </a:extLst>
-          </p:cNvPr>
+              <a:t>Knob 1</a:t>
+            </a:r>
+          </a:p>
+        </p:txBody>
+      </p:sp>
+      <p:sp>
+        <p:nvSpPr>
+          <p:cNvPr id="26" name="TextBox 25"/>
           <p:cNvSpPr txBox="1"/>
           <p:nvPr/>
         </p:nvSpPr>
         <p:spPr>
           <a:xfrm>
-            <a:off x="5790087" y="2300190"/>
-            <a:ext cx="373820" cy="246221"/>
+            <a:off x="5644770" y="2261142"/>
+            <a:ext cx="615874" cy="246221"/>
           </a:xfrm>
           <a:prstGeom prst="rect">
             <a:avLst/>
@@ -31493,27 +29119,21 @@
                 <a:latin typeface="Century Gothic" panose="020B0502020202020204" pitchFamily="34" charset="0"/>
                 <a:cs typeface="Adobe Devanagari" panose="02040503050201020203" pitchFamily="18" charset="0"/>
               </a:rPr>
-              <a:t>LPF</a:t>
-            </a:r>
-          </a:p>
-        </p:txBody>
-      </p:sp>
-      <p:sp>
-        <p:nvSpPr>
-          <p:cNvPr id="29" name="TextBox 28">
-            <a:extLst>
-              <a:ext uri="{FF2B5EF4-FFF2-40B4-BE49-F238E27FC236}">
-                <a16:creationId xmlns:a16="http://schemas.microsoft.com/office/drawing/2014/main" id="{015D475C-398D-1CA1-9BD8-7DBD44933398}"/>
-              </a:ext>
-            </a:extLst>
-          </p:cNvPr>
+              <a:t>Knob 2</a:t>
+            </a:r>
+          </a:p>
+        </p:txBody>
+      </p:sp>
+      <p:sp>
+        <p:nvSpPr>
+          <p:cNvPr id="27" name="TextBox 26"/>
           <p:cNvSpPr txBox="1"/>
           <p:nvPr/>
         </p:nvSpPr>
         <p:spPr>
           <a:xfrm>
-            <a:off x="6460584" y="2306958"/>
-            <a:ext cx="595035" cy="246221"/>
+            <a:off x="6425873" y="2267910"/>
+            <a:ext cx="615874" cy="246221"/>
           </a:xfrm>
           <a:prstGeom prst="rect">
             <a:avLst/>
@@ -31532,27 +29152,21 @@
                 <a:latin typeface="Century Gothic" panose="020B0502020202020204" pitchFamily="34" charset="0"/>
                 <a:cs typeface="Adobe Devanagari" panose="02040503050201020203" pitchFamily="18" charset="0"/>
               </a:rPr>
-              <a:t>REGEN</a:t>
-            </a:r>
-          </a:p>
-        </p:txBody>
-      </p:sp>
-      <p:sp>
-        <p:nvSpPr>
-          <p:cNvPr id="30" name="TextBox 29">
-            <a:extLst>
-              <a:ext uri="{FF2B5EF4-FFF2-40B4-BE49-F238E27FC236}">
-                <a16:creationId xmlns:a16="http://schemas.microsoft.com/office/drawing/2014/main" id="{D584AA0F-6AFB-F174-DF94-F86A9C51F179}"/>
-              </a:ext>
-            </a:extLst>
-          </p:cNvPr>
+              <a:t>Knob 3</a:t>
+            </a:r>
+          </a:p>
+        </p:txBody>
+      </p:sp>
+      <p:sp>
+        <p:nvSpPr>
+          <p:cNvPr id="28" name="TextBox 27"/>
           <p:cNvSpPr txBox="1"/>
           <p:nvPr/>
         </p:nvSpPr>
         <p:spPr>
           <a:xfrm>
-            <a:off x="5640378" y="3306313"/>
-            <a:ext cx="681598" cy="400110"/>
+            <a:off x="5648947" y="3267265"/>
+            <a:ext cx="615874" cy="246221"/>
           </a:xfrm>
           <a:prstGeom prst="rect">
             <a:avLst/>
@@ -31571,9 +29185,32 @@
                 <a:latin typeface="Century Gothic" panose="020B0502020202020204" pitchFamily="34" charset="0"/>
                 <a:cs typeface="Adobe Devanagari" panose="02040503050201020203" pitchFamily="18" charset="0"/>
               </a:rPr>
-              <a:t>INT 1</a:t>
-            </a:r>
-          </a:p>
+              <a:t>Knob 5</a:t>
+            </a:r>
+          </a:p>
+        </p:txBody>
+      </p:sp>
+      <p:sp>
+        <p:nvSpPr>
+          <p:cNvPr id="29" name="TextBox 28"/>
+          <p:cNvSpPr txBox="1"/>
+          <p:nvPr/>
+        </p:nvSpPr>
+        <p:spPr>
+          <a:xfrm>
+            <a:off x="6432054" y="3267265"/>
+            <a:ext cx="615874" cy="246221"/>
+          </a:xfrm>
+          <a:prstGeom prst="rect">
+            <a:avLst/>
+          </a:prstGeom>
+          <a:noFill/>
+        </p:spPr>
+        <p:txBody>
+          <a:bodyPr wrap="none" rtlCol="0">
+            <a:spAutoFit/>
+          </a:bodyPr>
+          <a:lstStyle/>
           <a:p>
             <a:pPr algn="ctr"/>
             <a:r>
@@ -31581,27 +29218,21 @@
                 <a:latin typeface="Century Gothic" panose="020B0502020202020204" pitchFamily="34" charset="0"/>
                 <a:cs typeface="Adobe Devanagari" panose="02040503050201020203" pitchFamily="18" charset="0"/>
               </a:rPr>
-              <a:t>(Speed)</a:t>
-            </a:r>
-          </a:p>
-        </p:txBody>
-      </p:sp>
-      <p:sp>
-        <p:nvSpPr>
-          <p:cNvPr id="31" name="TextBox 30">
-            <a:extLst>
-              <a:ext uri="{FF2B5EF4-FFF2-40B4-BE49-F238E27FC236}">
-                <a16:creationId xmlns:a16="http://schemas.microsoft.com/office/drawing/2014/main" id="{F55268A8-DDF2-6775-551E-709A3EBE205F}"/>
-              </a:ext>
-            </a:extLst>
-          </p:cNvPr>
+              <a:t>Knob 6</a:t>
+            </a:r>
+          </a:p>
+        </p:txBody>
+      </p:sp>
+      <p:sp>
+        <p:nvSpPr>
+          <p:cNvPr id="30" name="TextBox 29"/>
           <p:cNvSpPr txBox="1"/>
           <p:nvPr/>
         </p:nvSpPr>
         <p:spPr>
           <a:xfrm>
-            <a:off x="6437909" y="3306313"/>
-            <a:ext cx="652744" cy="553998"/>
+            <a:off x="4846186" y="3267265"/>
+            <a:ext cx="615874" cy="246221"/>
           </a:xfrm>
           <a:prstGeom prst="rect">
             <a:avLst/>
@@ -31620,44 +29251,61 @@
                 <a:latin typeface="Century Gothic" panose="020B0502020202020204" pitchFamily="34" charset="0"/>
                 <a:cs typeface="Adobe Devanagari" panose="02040503050201020203" pitchFamily="18" charset="0"/>
               </a:rPr>
-              <a:t>INT 2</a:t>
-            </a:r>
-          </a:p>
-          <a:p>
-            <a:pPr algn="ctr"/>
+              <a:t>Knob 4</a:t>
+            </a:r>
+          </a:p>
+        </p:txBody>
+      </p:sp>
+      <p:sp>
+        <p:nvSpPr>
+          <p:cNvPr id="31" name="TextBox 30"/>
+          <p:cNvSpPr txBox="1"/>
+          <p:nvPr/>
+        </p:nvSpPr>
+        <p:spPr>
+          <a:xfrm>
+            <a:off x="4803473" y="5548458"/>
+            <a:ext cx="724878" cy="246221"/>
+          </a:xfrm>
+          <a:prstGeom prst="rect">
+            <a:avLst/>
+          </a:prstGeom>
+          <a:noFill/>
+        </p:spPr>
+        <p:txBody>
+          <a:bodyPr wrap="none" rtlCol="0">
+            <a:spAutoFit/>
+          </a:bodyPr>
+          <a:lstStyle/>
+          <a:p>
+            <a:pPr algn="ctr"/>
+            <a:r>
+              <a:rPr lang="en-US" sz="1000" b="1" dirty="0" err="1">
+                <a:latin typeface="Century Gothic" panose="020B0502020202020204" pitchFamily="34" charset="0"/>
+                <a:cs typeface="Adobe Devanagari" panose="02040503050201020203" pitchFamily="18" charset="0"/>
+              </a:rPr>
+              <a:t>FootSw</a:t>
+            </a:r>
             <a:r>
               <a:rPr lang="en-US" sz="1000" b="1" dirty="0">
                 <a:latin typeface="Century Gothic" panose="020B0502020202020204" pitchFamily="34" charset="0"/>
                 <a:cs typeface="Adobe Devanagari" panose="02040503050201020203" pitchFamily="18" charset="0"/>
               </a:rPr>
-              <a:t>(Depth)</a:t>
-            </a:r>
-          </a:p>
-          <a:p>
-            <a:pPr algn="ctr"/>
-            <a:endParaRPr lang="en-US" sz="1000" b="1" dirty="0">
-              <a:latin typeface="Century Gothic" panose="020B0502020202020204" pitchFamily="34" charset="0"/>
-              <a:cs typeface="Adobe Devanagari" panose="02040503050201020203" pitchFamily="18" charset="0"/>
-            </a:endParaRPr>
-          </a:p>
-        </p:txBody>
-      </p:sp>
-      <p:sp>
-        <p:nvSpPr>
-          <p:cNvPr id="32" name="TextBox 31">
-            <a:extLst>
-              <a:ext uri="{FF2B5EF4-FFF2-40B4-BE49-F238E27FC236}">
-                <a16:creationId xmlns:a16="http://schemas.microsoft.com/office/drawing/2014/main" id="{DBDBD501-CA39-2EB5-4B51-301DEFAF40B2}"/>
-              </a:ext>
-            </a:extLst>
-          </p:cNvPr>
+              <a:t> 1</a:t>
+            </a:r>
+          </a:p>
+        </p:txBody>
+      </p:sp>
+      <p:sp>
+        <p:nvSpPr>
+          <p:cNvPr id="32" name="TextBox 31"/>
           <p:cNvSpPr txBox="1"/>
           <p:nvPr/>
         </p:nvSpPr>
         <p:spPr>
-          <a:xfrm>
-            <a:off x="4918568" y="3306313"/>
-            <a:ext cx="519694" cy="246221"/>
+          <a:xfrm rot="16200000">
+            <a:off x="4892535" y="4030683"/>
+            <a:ext cx="455573" cy="461665"/>
           </a:xfrm>
           <a:prstGeom prst="rect">
             <a:avLst/>
@@ -31672,89 +29320,11 @@
           <a:p>
             <a:pPr algn="ctr"/>
             <a:r>
-              <a:rPr lang="en-US" sz="1000" b="1" dirty="0">
-                <a:latin typeface="Century Gothic" panose="020B0502020202020204" pitchFamily="34" charset="0"/>
-                <a:cs typeface="Adobe Devanagari" panose="02040503050201020203" pitchFamily="18" charset="0"/>
-              </a:rPr>
-              <a:t>Glide</a:t>
-            </a:r>
-          </a:p>
-        </p:txBody>
-      </p:sp>
-      <p:sp>
-        <p:nvSpPr>
-          <p:cNvPr id="33" name="TextBox 32">
-            <a:extLst>
-              <a:ext uri="{FF2B5EF4-FFF2-40B4-BE49-F238E27FC236}">
-                <a16:creationId xmlns:a16="http://schemas.microsoft.com/office/drawing/2014/main" id="{D8EA9AE7-9C35-359B-71CF-FE3ED075A0B6}"/>
-              </a:ext>
-            </a:extLst>
-          </p:cNvPr>
-          <p:cNvSpPr txBox="1"/>
-          <p:nvPr/>
-        </p:nvSpPr>
-        <p:spPr>
-          <a:xfrm>
-            <a:off x="4702728" y="5587506"/>
-            <a:ext cx="974947" cy="246221"/>
-          </a:xfrm>
-          <a:prstGeom prst="rect">
-            <a:avLst/>
-          </a:prstGeom>
-          <a:noFill/>
-        </p:spPr>
-        <p:txBody>
-          <a:bodyPr wrap="none" rtlCol="0">
-            <a:spAutoFit/>
-          </a:bodyPr>
-          <a:lstStyle/>
-          <a:p>
-            <a:pPr algn="ctr"/>
-            <a:r>
-              <a:rPr lang="en-US" sz="1000" b="1" dirty="0">
-                <a:latin typeface="Century Gothic" panose="020B0502020202020204" pitchFamily="34" charset="0"/>
-                <a:cs typeface="Adobe Devanagari" panose="02040503050201020203" pitchFamily="18" charset="0"/>
-              </a:rPr>
-              <a:t>BYPASS / ALT</a:t>
-            </a:r>
-          </a:p>
-        </p:txBody>
-      </p:sp>
-      <p:sp>
-        <p:nvSpPr>
-          <p:cNvPr id="34" name="TextBox 33">
-            <a:extLst>
-              <a:ext uri="{FF2B5EF4-FFF2-40B4-BE49-F238E27FC236}">
-                <a16:creationId xmlns:a16="http://schemas.microsoft.com/office/drawing/2014/main" id="{CD7E9FC9-D3E2-6B06-632C-14B2F00FCE41}"/>
-              </a:ext>
-            </a:extLst>
-          </p:cNvPr>
-          <p:cNvSpPr txBox="1"/>
-          <p:nvPr/>
-        </p:nvSpPr>
-        <p:spPr>
-          <a:xfrm rot="16200000">
-            <a:off x="4864727" y="4069731"/>
-            <a:ext cx="559769" cy="461665"/>
-          </a:xfrm>
-          <a:prstGeom prst="rect">
-            <a:avLst/>
-          </a:prstGeom>
-          <a:noFill/>
-        </p:spPr>
-        <p:txBody>
-          <a:bodyPr wrap="none" rtlCol="0">
-            <a:spAutoFit/>
-          </a:bodyPr>
-          <a:lstStyle/>
-          <a:p>
-            <a:pPr algn="ctr"/>
-            <a:r>
               <a:rPr lang="en-US" sz="800" b="1" dirty="0">
                 <a:latin typeface="Century Gothic" panose="020B0502020202020204" pitchFamily="34" charset="0"/>
                 <a:cs typeface="Adobe Devanagari" panose="02040503050201020203" pitchFamily="18" charset="0"/>
               </a:rPr>
-              <a:t>Quarter</a:t>
+              <a:t>Opt 1</a:t>
             </a:r>
           </a:p>
           <a:p>
@@ -31764,19 +29334,8 @@
                 <a:latin typeface="Century Gothic" panose="020B0502020202020204" pitchFamily="34" charset="0"/>
                 <a:cs typeface="Adobe Devanagari" panose="02040503050201020203" pitchFamily="18" charset="0"/>
               </a:rPr>
-              <a:t>Dot 8</a:t>
-            </a:r>
-            <a:r>
-              <a:rPr lang="en-US" sz="800" b="1" baseline="30000" dirty="0">
-                <a:latin typeface="Century Gothic" panose="020B0502020202020204" pitchFamily="34" charset="0"/>
-                <a:cs typeface="Adobe Devanagari" panose="02040503050201020203" pitchFamily="18" charset="0"/>
-              </a:rPr>
-              <a:t>th</a:t>
-            </a:r>
-            <a:endParaRPr lang="en-US" sz="800" b="1" dirty="0">
-              <a:latin typeface="Century Gothic" panose="020B0502020202020204" pitchFamily="34" charset="0"/>
-              <a:cs typeface="Adobe Devanagari" panose="02040503050201020203" pitchFamily="18" charset="0"/>
-            </a:endParaRPr>
+              <a:t>Opt 2</a:t>
+            </a:r>
           </a:p>
           <a:p>
             <a:pPr algn="ctr"/>
@@ -31785,27 +29344,21 @@
                 <a:latin typeface="Century Gothic" panose="020B0502020202020204" pitchFamily="34" charset="0"/>
                 <a:cs typeface="Adobe Devanagari" panose="02040503050201020203" pitchFamily="18" charset="0"/>
               </a:rPr>
-              <a:t>8th</a:t>
-            </a:r>
-          </a:p>
-        </p:txBody>
-      </p:sp>
-      <p:sp>
-        <p:nvSpPr>
-          <p:cNvPr id="35" name="TextBox 34">
-            <a:extLst>
-              <a:ext uri="{FF2B5EF4-FFF2-40B4-BE49-F238E27FC236}">
-                <a16:creationId xmlns:a16="http://schemas.microsoft.com/office/drawing/2014/main" id="{ED039301-F7C7-483F-8DC0-8D66B03A05D7}"/>
-              </a:ext>
-            </a:extLst>
-          </p:cNvPr>
+              <a:t>Opt 3</a:t>
+            </a:r>
+          </a:p>
+        </p:txBody>
+      </p:sp>
+      <p:sp>
+        <p:nvSpPr>
+          <p:cNvPr id="33" name="TextBox 32"/>
           <p:cNvSpPr txBox="1"/>
           <p:nvPr/>
         </p:nvSpPr>
         <p:spPr>
           <a:xfrm>
-            <a:off x="4952460" y="4616479"/>
-            <a:ext cx="2037473" cy="400110"/>
+            <a:off x="5081621" y="4570836"/>
+            <a:ext cx="1742170" cy="461665"/>
           </a:xfrm>
           <a:prstGeom prst="rect">
             <a:avLst/>
@@ -31820,13 +29373,13 @@
           <a:p>
             <a:pPr algn="ctr"/>
             <a:r>
-              <a:rPr lang="en-US" sz="2000" b="1" dirty="0" err="1">
+              <a:rPr lang="en-US" sz="2400" b="1" dirty="0" err="1">
                 <a:latin typeface="Broadway" panose="04040905080B02020502" pitchFamily="82" charset="0"/>
                 <a:cs typeface="Adobe Devanagari" panose="02040503050201020203" pitchFamily="18" charset="0"/>
               </a:rPr>
-              <a:t>Balnea</a:t>
-            </a:r>
-            <a:endParaRPr lang="en-US" sz="2000" b="1" dirty="0">
+              <a:t>FunBox</a:t>
+            </a:r>
+            <a:endParaRPr lang="en-US" sz="2400" b="1" dirty="0">
               <a:latin typeface="Broadway" panose="04040905080B02020502" pitchFamily="82" charset="0"/>
               <a:cs typeface="Adobe Devanagari" panose="02040503050201020203" pitchFamily="18" charset="0"/>
             </a:endParaRPr>
@@ -31835,68 +29388,13 @@
       </p:sp>
       <p:sp>
         <p:nvSpPr>
-          <p:cNvPr id="36" name="TextBox 35">
-            <a:extLst>
-              <a:ext uri="{FF2B5EF4-FFF2-40B4-BE49-F238E27FC236}">
-                <a16:creationId xmlns:a16="http://schemas.microsoft.com/office/drawing/2014/main" id="{8A38927E-98AE-7000-55EC-95F812600D46}"/>
-              </a:ext>
-            </a:extLst>
-          </p:cNvPr>
-          <p:cNvSpPr txBox="1"/>
-          <p:nvPr/>
-        </p:nvSpPr>
-        <p:spPr>
-          <a:xfrm>
-            <a:off x="5431077" y="4916279"/>
-            <a:ext cx="1064714" cy="400110"/>
-          </a:xfrm>
-          <a:prstGeom prst="rect">
-            <a:avLst/>
-          </a:prstGeom>
-          <a:noFill/>
-        </p:spPr>
-        <p:txBody>
-          <a:bodyPr wrap="none" rtlCol="0">
-            <a:spAutoFit/>
-          </a:bodyPr>
-          <a:lstStyle/>
-          <a:p>
-            <a:pPr algn="ctr"/>
-            <a:r>
-              <a:rPr lang="en-US" sz="1000" dirty="0">
-                <a:latin typeface="Century Gothic" panose="020B0502020202020204" pitchFamily="34" charset="0"/>
-                <a:cs typeface="Adobe Devanagari" panose="02040503050201020203" pitchFamily="18" charset="0"/>
-              </a:rPr>
-              <a:t>Digital Delay /</a:t>
-            </a:r>
-          </a:p>
-          <a:p>
-            <a:pPr algn="ctr"/>
-            <a:r>
-              <a:rPr lang="en-US" sz="1000" dirty="0">
-                <a:latin typeface="Century Gothic" panose="020B0502020202020204" pitchFamily="34" charset="0"/>
-                <a:cs typeface="Adobe Devanagari" panose="02040503050201020203" pitchFamily="18" charset="0"/>
-              </a:rPr>
-              <a:t>Pitch Shifter</a:t>
-            </a:r>
-          </a:p>
-        </p:txBody>
-      </p:sp>
-      <p:sp>
-        <p:nvSpPr>
-          <p:cNvPr id="37" name="Oval 36">
-            <a:extLst>
-              <a:ext uri="{FF2B5EF4-FFF2-40B4-BE49-F238E27FC236}">
-                <a16:creationId xmlns:a16="http://schemas.microsoft.com/office/drawing/2014/main" id="{ED03B559-2533-701E-6F60-4E244CBBF45D}"/>
-              </a:ext>
-            </a:extLst>
-          </p:cNvPr>
+          <p:cNvPr id="35" name="Oval 34"/>
           <p:cNvSpPr/>
           <p:nvPr/>
         </p:nvSpPr>
         <p:spPr>
           <a:xfrm rot="16200000">
-            <a:off x="5854676" y="3834748"/>
+            <a:off x="5830387" y="3795700"/>
             <a:ext cx="245746" cy="243840"/>
           </a:xfrm>
           <a:prstGeom prst="ellipse">
@@ -31935,19 +29433,13 @@
       </p:sp>
       <p:sp>
         <p:nvSpPr>
-          <p:cNvPr id="38" name="Flowchart: Terminator 37">
-            <a:extLst>
-              <a:ext uri="{FF2B5EF4-FFF2-40B4-BE49-F238E27FC236}">
-                <a16:creationId xmlns:a16="http://schemas.microsoft.com/office/drawing/2014/main" id="{0434C4ED-F75A-CFED-EBA9-C6CAEF1A5FA2}"/>
-              </a:ext>
-            </a:extLst>
-          </p:cNvPr>
+          <p:cNvPr id="36" name="Flowchart: Terminator 35"/>
           <p:cNvSpPr/>
           <p:nvPr/>
         </p:nvSpPr>
         <p:spPr>
           <a:xfrm rot="16200000">
-            <a:off x="5834802" y="3846799"/>
+            <a:off x="5810513" y="3807751"/>
             <a:ext cx="95488" cy="208168"/>
           </a:xfrm>
           <a:prstGeom prst="flowChartTerminator">
@@ -31986,19 +29478,13 @@
       </p:sp>
       <p:sp>
         <p:nvSpPr>
-          <p:cNvPr id="39" name="Oval 38">
-            <a:extLst>
-              <a:ext uri="{FF2B5EF4-FFF2-40B4-BE49-F238E27FC236}">
-                <a16:creationId xmlns:a16="http://schemas.microsoft.com/office/drawing/2014/main" id="{D6995659-E8A4-A384-9EAD-4D75301B2DAB}"/>
-              </a:ext>
-            </a:extLst>
-          </p:cNvPr>
+          <p:cNvPr id="37" name="Oval 36"/>
           <p:cNvSpPr/>
           <p:nvPr/>
         </p:nvSpPr>
         <p:spPr>
           <a:xfrm rot="16200000">
-            <a:off x="6675452" y="3834748"/>
+            <a:off x="6651163" y="3795700"/>
             <a:ext cx="245746" cy="243840"/>
           </a:xfrm>
           <a:prstGeom prst="ellipse">
@@ -32037,19 +29523,13 @@
       </p:sp>
       <p:sp>
         <p:nvSpPr>
-          <p:cNvPr id="40" name="Flowchart: Terminator 39">
-            <a:extLst>
-              <a:ext uri="{FF2B5EF4-FFF2-40B4-BE49-F238E27FC236}">
-                <a16:creationId xmlns:a16="http://schemas.microsoft.com/office/drawing/2014/main" id="{31CBECC7-5BAC-EFAC-1976-0BAAADFA9CFB}"/>
-              </a:ext>
-            </a:extLst>
-          </p:cNvPr>
+          <p:cNvPr id="38" name="Flowchart: Terminator 37"/>
           <p:cNvSpPr/>
           <p:nvPr/>
         </p:nvSpPr>
         <p:spPr>
           <a:xfrm rot="16200000">
-            <a:off x="6655578" y="3846799"/>
+            <a:off x="6631289" y="3807751"/>
             <a:ext cx="95488" cy="208168"/>
           </a:xfrm>
           <a:prstGeom prst="flowChartTerminator">
@@ -32088,20 +29568,14 @@
       </p:sp>
       <p:sp>
         <p:nvSpPr>
-          <p:cNvPr id="47" name="TextBox 46">
-            <a:extLst>
-              <a:ext uri="{FF2B5EF4-FFF2-40B4-BE49-F238E27FC236}">
-                <a16:creationId xmlns:a16="http://schemas.microsoft.com/office/drawing/2014/main" id="{A041F2EF-327D-EF1A-88BA-3944F4DF6F1A}"/>
-              </a:ext>
-            </a:extLst>
-          </p:cNvPr>
+          <p:cNvPr id="39" name="TextBox 38"/>
           <p:cNvSpPr txBox="1"/>
           <p:nvPr/>
         </p:nvSpPr>
         <p:spPr>
-          <a:xfrm>
-            <a:off x="6336766" y="5574572"/>
-            <a:ext cx="811441" cy="246221"/>
+          <a:xfrm rot="16200000">
+            <a:off x="5705042" y="4049121"/>
+            <a:ext cx="455574" cy="461665"/>
           </a:xfrm>
           <a:prstGeom prst="rect">
             <a:avLst/>
@@ -32116,31 +29590,847 @@
           <a:p>
             <a:pPr algn="ctr"/>
             <a:r>
+              <a:rPr lang="en-US" sz="800" b="1" dirty="0">
+                <a:latin typeface="Century Gothic" panose="020B0502020202020204" pitchFamily="34" charset="0"/>
+                <a:cs typeface="Adobe Devanagari" panose="02040503050201020203" pitchFamily="18" charset="0"/>
+              </a:rPr>
+              <a:t>Opt 1</a:t>
+            </a:r>
+          </a:p>
+          <a:p>
+            <a:pPr algn="ctr"/>
+            <a:r>
+              <a:rPr lang="en-US" sz="800" b="1" dirty="0">
+                <a:latin typeface="Century Gothic" panose="020B0502020202020204" pitchFamily="34" charset="0"/>
+                <a:cs typeface="Adobe Devanagari" panose="02040503050201020203" pitchFamily="18" charset="0"/>
+              </a:rPr>
+              <a:t>Opt 2</a:t>
+            </a:r>
+          </a:p>
+          <a:p>
+            <a:pPr algn="ctr"/>
+            <a:r>
+              <a:rPr lang="en-US" sz="800" b="1" dirty="0">
+                <a:latin typeface="Century Gothic" panose="020B0502020202020204" pitchFamily="34" charset="0"/>
+                <a:cs typeface="Adobe Devanagari" panose="02040503050201020203" pitchFamily="18" charset="0"/>
+              </a:rPr>
+              <a:t>Opt 3</a:t>
+            </a:r>
+          </a:p>
+        </p:txBody>
+      </p:sp>
+      <p:sp>
+        <p:nvSpPr>
+          <p:cNvPr id="40" name="TextBox 39"/>
+          <p:cNvSpPr txBox="1"/>
+          <p:nvPr/>
+        </p:nvSpPr>
+        <p:spPr>
+          <a:xfrm rot="16200000">
+            <a:off x="6540944" y="4039021"/>
+            <a:ext cx="455574" cy="461665"/>
+          </a:xfrm>
+          <a:prstGeom prst="rect">
+            <a:avLst/>
+          </a:prstGeom>
+          <a:noFill/>
+        </p:spPr>
+        <p:txBody>
+          <a:bodyPr wrap="none" rtlCol="0">
+            <a:spAutoFit/>
+          </a:bodyPr>
+          <a:lstStyle/>
+          <a:p>
+            <a:pPr algn="ctr"/>
+            <a:r>
+              <a:rPr lang="en-US" sz="800" b="1" dirty="0">
+                <a:latin typeface="Century Gothic" panose="020B0502020202020204" pitchFamily="34" charset="0"/>
+                <a:cs typeface="Adobe Devanagari" panose="02040503050201020203" pitchFamily="18" charset="0"/>
+              </a:rPr>
+              <a:t>Opt 1</a:t>
+            </a:r>
+          </a:p>
+          <a:p>
+            <a:pPr algn="ctr"/>
+            <a:r>
+              <a:rPr lang="en-US" sz="800" b="1" dirty="0">
+                <a:latin typeface="Century Gothic" panose="020B0502020202020204" pitchFamily="34" charset="0"/>
+                <a:cs typeface="Adobe Devanagari" panose="02040503050201020203" pitchFamily="18" charset="0"/>
+              </a:rPr>
+              <a:t>Opt 2</a:t>
+            </a:r>
+          </a:p>
+          <a:p>
+            <a:pPr algn="ctr"/>
+            <a:r>
+              <a:rPr lang="en-US" sz="800" b="1" dirty="0">
+                <a:latin typeface="Century Gothic" panose="020B0502020202020204" pitchFamily="34" charset="0"/>
+                <a:cs typeface="Adobe Devanagari" panose="02040503050201020203" pitchFamily="18" charset="0"/>
+              </a:rPr>
+              <a:t>Opt 3</a:t>
+            </a:r>
+          </a:p>
+        </p:txBody>
+      </p:sp>
+      <p:sp>
+        <p:nvSpPr>
+          <p:cNvPr id="41" name="TextBox 40"/>
+          <p:cNvSpPr txBox="1"/>
+          <p:nvPr/>
+        </p:nvSpPr>
+        <p:spPr>
+          <a:xfrm>
+            <a:off x="4837137" y="3551712"/>
+            <a:ext cx="657552" cy="230832"/>
+          </a:xfrm>
+          <a:prstGeom prst="rect">
+            <a:avLst/>
+          </a:prstGeom>
+          <a:noFill/>
+        </p:spPr>
+        <p:txBody>
+          <a:bodyPr wrap="none" rtlCol="0">
+            <a:spAutoFit/>
+          </a:bodyPr>
+          <a:lstStyle/>
+          <a:p>
+            <a:pPr algn="ctr"/>
+            <a:r>
+              <a:rPr lang="en-US" sz="900" b="1" dirty="0">
+                <a:latin typeface="Century Gothic" panose="020B0502020202020204" pitchFamily="34" charset="0"/>
+                <a:cs typeface="Adobe Devanagari" panose="02040503050201020203" pitchFamily="18" charset="0"/>
+              </a:rPr>
+              <a:t>Toggle 1</a:t>
+            </a:r>
+          </a:p>
+        </p:txBody>
+      </p:sp>
+      <p:sp>
+        <p:nvSpPr>
+          <p:cNvPr id="42" name="TextBox 41"/>
+          <p:cNvSpPr txBox="1"/>
+          <p:nvPr/>
+        </p:nvSpPr>
+        <p:spPr>
+          <a:xfrm>
+            <a:off x="5623930" y="3560229"/>
+            <a:ext cx="657552" cy="230832"/>
+          </a:xfrm>
+          <a:prstGeom prst="rect">
+            <a:avLst/>
+          </a:prstGeom>
+          <a:noFill/>
+        </p:spPr>
+        <p:txBody>
+          <a:bodyPr wrap="none" rtlCol="0">
+            <a:spAutoFit/>
+          </a:bodyPr>
+          <a:lstStyle/>
+          <a:p>
+            <a:pPr algn="ctr"/>
+            <a:r>
+              <a:rPr lang="en-US" sz="900" b="1" dirty="0">
+                <a:latin typeface="Century Gothic" panose="020B0502020202020204" pitchFamily="34" charset="0"/>
+                <a:cs typeface="Adobe Devanagari" panose="02040503050201020203" pitchFamily="18" charset="0"/>
+              </a:rPr>
+              <a:t>Toggle 2</a:t>
+            </a:r>
+          </a:p>
+        </p:txBody>
+      </p:sp>
+      <p:sp>
+        <p:nvSpPr>
+          <p:cNvPr id="43" name="TextBox 42"/>
+          <p:cNvSpPr txBox="1"/>
+          <p:nvPr/>
+        </p:nvSpPr>
+        <p:spPr>
+          <a:xfrm>
+            <a:off x="6454343" y="3562383"/>
+            <a:ext cx="657552" cy="230832"/>
+          </a:xfrm>
+          <a:prstGeom prst="rect">
+            <a:avLst/>
+          </a:prstGeom>
+          <a:noFill/>
+        </p:spPr>
+        <p:txBody>
+          <a:bodyPr wrap="none" rtlCol="0">
+            <a:spAutoFit/>
+          </a:bodyPr>
+          <a:lstStyle/>
+          <a:p>
+            <a:pPr algn="ctr"/>
+            <a:r>
+              <a:rPr lang="en-US" sz="900" b="1" dirty="0">
+                <a:latin typeface="Century Gothic" panose="020B0502020202020204" pitchFamily="34" charset="0"/>
+                <a:cs typeface="Adobe Devanagari" panose="02040503050201020203" pitchFamily="18" charset="0"/>
+              </a:rPr>
+              <a:t>Toggle 3</a:t>
+            </a:r>
+          </a:p>
+        </p:txBody>
+      </p:sp>
+      <p:sp>
+        <p:nvSpPr>
+          <p:cNvPr id="49" name="Rectangle 48"/>
+          <p:cNvSpPr/>
+          <p:nvPr/>
+        </p:nvSpPr>
+        <p:spPr>
+          <a:xfrm>
+            <a:off x="4552601" y="262549"/>
+            <a:ext cx="2675728" cy="727102"/>
+          </a:xfrm>
+          <a:prstGeom prst="rect">
+            <a:avLst/>
+          </a:prstGeom>
+        </p:spPr>
+        <p:style>
+          <a:lnRef idx="2">
+            <a:schemeClr val="dk1">
+              <a:shade val="50000"/>
+            </a:schemeClr>
+          </a:lnRef>
+          <a:fillRef idx="1003">
+            <a:schemeClr val="lt1"/>
+          </a:fillRef>
+          <a:effectRef idx="0">
+            <a:schemeClr val="dk1"/>
+          </a:effectRef>
+          <a:fontRef idx="minor">
+            <a:schemeClr val="lt1"/>
+          </a:fontRef>
+        </p:style>
+        <p:txBody>
+          <a:bodyPr rtlCol="0" anchor="ctr"/>
+          <a:lstStyle/>
+          <a:p>
+            <a:pPr marL="285750" indent="-285750">
+              <a:buFont typeface="Arial" panose="020B0604020202020204" pitchFamily="34" charset="0"/>
+              <a:buChar char="•"/>
+            </a:pPr>
+            <a:r>
+              <a:rPr lang="en-US" sz="1600" b="1" dirty="0">
+                <a:solidFill>
+                  <a:schemeClr val="tx1"/>
+                </a:solidFill>
+              </a:rPr>
+              <a:t>Stereo ¼” In/Out Jacks</a:t>
+            </a:r>
+          </a:p>
+          <a:p>
+            <a:pPr marL="285750" indent="-285750">
+              <a:buFont typeface="Arial" panose="020B0604020202020204" pitchFamily="34" charset="0"/>
+              <a:buChar char="•"/>
+            </a:pPr>
+            <a:r>
+              <a:rPr lang="en-US" sz="1600" b="1" dirty="0">
+                <a:solidFill>
+                  <a:schemeClr val="tx1"/>
+                </a:solidFill>
+              </a:rPr>
+              <a:t>9v Center Negative Power</a:t>
+            </a:r>
+          </a:p>
+        </p:txBody>
+      </p:sp>
+      <p:sp>
+        <p:nvSpPr>
+          <p:cNvPr id="52" name="Rectangle 51"/>
+          <p:cNvSpPr/>
+          <p:nvPr/>
+        </p:nvSpPr>
+        <p:spPr>
+          <a:xfrm>
+            <a:off x="7503067" y="1963518"/>
+            <a:ext cx="2433413" cy="428695"/>
+          </a:xfrm>
+          <a:prstGeom prst="rect">
+            <a:avLst/>
+          </a:prstGeom>
+        </p:spPr>
+        <p:style>
+          <a:lnRef idx="2">
+            <a:schemeClr val="dk1">
+              <a:shade val="50000"/>
+            </a:schemeClr>
+          </a:lnRef>
+          <a:fillRef idx="1003">
+            <a:schemeClr val="dk1"/>
+          </a:fillRef>
+          <a:effectRef idx="0">
+            <a:schemeClr val="dk1"/>
+          </a:effectRef>
+          <a:fontRef idx="minor">
+            <a:schemeClr val="lt1"/>
+          </a:fontRef>
+        </p:style>
+        <p:txBody>
+          <a:bodyPr rtlCol="0" anchor="ctr"/>
+          <a:lstStyle/>
+          <a:p>
+            <a:r>
+              <a:rPr lang="en-US" sz="1600" b="1" dirty="0">
+                <a:solidFill>
+                  <a:schemeClr val="bg1"/>
+                </a:solidFill>
+              </a:rPr>
+              <a:t>MIDI Input (1/8” TRS Jack)</a:t>
+            </a:r>
+          </a:p>
+        </p:txBody>
+      </p:sp>
+      <p:sp>
+        <p:nvSpPr>
+          <p:cNvPr id="55" name="Rectangle 54"/>
+          <p:cNvSpPr/>
+          <p:nvPr/>
+        </p:nvSpPr>
+        <p:spPr>
+          <a:xfrm>
+            <a:off x="7503067" y="2923436"/>
+            <a:ext cx="2016853" cy="448087"/>
+          </a:xfrm>
+          <a:prstGeom prst="rect">
+            <a:avLst/>
+          </a:prstGeom>
+        </p:spPr>
+        <p:style>
+          <a:lnRef idx="2">
+            <a:schemeClr val="dk1">
+              <a:shade val="50000"/>
+            </a:schemeClr>
+          </a:lnRef>
+          <a:fillRef idx="1003">
+            <a:schemeClr val="dk1"/>
+          </a:fillRef>
+          <a:effectRef idx="0">
+            <a:schemeClr val="dk1"/>
+          </a:effectRef>
+          <a:fontRef idx="minor">
+            <a:schemeClr val="lt1"/>
+          </a:fontRef>
+        </p:style>
+        <p:txBody>
+          <a:bodyPr rtlCol="0" anchor="ctr"/>
+          <a:lstStyle/>
+          <a:p>
+            <a:r>
+              <a:rPr lang="en-US" sz="1600" b="1" dirty="0">
+                <a:solidFill>
+                  <a:schemeClr val="bg1"/>
+                </a:solidFill>
+              </a:rPr>
+              <a:t>Daisy Seed USB port</a:t>
+            </a:r>
+          </a:p>
+        </p:txBody>
+      </p:sp>
+      <p:sp>
+        <p:nvSpPr>
+          <p:cNvPr id="56" name="Rectangle 55"/>
+          <p:cNvSpPr/>
+          <p:nvPr/>
+        </p:nvSpPr>
+        <p:spPr>
+          <a:xfrm>
+            <a:off x="7503067" y="4556498"/>
+            <a:ext cx="2016853" cy="328586"/>
+          </a:xfrm>
+          <a:prstGeom prst="rect">
+            <a:avLst/>
+          </a:prstGeom>
+        </p:spPr>
+        <p:style>
+          <a:lnRef idx="2">
+            <a:schemeClr val="dk1">
+              <a:shade val="50000"/>
+            </a:schemeClr>
+          </a:lnRef>
+          <a:fillRef idx="1001">
+            <a:schemeClr val="dk2"/>
+          </a:fillRef>
+          <a:effectRef idx="0">
+            <a:schemeClr val="dk1"/>
+          </a:effectRef>
+          <a:fontRef idx="minor">
+            <a:schemeClr val="lt1"/>
+          </a:fontRef>
+        </p:style>
+        <p:txBody>
+          <a:bodyPr rtlCol="0" anchor="ctr"/>
+          <a:lstStyle/>
+          <a:p>
+            <a:r>
+              <a:rPr lang="en-US" sz="1600" b="1" dirty="0">
+                <a:solidFill>
+                  <a:schemeClr val="bg1"/>
+                </a:solidFill>
+              </a:rPr>
+              <a:t>4 On/Off Dipswitches</a:t>
+            </a:r>
+          </a:p>
+        </p:txBody>
+      </p:sp>
+      <p:sp>
+        <p:nvSpPr>
+          <p:cNvPr id="57" name="Rectangle 56"/>
+          <p:cNvSpPr/>
+          <p:nvPr/>
+        </p:nvSpPr>
+        <p:spPr>
+          <a:xfrm>
+            <a:off x="4585160" y="5990039"/>
+            <a:ext cx="2778082" cy="480080"/>
+          </a:xfrm>
+          <a:prstGeom prst="rect">
+            <a:avLst/>
+          </a:prstGeom>
+        </p:spPr>
+        <p:style>
+          <a:lnRef idx="2">
+            <a:schemeClr val="dk1">
+              <a:shade val="50000"/>
+            </a:schemeClr>
+          </a:lnRef>
+          <a:fillRef idx="1001">
+            <a:schemeClr val="dk2"/>
+          </a:fillRef>
+          <a:effectRef idx="0">
+            <a:schemeClr val="dk1"/>
+          </a:effectRef>
+          <a:fontRef idx="minor">
+            <a:schemeClr val="lt1"/>
+          </a:fontRef>
+        </p:style>
+        <p:txBody>
+          <a:bodyPr rtlCol="0" anchor="ctr"/>
+          <a:lstStyle/>
+          <a:p>
+            <a:r>
+              <a:rPr lang="en-US" sz="1600" b="1" dirty="0">
+                <a:solidFill>
+                  <a:schemeClr val="bg1"/>
+                </a:solidFill>
+              </a:rPr>
+              <a:t>Two Momentary Footswitches</a:t>
+            </a:r>
+          </a:p>
+          <a:p>
+            <a:r>
+              <a:rPr lang="en-US" sz="1600" b="1" dirty="0">
+                <a:solidFill>
+                  <a:schemeClr val="bg1"/>
+                </a:solidFill>
+              </a:rPr>
+              <a:t>with indication LEDs.</a:t>
+            </a:r>
+          </a:p>
+        </p:txBody>
+      </p:sp>
+      <p:sp>
+        <p:nvSpPr>
+          <p:cNvPr id="59" name="Rectangle 58"/>
+          <p:cNvSpPr/>
+          <p:nvPr/>
+        </p:nvSpPr>
+        <p:spPr>
+          <a:xfrm>
+            <a:off x="259856" y="262029"/>
+            <a:ext cx="4226847" cy="1015417"/>
+          </a:xfrm>
+          <a:prstGeom prst="rect">
+            <a:avLst/>
+          </a:prstGeom>
+          <a:ln/>
+        </p:spPr>
+        <p:style>
+          <a:lnRef idx="1">
+            <a:schemeClr val="accent2"/>
+          </a:lnRef>
+          <a:fillRef idx="2">
+            <a:schemeClr val="accent2"/>
+          </a:fillRef>
+          <a:effectRef idx="1">
+            <a:schemeClr val="accent2"/>
+          </a:effectRef>
+          <a:fontRef idx="minor">
+            <a:schemeClr val="dk1"/>
+          </a:fontRef>
+        </p:style>
+        <p:txBody>
+          <a:bodyPr rtlCol="0" anchor="ctr"/>
+          <a:lstStyle/>
+          <a:p>
+            <a:r>
+              <a:rPr lang="en-US" sz="2800" b="1" dirty="0" err="1">
+                <a:solidFill>
+                  <a:schemeClr val="tx1"/>
+                </a:solidFill>
+              </a:rPr>
+              <a:t>FunBox</a:t>
+            </a:r>
+            <a:r>
+              <a:rPr lang="en-US" sz="2800" b="1" dirty="0">
+                <a:solidFill>
+                  <a:schemeClr val="tx1"/>
+                </a:solidFill>
+              </a:rPr>
+              <a:t> </a:t>
+            </a:r>
+            <a:r>
+              <a:rPr lang="en-US" b="1" dirty="0">
+                <a:solidFill>
+                  <a:schemeClr val="tx1"/>
+                </a:solidFill>
+              </a:rPr>
+              <a:t>is a pedal platform designed around the Daisy Seed. Fits in a 125B enclosure.</a:t>
+            </a:r>
+          </a:p>
+        </p:txBody>
+      </p:sp>
+      <p:sp>
+        <p:nvSpPr>
+          <p:cNvPr id="81" name="Rectangle 80"/>
+          <p:cNvSpPr/>
+          <p:nvPr/>
+        </p:nvSpPr>
+        <p:spPr>
+          <a:xfrm>
+            <a:off x="7205470" y="4326731"/>
+            <a:ext cx="45719" cy="404813"/>
+          </a:xfrm>
+          <a:prstGeom prst="rect">
+            <a:avLst/>
+          </a:prstGeom>
+        </p:spPr>
+        <p:style>
+          <a:lnRef idx="2">
+            <a:schemeClr val="accent1">
+              <a:shade val="50000"/>
+            </a:schemeClr>
+          </a:lnRef>
+          <a:fillRef idx="1">
+            <a:schemeClr val="accent1"/>
+          </a:fillRef>
+          <a:effectRef idx="0">
+            <a:schemeClr val="accent1"/>
+          </a:effectRef>
+          <a:fontRef idx="minor">
+            <a:schemeClr val="lt1"/>
+          </a:fontRef>
+        </p:style>
+        <p:txBody>
+          <a:bodyPr rtlCol="0" anchor="ctr"/>
+          <a:lstStyle/>
+          <a:p>
+            <a:pPr algn="ctr"/>
+            <a:endParaRPr lang="en-US"/>
+          </a:p>
+        </p:txBody>
+      </p:sp>
+      <p:sp>
+        <p:nvSpPr>
+          <p:cNvPr id="82" name="Rectangle 81"/>
+          <p:cNvSpPr/>
+          <p:nvPr/>
+        </p:nvSpPr>
+        <p:spPr>
+          <a:xfrm>
+            <a:off x="7240002" y="4361522"/>
+            <a:ext cx="54086" cy="51892"/>
+          </a:xfrm>
+          <a:prstGeom prst="rect">
+            <a:avLst/>
+          </a:prstGeom>
+        </p:spPr>
+        <p:style>
+          <a:lnRef idx="2">
+            <a:schemeClr val="dk1"/>
+          </a:lnRef>
+          <a:fillRef idx="1">
+            <a:schemeClr val="lt1"/>
+          </a:fillRef>
+          <a:effectRef idx="0">
+            <a:schemeClr val="dk1"/>
+          </a:effectRef>
+          <a:fontRef idx="minor">
+            <a:schemeClr val="dk1"/>
+          </a:fontRef>
+        </p:style>
+        <p:txBody>
+          <a:bodyPr rtlCol="0" anchor="ctr"/>
+          <a:lstStyle/>
+          <a:p>
+            <a:pPr algn="ctr"/>
+            <a:endParaRPr lang="en-US"/>
+          </a:p>
+        </p:txBody>
+      </p:sp>
+      <p:sp>
+        <p:nvSpPr>
+          <p:cNvPr id="83" name="Rectangle 82"/>
+          <p:cNvSpPr/>
+          <p:nvPr/>
+        </p:nvSpPr>
+        <p:spPr>
+          <a:xfrm>
+            <a:off x="7239482" y="4455654"/>
+            <a:ext cx="54086" cy="51892"/>
+          </a:xfrm>
+          <a:prstGeom prst="rect">
+            <a:avLst/>
+          </a:prstGeom>
+        </p:spPr>
+        <p:style>
+          <a:lnRef idx="2">
+            <a:schemeClr val="dk1"/>
+          </a:lnRef>
+          <a:fillRef idx="1">
+            <a:schemeClr val="lt1"/>
+          </a:fillRef>
+          <a:effectRef idx="0">
+            <a:schemeClr val="dk1"/>
+          </a:effectRef>
+          <a:fontRef idx="minor">
+            <a:schemeClr val="dk1"/>
+          </a:fontRef>
+        </p:style>
+        <p:txBody>
+          <a:bodyPr rtlCol="0" anchor="ctr"/>
+          <a:lstStyle/>
+          <a:p>
+            <a:pPr algn="ctr"/>
+            <a:endParaRPr lang="en-US"/>
+          </a:p>
+        </p:txBody>
+      </p:sp>
+      <p:sp>
+        <p:nvSpPr>
+          <p:cNvPr id="66" name="TextBox 65"/>
+          <p:cNvSpPr txBox="1"/>
+          <p:nvPr/>
+        </p:nvSpPr>
+        <p:spPr>
+          <a:xfrm>
+            <a:off x="6376896" y="5548457"/>
+            <a:ext cx="724878" cy="246221"/>
+          </a:xfrm>
+          <a:prstGeom prst="rect">
+            <a:avLst/>
+          </a:prstGeom>
+          <a:noFill/>
+        </p:spPr>
+        <p:txBody>
+          <a:bodyPr wrap="none" rtlCol="0">
+            <a:spAutoFit/>
+          </a:bodyPr>
+          <a:lstStyle/>
+          <a:p>
+            <a:pPr algn="ctr"/>
+            <a:r>
+              <a:rPr lang="en-US" sz="1000" b="1" dirty="0" err="1">
+                <a:latin typeface="Century Gothic" panose="020B0502020202020204" pitchFamily="34" charset="0"/>
+                <a:cs typeface="Adobe Devanagari" panose="02040503050201020203" pitchFamily="18" charset="0"/>
+              </a:rPr>
+              <a:t>FootSw</a:t>
+            </a:r>
+            <a:r>
               <a:rPr lang="en-US" sz="1000" b="1" dirty="0">
                 <a:latin typeface="Century Gothic" panose="020B0502020202020204" pitchFamily="34" charset="0"/>
                 <a:cs typeface="Adobe Devanagari" panose="02040503050201020203" pitchFamily="18" charset="0"/>
               </a:rPr>
-              <a:t>Tap / Step</a:t>
-            </a:r>
-          </a:p>
-        </p:txBody>
-      </p:sp>
-      <p:sp>
-        <p:nvSpPr>
-          <p:cNvPr id="55" name="Rectangle 54">
-            <a:extLst>
-              <a:ext uri="{FF2B5EF4-FFF2-40B4-BE49-F238E27FC236}">
-                <a16:creationId xmlns:a16="http://schemas.microsoft.com/office/drawing/2014/main" id="{ED843F75-CC5A-8A2C-16A1-00AF43FA1F08}"/>
-              </a:ext>
-            </a:extLst>
-          </p:cNvPr>
-          <p:cNvSpPr/>
-          <p:nvPr/>
-        </p:nvSpPr>
-        <p:spPr>
-          <a:xfrm>
-            <a:off x="518160" y="1582168"/>
-            <a:ext cx="3739056" cy="1302922"/>
+              <a:t> 2</a:t>
+            </a:r>
+          </a:p>
+        </p:txBody>
+      </p:sp>
+      <p:sp>
+        <p:nvSpPr>
+          <p:cNvPr id="67" name="Rectangle 66"/>
+          <p:cNvSpPr/>
+          <p:nvPr/>
+        </p:nvSpPr>
+        <p:spPr>
+          <a:xfrm>
+            <a:off x="7239482" y="4543676"/>
+            <a:ext cx="54086" cy="51892"/>
+          </a:xfrm>
+          <a:prstGeom prst="rect">
+            <a:avLst/>
+          </a:prstGeom>
+        </p:spPr>
+        <p:style>
+          <a:lnRef idx="2">
+            <a:schemeClr val="dk1"/>
+          </a:lnRef>
+          <a:fillRef idx="1">
+            <a:schemeClr val="lt1"/>
+          </a:fillRef>
+          <a:effectRef idx="0">
+            <a:schemeClr val="dk1"/>
+          </a:effectRef>
+          <a:fontRef idx="minor">
+            <a:schemeClr val="dk1"/>
+          </a:fontRef>
+        </p:style>
+        <p:txBody>
+          <a:bodyPr rtlCol="0" anchor="ctr"/>
+          <a:lstStyle/>
+          <a:p>
+            <a:pPr algn="ctr"/>
+            <a:endParaRPr lang="en-US"/>
+          </a:p>
+        </p:txBody>
+      </p:sp>
+      <p:sp>
+        <p:nvSpPr>
+          <p:cNvPr id="69" name="Rectangle 68"/>
+          <p:cNvSpPr/>
+          <p:nvPr/>
+        </p:nvSpPr>
+        <p:spPr>
+          <a:xfrm>
+            <a:off x="7239482" y="4633048"/>
+            <a:ext cx="54086" cy="51892"/>
+          </a:xfrm>
+          <a:prstGeom prst="rect">
+            <a:avLst/>
+          </a:prstGeom>
+        </p:spPr>
+        <p:style>
+          <a:lnRef idx="2">
+            <a:schemeClr val="dk1"/>
+          </a:lnRef>
+          <a:fillRef idx="1">
+            <a:schemeClr val="lt1"/>
+          </a:fillRef>
+          <a:effectRef idx="0">
+            <a:schemeClr val="dk1"/>
+          </a:effectRef>
+          <a:fontRef idx="minor">
+            <a:schemeClr val="dk1"/>
+          </a:fontRef>
+        </p:style>
+        <p:txBody>
+          <a:bodyPr rtlCol="0" anchor="ctr"/>
+          <a:lstStyle/>
+          <a:p>
+            <a:pPr algn="ctr"/>
+            <a:endParaRPr lang="en-US"/>
+          </a:p>
+        </p:txBody>
+      </p:sp>
+      <p:sp>
+        <p:nvSpPr>
+          <p:cNvPr id="70" name="TextBox 69"/>
+          <p:cNvSpPr txBox="1"/>
+          <p:nvPr/>
+        </p:nvSpPr>
+        <p:spPr>
+          <a:xfrm rot="5400000">
+            <a:off x="4369644" y="2091586"/>
+            <a:ext cx="833883" cy="246221"/>
+          </a:xfrm>
+          <a:prstGeom prst="rect">
+            <a:avLst/>
+          </a:prstGeom>
+          <a:noFill/>
+        </p:spPr>
+        <p:txBody>
+          <a:bodyPr wrap="none" rtlCol="0">
+            <a:spAutoFit/>
+          </a:bodyPr>
+          <a:lstStyle/>
+          <a:p>
+            <a:pPr algn="ctr"/>
+            <a:r>
+              <a:rPr lang="en-US" sz="1000" b="1" dirty="0">
+                <a:latin typeface="Century Gothic" panose="020B0502020202020204" pitchFamily="34" charset="0"/>
+                <a:cs typeface="Adobe Devanagari" panose="02040503050201020203" pitchFamily="18" charset="0"/>
+              </a:rPr>
+              <a:t>Expression</a:t>
+            </a:r>
+          </a:p>
+        </p:txBody>
+      </p:sp>
+      <p:sp>
+        <p:nvSpPr>
+          <p:cNvPr id="71" name="TextBox 70"/>
+          <p:cNvSpPr txBox="1"/>
+          <p:nvPr/>
+        </p:nvSpPr>
+        <p:spPr>
+          <a:xfrm rot="16200000">
+            <a:off x="6867601" y="2070599"/>
+            <a:ext cx="460382" cy="246221"/>
+          </a:xfrm>
+          <a:prstGeom prst="rect">
+            <a:avLst/>
+          </a:prstGeom>
+          <a:noFill/>
+        </p:spPr>
+        <p:txBody>
+          <a:bodyPr wrap="none" rtlCol="0">
+            <a:spAutoFit/>
+          </a:bodyPr>
+          <a:lstStyle/>
+          <a:p>
+            <a:pPr algn="ctr"/>
+            <a:r>
+              <a:rPr lang="en-US" sz="1000" b="1" dirty="0">
+                <a:latin typeface="Century Gothic" panose="020B0502020202020204" pitchFamily="34" charset="0"/>
+                <a:cs typeface="Adobe Devanagari" panose="02040503050201020203" pitchFamily="18" charset="0"/>
+              </a:rPr>
+              <a:t>MIDI</a:t>
+            </a:r>
+          </a:p>
+        </p:txBody>
+      </p:sp>
+      <p:sp>
+        <p:nvSpPr>
+          <p:cNvPr id="72" name="TextBox 71"/>
+          <p:cNvSpPr txBox="1"/>
+          <p:nvPr/>
+        </p:nvSpPr>
+        <p:spPr>
+          <a:xfrm rot="16200000">
+            <a:off x="6888870" y="3101168"/>
+            <a:ext cx="407484" cy="246221"/>
+          </a:xfrm>
+          <a:prstGeom prst="rect">
+            <a:avLst/>
+          </a:prstGeom>
+          <a:noFill/>
+        </p:spPr>
+        <p:txBody>
+          <a:bodyPr wrap="none" rtlCol="0">
+            <a:spAutoFit/>
+          </a:bodyPr>
+          <a:lstStyle/>
+          <a:p>
+            <a:pPr algn="ctr"/>
+            <a:r>
+              <a:rPr lang="en-US" sz="1000" b="1" dirty="0">
+                <a:latin typeface="Century Gothic" panose="020B0502020202020204" pitchFamily="34" charset="0"/>
+                <a:cs typeface="Adobe Devanagari" panose="02040503050201020203" pitchFamily="18" charset="0"/>
+              </a:rPr>
+              <a:t>USB</a:t>
+            </a:r>
+          </a:p>
+        </p:txBody>
+      </p:sp>
+      <p:sp>
+        <p:nvSpPr>
+          <p:cNvPr id="60" name="Rectangle 59"/>
+          <p:cNvSpPr/>
+          <p:nvPr/>
+        </p:nvSpPr>
+        <p:spPr>
+          <a:xfrm>
+            <a:off x="1130422" y="1955557"/>
+            <a:ext cx="3250889" cy="428695"/>
           </a:xfrm>
           <a:prstGeom prst="rect">
             <a:avLst/>
@@ -32153,7 +30443,7 @@
             </a:schemeClr>
           </a:lnRef>
           <a:fillRef idx="1003">
-            <a:schemeClr val="lt1"/>
+            <a:schemeClr val="dk1"/>
           </a:fillRef>
           <a:effectRef idx="0">
             <a:schemeClr val="dk1"/>
@@ -32169,92 +30459,24 @@
             <a:r>
               <a:rPr lang="en-US" sz="1600" b="1" dirty="0">
                 <a:solidFill>
-                  <a:schemeClr val="tx1"/>
-                </a:solidFill>
-              </a:rPr>
-              <a:t>Mix</a:t>
-            </a:r>
-            <a:r>
-              <a:rPr lang="en-US" sz="1600" dirty="0">
-                <a:solidFill>
-                  <a:schemeClr val="tx1"/>
-                </a:solidFill>
-              </a:rPr>
-              <a:t>: Dry/Wet Mix</a:t>
-            </a:r>
-          </a:p>
-          <a:p>
-            <a:r>
-              <a:rPr lang="en-US" sz="1600" b="1" dirty="0">
-                <a:solidFill>
-                  <a:schemeClr val="tx1"/>
-                </a:solidFill>
-              </a:rPr>
-              <a:t>LPF: </a:t>
-            </a:r>
-            <a:r>
-              <a:rPr lang="en-US" sz="1600" dirty="0">
-                <a:solidFill>
-                  <a:schemeClr val="tx1"/>
-                </a:solidFill>
-              </a:rPr>
-              <a:t>Resonant Low Pass Filter </a:t>
-            </a:r>
-            <a:r>
-              <a:rPr lang="en-US" sz="1600" dirty="0" err="1">
-                <a:solidFill>
-                  <a:schemeClr val="tx1"/>
-                </a:solidFill>
-              </a:rPr>
-              <a:t>Cuttoff</a:t>
-            </a:r>
-            <a:endParaRPr lang="en-US" sz="1600" dirty="0">
-              <a:solidFill>
-                <a:schemeClr val="tx1"/>
-              </a:solidFill>
-            </a:endParaRPr>
-          </a:p>
-          <a:p>
-            <a:r>
-              <a:rPr lang="en-US" sz="1600" b="1" dirty="0">
-                <a:solidFill>
-                  <a:schemeClr val="tx1"/>
-                </a:solidFill>
-              </a:rPr>
-              <a:t>REGEN:</a:t>
-            </a:r>
-            <a:r>
-              <a:rPr lang="en-US" sz="1600" dirty="0">
-                <a:solidFill>
-                  <a:schemeClr val="tx1"/>
-                </a:solidFill>
-              </a:rPr>
-              <a:t> Delay feedback / regen. Higher settings can oscillate out of control, very sensitive to LPF setting.</a:t>
-            </a:r>
-            <a:endParaRPr lang="en-US" sz="1600" b="1" dirty="0">
-              <a:solidFill>
-                <a:schemeClr val="tx1"/>
-              </a:solidFill>
-            </a:endParaRPr>
-          </a:p>
-        </p:txBody>
-      </p:sp>
-      <p:sp>
-        <p:nvSpPr>
-          <p:cNvPr id="56" name="Rectangle 55">
-            <a:extLst>
-              <a:ext uri="{FF2B5EF4-FFF2-40B4-BE49-F238E27FC236}">
-                <a16:creationId xmlns:a16="http://schemas.microsoft.com/office/drawing/2014/main" id="{F73FF264-5C63-09BB-B3D1-56D806651DE1}"/>
-              </a:ext>
-            </a:extLst>
-          </p:cNvPr>
-          <p:cNvSpPr/>
-          <p:nvPr/>
-        </p:nvSpPr>
-        <p:spPr>
-          <a:xfrm>
-            <a:off x="7609878" y="1268497"/>
-            <a:ext cx="4264299" cy="2235737"/>
+                  <a:schemeClr val="bg1"/>
+                </a:solidFill>
+              </a:rPr>
+              <a:t>Expression Input (1/8” TRS Jack)</a:t>
+            </a:r>
+          </a:p>
+        </p:txBody>
+      </p:sp>
+      <p:sp>
+        <p:nvSpPr>
+          <p:cNvPr id="61" name="Rectangle 60"/>
+          <p:cNvSpPr/>
+          <p:nvPr/>
+        </p:nvSpPr>
+        <p:spPr>
+          <a:xfrm>
+            <a:off x="1338617" y="3706618"/>
+            <a:ext cx="3023756" cy="410432"/>
           </a:xfrm>
           <a:prstGeom prst="rect">
             <a:avLst/>
@@ -32266,8 +30488,8 @@
               <a:shade val="50000"/>
             </a:schemeClr>
           </a:lnRef>
-          <a:fillRef idx="1003">
-            <a:schemeClr val="lt1"/>
+          <a:fillRef idx="1001">
+            <a:schemeClr val="dk2"/>
           </a:fillRef>
           <a:effectRef idx="0">
             <a:schemeClr val="dk1"/>
@@ -32283,171 +30505,191 @@
             <a:r>
               <a:rPr lang="en-US" sz="1600" b="1" dirty="0">
                 <a:solidFill>
-                  <a:schemeClr val="tx1"/>
-                </a:solidFill>
-              </a:rPr>
-              <a:t>GLIDE: </a:t>
-            </a:r>
-            <a:r>
-              <a:rPr lang="en-US" sz="1600" dirty="0">
-                <a:solidFill>
-                  <a:schemeClr val="tx1"/>
-                </a:solidFill>
-              </a:rPr>
-              <a:t>Pitch transition time between sequencer steps.</a:t>
-            </a:r>
-          </a:p>
-          <a:p>
-            <a:r>
-              <a:rPr lang="en-US" sz="1600" b="1" dirty="0">
-                <a:solidFill>
-                  <a:schemeClr val="tx1"/>
-                </a:solidFill>
-              </a:rPr>
-              <a:t>INT 1</a:t>
-            </a:r>
-            <a:r>
-              <a:rPr lang="en-US" sz="1600" dirty="0">
-                <a:solidFill>
-                  <a:schemeClr val="tx1"/>
-                </a:solidFill>
-              </a:rPr>
-              <a:t>: Sets first interval in musical increments (by changing the delay time). Alt is Mod Speed)</a:t>
-            </a:r>
-          </a:p>
-          <a:p>
-            <a:r>
-              <a:rPr lang="en-US" sz="1600" b="1" dirty="0">
-                <a:solidFill>
-                  <a:schemeClr val="tx1"/>
-                </a:solidFill>
-              </a:rPr>
-              <a:t>INT 2</a:t>
-            </a:r>
-            <a:r>
-              <a:rPr lang="en-US" sz="1600" dirty="0">
-                <a:solidFill>
-                  <a:schemeClr val="tx1"/>
-                </a:solidFill>
-              </a:rPr>
-              <a:t>: Sets Second interval in musical increments (by changing the delay time). Alt is Mod Depth</a:t>
-            </a:r>
-          </a:p>
-          <a:p>
-            <a:r>
-              <a:rPr lang="en-US" sz="1600" dirty="0">
-                <a:solidFill>
-                  <a:schemeClr val="tx1"/>
-                </a:solidFill>
-              </a:rPr>
-              <a:t>Intervals: -2Oct, -Oct and 5</a:t>
-            </a:r>
-            <a:r>
-              <a:rPr lang="en-US" sz="1600" baseline="30000" dirty="0">
-                <a:solidFill>
-                  <a:schemeClr val="tx1"/>
-                </a:solidFill>
-              </a:rPr>
-              <a:t>th</a:t>
-            </a:r>
-            <a:r>
-              <a:rPr lang="en-US" sz="1600" dirty="0">
-                <a:solidFill>
-                  <a:schemeClr val="tx1"/>
-                </a:solidFill>
-              </a:rPr>
-              <a:t>, -Oct, -5</a:t>
-            </a:r>
-            <a:r>
-              <a:rPr lang="en-US" sz="1600" baseline="30000" dirty="0">
-                <a:solidFill>
-                  <a:schemeClr val="tx1"/>
-                </a:solidFill>
-              </a:rPr>
-              <a:t>th</a:t>
-            </a:r>
-            <a:r>
-              <a:rPr lang="en-US" sz="1600" dirty="0">
-                <a:solidFill>
-                  <a:schemeClr val="tx1"/>
-                </a:solidFill>
-              </a:rPr>
-              <a:t>, -4</a:t>
-            </a:r>
-            <a:r>
-              <a:rPr lang="en-US" sz="1600" baseline="30000" dirty="0">
-                <a:solidFill>
-                  <a:schemeClr val="tx1"/>
-                </a:solidFill>
-              </a:rPr>
-              <a:t>th</a:t>
-            </a:r>
-            <a:r>
-              <a:rPr lang="en-US" sz="1600" dirty="0">
-                <a:solidFill>
-                  <a:schemeClr val="tx1"/>
-                </a:solidFill>
-              </a:rPr>
-              <a:t>, Off, 4</a:t>
-            </a:r>
-            <a:r>
-              <a:rPr lang="en-US" sz="1600" baseline="30000" dirty="0">
-                <a:solidFill>
-                  <a:schemeClr val="tx1"/>
-                </a:solidFill>
-              </a:rPr>
-              <a:t>th</a:t>
-            </a:r>
-            <a:r>
-              <a:rPr lang="en-US" sz="1600" dirty="0">
-                <a:solidFill>
-                  <a:schemeClr val="tx1"/>
-                </a:solidFill>
-              </a:rPr>
-              <a:t>, 5</a:t>
-            </a:r>
-            <a:r>
-              <a:rPr lang="en-US" sz="1600" baseline="30000" dirty="0">
-                <a:solidFill>
-                  <a:schemeClr val="tx1"/>
-                </a:solidFill>
-              </a:rPr>
-              <a:t>th</a:t>
-            </a:r>
-            <a:r>
-              <a:rPr lang="en-US" sz="1600" dirty="0">
-                <a:solidFill>
-                  <a:schemeClr val="tx1"/>
-                </a:solidFill>
-              </a:rPr>
-              <a:t>, Oct, Oct and 5th, 2Oct</a:t>
-            </a:r>
-          </a:p>
-          <a:p>
-            <a:endParaRPr lang="en-US" sz="1600" dirty="0">
-              <a:solidFill>
-                <a:schemeClr val="bg1"/>
-              </a:solidFill>
-            </a:endParaRPr>
-          </a:p>
-        </p:txBody>
-      </p:sp>
-      <p:sp>
-        <p:nvSpPr>
-          <p:cNvPr id="57" name="Rectangle 56">
-            <a:extLst>
-              <a:ext uri="{FF2B5EF4-FFF2-40B4-BE49-F238E27FC236}">
-                <a16:creationId xmlns:a16="http://schemas.microsoft.com/office/drawing/2014/main" id="{A880F56E-CDCF-3FF3-BB97-254219359471}"/>
-              </a:ext>
-            </a:extLst>
-          </p:cNvPr>
-          <p:cNvSpPr/>
-          <p:nvPr/>
-        </p:nvSpPr>
-        <p:spPr>
-          <a:xfrm>
-            <a:off x="281990" y="3013236"/>
-            <a:ext cx="4014063" cy="1202448"/>
+                  <a:schemeClr val="bg1"/>
+                </a:solidFill>
+              </a:rPr>
+              <a:t>Three 3-way Toggles (On-Off-On)</a:t>
+            </a:r>
+          </a:p>
+        </p:txBody>
+      </p:sp>
+      <p:cxnSp>
+        <p:nvCxnSpPr>
+          <p:cNvPr id="62" name="Straight Arrow Connector 61"/>
+          <p:cNvCxnSpPr>
+            <a:stCxn id="61" idx="3"/>
+          </p:cNvCxnSpPr>
+          <p:nvPr/>
+        </p:nvCxnSpPr>
+        <p:spPr>
+          <a:xfrm>
+            <a:off x="4362373" y="3911834"/>
+            <a:ext cx="276302" cy="0"/>
+          </a:xfrm>
+          <a:prstGeom prst="straightConnector1">
+            <a:avLst/>
+          </a:prstGeom>
+          <a:ln>
+            <a:tailEnd type="triangle"/>
+          </a:ln>
+        </p:spPr>
+        <p:style>
+          <a:lnRef idx="3">
+            <a:schemeClr val="dk1"/>
+          </a:lnRef>
+          <a:fillRef idx="0">
+            <a:schemeClr val="dk1"/>
+          </a:fillRef>
+          <a:effectRef idx="2">
+            <a:schemeClr val="dk1"/>
+          </a:effectRef>
+          <a:fontRef idx="minor">
+            <a:schemeClr val="tx1"/>
+          </a:fontRef>
+        </p:style>
+      </p:cxnSp>
+      <p:cxnSp>
+        <p:nvCxnSpPr>
+          <p:cNvPr id="68" name="Straight Arrow Connector 67"/>
+          <p:cNvCxnSpPr/>
+          <p:nvPr/>
+        </p:nvCxnSpPr>
+        <p:spPr>
+          <a:xfrm>
+            <a:off x="4381311" y="2165058"/>
+            <a:ext cx="276302" cy="0"/>
+          </a:xfrm>
+          <a:prstGeom prst="straightConnector1">
+            <a:avLst/>
+          </a:prstGeom>
+          <a:ln>
+            <a:tailEnd type="triangle"/>
+          </a:ln>
+        </p:spPr>
+        <p:style>
+          <a:lnRef idx="3">
+            <a:schemeClr val="dk1"/>
+          </a:lnRef>
+          <a:fillRef idx="0">
+            <a:schemeClr val="dk1"/>
+          </a:fillRef>
+          <a:effectRef idx="2">
+            <a:schemeClr val="dk1"/>
+          </a:effectRef>
+          <a:fontRef idx="minor">
+            <a:schemeClr val="tx1"/>
+          </a:fontRef>
+        </p:style>
+      </p:cxnSp>
+      <p:cxnSp>
+        <p:nvCxnSpPr>
+          <p:cNvPr id="73" name="Straight Arrow Connector 72"/>
+          <p:cNvCxnSpPr/>
+          <p:nvPr/>
+        </p:nvCxnSpPr>
+        <p:spPr>
+          <a:xfrm flipH="1">
+            <a:off x="7266525" y="4623278"/>
+            <a:ext cx="236542" cy="0"/>
+          </a:xfrm>
+          <a:prstGeom prst="straightConnector1">
+            <a:avLst/>
+          </a:prstGeom>
+          <a:ln>
+            <a:tailEnd type="triangle"/>
+          </a:ln>
+        </p:spPr>
+        <p:style>
+          <a:lnRef idx="3">
+            <a:schemeClr val="dk1"/>
+          </a:lnRef>
+          <a:fillRef idx="0">
+            <a:schemeClr val="dk1"/>
+          </a:fillRef>
+          <a:effectRef idx="2">
+            <a:schemeClr val="dk1"/>
+          </a:effectRef>
+          <a:fontRef idx="minor">
+            <a:schemeClr val="tx1"/>
+          </a:fontRef>
+        </p:style>
+      </p:cxnSp>
+      <p:cxnSp>
+        <p:nvCxnSpPr>
+          <p:cNvPr id="74" name="Straight Arrow Connector 73"/>
+          <p:cNvCxnSpPr/>
+          <p:nvPr/>
+        </p:nvCxnSpPr>
+        <p:spPr>
+          <a:xfrm flipH="1">
+            <a:off x="7251189" y="3222216"/>
+            <a:ext cx="236542" cy="0"/>
+          </a:xfrm>
+          <a:prstGeom prst="straightConnector1">
+            <a:avLst/>
+          </a:prstGeom>
+          <a:ln>
+            <a:tailEnd type="triangle"/>
+          </a:ln>
+        </p:spPr>
+        <p:style>
+          <a:lnRef idx="3">
+            <a:schemeClr val="dk1"/>
+          </a:lnRef>
+          <a:fillRef idx="0">
+            <a:schemeClr val="dk1"/>
+          </a:fillRef>
+          <a:effectRef idx="2">
+            <a:schemeClr val="dk1"/>
+          </a:effectRef>
+          <a:fontRef idx="minor">
+            <a:schemeClr val="tx1"/>
+          </a:fontRef>
+        </p:style>
+      </p:cxnSp>
+      <p:cxnSp>
+        <p:nvCxnSpPr>
+          <p:cNvPr id="75" name="Straight Arrow Connector 74"/>
+          <p:cNvCxnSpPr/>
+          <p:nvPr/>
+        </p:nvCxnSpPr>
+        <p:spPr>
+          <a:xfrm flipH="1">
+            <a:off x="7244681" y="2193709"/>
+            <a:ext cx="236542" cy="0"/>
+          </a:xfrm>
+          <a:prstGeom prst="straightConnector1">
+            <a:avLst/>
+          </a:prstGeom>
+          <a:ln>
+            <a:tailEnd type="triangle"/>
+          </a:ln>
+        </p:spPr>
+        <p:style>
+          <a:lnRef idx="3">
+            <a:schemeClr val="dk1"/>
+          </a:lnRef>
+          <a:fillRef idx="0">
+            <a:schemeClr val="dk1"/>
+          </a:fillRef>
+          <a:effectRef idx="2">
+            <a:schemeClr val="dk1"/>
+          </a:effectRef>
+          <a:fontRef idx="minor">
+            <a:schemeClr val="tx1"/>
+          </a:fontRef>
+        </p:style>
+      </p:cxnSp>
+      <p:sp>
+        <p:nvSpPr>
+          <p:cNvPr id="65" name="Rectangle 64"/>
+          <p:cNvSpPr/>
+          <p:nvPr/>
+        </p:nvSpPr>
+        <p:spPr>
+          <a:xfrm>
+            <a:off x="2216110" y="2809545"/>
+            <a:ext cx="2146263" cy="410432"/>
           </a:xfrm>
           <a:prstGeom prst="rect">
             <a:avLst/>
@@ -32459,88 +30701,6 @@
               <a:shade val="50000"/>
             </a:schemeClr>
           </a:lnRef>
-          <a:fillRef idx="1003">
-            <a:schemeClr val="dk1"/>
-          </a:fillRef>
-          <a:effectRef idx="0">
-            <a:schemeClr val="dk1"/>
-          </a:effectRef>
-          <a:fontRef idx="minor">
-            <a:schemeClr val="lt1"/>
-          </a:fontRef>
-        </p:style>
-        <p:txBody>
-          <a:bodyPr rtlCol="0" anchor="ctr"/>
-          <a:lstStyle/>
-          <a:p>
-            <a:r>
-              <a:rPr lang="en-US" sz="1600" b="1" dirty="0">
-                <a:solidFill>
-                  <a:schemeClr val="bg1"/>
-                </a:solidFill>
-              </a:rPr>
-              <a:t>Base Sequencer Step Length</a:t>
-            </a:r>
-          </a:p>
-          <a:p>
-            <a:r>
-              <a:rPr lang="en-US" sz="1600" b="1" dirty="0">
-                <a:solidFill>
-                  <a:schemeClr val="bg1"/>
-                </a:solidFill>
-              </a:rPr>
-              <a:t>  Left: Quarter Note (Same as Tap Tempo)</a:t>
-            </a:r>
-          </a:p>
-          <a:p>
-            <a:r>
-              <a:rPr lang="en-US" sz="1600" b="1" dirty="0">
-                <a:solidFill>
-                  <a:schemeClr val="bg1"/>
-                </a:solidFill>
-              </a:rPr>
-              <a:t>  Center: Dotted Eighth Note</a:t>
-            </a:r>
-          </a:p>
-          <a:p>
-            <a:r>
-              <a:rPr lang="en-US" sz="1600" b="1" dirty="0">
-                <a:solidFill>
-                  <a:schemeClr val="bg1"/>
-                </a:solidFill>
-              </a:rPr>
-              <a:t>  Right:  Eighth Note</a:t>
-            </a:r>
-          </a:p>
-        </p:txBody>
-      </p:sp>
-      <p:sp>
-        <p:nvSpPr>
-          <p:cNvPr id="60" name="Rectangle 59">
-            <a:extLst>
-              <a:ext uri="{FF2B5EF4-FFF2-40B4-BE49-F238E27FC236}">
-                <a16:creationId xmlns:a16="http://schemas.microsoft.com/office/drawing/2014/main" id="{12ED4E5F-BFF6-92EB-D3DB-85F61D54B583}"/>
-              </a:ext>
-            </a:extLst>
-          </p:cNvPr>
-          <p:cNvSpPr/>
-          <p:nvPr/>
-        </p:nvSpPr>
-        <p:spPr>
-          <a:xfrm>
-            <a:off x="7473735" y="4691038"/>
-            <a:ext cx="4579003" cy="1174775"/>
-          </a:xfrm>
-          <a:prstGeom prst="rect">
-            <a:avLst/>
-          </a:prstGeom>
-        </p:spPr>
-        <p:style>
-          <a:lnRef idx="2">
-            <a:schemeClr val="dk1">
-              <a:shade val="50000"/>
-            </a:schemeClr>
-          </a:lnRef>
           <a:fillRef idx="1001">
             <a:schemeClr val="dk2"/>
           </a:fillRef>
@@ -32561,1094 +30721,158 @@
                   <a:schemeClr val="bg1"/>
                 </a:solidFill>
               </a:rPr>
-              <a:t>Dip Switches:</a:t>
-            </a:r>
-          </a:p>
-          <a:p>
-            <a:r>
-              <a:rPr lang="en-US" sz="1600" b="1" dirty="0">
-                <a:solidFill>
-                  <a:schemeClr val="bg1"/>
-                </a:solidFill>
-              </a:rPr>
-              <a:t>  1: Stereo / Miso (off is MISO) </a:t>
-            </a:r>
-          </a:p>
-          <a:p>
-            <a:r>
-              <a:rPr lang="en-US" sz="1600" b="1" dirty="0">
-                <a:solidFill>
-                  <a:schemeClr val="bg1"/>
-                </a:solidFill>
-              </a:rPr>
-              <a:t>2: Reverse Mode                         </a:t>
-            </a:r>
-          </a:p>
-          <a:p>
-            <a:r>
-              <a:rPr lang="en-US" sz="1600" b="1" dirty="0">
-                <a:solidFill>
-                  <a:schemeClr val="bg1"/>
-                </a:solidFill>
-              </a:rPr>
-              <a:t>3. Dissonant Mode</a:t>
-            </a:r>
-          </a:p>
-          <a:p>
-            <a:r>
-              <a:rPr lang="en-US" sz="1600" b="1" dirty="0">
-                <a:solidFill>
-                  <a:schemeClr val="bg1"/>
-                </a:solidFill>
-              </a:rPr>
-              <a:t>4. Chromatic Mode (overrides Dissonant Mode)</a:t>
-            </a:r>
-          </a:p>
-        </p:txBody>
-      </p:sp>
-      <p:sp>
-        <p:nvSpPr>
-          <p:cNvPr id="61" name="Rectangle 60">
-            <a:extLst>
-              <a:ext uri="{FF2B5EF4-FFF2-40B4-BE49-F238E27FC236}">
-                <a16:creationId xmlns:a16="http://schemas.microsoft.com/office/drawing/2014/main" id="{8EADB182-BFAE-CFCA-2710-9C826B411491}"/>
-              </a:ext>
-            </a:extLst>
-          </p:cNvPr>
-          <p:cNvSpPr/>
-          <p:nvPr/>
-        </p:nvSpPr>
-        <p:spPr>
-          <a:xfrm>
-            <a:off x="2306320" y="5986047"/>
-            <a:ext cx="3549309" cy="774200"/>
+              <a:t>6 Potentiometer Knobs</a:t>
+            </a:r>
+          </a:p>
+        </p:txBody>
+      </p:sp>
+      <p:sp>
+        <p:nvSpPr>
+          <p:cNvPr id="76" name="Rectangle 75"/>
+          <p:cNvSpPr/>
+          <p:nvPr/>
+        </p:nvSpPr>
+        <p:spPr>
+          <a:xfrm>
+            <a:off x="166920" y="4373127"/>
+            <a:ext cx="4226847" cy="2096991"/>
           </a:xfrm>
           <a:prstGeom prst="rect">
             <a:avLst/>
           </a:prstGeom>
-        </p:spPr>
-        <p:style>
-          <a:lnRef idx="2">
-            <a:schemeClr val="dk1">
-              <a:shade val="50000"/>
-            </a:schemeClr>
-          </a:lnRef>
-          <a:fillRef idx="1001">
-            <a:schemeClr val="dk2"/>
-          </a:fillRef>
-          <a:effectRef idx="0">
-            <a:schemeClr val="dk1"/>
-          </a:effectRef>
-          <a:fontRef idx="minor">
-            <a:schemeClr val="lt1"/>
-          </a:fontRef>
-        </p:style>
-        <p:txBody>
-          <a:bodyPr rtlCol="0" anchor="ctr"/>
-          <a:lstStyle/>
-          <a:p>
-            <a:r>
-              <a:rPr lang="en-US" sz="1600" b="1" dirty="0">
-                <a:solidFill>
-                  <a:schemeClr val="bg1"/>
-                </a:solidFill>
-              </a:rPr>
-              <a:t>Left Footswitch: Bypass/Engage, hold to engage alternate mode (indicated by dimmed LED)</a:t>
-            </a:r>
-          </a:p>
-        </p:txBody>
-      </p:sp>
-      <p:sp>
-        <p:nvSpPr>
-          <p:cNvPr id="63" name="Rectangle 62">
-            <a:extLst>
-              <a:ext uri="{FF2B5EF4-FFF2-40B4-BE49-F238E27FC236}">
-                <a16:creationId xmlns:a16="http://schemas.microsoft.com/office/drawing/2014/main" id="{37DC3E28-4C19-F320-30C9-1381E58B757F}"/>
-              </a:ext>
-            </a:extLst>
-          </p:cNvPr>
-          <p:cNvSpPr/>
-          <p:nvPr/>
-        </p:nvSpPr>
-        <p:spPr>
-          <a:xfrm>
-            <a:off x="236579" y="87047"/>
-            <a:ext cx="7649546" cy="1083960"/>
-          </a:xfrm>
-          <a:prstGeom prst="rect">
-            <a:avLst/>
-          </a:prstGeom>
           <a:ln/>
         </p:spPr>
         <p:style>
           <a:lnRef idx="1">
-            <a:schemeClr val="accent1"/>
+            <a:schemeClr val="accent2"/>
           </a:lnRef>
           <a:fillRef idx="2">
-            <a:schemeClr val="accent1"/>
+            <a:schemeClr val="accent2"/>
           </a:fillRef>
           <a:effectRef idx="1">
-            <a:schemeClr val="accent1"/>
-          </a:effectRef>
-          <a:fontRef idx="minor">
-            <a:schemeClr val="dk1"/>
-          </a:fontRef>
-        </p:style>
-        <p:txBody>
-          <a:bodyPr rtlCol="0" anchor="ctr"/>
-          <a:lstStyle/>
-          <a:p>
-            <a:r>
-              <a:rPr lang="en-US" sz="2000" b="1" dirty="0" err="1">
+            <a:schemeClr val="accent2"/>
+          </a:effectRef>
+          <a:fontRef idx="minor">
+            <a:schemeClr val="dk1"/>
+          </a:fontRef>
+        </p:style>
+        <p:txBody>
+          <a:bodyPr rtlCol="0" anchor="ctr"/>
+          <a:lstStyle/>
+          <a:p>
+            <a:r>
+              <a:rPr lang="en-US" sz="2800" b="1" dirty="0">
                 <a:solidFill>
                   <a:schemeClr val="tx1"/>
                 </a:solidFill>
               </a:rPr>
-              <a:t>Balnea</a:t>
-            </a:r>
-            <a:r>
-              <a:rPr lang="en-US" sz="2000" b="1" dirty="0">
+              <a:t>Specs:</a:t>
+            </a:r>
+          </a:p>
+          <a:p>
+            <a:pPr marL="285750" indent="-285750">
+              <a:buFont typeface="Arial" panose="020B0604020202020204" pitchFamily="34" charset="0"/>
+              <a:buChar char="•"/>
+            </a:pPr>
+            <a:r>
+              <a:rPr lang="en-US" sz="1400" b="1" dirty="0">
                 <a:solidFill>
                   <a:schemeClr val="tx1"/>
                 </a:solidFill>
               </a:rPr>
-              <a:t> </a:t>
-            </a:r>
+              <a:t>Buffered Stereo In/Out Paths</a:t>
+            </a:r>
+          </a:p>
+          <a:p>
+            <a:pPr marL="285750" indent="-285750">
+              <a:buFont typeface="Arial" panose="020B0604020202020204" pitchFamily="34" charset="0"/>
+              <a:buChar char="•"/>
+            </a:pPr>
             <a:r>
               <a:rPr lang="en-US" sz="1400" b="1" dirty="0">
                 <a:solidFill>
                   <a:schemeClr val="tx1"/>
                 </a:solidFill>
               </a:rPr>
-              <a:t>is a Digital Delay And Pitch Shifter inspired by the Chase Bliss Thermae pedal. </a:t>
-            </a:r>
-            <a:r>
-              <a:rPr lang="en-US" sz="1200" b="1" dirty="0">
+              <a:t>Up to 96KHz, 24-bit Digital Processing</a:t>
+            </a:r>
+          </a:p>
+          <a:p>
+            <a:pPr marL="285750" indent="-285750">
+              <a:buFont typeface="Arial" panose="020B0604020202020204" pitchFamily="34" charset="0"/>
+              <a:buChar char="•"/>
+            </a:pPr>
+            <a:r>
+              <a:rPr lang="en-US" sz="1400" b="1" dirty="0">
                 <a:solidFill>
                   <a:schemeClr val="tx1"/>
                 </a:solidFill>
               </a:rPr>
-              <a:t>This design mostly follows the Thermae controls, minus the dipswitch modulation features and in depth customization. Because it’s digital however, it can do a few things Thermae can’t do, such as Stereo and Reverse Delay, and adds some unique interval modes. It leans into the crunchy side of digital audio time shifting and embraces aliasing and distortion, rather than trying to avoid it.</a:t>
-            </a:r>
-          </a:p>
-        </p:txBody>
-      </p:sp>
-      <p:sp>
-        <p:nvSpPr>
-          <p:cNvPr id="64" name="Rectangle 63">
-            <a:extLst>
-              <a:ext uri="{FF2B5EF4-FFF2-40B4-BE49-F238E27FC236}">
-                <a16:creationId xmlns:a16="http://schemas.microsoft.com/office/drawing/2014/main" id="{2B348D26-1379-AD0D-2394-8BC98E09CE1A}"/>
-              </a:ext>
-            </a:extLst>
-          </p:cNvPr>
-          <p:cNvSpPr/>
-          <p:nvPr/>
-        </p:nvSpPr>
-        <p:spPr>
-          <a:xfrm>
-            <a:off x="8130649" y="57795"/>
-            <a:ext cx="3624619" cy="1023238"/>
-          </a:xfrm>
-          <a:prstGeom prst="rect">
-            <a:avLst/>
-          </a:prstGeom>
-          <a:ln/>
-        </p:spPr>
-        <p:style>
-          <a:lnRef idx="1">
-            <a:schemeClr val="accent1"/>
-          </a:lnRef>
-          <a:fillRef idx="2">
-            <a:schemeClr val="accent1"/>
-          </a:fillRef>
-          <a:effectRef idx="1">
-            <a:schemeClr val="accent1"/>
-          </a:effectRef>
-          <a:fontRef idx="minor">
-            <a:schemeClr val="dk1"/>
-          </a:fontRef>
-        </p:style>
-        <p:txBody>
-          <a:bodyPr rtlCol="0" anchor="ctr"/>
-          <a:lstStyle/>
-          <a:p>
-            <a:r>
-              <a:rPr lang="en-US" sz="1600" b="1" dirty="0">
+              <a:t>64MB SDRAM, 8MB Flash</a:t>
+            </a:r>
+          </a:p>
+          <a:p>
+            <a:pPr marL="285750" indent="-285750">
+              <a:buFont typeface="Arial" panose="020B0604020202020204" pitchFamily="34" charset="0"/>
+              <a:buChar char="•"/>
+            </a:pPr>
+            <a:r>
+              <a:rPr lang="en-US" sz="1400" b="1" dirty="0">
                 <a:solidFill>
                   <a:schemeClr val="tx1"/>
                 </a:solidFill>
               </a:rPr>
-              <a:t>Stereo In/Out Processing</a:t>
+              <a:t>ARM Cortex M7 480MHz</a:t>
             </a:r>
           </a:p>
           <a:p>
             <a:pPr marL="285750" indent="-285750">
-              <a:buFontTx/>
-              <a:buChar char="-"/>
+              <a:buFont typeface="Arial" panose="020B0604020202020204" pitchFamily="34" charset="0"/>
+              <a:buChar char="•"/>
             </a:pPr>
             <a:r>
-              <a:rPr lang="en-US" sz="1600" b="1" dirty="0">
+              <a:rPr lang="en-US" sz="1400" b="1" dirty="0">
                 <a:solidFill>
                   <a:schemeClr val="tx1"/>
                 </a:solidFill>
               </a:rPr>
-              <a:t>Expression: YES (controls LPF)</a:t>
+              <a:t>Expression and MIDI Inputs</a:t>
             </a:r>
           </a:p>
           <a:p>
             <a:pPr marL="285750" indent="-285750">
-              <a:buFontTx/>
-              <a:buChar char="-"/>
+              <a:buFont typeface="Arial" panose="020B0604020202020204" pitchFamily="34" charset="0"/>
+              <a:buChar char="•"/>
             </a:pPr>
             <a:r>
-              <a:rPr lang="en-US" sz="1600" b="1" dirty="0">
+              <a:rPr lang="en-US" sz="1400" b="1" dirty="0">
                 <a:solidFill>
                   <a:schemeClr val="tx1"/>
                 </a:solidFill>
               </a:rPr>
-              <a:t>MIDI: YES</a:t>
+              <a:t>Through Hole PCB</a:t>
             </a:r>
           </a:p>
           <a:p>
             <a:pPr marL="285750" indent="-285750">
-              <a:buFontTx/>
-              <a:buChar char="-"/>
+              <a:buFont typeface="Arial" panose="020B0604020202020204" pitchFamily="34" charset="0"/>
+              <a:buChar char="•"/>
             </a:pPr>
             <a:r>
-              <a:rPr lang="en-US" sz="1600" b="1" dirty="0">
+              <a:rPr lang="en-US" sz="1400" b="1" dirty="0">
                 <a:solidFill>
                   <a:schemeClr val="tx1"/>
                 </a:solidFill>
               </a:rPr>
-              <a:t>Midi Synth mode</a:t>
-            </a:r>
-          </a:p>
-        </p:txBody>
-      </p:sp>
-      <p:cxnSp>
-        <p:nvCxnSpPr>
-          <p:cNvPr id="65" name="Straight Arrow Connector 64">
-            <a:extLst>
-              <a:ext uri="{FF2B5EF4-FFF2-40B4-BE49-F238E27FC236}">
-                <a16:creationId xmlns:a16="http://schemas.microsoft.com/office/drawing/2014/main" id="{C9A793F3-BC2B-EC45-4935-9A4247A4031C}"/>
-              </a:ext>
-            </a:extLst>
-          </p:cNvPr>
-          <p:cNvCxnSpPr>
-            <a:cxnSpLocks/>
-            <a:stCxn id="55" idx="3"/>
-          </p:cNvCxnSpPr>
-          <p:nvPr/>
-        </p:nvCxnSpPr>
-        <p:spPr>
-          <a:xfrm flipV="1">
-            <a:off x="4257216" y="2094330"/>
-            <a:ext cx="371937" cy="139299"/>
-          </a:xfrm>
-          <a:prstGeom prst="straightConnector1">
-            <a:avLst/>
-          </a:prstGeom>
-          <a:ln>
-            <a:tailEnd type="triangle"/>
-          </a:ln>
-        </p:spPr>
-        <p:style>
-          <a:lnRef idx="3">
-            <a:schemeClr val="dk1"/>
-          </a:lnRef>
-          <a:fillRef idx="0">
-            <a:schemeClr val="dk1"/>
-          </a:fillRef>
-          <a:effectRef idx="2">
-            <a:schemeClr val="dk1"/>
-          </a:effectRef>
-          <a:fontRef idx="minor">
-            <a:schemeClr val="tx1"/>
-          </a:fontRef>
-        </p:style>
-      </p:cxnSp>
-      <p:cxnSp>
-        <p:nvCxnSpPr>
-          <p:cNvPr id="66" name="Straight Arrow Connector 65">
-            <a:extLst>
-              <a:ext uri="{FF2B5EF4-FFF2-40B4-BE49-F238E27FC236}">
-                <a16:creationId xmlns:a16="http://schemas.microsoft.com/office/drawing/2014/main" id="{DD86FA6A-C5F7-67F9-7F4B-09D612ADBFB5}"/>
-              </a:ext>
-            </a:extLst>
-          </p:cNvPr>
-          <p:cNvCxnSpPr/>
-          <p:nvPr/>
-        </p:nvCxnSpPr>
-        <p:spPr>
-          <a:xfrm flipH="1">
-            <a:off x="7268295" y="3052004"/>
-            <a:ext cx="341583" cy="0"/>
-          </a:xfrm>
-          <a:prstGeom prst="straightConnector1">
-            <a:avLst/>
-          </a:prstGeom>
-          <a:ln>
-            <a:tailEnd type="triangle"/>
-          </a:ln>
-        </p:spPr>
-        <p:style>
-          <a:lnRef idx="3">
-            <a:schemeClr val="dk1"/>
-          </a:lnRef>
-          <a:fillRef idx="0">
-            <a:schemeClr val="dk1"/>
-          </a:fillRef>
-          <a:effectRef idx="2">
-            <a:schemeClr val="dk1"/>
-          </a:effectRef>
-          <a:fontRef idx="minor">
-            <a:schemeClr val="tx1"/>
-          </a:fontRef>
-        </p:style>
-      </p:cxnSp>
-      <p:cxnSp>
-        <p:nvCxnSpPr>
-          <p:cNvPr id="67" name="Straight Arrow Connector 66">
-            <a:extLst>
-              <a:ext uri="{FF2B5EF4-FFF2-40B4-BE49-F238E27FC236}">
-                <a16:creationId xmlns:a16="http://schemas.microsoft.com/office/drawing/2014/main" id="{8FF0BDFC-8AE7-924D-F2E2-A166BBA8BBDD}"/>
-              </a:ext>
-            </a:extLst>
-          </p:cNvPr>
-          <p:cNvCxnSpPr/>
-          <p:nvPr/>
-        </p:nvCxnSpPr>
-        <p:spPr>
-          <a:xfrm>
-            <a:off x="4296534" y="3941322"/>
-            <a:ext cx="570112" cy="12433"/>
-          </a:xfrm>
-          <a:prstGeom prst="straightConnector1">
-            <a:avLst/>
-          </a:prstGeom>
-          <a:ln>
-            <a:tailEnd type="triangle"/>
-          </a:ln>
-        </p:spPr>
-        <p:style>
-          <a:lnRef idx="3">
-            <a:schemeClr val="dk1"/>
-          </a:lnRef>
-          <a:fillRef idx="0">
-            <a:schemeClr val="dk1"/>
-          </a:fillRef>
-          <a:effectRef idx="2">
-            <a:schemeClr val="dk1"/>
-          </a:effectRef>
-          <a:fontRef idx="minor">
-            <a:schemeClr val="tx1"/>
-          </a:fontRef>
-        </p:style>
-      </p:cxnSp>
-      <p:cxnSp>
-        <p:nvCxnSpPr>
-          <p:cNvPr id="68" name="Straight Arrow Connector 67">
-            <a:extLst>
-              <a:ext uri="{FF2B5EF4-FFF2-40B4-BE49-F238E27FC236}">
-                <a16:creationId xmlns:a16="http://schemas.microsoft.com/office/drawing/2014/main" id="{8FF1D203-6FA9-71BF-39C8-379B1FC30E5B}"/>
-              </a:ext>
-            </a:extLst>
-          </p:cNvPr>
-          <p:cNvCxnSpPr/>
-          <p:nvPr/>
-        </p:nvCxnSpPr>
-        <p:spPr>
-          <a:xfrm flipH="1" flipV="1">
-            <a:off x="7009724" y="3995871"/>
-            <a:ext cx="618513" cy="7881"/>
-          </a:xfrm>
-          <a:prstGeom prst="straightConnector1">
-            <a:avLst/>
-          </a:prstGeom>
-          <a:ln>
-            <a:tailEnd type="triangle"/>
-          </a:ln>
-        </p:spPr>
-        <p:style>
-          <a:lnRef idx="3">
-            <a:schemeClr val="dk1"/>
-          </a:lnRef>
-          <a:fillRef idx="0">
-            <a:schemeClr val="dk1"/>
-          </a:fillRef>
-          <a:effectRef idx="2">
-            <a:schemeClr val="dk1"/>
-          </a:effectRef>
-          <a:fontRef idx="minor">
-            <a:schemeClr val="tx1"/>
-          </a:fontRef>
-        </p:style>
-      </p:cxnSp>
-      <p:cxnSp>
-        <p:nvCxnSpPr>
-          <p:cNvPr id="69" name="Elbow Connector 68">
-            <a:extLst>
-              <a:ext uri="{FF2B5EF4-FFF2-40B4-BE49-F238E27FC236}">
-                <a16:creationId xmlns:a16="http://schemas.microsoft.com/office/drawing/2014/main" id="{D1DB669F-32E3-C6AC-8924-58D920610058}"/>
-              </a:ext>
-            </a:extLst>
-          </p:cNvPr>
-          <p:cNvCxnSpPr/>
-          <p:nvPr/>
-        </p:nvCxnSpPr>
-        <p:spPr>
-          <a:xfrm flipV="1">
-            <a:off x="4296053" y="3963112"/>
-            <a:ext cx="1400247" cy="567633"/>
-          </a:xfrm>
-          <a:prstGeom prst="bentConnector3">
-            <a:avLst>
-              <a:gd name="adj1" fmla="val 83332"/>
-            </a:avLst>
-          </a:prstGeom>
-          <a:ln>
-            <a:tailEnd type="triangle"/>
-          </a:ln>
-        </p:spPr>
-        <p:style>
-          <a:lnRef idx="3">
-            <a:schemeClr val="dk1"/>
-          </a:lnRef>
-          <a:fillRef idx="0">
-            <a:schemeClr val="dk1"/>
-          </a:fillRef>
-          <a:effectRef idx="2">
-            <a:schemeClr val="dk1"/>
-          </a:effectRef>
-          <a:fontRef idx="minor">
-            <a:schemeClr val="tx1"/>
-          </a:fontRef>
-        </p:style>
-      </p:cxnSp>
-      <p:cxnSp>
-        <p:nvCxnSpPr>
-          <p:cNvPr id="73" name="Straight Arrow Connector 72">
-            <a:extLst>
-              <a:ext uri="{FF2B5EF4-FFF2-40B4-BE49-F238E27FC236}">
-                <a16:creationId xmlns:a16="http://schemas.microsoft.com/office/drawing/2014/main" id="{94F4A710-D45A-1E5E-8D7B-533C052D700D}"/>
-              </a:ext>
-            </a:extLst>
-          </p:cNvPr>
-          <p:cNvCxnSpPr>
-            <a:cxnSpLocks/>
-          </p:cNvCxnSpPr>
-          <p:nvPr/>
-        </p:nvCxnSpPr>
-        <p:spPr>
-          <a:xfrm flipH="1" flipV="1">
-            <a:off x="7325161" y="4614946"/>
-            <a:ext cx="148574" cy="280351"/>
-          </a:xfrm>
-          <a:prstGeom prst="straightConnector1">
-            <a:avLst/>
-          </a:prstGeom>
-          <a:ln>
-            <a:tailEnd type="triangle"/>
-          </a:ln>
-        </p:spPr>
-        <p:style>
-          <a:lnRef idx="3">
-            <a:schemeClr val="dk1"/>
-          </a:lnRef>
-          <a:fillRef idx="0">
-            <a:schemeClr val="dk1"/>
-          </a:fillRef>
-          <a:effectRef idx="2">
-            <a:schemeClr val="dk1"/>
-          </a:effectRef>
-          <a:fontRef idx="minor">
-            <a:schemeClr val="tx1"/>
-          </a:fontRef>
-        </p:style>
-      </p:cxnSp>
-      <p:sp>
-        <p:nvSpPr>
-          <p:cNvPr id="74" name="Rectangle 73">
-            <a:extLst>
-              <a:ext uri="{FF2B5EF4-FFF2-40B4-BE49-F238E27FC236}">
-                <a16:creationId xmlns:a16="http://schemas.microsoft.com/office/drawing/2014/main" id="{806D8746-ECC7-8597-7FB4-C2415674EF43}"/>
-              </a:ext>
-            </a:extLst>
-          </p:cNvPr>
-          <p:cNvSpPr/>
-          <p:nvPr/>
-        </p:nvSpPr>
-        <p:spPr>
-          <a:xfrm>
-            <a:off x="6552370" y="5938345"/>
-            <a:ext cx="4682530" cy="815859"/>
-          </a:xfrm>
-          <a:prstGeom prst="rect">
-            <a:avLst/>
-          </a:prstGeom>
-        </p:spPr>
-        <p:style>
-          <a:lnRef idx="2">
-            <a:schemeClr val="dk1">
-              <a:shade val="50000"/>
-            </a:schemeClr>
-          </a:lnRef>
-          <a:fillRef idx="1001">
-            <a:schemeClr val="dk2"/>
-          </a:fillRef>
-          <a:effectRef idx="0">
-            <a:schemeClr val="dk1"/>
-          </a:effectRef>
-          <a:fontRef idx="minor">
-            <a:schemeClr val="lt1"/>
-          </a:fontRef>
-        </p:style>
-        <p:txBody>
-          <a:bodyPr rtlCol="0" anchor="ctr"/>
-          <a:lstStyle/>
-          <a:p>
-            <a:r>
-              <a:rPr lang="en-US" sz="1600" b="1" dirty="0">
-                <a:solidFill>
-                  <a:schemeClr val="bg1"/>
-                </a:solidFill>
-              </a:rPr>
-              <a:t>Right Footswitch: Tap Tempo, or next sequencer step when in stepped mode. Hold to temporarily move Regen to max, “self oscillation runaway mode”.</a:t>
-            </a:r>
-          </a:p>
-        </p:txBody>
-      </p:sp>
-      <p:sp>
-        <p:nvSpPr>
-          <p:cNvPr id="2" name="TextBox 1">
-            <a:extLst>
-              <a:ext uri="{FF2B5EF4-FFF2-40B4-BE49-F238E27FC236}">
-                <a16:creationId xmlns:a16="http://schemas.microsoft.com/office/drawing/2014/main" id="{BD722E89-B277-999A-1CB4-B79680F1F0A0}"/>
-              </a:ext>
-            </a:extLst>
-          </p:cNvPr>
-          <p:cNvSpPr txBox="1"/>
-          <p:nvPr/>
-        </p:nvSpPr>
-        <p:spPr>
-          <a:xfrm rot="16200000">
-            <a:off x="5704861" y="4085846"/>
-            <a:ext cx="559769" cy="461665"/>
-          </a:xfrm>
-          <a:prstGeom prst="rect">
-            <a:avLst/>
-          </a:prstGeom>
-          <a:noFill/>
-        </p:spPr>
-        <p:txBody>
-          <a:bodyPr wrap="none" rtlCol="0">
-            <a:spAutoFit/>
-          </a:bodyPr>
-          <a:lstStyle/>
-          <a:p>
-            <a:pPr algn="ctr"/>
-            <a:r>
-              <a:rPr lang="en-US" sz="800" b="1" dirty="0">
-                <a:latin typeface="Century Gothic" panose="020B0502020202020204" pitchFamily="34" charset="0"/>
-                <a:cs typeface="Adobe Devanagari" panose="02040503050201020203" pitchFamily="18" charset="0"/>
-              </a:rPr>
-              <a:t>Quarter</a:t>
-            </a:r>
-          </a:p>
-          <a:p>
-            <a:pPr algn="ctr"/>
-            <a:r>
-              <a:rPr lang="en-US" sz="800" b="1" dirty="0">
-                <a:latin typeface="Century Gothic" panose="020B0502020202020204" pitchFamily="34" charset="0"/>
-                <a:cs typeface="Adobe Devanagari" panose="02040503050201020203" pitchFamily="18" charset="0"/>
-              </a:rPr>
-              <a:t>Dot 8</a:t>
-            </a:r>
-            <a:r>
-              <a:rPr lang="en-US" sz="800" b="1" baseline="30000" dirty="0">
-                <a:latin typeface="Century Gothic" panose="020B0502020202020204" pitchFamily="34" charset="0"/>
-                <a:cs typeface="Adobe Devanagari" panose="02040503050201020203" pitchFamily="18" charset="0"/>
-              </a:rPr>
-              <a:t>th</a:t>
-            </a:r>
-            <a:endParaRPr lang="en-US" sz="800" b="1" dirty="0">
-              <a:latin typeface="Century Gothic" panose="020B0502020202020204" pitchFamily="34" charset="0"/>
-              <a:cs typeface="Adobe Devanagari" panose="02040503050201020203" pitchFamily="18" charset="0"/>
-            </a:endParaRPr>
-          </a:p>
-          <a:p>
-            <a:pPr algn="ctr"/>
-            <a:r>
-              <a:rPr lang="en-US" sz="800" b="1" dirty="0">
-                <a:latin typeface="Century Gothic" panose="020B0502020202020204" pitchFamily="34" charset="0"/>
-                <a:cs typeface="Adobe Devanagari" panose="02040503050201020203" pitchFamily="18" charset="0"/>
-              </a:rPr>
-              <a:t>8th</a:t>
-            </a:r>
-          </a:p>
-        </p:txBody>
-      </p:sp>
-      <p:sp>
-        <p:nvSpPr>
-          <p:cNvPr id="3" name="TextBox 2">
-            <a:extLst>
-              <a:ext uri="{FF2B5EF4-FFF2-40B4-BE49-F238E27FC236}">
-                <a16:creationId xmlns:a16="http://schemas.microsoft.com/office/drawing/2014/main" id="{37DED741-3D5E-FA61-B154-BE61C360D14B}"/>
-              </a:ext>
-            </a:extLst>
-          </p:cNvPr>
-          <p:cNvSpPr txBox="1"/>
-          <p:nvPr/>
-        </p:nvSpPr>
-        <p:spPr>
-          <a:xfrm rot="16200000">
-            <a:off x="6516028" y="4088947"/>
-            <a:ext cx="559769" cy="461665"/>
-          </a:xfrm>
-          <a:prstGeom prst="rect">
-            <a:avLst/>
-          </a:prstGeom>
-          <a:noFill/>
-        </p:spPr>
-        <p:txBody>
-          <a:bodyPr wrap="none" rtlCol="0">
-            <a:spAutoFit/>
-          </a:bodyPr>
-          <a:lstStyle/>
-          <a:p>
-            <a:pPr algn="ctr"/>
-            <a:r>
-              <a:rPr lang="en-US" sz="800" b="1" dirty="0">
-                <a:latin typeface="Century Gothic" panose="020B0502020202020204" pitchFamily="34" charset="0"/>
-                <a:cs typeface="Adobe Devanagari" panose="02040503050201020203" pitchFamily="18" charset="0"/>
-              </a:rPr>
-              <a:t>Quarter</a:t>
-            </a:r>
-          </a:p>
-          <a:p>
-            <a:pPr algn="ctr"/>
-            <a:r>
-              <a:rPr lang="en-US" sz="800" b="1" dirty="0">
-                <a:latin typeface="Century Gothic" panose="020B0502020202020204" pitchFamily="34" charset="0"/>
-                <a:cs typeface="Adobe Devanagari" panose="02040503050201020203" pitchFamily="18" charset="0"/>
-              </a:rPr>
-              <a:t>Dot 8</a:t>
-            </a:r>
-            <a:r>
-              <a:rPr lang="en-US" sz="800" b="1" baseline="30000" dirty="0">
-                <a:latin typeface="Century Gothic" panose="020B0502020202020204" pitchFamily="34" charset="0"/>
-                <a:cs typeface="Adobe Devanagari" panose="02040503050201020203" pitchFamily="18" charset="0"/>
-              </a:rPr>
-              <a:t>th</a:t>
-            </a:r>
-            <a:endParaRPr lang="en-US" sz="800" b="1" dirty="0">
-              <a:latin typeface="Century Gothic" panose="020B0502020202020204" pitchFamily="34" charset="0"/>
-              <a:cs typeface="Adobe Devanagari" panose="02040503050201020203" pitchFamily="18" charset="0"/>
-            </a:endParaRPr>
-          </a:p>
-          <a:p>
-            <a:pPr algn="ctr"/>
-            <a:r>
-              <a:rPr lang="en-US" sz="800" b="1" dirty="0">
-                <a:latin typeface="Century Gothic" panose="020B0502020202020204" pitchFamily="34" charset="0"/>
-                <a:cs typeface="Adobe Devanagari" panose="02040503050201020203" pitchFamily="18" charset="0"/>
-              </a:rPr>
-              <a:t>8th</a:t>
-            </a:r>
-          </a:p>
-        </p:txBody>
-      </p:sp>
-      <p:sp>
-        <p:nvSpPr>
-          <p:cNvPr id="46" name="Rectangle 45">
-            <a:extLst>
-              <a:ext uri="{FF2B5EF4-FFF2-40B4-BE49-F238E27FC236}">
-                <a16:creationId xmlns:a16="http://schemas.microsoft.com/office/drawing/2014/main" id="{3D7D1069-B38E-8193-2973-07F9963C3EE4}"/>
-              </a:ext>
-            </a:extLst>
-          </p:cNvPr>
-          <p:cNvSpPr/>
-          <p:nvPr/>
-        </p:nvSpPr>
-        <p:spPr>
-          <a:xfrm>
-            <a:off x="429604" y="4432782"/>
-            <a:ext cx="3873298" cy="1164289"/>
-          </a:xfrm>
-          <a:prstGeom prst="rect">
-            <a:avLst/>
-          </a:prstGeom>
-        </p:spPr>
-        <p:style>
-          <a:lnRef idx="2">
-            <a:schemeClr val="dk1">
-              <a:shade val="50000"/>
-            </a:schemeClr>
-          </a:lnRef>
-          <a:fillRef idx="1003">
-            <a:schemeClr val="dk1"/>
-          </a:fillRef>
-          <a:effectRef idx="0">
-            <a:schemeClr val="dk1"/>
-          </a:effectRef>
-          <a:fontRef idx="minor">
-            <a:schemeClr val="lt1"/>
-          </a:fontRef>
-        </p:style>
-        <p:txBody>
-          <a:bodyPr rtlCol="0" anchor="ctr"/>
-          <a:lstStyle/>
-          <a:p>
-            <a:r>
-              <a:rPr lang="en-US" sz="1600" b="1" dirty="0">
-                <a:solidFill>
-                  <a:schemeClr val="bg1"/>
-                </a:solidFill>
-              </a:rPr>
-              <a:t>INT 1 Step Length</a:t>
-            </a:r>
-          </a:p>
-          <a:p>
-            <a:r>
-              <a:rPr lang="en-US" sz="1600" b="1" dirty="0">
-                <a:solidFill>
-                  <a:schemeClr val="bg1"/>
-                </a:solidFill>
-              </a:rPr>
-              <a:t>  Left: Quarter Note (Same as Tap Tempo)</a:t>
-            </a:r>
-          </a:p>
-          <a:p>
-            <a:r>
-              <a:rPr lang="en-US" sz="1600" b="1" dirty="0">
-                <a:solidFill>
-                  <a:schemeClr val="bg1"/>
-                </a:solidFill>
-              </a:rPr>
-              <a:t>  Center: Dotted Eighth Note</a:t>
-            </a:r>
-          </a:p>
-          <a:p>
-            <a:r>
-              <a:rPr lang="en-US" sz="1600" b="1" dirty="0">
-                <a:solidFill>
-                  <a:schemeClr val="bg1"/>
-                </a:solidFill>
-              </a:rPr>
-              <a:t>  Right:  Eighth Note</a:t>
-            </a:r>
-          </a:p>
-        </p:txBody>
-      </p:sp>
-      <p:sp>
-        <p:nvSpPr>
-          <p:cNvPr id="48" name="Rectangle 47">
-            <a:extLst>
-              <a:ext uri="{FF2B5EF4-FFF2-40B4-BE49-F238E27FC236}">
-                <a16:creationId xmlns:a16="http://schemas.microsoft.com/office/drawing/2014/main" id="{410438DA-BE33-8AD0-971E-DC4175FD8060}"/>
-              </a:ext>
-            </a:extLst>
-          </p:cNvPr>
-          <p:cNvSpPr/>
-          <p:nvPr/>
-        </p:nvSpPr>
-        <p:spPr>
-          <a:xfrm>
-            <a:off x="7622804" y="3574857"/>
-            <a:ext cx="3826990" cy="1075966"/>
-          </a:xfrm>
-          <a:prstGeom prst="rect">
-            <a:avLst/>
-          </a:prstGeom>
-        </p:spPr>
-        <p:style>
-          <a:lnRef idx="2">
-            <a:schemeClr val="dk1">
-              <a:shade val="50000"/>
-            </a:schemeClr>
-          </a:lnRef>
-          <a:fillRef idx="1003">
-            <a:schemeClr val="dk1"/>
-          </a:fillRef>
-          <a:effectRef idx="0">
-            <a:schemeClr val="dk1"/>
-          </a:effectRef>
-          <a:fontRef idx="minor">
-            <a:schemeClr val="lt1"/>
-          </a:fontRef>
-        </p:style>
-        <p:txBody>
-          <a:bodyPr rtlCol="0" anchor="ctr"/>
-          <a:lstStyle/>
-          <a:p>
-            <a:r>
-              <a:rPr lang="en-US" sz="1600" b="1" dirty="0">
-                <a:solidFill>
-                  <a:schemeClr val="bg1"/>
-                </a:solidFill>
-              </a:rPr>
-              <a:t>INT 2 Step Length</a:t>
-            </a:r>
-          </a:p>
-          <a:p>
-            <a:r>
-              <a:rPr lang="en-US" sz="1600" b="1" dirty="0">
-                <a:solidFill>
-                  <a:schemeClr val="bg1"/>
-                </a:solidFill>
-              </a:rPr>
-              <a:t>  Left: Quarter Note (Same as Tap Tempo)</a:t>
-            </a:r>
-          </a:p>
-          <a:p>
-            <a:r>
-              <a:rPr lang="en-US" sz="1600" b="1" dirty="0">
-                <a:solidFill>
-                  <a:schemeClr val="bg1"/>
-                </a:solidFill>
-              </a:rPr>
-              <a:t>  Center: Dotted Eighth Note</a:t>
-            </a:r>
-          </a:p>
-          <a:p>
-            <a:r>
-              <a:rPr lang="en-US" sz="1600" b="1" dirty="0">
-                <a:solidFill>
-                  <a:schemeClr val="bg1"/>
-                </a:solidFill>
-              </a:rPr>
-              <a:t>  Right:  Eighth Note</a:t>
-            </a:r>
-          </a:p>
-        </p:txBody>
-      </p:sp>
-      <p:sp>
-        <p:nvSpPr>
-          <p:cNvPr id="52" name="Rectangle 51">
-            <a:extLst>
-              <a:ext uri="{FF2B5EF4-FFF2-40B4-BE49-F238E27FC236}">
-                <a16:creationId xmlns:a16="http://schemas.microsoft.com/office/drawing/2014/main" id="{C6B5AD47-6CC9-C3F7-F394-51ABB75A24BD}"/>
-              </a:ext>
-            </a:extLst>
-          </p:cNvPr>
-          <p:cNvSpPr/>
-          <p:nvPr/>
-        </p:nvSpPr>
-        <p:spPr>
-          <a:xfrm>
-            <a:off x="7218671" y="4347300"/>
-            <a:ext cx="45719" cy="303523"/>
-          </a:xfrm>
-          <a:prstGeom prst="rect">
-            <a:avLst/>
-          </a:prstGeom>
-        </p:spPr>
-        <p:style>
-          <a:lnRef idx="2">
-            <a:schemeClr val="accent1">
-              <a:shade val="50000"/>
-            </a:schemeClr>
-          </a:lnRef>
-          <a:fillRef idx="1">
-            <a:schemeClr val="accent1"/>
-          </a:fillRef>
-          <a:effectRef idx="0">
-            <a:schemeClr val="accent1"/>
-          </a:effectRef>
-          <a:fontRef idx="minor">
-            <a:schemeClr val="lt1"/>
-          </a:fontRef>
-        </p:style>
-        <p:txBody>
-          <a:bodyPr rtlCol="0" anchor="ctr"/>
-          <a:lstStyle/>
-          <a:p>
-            <a:pPr algn="ctr"/>
-            <a:endParaRPr lang="en-US"/>
-          </a:p>
-        </p:txBody>
-      </p:sp>
-      <p:sp>
-        <p:nvSpPr>
-          <p:cNvPr id="53" name="Rectangle 52">
-            <a:extLst>
-              <a:ext uri="{FF2B5EF4-FFF2-40B4-BE49-F238E27FC236}">
-                <a16:creationId xmlns:a16="http://schemas.microsoft.com/office/drawing/2014/main" id="{5240BB4E-E046-DE8E-A7F1-337BDDE9C385}"/>
-              </a:ext>
-            </a:extLst>
-          </p:cNvPr>
-          <p:cNvSpPr/>
-          <p:nvPr/>
-        </p:nvSpPr>
-        <p:spPr>
-          <a:xfrm>
-            <a:off x="7251396" y="4431786"/>
-            <a:ext cx="45719" cy="45719"/>
-          </a:xfrm>
-          <a:prstGeom prst="rect">
-            <a:avLst/>
-          </a:prstGeom>
-        </p:spPr>
-        <p:style>
-          <a:lnRef idx="2">
-            <a:schemeClr val="dk1"/>
-          </a:lnRef>
-          <a:fillRef idx="1">
-            <a:schemeClr val="lt1"/>
-          </a:fillRef>
-          <a:effectRef idx="0">
-            <a:schemeClr val="dk1"/>
-          </a:effectRef>
-          <a:fontRef idx="minor">
-            <a:schemeClr val="dk1"/>
-          </a:fontRef>
-        </p:style>
-        <p:txBody>
-          <a:bodyPr rtlCol="0" anchor="ctr"/>
-          <a:lstStyle/>
-          <a:p>
-            <a:pPr algn="ctr"/>
-            <a:endParaRPr lang="en-US"/>
-          </a:p>
-        </p:txBody>
-      </p:sp>
-      <p:sp>
-        <p:nvSpPr>
-          <p:cNvPr id="54" name="Rectangle 53">
-            <a:extLst>
-              <a:ext uri="{FF2B5EF4-FFF2-40B4-BE49-F238E27FC236}">
-                <a16:creationId xmlns:a16="http://schemas.microsoft.com/office/drawing/2014/main" id="{7F8781D8-88F4-1B7F-F2B7-CC4644C2517E}"/>
-              </a:ext>
-            </a:extLst>
-          </p:cNvPr>
-          <p:cNvSpPr/>
-          <p:nvPr/>
-        </p:nvSpPr>
-        <p:spPr>
-          <a:xfrm>
-            <a:off x="7252683" y="4504799"/>
-            <a:ext cx="45719" cy="45719"/>
-          </a:xfrm>
-          <a:prstGeom prst="rect">
-            <a:avLst/>
-          </a:prstGeom>
-        </p:spPr>
-        <p:style>
-          <a:lnRef idx="2">
-            <a:schemeClr val="dk1"/>
-          </a:lnRef>
-          <a:fillRef idx="1">
-            <a:schemeClr val="lt1"/>
-          </a:fillRef>
-          <a:effectRef idx="0">
-            <a:schemeClr val="dk1"/>
-          </a:effectRef>
-          <a:fontRef idx="minor">
-            <a:schemeClr val="dk1"/>
-          </a:fontRef>
-        </p:style>
-        <p:txBody>
-          <a:bodyPr rtlCol="0" anchor="ctr"/>
-          <a:lstStyle/>
-          <a:p>
-            <a:pPr algn="ctr"/>
-            <a:endParaRPr lang="en-US"/>
-          </a:p>
-        </p:txBody>
-      </p:sp>
-      <p:sp>
-        <p:nvSpPr>
-          <p:cNvPr id="62" name="Rectangle 61">
-            <a:extLst>
-              <a:ext uri="{FF2B5EF4-FFF2-40B4-BE49-F238E27FC236}">
-                <a16:creationId xmlns:a16="http://schemas.microsoft.com/office/drawing/2014/main" id="{43BBE5BD-E540-18E9-9C32-2E7B337C1D34}"/>
-              </a:ext>
-            </a:extLst>
-          </p:cNvPr>
-          <p:cNvSpPr/>
-          <p:nvPr/>
-        </p:nvSpPr>
-        <p:spPr>
-          <a:xfrm>
-            <a:off x="7251396" y="4585442"/>
-            <a:ext cx="45719" cy="45719"/>
-          </a:xfrm>
-          <a:prstGeom prst="rect">
-            <a:avLst/>
-          </a:prstGeom>
-        </p:spPr>
-        <p:style>
-          <a:lnRef idx="2">
-            <a:schemeClr val="dk1"/>
-          </a:lnRef>
-          <a:fillRef idx="1">
-            <a:schemeClr val="lt1"/>
-          </a:fillRef>
-          <a:effectRef idx="0">
-            <a:schemeClr val="dk1"/>
-          </a:effectRef>
-          <a:fontRef idx="minor">
-            <a:schemeClr val="dk1"/>
-          </a:fontRef>
-        </p:style>
-        <p:txBody>
-          <a:bodyPr rtlCol="0" anchor="ctr"/>
-          <a:lstStyle/>
-          <a:p>
-            <a:pPr algn="ctr"/>
-            <a:endParaRPr lang="en-US"/>
-          </a:p>
-        </p:txBody>
-      </p:sp>
-      <p:sp>
-        <p:nvSpPr>
-          <p:cNvPr id="75" name="Rectangle 74">
-            <a:extLst>
-              <a:ext uri="{FF2B5EF4-FFF2-40B4-BE49-F238E27FC236}">
-                <a16:creationId xmlns:a16="http://schemas.microsoft.com/office/drawing/2014/main" id="{F26567BC-EF18-5686-6D41-8F005E976D91}"/>
-              </a:ext>
-            </a:extLst>
-          </p:cNvPr>
-          <p:cNvSpPr/>
-          <p:nvPr/>
-        </p:nvSpPr>
-        <p:spPr>
-          <a:xfrm>
-            <a:off x="7251396" y="4358774"/>
-            <a:ext cx="45719" cy="45719"/>
-          </a:xfrm>
-          <a:prstGeom prst="rect">
-            <a:avLst/>
-          </a:prstGeom>
-        </p:spPr>
-        <p:style>
-          <a:lnRef idx="2">
-            <a:schemeClr val="dk1"/>
-          </a:lnRef>
-          <a:fillRef idx="1">
-            <a:schemeClr val="lt1"/>
-          </a:fillRef>
-          <a:effectRef idx="0">
-            <a:schemeClr val="dk1"/>
-          </a:effectRef>
-          <a:fontRef idx="minor">
-            <a:schemeClr val="dk1"/>
-          </a:fontRef>
-        </p:style>
-        <p:txBody>
-          <a:bodyPr rtlCol="0" anchor="ctr"/>
-          <a:lstStyle/>
-          <a:p>
-            <a:pPr algn="ctr"/>
-            <a:endParaRPr lang="en-US"/>
+              <a:t>Digital Bypass only</a:t>
+            </a:r>
           </a:p>
         </p:txBody>
       </p:sp>
     </p:spTree>
     <p:extLst>
       <p:ext uri="{BB962C8B-B14F-4D97-AF65-F5344CB8AC3E}">
-        <p14:creationId xmlns:p14="http://schemas.microsoft.com/office/powerpoint/2010/main" val="4288871490"/>
+        <p14:creationId xmlns:p14="http://schemas.microsoft.com/office/powerpoint/2010/main" val="2803695047"/>
       </p:ext>
     </p:extLst>
   </p:cSld>
